--- a/deliverables/CycleTwin_pitch_deck.pptx
+++ b/deliverables/CycleTwin_pitch_deck.pptx
@@ -2,31 +2,31 @@
 <file path=ppt/presentation.xml><?xml version="1.0" encoding="utf-8"?>
 <p:presentation xmlns:p="http://schemas.openxmlformats.org/presentationml/2006/main">
   <p:sldMasterIdLst>
-    <p:sldMasterId xmlns:r="http://schemas.openxmlformats.org/officeDocument/2006/relationships" id="2147483648" r:id="Re790b2d2a1a24979"/>
+    <p:sldMasterId xmlns:r="http://schemas.openxmlformats.org/officeDocument/2006/relationships" id="2147483648" r:id="R5a4f0b75980f426a"/>
   </p:sldMasterIdLst>
   <p:notesMasterIdLst>
-    <p:notesMasterId xmlns:r="http://schemas.openxmlformats.org/officeDocument/2006/relationships" r:id="R89f3a1a8781d47a8"/>
+    <p:notesMasterId xmlns:r="http://schemas.openxmlformats.org/officeDocument/2006/relationships" r:id="Rc6478a51685648fd"/>
   </p:notesMasterIdLst>
   <p:sldIdLst>
-    <p:sldId xmlns:r="http://schemas.openxmlformats.org/officeDocument/2006/relationships" id="256" r:id="Rb0b7e865ad584441"/>
-    <p:sldId xmlns:r="http://schemas.openxmlformats.org/officeDocument/2006/relationships" id="257" r:id="Rf3b077f8c8f74acf"/>
-    <p:sldId xmlns:r="http://schemas.openxmlformats.org/officeDocument/2006/relationships" id="258" r:id="R6f3aabea6f604271"/>
-    <p:sldId xmlns:r="http://schemas.openxmlformats.org/officeDocument/2006/relationships" id="259" r:id="Ra4b724e346274e62"/>
-    <p:sldId xmlns:r="http://schemas.openxmlformats.org/officeDocument/2006/relationships" id="260" r:id="Ra4a0e8941d3b4559"/>
-    <p:sldId xmlns:r="http://schemas.openxmlformats.org/officeDocument/2006/relationships" id="261" r:id="Rc69a52ad8b944264"/>
-    <p:sldId xmlns:r="http://schemas.openxmlformats.org/officeDocument/2006/relationships" id="262" r:id="R7a3cc8bd5ab243d7"/>
-    <p:sldId xmlns:r="http://schemas.openxmlformats.org/officeDocument/2006/relationships" id="263" r:id="R4e421a0a1e324b5e"/>
-    <p:sldId xmlns:r="http://schemas.openxmlformats.org/officeDocument/2006/relationships" id="264" r:id="R5a03459252ce4442"/>
-    <p:sldId xmlns:r="http://schemas.openxmlformats.org/officeDocument/2006/relationships" id="265" r:id="Rcee5332784374974"/>
-    <p:sldId xmlns:r="http://schemas.openxmlformats.org/officeDocument/2006/relationships" id="266" r:id="Rd7b216f046ae453e"/>
-    <p:sldId xmlns:r="http://schemas.openxmlformats.org/officeDocument/2006/relationships" id="267" r:id="R40f40f173fd84e1f"/>
-    <p:sldId xmlns:r="http://schemas.openxmlformats.org/officeDocument/2006/relationships" id="268" r:id="R86141ba557cb4fd4"/>
-    <p:sldId xmlns:r="http://schemas.openxmlformats.org/officeDocument/2006/relationships" id="269" r:id="R816db6d482e84ddb"/>
-    <p:sldId xmlns:r="http://schemas.openxmlformats.org/officeDocument/2006/relationships" id="270" r:id="Rf6c8f2886b00436f"/>
-    <p:sldId xmlns:r="http://schemas.openxmlformats.org/officeDocument/2006/relationships" id="271" r:id="Red16a6721708408a"/>
-    <p:sldId xmlns:r="http://schemas.openxmlformats.org/officeDocument/2006/relationships" id="272" r:id="Rdab79a5ea4384517"/>
-    <p:sldId xmlns:r="http://schemas.openxmlformats.org/officeDocument/2006/relationships" id="273" r:id="Re5ee763207804ccf"/>
-    <p:sldId xmlns:r="http://schemas.openxmlformats.org/officeDocument/2006/relationships" id="274" r:id="R29b7cf357e1a48bd"/>
+    <p:sldId xmlns:r="http://schemas.openxmlformats.org/officeDocument/2006/relationships" id="256" r:id="Rdbc00f4b37ca4f93"/>
+    <p:sldId xmlns:r="http://schemas.openxmlformats.org/officeDocument/2006/relationships" id="257" r:id="R29d3cace6621486b"/>
+    <p:sldId xmlns:r="http://schemas.openxmlformats.org/officeDocument/2006/relationships" id="258" r:id="Rd7f2df4460bc43e3"/>
+    <p:sldId xmlns:r="http://schemas.openxmlformats.org/officeDocument/2006/relationships" id="259" r:id="R6c3cbe465c25474e"/>
+    <p:sldId xmlns:r="http://schemas.openxmlformats.org/officeDocument/2006/relationships" id="260" r:id="Rf3d9a312ac5c41a4"/>
+    <p:sldId xmlns:r="http://schemas.openxmlformats.org/officeDocument/2006/relationships" id="261" r:id="R9dabf320297640fd"/>
+    <p:sldId xmlns:r="http://schemas.openxmlformats.org/officeDocument/2006/relationships" id="262" r:id="R143b4554a2b44463"/>
+    <p:sldId xmlns:r="http://schemas.openxmlformats.org/officeDocument/2006/relationships" id="263" r:id="R4f374b8a6be44475"/>
+    <p:sldId xmlns:r="http://schemas.openxmlformats.org/officeDocument/2006/relationships" id="264" r:id="R47613dfc89d64960"/>
+    <p:sldId xmlns:r="http://schemas.openxmlformats.org/officeDocument/2006/relationships" id="265" r:id="R5f751f737d39492b"/>
+    <p:sldId xmlns:r="http://schemas.openxmlformats.org/officeDocument/2006/relationships" id="266" r:id="Rfdf7f69de2dc4816"/>
+    <p:sldId xmlns:r="http://schemas.openxmlformats.org/officeDocument/2006/relationships" id="267" r:id="R17b2a3885d18404d"/>
+    <p:sldId xmlns:r="http://schemas.openxmlformats.org/officeDocument/2006/relationships" id="268" r:id="R4d9d4f6037164c03"/>
+    <p:sldId xmlns:r="http://schemas.openxmlformats.org/officeDocument/2006/relationships" id="269" r:id="R3a4f909ee8c54af6"/>
+    <p:sldId xmlns:r="http://schemas.openxmlformats.org/officeDocument/2006/relationships" id="270" r:id="R7798ca70aa404f57"/>
+    <p:sldId xmlns:r="http://schemas.openxmlformats.org/officeDocument/2006/relationships" id="271" r:id="Rce317064d9004ef6"/>
+    <p:sldId xmlns:r="http://schemas.openxmlformats.org/officeDocument/2006/relationships" id="272" r:id="R5b2e9ea698754350"/>
+    <p:sldId xmlns:r="http://schemas.openxmlformats.org/officeDocument/2006/relationships" id="273" r:id="Rde53771608454a0b"/>
+    <p:sldId xmlns:r="http://schemas.openxmlformats.org/officeDocument/2006/relationships" id="274" r:id="R7c531d96d57243c8"/>
   </p:sldIdLst>
   <p:sldSz cx="12192000" cy="6858000"/>
   <p:notesSz cx="6858000" cy="9144000"/>
@@ -1767,7 +1767,7 @@
           <p:cNvPr id="3" name="Title">
             <a:extLst xmlns:a="http://schemas.openxmlformats.org/drawingml/2006/main">
               <a:ext uri="{FF2B5EF4-FFF2-40B4-BE49-F238E27FC236}">
-                <a16:creationId xmlns:a16="http://schemas.microsoft.com/office/drawing/2014/main" id="{17B7257A-5BA9-4E0B-9D6F-822778C74CDF}"/>
+                <a16:creationId xmlns:a16="http://schemas.microsoft.com/office/drawing/2014/main" id="{0DE8F080-0F1B-4BC5-8471-3BEAC183EA69}"/>
               </a:ext>
             </a:extLst>
           </p:cNvPr>
@@ -1996,7 +1996,7 @@
           <p:cNvPr id="2" name="Subtitle">
             <a:extLst xmlns:a="http://schemas.openxmlformats.org/drawingml/2006/main">
               <a:ext uri="{FF2B5EF4-FFF2-40B4-BE49-F238E27FC236}">
-                <a16:creationId xmlns:a16="http://schemas.microsoft.com/office/drawing/2014/main" id="{EA6A6414-3A23-4174-BBD7-319C6D26D2B6}"/>
+                <a16:creationId xmlns:a16="http://schemas.microsoft.com/office/drawing/2014/main" id="{E43D1B33-0290-4D9A-B28E-3855AE2E1464}"/>
               </a:ext>
             </a:extLst>
           </p:cNvPr>
@@ -2242,7 +2242,7 @@
           <p:cNvPr id="2" name="Section title">
             <a:extLst xmlns:a="http://schemas.openxmlformats.org/drawingml/2006/main">
               <a:ext uri="{FF2B5EF4-FFF2-40B4-BE49-F238E27FC236}">
-                <a16:creationId xmlns:a16="http://schemas.microsoft.com/office/drawing/2014/main" id="{8EFAD8AB-2A31-4009-B228-16FDC8748E13}"/>
+                <a16:creationId xmlns:a16="http://schemas.microsoft.com/office/drawing/2014/main" id="{B37D18E9-61D1-40F0-8F11-0E663A4ECF30}"/>
               </a:ext>
             </a:extLst>
           </p:cNvPr>
@@ -2488,7 +2488,7 @@
           <p:cNvPr id="3" name="Title">
             <a:extLst xmlns:a="http://schemas.openxmlformats.org/drawingml/2006/main">
               <a:ext uri="{FF2B5EF4-FFF2-40B4-BE49-F238E27FC236}">
-                <a16:creationId xmlns:a16="http://schemas.microsoft.com/office/drawing/2014/main" id="{3B7A3AF7-3DDF-4E15-85E2-0FD6D248DB89}"/>
+                <a16:creationId xmlns:a16="http://schemas.microsoft.com/office/drawing/2014/main" id="{72B0FF6D-E736-433D-94B3-429587D5DD5F}"/>
               </a:ext>
             </a:extLst>
           </p:cNvPr>
@@ -2717,7 +2717,7 @@
           <p:cNvPr id="2" name="Body">
             <a:extLst xmlns:a="http://schemas.openxmlformats.org/drawingml/2006/main">
               <a:ext uri="{FF2B5EF4-FFF2-40B4-BE49-F238E27FC236}">
-                <a16:creationId xmlns:a16="http://schemas.microsoft.com/office/drawing/2014/main" id="{E37C3A4A-9C89-49D0-8B14-ACB223DBCC15}"/>
+                <a16:creationId xmlns:a16="http://schemas.microsoft.com/office/drawing/2014/main" id="{9AECC10D-9DF9-4C99-A570-D38C545891BB}"/>
               </a:ext>
             </a:extLst>
           </p:cNvPr>
@@ -2963,7 +2963,7 @@
           <p:cNvPr id="4" name="Title">
             <a:extLst xmlns:a="http://schemas.openxmlformats.org/drawingml/2006/main">
               <a:ext uri="{FF2B5EF4-FFF2-40B4-BE49-F238E27FC236}">
-                <a16:creationId xmlns:a16="http://schemas.microsoft.com/office/drawing/2014/main" id="{755ADF87-B941-4C63-B6E3-7C88A7D3DED5}"/>
+                <a16:creationId xmlns:a16="http://schemas.microsoft.com/office/drawing/2014/main" id="{0BA8B68A-0F9E-41AE-BE9C-BD2A8D608CF7}"/>
               </a:ext>
             </a:extLst>
           </p:cNvPr>
@@ -3192,7 +3192,7 @@
           <p:cNvPr id="2" name="Left column">
             <a:extLst xmlns:a="http://schemas.openxmlformats.org/drawingml/2006/main">
               <a:ext uri="{FF2B5EF4-FFF2-40B4-BE49-F238E27FC236}">
-                <a16:creationId xmlns:a16="http://schemas.microsoft.com/office/drawing/2014/main" id="{5A9E02E5-C34A-4BEA-83A2-4833435EA0E1}"/>
+                <a16:creationId xmlns:a16="http://schemas.microsoft.com/office/drawing/2014/main" id="{AD93F827-ECEB-49AB-A5A6-D4611678BEBB}"/>
               </a:ext>
             </a:extLst>
           </p:cNvPr>
@@ -3421,7 +3421,7 @@
           <p:cNvPr id="3" name="Right column">
             <a:extLst xmlns:a="http://schemas.openxmlformats.org/drawingml/2006/main">
               <a:ext uri="{FF2B5EF4-FFF2-40B4-BE49-F238E27FC236}">
-                <a16:creationId xmlns:a16="http://schemas.microsoft.com/office/drawing/2014/main" id="{F72C1941-8C2C-41F4-9D4C-141B4718D525}"/>
+                <a16:creationId xmlns:a16="http://schemas.microsoft.com/office/drawing/2014/main" id="{9E28FAED-FDDF-4D84-8678-D3969BEA2F3B}"/>
               </a:ext>
             </a:extLst>
           </p:cNvPr>
@@ -3667,7 +3667,7 @@
           <p:cNvPr id="3" name="Title">
             <a:extLst xmlns:a="http://schemas.openxmlformats.org/drawingml/2006/main">
               <a:ext uri="{FF2B5EF4-FFF2-40B4-BE49-F238E27FC236}">
-                <a16:creationId xmlns:a16="http://schemas.microsoft.com/office/drawing/2014/main" id="{5CCE4DAC-B8F7-44F9-BA34-C22D408E415E}"/>
+                <a16:creationId xmlns:a16="http://schemas.microsoft.com/office/drawing/2014/main" id="{4CC49AEA-4403-4C60-974D-158707050652}"/>
               </a:ext>
             </a:extLst>
           </p:cNvPr>
@@ -3896,7 +3896,7 @@
           <p:cNvPr id="2" name="Left column">
             <a:extLst xmlns:a="http://schemas.openxmlformats.org/drawingml/2006/main">
               <a:ext uri="{FF2B5EF4-FFF2-40B4-BE49-F238E27FC236}">
-                <a16:creationId xmlns:a16="http://schemas.microsoft.com/office/drawing/2014/main" id="{2668E95D-38E8-4D92-812B-32D55A7FC736}"/>
+                <a16:creationId xmlns:a16="http://schemas.microsoft.com/office/drawing/2014/main" id="{B99B7EEA-5085-48AB-85B7-C603862BEFEB}"/>
               </a:ext>
             </a:extLst>
           </p:cNvPr>
@@ -4163,12 +4163,12 @@
   </p:cSld>
   <p:clrMap bg1="lt1" tx1="dk1" bg2="lt2" tx2="dk2" accent1="accent1" accent2="accent2" accent3="accent3" accent4="accent4" accent5="accent5" accent6="accent6" hlink="hlink" folHlink="folHlink"/>
   <p:sldLayoutIdLst>
-    <p:sldLayoutId xmlns:r="http://schemas.openxmlformats.org/officeDocument/2006/relationships" id="2147483649" r:id="Rc36698932a56470a"/>
-    <p:sldLayoutId xmlns:r="http://schemas.openxmlformats.org/officeDocument/2006/relationships" id="2147483650" r:id="Rd49742e450584047"/>
-    <p:sldLayoutId xmlns:r="http://schemas.openxmlformats.org/officeDocument/2006/relationships" id="2147483651" r:id="R32b5b05ad8344d1b"/>
-    <p:sldLayoutId xmlns:r="http://schemas.openxmlformats.org/officeDocument/2006/relationships" id="2147483652" r:id="R321e015962ef4df9"/>
-    <p:sldLayoutId xmlns:r="http://schemas.openxmlformats.org/officeDocument/2006/relationships" id="2147483653" r:id="Rcb71399b5a6547b7"/>
-    <p:sldLayoutId xmlns:r="http://schemas.openxmlformats.org/officeDocument/2006/relationships" id="2147483654" r:id="R02c0a1f2378548ee"/>
+    <p:sldLayoutId xmlns:r="http://schemas.openxmlformats.org/officeDocument/2006/relationships" id="2147483649" r:id="R25f4e5d775a54faf"/>
+    <p:sldLayoutId xmlns:r="http://schemas.openxmlformats.org/officeDocument/2006/relationships" id="2147483650" r:id="R2d14a44c4f9947fe"/>
+    <p:sldLayoutId xmlns:r="http://schemas.openxmlformats.org/officeDocument/2006/relationships" id="2147483651" r:id="R0d62523a54f44d35"/>
+    <p:sldLayoutId xmlns:r="http://schemas.openxmlformats.org/officeDocument/2006/relationships" id="2147483652" r:id="Ra4b9373037764d7b"/>
+    <p:sldLayoutId xmlns:r="http://schemas.openxmlformats.org/officeDocument/2006/relationships" id="2147483653" r:id="Rbdd98e673d144d58"/>
+    <p:sldLayoutId xmlns:r="http://schemas.openxmlformats.org/officeDocument/2006/relationships" id="2147483654" r:id="Rbb900651cd9f493c"/>
   </p:sldLayoutIdLst>
   <p:txStyles>
     <p:titleStyle>
@@ -4719,7 +4719,7 @@
           <p:cNvPr id="7" name="">
             <a:extLst xmlns:a="http://schemas.openxmlformats.org/drawingml/2006/main">
               <a:ext uri="{FF2B5EF4-FFF2-40B4-BE49-F238E27FC236}">
-                <a16:creationId xmlns:a16="http://schemas.microsoft.com/office/drawing/2014/main" id="{D52D3317-ECB8-4000-83C1-B2849D8CD185}"/>
+                <a16:creationId xmlns:a16="http://schemas.microsoft.com/office/drawing/2014/main" id="{73764DE0-88D8-4168-9699-BBBFAAC114DC}"/>
               </a:ext>
             </a:extLst>
           </p:cNvPr>
@@ -4875,7 +4875,7 @@
           <p:cNvPr id="2" name="">
             <a:extLst xmlns:a="http://schemas.openxmlformats.org/drawingml/2006/main">
               <a:ext uri="{FF2B5EF4-FFF2-40B4-BE49-F238E27FC236}">
-                <a16:creationId xmlns:a16="http://schemas.microsoft.com/office/drawing/2014/main" id="{4F8C8765-D51B-4CD6-A141-3E57D8D66F22}"/>
+                <a16:creationId xmlns:a16="http://schemas.microsoft.com/office/drawing/2014/main" id="{BA001CD1-3C1D-4C4D-97F2-E465AA13A7E6}"/>
               </a:ext>
             </a:extLst>
           </p:cNvPr>
@@ -5031,7 +5031,7 @@
           <p:cNvPr id="3" name="">
             <a:extLst xmlns:a="http://schemas.openxmlformats.org/drawingml/2006/main">
               <a:ext uri="{FF2B5EF4-FFF2-40B4-BE49-F238E27FC236}">
-                <a16:creationId xmlns:a16="http://schemas.microsoft.com/office/drawing/2014/main" id="{E459AAA9-2D7B-4439-A466-692B543B7BC6}"/>
+                <a16:creationId xmlns:a16="http://schemas.microsoft.com/office/drawing/2014/main" id="{7AA401E0-7723-426C-8DDB-F9C19D691144}"/>
               </a:ext>
             </a:extLst>
           </p:cNvPr>
@@ -5187,7 +5187,7 @@
           <p:cNvPr id="4" name="">
             <a:extLst xmlns:a="http://schemas.openxmlformats.org/drawingml/2006/main">
               <a:ext uri="{FF2B5EF4-FFF2-40B4-BE49-F238E27FC236}">
-                <a16:creationId xmlns:a16="http://schemas.microsoft.com/office/drawing/2014/main" id="{E538590D-F0D3-43E0-94D4-89CD5439489A}"/>
+                <a16:creationId xmlns:a16="http://schemas.microsoft.com/office/drawing/2014/main" id="{B7133908-38FA-4FE1-B8C4-A6F99CC04D34}"/>
               </a:ext>
             </a:extLst>
           </p:cNvPr>
@@ -5343,7 +5343,7 @@
           <p:cNvPr id="5" name="">
             <a:extLst xmlns:a="http://schemas.openxmlformats.org/drawingml/2006/main">
               <a:ext uri="{FF2B5EF4-FFF2-40B4-BE49-F238E27FC236}">
-                <a16:creationId xmlns:a16="http://schemas.microsoft.com/office/drawing/2014/main" id="{DD5A67B1-19E7-49A5-867D-B9C53ADE9633}"/>
+                <a16:creationId xmlns:a16="http://schemas.microsoft.com/office/drawing/2014/main" id="{D79499C3-03FA-450F-8FBA-BDBC47F2AB5E}"/>
               </a:ext>
             </a:extLst>
           </p:cNvPr>
@@ -5499,7 +5499,7 @@
           <p:cNvPr id="6" name="">
             <a:extLst xmlns:a="http://schemas.openxmlformats.org/drawingml/2006/main">
               <a:ext uri="{FF2B5EF4-FFF2-40B4-BE49-F238E27FC236}">
-                <a16:creationId xmlns:a16="http://schemas.microsoft.com/office/drawing/2014/main" id="{A4215865-1D78-45E4-8C57-F334544778C9}"/>
+                <a16:creationId xmlns:a16="http://schemas.microsoft.com/office/drawing/2014/main" id="{6F0864C1-51A1-46AD-9993-CF52FE0EFE28}"/>
               </a:ext>
             </a:extLst>
           </p:cNvPr>
@@ -5653,7 +5653,7 @@
     </p:spTree>
     <p:extLst>
       <p:ext uri="{BB962C8B-B14F-4D97-AF65-F5344CB8AC3E}">
-        <p14:creationId xmlns:p14="http://schemas.microsoft.com/office/powerpoint/2010/main" val="164630684"/>
+        <p14:creationId xmlns:p14="http://schemas.microsoft.com/office/powerpoint/2010/main" val="569337618"/>
       </p:ext>
     </p:extLst>
   </p:cSld>
@@ -5684,7 +5684,7 @@
           <p:cNvPr id="5" name="">
             <a:extLst xmlns:a="http://schemas.openxmlformats.org/drawingml/2006/main">
               <a:ext uri="{FF2B5EF4-FFF2-40B4-BE49-F238E27FC236}">
-                <a16:creationId xmlns:a16="http://schemas.microsoft.com/office/drawing/2014/main" id="{9E033A89-68B6-4169-A0AF-D1D1FFBF5686}"/>
+                <a16:creationId xmlns:a16="http://schemas.microsoft.com/office/drawing/2014/main" id="{EC8C680D-16AC-4232-8BFA-1420E76DE8B1}"/>
               </a:ext>
             </a:extLst>
           </p:cNvPr>
@@ -5840,7 +5840,7 @@
           <p:cNvPr id="2" name="">
             <a:extLst xmlns:a="http://schemas.openxmlformats.org/drawingml/2006/main">
               <a:ext uri="{FF2B5EF4-FFF2-40B4-BE49-F238E27FC236}">
-                <a16:creationId xmlns:a16="http://schemas.microsoft.com/office/drawing/2014/main" id="{BB1FB5A6-A321-4BC2-A0AD-7379FE9EC92E}"/>
+                <a16:creationId xmlns:a16="http://schemas.microsoft.com/office/drawing/2014/main" id="{0C861A8C-0020-4B7A-8045-7E84399BBED4}"/>
               </a:ext>
             </a:extLst>
           </p:cNvPr>
@@ -5996,7 +5996,7 @@
           <p:cNvPr id="3" name="">
             <a:extLst xmlns:a="http://schemas.openxmlformats.org/drawingml/2006/main">
               <a:ext uri="{FF2B5EF4-FFF2-40B4-BE49-F238E27FC236}">
-                <a16:creationId xmlns:a16="http://schemas.microsoft.com/office/drawing/2014/main" id="{6D4AE26F-52D6-48F5-909A-00A26600BE4F}"/>
+                <a16:creationId xmlns:a16="http://schemas.microsoft.com/office/drawing/2014/main" id="{1C111530-C5BE-43E2-91A0-65F5657C374A}"/>
               </a:ext>
             </a:extLst>
           </p:cNvPr>
@@ -6937,7 +6937,7 @@
           <p:cNvPr id="4" name="">
             <a:extLst xmlns:a="http://schemas.openxmlformats.org/drawingml/2006/main">
               <a:ext uri="{FF2B5EF4-FFF2-40B4-BE49-F238E27FC236}">
-                <a16:creationId xmlns:a16="http://schemas.microsoft.com/office/drawing/2014/main" id="{64F42E38-4720-408A-AE58-030366D6CBBC}"/>
+                <a16:creationId xmlns:a16="http://schemas.microsoft.com/office/drawing/2014/main" id="{D08F319A-C15E-4041-AA25-7A87F7449A1F}"/>
               </a:ext>
             </a:extLst>
           </p:cNvPr>
@@ -7091,7 +7091,7 @@
     </p:spTree>
     <p:extLst>
       <p:ext uri="{BB962C8B-B14F-4D97-AF65-F5344CB8AC3E}">
-        <p14:creationId xmlns:p14="http://schemas.microsoft.com/office/powerpoint/2010/main" val="1240472844"/>
+        <p14:creationId xmlns:p14="http://schemas.microsoft.com/office/powerpoint/2010/main" val="1911912737"/>
       </p:ext>
     </p:extLst>
   </p:cSld>
@@ -7122,7 +7122,7 @@
           <p:cNvPr id="5" name="">
             <a:extLst xmlns:a="http://schemas.openxmlformats.org/drawingml/2006/main">
               <a:ext uri="{FF2B5EF4-FFF2-40B4-BE49-F238E27FC236}">
-                <a16:creationId xmlns:a16="http://schemas.microsoft.com/office/drawing/2014/main" id="{B2DD32B4-0ED0-4EED-B307-775234A8B2D8}"/>
+                <a16:creationId xmlns:a16="http://schemas.microsoft.com/office/drawing/2014/main" id="{D4C0443E-FB8B-468B-B694-1594142AEE0F}"/>
               </a:ext>
             </a:extLst>
           </p:cNvPr>
@@ -7278,7 +7278,7 @@
           <p:cNvPr id="2" name="">
             <a:extLst xmlns:a="http://schemas.openxmlformats.org/drawingml/2006/main">
               <a:ext uri="{FF2B5EF4-FFF2-40B4-BE49-F238E27FC236}">
-                <a16:creationId xmlns:a16="http://schemas.microsoft.com/office/drawing/2014/main" id="{2528F2FA-7C96-4E8F-B8F5-8D48FEF7F731}"/>
+                <a16:creationId xmlns:a16="http://schemas.microsoft.com/office/drawing/2014/main" id="{3E56661C-4B19-4FA1-BCB0-1A9E30605FA5}"/>
               </a:ext>
             </a:extLst>
           </p:cNvPr>
@@ -7434,7 +7434,7 @@
           <p:cNvPr id="3" name="">
             <a:extLst xmlns:a="http://schemas.openxmlformats.org/drawingml/2006/main">
               <a:ext uri="{FF2B5EF4-FFF2-40B4-BE49-F238E27FC236}">
-                <a16:creationId xmlns:a16="http://schemas.microsoft.com/office/drawing/2014/main" id="{B0FD1C9B-1256-4715-B033-63225C51A08A}"/>
+                <a16:creationId xmlns:a16="http://schemas.microsoft.com/office/drawing/2014/main" id="{66B7C424-A766-4B6A-A090-240C08126858}"/>
               </a:ext>
             </a:extLst>
           </p:cNvPr>
@@ -8375,7 +8375,7 @@
           <p:cNvPr id="4" name="">
             <a:extLst xmlns:a="http://schemas.openxmlformats.org/drawingml/2006/main">
               <a:ext uri="{FF2B5EF4-FFF2-40B4-BE49-F238E27FC236}">
-                <a16:creationId xmlns:a16="http://schemas.microsoft.com/office/drawing/2014/main" id="{8A067411-2BA8-4092-9406-E96D95B11121}"/>
+                <a16:creationId xmlns:a16="http://schemas.microsoft.com/office/drawing/2014/main" id="{AC69C055-08E1-4AB9-B6F7-261BF8BBD1B7}"/>
               </a:ext>
             </a:extLst>
           </p:cNvPr>
@@ -8529,7 +8529,7 @@
     </p:spTree>
     <p:extLst>
       <p:ext uri="{BB962C8B-B14F-4D97-AF65-F5344CB8AC3E}">
-        <p14:creationId xmlns:p14="http://schemas.microsoft.com/office/powerpoint/2010/main" val="418813531"/>
+        <p14:creationId xmlns:p14="http://schemas.microsoft.com/office/powerpoint/2010/main" val="697492802"/>
       </p:ext>
     </p:extLst>
   </p:cSld>
@@ -8560,7 +8560,7 @@
           <p:cNvPr id="5" name="">
             <a:extLst xmlns:a="http://schemas.openxmlformats.org/drawingml/2006/main">
               <a:ext uri="{FF2B5EF4-FFF2-40B4-BE49-F238E27FC236}">
-                <a16:creationId xmlns:a16="http://schemas.microsoft.com/office/drawing/2014/main" id="{BC78EF7C-78B9-4485-B669-F52241C4E36E}"/>
+                <a16:creationId xmlns:a16="http://schemas.microsoft.com/office/drawing/2014/main" id="{0FA52B30-11D5-464E-B8A8-21B01059E76D}"/>
               </a:ext>
             </a:extLst>
           </p:cNvPr>
@@ -8716,7 +8716,7 @@
           <p:cNvPr id="2" name="">
             <a:extLst xmlns:a="http://schemas.openxmlformats.org/drawingml/2006/main">
               <a:ext uri="{FF2B5EF4-FFF2-40B4-BE49-F238E27FC236}">
-                <a16:creationId xmlns:a16="http://schemas.microsoft.com/office/drawing/2014/main" id="{E4BA9155-EFBF-4DB2-94C2-0F555449E5C3}"/>
+                <a16:creationId xmlns:a16="http://schemas.microsoft.com/office/drawing/2014/main" id="{DD75D36A-F0DB-40D7-9E29-FF6B81935A62}"/>
               </a:ext>
             </a:extLst>
           </p:cNvPr>
@@ -8872,7 +8872,7 @@
           <p:cNvPr id="3" name="">
             <a:extLst xmlns:a="http://schemas.openxmlformats.org/drawingml/2006/main">
               <a:ext uri="{FF2B5EF4-FFF2-40B4-BE49-F238E27FC236}">
-                <a16:creationId xmlns:a16="http://schemas.microsoft.com/office/drawing/2014/main" id="{9EECBAB0-B746-4484-BF96-ECCB12259A8D}"/>
+                <a16:creationId xmlns:a16="http://schemas.microsoft.com/office/drawing/2014/main" id="{3120606F-B09F-4DC3-95A3-95C18B7E648E}"/>
               </a:ext>
             </a:extLst>
           </p:cNvPr>
@@ -9813,7 +9813,7 @@
           <p:cNvPr id="4" name="">
             <a:extLst xmlns:a="http://schemas.openxmlformats.org/drawingml/2006/main">
               <a:ext uri="{FF2B5EF4-FFF2-40B4-BE49-F238E27FC236}">
-                <a16:creationId xmlns:a16="http://schemas.microsoft.com/office/drawing/2014/main" id="{07ED51CB-3DD4-4138-A200-7DC49D7EB955}"/>
+                <a16:creationId xmlns:a16="http://schemas.microsoft.com/office/drawing/2014/main" id="{566F2CA2-4541-421F-80C0-666F973857AB}"/>
               </a:ext>
             </a:extLst>
           </p:cNvPr>
@@ -9967,7 +9967,7 @@
     </p:spTree>
     <p:extLst>
       <p:ext uri="{BB962C8B-B14F-4D97-AF65-F5344CB8AC3E}">
-        <p14:creationId xmlns:p14="http://schemas.microsoft.com/office/powerpoint/2010/main" val="720926711"/>
+        <p14:creationId xmlns:p14="http://schemas.microsoft.com/office/powerpoint/2010/main" val="1487309824"/>
       </p:ext>
     </p:extLst>
   </p:cSld>
@@ -9998,7 +9998,7 @@
           <p:cNvPr id="8" name="">
             <a:extLst xmlns:a="http://schemas.openxmlformats.org/drawingml/2006/main">
               <a:ext uri="{FF2B5EF4-FFF2-40B4-BE49-F238E27FC236}">
-                <a16:creationId xmlns:a16="http://schemas.microsoft.com/office/drawing/2014/main" id="{F329FE21-EF32-4405-AFB8-B2011FAEB830}"/>
+                <a16:creationId xmlns:a16="http://schemas.microsoft.com/office/drawing/2014/main" id="{7181C42C-6A30-4664-B8E4-BF5E980D7BD1}"/>
               </a:ext>
             </a:extLst>
           </p:cNvPr>
@@ -10154,7 +10154,7 @@
           <p:cNvPr id="2" name="">
             <a:extLst xmlns:a="http://schemas.openxmlformats.org/drawingml/2006/main">
               <a:ext uri="{FF2B5EF4-FFF2-40B4-BE49-F238E27FC236}">
-                <a16:creationId xmlns:a16="http://schemas.microsoft.com/office/drawing/2014/main" id="{FCD46BE9-A61E-4FF9-B14D-3019B9441C75}"/>
+                <a16:creationId xmlns:a16="http://schemas.microsoft.com/office/drawing/2014/main" id="{FD530AFC-75E4-470B-991D-CF8174F5ED89}"/>
               </a:ext>
             </a:extLst>
           </p:cNvPr>
@@ -10310,7 +10310,7 @@
           <p:cNvPr id="3" name="">
             <a:extLst xmlns:a="http://schemas.openxmlformats.org/drawingml/2006/main">
               <a:ext uri="{FF2B5EF4-FFF2-40B4-BE49-F238E27FC236}">
-                <a16:creationId xmlns:a16="http://schemas.microsoft.com/office/drawing/2014/main" id="{218139B3-C0EA-4BEA-87DB-E72867CA1096}"/>
+                <a16:creationId xmlns:a16="http://schemas.microsoft.com/office/drawing/2014/main" id="{2143CDDE-C08C-47A8-9AB7-AC14C9B5EAD3}"/>
               </a:ext>
             </a:extLst>
           </p:cNvPr>
@@ -10466,7 +10466,7 @@
           <p:cNvPr id="4" name="">
             <a:extLst xmlns:a="http://schemas.openxmlformats.org/drawingml/2006/main">
               <a:ext uri="{FF2B5EF4-FFF2-40B4-BE49-F238E27FC236}">
-                <a16:creationId xmlns:a16="http://schemas.microsoft.com/office/drawing/2014/main" id="{702F5459-B057-4B38-88E3-B22444154349}"/>
+                <a16:creationId xmlns:a16="http://schemas.microsoft.com/office/drawing/2014/main" id="{2F0C60D0-FAAB-430C-8DED-0593952272DE}"/>
               </a:ext>
             </a:extLst>
           </p:cNvPr>
@@ -10622,7 +10622,7 @@
           <p:cNvPr id="5" name="">
             <a:extLst xmlns:a="http://schemas.openxmlformats.org/drawingml/2006/main">
               <a:ext uri="{FF2B5EF4-FFF2-40B4-BE49-F238E27FC236}">
-                <a16:creationId xmlns:a16="http://schemas.microsoft.com/office/drawing/2014/main" id="{0507B831-F078-4691-BF30-66FEC18447B4}"/>
+                <a16:creationId xmlns:a16="http://schemas.microsoft.com/office/drawing/2014/main" id="{1ECD18F3-B8BC-466B-B848-6D1874D2D39E}"/>
               </a:ext>
             </a:extLst>
           </p:cNvPr>
@@ -10778,7 +10778,7 @@
           <p:cNvPr id="6" name="">
             <a:extLst xmlns:a="http://schemas.openxmlformats.org/drawingml/2006/main">
               <a:ext uri="{FF2B5EF4-FFF2-40B4-BE49-F238E27FC236}">
-                <a16:creationId xmlns:a16="http://schemas.microsoft.com/office/drawing/2014/main" id="{724BE5F6-2650-48F2-860A-E90EB0EB33E8}"/>
+                <a16:creationId xmlns:a16="http://schemas.microsoft.com/office/drawing/2014/main" id="{5D37CF60-A0B0-4BD8-A2BB-693B46B6C95A}"/>
               </a:ext>
             </a:extLst>
           </p:cNvPr>
@@ -10924,7 +10924,7 @@
                 <a:ea typeface="Arial"/>
                 <a:cs typeface="Arial"/>
               </a:rPr>
-              <a:t>Current AUPRC is custom and tie-sensitive. Standard average precision is a reporting follow-up.</a:t>
+              <a:t>Standard average precision and calibration diagnostics are available from stored predictions.</a:t>
             </a:r>
           </a:p>
         </p:txBody>
@@ -10934,7 +10934,7 @@
           <p:cNvPr id="7" name="">
             <a:extLst xmlns:a="http://schemas.openxmlformats.org/drawingml/2006/main">
               <a:ext uri="{FF2B5EF4-FFF2-40B4-BE49-F238E27FC236}">
-                <a16:creationId xmlns:a16="http://schemas.microsoft.com/office/drawing/2014/main" id="{63E6CC01-B88A-4170-B022-2FFC6DFA68A7}"/>
+                <a16:creationId xmlns:a16="http://schemas.microsoft.com/office/drawing/2014/main" id="{41C9FD1D-F670-4928-9C99-3FE3F1062A2C}"/>
               </a:ext>
             </a:extLst>
           </p:cNvPr>
@@ -11088,7 +11088,7 @@
     </p:spTree>
     <p:extLst>
       <p:ext uri="{BB962C8B-B14F-4D97-AF65-F5344CB8AC3E}">
-        <p14:creationId xmlns:p14="http://schemas.microsoft.com/office/powerpoint/2010/main" val="813602052"/>
+        <p14:creationId xmlns:p14="http://schemas.microsoft.com/office/powerpoint/2010/main" val="49060071"/>
       </p:ext>
     </p:extLst>
   </p:cSld>
@@ -11119,7 +11119,7 @@
           <p:cNvPr id="8" name="">
             <a:extLst xmlns:a="http://schemas.openxmlformats.org/drawingml/2006/main">
               <a:ext uri="{FF2B5EF4-FFF2-40B4-BE49-F238E27FC236}">
-                <a16:creationId xmlns:a16="http://schemas.microsoft.com/office/drawing/2014/main" id="{FC4A4172-8B54-48B6-9895-33B570252B15}"/>
+                <a16:creationId xmlns:a16="http://schemas.microsoft.com/office/drawing/2014/main" id="{EEBD691B-54C7-4997-8885-2E5123A39E48}"/>
               </a:ext>
             </a:extLst>
           </p:cNvPr>
@@ -11275,7 +11275,7 @@
           <p:cNvPr id="2" name="">
             <a:extLst xmlns:a="http://schemas.openxmlformats.org/drawingml/2006/main">
               <a:ext uri="{FF2B5EF4-FFF2-40B4-BE49-F238E27FC236}">
-                <a16:creationId xmlns:a16="http://schemas.microsoft.com/office/drawing/2014/main" id="{AF1D1E1F-37BD-4D38-93DD-CBA16896479F}"/>
+                <a16:creationId xmlns:a16="http://schemas.microsoft.com/office/drawing/2014/main" id="{424389B8-7197-4EDC-8425-D9163B8CAE44}"/>
               </a:ext>
             </a:extLst>
           </p:cNvPr>
@@ -11431,7 +11431,7 @@
           <p:cNvPr id="3" name="">
             <a:extLst xmlns:a="http://schemas.openxmlformats.org/drawingml/2006/main">
               <a:ext uri="{FF2B5EF4-FFF2-40B4-BE49-F238E27FC236}">
-                <a16:creationId xmlns:a16="http://schemas.microsoft.com/office/drawing/2014/main" id="{27EC1438-3F85-4423-91F7-04104E226E0E}"/>
+                <a16:creationId xmlns:a16="http://schemas.microsoft.com/office/drawing/2014/main" id="{5D8D80BE-BED0-4C8E-A5F7-1CF08AD53BF3}"/>
               </a:ext>
             </a:extLst>
           </p:cNvPr>
@@ -11587,7 +11587,7 @@
           <p:cNvPr id="4" name="">
             <a:extLst xmlns:a="http://schemas.openxmlformats.org/drawingml/2006/main">
               <a:ext uri="{FF2B5EF4-FFF2-40B4-BE49-F238E27FC236}">
-                <a16:creationId xmlns:a16="http://schemas.microsoft.com/office/drawing/2014/main" id="{CA551EEF-5A28-46D0-85E5-C1B4D5A9C44B}"/>
+                <a16:creationId xmlns:a16="http://schemas.microsoft.com/office/drawing/2014/main" id="{7F133ED9-8104-4447-994C-33A279CD08F5}"/>
               </a:ext>
             </a:extLst>
           </p:cNvPr>
@@ -11743,7 +11743,7 @@
           <p:cNvPr id="5" name="">
             <a:extLst xmlns:a="http://schemas.openxmlformats.org/drawingml/2006/main">
               <a:ext uri="{FF2B5EF4-FFF2-40B4-BE49-F238E27FC236}">
-                <a16:creationId xmlns:a16="http://schemas.microsoft.com/office/drawing/2014/main" id="{B64F60D9-919A-4ECB-A9D2-51CB5A175C59}"/>
+                <a16:creationId xmlns:a16="http://schemas.microsoft.com/office/drawing/2014/main" id="{6ACF6896-F622-4815-B57D-6ABE90227F67}"/>
               </a:ext>
             </a:extLst>
           </p:cNvPr>
@@ -11899,7 +11899,7 @@
           <p:cNvPr id="6" name="">
             <a:extLst xmlns:a="http://schemas.openxmlformats.org/drawingml/2006/main">
               <a:ext uri="{FF2B5EF4-FFF2-40B4-BE49-F238E27FC236}">
-                <a16:creationId xmlns:a16="http://schemas.microsoft.com/office/drawing/2014/main" id="{5A9A9240-CB1D-4D56-B151-77AABB953C0A}"/>
+                <a16:creationId xmlns:a16="http://schemas.microsoft.com/office/drawing/2014/main" id="{61DD913C-4977-46E7-B00E-3CB7BB92B9C9}"/>
               </a:ext>
             </a:extLst>
           </p:cNvPr>
@@ -12055,7 +12055,7 @@
           <p:cNvPr id="7" name="">
             <a:extLst xmlns:a="http://schemas.openxmlformats.org/drawingml/2006/main">
               <a:ext uri="{FF2B5EF4-FFF2-40B4-BE49-F238E27FC236}">
-                <a16:creationId xmlns:a16="http://schemas.microsoft.com/office/drawing/2014/main" id="{624BF900-A930-419B-9F51-3A18296E3F7B}"/>
+                <a16:creationId xmlns:a16="http://schemas.microsoft.com/office/drawing/2014/main" id="{A809B258-D2F8-4407-B1E5-7211C9E398EF}"/>
               </a:ext>
             </a:extLst>
           </p:cNvPr>
@@ -12209,7 +12209,7 @@
     </p:spTree>
     <p:extLst>
       <p:ext uri="{BB962C8B-B14F-4D97-AF65-F5344CB8AC3E}">
-        <p14:creationId xmlns:p14="http://schemas.microsoft.com/office/powerpoint/2010/main" val="1526147968"/>
+        <p14:creationId xmlns:p14="http://schemas.microsoft.com/office/powerpoint/2010/main" val="2133167945"/>
       </p:ext>
     </p:extLst>
   </p:cSld>
@@ -12240,7 +12240,7 @@
           <p:cNvPr id="8" name="">
             <a:extLst xmlns:a="http://schemas.openxmlformats.org/drawingml/2006/main">
               <a:ext uri="{FF2B5EF4-FFF2-40B4-BE49-F238E27FC236}">
-                <a16:creationId xmlns:a16="http://schemas.microsoft.com/office/drawing/2014/main" id="{89C34D15-8AA6-48B1-8CB2-4525F30E1C77}"/>
+                <a16:creationId xmlns:a16="http://schemas.microsoft.com/office/drawing/2014/main" id="{1E9F1565-622C-46EE-96E0-005426E10F22}"/>
               </a:ext>
             </a:extLst>
           </p:cNvPr>
@@ -12396,7 +12396,7 @@
           <p:cNvPr id="2" name="">
             <a:extLst xmlns:a="http://schemas.openxmlformats.org/drawingml/2006/main">
               <a:ext uri="{FF2B5EF4-FFF2-40B4-BE49-F238E27FC236}">
-                <a16:creationId xmlns:a16="http://schemas.microsoft.com/office/drawing/2014/main" id="{2B8DE68D-CB04-48F8-BDB2-B3279641C6E4}"/>
+                <a16:creationId xmlns:a16="http://schemas.microsoft.com/office/drawing/2014/main" id="{19DCE0A5-E2E2-4C57-A49A-24F7BE6E3F43}"/>
               </a:ext>
             </a:extLst>
           </p:cNvPr>
@@ -12552,7 +12552,7 @@
           <p:cNvPr id="3" name="">
             <a:extLst xmlns:a="http://schemas.openxmlformats.org/drawingml/2006/main">
               <a:ext uri="{FF2B5EF4-FFF2-40B4-BE49-F238E27FC236}">
-                <a16:creationId xmlns:a16="http://schemas.microsoft.com/office/drawing/2014/main" id="{EA4D0B33-DD51-4154-9FD7-3FA64EC48439}"/>
+                <a16:creationId xmlns:a16="http://schemas.microsoft.com/office/drawing/2014/main" id="{319E54FA-342C-4CC1-A384-C7D8DB689A18}"/>
               </a:ext>
             </a:extLst>
           </p:cNvPr>
@@ -12708,7 +12708,7 @@
           <p:cNvPr id="4" name="">
             <a:extLst xmlns:a="http://schemas.openxmlformats.org/drawingml/2006/main">
               <a:ext uri="{FF2B5EF4-FFF2-40B4-BE49-F238E27FC236}">
-                <a16:creationId xmlns:a16="http://schemas.microsoft.com/office/drawing/2014/main" id="{D9262AC6-98F5-4DFB-945A-31ABFFD4C605}"/>
+                <a16:creationId xmlns:a16="http://schemas.microsoft.com/office/drawing/2014/main" id="{6C41D5DC-B149-43B3-A2F7-55E4E9A09AA8}"/>
               </a:ext>
             </a:extLst>
           </p:cNvPr>
@@ -12864,7 +12864,7 @@
           <p:cNvPr id="5" name="">
             <a:extLst xmlns:a="http://schemas.openxmlformats.org/drawingml/2006/main">
               <a:ext uri="{FF2B5EF4-FFF2-40B4-BE49-F238E27FC236}">
-                <a16:creationId xmlns:a16="http://schemas.microsoft.com/office/drawing/2014/main" id="{0852D960-FA22-4DF3-BC9F-D8F1FBD1F611}"/>
+                <a16:creationId xmlns:a16="http://schemas.microsoft.com/office/drawing/2014/main" id="{6E3F5BD7-C851-4F1B-BCEE-0E479CBE3F39}"/>
               </a:ext>
             </a:extLst>
           </p:cNvPr>
@@ -13020,7 +13020,7 @@
           <p:cNvPr id="6" name="">
             <a:extLst xmlns:a="http://schemas.openxmlformats.org/drawingml/2006/main">
               <a:ext uri="{FF2B5EF4-FFF2-40B4-BE49-F238E27FC236}">
-                <a16:creationId xmlns:a16="http://schemas.microsoft.com/office/drawing/2014/main" id="{974F5C36-B8DB-49C7-BD9B-5738B2885550}"/>
+                <a16:creationId xmlns:a16="http://schemas.microsoft.com/office/drawing/2014/main" id="{7B1E9507-28C0-4089-9DFB-3D8C502337EC}"/>
               </a:ext>
             </a:extLst>
           </p:cNvPr>
@@ -13176,7 +13176,7 @@
           <p:cNvPr id="7" name="">
             <a:extLst xmlns:a="http://schemas.openxmlformats.org/drawingml/2006/main">
               <a:ext uri="{FF2B5EF4-FFF2-40B4-BE49-F238E27FC236}">
-                <a16:creationId xmlns:a16="http://schemas.microsoft.com/office/drawing/2014/main" id="{9333996F-D9D7-4998-889F-61474E80758B}"/>
+                <a16:creationId xmlns:a16="http://schemas.microsoft.com/office/drawing/2014/main" id="{D132D877-D634-4502-9483-FB41D1D45DDD}"/>
               </a:ext>
             </a:extLst>
           </p:cNvPr>
@@ -13330,7 +13330,7 @@
     </p:spTree>
     <p:extLst>
       <p:ext uri="{BB962C8B-B14F-4D97-AF65-F5344CB8AC3E}">
-        <p14:creationId xmlns:p14="http://schemas.microsoft.com/office/powerpoint/2010/main" val="978293409"/>
+        <p14:creationId xmlns:p14="http://schemas.microsoft.com/office/powerpoint/2010/main" val="886002321"/>
       </p:ext>
     </p:extLst>
   </p:cSld>
@@ -13361,7 +13361,7 @@
           <p:cNvPr id="8" name="">
             <a:extLst xmlns:a="http://schemas.openxmlformats.org/drawingml/2006/main">
               <a:ext uri="{FF2B5EF4-FFF2-40B4-BE49-F238E27FC236}">
-                <a16:creationId xmlns:a16="http://schemas.microsoft.com/office/drawing/2014/main" id="{F44AF523-1D62-4595-8DFB-21956EF8B789}"/>
+                <a16:creationId xmlns:a16="http://schemas.microsoft.com/office/drawing/2014/main" id="{F9780810-BDA5-4026-8A63-F274D8DBB175}"/>
               </a:ext>
             </a:extLst>
           </p:cNvPr>
@@ -13517,7 +13517,7 @@
           <p:cNvPr id="2" name="">
             <a:extLst xmlns:a="http://schemas.openxmlformats.org/drawingml/2006/main">
               <a:ext uri="{FF2B5EF4-FFF2-40B4-BE49-F238E27FC236}">
-                <a16:creationId xmlns:a16="http://schemas.microsoft.com/office/drawing/2014/main" id="{3480E8FC-4F17-4187-96E9-54F009859E18}"/>
+                <a16:creationId xmlns:a16="http://schemas.microsoft.com/office/drawing/2014/main" id="{9BF10609-F70B-4FBE-9FB7-13B4685E3471}"/>
               </a:ext>
             </a:extLst>
           </p:cNvPr>
@@ -13673,7 +13673,7 @@
           <p:cNvPr id="3" name="">
             <a:extLst xmlns:a="http://schemas.openxmlformats.org/drawingml/2006/main">
               <a:ext uri="{FF2B5EF4-FFF2-40B4-BE49-F238E27FC236}">
-                <a16:creationId xmlns:a16="http://schemas.microsoft.com/office/drawing/2014/main" id="{3DDC076A-7865-438E-A67F-E984D277FD7B}"/>
+                <a16:creationId xmlns:a16="http://schemas.microsoft.com/office/drawing/2014/main" id="{30E9D52D-75A7-4732-8191-6A46B4C01CBE}"/>
               </a:ext>
             </a:extLst>
           </p:cNvPr>
@@ -13829,7 +13829,7 @@
           <p:cNvPr id="4" name="">
             <a:extLst xmlns:a="http://schemas.openxmlformats.org/drawingml/2006/main">
               <a:ext uri="{FF2B5EF4-FFF2-40B4-BE49-F238E27FC236}">
-                <a16:creationId xmlns:a16="http://schemas.microsoft.com/office/drawing/2014/main" id="{D040A98A-46AC-4124-AAD4-8ABC4F6A12D6}"/>
+                <a16:creationId xmlns:a16="http://schemas.microsoft.com/office/drawing/2014/main" id="{394E48E8-24E2-4AE1-BEC3-E810D8A0C80B}"/>
               </a:ext>
             </a:extLst>
           </p:cNvPr>
@@ -13985,7 +13985,7 @@
           <p:cNvPr id="5" name="">
             <a:extLst xmlns:a="http://schemas.openxmlformats.org/drawingml/2006/main">
               <a:ext uri="{FF2B5EF4-FFF2-40B4-BE49-F238E27FC236}">
-                <a16:creationId xmlns:a16="http://schemas.microsoft.com/office/drawing/2014/main" id="{D30E2E4D-EE67-49A7-B1AD-74E3697481E2}"/>
+                <a16:creationId xmlns:a16="http://schemas.microsoft.com/office/drawing/2014/main" id="{3F20F9E2-A054-4E1F-A433-BDD38F680090}"/>
               </a:ext>
             </a:extLst>
           </p:cNvPr>
@@ -14141,7 +14141,7 @@
           <p:cNvPr id="6" name="">
             <a:extLst xmlns:a="http://schemas.openxmlformats.org/drawingml/2006/main">
               <a:ext uri="{FF2B5EF4-FFF2-40B4-BE49-F238E27FC236}">
-                <a16:creationId xmlns:a16="http://schemas.microsoft.com/office/drawing/2014/main" id="{C1528A1D-9748-4388-918D-B7919283E9F5}"/>
+                <a16:creationId xmlns:a16="http://schemas.microsoft.com/office/drawing/2014/main" id="{AC63BD59-C0B1-4ACF-AC28-D1723F1782FD}"/>
               </a:ext>
             </a:extLst>
           </p:cNvPr>
@@ -14297,7 +14297,7 @@
           <p:cNvPr id="7" name="">
             <a:extLst xmlns:a="http://schemas.openxmlformats.org/drawingml/2006/main">
               <a:ext uri="{FF2B5EF4-FFF2-40B4-BE49-F238E27FC236}">
-                <a16:creationId xmlns:a16="http://schemas.microsoft.com/office/drawing/2014/main" id="{99525831-B638-4FA1-A209-5957F6B1BF36}"/>
+                <a16:creationId xmlns:a16="http://schemas.microsoft.com/office/drawing/2014/main" id="{BDA76A54-5C4E-40B0-BCE8-A17B5B32B7E2}"/>
               </a:ext>
             </a:extLst>
           </p:cNvPr>
@@ -14451,7 +14451,7 @@
     </p:spTree>
     <p:extLst>
       <p:ext uri="{BB962C8B-B14F-4D97-AF65-F5344CB8AC3E}">
-        <p14:creationId xmlns:p14="http://schemas.microsoft.com/office/powerpoint/2010/main" val="1451175954"/>
+        <p14:creationId xmlns:p14="http://schemas.microsoft.com/office/powerpoint/2010/main" val="1049776516"/>
       </p:ext>
     </p:extLst>
   </p:cSld>
@@ -14482,7 +14482,7 @@
           <p:cNvPr id="8" name="">
             <a:extLst xmlns:a="http://schemas.openxmlformats.org/drawingml/2006/main">
               <a:ext uri="{FF2B5EF4-FFF2-40B4-BE49-F238E27FC236}">
-                <a16:creationId xmlns:a16="http://schemas.microsoft.com/office/drawing/2014/main" id="{15844C27-DC3B-450F-B406-21882636E78C}"/>
+                <a16:creationId xmlns:a16="http://schemas.microsoft.com/office/drawing/2014/main" id="{CEA21B3C-BDA4-4ECB-B1E4-54D4E6B047A3}"/>
               </a:ext>
             </a:extLst>
           </p:cNvPr>
@@ -14638,7 +14638,7 @@
           <p:cNvPr id="2" name="">
             <a:extLst xmlns:a="http://schemas.openxmlformats.org/drawingml/2006/main">
               <a:ext uri="{FF2B5EF4-FFF2-40B4-BE49-F238E27FC236}">
-                <a16:creationId xmlns:a16="http://schemas.microsoft.com/office/drawing/2014/main" id="{82667AC2-6D7F-4925-8ADA-B91FCE59D83A}"/>
+                <a16:creationId xmlns:a16="http://schemas.microsoft.com/office/drawing/2014/main" id="{F0E226C3-9450-451F-823B-A7B7CB2BCDF5}"/>
               </a:ext>
             </a:extLst>
           </p:cNvPr>
@@ -14794,7 +14794,7 @@
           <p:cNvPr id="3" name="">
             <a:extLst xmlns:a="http://schemas.openxmlformats.org/drawingml/2006/main">
               <a:ext uri="{FF2B5EF4-FFF2-40B4-BE49-F238E27FC236}">
-                <a16:creationId xmlns:a16="http://schemas.microsoft.com/office/drawing/2014/main" id="{A7C9D365-F878-43AD-91A6-9481073348C6}"/>
+                <a16:creationId xmlns:a16="http://schemas.microsoft.com/office/drawing/2014/main" id="{D8451448-5F31-465B-8A36-137F34A52A51}"/>
               </a:ext>
             </a:extLst>
           </p:cNvPr>
@@ -14950,7 +14950,7 @@
           <p:cNvPr id="4" name="">
             <a:extLst xmlns:a="http://schemas.openxmlformats.org/drawingml/2006/main">
               <a:ext uri="{FF2B5EF4-FFF2-40B4-BE49-F238E27FC236}">
-                <a16:creationId xmlns:a16="http://schemas.microsoft.com/office/drawing/2014/main" id="{990EDB90-D99F-4698-B7B4-55DE60C40BBB}"/>
+                <a16:creationId xmlns:a16="http://schemas.microsoft.com/office/drawing/2014/main" id="{FE728223-ED6E-4B0B-B836-0EC47036C8EB}"/>
               </a:ext>
             </a:extLst>
           </p:cNvPr>
@@ -15106,7 +15106,7 @@
           <p:cNvPr id="5" name="">
             <a:extLst xmlns:a="http://schemas.openxmlformats.org/drawingml/2006/main">
               <a:ext uri="{FF2B5EF4-FFF2-40B4-BE49-F238E27FC236}">
-                <a16:creationId xmlns:a16="http://schemas.microsoft.com/office/drawing/2014/main" id="{D8D6DBC8-9A5D-4AE6-81F6-4BCE0D2C861A}"/>
+                <a16:creationId xmlns:a16="http://schemas.microsoft.com/office/drawing/2014/main" id="{0F145E38-14C1-4965-9B3B-4E4C61CEE6CD}"/>
               </a:ext>
             </a:extLst>
           </p:cNvPr>
@@ -15262,7 +15262,7 @@
           <p:cNvPr id="6" name="">
             <a:extLst xmlns:a="http://schemas.openxmlformats.org/drawingml/2006/main">
               <a:ext uri="{FF2B5EF4-FFF2-40B4-BE49-F238E27FC236}">
-                <a16:creationId xmlns:a16="http://schemas.microsoft.com/office/drawing/2014/main" id="{091B8CEC-009D-4B8D-A68E-1F62DFD8F9D8}"/>
+                <a16:creationId xmlns:a16="http://schemas.microsoft.com/office/drawing/2014/main" id="{5F7E221E-A69C-4FB2-A369-A13526CBB743}"/>
               </a:ext>
             </a:extLst>
           </p:cNvPr>
@@ -15418,7 +15418,7 @@
           <p:cNvPr id="7" name="">
             <a:extLst xmlns:a="http://schemas.openxmlformats.org/drawingml/2006/main">
               <a:ext uri="{FF2B5EF4-FFF2-40B4-BE49-F238E27FC236}">
-                <a16:creationId xmlns:a16="http://schemas.microsoft.com/office/drawing/2014/main" id="{2106E869-CB18-4DF3-919B-5C862AC8B876}"/>
+                <a16:creationId xmlns:a16="http://schemas.microsoft.com/office/drawing/2014/main" id="{17199940-9AED-47A3-8B8D-1D44380B364B}"/>
               </a:ext>
             </a:extLst>
           </p:cNvPr>
@@ -15572,7 +15572,7 @@
     </p:spTree>
     <p:extLst>
       <p:ext uri="{BB962C8B-B14F-4D97-AF65-F5344CB8AC3E}">
-        <p14:creationId xmlns:p14="http://schemas.microsoft.com/office/powerpoint/2010/main" val="243842876"/>
+        <p14:creationId xmlns:p14="http://schemas.microsoft.com/office/powerpoint/2010/main" val="1212577180"/>
       </p:ext>
     </p:extLst>
   </p:cSld>
@@ -15603,7 +15603,7 @@
           <p:cNvPr id="8" name="">
             <a:extLst xmlns:a="http://schemas.openxmlformats.org/drawingml/2006/main">
               <a:ext uri="{FF2B5EF4-FFF2-40B4-BE49-F238E27FC236}">
-                <a16:creationId xmlns:a16="http://schemas.microsoft.com/office/drawing/2014/main" id="{A6AF7159-B387-449C-82B6-37C44C4756A9}"/>
+                <a16:creationId xmlns:a16="http://schemas.microsoft.com/office/drawing/2014/main" id="{47FBB571-289F-404E-B0EC-D63DD4B6FF86}"/>
               </a:ext>
             </a:extLst>
           </p:cNvPr>
@@ -15759,7 +15759,7 @@
           <p:cNvPr id="2" name="">
             <a:extLst xmlns:a="http://schemas.openxmlformats.org/drawingml/2006/main">
               <a:ext uri="{FF2B5EF4-FFF2-40B4-BE49-F238E27FC236}">
-                <a16:creationId xmlns:a16="http://schemas.microsoft.com/office/drawing/2014/main" id="{8A4A8556-5CBE-4410-83A2-F41A078C06A9}"/>
+                <a16:creationId xmlns:a16="http://schemas.microsoft.com/office/drawing/2014/main" id="{ABB3069B-CE1D-43B4-A785-97E22BA4D119}"/>
               </a:ext>
             </a:extLst>
           </p:cNvPr>
@@ -15915,7 +15915,7 @@
           <p:cNvPr id="3" name="">
             <a:extLst xmlns:a="http://schemas.openxmlformats.org/drawingml/2006/main">
               <a:ext uri="{FF2B5EF4-FFF2-40B4-BE49-F238E27FC236}">
-                <a16:creationId xmlns:a16="http://schemas.microsoft.com/office/drawing/2014/main" id="{2666C213-3113-4D5F-B012-445A289A7782}"/>
+                <a16:creationId xmlns:a16="http://schemas.microsoft.com/office/drawing/2014/main" id="{2EE2A5BE-72C3-491A-86A3-DEDE01161894}"/>
               </a:ext>
             </a:extLst>
           </p:cNvPr>
@@ -16071,7 +16071,7 @@
           <p:cNvPr id="4" name="">
             <a:extLst xmlns:a="http://schemas.openxmlformats.org/drawingml/2006/main">
               <a:ext uri="{FF2B5EF4-FFF2-40B4-BE49-F238E27FC236}">
-                <a16:creationId xmlns:a16="http://schemas.microsoft.com/office/drawing/2014/main" id="{A281D700-FBED-463E-9EDD-A9E4299211B3}"/>
+                <a16:creationId xmlns:a16="http://schemas.microsoft.com/office/drawing/2014/main" id="{EE6345FD-220F-49A3-B422-7BE93446AC0C}"/>
               </a:ext>
             </a:extLst>
           </p:cNvPr>
@@ -16227,7 +16227,7 @@
           <p:cNvPr id="5" name="">
             <a:extLst xmlns:a="http://schemas.openxmlformats.org/drawingml/2006/main">
               <a:ext uri="{FF2B5EF4-FFF2-40B4-BE49-F238E27FC236}">
-                <a16:creationId xmlns:a16="http://schemas.microsoft.com/office/drawing/2014/main" id="{4CA12C18-D282-41DF-9A10-5B5121B7D333}"/>
+                <a16:creationId xmlns:a16="http://schemas.microsoft.com/office/drawing/2014/main" id="{29AC41A5-0B51-46F2-8D0A-C8B2670289C7}"/>
               </a:ext>
             </a:extLst>
           </p:cNvPr>
@@ -16383,7 +16383,7 @@
           <p:cNvPr id="6" name="">
             <a:extLst xmlns:a="http://schemas.openxmlformats.org/drawingml/2006/main">
               <a:ext uri="{FF2B5EF4-FFF2-40B4-BE49-F238E27FC236}">
-                <a16:creationId xmlns:a16="http://schemas.microsoft.com/office/drawing/2014/main" id="{ED83C382-BD90-4B2A-BD88-5CB94F2B4A2C}"/>
+                <a16:creationId xmlns:a16="http://schemas.microsoft.com/office/drawing/2014/main" id="{F3E9E9BF-C590-44A3-8A67-13503EB72D54}"/>
               </a:ext>
             </a:extLst>
           </p:cNvPr>
@@ -16539,7 +16539,7 @@
           <p:cNvPr id="7" name="">
             <a:extLst xmlns:a="http://schemas.openxmlformats.org/drawingml/2006/main">
               <a:ext uri="{FF2B5EF4-FFF2-40B4-BE49-F238E27FC236}">
-                <a16:creationId xmlns:a16="http://schemas.microsoft.com/office/drawing/2014/main" id="{E420A687-63AA-4706-B145-9C0BFCD2DD1E}"/>
+                <a16:creationId xmlns:a16="http://schemas.microsoft.com/office/drawing/2014/main" id="{418F1438-6459-4C48-8FE4-03F24C68C66F}"/>
               </a:ext>
             </a:extLst>
           </p:cNvPr>
@@ -16693,7 +16693,7 @@
     </p:spTree>
     <p:extLst>
       <p:ext uri="{BB962C8B-B14F-4D97-AF65-F5344CB8AC3E}">
-        <p14:creationId xmlns:p14="http://schemas.microsoft.com/office/powerpoint/2010/main" val="1114125876"/>
+        <p14:creationId xmlns:p14="http://schemas.microsoft.com/office/powerpoint/2010/main" val="1846309424"/>
       </p:ext>
     </p:extLst>
   </p:cSld>
@@ -16724,7 +16724,7 @@
           <p:cNvPr id="8" name="">
             <a:extLst xmlns:a="http://schemas.openxmlformats.org/drawingml/2006/main">
               <a:ext uri="{FF2B5EF4-FFF2-40B4-BE49-F238E27FC236}">
-                <a16:creationId xmlns:a16="http://schemas.microsoft.com/office/drawing/2014/main" id="{DD18B72C-F609-4B28-9CEA-3414D09301AB}"/>
+                <a16:creationId xmlns:a16="http://schemas.microsoft.com/office/drawing/2014/main" id="{D727F8EC-6234-4878-8271-EE6C90F9FD75}"/>
               </a:ext>
             </a:extLst>
           </p:cNvPr>
@@ -16880,7 +16880,7 @@
           <p:cNvPr id="2" name="">
             <a:extLst xmlns:a="http://schemas.openxmlformats.org/drawingml/2006/main">
               <a:ext uri="{FF2B5EF4-FFF2-40B4-BE49-F238E27FC236}">
-                <a16:creationId xmlns:a16="http://schemas.microsoft.com/office/drawing/2014/main" id="{8E11438A-3780-49EB-ACB8-18EEDE749182}"/>
+                <a16:creationId xmlns:a16="http://schemas.microsoft.com/office/drawing/2014/main" id="{EC307F34-502C-4927-AD05-DEBF366A2263}"/>
               </a:ext>
             </a:extLst>
           </p:cNvPr>
@@ -17036,7 +17036,7 @@
           <p:cNvPr id="3" name="">
             <a:extLst xmlns:a="http://schemas.openxmlformats.org/drawingml/2006/main">
               <a:ext uri="{FF2B5EF4-FFF2-40B4-BE49-F238E27FC236}">
-                <a16:creationId xmlns:a16="http://schemas.microsoft.com/office/drawing/2014/main" id="{8A4C0D3C-8F9A-4F1F-8209-BF3F5410D417}"/>
+                <a16:creationId xmlns:a16="http://schemas.microsoft.com/office/drawing/2014/main" id="{1737CC0E-D7AF-49A6-954A-27ED33DED41D}"/>
               </a:ext>
             </a:extLst>
           </p:cNvPr>
@@ -17192,7 +17192,7 @@
           <p:cNvPr id="4" name="">
             <a:extLst xmlns:a="http://schemas.openxmlformats.org/drawingml/2006/main">
               <a:ext uri="{FF2B5EF4-FFF2-40B4-BE49-F238E27FC236}">
-                <a16:creationId xmlns:a16="http://schemas.microsoft.com/office/drawing/2014/main" id="{1CDB6408-D799-49E2-A4F2-46CA07A962A8}"/>
+                <a16:creationId xmlns:a16="http://schemas.microsoft.com/office/drawing/2014/main" id="{1222F196-A18E-46CB-A412-507B77A86DDC}"/>
               </a:ext>
             </a:extLst>
           </p:cNvPr>
@@ -17348,7 +17348,7 @@
           <p:cNvPr id="5" name="">
             <a:extLst xmlns:a="http://schemas.openxmlformats.org/drawingml/2006/main">
               <a:ext uri="{FF2B5EF4-FFF2-40B4-BE49-F238E27FC236}">
-                <a16:creationId xmlns:a16="http://schemas.microsoft.com/office/drawing/2014/main" id="{3BE96C21-21D3-4F13-91A4-7C197F32F21B}"/>
+                <a16:creationId xmlns:a16="http://schemas.microsoft.com/office/drawing/2014/main" id="{705F9DF4-8075-4A44-82BC-662AAB16174C}"/>
               </a:ext>
             </a:extLst>
           </p:cNvPr>
@@ -17504,7 +17504,7 @@
           <p:cNvPr id="6" name="">
             <a:extLst xmlns:a="http://schemas.openxmlformats.org/drawingml/2006/main">
               <a:ext uri="{FF2B5EF4-FFF2-40B4-BE49-F238E27FC236}">
-                <a16:creationId xmlns:a16="http://schemas.microsoft.com/office/drawing/2014/main" id="{19730F6C-9DD1-49D3-8320-779C367BD769}"/>
+                <a16:creationId xmlns:a16="http://schemas.microsoft.com/office/drawing/2014/main" id="{116C1862-9D71-421F-98B9-1A7E566EB665}"/>
               </a:ext>
             </a:extLst>
           </p:cNvPr>
@@ -17660,7 +17660,7 @@
           <p:cNvPr id="7" name="">
             <a:extLst xmlns:a="http://schemas.openxmlformats.org/drawingml/2006/main">
               <a:ext uri="{FF2B5EF4-FFF2-40B4-BE49-F238E27FC236}">
-                <a16:creationId xmlns:a16="http://schemas.microsoft.com/office/drawing/2014/main" id="{79B0CB51-0E62-49FD-AD1B-F40765284AA3}"/>
+                <a16:creationId xmlns:a16="http://schemas.microsoft.com/office/drawing/2014/main" id="{779435E2-6A93-4E10-9DD8-2B751CF11597}"/>
               </a:ext>
             </a:extLst>
           </p:cNvPr>
@@ -17814,7 +17814,7 @@
     </p:spTree>
     <p:extLst>
       <p:ext uri="{BB962C8B-B14F-4D97-AF65-F5344CB8AC3E}">
-        <p14:creationId xmlns:p14="http://schemas.microsoft.com/office/powerpoint/2010/main" val="2061920875"/>
+        <p14:creationId xmlns:p14="http://schemas.microsoft.com/office/powerpoint/2010/main" val="452144761"/>
       </p:ext>
     </p:extLst>
   </p:cSld>
@@ -17845,7 +17845,7 @@
           <p:cNvPr id="7" name="">
             <a:extLst xmlns:a="http://schemas.openxmlformats.org/drawingml/2006/main">
               <a:ext uri="{FF2B5EF4-FFF2-40B4-BE49-F238E27FC236}">
-                <a16:creationId xmlns:a16="http://schemas.microsoft.com/office/drawing/2014/main" id="{600717AC-87BF-475F-A768-0B4DFB994AE5}"/>
+                <a16:creationId xmlns:a16="http://schemas.microsoft.com/office/drawing/2014/main" id="{621BEF50-9118-454E-8882-C8F86B8FE53B}"/>
               </a:ext>
             </a:extLst>
           </p:cNvPr>
@@ -18001,7 +18001,7 @@
           <p:cNvPr id="2" name="">
             <a:extLst xmlns:a="http://schemas.openxmlformats.org/drawingml/2006/main">
               <a:ext uri="{FF2B5EF4-FFF2-40B4-BE49-F238E27FC236}">
-                <a16:creationId xmlns:a16="http://schemas.microsoft.com/office/drawing/2014/main" id="{98D6CEFD-EDBC-4F77-A9FC-1460FAF9522F}"/>
+                <a16:creationId xmlns:a16="http://schemas.microsoft.com/office/drawing/2014/main" id="{A412B1DC-4BE3-45D6-93C9-CA99336F1069}"/>
               </a:ext>
             </a:extLst>
           </p:cNvPr>
@@ -18157,7 +18157,7 @@
           <p:cNvPr id="3" name="">
             <a:extLst xmlns:a="http://schemas.openxmlformats.org/drawingml/2006/main">
               <a:ext uri="{FF2B5EF4-FFF2-40B4-BE49-F238E27FC236}">
-                <a16:creationId xmlns:a16="http://schemas.microsoft.com/office/drawing/2014/main" id="{D4949DFB-C6C9-4EB4-B8A5-DC52DE8C0D3F}"/>
+                <a16:creationId xmlns:a16="http://schemas.microsoft.com/office/drawing/2014/main" id="{76276DFD-D1DD-44C2-962B-98FA792D3787}"/>
               </a:ext>
             </a:extLst>
           </p:cNvPr>
@@ -18313,7 +18313,7 @@
           <p:cNvPr id="4" name="">
             <a:extLst xmlns:a="http://schemas.openxmlformats.org/drawingml/2006/main">
               <a:ext uri="{FF2B5EF4-FFF2-40B4-BE49-F238E27FC236}">
-                <a16:creationId xmlns:a16="http://schemas.microsoft.com/office/drawing/2014/main" id="{AD25558F-2B8A-40B7-B379-C2AF90F225BE}"/>
+                <a16:creationId xmlns:a16="http://schemas.microsoft.com/office/drawing/2014/main" id="{F62D08A1-45F7-4CAE-A277-091FACBC91C4}"/>
               </a:ext>
             </a:extLst>
           </p:cNvPr>
@@ -18469,7 +18469,7 @@
           <p:cNvPr id="5" name="">
             <a:extLst xmlns:a="http://schemas.openxmlformats.org/drawingml/2006/main">
               <a:ext uri="{FF2B5EF4-FFF2-40B4-BE49-F238E27FC236}">
-                <a16:creationId xmlns:a16="http://schemas.microsoft.com/office/drawing/2014/main" id="{64243CA2-00B3-4E39-8CCE-1A360E4C883B}"/>
+                <a16:creationId xmlns:a16="http://schemas.microsoft.com/office/drawing/2014/main" id="{91CE139B-48A5-4438-9496-F1B400B75483}"/>
               </a:ext>
             </a:extLst>
           </p:cNvPr>
@@ -18625,7 +18625,7 @@
           <p:cNvPr id="6" name="">
             <a:extLst xmlns:a="http://schemas.openxmlformats.org/drawingml/2006/main">
               <a:ext uri="{FF2B5EF4-FFF2-40B4-BE49-F238E27FC236}">
-                <a16:creationId xmlns:a16="http://schemas.microsoft.com/office/drawing/2014/main" id="{231ABBC0-1885-493C-9B58-FDAD2DF64EC5}"/>
+                <a16:creationId xmlns:a16="http://schemas.microsoft.com/office/drawing/2014/main" id="{3396D908-D510-4707-B15B-79C68CD4E737}"/>
               </a:ext>
             </a:extLst>
           </p:cNvPr>
@@ -18779,7 +18779,7 @@
     </p:spTree>
     <p:extLst>
       <p:ext uri="{BB962C8B-B14F-4D97-AF65-F5344CB8AC3E}">
-        <p14:creationId xmlns:p14="http://schemas.microsoft.com/office/powerpoint/2010/main" val="565119314"/>
+        <p14:creationId xmlns:p14="http://schemas.microsoft.com/office/powerpoint/2010/main" val="383443449"/>
       </p:ext>
     </p:extLst>
   </p:cSld>
@@ -18810,7 +18810,7 @@
           <p:cNvPr id="8" name="">
             <a:extLst xmlns:a="http://schemas.openxmlformats.org/drawingml/2006/main">
               <a:ext uri="{FF2B5EF4-FFF2-40B4-BE49-F238E27FC236}">
-                <a16:creationId xmlns:a16="http://schemas.microsoft.com/office/drawing/2014/main" id="{864BA0DF-E4B6-4148-9DAA-E6023C2D68C1}"/>
+                <a16:creationId xmlns:a16="http://schemas.microsoft.com/office/drawing/2014/main" id="{E60BE154-A887-4830-A389-C48CBB2ECD7A}"/>
               </a:ext>
             </a:extLst>
           </p:cNvPr>
@@ -18966,7 +18966,7 @@
           <p:cNvPr id="2" name="">
             <a:extLst xmlns:a="http://schemas.openxmlformats.org/drawingml/2006/main">
               <a:ext uri="{FF2B5EF4-FFF2-40B4-BE49-F238E27FC236}">
-                <a16:creationId xmlns:a16="http://schemas.microsoft.com/office/drawing/2014/main" id="{BEDE6557-DD59-41F5-8CE7-5CA2FF666BA2}"/>
+                <a16:creationId xmlns:a16="http://schemas.microsoft.com/office/drawing/2014/main" id="{AB2563EF-91F6-4D19-9BFF-67C992639AB4}"/>
               </a:ext>
             </a:extLst>
           </p:cNvPr>
@@ -19122,7 +19122,7 @@
           <p:cNvPr id="3" name="">
             <a:extLst xmlns:a="http://schemas.openxmlformats.org/drawingml/2006/main">
               <a:ext uri="{FF2B5EF4-FFF2-40B4-BE49-F238E27FC236}">
-                <a16:creationId xmlns:a16="http://schemas.microsoft.com/office/drawing/2014/main" id="{410F510C-ED30-440C-8754-3DB64F2C0FC4}"/>
+                <a16:creationId xmlns:a16="http://schemas.microsoft.com/office/drawing/2014/main" id="{2BD2F786-179F-4868-91A6-FE5DEDF2CACC}"/>
               </a:ext>
             </a:extLst>
           </p:cNvPr>
@@ -19278,7 +19278,7 @@
           <p:cNvPr id="4" name="">
             <a:extLst xmlns:a="http://schemas.openxmlformats.org/drawingml/2006/main">
               <a:ext uri="{FF2B5EF4-FFF2-40B4-BE49-F238E27FC236}">
-                <a16:creationId xmlns:a16="http://schemas.microsoft.com/office/drawing/2014/main" id="{37D8D4B6-4117-47A0-8B5B-8CF59632A53D}"/>
+                <a16:creationId xmlns:a16="http://schemas.microsoft.com/office/drawing/2014/main" id="{506ED450-C78A-411D-B5A9-817AD40247AE}"/>
               </a:ext>
             </a:extLst>
           </p:cNvPr>
@@ -19434,7 +19434,7 @@
           <p:cNvPr id="5" name="">
             <a:extLst xmlns:a="http://schemas.openxmlformats.org/drawingml/2006/main">
               <a:ext uri="{FF2B5EF4-FFF2-40B4-BE49-F238E27FC236}">
-                <a16:creationId xmlns:a16="http://schemas.microsoft.com/office/drawing/2014/main" id="{5C186AC4-2BBD-4D11-920B-F2C2DC5CB6C5}"/>
+                <a16:creationId xmlns:a16="http://schemas.microsoft.com/office/drawing/2014/main" id="{2F169A4A-0BA7-424B-9D24-71EBD7015DED}"/>
               </a:ext>
             </a:extLst>
           </p:cNvPr>
@@ -19590,7 +19590,7 @@
           <p:cNvPr id="6" name="">
             <a:extLst xmlns:a="http://schemas.openxmlformats.org/drawingml/2006/main">
               <a:ext uri="{FF2B5EF4-FFF2-40B4-BE49-F238E27FC236}">
-                <a16:creationId xmlns:a16="http://schemas.microsoft.com/office/drawing/2014/main" id="{7036C90F-8200-4D1D-B459-E8AE02EB344A}"/>
+                <a16:creationId xmlns:a16="http://schemas.microsoft.com/office/drawing/2014/main" id="{C8F28866-DD55-435F-9C3F-DFE70199EB90}"/>
               </a:ext>
             </a:extLst>
           </p:cNvPr>
@@ -19746,7 +19746,7 @@
           <p:cNvPr id="7" name="">
             <a:extLst xmlns:a="http://schemas.openxmlformats.org/drawingml/2006/main">
               <a:ext uri="{FF2B5EF4-FFF2-40B4-BE49-F238E27FC236}">
-                <a16:creationId xmlns:a16="http://schemas.microsoft.com/office/drawing/2014/main" id="{226AF496-940F-4AE0-B095-8BAA994879E1}"/>
+                <a16:creationId xmlns:a16="http://schemas.microsoft.com/office/drawing/2014/main" id="{C986D288-CFD3-44F4-9E8E-24A63B9B2F2B}"/>
               </a:ext>
             </a:extLst>
           </p:cNvPr>
@@ -19900,7 +19900,7 @@
     </p:spTree>
     <p:extLst>
       <p:ext uri="{BB962C8B-B14F-4D97-AF65-F5344CB8AC3E}">
-        <p14:creationId xmlns:p14="http://schemas.microsoft.com/office/powerpoint/2010/main" val="530582383"/>
+        <p14:creationId xmlns:p14="http://schemas.microsoft.com/office/powerpoint/2010/main" val="1964532355"/>
       </p:ext>
     </p:extLst>
   </p:cSld>
@@ -19931,7 +19931,7 @@
           <p:cNvPr id="7" name="">
             <a:extLst xmlns:a="http://schemas.openxmlformats.org/drawingml/2006/main">
               <a:ext uri="{FF2B5EF4-FFF2-40B4-BE49-F238E27FC236}">
-                <a16:creationId xmlns:a16="http://schemas.microsoft.com/office/drawing/2014/main" id="{DC28F9AA-28F2-44B9-988E-8C5FD35B19B5}"/>
+                <a16:creationId xmlns:a16="http://schemas.microsoft.com/office/drawing/2014/main" id="{437C50F1-5AC8-4AD6-BE40-8D13651C1C84}"/>
               </a:ext>
             </a:extLst>
           </p:cNvPr>
@@ -20087,7 +20087,7 @@
           <p:cNvPr id="2" name="">
             <a:extLst xmlns:a="http://schemas.openxmlformats.org/drawingml/2006/main">
               <a:ext uri="{FF2B5EF4-FFF2-40B4-BE49-F238E27FC236}">
-                <a16:creationId xmlns:a16="http://schemas.microsoft.com/office/drawing/2014/main" id="{AD49C4F8-FFA4-48BC-8355-FC1E51B0B321}"/>
+                <a16:creationId xmlns:a16="http://schemas.microsoft.com/office/drawing/2014/main" id="{251CDF09-6BD5-4152-AE94-FB32C7BDA1C0}"/>
               </a:ext>
             </a:extLst>
           </p:cNvPr>
@@ -20243,7 +20243,7 @@
           <p:cNvPr id="3" name="">
             <a:extLst xmlns:a="http://schemas.openxmlformats.org/drawingml/2006/main">
               <a:ext uri="{FF2B5EF4-FFF2-40B4-BE49-F238E27FC236}">
-                <a16:creationId xmlns:a16="http://schemas.microsoft.com/office/drawing/2014/main" id="{B462AEE9-2063-4458-8D1A-3B0E4347B66D}"/>
+                <a16:creationId xmlns:a16="http://schemas.microsoft.com/office/drawing/2014/main" id="{2E4A41AC-DD59-4714-ABC7-A9AF56C786A7}"/>
               </a:ext>
             </a:extLst>
           </p:cNvPr>
@@ -20399,7 +20399,7 @@
           <p:cNvPr id="4" name="">
             <a:extLst xmlns:a="http://schemas.openxmlformats.org/drawingml/2006/main">
               <a:ext uri="{FF2B5EF4-FFF2-40B4-BE49-F238E27FC236}">
-                <a16:creationId xmlns:a16="http://schemas.microsoft.com/office/drawing/2014/main" id="{ACDF2B89-A35B-4773-9A1C-DC37ACD19719}"/>
+                <a16:creationId xmlns:a16="http://schemas.microsoft.com/office/drawing/2014/main" id="{2AD2E035-83A3-44D0-B7AE-4A97DFE1F6A3}"/>
               </a:ext>
             </a:extLst>
           </p:cNvPr>
@@ -20555,7 +20555,7 @@
           <p:cNvPr id="5" name="">
             <a:extLst xmlns:a="http://schemas.openxmlformats.org/drawingml/2006/main">
               <a:ext uri="{FF2B5EF4-FFF2-40B4-BE49-F238E27FC236}">
-                <a16:creationId xmlns:a16="http://schemas.microsoft.com/office/drawing/2014/main" id="{57CCAD74-3386-4370-95E0-90CCBC60F192}"/>
+                <a16:creationId xmlns:a16="http://schemas.microsoft.com/office/drawing/2014/main" id="{F3530225-86BF-4489-8F09-1D3942F24ACC}"/>
               </a:ext>
             </a:extLst>
           </p:cNvPr>
@@ -20711,7 +20711,7 @@
           <p:cNvPr id="6" name="">
             <a:extLst xmlns:a="http://schemas.openxmlformats.org/drawingml/2006/main">
               <a:ext uri="{FF2B5EF4-FFF2-40B4-BE49-F238E27FC236}">
-                <a16:creationId xmlns:a16="http://schemas.microsoft.com/office/drawing/2014/main" id="{F7C3E90B-B785-4B74-A04A-CB63265E46C5}"/>
+                <a16:creationId xmlns:a16="http://schemas.microsoft.com/office/drawing/2014/main" id="{91751A7B-4F68-4A09-905F-96A5A8B89195}"/>
               </a:ext>
             </a:extLst>
           </p:cNvPr>
@@ -20865,7 +20865,7 @@
     </p:spTree>
     <p:extLst>
       <p:ext uri="{BB962C8B-B14F-4D97-AF65-F5344CB8AC3E}">
-        <p14:creationId xmlns:p14="http://schemas.microsoft.com/office/powerpoint/2010/main" val="1701139382"/>
+        <p14:creationId xmlns:p14="http://schemas.microsoft.com/office/powerpoint/2010/main" val="736898704"/>
       </p:ext>
     </p:extLst>
   </p:cSld>
@@ -20896,7 +20896,7 @@
           <p:cNvPr id="14" name="">
             <a:extLst xmlns:a="http://schemas.openxmlformats.org/drawingml/2006/main">
               <a:ext uri="{FF2B5EF4-FFF2-40B4-BE49-F238E27FC236}">
-                <a16:creationId xmlns:a16="http://schemas.microsoft.com/office/drawing/2014/main" id="{01EAA54B-CA4D-401A-B03C-1CFF4BE5BFD5}"/>
+                <a16:creationId xmlns:a16="http://schemas.microsoft.com/office/drawing/2014/main" id="{1F1A4EFB-8581-4525-A7E7-5CD09F3B8CEE}"/>
               </a:ext>
             </a:extLst>
           </p:cNvPr>
@@ -20927,7 +20927,7 @@
           <p:cNvPr id="13" name="">
             <a:extLst xmlns:a="http://schemas.openxmlformats.org/drawingml/2006/main">
               <a:ext uri="{FF2B5EF4-FFF2-40B4-BE49-F238E27FC236}">
-                <a16:creationId xmlns:a16="http://schemas.microsoft.com/office/drawing/2014/main" id="{030CF32A-972F-45B1-A1C1-31F497BDAA8A}"/>
+                <a16:creationId xmlns:a16="http://schemas.microsoft.com/office/drawing/2014/main" id="{69F99A01-3FD6-46A0-8561-5DB414EA77D7}"/>
               </a:ext>
             </a:extLst>
           </p:cNvPr>
@@ -20958,7 +20958,7 @@
           <p:cNvPr id="12" name="">
             <a:extLst xmlns:a="http://schemas.openxmlformats.org/drawingml/2006/main">
               <a:ext uri="{FF2B5EF4-FFF2-40B4-BE49-F238E27FC236}">
-                <a16:creationId xmlns:a16="http://schemas.microsoft.com/office/drawing/2014/main" id="{2DDAF564-759F-4D9B-B1C2-757878CF9BE7}"/>
+                <a16:creationId xmlns:a16="http://schemas.microsoft.com/office/drawing/2014/main" id="{7421691C-6DCA-4A6E-B6C2-3B0646BD0FAA}"/>
               </a:ext>
             </a:extLst>
           </p:cNvPr>
@@ -20989,7 +20989,7 @@
           <p:cNvPr id="11" name="">
             <a:extLst xmlns:a="http://schemas.openxmlformats.org/drawingml/2006/main">
               <a:ext uri="{FF2B5EF4-FFF2-40B4-BE49-F238E27FC236}">
-                <a16:creationId xmlns:a16="http://schemas.microsoft.com/office/drawing/2014/main" id="{AC201750-2DDB-4E3C-8211-7CB52AE8D7D4}"/>
+                <a16:creationId xmlns:a16="http://schemas.microsoft.com/office/drawing/2014/main" id="{1B249ED4-D35C-4F17-8F72-9D56366A8A5F}"/>
               </a:ext>
             </a:extLst>
           </p:cNvPr>
@@ -21022,7 +21022,7 @@
           <p:cNvPr id="10" name="">
             <a:extLst xmlns:a="http://schemas.openxmlformats.org/drawingml/2006/main">
               <a:ext uri="{FF2B5EF4-FFF2-40B4-BE49-F238E27FC236}">
-                <a16:creationId xmlns:a16="http://schemas.microsoft.com/office/drawing/2014/main" id="{C673810D-D43A-4C4B-80A2-38D6EFD03FE0}"/>
+                <a16:creationId xmlns:a16="http://schemas.microsoft.com/office/drawing/2014/main" id="{2AADDE59-BA6E-48BD-A1CA-044613A1E71E}"/>
               </a:ext>
             </a:extLst>
           </p:cNvPr>
@@ -21055,7 +21055,7 @@
           <p:cNvPr id="16" name="">
             <a:extLst xmlns:a="http://schemas.openxmlformats.org/drawingml/2006/main">
               <a:ext uri="{FF2B5EF4-FFF2-40B4-BE49-F238E27FC236}">
-                <a16:creationId xmlns:a16="http://schemas.microsoft.com/office/drawing/2014/main" id="{AE444ADC-42D5-4386-ADB5-47BDD41FD6FC}"/>
+                <a16:creationId xmlns:a16="http://schemas.microsoft.com/office/drawing/2014/main" id="{89CF6667-D794-4C12-9020-4B78D8FBD124}"/>
               </a:ext>
             </a:extLst>
           </p:cNvPr>
@@ -21211,7 +21211,7 @@
           <p:cNvPr id="2" name="">
             <a:extLst xmlns:a="http://schemas.openxmlformats.org/drawingml/2006/main">
               <a:ext uri="{FF2B5EF4-FFF2-40B4-BE49-F238E27FC236}">
-                <a16:creationId xmlns:a16="http://schemas.microsoft.com/office/drawing/2014/main" id="{DE9ACBA2-B4FC-44F1-B0BC-978901F74A88}"/>
+                <a16:creationId xmlns:a16="http://schemas.microsoft.com/office/drawing/2014/main" id="{9F703E46-913E-4ECF-8B63-0F9D9A93650B}"/>
               </a:ext>
             </a:extLst>
           </p:cNvPr>
@@ -21367,7 +21367,7 @@
           <p:cNvPr id="3" name="">
             <a:extLst xmlns:a="http://schemas.openxmlformats.org/drawingml/2006/main">
               <a:ext uri="{FF2B5EF4-FFF2-40B4-BE49-F238E27FC236}">
-                <a16:creationId xmlns:a16="http://schemas.microsoft.com/office/drawing/2014/main" id="{1C5ED2D5-26D9-4F14-A3F2-B890BF603F9B}"/>
+                <a16:creationId xmlns:a16="http://schemas.microsoft.com/office/drawing/2014/main" id="{CC40F308-0559-47D7-BD5C-847567E166F2}"/>
               </a:ext>
             </a:extLst>
           </p:cNvPr>
@@ -21550,7 +21550,7 @@
           <p:cNvPr id="4" name="">
             <a:extLst xmlns:a="http://schemas.openxmlformats.org/drawingml/2006/main">
               <a:ext uri="{FF2B5EF4-FFF2-40B4-BE49-F238E27FC236}">
-                <a16:creationId xmlns:a16="http://schemas.microsoft.com/office/drawing/2014/main" id="{4B2F2571-3BF1-44BA-9B9C-4989C8BDD8C1}"/>
+                <a16:creationId xmlns:a16="http://schemas.microsoft.com/office/drawing/2014/main" id="{47C812DA-7FDD-4F81-9F8F-0752A655EE7A}"/>
               </a:ext>
             </a:extLst>
           </p:cNvPr>
@@ -21733,7 +21733,7 @@
           <p:cNvPr id="5" name="">
             <a:extLst xmlns:a="http://schemas.openxmlformats.org/drawingml/2006/main">
               <a:ext uri="{FF2B5EF4-FFF2-40B4-BE49-F238E27FC236}">
-                <a16:creationId xmlns:a16="http://schemas.microsoft.com/office/drawing/2014/main" id="{ADB4EA99-9E20-4953-A11C-0C2631856C24}"/>
+                <a16:creationId xmlns:a16="http://schemas.microsoft.com/office/drawing/2014/main" id="{0467089B-1658-416A-AB9C-4D01FDB068A0}"/>
               </a:ext>
             </a:extLst>
           </p:cNvPr>
@@ -21916,7 +21916,7 @@
           <p:cNvPr id="6" name="">
             <a:extLst xmlns:a="http://schemas.openxmlformats.org/drawingml/2006/main">
               <a:ext uri="{FF2B5EF4-FFF2-40B4-BE49-F238E27FC236}">
-                <a16:creationId xmlns:a16="http://schemas.microsoft.com/office/drawing/2014/main" id="{436D158C-49EF-4522-9B14-8C492CE80A93}"/>
+                <a16:creationId xmlns:a16="http://schemas.microsoft.com/office/drawing/2014/main" id="{5CDF0D42-1ECA-400B-8A47-87CF3CB629AF}"/>
               </a:ext>
             </a:extLst>
           </p:cNvPr>
@@ -22099,7 +22099,7 @@
           <p:cNvPr id="7" name="">
             <a:extLst xmlns:a="http://schemas.openxmlformats.org/drawingml/2006/main">
               <a:ext uri="{FF2B5EF4-FFF2-40B4-BE49-F238E27FC236}">
-                <a16:creationId xmlns:a16="http://schemas.microsoft.com/office/drawing/2014/main" id="{0808F0D5-EE8B-4A08-8CE1-B1F52E6CF692}"/>
+                <a16:creationId xmlns:a16="http://schemas.microsoft.com/office/drawing/2014/main" id="{6071A87C-90B1-4273-A489-CF9EFEBB246D}"/>
               </a:ext>
             </a:extLst>
           </p:cNvPr>
@@ -22282,7 +22282,7 @@
           <p:cNvPr id="8" name="">
             <a:extLst xmlns:a="http://schemas.openxmlformats.org/drawingml/2006/main">
               <a:ext uri="{FF2B5EF4-FFF2-40B4-BE49-F238E27FC236}">
-                <a16:creationId xmlns:a16="http://schemas.microsoft.com/office/drawing/2014/main" id="{071A3F62-D8EB-4963-8C1F-4503510956C1}"/>
+                <a16:creationId xmlns:a16="http://schemas.microsoft.com/office/drawing/2014/main" id="{BF5E7021-45DD-4AE1-A495-77DBF9749A98}"/>
               </a:ext>
             </a:extLst>
           </p:cNvPr>
@@ -22465,7 +22465,7 @@
           <p:cNvPr id="9" name="">
             <a:extLst xmlns:a="http://schemas.openxmlformats.org/drawingml/2006/main">
               <a:ext uri="{FF2B5EF4-FFF2-40B4-BE49-F238E27FC236}">
-                <a16:creationId xmlns:a16="http://schemas.microsoft.com/office/drawing/2014/main" id="{B1A12A15-E8F1-4108-8EA8-064ED66EA3CA}"/>
+                <a16:creationId xmlns:a16="http://schemas.microsoft.com/office/drawing/2014/main" id="{E5493C89-7C29-4EE8-BAEC-8D1387B6A5F1}"/>
               </a:ext>
             </a:extLst>
           </p:cNvPr>
@@ -22648,7 +22648,7 @@
           <p:cNvPr id="15" name="">
             <a:extLst xmlns:a="http://schemas.openxmlformats.org/drawingml/2006/main">
               <a:ext uri="{FF2B5EF4-FFF2-40B4-BE49-F238E27FC236}">
-                <a16:creationId xmlns:a16="http://schemas.microsoft.com/office/drawing/2014/main" id="{5A3D72A1-59A4-46F5-9023-122661AFE49E}"/>
+                <a16:creationId xmlns:a16="http://schemas.microsoft.com/office/drawing/2014/main" id="{2636B424-B62E-422A-9B23-1E078F283A45}"/>
               </a:ext>
             </a:extLst>
           </p:cNvPr>
@@ -22802,7 +22802,7 @@
     </p:spTree>
     <p:extLst>
       <p:ext uri="{BB962C8B-B14F-4D97-AF65-F5344CB8AC3E}">
-        <p14:creationId xmlns:p14="http://schemas.microsoft.com/office/powerpoint/2010/main" val="1310355305"/>
+        <p14:creationId xmlns:p14="http://schemas.microsoft.com/office/powerpoint/2010/main" val="1825610851"/>
       </p:ext>
     </p:extLst>
   </p:cSld>
@@ -22833,7 +22833,7 @@
           <p:cNvPr id="8" name="">
             <a:extLst xmlns:a="http://schemas.openxmlformats.org/drawingml/2006/main">
               <a:ext uri="{FF2B5EF4-FFF2-40B4-BE49-F238E27FC236}">
-                <a16:creationId xmlns:a16="http://schemas.microsoft.com/office/drawing/2014/main" id="{0B813F33-FB29-4C6C-B9B0-953AE13779B7}"/>
+                <a16:creationId xmlns:a16="http://schemas.microsoft.com/office/drawing/2014/main" id="{21E79B30-7966-411E-BC59-930F020DBA9C}"/>
               </a:ext>
             </a:extLst>
           </p:cNvPr>
@@ -22989,7 +22989,7 @@
           <p:cNvPr id="2" name="">
             <a:extLst xmlns:a="http://schemas.openxmlformats.org/drawingml/2006/main">
               <a:ext uri="{FF2B5EF4-FFF2-40B4-BE49-F238E27FC236}">
-                <a16:creationId xmlns:a16="http://schemas.microsoft.com/office/drawing/2014/main" id="{FC120687-0605-41A0-8BE2-63EDDA66F50A}"/>
+                <a16:creationId xmlns:a16="http://schemas.microsoft.com/office/drawing/2014/main" id="{6EB47232-D7EF-4B19-B13B-541560257031}"/>
               </a:ext>
             </a:extLst>
           </p:cNvPr>
@@ -23145,7 +23145,7 @@
           <p:cNvPr id="3" name="">
             <a:extLst xmlns:a="http://schemas.openxmlformats.org/drawingml/2006/main">
               <a:ext uri="{FF2B5EF4-FFF2-40B4-BE49-F238E27FC236}">
-                <a16:creationId xmlns:a16="http://schemas.microsoft.com/office/drawing/2014/main" id="{2A946365-170C-424E-90C4-A354A7954A0F}"/>
+                <a16:creationId xmlns:a16="http://schemas.microsoft.com/office/drawing/2014/main" id="{33424434-45E1-4A51-BFD8-62125C0CE348}"/>
               </a:ext>
             </a:extLst>
           </p:cNvPr>
@@ -23301,7 +23301,7 @@
           <p:cNvPr id="4" name="">
             <a:extLst xmlns:a="http://schemas.openxmlformats.org/drawingml/2006/main">
               <a:ext uri="{FF2B5EF4-FFF2-40B4-BE49-F238E27FC236}">
-                <a16:creationId xmlns:a16="http://schemas.microsoft.com/office/drawing/2014/main" id="{98E3501C-D5FA-4002-865D-79FD511C9D01}"/>
+                <a16:creationId xmlns:a16="http://schemas.microsoft.com/office/drawing/2014/main" id="{97159CCE-8B37-44AD-839C-7473558E61DC}"/>
               </a:ext>
             </a:extLst>
           </p:cNvPr>
@@ -23457,7 +23457,7 @@
           <p:cNvPr id="5" name="">
             <a:extLst xmlns:a="http://schemas.openxmlformats.org/drawingml/2006/main">
               <a:ext uri="{FF2B5EF4-FFF2-40B4-BE49-F238E27FC236}">
-                <a16:creationId xmlns:a16="http://schemas.microsoft.com/office/drawing/2014/main" id="{8B239011-D688-4853-9958-957950E5BCD7}"/>
+                <a16:creationId xmlns:a16="http://schemas.microsoft.com/office/drawing/2014/main" id="{85C89E64-4909-4E09-A877-15E5F73318D9}"/>
               </a:ext>
             </a:extLst>
           </p:cNvPr>
@@ -23613,7 +23613,7 @@
           <p:cNvPr id="6" name="">
             <a:extLst xmlns:a="http://schemas.openxmlformats.org/drawingml/2006/main">
               <a:ext uri="{FF2B5EF4-FFF2-40B4-BE49-F238E27FC236}">
-                <a16:creationId xmlns:a16="http://schemas.microsoft.com/office/drawing/2014/main" id="{1E84126C-36C1-4D5C-9137-AC96AFDC6077}"/>
+                <a16:creationId xmlns:a16="http://schemas.microsoft.com/office/drawing/2014/main" id="{7C64C26E-1646-47D0-BE20-03CCBCF6EAC6}"/>
               </a:ext>
             </a:extLst>
           </p:cNvPr>
@@ -23769,7 +23769,7 @@
           <p:cNvPr id="7" name="">
             <a:extLst xmlns:a="http://schemas.openxmlformats.org/drawingml/2006/main">
               <a:ext uri="{FF2B5EF4-FFF2-40B4-BE49-F238E27FC236}">
-                <a16:creationId xmlns:a16="http://schemas.microsoft.com/office/drawing/2014/main" id="{0979A12A-2F13-4F60-A37D-46E11EAC8D41}"/>
+                <a16:creationId xmlns:a16="http://schemas.microsoft.com/office/drawing/2014/main" id="{D19E84A6-860C-46AF-A430-7DE57044E0AB}"/>
               </a:ext>
             </a:extLst>
           </p:cNvPr>
@@ -23923,7 +23923,7 @@
     </p:spTree>
     <p:extLst>
       <p:ext uri="{BB962C8B-B14F-4D97-AF65-F5344CB8AC3E}">
-        <p14:creationId xmlns:p14="http://schemas.microsoft.com/office/powerpoint/2010/main" val="734485505"/>
+        <p14:creationId xmlns:p14="http://schemas.microsoft.com/office/powerpoint/2010/main" val="496786869"/>
       </p:ext>
     </p:extLst>
   </p:cSld>
@@ -23954,7 +23954,7 @@
           <p:cNvPr id="5" name="">
             <a:extLst xmlns:a="http://schemas.openxmlformats.org/drawingml/2006/main">
               <a:ext uri="{FF2B5EF4-FFF2-40B4-BE49-F238E27FC236}">
-                <a16:creationId xmlns:a16="http://schemas.microsoft.com/office/drawing/2014/main" id="{837F69D9-884D-47BC-A94F-72FA526558A0}"/>
+                <a16:creationId xmlns:a16="http://schemas.microsoft.com/office/drawing/2014/main" id="{CF957890-A175-4523-92E6-874941293F78}"/>
               </a:ext>
             </a:extLst>
           </p:cNvPr>
@@ -24110,7 +24110,7 @@
           <p:cNvPr id="2" name="">
             <a:extLst xmlns:a="http://schemas.openxmlformats.org/drawingml/2006/main">
               <a:ext uri="{FF2B5EF4-FFF2-40B4-BE49-F238E27FC236}">
-                <a16:creationId xmlns:a16="http://schemas.microsoft.com/office/drawing/2014/main" id="{B85D24AC-25E0-42EA-B861-747B49249BA0}"/>
+                <a16:creationId xmlns:a16="http://schemas.microsoft.com/office/drawing/2014/main" id="{BF24EAB7-AE2E-4988-9725-27929D987552}"/>
               </a:ext>
             </a:extLst>
           </p:cNvPr>
@@ -24266,7 +24266,7 @@
           <p:cNvPr id="3" name="">
             <a:extLst xmlns:a="http://schemas.openxmlformats.org/drawingml/2006/main">
               <a:ext uri="{FF2B5EF4-FFF2-40B4-BE49-F238E27FC236}">
-                <a16:creationId xmlns:a16="http://schemas.microsoft.com/office/drawing/2014/main" id="{D8526EC0-110B-4A89-B7CA-148199969EB9}"/>
+                <a16:creationId xmlns:a16="http://schemas.microsoft.com/office/drawing/2014/main" id="{AD8053D4-6348-4BAB-BF96-138302E90E2D}"/>
               </a:ext>
             </a:extLst>
           </p:cNvPr>
@@ -25207,7 +25207,7 @@
           <p:cNvPr id="4" name="">
             <a:extLst xmlns:a="http://schemas.openxmlformats.org/drawingml/2006/main">
               <a:ext uri="{FF2B5EF4-FFF2-40B4-BE49-F238E27FC236}">
-                <a16:creationId xmlns:a16="http://schemas.microsoft.com/office/drawing/2014/main" id="{DDE995F7-9FE9-48EA-A79C-AE6B647F5B9B}"/>
+                <a16:creationId xmlns:a16="http://schemas.microsoft.com/office/drawing/2014/main" id="{4E12D691-5907-449F-928F-7F0834DD6361}"/>
               </a:ext>
             </a:extLst>
           </p:cNvPr>
@@ -25361,7 +25361,7 @@
     </p:spTree>
     <p:extLst>
       <p:ext uri="{BB962C8B-B14F-4D97-AF65-F5344CB8AC3E}">
-        <p14:creationId xmlns:p14="http://schemas.microsoft.com/office/powerpoint/2010/main" val="687052442"/>
+        <p14:creationId xmlns:p14="http://schemas.microsoft.com/office/powerpoint/2010/main" val="1916681478"/>
       </p:ext>
     </p:extLst>
   </p:cSld>
@@ -25392,7 +25392,7 @@
           <p:cNvPr id="5" name="">
             <a:extLst xmlns:a="http://schemas.openxmlformats.org/drawingml/2006/main">
               <a:ext uri="{FF2B5EF4-FFF2-40B4-BE49-F238E27FC236}">
-                <a16:creationId xmlns:a16="http://schemas.microsoft.com/office/drawing/2014/main" id="{6DE14204-5E5E-4683-BF2F-9EEDD55BF6DE}"/>
+                <a16:creationId xmlns:a16="http://schemas.microsoft.com/office/drawing/2014/main" id="{E4792D6C-9589-46A9-A46E-C70506C07E36}"/>
               </a:ext>
             </a:extLst>
           </p:cNvPr>
@@ -25548,7 +25548,7 @@
           <p:cNvPr id="2" name="">
             <a:extLst xmlns:a="http://schemas.openxmlformats.org/drawingml/2006/main">
               <a:ext uri="{FF2B5EF4-FFF2-40B4-BE49-F238E27FC236}">
-                <a16:creationId xmlns:a16="http://schemas.microsoft.com/office/drawing/2014/main" id="{32362410-02A5-4A93-9BD3-ECB0A1A668C9}"/>
+                <a16:creationId xmlns:a16="http://schemas.microsoft.com/office/drawing/2014/main" id="{2BCBA04A-CA5E-451E-ABE3-A27386308BC1}"/>
               </a:ext>
             </a:extLst>
           </p:cNvPr>
@@ -25704,7 +25704,7 @@
           <p:cNvPr id="3" name="">
             <a:extLst xmlns:a="http://schemas.openxmlformats.org/drawingml/2006/main">
               <a:ext uri="{FF2B5EF4-FFF2-40B4-BE49-F238E27FC236}">
-                <a16:creationId xmlns:a16="http://schemas.microsoft.com/office/drawing/2014/main" id="{AEC035D1-9278-4BCD-89CF-9DD5191D8C27}"/>
+                <a16:creationId xmlns:a16="http://schemas.microsoft.com/office/drawing/2014/main" id="{1F022175-6FA5-4113-86EF-5FF8FA0AE457}"/>
               </a:ext>
             </a:extLst>
           </p:cNvPr>
@@ -26645,7 +26645,7 @@
           <p:cNvPr id="4" name="">
             <a:extLst xmlns:a="http://schemas.openxmlformats.org/drawingml/2006/main">
               <a:ext uri="{FF2B5EF4-FFF2-40B4-BE49-F238E27FC236}">
-                <a16:creationId xmlns:a16="http://schemas.microsoft.com/office/drawing/2014/main" id="{64D1F934-FAE3-4DB7-AA54-F726582037BA}"/>
+                <a16:creationId xmlns:a16="http://schemas.microsoft.com/office/drawing/2014/main" id="{469B3752-0FC8-4F0A-8886-1EAA712D3D7B}"/>
               </a:ext>
             </a:extLst>
           </p:cNvPr>
@@ -26799,7 +26799,7 @@
     </p:spTree>
     <p:extLst>
       <p:ext uri="{BB962C8B-B14F-4D97-AF65-F5344CB8AC3E}">
-        <p14:creationId xmlns:p14="http://schemas.microsoft.com/office/powerpoint/2010/main" val="868915553"/>
+        <p14:creationId xmlns:p14="http://schemas.microsoft.com/office/powerpoint/2010/main" val="430434283"/>
       </p:ext>
     </p:extLst>
   </p:cSld>
@@ -26830,7 +26830,7 @@
           <p:cNvPr id="5" name="">
             <a:extLst xmlns:a="http://schemas.openxmlformats.org/drawingml/2006/main">
               <a:ext uri="{FF2B5EF4-FFF2-40B4-BE49-F238E27FC236}">
-                <a16:creationId xmlns:a16="http://schemas.microsoft.com/office/drawing/2014/main" id="{2F976D6A-9F72-4154-B0E1-80E223204F8B}"/>
+                <a16:creationId xmlns:a16="http://schemas.microsoft.com/office/drawing/2014/main" id="{C6E39535-6072-4F8D-9ADF-D6360EF066AA}"/>
               </a:ext>
             </a:extLst>
           </p:cNvPr>
@@ -26986,7 +26986,7 @@
           <p:cNvPr id="2" name="">
             <a:extLst xmlns:a="http://schemas.openxmlformats.org/drawingml/2006/main">
               <a:ext uri="{FF2B5EF4-FFF2-40B4-BE49-F238E27FC236}">
-                <a16:creationId xmlns:a16="http://schemas.microsoft.com/office/drawing/2014/main" id="{5285BA45-4F49-4786-A130-9A84C8CA3F7C}"/>
+                <a16:creationId xmlns:a16="http://schemas.microsoft.com/office/drawing/2014/main" id="{9B89996C-8C96-4F7E-993D-11533BBFAFB5}"/>
               </a:ext>
             </a:extLst>
           </p:cNvPr>
@@ -27142,7 +27142,7 @@
           <p:cNvPr id="3" name="">
             <a:extLst xmlns:a="http://schemas.openxmlformats.org/drawingml/2006/main">
               <a:ext uri="{FF2B5EF4-FFF2-40B4-BE49-F238E27FC236}">
-                <a16:creationId xmlns:a16="http://schemas.microsoft.com/office/drawing/2014/main" id="{3704C0CF-DA2B-4F1E-92E6-6A5E77FB02B4}"/>
+                <a16:creationId xmlns:a16="http://schemas.microsoft.com/office/drawing/2014/main" id="{936BA309-0AC3-4EEA-BE9F-7F089D5010EE}"/>
               </a:ext>
             </a:extLst>
           </p:cNvPr>
@@ -28083,7 +28083,7 @@
           <p:cNvPr id="4" name="">
             <a:extLst xmlns:a="http://schemas.openxmlformats.org/drawingml/2006/main">
               <a:ext uri="{FF2B5EF4-FFF2-40B4-BE49-F238E27FC236}">
-                <a16:creationId xmlns:a16="http://schemas.microsoft.com/office/drawing/2014/main" id="{F13D4248-BAFD-40C0-B241-0ECA3E9B1C74}"/>
+                <a16:creationId xmlns:a16="http://schemas.microsoft.com/office/drawing/2014/main" id="{D8D060B3-8F8C-40A7-9391-60D49AF616EE}"/>
               </a:ext>
             </a:extLst>
           </p:cNvPr>
@@ -28237,7 +28237,7 @@
     </p:spTree>
     <p:extLst>
       <p:ext uri="{BB962C8B-B14F-4D97-AF65-F5344CB8AC3E}">
-        <p14:creationId xmlns:p14="http://schemas.microsoft.com/office/powerpoint/2010/main" val="2092535502"/>
+        <p14:creationId xmlns:p14="http://schemas.microsoft.com/office/powerpoint/2010/main" val="2031062820"/>
       </p:ext>
     </p:extLst>
   </p:cSld>

--- a/deliverables/CycleTwin_pitch_deck.pptx
+++ b/deliverables/CycleTwin_pitch_deck.pptx
@@ -2,31 +2,32 @@
 <file path=ppt/presentation.xml><?xml version="1.0" encoding="utf-8"?>
 <p:presentation xmlns:p="http://schemas.openxmlformats.org/presentationml/2006/main">
   <p:sldMasterIdLst>
-    <p:sldMasterId xmlns:r="http://schemas.openxmlformats.org/officeDocument/2006/relationships" id="2147483648" r:id="R5a4f0b75980f426a"/>
+    <p:sldMasterId xmlns:r="http://schemas.openxmlformats.org/officeDocument/2006/relationships" id="2147483648" r:id="R5a7beded8d4843f5"/>
   </p:sldMasterIdLst>
   <p:notesMasterIdLst>
-    <p:notesMasterId xmlns:r="http://schemas.openxmlformats.org/officeDocument/2006/relationships" r:id="Rc6478a51685648fd"/>
+    <p:notesMasterId xmlns:r="http://schemas.openxmlformats.org/officeDocument/2006/relationships" r:id="R6df70b4d45d34c82"/>
   </p:notesMasterIdLst>
   <p:sldIdLst>
-    <p:sldId xmlns:r="http://schemas.openxmlformats.org/officeDocument/2006/relationships" id="256" r:id="Rdbc00f4b37ca4f93"/>
-    <p:sldId xmlns:r="http://schemas.openxmlformats.org/officeDocument/2006/relationships" id="257" r:id="R29d3cace6621486b"/>
-    <p:sldId xmlns:r="http://schemas.openxmlformats.org/officeDocument/2006/relationships" id="258" r:id="Rd7f2df4460bc43e3"/>
-    <p:sldId xmlns:r="http://schemas.openxmlformats.org/officeDocument/2006/relationships" id="259" r:id="R6c3cbe465c25474e"/>
-    <p:sldId xmlns:r="http://schemas.openxmlformats.org/officeDocument/2006/relationships" id="260" r:id="Rf3d9a312ac5c41a4"/>
-    <p:sldId xmlns:r="http://schemas.openxmlformats.org/officeDocument/2006/relationships" id="261" r:id="R9dabf320297640fd"/>
-    <p:sldId xmlns:r="http://schemas.openxmlformats.org/officeDocument/2006/relationships" id="262" r:id="R143b4554a2b44463"/>
-    <p:sldId xmlns:r="http://schemas.openxmlformats.org/officeDocument/2006/relationships" id="263" r:id="R4f374b8a6be44475"/>
-    <p:sldId xmlns:r="http://schemas.openxmlformats.org/officeDocument/2006/relationships" id="264" r:id="R47613dfc89d64960"/>
-    <p:sldId xmlns:r="http://schemas.openxmlformats.org/officeDocument/2006/relationships" id="265" r:id="R5f751f737d39492b"/>
-    <p:sldId xmlns:r="http://schemas.openxmlformats.org/officeDocument/2006/relationships" id="266" r:id="Rfdf7f69de2dc4816"/>
-    <p:sldId xmlns:r="http://schemas.openxmlformats.org/officeDocument/2006/relationships" id="267" r:id="R17b2a3885d18404d"/>
-    <p:sldId xmlns:r="http://schemas.openxmlformats.org/officeDocument/2006/relationships" id="268" r:id="R4d9d4f6037164c03"/>
-    <p:sldId xmlns:r="http://schemas.openxmlformats.org/officeDocument/2006/relationships" id="269" r:id="R3a4f909ee8c54af6"/>
-    <p:sldId xmlns:r="http://schemas.openxmlformats.org/officeDocument/2006/relationships" id="270" r:id="R7798ca70aa404f57"/>
-    <p:sldId xmlns:r="http://schemas.openxmlformats.org/officeDocument/2006/relationships" id="271" r:id="Rce317064d9004ef6"/>
-    <p:sldId xmlns:r="http://schemas.openxmlformats.org/officeDocument/2006/relationships" id="272" r:id="R5b2e9ea698754350"/>
-    <p:sldId xmlns:r="http://schemas.openxmlformats.org/officeDocument/2006/relationships" id="273" r:id="Rde53771608454a0b"/>
-    <p:sldId xmlns:r="http://schemas.openxmlformats.org/officeDocument/2006/relationships" id="274" r:id="R7c531d96d57243c8"/>
+    <p:sldId xmlns:r="http://schemas.openxmlformats.org/officeDocument/2006/relationships" id="256" r:id="Rb4e86c9e35a549cb"/>
+    <p:sldId xmlns:r="http://schemas.openxmlformats.org/officeDocument/2006/relationships" id="257" r:id="Rf758161433664631"/>
+    <p:sldId xmlns:r="http://schemas.openxmlformats.org/officeDocument/2006/relationships" id="258" r:id="R6b61b17e19534311"/>
+    <p:sldId xmlns:r="http://schemas.openxmlformats.org/officeDocument/2006/relationships" id="259" r:id="R9e50b0e65bd54cd2"/>
+    <p:sldId xmlns:r="http://schemas.openxmlformats.org/officeDocument/2006/relationships" id="260" r:id="Rda29a4c150df4db7"/>
+    <p:sldId xmlns:r="http://schemas.openxmlformats.org/officeDocument/2006/relationships" id="261" r:id="R154f2926e22440c4"/>
+    <p:sldId xmlns:r="http://schemas.openxmlformats.org/officeDocument/2006/relationships" id="262" r:id="Rf9d6095d068344dd"/>
+    <p:sldId xmlns:r="http://schemas.openxmlformats.org/officeDocument/2006/relationships" id="263" r:id="R013aa74be1e14dd8"/>
+    <p:sldId xmlns:r="http://schemas.openxmlformats.org/officeDocument/2006/relationships" id="264" r:id="Rd4caad2c7fb44893"/>
+    <p:sldId xmlns:r="http://schemas.openxmlformats.org/officeDocument/2006/relationships" id="265" r:id="Rd39bf2d1027e4aa5"/>
+    <p:sldId xmlns:r="http://schemas.openxmlformats.org/officeDocument/2006/relationships" id="266" r:id="R992cd28ceef24a67"/>
+    <p:sldId xmlns:r="http://schemas.openxmlformats.org/officeDocument/2006/relationships" id="267" r:id="Rccdc8095e6194429"/>
+    <p:sldId xmlns:r="http://schemas.openxmlformats.org/officeDocument/2006/relationships" id="268" r:id="R45e4abeb994843ab"/>
+    <p:sldId xmlns:r="http://schemas.openxmlformats.org/officeDocument/2006/relationships" id="269" r:id="R8f5f9211c57c444c"/>
+    <p:sldId xmlns:r="http://schemas.openxmlformats.org/officeDocument/2006/relationships" id="270" r:id="R9ffd55ea424c4a91"/>
+    <p:sldId xmlns:r="http://schemas.openxmlformats.org/officeDocument/2006/relationships" id="271" r:id="R47c1a7aef6e14f57"/>
+    <p:sldId xmlns:r="http://schemas.openxmlformats.org/officeDocument/2006/relationships" id="272" r:id="R8c2a17922194496c"/>
+    <p:sldId xmlns:r="http://schemas.openxmlformats.org/officeDocument/2006/relationships" id="273" r:id="R42ba5a4300c54018"/>
+    <p:sldId xmlns:r="http://schemas.openxmlformats.org/officeDocument/2006/relationships" id="274" r:id="Rf5eb3d80cc794182"/>
+    <p:sldId xmlns:r="http://schemas.openxmlformats.org/officeDocument/2006/relationships" id="275" r:id="R68a791a180c94400"/>
   </p:sldIdLst>
   <p:sldSz cx="12192000" cy="6858000"/>
   <p:notesSz cx="6858000" cy="9144000"/>
@@ -810,7 +811,7 @@
           <a:lstStyle xmlns:a="http://schemas.openxmlformats.org/drawingml/2006/main"/>
           <a:p xmlns:a="http://schemas.openxmlformats.org/drawingml/2006/main">
             <a:r>
-              <a:t>Source: docs/claims.json, generated by scripts/build_claims.py. All project metrics are synthetic development results. Decision-support research display</a:t>
+              <a:t>Source: docs/claims.json, generated by scripts/build_claims.py. All project metrics are synthetic development results. Earliest safe threshold crossing only; all values are synthetic</a:t>
             </a:r>
           </a:p>
         </p:txBody>
@@ -880,7 +881,7 @@
           <a:lstStyle xmlns:a="http://schemas.openxmlformats.org/drawingml/2006/main"/>
           <a:p xmlns:a="http://schemas.openxmlformats.org/drawingml/2006/main">
             <a:r>
-              <a:t>Source: docs/claims.json, generated by scripts/build_claims.py. All project metrics are synthetic development results. Missing safety information causes abstention</a:t>
+              <a:t>Source: docs/claims.json, generated by scripts/build_claims.py. All project metrics are synthetic development results. Decision-support research display</a:t>
             </a:r>
           </a:p>
         </p:txBody>
@@ -950,7 +951,7 @@
           <a:lstStyle xmlns:a="http://schemas.openxmlformats.org/drawingml/2006/main"/>
           <a:p xmlns:a="http://schemas.openxmlformats.org/drawingml/2006/main">
             <a:r>
-              <a:t>Source: docs/claims.json, generated by scripts/build_claims.py. All project metrics are synthetic development results. Clear boundaries around simulated physiology</a:t>
+              <a:t>Source: docs/claims.json, generated by scripts/build_claims.py. All project metrics are synthetic development results. Missing safety information causes abstention</a:t>
             </a:r>
           </a:p>
         </p:txBody>
@@ -1020,7 +1021,7 @@
           <a:lstStyle xmlns:a="http://schemas.openxmlformats.org/drawingml/2006/main"/>
           <a:p xmlns:a="http://schemas.openxmlformats.org/drawingml/2006/main">
             <a:r>
-              <a:t>Source: docs/claims.json, generated by scripts/build_claims.py. All project metrics are synthetic development results. All declared Kushi scenarios remain visible</a:t>
+              <a:t>Source: docs/claims.json, generated by scripts/build_claims.py. All project metrics are synthetic development results. Clear boundaries around simulated physiology</a:t>
             </a:r>
           </a:p>
         </p:txBody>
@@ -1090,7 +1091,7 @@
           <a:lstStyle xmlns:a="http://schemas.openxmlformats.org/drawingml/2006/main"/>
           <a:p xmlns:a="http://schemas.openxmlformats.org/drawingml/2006/main">
             <a:r>
-              <a:t>Source: docs/claims.json, generated by scripts/build_claims.py. All project metrics are synthetic development results. Synthetic recovery is not prospective evidence in women</a:t>
+              <a:t>Source: docs/claims.json, generated by scripts/build_claims.py. All project metrics are synthetic development results. All declared Kushi scenarios remain visible</a:t>
             </a:r>
           </a:p>
         </p:txBody>
@@ -1160,7 +1161,7 @@
           <a:lstStyle xmlns:a="http://schemas.openxmlformats.org/drawingml/2006/main"/>
           <a:p xmlns:a="http://schemas.openxmlformats.org/drawingml/2006/main">
             <a:r>
-              <a:t>Source: docs/claims.json, generated by scripts/build_claims.py. All project metrics are synthetic development results. Public source, inspectable artifacts and explicit next work</a:t>
+              <a:t>Source: docs/claims.json, generated by scripts/build_claims.py. All project metrics are synthetic development results. Synthetic recovery is not prospective evidence in women</a:t>
             </a:r>
           </a:p>
         </p:txBody>
@@ -1231,6 +1232,76 @@
           <a:p xmlns:a="http://schemas.openxmlformats.org/drawingml/2006/main">
             <a:r>
               <a:t>Source: docs/claims.json, generated by scripts/build_claims.py. All project metrics are synthetic development results. Monitoring irregular cycles without claiming a PMOS diagnosis Primary population-context source: https://pmc.ncbi.nlm.nih.gov/articles/PMC11581580/</a:t>
+            </a:r>
+          </a:p>
+        </p:txBody>
+      </p:sp>
+      <p:sp>
+        <p:nvSpPr>
+          <p:cNvPr id="4" name="Slide Number Placeholder 3"/>
+          <p:cNvSpPr>
+            <a:spLocks xmlns:a="http://schemas.openxmlformats.org/drawingml/2006/main" noGrp="1"/>
+          </p:cNvSpPr>
+          <p:nvPr>
+            <p:ph type="sldNum" idx="5"/>
+          </p:nvPr>
+        </p:nvSpPr>
+        <p:spPr/>
+        <p:txBody>
+          <a:bodyPr xmlns:a="http://schemas.openxmlformats.org/drawingml/2006/main"/>
+          <a:lstStyle xmlns:a="http://schemas.openxmlformats.org/drawingml/2006/main"/>
+          <a:p xmlns:a="http://schemas.openxmlformats.org/drawingml/2006/main"/>
+        </p:txBody>
+      </p:sp>
+    </p:spTree>
+  </p:cSld>
+  <p:clrMapOvr>
+    <a:masterClrMapping xmlns:a="http://schemas.openxmlformats.org/drawingml/2006/main"/>
+  </p:clrMapOvr>
+</p:notes>
+</file>
+
+<file path=ppt/notesSlides/notesSlide20.xml><?xml version="1.0" encoding="utf-8"?>
+<p:notes xmlns:p="http://schemas.openxmlformats.org/presentationml/2006/main">
+  <p:cSld>
+    <p:spTree>
+      <p:nvGrpSpPr>
+        <p:cNvPr id="1" name=""/>
+        <p:cNvGrpSpPr/>
+        <p:nvPr/>
+      </p:nvGrpSpPr>
+      <p:grpSpPr>
+        <a:xfrm xmlns:a="http://schemas.openxmlformats.org/drawingml/2006/main"/>
+      </p:grpSpPr>
+      <p:sp>
+        <p:nvSpPr>
+          <p:cNvPr id="2" name="Slide Image Placeholder 1"/>
+          <p:cNvSpPr>
+            <a:spLocks xmlns:a="http://schemas.openxmlformats.org/drawingml/2006/main" noGrp="1"/>
+          </p:cNvSpPr>
+          <p:nvPr>
+            <p:ph type="sldImg" idx="0"/>
+          </p:nvPr>
+        </p:nvSpPr>
+        <p:spPr/>
+      </p:sp>
+      <p:sp>
+        <p:nvSpPr>
+          <p:cNvPr id="3" name="Notes Placeholder 2"/>
+          <p:cNvSpPr>
+            <a:spLocks xmlns:a="http://schemas.openxmlformats.org/drawingml/2006/main" noGrp="1"/>
+          </p:cNvSpPr>
+          <p:nvPr>
+            <p:ph type="body" idx="1"/>
+          </p:nvPr>
+        </p:nvSpPr>
+        <p:spPr/>
+        <p:txBody>
+          <a:bodyPr xmlns:a="http://schemas.openxmlformats.org/drawingml/2006/main"/>
+          <a:lstStyle xmlns:a="http://schemas.openxmlformats.org/drawingml/2006/main"/>
+          <a:p xmlns:a="http://schemas.openxmlformats.org/drawingml/2006/main">
+            <a:r>
+              <a:t>Source: docs/claims.json, generated by scripts/build_claims.py. All project metrics are synthetic development results. Public source, inspectable artifacts and explicit next work</a:t>
             </a:r>
           </a:p>
         </p:txBody>
@@ -1767,7 +1838,7 @@
           <p:cNvPr id="3" name="Title">
             <a:extLst xmlns:a="http://schemas.openxmlformats.org/drawingml/2006/main">
               <a:ext uri="{FF2B5EF4-FFF2-40B4-BE49-F238E27FC236}">
-                <a16:creationId xmlns:a16="http://schemas.microsoft.com/office/drawing/2014/main" id="{0DE8F080-0F1B-4BC5-8471-3BEAC183EA69}"/>
+                <a16:creationId xmlns:a16="http://schemas.microsoft.com/office/drawing/2014/main" id="{95D6F8BB-3D77-49A7-B106-771713CE1F2B}"/>
               </a:ext>
             </a:extLst>
           </p:cNvPr>
@@ -1996,7 +2067,7 @@
           <p:cNvPr id="2" name="Subtitle">
             <a:extLst xmlns:a="http://schemas.openxmlformats.org/drawingml/2006/main">
               <a:ext uri="{FF2B5EF4-FFF2-40B4-BE49-F238E27FC236}">
-                <a16:creationId xmlns:a16="http://schemas.microsoft.com/office/drawing/2014/main" id="{E43D1B33-0290-4D9A-B28E-3855AE2E1464}"/>
+                <a16:creationId xmlns:a16="http://schemas.microsoft.com/office/drawing/2014/main" id="{91AA7F28-E936-49BE-98C4-D11ED6B5A868}"/>
               </a:ext>
             </a:extLst>
           </p:cNvPr>
@@ -2242,7 +2313,7 @@
           <p:cNvPr id="2" name="Section title">
             <a:extLst xmlns:a="http://schemas.openxmlformats.org/drawingml/2006/main">
               <a:ext uri="{FF2B5EF4-FFF2-40B4-BE49-F238E27FC236}">
-                <a16:creationId xmlns:a16="http://schemas.microsoft.com/office/drawing/2014/main" id="{B37D18E9-61D1-40F0-8F11-0E663A4ECF30}"/>
+                <a16:creationId xmlns:a16="http://schemas.microsoft.com/office/drawing/2014/main" id="{EAE37D27-1DBB-465D-80C2-3D42A1A37134}"/>
               </a:ext>
             </a:extLst>
           </p:cNvPr>
@@ -2488,7 +2559,7 @@
           <p:cNvPr id="3" name="Title">
             <a:extLst xmlns:a="http://schemas.openxmlformats.org/drawingml/2006/main">
               <a:ext uri="{FF2B5EF4-FFF2-40B4-BE49-F238E27FC236}">
-                <a16:creationId xmlns:a16="http://schemas.microsoft.com/office/drawing/2014/main" id="{72B0FF6D-E736-433D-94B3-429587D5DD5F}"/>
+                <a16:creationId xmlns:a16="http://schemas.microsoft.com/office/drawing/2014/main" id="{AA0E9EA8-E6A6-4FE3-953F-4C022741F097}"/>
               </a:ext>
             </a:extLst>
           </p:cNvPr>
@@ -2717,7 +2788,7 @@
           <p:cNvPr id="2" name="Body">
             <a:extLst xmlns:a="http://schemas.openxmlformats.org/drawingml/2006/main">
               <a:ext uri="{FF2B5EF4-FFF2-40B4-BE49-F238E27FC236}">
-                <a16:creationId xmlns:a16="http://schemas.microsoft.com/office/drawing/2014/main" id="{9AECC10D-9DF9-4C99-A570-D38C545891BB}"/>
+                <a16:creationId xmlns:a16="http://schemas.microsoft.com/office/drawing/2014/main" id="{4F95C5DC-B33C-4DDC-80FA-EFF7F4378B6D}"/>
               </a:ext>
             </a:extLst>
           </p:cNvPr>
@@ -2963,7 +3034,7 @@
           <p:cNvPr id="4" name="Title">
             <a:extLst xmlns:a="http://schemas.openxmlformats.org/drawingml/2006/main">
               <a:ext uri="{FF2B5EF4-FFF2-40B4-BE49-F238E27FC236}">
-                <a16:creationId xmlns:a16="http://schemas.microsoft.com/office/drawing/2014/main" id="{0BA8B68A-0F9E-41AE-BE9C-BD2A8D608CF7}"/>
+                <a16:creationId xmlns:a16="http://schemas.microsoft.com/office/drawing/2014/main" id="{232D67FB-13FF-4119-9F65-B1709F828939}"/>
               </a:ext>
             </a:extLst>
           </p:cNvPr>
@@ -3192,7 +3263,7 @@
           <p:cNvPr id="2" name="Left column">
             <a:extLst xmlns:a="http://schemas.openxmlformats.org/drawingml/2006/main">
               <a:ext uri="{FF2B5EF4-FFF2-40B4-BE49-F238E27FC236}">
-                <a16:creationId xmlns:a16="http://schemas.microsoft.com/office/drawing/2014/main" id="{AD93F827-ECEB-49AB-A5A6-D4611678BEBB}"/>
+                <a16:creationId xmlns:a16="http://schemas.microsoft.com/office/drawing/2014/main" id="{8370B4C8-032A-4C8E-A9E3-FC71B1B26C0D}"/>
               </a:ext>
             </a:extLst>
           </p:cNvPr>
@@ -3421,7 +3492,7 @@
           <p:cNvPr id="3" name="Right column">
             <a:extLst xmlns:a="http://schemas.openxmlformats.org/drawingml/2006/main">
               <a:ext uri="{FF2B5EF4-FFF2-40B4-BE49-F238E27FC236}">
-                <a16:creationId xmlns:a16="http://schemas.microsoft.com/office/drawing/2014/main" id="{9E28FAED-FDDF-4D84-8678-D3969BEA2F3B}"/>
+                <a16:creationId xmlns:a16="http://schemas.microsoft.com/office/drawing/2014/main" id="{ECFBD221-BEB9-4569-99D5-D118459BEF34}"/>
               </a:ext>
             </a:extLst>
           </p:cNvPr>
@@ -3667,7 +3738,7 @@
           <p:cNvPr id="3" name="Title">
             <a:extLst xmlns:a="http://schemas.openxmlformats.org/drawingml/2006/main">
               <a:ext uri="{FF2B5EF4-FFF2-40B4-BE49-F238E27FC236}">
-                <a16:creationId xmlns:a16="http://schemas.microsoft.com/office/drawing/2014/main" id="{4CC49AEA-4403-4C60-974D-158707050652}"/>
+                <a16:creationId xmlns:a16="http://schemas.microsoft.com/office/drawing/2014/main" id="{AFA965A5-CB9E-41AC-A69A-8FC73C04DEE1}"/>
               </a:ext>
             </a:extLst>
           </p:cNvPr>
@@ -3896,7 +3967,7 @@
           <p:cNvPr id="2" name="Left column">
             <a:extLst xmlns:a="http://schemas.openxmlformats.org/drawingml/2006/main">
               <a:ext uri="{FF2B5EF4-FFF2-40B4-BE49-F238E27FC236}">
-                <a16:creationId xmlns:a16="http://schemas.microsoft.com/office/drawing/2014/main" id="{B99B7EEA-5085-48AB-85B7-C603862BEFEB}"/>
+                <a16:creationId xmlns:a16="http://schemas.microsoft.com/office/drawing/2014/main" id="{D7040A7A-011D-4516-8D8C-5ECDD4550546}"/>
               </a:ext>
             </a:extLst>
           </p:cNvPr>
@@ -4163,12 +4234,12 @@
   </p:cSld>
   <p:clrMap bg1="lt1" tx1="dk1" bg2="lt2" tx2="dk2" accent1="accent1" accent2="accent2" accent3="accent3" accent4="accent4" accent5="accent5" accent6="accent6" hlink="hlink" folHlink="folHlink"/>
   <p:sldLayoutIdLst>
-    <p:sldLayoutId xmlns:r="http://schemas.openxmlformats.org/officeDocument/2006/relationships" id="2147483649" r:id="R25f4e5d775a54faf"/>
-    <p:sldLayoutId xmlns:r="http://schemas.openxmlformats.org/officeDocument/2006/relationships" id="2147483650" r:id="R2d14a44c4f9947fe"/>
-    <p:sldLayoutId xmlns:r="http://schemas.openxmlformats.org/officeDocument/2006/relationships" id="2147483651" r:id="R0d62523a54f44d35"/>
-    <p:sldLayoutId xmlns:r="http://schemas.openxmlformats.org/officeDocument/2006/relationships" id="2147483652" r:id="Ra4b9373037764d7b"/>
-    <p:sldLayoutId xmlns:r="http://schemas.openxmlformats.org/officeDocument/2006/relationships" id="2147483653" r:id="Rbdd98e673d144d58"/>
-    <p:sldLayoutId xmlns:r="http://schemas.openxmlformats.org/officeDocument/2006/relationships" id="2147483654" r:id="Rbb900651cd9f493c"/>
+    <p:sldLayoutId xmlns:r="http://schemas.openxmlformats.org/officeDocument/2006/relationships" id="2147483649" r:id="R431b620912b24883"/>
+    <p:sldLayoutId xmlns:r="http://schemas.openxmlformats.org/officeDocument/2006/relationships" id="2147483650" r:id="R4fc9d416ecd148da"/>
+    <p:sldLayoutId xmlns:r="http://schemas.openxmlformats.org/officeDocument/2006/relationships" id="2147483651" r:id="Ra8396d1f4dec450c"/>
+    <p:sldLayoutId xmlns:r="http://schemas.openxmlformats.org/officeDocument/2006/relationships" id="2147483652" r:id="R3caf3dd91a27420f"/>
+    <p:sldLayoutId xmlns:r="http://schemas.openxmlformats.org/officeDocument/2006/relationships" id="2147483653" r:id="R3faa9439bf9d405d"/>
+    <p:sldLayoutId xmlns:r="http://schemas.openxmlformats.org/officeDocument/2006/relationships" id="2147483654" r:id="Rb4f3798a4ae94c85"/>
   </p:sldLayoutIdLst>
   <p:txStyles>
     <p:titleStyle>
@@ -4719,7 +4790,7 @@
           <p:cNvPr id="7" name="">
             <a:extLst xmlns:a="http://schemas.openxmlformats.org/drawingml/2006/main">
               <a:ext uri="{FF2B5EF4-FFF2-40B4-BE49-F238E27FC236}">
-                <a16:creationId xmlns:a16="http://schemas.microsoft.com/office/drawing/2014/main" id="{73764DE0-88D8-4168-9699-BBBFAAC114DC}"/>
+                <a16:creationId xmlns:a16="http://schemas.microsoft.com/office/drawing/2014/main" id="{D9586753-21E6-4D3D-AF4B-E7470D3070C8}"/>
               </a:ext>
             </a:extLst>
           </p:cNvPr>
@@ -4875,7 +4946,7 @@
           <p:cNvPr id="2" name="">
             <a:extLst xmlns:a="http://schemas.openxmlformats.org/drawingml/2006/main">
               <a:ext uri="{FF2B5EF4-FFF2-40B4-BE49-F238E27FC236}">
-                <a16:creationId xmlns:a16="http://schemas.microsoft.com/office/drawing/2014/main" id="{BA001CD1-3C1D-4C4D-97F2-E465AA13A7E6}"/>
+                <a16:creationId xmlns:a16="http://schemas.microsoft.com/office/drawing/2014/main" id="{F270C8C2-4AC4-408C-8561-B2230F507BF6}"/>
               </a:ext>
             </a:extLst>
           </p:cNvPr>
@@ -5031,7 +5102,7 @@
           <p:cNvPr id="3" name="">
             <a:extLst xmlns:a="http://schemas.openxmlformats.org/drawingml/2006/main">
               <a:ext uri="{FF2B5EF4-FFF2-40B4-BE49-F238E27FC236}">
-                <a16:creationId xmlns:a16="http://schemas.microsoft.com/office/drawing/2014/main" id="{7AA401E0-7723-426C-8DDB-F9C19D691144}"/>
+                <a16:creationId xmlns:a16="http://schemas.microsoft.com/office/drawing/2014/main" id="{0219DA60-429D-4610-874E-DA3184D2B25B}"/>
               </a:ext>
             </a:extLst>
           </p:cNvPr>
@@ -5187,7 +5258,7 @@
           <p:cNvPr id="4" name="">
             <a:extLst xmlns:a="http://schemas.openxmlformats.org/drawingml/2006/main">
               <a:ext uri="{FF2B5EF4-FFF2-40B4-BE49-F238E27FC236}">
-                <a16:creationId xmlns:a16="http://schemas.microsoft.com/office/drawing/2014/main" id="{B7133908-38FA-4FE1-B8C4-A6F99CC04D34}"/>
+                <a16:creationId xmlns:a16="http://schemas.microsoft.com/office/drawing/2014/main" id="{7FFEDDEC-212A-4798-8B22-76A1E554E2D6}"/>
               </a:ext>
             </a:extLst>
           </p:cNvPr>
@@ -5343,7 +5414,7 @@
           <p:cNvPr id="5" name="">
             <a:extLst xmlns:a="http://schemas.openxmlformats.org/drawingml/2006/main">
               <a:ext uri="{FF2B5EF4-FFF2-40B4-BE49-F238E27FC236}">
-                <a16:creationId xmlns:a16="http://schemas.microsoft.com/office/drawing/2014/main" id="{D79499C3-03FA-450F-8FBA-BDBC47F2AB5E}"/>
+                <a16:creationId xmlns:a16="http://schemas.microsoft.com/office/drawing/2014/main" id="{A3878661-93CA-49F5-8714-A9A5C49F22D1}"/>
               </a:ext>
             </a:extLst>
           </p:cNvPr>
@@ -5499,7 +5570,7 @@
           <p:cNvPr id="6" name="">
             <a:extLst xmlns:a="http://schemas.openxmlformats.org/drawingml/2006/main">
               <a:ext uri="{FF2B5EF4-FFF2-40B4-BE49-F238E27FC236}">
-                <a16:creationId xmlns:a16="http://schemas.microsoft.com/office/drawing/2014/main" id="{6F0864C1-51A1-46AD-9993-CF52FE0EFE28}"/>
+                <a16:creationId xmlns:a16="http://schemas.microsoft.com/office/drawing/2014/main" id="{FD3E68A8-B2F6-4313-992D-9CC010E3858D}"/>
               </a:ext>
             </a:extLst>
           </p:cNvPr>
@@ -5653,7 +5724,7 @@
     </p:spTree>
     <p:extLst>
       <p:ext uri="{BB962C8B-B14F-4D97-AF65-F5344CB8AC3E}">
-        <p14:creationId xmlns:p14="http://schemas.microsoft.com/office/powerpoint/2010/main" val="569337618"/>
+        <p14:creationId xmlns:p14="http://schemas.microsoft.com/office/powerpoint/2010/main" val="264838298"/>
       </p:ext>
     </p:extLst>
   </p:cSld>
@@ -5684,7 +5755,7 @@
           <p:cNvPr id="5" name="">
             <a:extLst xmlns:a="http://schemas.openxmlformats.org/drawingml/2006/main">
               <a:ext uri="{FF2B5EF4-FFF2-40B4-BE49-F238E27FC236}">
-                <a16:creationId xmlns:a16="http://schemas.microsoft.com/office/drawing/2014/main" id="{EC8C680D-16AC-4232-8BFA-1420E76DE8B1}"/>
+                <a16:creationId xmlns:a16="http://schemas.microsoft.com/office/drawing/2014/main" id="{B9909A45-8CDF-4BCB-8953-3C6FA85F1E72}"/>
               </a:ext>
             </a:extLst>
           </p:cNvPr>
@@ -5840,7 +5911,7 @@
           <p:cNvPr id="2" name="">
             <a:extLst xmlns:a="http://schemas.openxmlformats.org/drawingml/2006/main">
               <a:ext uri="{FF2B5EF4-FFF2-40B4-BE49-F238E27FC236}">
-                <a16:creationId xmlns:a16="http://schemas.microsoft.com/office/drawing/2014/main" id="{0C861A8C-0020-4B7A-8045-7E84399BBED4}"/>
+                <a16:creationId xmlns:a16="http://schemas.microsoft.com/office/drawing/2014/main" id="{B27AF26C-EFBB-4F16-B753-C916C0C88D75}"/>
               </a:ext>
             </a:extLst>
           </p:cNvPr>
@@ -5996,7 +6067,7 @@
           <p:cNvPr id="3" name="">
             <a:extLst xmlns:a="http://schemas.openxmlformats.org/drawingml/2006/main">
               <a:ext uri="{FF2B5EF4-FFF2-40B4-BE49-F238E27FC236}">
-                <a16:creationId xmlns:a16="http://schemas.microsoft.com/office/drawing/2014/main" id="{1C111530-C5BE-43E2-91A0-65F5657C374A}"/>
+                <a16:creationId xmlns:a16="http://schemas.microsoft.com/office/drawing/2014/main" id="{C39D8455-A410-41E6-BA9C-9C177FE74F7B}"/>
               </a:ext>
             </a:extLst>
           </p:cNvPr>
@@ -6937,7 +7008,7 @@
           <p:cNvPr id="4" name="">
             <a:extLst xmlns:a="http://schemas.openxmlformats.org/drawingml/2006/main">
               <a:ext uri="{FF2B5EF4-FFF2-40B4-BE49-F238E27FC236}">
-                <a16:creationId xmlns:a16="http://schemas.microsoft.com/office/drawing/2014/main" id="{D08F319A-C15E-4041-AA25-7A87F7449A1F}"/>
+                <a16:creationId xmlns:a16="http://schemas.microsoft.com/office/drawing/2014/main" id="{66443F40-04F2-4519-8C1C-362CB34EAF92}"/>
               </a:ext>
             </a:extLst>
           </p:cNvPr>
@@ -7091,7 +7162,7 @@
     </p:spTree>
     <p:extLst>
       <p:ext uri="{BB962C8B-B14F-4D97-AF65-F5344CB8AC3E}">
-        <p14:creationId xmlns:p14="http://schemas.microsoft.com/office/powerpoint/2010/main" val="1911912737"/>
+        <p14:creationId xmlns:p14="http://schemas.microsoft.com/office/powerpoint/2010/main" val="580191467"/>
       </p:ext>
     </p:extLst>
   </p:cSld>
@@ -7122,7 +7193,7 @@
           <p:cNvPr id="5" name="">
             <a:extLst xmlns:a="http://schemas.openxmlformats.org/drawingml/2006/main">
               <a:ext uri="{FF2B5EF4-FFF2-40B4-BE49-F238E27FC236}">
-                <a16:creationId xmlns:a16="http://schemas.microsoft.com/office/drawing/2014/main" id="{D4C0443E-FB8B-468B-B694-1594142AEE0F}"/>
+                <a16:creationId xmlns:a16="http://schemas.microsoft.com/office/drawing/2014/main" id="{AFE5CFF7-23D4-4C79-AE86-4A80951D3F9E}"/>
               </a:ext>
             </a:extLst>
           </p:cNvPr>
@@ -7278,7 +7349,7 @@
           <p:cNvPr id="2" name="">
             <a:extLst xmlns:a="http://schemas.openxmlformats.org/drawingml/2006/main">
               <a:ext uri="{FF2B5EF4-FFF2-40B4-BE49-F238E27FC236}">
-                <a16:creationId xmlns:a16="http://schemas.microsoft.com/office/drawing/2014/main" id="{3E56661C-4B19-4FA1-BCB0-1A9E30605FA5}"/>
+                <a16:creationId xmlns:a16="http://schemas.microsoft.com/office/drawing/2014/main" id="{015EDA80-284C-43BD-A9AB-C4BFE35DE6D2}"/>
               </a:ext>
             </a:extLst>
           </p:cNvPr>
@@ -7434,7 +7505,7 @@
           <p:cNvPr id="3" name="">
             <a:extLst xmlns:a="http://schemas.openxmlformats.org/drawingml/2006/main">
               <a:ext uri="{FF2B5EF4-FFF2-40B4-BE49-F238E27FC236}">
-                <a16:creationId xmlns:a16="http://schemas.microsoft.com/office/drawing/2014/main" id="{66B7C424-A766-4B6A-A090-240C08126858}"/>
+                <a16:creationId xmlns:a16="http://schemas.microsoft.com/office/drawing/2014/main" id="{DBEC1A0F-E59D-428A-B6C0-5B7D6B1BA2D5}"/>
               </a:ext>
             </a:extLst>
           </p:cNvPr>
@@ -8375,7 +8446,7 @@
           <p:cNvPr id="4" name="">
             <a:extLst xmlns:a="http://schemas.openxmlformats.org/drawingml/2006/main">
               <a:ext uri="{FF2B5EF4-FFF2-40B4-BE49-F238E27FC236}">
-                <a16:creationId xmlns:a16="http://schemas.microsoft.com/office/drawing/2014/main" id="{AC69C055-08E1-4AB9-B6F7-261BF8BBD1B7}"/>
+                <a16:creationId xmlns:a16="http://schemas.microsoft.com/office/drawing/2014/main" id="{56062EA8-AAD4-4A8E-A6E4-653D3CA85FD3}"/>
               </a:ext>
             </a:extLst>
           </p:cNvPr>
@@ -8529,7 +8600,7 @@
     </p:spTree>
     <p:extLst>
       <p:ext uri="{BB962C8B-B14F-4D97-AF65-F5344CB8AC3E}">
-        <p14:creationId xmlns:p14="http://schemas.microsoft.com/office/powerpoint/2010/main" val="697492802"/>
+        <p14:creationId xmlns:p14="http://schemas.microsoft.com/office/powerpoint/2010/main" val="2212100"/>
       </p:ext>
     </p:extLst>
   </p:cSld>
@@ -8560,7 +8631,7 @@
           <p:cNvPr id="5" name="">
             <a:extLst xmlns:a="http://schemas.openxmlformats.org/drawingml/2006/main">
               <a:ext uri="{FF2B5EF4-FFF2-40B4-BE49-F238E27FC236}">
-                <a16:creationId xmlns:a16="http://schemas.microsoft.com/office/drawing/2014/main" id="{0FA52B30-11D5-464E-B8A8-21B01059E76D}"/>
+                <a16:creationId xmlns:a16="http://schemas.microsoft.com/office/drawing/2014/main" id="{153B0F0C-5F6F-4FE0-8922-A807AFE88672}"/>
               </a:ext>
             </a:extLst>
           </p:cNvPr>
@@ -8716,7 +8787,7 @@
           <p:cNvPr id="2" name="">
             <a:extLst xmlns:a="http://schemas.openxmlformats.org/drawingml/2006/main">
               <a:ext uri="{FF2B5EF4-FFF2-40B4-BE49-F238E27FC236}">
-                <a16:creationId xmlns:a16="http://schemas.microsoft.com/office/drawing/2014/main" id="{DD75D36A-F0DB-40D7-9E29-FF6B81935A62}"/>
+                <a16:creationId xmlns:a16="http://schemas.microsoft.com/office/drawing/2014/main" id="{61AD6A80-A640-4F96-AA9F-BDF492C6B6D7}"/>
               </a:ext>
             </a:extLst>
           </p:cNvPr>
@@ -8872,7 +8943,7 @@
           <p:cNvPr id="3" name="">
             <a:extLst xmlns:a="http://schemas.openxmlformats.org/drawingml/2006/main">
               <a:ext uri="{FF2B5EF4-FFF2-40B4-BE49-F238E27FC236}">
-                <a16:creationId xmlns:a16="http://schemas.microsoft.com/office/drawing/2014/main" id="{3120606F-B09F-4DC3-95A3-95C18B7E648E}"/>
+                <a16:creationId xmlns:a16="http://schemas.microsoft.com/office/drawing/2014/main" id="{CB8E4700-B51A-462C-9062-1F90B844CFAD}"/>
               </a:ext>
             </a:extLst>
           </p:cNvPr>
@@ -9813,7 +9884,7 @@
           <p:cNvPr id="4" name="">
             <a:extLst xmlns:a="http://schemas.openxmlformats.org/drawingml/2006/main">
               <a:ext uri="{FF2B5EF4-FFF2-40B4-BE49-F238E27FC236}">
-                <a16:creationId xmlns:a16="http://schemas.microsoft.com/office/drawing/2014/main" id="{566F2CA2-4541-421F-80C0-666F973857AB}"/>
+                <a16:creationId xmlns:a16="http://schemas.microsoft.com/office/drawing/2014/main" id="{1C289156-810B-4082-972E-7CCBDD44E5FB}"/>
               </a:ext>
             </a:extLst>
           </p:cNvPr>
@@ -9967,7 +10038,7 @@
     </p:spTree>
     <p:extLst>
       <p:ext uri="{BB962C8B-B14F-4D97-AF65-F5344CB8AC3E}">
-        <p14:creationId xmlns:p14="http://schemas.microsoft.com/office/powerpoint/2010/main" val="1487309824"/>
+        <p14:creationId xmlns:p14="http://schemas.microsoft.com/office/powerpoint/2010/main" val="2095842235"/>
       </p:ext>
     </p:extLst>
   </p:cSld>
@@ -9998,7 +10069,7 @@
           <p:cNvPr id="8" name="">
             <a:extLst xmlns:a="http://schemas.openxmlformats.org/drawingml/2006/main">
               <a:ext uri="{FF2B5EF4-FFF2-40B4-BE49-F238E27FC236}">
-                <a16:creationId xmlns:a16="http://schemas.microsoft.com/office/drawing/2014/main" id="{7181C42C-6A30-4664-B8E4-BF5E980D7BD1}"/>
+                <a16:creationId xmlns:a16="http://schemas.microsoft.com/office/drawing/2014/main" id="{7C025EA1-0656-430F-BEA1-BB79391363D8}"/>
               </a:ext>
             </a:extLst>
           </p:cNvPr>
@@ -10154,7 +10225,7 @@
           <p:cNvPr id="2" name="">
             <a:extLst xmlns:a="http://schemas.openxmlformats.org/drawingml/2006/main">
               <a:ext uri="{FF2B5EF4-FFF2-40B4-BE49-F238E27FC236}">
-                <a16:creationId xmlns:a16="http://schemas.microsoft.com/office/drawing/2014/main" id="{FD530AFC-75E4-470B-991D-CF8174F5ED89}"/>
+                <a16:creationId xmlns:a16="http://schemas.microsoft.com/office/drawing/2014/main" id="{4B151199-0C65-4961-96D8-956A09DC1057}"/>
               </a:ext>
             </a:extLst>
           </p:cNvPr>
@@ -10310,7 +10381,7 @@
           <p:cNvPr id="3" name="">
             <a:extLst xmlns:a="http://schemas.openxmlformats.org/drawingml/2006/main">
               <a:ext uri="{FF2B5EF4-FFF2-40B4-BE49-F238E27FC236}">
-                <a16:creationId xmlns:a16="http://schemas.microsoft.com/office/drawing/2014/main" id="{2143CDDE-C08C-47A8-9AB7-AC14C9B5EAD3}"/>
+                <a16:creationId xmlns:a16="http://schemas.microsoft.com/office/drawing/2014/main" id="{A484B111-108F-469F-86ED-F22AA55AD9E9}"/>
               </a:ext>
             </a:extLst>
           </p:cNvPr>
@@ -10466,7 +10537,7 @@
           <p:cNvPr id="4" name="">
             <a:extLst xmlns:a="http://schemas.openxmlformats.org/drawingml/2006/main">
               <a:ext uri="{FF2B5EF4-FFF2-40B4-BE49-F238E27FC236}">
-                <a16:creationId xmlns:a16="http://schemas.microsoft.com/office/drawing/2014/main" id="{2F0C60D0-FAAB-430C-8DED-0593952272DE}"/>
+                <a16:creationId xmlns:a16="http://schemas.microsoft.com/office/drawing/2014/main" id="{ECDC96E0-4F04-414F-A194-A9AE2F554043}"/>
               </a:ext>
             </a:extLst>
           </p:cNvPr>
@@ -10622,7 +10693,7 @@
           <p:cNvPr id="5" name="">
             <a:extLst xmlns:a="http://schemas.openxmlformats.org/drawingml/2006/main">
               <a:ext uri="{FF2B5EF4-FFF2-40B4-BE49-F238E27FC236}">
-                <a16:creationId xmlns:a16="http://schemas.microsoft.com/office/drawing/2014/main" id="{1ECD18F3-B8BC-466B-B848-6D1874D2D39E}"/>
+                <a16:creationId xmlns:a16="http://schemas.microsoft.com/office/drawing/2014/main" id="{95F5C0EF-A99C-45BC-87C2-B97E3E511658}"/>
               </a:ext>
             </a:extLst>
           </p:cNvPr>
@@ -10778,7 +10849,7 @@
           <p:cNvPr id="6" name="">
             <a:extLst xmlns:a="http://schemas.openxmlformats.org/drawingml/2006/main">
               <a:ext uri="{FF2B5EF4-FFF2-40B4-BE49-F238E27FC236}">
-                <a16:creationId xmlns:a16="http://schemas.microsoft.com/office/drawing/2014/main" id="{5D37CF60-A0B0-4BD8-A2BB-693B46B6C95A}"/>
+                <a16:creationId xmlns:a16="http://schemas.microsoft.com/office/drawing/2014/main" id="{1115A65E-4FB5-4AB4-B088-4595611F11DE}"/>
               </a:ext>
             </a:extLst>
           </p:cNvPr>
@@ -10934,7 +11005,7 @@
           <p:cNvPr id="7" name="">
             <a:extLst xmlns:a="http://schemas.openxmlformats.org/drawingml/2006/main">
               <a:ext uri="{FF2B5EF4-FFF2-40B4-BE49-F238E27FC236}">
-                <a16:creationId xmlns:a16="http://schemas.microsoft.com/office/drawing/2014/main" id="{41C9FD1D-F670-4928-9C99-3FE3F1062A2C}"/>
+                <a16:creationId xmlns:a16="http://schemas.microsoft.com/office/drawing/2014/main" id="{CC1A842D-ED59-4933-AF0E-7349E5AA57BB}"/>
               </a:ext>
             </a:extLst>
           </p:cNvPr>
@@ -11088,7 +11159,7 @@
     </p:spTree>
     <p:extLst>
       <p:ext uri="{BB962C8B-B14F-4D97-AF65-F5344CB8AC3E}">
-        <p14:creationId xmlns:p14="http://schemas.microsoft.com/office/powerpoint/2010/main" val="49060071"/>
+        <p14:creationId xmlns:p14="http://schemas.microsoft.com/office/powerpoint/2010/main" val="307789533"/>
       </p:ext>
     </p:extLst>
   </p:cSld>
@@ -11119,7 +11190,7 @@
           <p:cNvPr id="8" name="">
             <a:extLst xmlns:a="http://schemas.openxmlformats.org/drawingml/2006/main">
               <a:ext uri="{FF2B5EF4-FFF2-40B4-BE49-F238E27FC236}">
-                <a16:creationId xmlns:a16="http://schemas.microsoft.com/office/drawing/2014/main" id="{EEBD691B-54C7-4997-8885-2E5123A39E48}"/>
+                <a16:creationId xmlns:a16="http://schemas.microsoft.com/office/drawing/2014/main" id="{11937E64-A87D-4F01-BAB2-1E289852F337}"/>
               </a:ext>
             </a:extLst>
           </p:cNvPr>
@@ -11265,7 +11336,7 @@
                 <a:ea typeface="Arial"/>
                 <a:cs typeface="Arial"/>
               </a:rPr>
-              <a:t>What the clinician view shows</a:t>
+              <a:t>Frozen sequential alert-policy evidence</a:t>
             </a:r>
           </a:p>
         </p:txBody>
@@ -11275,7 +11346,7 @@
           <p:cNvPr id="2" name="">
             <a:extLst xmlns:a="http://schemas.openxmlformats.org/drawingml/2006/main">
               <a:ext uri="{FF2B5EF4-FFF2-40B4-BE49-F238E27FC236}">
-                <a16:creationId xmlns:a16="http://schemas.microsoft.com/office/drawing/2014/main" id="{424389B8-7197-4EDC-8425-D9163B8CAE44}"/>
+                <a16:creationId xmlns:a16="http://schemas.microsoft.com/office/drawing/2014/main" id="{EEF4E267-9289-487E-A80E-5E5B8F61035A}"/>
               </a:ext>
             </a:extLst>
           </p:cNvPr>
@@ -11421,7 +11492,7 @@
                 <a:ea typeface="Arial"/>
                 <a:cs typeface="Arial"/>
               </a:rPr>
-              <a:t>Decision-support research display</a:t>
+              <a:t>Earliest safe threshold crossing only; all values are synthetic</a:t>
             </a:r>
           </a:p>
         </p:txBody>
@@ -11431,7 +11502,7 @@
           <p:cNvPr id="3" name="">
             <a:extLst xmlns:a="http://schemas.openxmlformats.org/drawingml/2006/main">
               <a:ext uri="{FF2B5EF4-FFF2-40B4-BE49-F238E27FC236}">
-                <a16:creationId xmlns:a16="http://schemas.microsoft.com/office/drawing/2014/main" id="{5D8D80BE-BED0-4C8E-A5F7-1CF08AD53BF3}"/>
+                <a16:creationId xmlns:a16="http://schemas.microsoft.com/office/drawing/2014/main" id="{678CC568-D813-4733-983F-D96A07508C0C}"/>
               </a:ext>
             </a:extLst>
           </p:cNvPr>
@@ -11577,7 +11648,7 @@
                 <a:ea typeface="Arial"/>
                 <a:cs typeface="Arial"/>
               </a:rPr>
-              <a:t>Fitted probability beside its own validation threshold and held-out model evidence</a:t>
+              <a:t>Tier 2: 1,634 alerts across 3,240 generated cycles; alert precision 0.730</a:t>
             </a:r>
           </a:p>
         </p:txBody>
@@ -11587,7 +11658,7 @@
           <p:cNvPr id="4" name="">
             <a:extLst xmlns:a="http://schemas.openxmlformats.org/drawingml/2006/main">
               <a:ext uri="{FF2B5EF4-FFF2-40B4-BE49-F238E27FC236}">
-                <a16:creationId xmlns:a16="http://schemas.microsoft.com/office/drawing/2014/main" id="{7F133ED9-8104-4447-994C-33A279CD08F5}"/>
+                <a16:creationId xmlns:a16="http://schemas.microsoft.com/office/drawing/2014/main" id="{D45E85C1-2862-4E50-A3AB-A67BD52E339E}"/>
               </a:ext>
             </a:extLst>
           </p:cNvPr>
@@ -11733,7 +11804,7 @@
                 <a:ea typeface="Arial"/>
                 <a:cs typeface="Arial"/>
               </a:rPr>
-              <a:t>Exact additive feature contributions and explicit imputation</a:t>
+              <a:t>Missed generated events: 484/1,677 (0.289); false alerts: 1.484 per synthetic patient-year</a:t>
             </a:r>
           </a:p>
         </p:txBody>
@@ -11743,7 +11814,7 @@
           <p:cNvPr id="5" name="">
             <a:extLst xmlns:a="http://schemas.openxmlformats.org/drawingml/2006/main">
               <a:ext uri="{FF2B5EF4-FFF2-40B4-BE49-F238E27FC236}">
-                <a16:creationId xmlns:a16="http://schemas.microsoft.com/office/drawing/2014/main" id="{6ACF6896-F622-4815-B57D-6ABE90227F67}"/>
+                <a16:creationId xmlns:a16="http://schemas.microsoft.com/office/drawing/2014/main" id="{BEC78A00-2A30-48BD-A587-E137A5FDDC28}"/>
               </a:ext>
             </a:extLst>
           </p:cNvPr>
@@ -11889,7 +11960,7 @@
                 <a:ea typeface="Arial"/>
                 <a:cs typeface="Arial"/>
               </a:rPr>
-              <a:t>Heuristic day estimate and conditional, illustrative day band</a:t>
+              <a:t>Median generated-event lead time: 17.000 days among 790 true-positive cycles with a generated ovulation day</a:t>
             </a:r>
           </a:p>
         </p:txBody>
@@ -11899,7 +11970,7 @@
           <p:cNvPr id="6" name="">
             <a:extLst xmlns:a="http://schemas.openxmlformats.org/drawingml/2006/main">
               <a:ext uri="{FF2B5EF4-FFF2-40B4-BE49-F238E27FC236}">
-                <a16:creationId xmlns:a16="http://schemas.microsoft.com/office/drawing/2014/main" id="{61DD913C-4977-46E7-B00E-3CB7BB92B9C9}"/>
+                <a16:creationId xmlns:a16="http://schemas.microsoft.com/office/drawing/2014/main" id="{0802AD0E-4CB9-42DF-863C-56CCDE2D6326}"/>
               </a:ext>
             </a:extLst>
           </p:cNvPr>
@@ -12045,7 +12116,7 @@
                 <a:ea typeface="Arial"/>
                 <a:cs typeface="Arial"/>
               </a:rPr>
-              <a:t>Data-quality ribbon and the reason for any withholding</a:t>
+              <a:t>Safety is evaluated at every snapshot; no later score can change an earlier alert.</a:t>
             </a:r>
           </a:p>
         </p:txBody>
@@ -12055,7 +12126,7 @@
           <p:cNvPr id="7" name="">
             <a:extLst xmlns:a="http://schemas.openxmlformats.org/drawingml/2006/main">
               <a:ext uri="{FF2B5EF4-FFF2-40B4-BE49-F238E27FC236}">
-                <a16:creationId xmlns:a16="http://schemas.microsoft.com/office/drawing/2014/main" id="{A809B258-D2F8-4407-B1E5-7211C9E398EF}"/>
+                <a16:creationId xmlns:a16="http://schemas.microsoft.com/office/drawing/2014/main" id="{A14F3CD8-E2C8-43DB-8236-B2A08D10F731}"/>
               </a:ext>
             </a:extLst>
           </p:cNvPr>
@@ -12209,7 +12280,7 @@
     </p:spTree>
     <p:extLst>
       <p:ext uri="{BB962C8B-B14F-4D97-AF65-F5344CB8AC3E}">
-        <p14:creationId xmlns:p14="http://schemas.microsoft.com/office/powerpoint/2010/main" val="2133167945"/>
+        <p14:creationId xmlns:p14="http://schemas.microsoft.com/office/powerpoint/2010/main" val="1888272187"/>
       </p:ext>
     </p:extLst>
   </p:cSld>
@@ -12240,7 +12311,7 @@
           <p:cNvPr id="8" name="">
             <a:extLst xmlns:a="http://schemas.openxmlformats.org/drawingml/2006/main">
               <a:ext uri="{FF2B5EF4-FFF2-40B4-BE49-F238E27FC236}">
-                <a16:creationId xmlns:a16="http://schemas.microsoft.com/office/drawing/2014/main" id="{1E9F1565-622C-46EE-96E0-005426E10F22}"/>
+                <a16:creationId xmlns:a16="http://schemas.microsoft.com/office/drawing/2014/main" id="{945EB002-62A6-4855-B896-D54CAF0F2A06}"/>
               </a:ext>
             </a:extLst>
           </p:cNvPr>
@@ -12386,7 +12457,7 @@
                 <a:ea typeface="Arial"/>
                 <a:cs typeface="Arial"/>
               </a:rPr>
-              <a:t>Guardrails live</a:t>
+              <a:t>What the clinician view shows</a:t>
             </a:r>
           </a:p>
         </p:txBody>
@@ -12396,7 +12467,7 @@
           <p:cNvPr id="2" name="">
             <a:extLst xmlns:a="http://schemas.openxmlformats.org/drawingml/2006/main">
               <a:ext uri="{FF2B5EF4-FFF2-40B4-BE49-F238E27FC236}">
-                <a16:creationId xmlns:a16="http://schemas.microsoft.com/office/drawing/2014/main" id="{19DCE0A5-E2E2-4C57-A49A-24F7BE6E3F43}"/>
+                <a16:creationId xmlns:a16="http://schemas.microsoft.com/office/drawing/2014/main" id="{4FD0418F-7987-4147-8E36-22F45FA78682}"/>
               </a:ext>
             </a:extLst>
           </p:cNvPr>
@@ -12542,7 +12613,7 @@
                 <a:ea typeface="Arial"/>
                 <a:cs typeface="Arial"/>
               </a:rPr>
-              <a:t>Missing safety information causes abstention</a:t>
+              <a:t>Decision-support research display</a:t>
             </a:r>
           </a:p>
         </p:txBody>
@@ -12552,7 +12623,7 @@
           <p:cNvPr id="3" name="">
             <a:extLst xmlns:a="http://schemas.openxmlformats.org/drawingml/2006/main">
               <a:ext uri="{FF2B5EF4-FFF2-40B4-BE49-F238E27FC236}">
-                <a16:creationId xmlns:a16="http://schemas.microsoft.com/office/drawing/2014/main" id="{319E54FA-342C-4CC1-A384-C7D8DB689A18}"/>
+                <a16:creationId xmlns:a16="http://schemas.microsoft.com/office/drawing/2014/main" id="{C7D73A5D-0985-4EB3-94EE-4A8E9141B9D3}"/>
               </a:ext>
             </a:extLst>
           </p:cNvPr>
@@ -12698,7 +12769,7 @@
                 <a:ea typeface="Arial"/>
                 <a:cs typeface="Arial"/>
               </a:rPr>
-              <a:t>Contraception, thyroid and prolactin flags, age and pregnancy-related states</a:t>
+              <a:t>Fitted probability beside its own validation threshold and held-out model evidence</a:t>
             </a:r>
           </a:p>
         </p:txBody>
@@ -12708,7 +12779,7 @@
           <p:cNvPr id="4" name="">
             <a:extLst xmlns:a="http://schemas.openxmlformats.org/drawingml/2006/main">
               <a:ext uri="{FF2B5EF4-FFF2-40B4-BE49-F238E27FC236}">
-                <a16:creationId xmlns:a16="http://schemas.microsoft.com/office/drawing/2014/main" id="{6C41D5DC-B149-43B3-A2F7-55E4E9A09AA8}"/>
+                <a16:creationId xmlns:a16="http://schemas.microsoft.com/office/drawing/2014/main" id="{0234BD02-084C-49AB-8B77-AB12DEF0CF1A}"/>
               </a:ext>
             </a:extLst>
           </p:cNvPr>
@@ -12854,7 +12925,7 @@
                 <a:ea typeface="Arial"/>
                 <a:cs typeface="Arial"/>
               </a:rPr>
-              <a:t>Early post-menarche, perimenopause and insufficient observed temperature</a:t>
+              <a:t>Exact additive feature contributions and explicit imputation</a:t>
             </a:r>
           </a:p>
         </p:txBody>
@@ -12864,7 +12935,7 @@
           <p:cNvPr id="5" name="">
             <a:extLst xmlns:a="http://schemas.openxmlformats.org/drawingml/2006/main">
               <a:ext uri="{FF2B5EF4-FFF2-40B4-BE49-F238E27FC236}">
-                <a16:creationId xmlns:a16="http://schemas.microsoft.com/office/drawing/2014/main" id="{6E3F5BD7-C851-4F1B-BCEE-0E479CBE3F39}"/>
+                <a16:creationId xmlns:a16="http://schemas.microsoft.com/office/drawing/2014/main" id="{CDBE144F-51E8-4E3A-9573-F5176FB15671}"/>
               </a:ext>
             </a:extLst>
           </p:cNvPr>
@@ -13010,7 +13081,7 @@
                 <a:ea typeface="Arial"/>
                 <a:cs typeface="Arial"/>
               </a:rPr>
-              <a:t>Withholding removes personal scores, intervals, explanations, sandbox outputs and alerts</a:t>
+              <a:t>Heuristic day estimate and conditional, illustrative day band</a:t>
             </a:r>
           </a:p>
         </p:txBody>
@@ -13020,7 +13091,7 @@
           <p:cNvPr id="6" name="">
             <a:extLst xmlns:a="http://schemas.openxmlformats.org/drawingml/2006/main">
               <a:ext uri="{FF2B5EF4-FFF2-40B4-BE49-F238E27FC236}">
-                <a16:creationId xmlns:a16="http://schemas.microsoft.com/office/drawing/2014/main" id="{7B1E9507-28C0-4089-9DFB-3D8C502337EC}"/>
+                <a16:creationId xmlns:a16="http://schemas.microsoft.com/office/drawing/2014/main" id="{63189A01-D4B9-4AE5-A459-FB1C0BFD2685}"/>
               </a:ext>
             </a:extLst>
           </p:cNvPr>
@@ -13166,7 +13237,7 @@
                 <a:ea typeface="Arial"/>
                 <a:cs typeface="Arial"/>
               </a:rPr>
-              <a:t>The workflow is synthetic and its safety effectiveness has not been clinically evaluated</a:t>
+              <a:t>Data-quality ribbon and the reason for any withholding</a:t>
             </a:r>
           </a:p>
         </p:txBody>
@@ -13176,7 +13247,7 @@
           <p:cNvPr id="7" name="">
             <a:extLst xmlns:a="http://schemas.openxmlformats.org/drawingml/2006/main">
               <a:ext uri="{FF2B5EF4-FFF2-40B4-BE49-F238E27FC236}">
-                <a16:creationId xmlns:a16="http://schemas.microsoft.com/office/drawing/2014/main" id="{D132D877-D634-4502-9483-FB41D1D45DDD}"/>
+                <a16:creationId xmlns:a16="http://schemas.microsoft.com/office/drawing/2014/main" id="{FF053A48-2CE7-47A6-8F38-804D81E9796E}"/>
               </a:ext>
             </a:extLst>
           </p:cNvPr>
@@ -13330,7 +13401,7 @@
     </p:spTree>
     <p:extLst>
       <p:ext uri="{BB962C8B-B14F-4D97-AF65-F5344CB8AC3E}">
-        <p14:creationId xmlns:p14="http://schemas.microsoft.com/office/powerpoint/2010/main" val="886002321"/>
+        <p14:creationId xmlns:p14="http://schemas.microsoft.com/office/powerpoint/2010/main" val="897357230"/>
       </p:ext>
     </p:extLst>
   </p:cSld>
@@ -13361,7 +13432,7 @@
           <p:cNvPr id="8" name="">
             <a:extLst xmlns:a="http://schemas.openxmlformats.org/drawingml/2006/main">
               <a:ext uri="{FF2B5EF4-FFF2-40B4-BE49-F238E27FC236}">
-                <a16:creationId xmlns:a16="http://schemas.microsoft.com/office/drawing/2014/main" id="{F9780810-BDA5-4026-8A63-F274D8DBB175}"/>
+                <a16:creationId xmlns:a16="http://schemas.microsoft.com/office/drawing/2014/main" id="{BAEA32E4-A858-4B34-9154-8B46FF12CFA1}"/>
               </a:ext>
             </a:extLst>
           </p:cNvPr>
@@ -13507,7 +13578,7 @@
                 <a:ea typeface="Arial"/>
                 <a:cs typeface="Arial"/>
               </a:rPr>
-              <a:t>The twin and assumption sandbox</a:t>
+              <a:t>Guardrails live</a:t>
             </a:r>
           </a:p>
         </p:txBody>
@@ -13517,7 +13588,7 @@
           <p:cNvPr id="2" name="">
             <a:extLst xmlns:a="http://schemas.openxmlformats.org/drawingml/2006/main">
               <a:ext uri="{FF2B5EF4-FFF2-40B4-BE49-F238E27FC236}">
-                <a16:creationId xmlns:a16="http://schemas.microsoft.com/office/drawing/2014/main" id="{9BF10609-F70B-4FBE-9FB7-13B4685E3471}"/>
+                <a16:creationId xmlns:a16="http://schemas.microsoft.com/office/drawing/2014/main" id="{CBFC6036-9E26-43F1-85DC-2F0185402F42}"/>
               </a:ext>
             </a:extLst>
           </p:cNvPr>
@@ -13663,7 +13734,7 @@
                 <a:ea typeface="Arial"/>
                 <a:cs typeface="Arial"/>
               </a:rPr>
-              <a:t>Clear boundaries around simulated physiology</a:t>
+              <a:t>Missing safety information causes abstention</a:t>
             </a:r>
           </a:p>
         </p:txBody>
@@ -13673,7 +13744,7 @@
           <p:cNvPr id="3" name="">
             <a:extLst xmlns:a="http://schemas.openxmlformats.org/drawingml/2006/main">
               <a:ext uri="{FF2B5EF4-FFF2-40B4-BE49-F238E27FC236}">
-                <a16:creationId xmlns:a16="http://schemas.microsoft.com/office/drawing/2014/main" id="{30E9D52D-75A7-4732-8191-6A46B4C01CBE}"/>
+                <a16:creationId xmlns:a16="http://schemas.microsoft.com/office/drawing/2014/main" id="{DC794401-4048-4E25-8849-DEF40D7EA505}"/>
               </a:ext>
             </a:extLst>
           </p:cNvPr>
@@ -13819,7 +13890,7 @@
                 <a:ea typeface="Arial"/>
                 <a:cs typeface="Arial"/>
               </a:rPr>
-              <a:t>Reproductive and metabolic equations generate an illustrative state trajectory</a:t>
+              <a:t>Contraception, thyroid and prolactin flags, age and pregnancy-related states</a:t>
             </a:r>
           </a:p>
         </p:txBody>
@@ -13829,7 +13900,7 @@
           <p:cNvPr id="4" name="">
             <a:extLst xmlns:a="http://schemas.openxmlformats.org/drawingml/2006/main">
               <a:ext uri="{FF2B5EF4-FFF2-40B4-BE49-F238E27FC236}">
-                <a16:creationId xmlns:a16="http://schemas.microsoft.com/office/drawing/2014/main" id="{394E48E8-24E2-4AE1-BEC3-E810D8A0C80B}"/>
+                <a16:creationId xmlns:a16="http://schemas.microsoft.com/office/drawing/2014/main" id="{8CA8FA71-0BF3-4C75-961B-3B6ED69C76B4}"/>
               </a:ext>
             </a:extLst>
           </p:cNvPr>
@@ -13975,7 +14046,7 @@
                 <a:ea typeface="Arial"/>
                 <a:cs typeface="Arial"/>
               </a:rPr>
-              <a:t>The twin does not affect the logistic score or its reported performance</a:t>
+              <a:t>Early post-menarche, perimenopause and insufficient observed temperature</a:t>
             </a:r>
           </a:p>
         </p:txBody>
@@ -13985,7 +14056,7 @@
           <p:cNvPr id="5" name="">
             <a:extLst xmlns:a="http://schemas.openxmlformats.org/drawingml/2006/main">
               <a:ext uri="{FF2B5EF4-FFF2-40B4-BE49-F238E27FC236}">
-                <a16:creationId xmlns:a16="http://schemas.microsoft.com/office/drawing/2014/main" id="{3F20F9E2-A054-4E1F-A433-BDD38F680090}"/>
+                <a16:creationId xmlns:a16="http://schemas.microsoft.com/office/drawing/2014/main" id="{2C2AA11F-8E35-47E0-AF55-3FEF61783BE7}"/>
               </a:ext>
             </a:extLst>
           </p:cNvPr>
@@ -14131,7 +14202,7 @@
                 <a:ea typeface="Arial"/>
                 <a:cs typeface="Arial"/>
               </a:rPr>
-              <a:t>The sandbox edits invented model inputs. It does not predict a treatment effect</a:t>
+              <a:t>Withholding removes personal scores, intervals, explanations, sandbox outputs and alerts</a:t>
             </a:r>
           </a:p>
         </p:txBody>
@@ -14141,7 +14212,7 @@
           <p:cNvPr id="6" name="">
             <a:extLst xmlns:a="http://schemas.openxmlformats.org/drawingml/2006/main">
               <a:ext uri="{FF2B5EF4-FFF2-40B4-BE49-F238E27FC236}">
-                <a16:creationId xmlns:a16="http://schemas.microsoft.com/office/drawing/2014/main" id="{AC63BD59-C0B1-4ACF-AC28-D1723F1782FD}"/>
+                <a16:creationId xmlns:a16="http://schemas.microsoft.com/office/drawing/2014/main" id="{85ED1FF3-84AD-4709-9954-DA553DDB696E}"/>
               </a:ext>
             </a:extLst>
           </p:cNvPr>
@@ -14287,7 +14358,7 @@
                 <a:ea typeface="Arial"/>
                 <a:cs typeface="Arial"/>
               </a:rPr>
-              <a:t>Glucose threshold crossings are simulated counts, not an evaluated glucose forecast</a:t>
+              <a:t>The workflow is synthetic and its safety effectiveness has not been clinically evaluated</a:t>
             </a:r>
           </a:p>
         </p:txBody>
@@ -14297,7 +14368,7 @@
           <p:cNvPr id="7" name="">
             <a:extLst xmlns:a="http://schemas.openxmlformats.org/drawingml/2006/main">
               <a:ext uri="{FF2B5EF4-FFF2-40B4-BE49-F238E27FC236}">
-                <a16:creationId xmlns:a16="http://schemas.microsoft.com/office/drawing/2014/main" id="{BDA76A54-5C4E-40B0-BCE8-A17B5B32B7E2}"/>
+                <a16:creationId xmlns:a16="http://schemas.microsoft.com/office/drawing/2014/main" id="{F1EE0F2B-1E69-4789-A79A-9414EE11E1C3}"/>
               </a:ext>
             </a:extLst>
           </p:cNvPr>
@@ -14451,7 +14522,7 @@
     </p:spTree>
     <p:extLst>
       <p:ext uri="{BB962C8B-B14F-4D97-AF65-F5344CB8AC3E}">
-        <p14:creationId xmlns:p14="http://schemas.microsoft.com/office/powerpoint/2010/main" val="1049776516"/>
+        <p14:creationId xmlns:p14="http://schemas.microsoft.com/office/powerpoint/2010/main" val="1788330719"/>
       </p:ext>
     </p:extLst>
   </p:cSld>
@@ -14482,7 +14553,7 @@
           <p:cNvPr id="8" name="">
             <a:extLst xmlns:a="http://schemas.openxmlformats.org/drawingml/2006/main">
               <a:ext uri="{FF2B5EF4-FFF2-40B4-BE49-F238E27FC236}">
-                <a16:creationId xmlns:a16="http://schemas.microsoft.com/office/drawing/2014/main" id="{CEA21B3C-BDA4-4ECB-B1E4-54D4E6B047A3}"/>
+                <a16:creationId xmlns:a16="http://schemas.microsoft.com/office/drawing/2014/main" id="{DA09ED37-3E00-432B-9384-D6701D6CA4F4}"/>
               </a:ext>
             </a:extLst>
           </p:cNvPr>
@@ -14628,7 +14699,7 @@
                 <a:ea typeface="Arial"/>
                 <a:cs typeface="Arial"/>
               </a:rPr>
-              <a:t>Where it fails</a:t>
+              <a:t>The twin and assumption sandbox</a:t>
             </a:r>
           </a:p>
         </p:txBody>
@@ -14638,7 +14709,7 @@
           <p:cNvPr id="2" name="">
             <a:extLst xmlns:a="http://schemas.openxmlformats.org/drawingml/2006/main">
               <a:ext uri="{FF2B5EF4-FFF2-40B4-BE49-F238E27FC236}">
-                <a16:creationId xmlns:a16="http://schemas.microsoft.com/office/drawing/2014/main" id="{F0E226C3-9450-451F-823B-A7B7CB2BCDF5}"/>
+                <a16:creationId xmlns:a16="http://schemas.microsoft.com/office/drawing/2014/main" id="{8E90A1AE-BA3C-4A17-A469-8D2A45238E9B}"/>
               </a:ext>
             </a:extLst>
           </p:cNvPr>
@@ -14784,7 +14855,7 @@
                 <a:ea typeface="Arial"/>
                 <a:cs typeface="Arial"/>
               </a:rPr>
-              <a:t>All declared Kushi scenarios remain visible</a:t>
+              <a:t>Clear boundaries around simulated physiology</a:t>
             </a:r>
           </a:p>
         </p:txBody>
@@ -14794,7 +14865,7 @@
           <p:cNvPr id="3" name="">
             <a:extLst xmlns:a="http://schemas.openxmlformats.org/drawingml/2006/main">
               <a:ext uri="{FF2B5EF4-FFF2-40B4-BE49-F238E27FC236}">
-                <a16:creationId xmlns:a16="http://schemas.microsoft.com/office/drawing/2014/main" id="{D8451448-5F31-465B-8A36-137F34A52A51}"/>
+                <a16:creationId xmlns:a16="http://schemas.microsoft.com/office/drawing/2014/main" id="{BF723035-898F-4BC6-996B-567FFBBD1B9A}"/>
               </a:ext>
             </a:extLst>
           </p:cNvPr>
@@ -14940,7 +15011,7 @@
                 <a:ea typeface="Arial"/>
                 <a:cs typeface="Arial"/>
               </a:rPr>
-              <a:t>Display the fixed scenario seeds with misses, false alarms or withholding unchanged</a:t>
+              <a:t>Reproductive and metabolic equations generate an illustrative state trajectory</a:t>
             </a:r>
           </a:p>
         </p:txBody>
@@ -14950,7 +15021,7 @@
           <p:cNvPr id="4" name="">
             <a:extLst xmlns:a="http://schemas.openxmlformats.org/drawingml/2006/main">
               <a:ext uri="{FF2B5EF4-FFF2-40B4-BE49-F238E27FC236}">
-                <a16:creationId xmlns:a16="http://schemas.microsoft.com/office/drawing/2014/main" id="{FE728223-ED6E-4B0B-B836-0EC47036C8EB}"/>
+                <a16:creationId xmlns:a16="http://schemas.microsoft.com/office/drawing/2014/main" id="{63A89E44-F000-4C5B-AFB8-2D1A0A604780}"/>
               </a:ext>
             </a:extLst>
           </p:cNvPr>
@@ -15096,7 +15167,7 @@
                 <a:ea typeface="Arial"/>
                 <a:cs typeface="Arial"/>
               </a:rPr>
-              <a:t>Different snapshots can fall back to calendar even when sensors are available</a:t>
+              <a:t>The twin does not affect the logistic score or its reported performance</a:t>
             </a:r>
           </a:p>
         </p:txBody>
@@ -15106,7 +15177,7 @@
           <p:cNvPr id="5" name="">
             <a:extLst xmlns:a="http://schemas.openxmlformats.org/drawingml/2006/main">
               <a:ext uri="{FF2B5EF4-FFF2-40B4-BE49-F238E27FC236}">
-                <a16:creationId xmlns:a16="http://schemas.microsoft.com/office/drawing/2014/main" id="{0F145E38-14C1-4965-9B3B-4E4C61CEE6CD}"/>
+                <a16:creationId xmlns:a16="http://schemas.microsoft.com/office/drawing/2014/main" id="{E7176569-4AED-4847-A733-173CD10AF596}"/>
               </a:ext>
             </a:extLst>
           </p:cNvPr>
@@ -15252,7 +15323,7 @@
                 <a:ea typeface="Arial"/>
                 <a:cs typeface="Arial"/>
               </a:rPr>
-              <a:t>A class set containing both outcomes does not identify one result</a:t>
+              <a:t>The sandbox edits invented model inputs. It does not predict a treatment effect</a:t>
             </a:r>
           </a:p>
         </p:txBody>
@@ -15262,7 +15333,7 @@
           <p:cNvPr id="6" name="">
             <a:extLst xmlns:a="http://schemas.openxmlformats.org/drawingml/2006/main">
               <a:ext uri="{FF2B5EF4-FFF2-40B4-BE49-F238E27FC236}">
-                <a16:creationId xmlns:a16="http://schemas.microsoft.com/office/drawing/2014/main" id="{5F7E221E-A69C-4FB2-A369-A13526CBB743}"/>
+                <a16:creationId xmlns:a16="http://schemas.microsoft.com/office/drawing/2014/main" id="{ECD1221E-97B8-42D3-8474-8BE066F6FF48}"/>
               </a:ext>
             </a:extLst>
           </p:cNvPr>
@@ -15408,7 +15479,7 @@
                 <a:ea typeface="Arial"/>
                 <a:cs typeface="Arial"/>
               </a:rPr>
-              <a:t>Robustness, state-estimator and conformal coverage evidence remain separate work</a:t>
+              <a:t>Glucose threshold crossings are simulated counts, not an evaluated glucose forecast</a:t>
             </a:r>
           </a:p>
         </p:txBody>
@@ -15418,7 +15489,7 @@
           <p:cNvPr id="7" name="">
             <a:extLst xmlns:a="http://schemas.openxmlformats.org/drawingml/2006/main">
               <a:ext uri="{FF2B5EF4-FFF2-40B4-BE49-F238E27FC236}">
-                <a16:creationId xmlns:a16="http://schemas.microsoft.com/office/drawing/2014/main" id="{17199940-9AED-47A3-8B8D-1D44380B364B}"/>
+                <a16:creationId xmlns:a16="http://schemas.microsoft.com/office/drawing/2014/main" id="{40FAFBF4-3E39-423F-87FA-B9C27263D773}"/>
               </a:ext>
             </a:extLst>
           </p:cNvPr>
@@ -15572,7 +15643,7 @@
     </p:spTree>
     <p:extLst>
       <p:ext uri="{BB962C8B-B14F-4D97-AF65-F5344CB8AC3E}">
-        <p14:creationId xmlns:p14="http://schemas.microsoft.com/office/powerpoint/2010/main" val="1212577180"/>
+        <p14:creationId xmlns:p14="http://schemas.microsoft.com/office/powerpoint/2010/main" val="2129590959"/>
       </p:ext>
     </p:extLst>
   </p:cSld>
@@ -15603,7 +15674,7 @@
           <p:cNvPr id="8" name="">
             <a:extLst xmlns:a="http://schemas.openxmlformats.org/drawingml/2006/main">
               <a:ext uri="{FF2B5EF4-FFF2-40B4-BE49-F238E27FC236}">
-                <a16:creationId xmlns:a16="http://schemas.microsoft.com/office/drawing/2014/main" id="{47FBB571-289F-404E-B0EC-D63DD4B6FF86}"/>
+                <a16:creationId xmlns:a16="http://schemas.microsoft.com/office/drawing/2014/main" id="{01F1546D-08F9-4C3A-91CE-71498F4C8923}"/>
               </a:ext>
             </a:extLst>
           </p:cNvPr>
@@ -15749,7 +15820,7 @@
                 <a:ea typeface="Arial"/>
                 <a:cs typeface="Arial"/>
               </a:rPr>
-              <a:t>Validity limits</a:t>
+              <a:t>Where it fails</a:t>
             </a:r>
           </a:p>
         </p:txBody>
@@ -15759,7 +15830,7 @@
           <p:cNvPr id="2" name="">
             <a:extLst xmlns:a="http://schemas.openxmlformats.org/drawingml/2006/main">
               <a:ext uri="{FF2B5EF4-FFF2-40B4-BE49-F238E27FC236}">
-                <a16:creationId xmlns:a16="http://schemas.microsoft.com/office/drawing/2014/main" id="{ABB3069B-CE1D-43B4-A785-97E22BA4D119}"/>
+                <a16:creationId xmlns:a16="http://schemas.microsoft.com/office/drawing/2014/main" id="{3417B2C8-035E-4192-B42C-016A04F1526D}"/>
               </a:ext>
             </a:extLst>
           </p:cNvPr>
@@ -15905,7 +15976,7 @@
                 <a:ea typeface="Arial"/>
                 <a:cs typeface="Arial"/>
               </a:rPr>
-              <a:t>Synthetic recovery is not prospective evidence in women</a:t>
+              <a:t>All declared Kushi scenarios remain visible</a:t>
             </a:r>
           </a:p>
         </p:txBody>
@@ -15915,7 +15986,7 @@
           <p:cNvPr id="3" name="">
             <a:extLst xmlns:a="http://schemas.openxmlformats.org/drawingml/2006/main">
               <a:ext uri="{FF2B5EF4-FFF2-40B4-BE49-F238E27FC236}">
-                <a16:creationId xmlns:a16="http://schemas.microsoft.com/office/drawing/2014/main" id="{2EE2A5BE-72C3-491A-86A3-DEDE01161894}"/>
+                <a16:creationId xmlns:a16="http://schemas.microsoft.com/office/drawing/2014/main" id="{BBBDF89E-8792-4C99-889F-6E83C82E3D3D}"/>
               </a:ext>
             </a:extLst>
           </p:cNvPr>
@@ -16061,7 +16132,7 @@
                 <a:ea typeface="Arial"/>
                 <a:cs typeface="Arial"/>
               </a:rPr>
-              <a:t>Labels and sensor changes share generator assumptions</a:t>
+              <a:t>Display the fixed scenario seeds with misses, false alarms or withholding unchanged</a:t>
             </a:r>
           </a:p>
         </p:txBody>
@@ -16071,7 +16142,7 @@
           <p:cNvPr id="4" name="">
             <a:extLst xmlns:a="http://schemas.openxmlformats.org/drawingml/2006/main">
               <a:ext uri="{FF2B5EF4-FFF2-40B4-BE49-F238E27FC236}">
-                <a16:creationId xmlns:a16="http://schemas.microsoft.com/office/drawing/2014/main" id="{EE6345FD-220F-49A3-B422-7BE93446AC0C}"/>
+                <a16:creationId xmlns:a16="http://schemas.microsoft.com/office/drawing/2014/main" id="{EAEE3BA3-5E7A-4290-ADB9-CE09429D0CC2}"/>
               </a:ext>
             </a:extLst>
           </p:cNvPr>
@@ -16217,7 +16288,7 @@
                 <a:ea typeface="Arial"/>
                 <a:cs typeface="Arial"/>
               </a:rPr>
-              <a:t>EHR-lite includes a label-generating internal latent</a:t>
+              <a:t>Different snapshots can fall back to calendar even when sensors are available</a:t>
             </a:r>
           </a:p>
         </p:txBody>
@@ -16227,7 +16298,7 @@
           <p:cNvPr id="5" name="">
             <a:extLst xmlns:a="http://schemas.openxmlformats.org/drawingml/2006/main">
               <a:ext uri="{FF2B5EF4-FFF2-40B4-BE49-F238E27FC236}">
-                <a16:creationId xmlns:a16="http://schemas.microsoft.com/office/drawing/2014/main" id="{29AC41A5-0B51-46F2-8D0A-C8B2670289C7}"/>
+                <a16:creationId xmlns:a16="http://schemas.microsoft.com/office/drawing/2014/main" id="{572BF4D6-E190-4733-BB1B-C016C6C60743}"/>
               </a:ext>
             </a:extLst>
           </p:cNvPr>
@@ -16373,7 +16444,7 @@
                 <a:ea typeface="Arial"/>
                 <a:cs typeface="Arial"/>
               </a:rPr>
-              <a:t>Old test seeds were reused during development</a:t>
+              <a:t>A class set containing both outcomes does not identify one result</a:t>
             </a:r>
           </a:p>
         </p:txBody>
@@ -16383,7 +16454,7 @@
           <p:cNvPr id="6" name="">
             <a:extLst xmlns:a="http://schemas.openxmlformats.org/drawingml/2006/main">
               <a:ext uri="{FF2B5EF4-FFF2-40B4-BE49-F238E27FC236}">
-                <a16:creationId xmlns:a16="http://schemas.microsoft.com/office/drawing/2014/main" id="{F3E9E9BF-C590-44A3-8A67-13503EB72D54}"/>
+                <a16:creationId xmlns:a16="http://schemas.microsoft.com/office/drawing/2014/main" id="{CFA78623-3F7E-4040-8A42-0C79AA0D8839}"/>
               </a:ext>
             </a:extLst>
           </p:cNvPr>
@@ -16529,7 +16600,7 @@
                 <a:ea typeface="Arial"/>
                 <a:cs typeface="Arial"/>
               </a:rPr>
-              <a:t>The current benchmark does not evaluate the complete sequential alert policy</a:t>
+              <a:t>Robustness, state-estimator and conformal coverage evidence remain separate work</a:t>
             </a:r>
           </a:p>
         </p:txBody>
@@ -16539,7 +16610,7 @@
           <p:cNvPr id="7" name="">
             <a:extLst xmlns:a="http://schemas.openxmlformats.org/drawingml/2006/main">
               <a:ext uri="{FF2B5EF4-FFF2-40B4-BE49-F238E27FC236}">
-                <a16:creationId xmlns:a16="http://schemas.microsoft.com/office/drawing/2014/main" id="{418F1438-6459-4C48-8FE4-03F24C68C66F}"/>
+                <a16:creationId xmlns:a16="http://schemas.microsoft.com/office/drawing/2014/main" id="{337CAF91-E980-477C-AAF6-0A0288B8F59B}"/>
               </a:ext>
             </a:extLst>
           </p:cNvPr>
@@ -16693,7 +16764,7 @@
     </p:spTree>
     <p:extLst>
       <p:ext uri="{BB962C8B-B14F-4D97-AF65-F5344CB8AC3E}">
-        <p14:creationId xmlns:p14="http://schemas.microsoft.com/office/powerpoint/2010/main" val="1846309424"/>
+        <p14:creationId xmlns:p14="http://schemas.microsoft.com/office/powerpoint/2010/main" val="232754227"/>
       </p:ext>
     </p:extLst>
   </p:cSld>
@@ -16724,7 +16795,7 @@
           <p:cNvPr id="8" name="">
             <a:extLst xmlns:a="http://schemas.openxmlformats.org/drawingml/2006/main">
               <a:ext uri="{FF2B5EF4-FFF2-40B4-BE49-F238E27FC236}">
-                <a16:creationId xmlns:a16="http://schemas.microsoft.com/office/drawing/2014/main" id="{D727F8EC-6234-4878-8271-EE6C90F9FD75}"/>
+                <a16:creationId xmlns:a16="http://schemas.microsoft.com/office/drawing/2014/main" id="{F3329DA4-2BF8-4170-8B42-76C3B133B011}"/>
               </a:ext>
             </a:extLst>
           </p:cNvPr>
@@ -16870,7 +16941,7 @@
                 <a:ea typeface="Arial"/>
                 <a:cs typeface="Arial"/>
               </a:rPr>
-              <a:t>Reproducible demonstration</a:t>
+              <a:t>Validity limits</a:t>
             </a:r>
           </a:p>
         </p:txBody>
@@ -16880,7 +16951,7 @@
           <p:cNvPr id="2" name="">
             <a:extLst xmlns:a="http://schemas.openxmlformats.org/drawingml/2006/main">
               <a:ext uri="{FF2B5EF4-FFF2-40B4-BE49-F238E27FC236}">
-                <a16:creationId xmlns:a16="http://schemas.microsoft.com/office/drawing/2014/main" id="{EC307F34-502C-4927-AD05-DEBF366A2263}"/>
+                <a16:creationId xmlns:a16="http://schemas.microsoft.com/office/drawing/2014/main" id="{E167DA7D-DE3F-4A5E-ACCE-DBADB42CCCDC}"/>
               </a:ext>
             </a:extLst>
           </p:cNvPr>
@@ -17026,7 +17097,7 @@
                 <a:ea typeface="Arial"/>
                 <a:cs typeface="Arial"/>
               </a:rPr>
-              <a:t>Public source, inspectable artifacts and explicit next work</a:t>
+              <a:t>Synthetic recovery is not prospective evidence in women</a:t>
             </a:r>
           </a:p>
         </p:txBody>
@@ -17036,7 +17107,7 @@
           <p:cNvPr id="3" name="">
             <a:extLst xmlns:a="http://schemas.openxmlformats.org/drawingml/2006/main">
               <a:ext uri="{FF2B5EF4-FFF2-40B4-BE49-F238E27FC236}">
-                <a16:creationId xmlns:a16="http://schemas.microsoft.com/office/drawing/2014/main" id="{1737CC0E-D7AF-49A6-954A-27ED33DED41D}"/>
+                <a16:creationId xmlns:a16="http://schemas.microsoft.com/office/drawing/2014/main" id="{F8BA37D1-8E8B-42D8-B7C1-2FC62A50D869}"/>
               </a:ext>
             </a:extLst>
           </p:cNvPr>
@@ -17182,7 +17253,7 @@
                 <a:ea typeface="Arial"/>
                 <a:cs typeface="Arial"/>
               </a:rPr>
-              <a:t>README, model cards and the audit link every claim to evidence</a:t>
+              <a:t>Labels and sensor changes share generator assumptions</a:t>
             </a:r>
           </a:p>
         </p:txBody>
@@ -17192,7 +17263,7 @@
           <p:cNvPr id="4" name="">
             <a:extLst xmlns:a="http://schemas.openxmlformats.org/drawingml/2006/main">
               <a:ext uri="{FF2B5EF4-FFF2-40B4-BE49-F238E27FC236}">
-                <a16:creationId xmlns:a16="http://schemas.microsoft.com/office/drawing/2014/main" id="{1222F196-A18E-46CB-A412-507B77A86DDC}"/>
+                <a16:creationId xmlns:a16="http://schemas.microsoft.com/office/drawing/2014/main" id="{2AB8899F-689C-496F-8408-1FFD320281DD}"/>
               </a:ext>
             </a:extLst>
           </p:cNvPr>
@@ -17338,7 +17409,7 @@
                 <a:ea typeface="Arial"/>
                 <a:cs typeface="Arial"/>
               </a:rPr>
-              <a:t>Persisted inference reproduces the benchmark and exposes exact feature calculations</a:t>
+              <a:t>EHR-lite includes a label-generating internal latent</a:t>
             </a:r>
           </a:p>
         </p:txBody>
@@ -17348,7 +17419,7 @@
           <p:cNvPr id="5" name="">
             <a:extLst xmlns:a="http://schemas.openxmlformats.org/drawingml/2006/main">
               <a:ext uri="{FF2B5EF4-FFF2-40B4-BE49-F238E27FC236}">
-                <a16:creationId xmlns:a16="http://schemas.microsoft.com/office/drawing/2014/main" id="{705F9DF4-8075-4A44-82BC-662AAB16174C}"/>
+                <a16:creationId xmlns:a16="http://schemas.microsoft.com/office/drawing/2014/main" id="{ECFDFF20-512E-4013-9F38-A768C26D4D52}"/>
               </a:ext>
             </a:extLst>
           </p:cNvPr>
@@ -17494,7 +17565,7 @@
                 <a:ea typeface="Arial"/>
                 <a:cs typeface="Arial"/>
               </a:rPr>
-              <a:t>The required video remains a human recording and upload task</a:t>
+              <a:t>Old test seeds were reused during development</a:t>
             </a:r>
           </a:p>
         </p:txBody>
@@ -17504,7 +17575,7 @@
           <p:cNvPr id="6" name="">
             <a:extLst xmlns:a="http://schemas.openxmlformats.org/drawingml/2006/main">
               <a:ext uri="{FF2B5EF4-FFF2-40B4-BE49-F238E27FC236}">
-                <a16:creationId xmlns:a16="http://schemas.microsoft.com/office/drawing/2014/main" id="{116C1862-9D71-421F-98B9-1A7E566EB665}"/>
+                <a16:creationId xmlns:a16="http://schemas.microsoft.com/office/drawing/2014/main" id="{0088E84B-2BE8-4D9D-96B0-82BE4286EFD9}"/>
               </a:ext>
             </a:extLst>
           </p:cNvPr>
@@ -17650,7 +17721,7 @@
                 <a:ea typeface="Arial"/>
                 <a:cs typeface="Arial"/>
               </a:rPr>
-              <a:t>Clinical validation, clinician feedback and sim-to-real evaluation remain outstanding</a:t>
+              <a:t>The frozen synthetic sequential alert policy is evaluated; robustness and clinical safety effectiveness remain separate work</a:t>
             </a:r>
           </a:p>
         </p:txBody>
@@ -17660,7 +17731,7 @@
           <p:cNvPr id="7" name="">
             <a:extLst xmlns:a="http://schemas.openxmlformats.org/drawingml/2006/main">
               <a:ext uri="{FF2B5EF4-FFF2-40B4-BE49-F238E27FC236}">
-                <a16:creationId xmlns:a16="http://schemas.microsoft.com/office/drawing/2014/main" id="{779435E2-6A93-4E10-9DD8-2B751CF11597}"/>
+                <a16:creationId xmlns:a16="http://schemas.microsoft.com/office/drawing/2014/main" id="{4A70C16E-7525-43A8-A17C-F606AFE32C2C}"/>
               </a:ext>
             </a:extLst>
           </p:cNvPr>
@@ -17814,7 +17885,7 @@
     </p:spTree>
     <p:extLst>
       <p:ext uri="{BB962C8B-B14F-4D97-AF65-F5344CB8AC3E}">
-        <p14:creationId xmlns:p14="http://schemas.microsoft.com/office/powerpoint/2010/main" val="452144761"/>
+        <p14:creationId xmlns:p14="http://schemas.microsoft.com/office/powerpoint/2010/main" val="1696317739"/>
       </p:ext>
     </p:extLst>
   </p:cSld>
@@ -17845,7 +17916,7 @@
           <p:cNvPr id="7" name="">
             <a:extLst xmlns:a="http://schemas.openxmlformats.org/drawingml/2006/main">
               <a:ext uri="{FF2B5EF4-FFF2-40B4-BE49-F238E27FC236}">
-                <a16:creationId xmlns:a16="http://schemas.microsoft.com/office/drawing/2014/main" id="{621BEF50-9118-454E-8882-C8F86B8FE53B}"/>
+                <a16:creationId xmlns:a16="http://schemas.microsoft.com/office/drawing/2014/main" id="{04D9337E-0838-469F-9013-1DD6B65D7D9F}"/>
               </a:ext>
             </a:extLst>
           </p:cNvPr>
@@ -18001,7 +18072,7 @@
           <p:cNvPr id="2" name="">
             <a:extLst xmlns:a="http://schemas.openxmlformats.org/drawingml/2006/main">
               <a:ext uri="{FF2B5EF4-FFF2-40B4-BE49-F238E27FC236}">
-                <a16:creationId xmlns:a16="http://schemas.microsoft.com/office/drawing/2014/main" id="{A412B1DC-4BE3-45D6-93C9-CA99336F1069}"/>
+                <a16:creationId xmlns:a16="http://schemas.microsoft.com/office/drawing/2014/main" id="{972765EC-522A-4833-B187-20012955E411}"/>
               </a:ext>
             </a:extLst>
           </p:cNvPr>
@@ -18157,7 +18228,7 @@
           <p:cNvPr id="3" name="">
             <a:extLst xmlns:a="http://schemas.openxmlformats.org/drawingml/2006/main">
               <a:ext uri="{FF2B5EF4-FFF2-40B4-BE49-F238E27FC236}">
-                <a16:creationId xmlns:a16="http://schemas.microsoft.com/office/drawing/2014/main" id="{76276DFD-D1DD-44C2-962B-98FA792D3787}"/>
+                <a16:creationId xmlns:a16="http://schemas.microsoft.com/office/drawing/2014/main" id="{52E49CB4-34B5-4026-8091-533123822998}"/>
               </a:ext>
             </a:extLst>
           </p:cNvPr>
@@ -18313,7 +18384,7 @@
           <p:cNvPr id="4" name="">
             <a:extLst xmlns:a="http://schemas.openxmlformats.org/drawingml/2006/main">
               <a:ext uri="{FF2B5EF4-FFF2-40B4-BE49-F238E27FC236}">
-                <a16:creationId xmlns:a16="http://schemas.microsoft.com/office/drawing/2014/main" id="{F62D08A1-45F7-4CAE-A277-091FACBC91C4}"/>
+                <a16:creationId xmlns:a16="http://schemas.microsoft.com/office/drawing/2014/main" id="{0841B78E-3A80-4AE7-8459-581BF776FBA3}"/>
               </a:ext>
             </a:extLst>
           </p:cNvPr>
@@ -18469,7 +18540,7 @@
           <p:cNvPr id="5" name="">
             <a:extLst xmlns:a="http://schemas.openxmlformats.org/drawingml/2006/main">
               <a:ext uri="{FF2B5EF4-FFF2-40B4-BE49-F238E27FC236}">
-                <a16:creationId xmlns:a16="http://schemas.microsoft.com/office/drawing/2014/main" id="{91CE139B-48A5-4438-9496-F1B400B75483}"/>
+                <a16:creationId xmlns:a16="http://schemas.microsoft.com/office/drawing/2014/main" id="{6B057D0C-2055-4AC6-9C36-2CF090A3872F}"/>
               </a:ext>
             </a:extLst>
           </p:cNvPr>
@@ -18625,7 +18696,7 @@
           <p:cNvPr id="6" name="">
             <a:extLst xmlns:a="http://schemas.openxmlformats.org/drawingml/2006/main">
               <a:ext uri="{FF2B5EF4-FFF2-40B4-BE49-F238E27FC236}">
-                <a16:creationId xmlns:a16="http://schemas.microsoft.com/office/drawing/2014/main" id="{3396D908-D510-4707-B15B-79C68CD4E737}"/>
+                <a16:creationId xmlns:a16="http://schemas.microsoft.com/office/drawing/2014/main" id="{8BB2493F-77FA-47A2-9F11-69E35A7480C4}"/>
               </a:ext>
             </a:extLst>
           </p:cNvPr>
@@ -18779,7 +18850,1128 @@
     </p:spTree>
     <p:extLst>
       <p:ext uri="{BB962C8B-B14F-4D97-AF65-F5344CB8AC3E}">
-        <p14:creationId xmlns:p14="http://schemas.microsoft.com/office/powerpoint/2010/main" val="383443449"/>
+        <p14:creationId xmlns:p14="http://schemas.microsoft.com/office/powerpoint/2010/main" val="365168251"/>
+      </p:ext>
+    </p:extLst>
+  </p:cSld>
+</p:sld>
+</file>
+
+<file path=ppt/slides/slide20.xml><?xml version="1.0" encoding="utf-8"?>
+<p:sld xmlns:p="http://schemas.openxmlformats.org/presentationml/2006/main">
+  <p:cSld>
+    <p:bg>
+      <p:bgPr>
+        <a:solidFill xmlns:a="http://schemas.openxmlformats.org/drawingml/2006/main">
+          <a:srgbClr val="FAFAF8"/>
+        </a:solidFill>
+      </p:bgPr>
+    </p:bg>
+    <p:spTree>
+      <p:nvGrpSpPr>
+        <p:cNvPr id="1" name=""/>
+        <p:cNvGrpSpPr/>
+        <p:nvPr/>
+      </p:nvGrpSpPr>
+      <p:grpSpPr>
+        <a:xfrm xmlns:a="http://schemas.openxmlformats.org/drawingml/2006/main"/>
+      </p:grpSpPr>
+      <p:sp>
+        <p:nvSpPr>
+          <p:cNvPr id="8" name="">
+            <a:extLst xmlns:a="http://schemas.openxmlformats.org/drawingml/2006/main">
+              <a:ext uri="{FF2B5EF4-FFF2-40B4-BE49-F238E27FC236}">
+                <a16:creationId xmlns:a16="http://schemas.microsoft.com/office/drawing/2014/main" id="{FD76F626-F58E-4FF1-A3D9-80613A10A75A}"/>
+              </a:ext>
+            </a:extLst>
+          </p:cNvPr>
+          <p:cNvSpPr>
+            <a:spLocks xmlns:a="http://schemas.openxmlformats.org/drawingml/2006/main" noGrp="1"/>
+          </p:cNvSpPr>
+          <p:nvPr/>
+        </p:nvSpPr>
+        <p:spPr>
+          <a:xfrm xmlns:a="http://schemas.openxmlformats.org/drawingml/2006/main">
+            <a:off x="609600" y="457200"/>
+            <a:ext cx="10972800" cy="762000"/>
+          </a:xfrm>
+          <a:prstGeom xmlns:a="http://schemas.openxmlformats.org/drawingml/2006/main" prst="rect">
+            <a:avLst/>
+          </a:prstGeom>
+          <a:noFill xmlns:a="http://schemas.openxmlformats.org/drawingml/2006/main"/>
+          <a:ln xmlns:a="http://schemas.openxmlformats.org/drawingml/2006/main" w="0">
+            <a:noFill/>
+          </a:ln>
+        </p:spPr>
+        <p:txBody>
+          <a:bodyPr xmlns:a="http://schemas.openxmlformats.org/drawingml/2006/main"/>
+          <a:lstStyle xmlns:a="http://schemas.openxmlformats.org/drawingml/2006/main">
+            <a:defPPr>
+              <a:defRPr sz="3300" b="0">
+                <a:solidFill>
+                  <a:srgbClr val="17242B"/>
+                </a:solidFill>
+                <a:latin typeface="Arial"/>
+                <a:ea typeface="Arial"/>
+                <a:cs typeface="Arial"/>
+              </a:defRPr>
+            </a:defPPr>
+            <a:lvl1pPr>
+              <a:defRPr sz="3300" b="0">
+                <a:solidFill>
+                  <a:srgbClr val="17242B"/>
+                </a:solidFill>
+                <a:latin typeface="Arial"/>
+                <a:ea typeface="Arial"/>
+                <a:cs typeface="Arial"/>
+              </a:defRPr>
+            </a:lvl1pPr>
+            <a:lvl2pPr>
+              <a:defRPr sz="3300" b="0">
+                <a:solidFill>
+                  <a:srgbClr val="17242B"/>
+                </a:solidFill>
+                <a:latin typeface="Arial"/>
+                <a:ea typeface="Arial"/>
+                <a:cs typeface="Arial"/>
+              </a:defRPr>
+            </a:lvl2pPr>
+            <a:lvl3pPr>
+              <a:defRPr sz="3300" b="0">
+                <a:solidFill>
+                  <a:srgbClr val="17242B"/>
+                </a:solidFill>
+                <a:latin typeface="Arial"/>
+                <a:ea typeface="Arial"/>
+                <a:cs typeface="Arial"/>
+              </a:defRPr>
+            </a:lvl3pPr>
+            <a:lvl4pPr>
+              <a:defRPr sz="3300" b="0">
+                <a:solidFill>
+                  <a:srgbClr val="17242B"/>
+                </a:solidFill>
+                <a:latin typeface="Arial"/>
+                <a:ea typeface="Arial"/>
+                <a:cs typeface="Arial"/>
+              </a:defRPr>
+            </a:lvl4pPr>
+            <a:lvl5pPr>
+              <a:defRPr sz="3300" b="0">
+                <a:solidFill>
+                  <a:srgbClr val="17242B"/>
+                </a:solidFill>
+                <a:latin typeface="Arial"/>
+                <a:ea typeface="Arial"/>
+                <a:cs typeface="Arial"/>
+              </a:defRPr>
+            </a:lvl5pPr>
+            <a:lvl6pPr>
+              <a:defRPr sz="3300" b="0">
+                <a:solidFill>
+                  <a:srgbClr val="17242B"/>
+                </a:solidFill>
+                <a:latin typeface="Arial"/>
+                <a:ea typeface="Arial"/>
+                <a:cs typeface="Arial"/>
+              </a:defRPr>
+            </a:lvl6pPr>
+            <a:lvl7pPr>
+              <a:defRPr sz="3300" b="0">
+                <a:solidFill>
+                  <a:srgbClr val="17242B"/>
+                </a:solidFill>
+                <a:latin typeface="Arial"/>
+                <a:ea typeface="Arial"/>
+                <a:cs typeface="Arial"/>
+              </a:defRPr>
+            </a:lvl7pPr>
+            <a:lvl8pPr>
+              <a:defRPr sz="3300" b="0">
+                <a:solidFill>
+                  <a:srgbClr val="17242B"/>
+                </a:solidFill>
+                <a:latin typeface="Arial"/>
+                <a:ea typeface="Arial"/>
+                <a:cs typeface="Arial"/>
+              </a:defRPr>
+            </a:lvl8pPr>
+            <a:lvl9pPr>
+              <a:defRPr sz="3300" b="0">
+                <a:solidFill>
+                  <a:srgbClr val="17242B"/>
+                </a:solidFill>
+                <a:latin typeface="Arial"/>
+                <a:ea typeface="Arial"/>
+                <a:cs typeface="Arial"/>
+              </a:defRPr>
+            </a:lvl9pPr>
+          </a:lstStyle>
+          <a:p xmlns:a="http://schemas.openxmlformats.org/drawingml/2006/main">
+            <a:pPr>
+              <a:defRPr sz="3300" b="0">
+                <a:solidFill>
+                  <a:srgbClr val="17242B"/>
+                </a:solidFill>
+                <a:latin typeface="Arial"/>
+                <a:ea typeface="Arial"/>
+                <a:cs typeface="Arial"/>
+              </a:defRPr>
+            </a:pPr>
+            <a:r>
+              <a:rPr sz="3300" b="0">
+                <a:solidFill>
+                  <a:srgbClr val="17242B"/>
+                </a:solidFill>
+                <a:latin typeface="Arial"/>
+                <a:ea typeface="Arial"/>
+                <a:cs typeface="Arial"/>
+              </a:rPr>
+              <a:t>Reproducible demonstration</a:t>
+            </a:r>
+          </a:p>
+        </p:txBody>
+      </p:sp>
+      <p:sp>
+        <p:nvSpPr>
+          <p:cNvPr id="2" name="">
+            <a:extLst xmlns:a="http://schemas.openxmlformats.org/drawingml/2006/main">
+              <a:ext uri="{FF2B5EF4-FFF2-40B4-BE49-F238E27FC236}">
+                <a16:creationId xmlns:a16="http://schemas.microsoft.com/office/drawing/2014/main" id="{87CCA7E0-2533-4FBF-A5D7-B11C60FFE107}"/>
+              </a:ext>
+            </a:extLst>
+          </p:cNvPr>
+          <p:cNvSpPr>
+            <a:spLocks xmlns:a="http://schemas.openxmlformats.org/drawingml/2006/main" noGrp="1"/>
+          </p:cNvSpPr>
+          <p:nvPr/>
+        </p:nvSpPr>
+        <p:spPr>
+          <a:xfrm xmlns:a="http://schemas.openxmlformats.org/drawingml/2006/main">
+            <a:off x="609600" y="1257300"/>
+            <a:ext cx="10972800" cy="619125"/>
+          </a:xfrm>
+          <a:prstGeom xmlns:a="http://schemas.openxmlformats.org/drawingml/2006/main" prst="rect">
+            <a:avLst/>
+          </a:prstGeom>
+          <a:noFill xmlns:a="http://schemas.openxmlformats.org/drawingml/2006/main"/>
+          <a:ln xmlns:a="http://schemas.openxmlformats.org/drawingml/2006/main" w="0">
+            <a:noFill/>
+          </a:ln>
+        </p:spPr>
+        <p:txBody>
+          <a:bodyPr xmlns:a="http://schemas.openxmlformats.org/drawingml/2006/main"/>
+          <a:lstStyle xmlns:a="http://schemas.openxmlformats.org/drawingml/2006/main">
+            <a:defPPr>
+              <a:defRPr sz="1800" b="0">
+                <a:solidFill>
+                  <a:srgbClr val="65757B"/>
+                </a:solidFill>
+                <a:latin typeface="Arial"/>
+                <a:ea typeface="Arial"/>
+                <a:cs typeface="Arial"/>
+              </a:defRPr>
+            </a:defPPr>
+            <a:lvl1pPr>
+              <a:defRPr sz="1800" b="0">
+                <a:solidFill>
+                  <a:srgbClr val="65757B"/>
+                </a:solidFill>
+                <a:latin typeface="Arial"/>
+                <a:ea typeface="Arial"/>
+                <a:cs typeface="Arial"/>
+              </a:defRPr>
+            </a:lvl1pPr>
+            <a:lvl2pPr>
+              <a:defRPr sz="1800" b="0">
+                <a:solidFill>
+                  <a:srgbClr val="65757B"/>
+                </a:solidFill>
+                <a:latin typeface="Arial"/>
+                <a:ea typeface="Arial"/>
+                <a:cs typeface="Arial"/>
+              </a:defRPr>
+            </a:lvl2pPr>
+            <a:lvl3pPr>
+              <a:defRPr sz="1800" b="0">
+                <a:solidFill>
+                  <a:srgbClr val="65757B"/>
+                </a:solidFill>
+                <a:latin typeface="Arial"/>
+                <a:ea typeface="Arial"/>
+                <a:cs typeface="Arial"/>
+              </a:defRPr>
+            </a:lvl3pPr>
+            <a:lvl4pPr>
+              <a:defRPr sz="1800" b="0">
+                <a:solidFill>
+                  <a:srgbClr val="65757B"/>
+                </a:solidFill>
+                <a:latin typeface="Arial"/>
+                <a:ea typeface="Arial"/>
+                <a:cs typeface="Arial"/>
+              </a:defRPr>
+            </a:lvl4pPr>
+            <a:lvl5pPr>
+              <a:defRPr sz="1800" b="0">
+                <a:solidFill>
+                  <a:srgbClr val="65757B"/>
+                </a:solidFill>
+                <a:latin typeface="Arial"/>
+                <a:ea typeface="Arial"/>
+                <a:cs typeface="Arial"/>
+              </a:defRPr>
+            </a:lvl5pPr>
+            <a:lvl6pPr>
+              <a:defRPr sz="1800" b="0">
+                <a:solidFill>
+                  <a:srgbClr val="65757B"/>
+                </a:solidFill>
+                <a:latin typeface="Arial"/>
+                <a:ea typeface="Arial"/>
+                <a:cs typeface="Arial"/>
+              </a:defRPr>
+            </a:lvl6pPr>
+            <a:lvl7pPr>
+              <a:defRPr sz="1800" b="0">
+                <a:solidFill>
+                  <a:srgbClr val="65757B"/>
+                </a:solidFill>
+                <a:latin typeface="Arial"/>
+                <a:ea typeface="Arial"/>
+                <a:cs typeface="Arial"/>
+              </a:defRPr>
+            </a:lvl7pPr>
+            <a:lvl8pPr>
+              <a:defRPr sz="1800" b="0">
+                <a:solidFill>
+                  <a:srgbClr val="65757B"/>
+                </a:solidFill>
+                <a:latin typeface="Arial"/>
+                <a:ea typeface="Arial"/>
+                <a:cs typeface="Arial"/>
+              </a:defRPr>
+            </a:lvl8pPr>
+            <a:lvl9pPr>
+              <a:defRPr sz="1800" b="0">
+                <a:solidFill>
+                  <a:srgbClr val="65757B"/>
+                </a:solidFill>
+                <a:latin typeface="Arial"/>
+                <a:ea typeface="Arial"/>
+                <a:cs typeface="Arial"/>
+              </a:defRPr>
+            </a:lvl9pPr>
+          </a:lstStyle>
+          <a:p xmlns:a="http://schemas.openxmlformats.org/drawingml/2006/main">
+            <a:pPr>
+              <a:defRPr sz="1800" b="0">
+                <a:solidFill>
+                  <a:srgbClr val="65757B"/>
+                </a:solidFill>
+                <a:latin typeface="Arial"/>
+                <a:ea typeface="Arial"/>
+                <a:cs typeface="Arial"/>
+              </a:defRPr>
+            </a:pPr>
+            <a:r>
+              <a:rPr sz="1800" b="0">
+                <a:solidFill>
+                  <a:srgbClr val="65757B"/>
+                </a:solidFill>
+                <a:latin typeface="Arial"/>
+                <a:ea typeface="Arial"/>
+                <a:cs typeface="Arial"/>
+              </a:rPr>
+              <a:t>Public source, inspectable artifacts and explicit next work</a:t>
+            </a:r>
+          </a:p>
+        </p:txBody>
+      </p:sp>
+      <p:sp>
+        <p:nvSpPr>
+          <p:cNvPr id="3" name="">
+            <a:extLst xmlns:a="http://schemas.openxmlformats.org/drawingml/2006/main">
+              <a:ext uri="{FF2B5EF4-FFF2-40B4-BE49-F238E27FC236}">
+                <a16:creationId xmlns:a16="http://schemas.microsoft.com/office/drawing/2014/main" id="{F904FFA4-C74C-469C-9AA1-1674B631C9D4}"/>
+              </a:ext>
+            </a:extLst>
+          </p:cNvPr>
+          <p:cNvSpPr>
+            <a:spLocks xmlns:a="http://schemas.openxmlformats.org/drawingml/2006/main" noGrp="1"/>
+          </p:cNvSpPr>
+          <p:nvPr/>
+        </p:nvSpPr>
+        <p:spPr>
+          <a:xfrm xmlns:a="http://schemas.openxmlformats.org/drawingml/2006/main">
+            <a:off x="704850" y="2190750"/>
+            <a:ext cx="10668000" cy="838200"/>
+          </a:xfrm>
+          <a:prstGeom xmlns:a="http://schemas.openxmlformats.org/drawingml/2006/main" prst="rect">
+            <a:avLst/>
+          </a:prstGeom>
+          <a:noFill xmlns:a="http://schemas.openxmlformats.org/drawingml/2006/main"/>
+          <a:ln xmlns:a="http://schemas.openxmlformats.org/drawingml/2006/main" w="0">
+            <a:noFill/>
+          </a:ln>
+        </p:spPr>
+        <p:txBody>
+          <a:bodyPr xmlns:a="http://schemas.openxmlformats.org/drawingml/2006/main"/>
+          <a:lstStyle xmlns:a="http://schemas.openxmlformats.org/drawingml/2006/main">
+            <a:defPPr>
+              <a:defRPr sz="2250" b="0">
+                <a:solidFill>
+                  <a:srgbClr val="0E766E"/>
+                </a:solidFill>
+                <a:latin typeface="Arial"/>
+                <a:ea typeface="Arial"/>
+                <a:cs typeface="Arial"/>
+              </a:defRPr>
+            </a:defPPr>
+            <a:lvl1pPr>
+              <a:defRPr sz="2250" b="0">
+                <a:solidFill>
+                  <a:srgbClr val="0E766E"/>
+                </a:solidFill>
+                <a:latin typeface="Arial"/>
+                <a:ea typeface="Arial"/>
+                <a:cs typeface="Arial"/>
+              </a:defRPr>
+            </a:lvl1pPr>
+            <a:lvl2pPr>
+              <a:defRPr sz="2250" b="0">
+                <a:solidFill>
+                  <a:srgbClr val="0E766E"/>
+                </a:solidFill>
+                <a:latin typeface="Arial"/>
+                <a:ea typeface="Arial"/>
+                <a:cs typeface="Arial"/>
+              </a:defRPr>
+            </a:lvl2pPr>
+            <a:lvl3pPr>
+              <a:defRPr sz="2250" b="0">
+                <a:solidFill>
+                  <a:srgbClr val="0E766E"/>
+                </a:solidFill>
+                <a:latin typeface="Arial"/>
+                <a:ea typeface="Arial"/>
+                <a:cs typeface="Arial"/>
+              </a:defRPr>
+            </a:lvl3pPr>
+            <a:lvl4pPr>
+              <a:defRPr sz="2250" b="0">
+                <a:solidFill>
+                  <a:srgbClr val="0E766E"/>
+                </a:solidFill>
+                <a:latin typeface="Arial"/>
+                <a:ea typeface="Arial"/>
+                <a:cs typeface="Arial"/>
+              </a:defRPr>
+            </a:lvl4pPr>
+            <a:lvl5pPr>
+              <a:defRPr sz="2250" b="0">
+                <a:solidFill>
+                  <a:srgbClr val="0E766E"/>
+                </a:solidFill>
+                <a:latin typeface="Arial"/>
+                <a:ea typeface="Arial"/>
+                <a:cs typeface="Arial"/>
+              </a:defRPr>
+            </a:lvl5pPr>
+            <a:lvl6pPr>
+              <a:defRPr sz="2250" b="0">
+                <a:solidFill>
+                  <a:srgbClr val="0E766E"/>
+                </a:solidFill>
+                <a:latin typeface="Arial"/>
+                <a:ea typeface="Arial"/>
+                <a:cs typeface="Arial"/>
+              </a:defRPr>
+            </a:lvl6pPr>
+            <a:lvl7pPr>
+              <a:defRPr sz="2250" b="0">
+                <a:solidFill>
+                  <a:srgbClr val="0E766E"/>
+                </a:solidFill>
+                <a:latin typeface="Arial"/>
+                <a:ea typeface="Arial"/>
+                <a:cs typeface="Arial"/>
+              </a:defRPr>
+            </a:lvl7pPr>
+            <a:lvl8pPr>
+              <a:defRPr sz="2250" b="0">
+                <a:solidFill>
+                  <a:srgbClr val="0E766E"/>
+                </a:solidFill>
+                <a:latin typeface="Arial"/>
+                <a:ea typeface="Arial"/>
+                <a:cs typeface="Arial"/>
+              </a:defRPr>
+            </a:lvl8pPr>
+            <a:lvl9pPr>
+              <a:defRPr sz="2250" b="0">
+                <a:solidFill>
+                  <a:srgbClr val="0E766E"/>
+                </a:solidFill>
+                <a:latin typeface="Arial"/>
+                <a:ea typeface="Arial"/>
+                <a:cs typeface="Arial"/>
+              </a:defRPr>
+            </a:lvl9pPr>
+          </a:lstStyle>
+          <a:p xmlns:a="http://schemas.openxmlformats.org/drawingml/2006/main">
+            <a:pPr>
+              <a:defRPr sz="2250" b="0">
+                <a:solidFill>
+                  <a:srgbClr val="0E766E"/>
+                </a:solidFill>
+                <a:latin typeface="Arial"/>
+                <a:ea typeface="Arial"/>
+                <a:cs typeface="Arial"/>
+              </a:defRPr>
+            </a:pPr>
+            <a:r>
+              <a:rPr sz="2250" b="0">
+                <a:solidFill>
+                  <a:srgbClr val="0E766E"/>
+                </a:solidFill>
+                <a:latin typeface="Arial"/>
+                <a:ea typeface="Arial"/>
+                <a:cs typeface="Arial"/>
+              </a:rPr>
+              <a:t>README, model cards and the audit link every claim to evidence</a:t>
+            </a:r>
+          </a:p>
+        </p:txBody>
+      </p:sp>
+      <p:sp>
+        <p:nvSpPr>
+          <p:cNvPr id="4" name="">
+            <a:extLst xmlns:a="http://schemas.openxmlformats.org/drawingml/2006/main">
+              <a:ext uri="{FF2B5EF4-FFF2-40B4-BE49-F238E27FC236}">
+                <a16:creationId xmlns:a16="http://schemas.microsoft.com/office/drawing/2014/main" id="{C9161CA6-1BC7-4D30-AFB8-2F263D959883}"/>
+              </a:ext>
+            </a:extLst>
+          </p:cNvPr>
+          <p:cNvSpPr>
+            <a:spLocks xmlns:a="http://schemas.openxmlformats.org/drawingml/2006/main" noGrp="1"/>
+          </p:cNvSpPr>
+          <p:nvPr/>
+        </p:nvSpPr>
+        <p:spPr>
+          <a:xfrm xmlns:a="http://schemas.openxmlformats.org/drawingml/2006/main">
+            <a:off x="704850" y="3119438"/>
+            <a:ext cx="10668000" cy="838200"/>
+          </a:xfrm>
+          <a:prstGeom xmlns:a="http://schemas.openxmlformats.org/drawingml/2006/main" prst="rect">
+            <a:avLst/>
+          </a:prstGeom>
+          <a:noFill xmlns:a="http://schemas.openxmlformats.org/drawingml/2006/main"/>
+          <a:ln xmlns:a="http://schemas.openxmlformats.org/drawingml/2006/main" w="0">
+            <a:noFill/>
+          </a:ln>
+        </p:spPr>
+        <p:txBody>
+          <a:bodyPr xmlns:a="http://schemas.openxmlformats.org/drawingml/2006/main"/>
+          <a:lstStyle xmlns:a="http://schemas.openxmlformats.org/drawingml/2006/main">
+            <a:defPPr>
+              <a:defRPr sz="2250" b="0">
+                <a:solidFill>
+                  <a:srgbClr val="17242B"/>
+                </a:solidFill>
+                <a:latin typeface="Arial"/>
+                <a:ea typeface="Arial"/>
+                <a:cs typeface="Arial"/>
+              </a:defRPr>
+            </a:defPPr>
+            <a:lvl1pPr>
+              <a:defRPr sz="2250" b="0">
+                <a:solidFill>
+                  <a:srgbClr val="17242B"/>
+                </a:solidFill>
+                <a:latin typeface="Arial"/>
+                <a:ea typeface="Arial"/>
+                <a:cs typeface="Arial"/>
+              </a:defRPr>
+            </a:lvl1pPr>
+            <a:lvl2pPr>
+              <a:defRPr sz="2250" b="0">
+                <a:solidFill>
+                  <a:srgbClr val="17242B"/>
+                </a:solidFill>
+                <a:latin typeface="Arial"/>
+                <a:ea typeface="Arial"/>
+                <a:cs typeface="Arial"/>
+              </a:defRPr>
+            </a:lvl2pPr>
+            <a:lvl3pPr>
+              <a:defRPr sz="2250" b="0">
+                <a:solidFill>
+                  <a:srgbClr val="17242B"/>
+                </a:solidFill>
+                <a:latin typeface="Arial"/>
+                <a:ea typeface="Arial"/>
+                <a:cs typeface="Arial"/>
+              </a:defRPr>
+            </a:lvl3pPr>
+            <a:lvl4pPr>
+              <a:defRPr sz="2250" b="0">
+                <a:solidFill>
+                  <a:srgbClr val="17242B"/>
+                </a:solidFill>
+                <a:latin typeface="Arial"/>
+                <a:ea typeface="Arial"/>
+                <a:cs typeface="Arial"/>
+              </a:defRPr>
+            </a:lvl4pPr>
+            <a:lvl5pPr>
+              <a:defRPr sz="2250" b="0">
+                <a:solidFill>
+                  <a:srgbClr val="17242B"/>
+                </a:solidFill>
+                <a:latin typeface="Arial"/>
+                <a:ea typeface="Arial"/>
+                <a:cs typeface="Arial"/>
+              </a:defRPr>
+            </a:lvl5pPr>
+            <a:lvl6pPr>
+              <a:defRPr sz="2250" b="0">
+                <a:solidFill>
+                  <a:srgbClr val="17242B"/>
+                </a:solidFill>
+                <a:latin typeface="Arial"/>
+                <a:ea typeface="Arial"/>
+                <a:cs typeface="Arial"/>
+              </a:defRPr>
+            </a:lvl6pPr>
+            <a:lvl7pPr>
+              <a:defRPr sz="2250" b="0">
+                <a:solidFill>
+                  <a:srgbClr val="17242B"/>
+                </a:solidFill>
+                <a:latin typeface="Arial"/>
+                <a:ea typeface="Arial"/>
+                <a:cs typeface="Arial"/>
+              </a:defRPr>
+            </a:lvl7pPr>
+            <a:lvl8pPr>
+              <a:defRPr sz="2250" b="0">
+                <a:solidFill>
+                  <a:srgbClr val="17242B"/>
+                </a:solidFill>
+                <a:latin typeface="Arial"/>
+                <a:ea typeface="Arial"/>
+                <a:cs typeface="Arial"/>
+              </a:defRPr>
+            </a:lvl8pPr>
+            <a:lvl9pPr>
+              <a:defRPr sz="2250" b="0">
+                <a:solidFill>
+                  <a:srgbClr val="17242B"/>
+                </a:solidFill>
+                <a:latin typeface="Arial"/>
+                <a:ea typeface="Arial"/>
+                <a:cs typeface="Arial"/>
+              </a:defRPr>
+            </a:lvl9pPr>
+          </a:lstStyle>
+          <a:p xmlns:a="http://schemas.openxmlformats.org/drawingml/2006/main">
+            <a:pPr>
+              <a:defRPr sz="2250" b="0">
+                <a:solidFill>
+                  <a:srgbClr val="17242B"/>
+                </a:solidFill>
+                <a:latin typeface="Arial"/>
+                <a:ea typeface="Arial"/>
+                <a:cs typeface="Arial"/>
+              </a:defRPr>
+            </a:pPr>
+            <a:r>
+              <a:rPr sz="2250" b="0">
+                <a:solidFill>
+                  <a:srgbClr val="17242B"/>
+                </a:solidFill>
+                <a:latin typeface="Arial"/>
+                <a:ea typeface="Arial"/>
+                <a:cs typeface="Arial"/>
+              </a:rPr>
+              <a:t>Persisted inference reproduces the benchmark and exposes exact feature calculations</a:t>
+            </a:r>
+          </a:p>
+        </p:txBody>
+      </p:sp>
+      <p:sp>
+        <p:nvSpPr>
+          <p:cNvPr id="5" name="">
+            <a:extLst xmlns:a="http://schemas.openxmlformats.org/drawingml/2006/main">
+              <a:ext uri="{FF2B5EF4-FFF2-40B4-BE49-F238E27FC236}">
+                <a16:creationId xmlns:a16="http://schemas.microsoft.com/office/drawing/2014/main" id="{E28E54A4-819C-4C7C-9C5F-6FB9A6851738}"/>
+              </a:ext>
+            </a:extLst>
+          </p:cNvPr>
+          <p:cNvSpPr>
+            <a:spLocks xmlns:a="http://schemas.openxmlformats.org/drawingml/2006/main" noGrp="1"/>
+          </p:cNvSpPr>
+          <p:nvPr/>
+        </p:nvSpPr>
+        <p:spPr>
+          <a:xfrm xmlns:a="http://schemas.openxmlformats.org/drawingml/2006/main">
+            <a:off x="704850" y="4048125"/>
+            <a:ext cx="10668000" cy="838200"/>
+          </a:xfrm>
+          <a:prstGeom xmlns:a="http://schemas.openxmlformats.org/drawingml/2006/main" prst="rect">
+            <a:avLst/>
+          </a:prstGeom>
+          <a:noFill xmlns:a="http://schemas.openxmlformats.org/drawingml/2006/main"/>
+          <a:ln xmlns:a="http://schemas.openxmlformats.org/drawingml/2006/main" w="0">
+            <a:noFill/>
+          </a:ln>
+        </p:spPr>
+        <p:txBody>
+          <a:bodyPr xmlns:a="http://schemas.openxmlformats.org/drawingml/2006/main"/>
+          <a:lstStyle xmlns:a="http://schemas.openxmlformats.org/drawingml/2006/main">
+            <a:defPPr>
+              <a:defRPr sz="2250" b="0">
+                <a:solidFill>
+                  <a:srgbClr val="17242B"/>
+                </a:solidFill>
+                <a:latin typeface="Arial"/>
+                <a:ea typeface="Arial"/>
+                <a:cs typeface="Arial"/>
+              </a:defRPr>
+            </a:defPPr>
+            <a:lvl1pPr>
+              <a:defRPr sz="2250" b="0">
+                <a:solidFill>
+                  <a:srgbClr val="17242B"/>
+                </a:solidFill>
+                <a:latin typeface="Arial"/>
+                <a:ea typeface="Arial"/>
+                <a:cs typeface="Arial"/>
+              </a:defRPr>
+            </a:lvl1pPr>
+            <a:lvl2pPr>
+              <a:defRPr sz="2250" b="0">
+                <a:solidFill>
+                  <a:srgbClr val="17242B"/>
+                </a:solidFill>
+                <a:latin typeface="Arial"/>
+                <a:ea typeface="Arial"/>
+                <a:cs typeface="Arial"/>
+              </a:defRPr>
+            </a:lvl2pPr>
+            <a:lvl3pPr>
+              <a:defRPr sz="2250" b="0">
+                <a:solidFill>
+                  <a:srgbClr val="17242B"/>
+                </a:solidFill>
+                <a:latin typeface="Arial"/>
+                <a:ea typeface="Arial"/>
+                <a:cs typeface="Arial"/>
+              </a:defRPr>
+            </a:lvl3pPr>
+            <a:lvl4pPr>
+              <a:defRPr sz="2250" b="0">
+                <a:solidFill>
+                  <a:srgbClr val="17242B"/>
+                </a:solidFill>
+                <a:latin typeface="Arial"/>
+                <a:ea typeface="Arial"/>
+                <a:cs typeface="Arial"/>
+              </a:defRPr>
+            </a:lvl4pPr>
+            <a:lvl5pPr>
+              <a:defRPr sz="2250" b="0">
+                <a:solidFill>
+                  <a:srgbClr val="17242B"/>
+                </a:solidFill>
+                <a:latin typeface="Arial"/>
+                <a:ea typeface="Arial"/>
+                <a:cs typeface="Arial"/>
+              </a:defRPr>
+            </a:lvl5pPr>
+            <a:lvl6pPr>
+              <a:defRPr sz="2250" b="0">
+                <a:solidFill>
+                  <a:srgbClr val="17242B"/>
+                </a:solidFill>
+                <a:latin typeface="Arial"/>
+                <a:ea typeface="Arial"/>
+                <a:cs typeface="Arial"/>
+              </a:defRPr>
+            </a:lvl6pPr>
+            <a:lvl7pPr>
+              <a:defRPr sz="2250" b="0">
+                <a:solidFill>
+                  <a:srgbClr val="17242B"/>
+                </a:solidFill>
+                <a:latin typeface="Arial"/>
+                <a:ea typeface="Arial"/>
+                <a:cs typeface="Arial"/>
+              </a:defRPr>
+            </a:lvl7pPr>
+            <a:lvl8pPr>
+              <a:defRPr sz="2250" b="0">
+                <a:solidFill>
+                  <a:srgbClr val="17242B"/>
+                </a:solidFill>
+                <a:latin typeface="Arial"/>
+                <a:ea typeface="Arial"/>
+                <a:cs typeface="Arial"/>
+              </a:defRPr>
+            </a:lvl8pPr>
+            <a:lvl9pPr>
+              <a:defRPr sz="2250" b="0">
+                <a:solidFill>
+                  <a:srgbClr val="17242B"/>
+                </a:solidFill>
+                <a:latin typeface="Arial"/>
+                <a:ea typeface="Arial"/>
+                <a:cs typeface="Arial"/>
+              </a:defRPr>
+            </a:lvl9pPr>
+          </a:lstStyle>
+          <a:p xmlns:a="http://schemas.openxmlformats.org/drawingml/2006/main">
+            <a:pPr>
+              <a:defRPr sz="2250" b="0">
+                <a:solidFill>
+                  <a:srgbClr val="17242B"/>
+                </a:solidFill>
+                <a:latin typeface="Arial"/>
+                <a:ea typeface="Arial"/>
+                <a:cs typeface="Arial"/>
+              </a:defRPr>
+            </a:pPr>
+            <a:r>
+              <a:rPr sz="2250" b="0">
+                <a:solidFill>
+                  <a:srgbClr val="17242B"/>
+                </a:solidFill>
+                <a:latin typeface="Arial"/>
+                <a:ea typeface="Arial"/>
+                <a:cs typeface="Arial"/>
+              </a:rPr>
+              <a:t>The required video remains a human recording and upload task</a:t>
+            </a:r>
+          </a:p>
+        </p:txBody>
+      </p:sp>
+      <p:sp>
+        <p:nvSpPr>
+          <p:cNvPr id="6" name="">
+            <a:extLst xmlns:a="http://schemas.openxmlformats.org/drawingml/2006/main">
+              <a:ext uri="{FF2B5EF4-FFF2-40B4-BE49-F238E27FC236}">
+                <a16:creationId xmlns:a16="http://schemas.microsoft.com/office/drawing/2014/main" id="{48807AB4-5C9D-4826-8BA4-84875E416202}"/>
+              </a:ext>
+            </a:extLst>
+          </p:cNvPr>
+          <p:cNvSpPr>
+            <a:spLocks xmlns:a="http://schemas.openxmlformats.org/drawingml/2006/main" noGrp="1"/>
+          </p:cNvSpPr>
+          <p:nvPr/>
+        </p:nvSpPr>
+        <p:spPr>
+          <a:xfrm xmlns:a="http://schemas.openxmlformats.org/drawingml/2006/main">
+            <a:off x="704850" y="4976813"/>
+            <a:ext cx="10668000" cy="838200"/>
+          </a:xfrm>
+          <a:prstGeom xmlns:a="http://schemas.openxmlformats.org/drawingml/2006/main" prst="rect">
+            <a:avLst/>
+          </a:prstGeom>
+          <a:noFill xmlns:a="http://schemas.openxmlformats.org/drawingml/2006/main"/>
+          <a:ln xmlns:a="http://schemas.openxmlformats.org/drawingml/2006/main" w="0">
+            <a:noFill/>
+          </a:ln>
+        </p:spPr>
+        <p:txBody>
+          <a:bodyPr xmlns:a="http://schemas.openxmlformats.org/drawingml/2006/main"/>
+          <a:lstStyle xmlns:a="http://schemas.openxmlformats.org/drawingml/2006/main">
+            <a:defPPr>
+              <a:defRPr sz="2250" b="0">
+                <a:solidFill>
+                  <a:srgbClr val="17242B"/>
+                </a:solidFill>
+                <a:latin typeface="Arial"/>
+                <a:ea typeface="Arial"/>
+                <a:cs typeface="Arial"/>
+              </a:defRPr>
+            </a:defPPr>
+            <a:lvl1pPr>
+              <a:defRPr sz="2250" b="0">
+                <a:solidFill>
+                  <a:srgbClr val="17242B"/>
+                </a:solidFill>
+                <a:latin typeface="Arial"/>
+                <a:ea typeface="Arial"/>
+                <a:cs typeface="Arial"/>
+              </a:defRPr>
+            </a:lvl1pPr>
+            <a:lvl2pPr>
+              <a:defRPr sz="2250" b="0">
+                <a:solidFill>
+                  <a:srgbClr val="17242B"/>
+                </a:solidFill>
+                <a:latin typeface="Arial"/>
+                <a:ea typeface="Arial"/>
+                <a:cs typeface="Arial"/>
+              </a:defRPr>
+            </a:lvl2pPr>
+            <a:lvl3pPr>
+              <a:defRPr sz="2250" b="0">
+                <a:solidFill>
+                  <a:srgbClr val="17242B"/>
+                </a:solidFill>
+                <a:latin typeface="Arial"/>
+                <a:ea typeface="Arial"/>
+                <a:cs typeface="Arial"/>
+              </a:defRPr>
+            </a:lvl3pPr>
+            <a:lvl4pPr>
+              <a:defRPr sz="2250" b="0">
+                <a:solidFill>
+                  <a:srgbClr val="17242B"/>
+                </a:solidFill>
+                <a:latin typeface="Arial"/>
+                <a:ea typeface="Arial"/>
+                <a:cs typeface="Arial"/>
+              </a:defRPr>
+            </a:lvl4pPr>
+            <a:lvl5pPr>
+              <a:defRPr sz="2250" b="0">
+                <a:solidFill>
+                  <a:srgbClr val="17242B"/>
+                </a:solidFill>
+                <a:latin typeface="Arial"/>
+                <a:ea typeface="Arial"/>
+                <a:cs typeface="Arial"/>
+              </a:defRPr>
+            </a:lvl5pPr>
+            <a:lvl6pPr>
+              <a:defRPr sz="2250" b="0">
+                <a:solidFill>
+                  <a:srgbClr val="17242B"/>
+                </a:solidFill>
+                <a:latin typeface="Arial"/>
+                <a:ea typeface="Arial"/>
+                <a:cs typeface="Arial"/>
+              </a:defRPr>
+            </a:lvl6pPr>
+            <a:lvl7pPr>
+              <a:defRPr sz="2250" b="0">
+                <a:solidFill>
+                  <a:srgbClr val="17242B"/>
+                </a:solidFill>
+                <a:latin typeface="Arial"/>
+                <a:ea typeface="Arial"/>
+                <a:cs typeface="Arial"/>
+              </a:defRPr>
+            </a:lvl7pPr>
+            <a:lvl8pPr>
+              <a:defRPr sz="2250" b="0">
+                <a:solidFill>
+                  <a:srgbClr val="17242B"/>
+                </a:solidFill>
+                <a:latin typeface="Arial"/>
+                <a:ea typeface="Arial"/>
+                <a:cs typeface="Arial"/>
+              </a:defRPr>
+            </a:lvl8pPr>
+            <a:lvl9pPr>
+              <a:defRPr sz="2250" b="0">
+                <a:solidFill>
+                  <a:srgbClr val="17242B"/>
+                </a:solidFill>
+                <a:latin typeface="Arial"/>
+                <a:ea typeface="Arial"/>
+                <a:cs typeface="Arial"/>
+              </a:defRPr>
+            </a:lvl9pPr>
+          </a:lstStyle>
+          <a:p xmlns:a="http://schemas.openxmlformats.org/drawingml/2006/main">
+            <a:pPr>
+              <a:defRPr sz="2250" b="0">
+                <a:solidFill>
+                  <a:srgbClr val="17242B"/>
+                </a:solidFill>
+                <a:latin typeface="Arial"/>
+                <a:ea typeface="Arial"/>
+                <a:cs typeface="Arial"/>
+              </a:defRPr>
+            </a:pPr>
+            <a:r>
+              <a:rPr sz="2250" b="0">
+                <a:solidFill>
+                  <a:srgbClr val="17242B"/>
+                </a:solidFill>
+                <a:latin typeface="Arial"/>
+                <a:ea typeface="Arial"/>
+                <a:cs typeface="Arial"/>
+              </a:rPr>
+              <a:t>Clinical validation, clinician feedback and sim-to-real evaluation remain outstanding</a:t>
+            </a:r>
+          </a:p>
+        </p:txBody>
+      </p:sp>
+      <p:sp>
+        <p:nvSpPr>
+          <p:cNvPr id="7" name="">
+            <a:extLst xmlns:a="http://schemas.openxmlformats.org/drawingml/2006/main">
+              <a:ext uri="{FF2B5EF4-FFF2-40B4-BE49-F238E27FC236}">
+                <a16:creationId xmlns:a16="http://schemas.microsoft.com/office/drawing/2014/main" id="{85794A38-1779-4C6D-8DAF-0F045524C7A2}"/>
+              </a:ext>
+            </a:extLst>
+          </p:cNvPr>
+          <p:cNvSpPr>
+            <a:spLocks xmlns:a="http://schemas.openxmlformats.org/drawingml/2006/main" noGrp="1"/>
+          </p:cNvSpPr>
+          <p:nvPr/>
+        </p:nvSpPr>
+        <p:spPr>
+          <a:xfrm xmlns:a="http://schemas.openxmlformats.org/drawingml/2006/main">
+            <a:off x="609600" y="6343650"/>
+            <a:ext cx="10972800" cy="285750"/>
+          </a:xfrm>
+          <a:prstGeom xmlns:a="http://schemas.openxmlformats.org/drawingml/2006/main" prst="rect">
+            <a:avLst/>
+          </a:prstGeom>
+          <a:noFill xmlns:a="http://schemas.openxmlformats.org/drawingml/2006/main"/>
+          <a:ln xmlns:a="http://schemas.openxmlformats.org/drawingml/2006/main" w="0">
+            <a:noFill/>
+          </a:ln>
+        </p:spPr>
+        <p:txBody>
+          <a:bodyPr xmlns:a="http://schemas.openxmlformats.org/drawingml/2006/main"/>
+          <a:lstStyle xmlns:a="http://schemas.openxmlformats.org/drawingml/2006/main">
+            <a:defPPr>
+              <a:defRPr sz="1350" b="0">
+                <a:solidFill>
+                  <a:srgbClr val="65757B"/>
+                </a:solidFill>
+                <a:latin typeface="Arial"/>
+                <a:ea typeface="Arial"/>
+                <a:cs typeface="Arial"/>
+              </a:defRPr>
+            </a:defPPr>
+            <a:lvl1pPr>
+              <a:defRPr sz="1350" b="0">
+                <a:solidFill>
+                  <a:srgbClr val="65757B"/>
+                </a:solidFill>
+                <a:latin typeface="Arial"/>
+                <a:ea typeface="Arial"/>
+                <a:cs typeface="Arial"/>
+              </a:defRPr>
+            </a:lvl1pPr>
+            <a:lvl2pPr>
+              <a:defRPr sz="1350" b="0">
+                <a:solidFill>
+                  <a:srgbClr val="65757B"/>
+                </a:solidFill>
+                <a:latin typeface="Arial"/>
+                <a:ea typeface="Arial"/>
+                <a:cs typeface="Arial"/>
+              </a:defRPr>
+            </a:lvl2pPr>
+            <a:lvl3pPr>
+              <a:defRPr sz="1350" b="0">
+                <a:solidFill>
+                  <a:srgbClr val="65757B"/>
+                </a:solidFill>
+                <a:latin typeface="Arial"/>
+                <a:ea typeface="Arial"/>
+                <a:cs typeface="Arial"/>
+              </a:defRPr>
+            </a:lvl3pPr>
+            <a:lvl4pPr>
+              <a:defRPr sz="1350" b="0">
+                <a:solidFill>
+                  <a:srgbClr val="65757B"/>
+                </a:solidFill>
+                <a:latin typeface="Arial"/>
+                <a:ea typeface="Arial"/>
+                <a:cs typeface="Arial"/>
+              </a:defRPr>
+            </a:lvl4pPr>
+            <a:lvl5pPr>
+              <a:defRPr sz="1350" b="0">
+                <a:solidFill>
+                  <a:srgbClr val="65757B"/>
+                </a:solidFill>
+                <a:latin typeface="Arial"/>
+                <a:ea typeface="Arial"/>
+                <a:cs typeface="Arial"/>
+              </a:defRPr>
+            </a:lvl5pPr>
+            <a:lvl6pPr>
+              <a:defRPr sz="1350" b="0">
+                <a:solidFill>
+                  <a:srgbClr val="65757B"/>
+                </a:solidFill>
+                <a:latin typeface="Arial"/>
+                <a:ea typeface="Arial"/>
+                <a:cs typeface="Arial"/>
+              </a:defRPr>
+            </a:lvl6pPr>
+            <a:lvl7pPr>
+              <a:defRPr sz="1350" b="0">
+                <a:solidFill>
+                  <a:srgbClr val="65757B"/>
+                </a:solidFill>
+                <a:latin typeface="Arial"/>
+                <a:ea typeface="Arial"/>
+                <a:cs typeface="Arial"/>
+              </a:defRPr>
+            </a:lvl7pPr>
+            <a:lvl8pPr>
+              <a:defRPr sz="1350" b="0">
+                <a:solidFill>
+                  <a:srgbClr val="65757B"/>
+                </a:solidFill>
+                <a:latin typeface="Arial"/>
+                <a:ea typeface="Arial"/>
+                <a:cs typeface="Arial"/>
+              </a:defRPr>
+            </a:lvl8pPr>
+            <a:lvl9pPr>
+              <a:defRPr sz="1350" b="0">
+                <a:solidFill>
+                  <a:srgbClr val="65757B"/>
+                </a:solidFill>
+                <a:latin typeface="Arial"/>
+                <a:ea typeface="Arial"/>
+                <a:cs typeface="Arial"/>
+              </a:defRPr>
+            </a:lvl9pPr>
+          </a:lstStyle>
+          <a:p xmlns:a="http://schemas.openxmlformats.org/drawingml/2006/main">
+            <a:pPr>
+              <a:defRPr sz="1350" b="0">
+                <a:solidFill>
+                  <a:srgbClr val="65757B"/>
+                </a:solidFill>
+                <a:latin typeface="Arial"/>
+                <a:ea typeface="Arial"/>
+                <a:cs typeface="Arial"/>
+              </a:defRPr>
+            </a:pPr>
+            <a:r>
+              <a:rPr sz="1350" b="0">
+                <a:solidFill>
+                  <a:srgbClr val="65757B"/>
+                </a:solidFill>
+                <a:latin typeface="Arial"/>
+                <a:ea typeface="Arial"/>
+                <a:cs typeface="Arial"/>
+              </a:rPr>
+              <a:t>Synthetic research prototype. Not for diagnosis, contraception or conception planning.</a:t>
+            </a:r>
+          </a:p>
+        </p:txBody>
+      </p:sp>
+    </p:spTree>
+    <p:extLst>
+      <p:ext uri="{BB962C8B-B14F-4D97-AF65-F5344CB8AC3E}">
+        <p14:creationId xmlns:p14="http://schemas.microsoft.com/office/powerpoint/2010/main" val="2120411180"/>
       </p:ext>
     </p:extLst>
   </p:cSld>
@@ -18810,7 +20002,7 @@
           <p:cNvPr id="8" name="">
             <a:extLst xmlns:a="http://schemas.openxmlformats.org/drawingml/2006/main">
               <a:ext uri="{FF2B5EF4-FFF2-40B4-BE49-F238E27FC236}">
-                <a16:creationId xmlns:a16="http://schemas.microsoft.com/office/drawing/2014/main" id="{E60BE154-A887-4830-A389-C48CBB2ECD7A}"/>
+                <a16:creationId xmlns:a16="http://schemas.microsoft.com/office/drawing/2014/main" id="{D83E79EF-6E18-4E57-99AA-83835FE1BABE}"/>
               </a:ext>
             </a:extLst>
           </p:cNvPr>
@@ -18966,7 +20158,7 @@
           <p:cNvPr id="2" name="">
             <a:extLst xmlns:a="http://schemas.openxmlformats.org/drawingml/2006/main">
               <a:ext uri="{FF2B5EF4-FFF2-40B4-BE49-F238E27FC236}">
-                <a16:creationId xmlns:a16="http://schemas.microsoft.com/office/drawing/2014/main" id="{AB2563EF-91F6-4D19-9BFF-67C992639AB4}"/>
+                <a16:creationId xmlns:a16="http://schemas.microsoft.com/office/drawing/2014/main" id="{3870A3D9-A4A9-4295-A143-88C72159EF28}"/>
               </a:ext>
             </a:extLst>
           </p:cNvPr>
@@ -19122,7 +20314,7 @@
           <p:cNvPr id="3" name="">
             <a:extLst xmlns:a="http://schemas.openxmlformats.org/drawingml/2006/main">
               <a:ext uri="{FF2B5EF4-FFF2-40B4-BE49-F238E27FC236}">
-                <a16:creationId xmlns:a16="http://schemas.microsoft.com/office/drawing/2014/main" id="{2BD2F786-179F-4868-91A6-FE5DEDF2CACC}"/>
+                <a16:creationId xmlns:a16="http://schemas.microsoft.com/office/drawing/2014/main" id="{D1EFDED5-65EC-4E5F-90B2-0EC032BA5050}"/>
               </a:ext>
             </a:extLst>
           </p:cNvPr>
@@ -19278,7 +20470,7 @@
           <p:cNvPr id="4" name="">
             <a:extLst xmlns:a="http://schemas.openxmlformats.org/drawingml/2006/main">
               <a:ext uri="{FF2B5EF4-FFF2-40B4-BE49-F238E27FC236}">
-                <a16:creationId xmlns:a16="http://schemas.microsoft.com/office/drawing/2014/main" id="{506ED450-C78A-411D-B5A9-817AD40247AE}"/>
+                <a16:creationId xmlns:a16="http://schemas.microsoft.com/office/drawing/2014/main" id="{7B4F0C33-B57D-4FCA-BD41-04E852CBF20F}"/>
               </a:ext>
             </a:extLst>
           </p:cNvPr>
@@ -19434,7 +20626,7 @@
           <p:cNvPr id="5" name="">
             <a:extLst xmlns:a="http://schemas.openxmlformats.org/drawingml/2006/main">
               <a:ext uri="{FF2B5EF4-FFF2-40B4-BE49-F238E27FC236}">
-                <a16:creationId xmlns:a16="http://schemas.microsoft.com/office/drawing/2014/main" id="{2F169A4A-0BA7-424B-9D24-71EBD7015DED}"/>
+                <a16:creationId xmlns:a16="http://schemas.microsoft.com/office/drawing/2014/main" id="{769F2DD1-6657-4C03-ABBA-E7C39CEED19D}"/>
               </a:ext>
             </a:extLst>
           </p:cNvPr>
@@ -19590,7 +20782,7 @@
           <p:cNvPr id="6" name="">
             <a:extLst xmlns:a="http://schemas.openxmlformats.org/drawingml/2006/main">
               <a:ext uri="{FF2B5EF4-FFF2-40B4-BE49-F238E27FC236}">
-                <a16:creationId xmlns:a16="http://schemas.microsoft.com/office/drawing/2014/main" id="{C8F28866-DD55-435F-9C3F-DFE70199EB90}"/>
+                <a16:creationId xmlns:a16="http://schemas.microsoft.com/office/drawing/2014/main" id="{FFE85B63-7686-4B6C-8561-A0ED9234210C}"/>
               </a:ext>
             </a:extLst>
           </p:cNvPr>
@@ -19746,7 +20938,7 @@
           <p:cNvPr id="7" name="">
             <a:extLst xmlns:a="http://schemas.openxmlformats.org/drawingml/2006/main">
               <a:ext uri="{FF2B5EF4-FFF2-40B4-BE49-F238E27FC236}">
-                <a16:creationId xmlns:a16="http://schemas.microsoft.com/office/drawing/2014/main" id="{C986D288-CFD3-44F4-9E8E-24A63B9B2F2B}"/>
+                <a16:creationId xmlns:a16="http://schemas.microsoft.com/office/drawing/2014/main" id="{DBF18C4D-427A-4916-99B3-B9267EA054AE}"/>
               </a:ext>
             </a:extLst>
           </p:cNvPr>
@@ -19900,7 +21092,7 @@
     </p:spTree>
     <p:extLst>
       <p:ext uri="{BB962C8B-B14F-4D97-AF65-F5344CB8AC3E}">
-        <p14:creationId xmlns:p14="http://schemas.microsoft.com/office/powerpoint/2010/main" val="1964532355"/>
+        <p14:creationId xmlns:p14="http://schemas.microsoft.com/office/powerpoint/2010/main" val="750616941"/>
       </p:ext>
     </p:extLst>
   </p:cSld>
@@ -19931,7 +21123,7 @@
           <p:cNvPr id="7" name="">
             <a:extLst xmlns:a="http://schemas.openxmlformats.org/drawingml/2006/main">
               <a:ext uri="{FF2B5EF4-FFF2-40B4-BE49-F238E27FC236}">
-                <a16:creationId xmlns:a16="http://schemas.microsoft.com/office/drawing/2014/main" id="{437C50F1-5AC8-4AD6-BE40-8D13651C1C84}"/>
+                <a16:creationId xmlns:a16="http://schemas.microsoft.com/office/drawing/2014/main" id="{EA018C51-0B34-49F1-B294-FF449870E4EA}"/>
               </a:ext>
             </a:extLst>
           </p:cNvPr>
@@ -20087,7 +21279,7 @@
           <p:cNvPr id="2" name="">
             <a:extLst xmlns:a="http://schemas.openxmlformats.org/drawingml/2006/main">
               <a:ext uri="{FF2B5EF4-FFF2-40B4-BE49-F238E27FC236}">
-                <a16:creationId xmlns:a16="http://schemas.microsoft.com/office/drawing/2014/main" id="{251CDF09-6BD5-4152-AE94-FB32C7BDA1C0}"/>
+                <a16:creationId xmlns:a16="http://schemas.microsoft.com/office/drawing/2014/main" id="{74DA6BA5-DB16-4D75-BEAB-17918655AA36}"/>
               </a:ext>
             </a:extLst>
           </p:cNvPr>
@@ -20243,7 +21435,7 @@
           <p:cNvPr id="3" name="">
             <a:extLst xmlns:a="http://schemas.openxmlformats.org/drawingml/2006/main">
               <a:ext uri="{FF2B5EF4-FFF2-40B4-BE49-F238E27FC236}">
-                <a16:creationId xmlns:a16="http://schemas.microsoft.com/office/drawing/2014/main" id="{2E4A41AC-DD59-4714-ABC7-A9AF56C786A7}"/>
+                <a16:creationId xmlns:a16="http://schemas.microsoft.com/office/drawing/2014/main" id="{EEB1CD32-C566-497F-9BB3-49310EDB6476}"/>
               </a:ext>
             </a:extLst>
           </p:cNvPr>
@@ -20399,7 +21591,7 @@
           <p:cNvPr id="4" name="">
             <a:extLst xmlns:a="http://schemas.openxmlformats.org/drawingml/2006/main">
               <a:ext uri="{FF2B5EF4-FFF2-40B4-BE49-F238E27FC236}">
-                <a16:creationId xmlns:a16="http://schemas.microsoft.com/office/drawing/2014/main" id="{2AD2E035-83A3-44D0-B7AE-4A97DFE1F6A3}"/>
+                <a16:creationId xmlns:a16="http://schemas.microsoft.com/office/drawing/2014/main" id="{A69A583D-EAA0-43E1-A358-9F8466DBCE7A}"/>
               </a:ext>
             </a:extLst>
           </p:cNvPr>
@@ -20555,7 +21747,7 @@
           <p:cNvPr id="5" name="">
             <a:extLst xmlns:a="http://schemas.openxmlformats.org/drawingml/2006/main">
               <a:ext uri="{FF2B5EF4-FFF2-40B4-BE49-F238E27FC236}">
-                <a16:creationId xmlns:a16="http://schemas.microsoft.com/office/drawing/2014/main" id="{F3530225-86BF-4489-8F09-1D3942F24ACC}"/>
+                <a16:creationId xmlns:a16="http://schemas.microsoft.com/office/drawing/2014/main" id="{25708DDA-CA9B-424C-BDF5-90DC580E29B0}"/>
               </a:ext>
             </a:extLst>
           </p:cNvPr>
@@ -20711,7 +21903,7 @@
           <p:cNvPr id="6" name="">
             <a:extLst xmlns:a="http://schemas.openxmlformats.org/drawingml/2006/main">
               <a:ext uri="{FF2B5EF4-FFF2-40B4-BE49-F238E27FC236}">
-                <a16:creationId xmlns:a16="http://schemas.microsoft.com/office/drawing/2014/main" id="{91751A7B-4F68-4A09-905F-96A5A8B89195}"/>
+                <a16:creationId xmlns:a16="http://schemas.microsoft.com/office/drawing/2014/main" id="{E44559E9-2FCB-4D38-86E7-7CB7B1DD6F26}"/>
               </a:ext>
             </a:extLst>
           </p:cNvPr>
@@ -20865,7 +22057,7 @@
     </p:spTree>
     <p:extLst>
       <p:ext uri="{BB962C8B-B14F-4D97-AF65-F5344CB8AC3E}">
-        <p14:creationId xmlns:p14="http://schemas.microsoft.com/office/powerpoint/2010/main" val="736898704"/>
+        <p14:creationId xmlns:p14="http://schemas.microsoft.com/office/powerpoint/2010/main" val="1465311195"/>
       </p:ext>
     </p:extLst>
   </p:cSld>
@@ -20896,7 +22088,7 @@
           <p:cNvPr id="14" name="">
             <a:extLst xmlns:a="http://schemas.openxmlformats.org/drawingml/2006/main">
               <a:ext uri="{FF2B5EF4-FFF2-40B4-BE49-F238E27FC236}">
-                <a16:creationId xmlns:a16="http://schemas.microsoft.com/office/drawing/2014/main" id="{1F1A4EFB-8581-4525-A7E7-5CD09F3B8CEE}"/>
+                <a16:creationId xmlns:a16="http://schemas.microsoft.com/office/drawing/2014/main" id="{F6EC9529-7A32-466B-8FBB-2BA741B991A5}"/>
               </a:ext>
             </a:extLst>
           </p:cNvPr>
@@ -20927,7 +22119,7 @@
           <p:cNvPr id="13" name="">
             <a:extLst xmlns:a="http://schemas.openxmlformats.org/drawingml/2006/main">
               <a:ext uri="{FF2B5EF4-FFF2-40B4-BE49-F238E27FC236}">
-                <a16:creationId xmlns:a16="http://schemas.microsoft.com/office/drawing/2014/main" id="{69F99A01-3FD6-46A0-8561-5DB414EA77D7}"/>
+                <a16:creationId xmlns:a16="http://schemas.microsoft.com/office/drawing/2014/main" id="{0C1755E7-6FC3-4810-9854-60A7294F4B2D}"/>
               </a:ext>
             </a:extLst>
           </p:cNvPr>
@@ -20958,7 +22150,7 @@
           <p:cNvPr id="12" name="">
             <a:extLst xmlns:a="http://schemas.openxmlformats.org/drawingml/2006/main">
               <a:ext uri="{FF2B5EF4-FFF2-40B4-BE49-F238E27FC236}">
-                <a16:creationId xmlns:a16="http://schemas.microsoft.com/office/drawing/2014/main" id="{7421691C-6DCA-4A6E-B6C2-3B0646BD0FAA}"/>
+                <a16:creationId xmlns:a16="http://schemas.microsoft.com/office/drawing/2014/main" id="{CCEDFC67-13A2-47D1-A611-321C9917C43A}"/>
               </a:ext>
             </a:extLst>
           </p:cNvPr>
@@ -20989,7 +22181,7 @@
           <p:cNvPr id="11" name="">
             <a:extLst xmlns:a="http://schemas.openxmlformats.org/drawingml/2006/main">
               <a:ext uri="{FF2B5EF4-FFF2-40B4-BE49-F238E27FC236}">
-                <a16:creationId xmlns:a16="http://schemas.microsoft.com/office/drawing/2014/main" id="{1B249ED4-D35C-4F17-8F72-9D56366A8A5F}"/>
+                <a16:creationId xmlns:a16="http://schemas.microsoft.com/office/drawing/2014/main" id="{5C47D27E-0CC1-41BC-ADE5-97E259A6AEBA}"/>
               </a:ext>
             </a:extLst>
           </p:cNvPr>
@@ -21022,7 +22214,7 @@
           <p:cNvPr id="10" name="">
             <a:extLst xmlns:a="http://schemas.openxmlformats.org/drawingml/2006/main">
               <a:ext uri="{FF2B5EF4-FFF2-40B4-BE49-F238E27FC236}">
-                <a16:creationId xmlns:a16="http://schemas.microsoft.com/office/drawing/2014/main" id="{2AADDE59-BA6E-48BD-A1CA-044613A1E71E}"/>
+                <a16:creationId xmlns:a16="http://schemas.microsoft.com/office/drawing/2014/main" id="{0D3D0252-9FD8-43DA-A4F1-262815114FEB}"/>
               </a:ext>
             </a:extLst>
           </p:cNvPr>
@@ -21055,7 +22247,7 @@
           <p:cNvPr id="16" name="">
             <a:extLst xmlns:a="http://schemas.openxmlformats.org/drawingml/2006/main">
               <a:ext uri="{FF2B5EF4-FFF2-40B4-BE49-F238E27FC236}">
-                <a16:creationId xmlns:a16="http://schemas.microsoft.com/office/drawing/2014/main" id="{89CF6667-D794-4C12-9020-4B78D8FBD124}"/>
+                <a16:creationId xmlns:a16="http://schemas.microsoft.com/office/drawing/2014/main" id="{11AF3406-0847-4B6A-80A8-F1EF8351598D}"/>
               </a:ext>
             </a:extLst>
           </p:cNvPr>
@@ -21211,7 +22403,7 @@
           <p:cNvPr id="2" name="">
             <a:extLst xmlns:a="http://schemas.openxmlformats.org/drawingml/2006/main">
               <a:ext uri="{FF2B5EF4-FFF2-40B4-BE49-F238E27FC236}">
-                <a16:creationId xmlns:a16="http://schemas.microsoft.com/office/drawing/2014/main" id="{9F703E46-913E-4ECF-8B63-0F9D9A93650B}"/>
+                <a16:creationId xmlns:a16="http://schemas.microsoft.com/office/drawing/2014/main" id="{24CFF850-CA53-4C3D-A704-6977B488928B}"/>
               </a:ext>
             </a:extLst>
           </p:cNvPr>
@@ -21367,7 +22559,7 @@
           <p:cNvPr id="3" name="">
             <a:extLst xmlns:a="http://schemas.openxmlformats.org/drawingml/2006/main">
               <a:ext uri="{FF2B5EF4-FFF2-40B4-BE49-F238E27FC236}">
-                <a16:creationId xmlns:a16="http://schemas.microsoft.com/office/drawing/2014/main" id="{CC40F308-0559-47D7-BD5C-847567E166F2}"/>
+                <a16:creationId xmlns:a16="http://schemas.microsoft.com/office/drawing/2014/main" id="{0F7ECB7E-C0A3-4370-909A-656D1818D51D}"/>
               </a:ext>
             </a:extLst>
           </p:cNvPr>
@@ -21550,7 +22742,7 @@
           <p:cNvPr id="4" name="">
             <a:extLst xmlns:a="http://schemas.openxmlformats.org/drawingml/2006/main">
               <a:ext uri="{FF2B5EF4-FFF2-40B4-BE49-F238E27FC236}">
-                <a16:creationId xmlns:a16="http://schemas.microsoft.com/office/drawing/2014/main" id="{47C812DA-7FDD-4F81-9F8F-0752A655EE7A}"/>
+                <a16:creationId xmlns:a16="http://schemas.microsoft.com/office/drawing/2014/main" id="{9779EBD5-EEC6-41BD-8036-6AD662979584}"/>
               </a:ext>
             </a:extLst>
           </p:cNvPr>
@@ -21733,7 +22925,7 @@
           <p:cNvPr id="5" name="">
             <a:extLst xmlns:a="http://schemas.openxmlformats.org/drawingml/2006/main">
               <a:ext uri="{FF2B5EF4-FFF2-40B4-BE49-F238E27FC236}">
-                <a16:creationId xmlns:a16="http://schemas.microsoft.com/office/drawing/2014/main" id="{0467089B-1658-416A-AB9C-4D01FDB068A0}"/>
+                <a16:creationId xmlns:a16="http://schemas.microsoft.com/office/drawing/2014/main" id="{73A51120-F346-49BE-8042-AD3C05445CAA}"/>
               </a:ext>
             </a:extLst>
           </p:cNvPr>
@@ -21916,7 +23108,7 @@
           <p:cNvPr id="6" name="">
             <a:extLst xmlns:a="http://schemas.openxmlformats.org/drawingml/2006/main">
               <a:ext uri="{FF2B5EF4-FFF2-40B4-BE49-F238E27FC236}">
-                <a16:creationId xmlns:a16="http://schemas.microsoft.com/office/drawing/2014/main" id="{5CDF0D42-1ECA-400B-8A47-87CF3CB629AF}"/>
+                <a16:creationId xmlns:a16="http://schemas.microsoft.com/office/drawing/2014/main" id="{9CF5EAC9-59C3-4524-8AC1-EEA2B44E179A}"/>
               </a:ext>
             </a:extLst>
           </p:cNvPr>
@@ -22099,7 +23291,7 @@
           <p:cNvPr id="7" name="">
             <a:extLst xmlns:a="http://schemas.openxmlformats.org/drawingml/2006/main">
               <a:ext uri="{FF2B5EF4-FFF2-40B4-BE49-F238E27FC236}">
-                <a16:creationId xmlns:a16="http://schemas.microsoft.com/office/drawing/2014/main" id="{6071A87C-90B1-4273-A489-CF9EFEBB246D}"/>
+                <a16:creationId xmlns:a16="http://schemas.microsoft.com/office/drawing/2014/main" id="{D2341C98-5615-4D39-94F6-D4CF05BE077E}"/>
               </a:ext>
             </a:extLst>
           </p:cNvPr>
@@ -22282,7 +23474,7 @@
           <p:cNvPr id="8" name="">
             <a:extLst xmlns:a="http://schemas.openxmlformats.org/drawingml/2006/main">
               <a:ext uri="{FF2B5EF4-FFF2-40B4-BE49-F238E27FC236}">
-                <a16:creationId xmlns:a16="http://schemas.microsoft.com/office/drawing/2014/main" id="{BF5E7021-45DD-4AE1-A495-77DBF9749A98}"/>
+                <a16:creationId xmlns:a16="http://schemas.microsoft.com/office/drawing/2014/main" id="{FA6912AF-2701-492C-AD5B-8DA7D70D305B}"/>
               </a:ext>
             </a:extLst>
           </p:cNvPr>
@@ -22465,7 +23657,7 @@
           <p:cNvPr id="9" name="">
             <a:extLst xmlns:a="http://schemas.openxmlformats.org/drawingml/2006/main">
               <a:ext uri="{FF2B5EF4-FFF2-40B4-BE49-F238E27FC236}">
-                <a16:creationId xmlns:a16="http://schemas.microsoft.com/office/drawing/2014/main" id="{E5493C89-7C29-4EE8-BAEC-8D1387B6A5F1}"/>
+                <a16:creationId xmlns:a16="http://schemas.microsoft.com/office/drawing/2014/main" id="{2C23ED14-1F8E-47DD-A45A-C9768DF0C7CC}"/>
               </a:ext>
             </a:extLst>
           </p:cNvPr>
@@ -22648,7 +23840,7 @@
           <p:cNvPr id="15" name="">
             <a:extLst xmlns:a="http://schemas.openxmlformats.org/drawingml/2006/main">
               <a:ext uri="{FF2B5EF4-FFF2-40B4-BE49-F238E27FC236}">
-                <a16:creationId xmlns:a16="http://schemas.microsoft.com/office/drawing/2014/main" id="{2636B424-B62E-422A-9B23-1E078F283A45}"/>
+                <a16:creationId xmlns:a16="http://schemas.microsoft.com/office/drawing/2014/main" id="{037CEF79-A486-45C5-985E-AD2695E78CC4}"/>
               </a:ext>
             </a:extLst>
           </p:cNvPr>
@@ -22802,7 +23994,7 @@
     </p:spTree>
     <p:extLst>
       <p:ext uri="{BB962C8B-B14F-4D97-AF65-F5344CB8AC3E}">
-        <p14:creationId xmlns:p14="http://schemas.microsoft.com/office/powerpoint/2010/main" val="1825610851"/>
+        <p14:creationId xmlns:p14="http://schemas.microsoft.com/office/powerpoint/2010/main" val="2092572173"/>
       </p:ext>
     </p:extLst>
   </p:cSld>
@@ -22833,7 +24025,7 @@
           <p:cNvPr id="8" name="">
             <a:extLst xmlns:a="http://schemas.openxmlformats.org/drawingml/2006/main">
               <a:ext uri="{FF2B5EF4-FFF2-40B4-BE49-F238E27FC236}">
-                <a16:creationId xmlns:a16="http://schemas.microsoft.com/office/drawing/2014/main" id="{21E79B30-7966-411E-BC59-930F020DBA9C}"/>
+                <a16:creationId xmlns:a16="http://schemas.microsoft.com/office/drawing/2014/main" id="{2B76C865-F55B-4F6E-86E9-0D6FEF9211F1}"/>
               </a:ext>
             </a:extLst>
           </p:cNvPr>
@@ -22989,7 +24181,7 @@
           <p:cNvPr id="2" name="">
             <a:extLst xmlns:a="http://schemas.openxmlformats.org/drawingml/2006/main">
               <a:ext uri="{FF2B5EF4-FFF2-40B4-BE49-F238E27FC236}">
-                <a16:creationId xmlns:a16="http://schemas.microsoft.com/office/drawing/2014/main" id="{6EB47232-D7EF-4B19-B13B-541560257031}"/>
+                <a16:creationId xmlns:a16="http://schemas.microsoft.com/office/drawing/2014/main" id="{13B1AD6A-BF71-47AE-B776-EB7C2361E7A3}"/>
               </a:ext>
             </a:extLst>
           </p:cNvPr>
@@ -23145,7 +24337,7 @@
           <p:cNvPr id="3" name="">
             <a:extLst xmlns:a="http://schemas.openxmlformats.org/drawingml/2006/main">
               <a:ext uri="{FF2B5EF4-FFF2-40B4-BE49-F238E27FC236}">
-                <a16:creationId xmlns:a16="http://schemas.microsoft.com/office/drawing/2014/main" id="{33424434-45E1-4A51-BFD8-62125C0CE348}"/>
+                <a16:creationId xmlns:a16="http://schemas.microsoft.com/office/drawing/2014/main" id="{C99B913C-F304-4291-9887-A449DEABF8CD}"/>
               </a:ext>
             </a:extLst>
           </p:cNvPr>
@@ -23301,7 +24493,7 @@
           <p:cNvPr id="4" name="">
             <a:extLst xmlns:a="http://schemas.openxmlformats.org/drawingml/2006/main">
               <a:ext uri="{FF2B5EF4-FFF2-40B4-BE49-F238E27FC236}">
-                <a16:creationId xmlns:a16="http://schemas.microsoft.com/office/drawing/2014/main" id="{97159CCE-8B37-44AD-839C-7473558E61DC}"/>
+                <a16:creationId xmlns:a16="http://schemas.microsoft.com/office/drawing/2014/main" id="{B0D526EA-2D61-4CCA-B66B-021794828B8B}"/>
               </a:ext>
             </a:extLst>
           </p:cNvPr>
@@ -23457,7 +24649,7 @@
           <p:cNvPr id="5" name="">
             <a:extLst xmlns:a="http://schemas.openxmlformats.org/drawingml/2006/main">
               <a:ext uri="{FF2B5EF4-FFF2-40B4-BE49-F238E27FC236}">
-                <a16:creationId xmlns:a16="http://schemas.microsoft.com/office/drawing/2014/main" id="{85C89E64-4909-4E09-A877-15E5F73318D9}"/>
+                <a16:creationId xmlns:a16="http://schemas.microsoft.com/office/drawing/2014/main" id="{CD8DEF1C-1C18-4CCB-9AAC-9CB04E14C8E5}"/>
               </a:ext>
             </a:extLst>
           </p:cNvPr>
@@ -23613,7 +24805,7 @@
           <p:cNvPr id="6" name="">
             <a:extLst xmlns:a="http://schemas.openxmlformats.org/drawingml/2006/main">
               <a:ext uri="{FF2B5EF4-FFF2-40B4-BE49-F238E27FC236}">
-                <a16:creationId xmlns:a16="http://schemas.microsoft.com/office/drawing/2014/main" id="{7C64C26E-1646-47D0-BE20-03CCBCF6EAC6}"/>
+                <a16:creationId xmlns:a16="http://schemas.microsoft.com/office/drawing/2014/main" id="{051B07D9-7939-4062-8B1F-4AD10DEDB214}"/>
               </a:ext>
             </a:extLst>
           </p:cNvPr>
@@ -23769,7 +24961,7 @@
           <p:cNvPr id="7" name="">
             <a:extLst xmlns:a="http://schemas.openxmlformats.org/drawingml/2006/main">
               <a:ext uri="{FF2B5EF4-FFF2-40B4-BE49-F238E27FC236}">
-                <a16:creationId xmlns:a16="http://schemas.microsoft.com/office/drawing/2014/main" id="{D19E84A6-860C-46AF-A430-7DE57044E0AB}"/>
+                <a16:creationId xmlns:a16="http://schemas.microsoft.com/office/drawing/2014/main" id="{850A6DFA-65A9-46C3-87D4-CF33BEBCFDF8}"/>
               </a:ext>
             </a:extLst>
           </p:cNvPr>
@@ -23923,7 +25115,7 @@
     </p:spTree>
     <p:extLst>
       <p:ext uri="{BB962C8B-B14F-4D97-AF65-F5344CB8AC3E}">
-        <p14:creationId xmlns:p14="http://schemas.microsoft.com/office/powerpoint/2010/main" val="496786869"/>
+        <p14:creationId xmlns:p14="http://schemas.microsoft.com/office/powerpoint/2010/main" val="815177782"/>
       </p:ext>
     </p:extLst>
   </p:cSld>
@@ -23954,7 +25146,7 @@
           <p:cNvPr id="5" name="">
             <a:extLst xmlns:a="http://schemas.openxmlformats.org/drawingml/2006/main">
               <a:ext uri="{FF2B5EF4-FFF2-40B4-BE49-F238E27FC236}">
-                <a16:creationId xmlns:a16="http://schemas.microsoft.com/office/drawing/2014/main" id="{CF957890-A175-4523-92E6-874941293F78}"/>
+                <a16:creationId xmlns:a16="http://schemas.microsoft.com/office/drawing/2014/main" id="{6E520A00-952D-4858-BCFD-85C4856D796C}"/>
               </a:ext>
             </a:extLst>
           </p:cNvPr>
@@ -24110,7 +25302,7 @@
           <p:cNvPr id="2" name="">
             <a:extLst xmlns:a="http://schemas.openxmlformats.org/drawingml/2006/main">
               <a:ext uri="{FF2B5EF4-FFF2-40B4-BE49-F238E27FC236}">
-                <a16:creationId xmlns:a16="http://schemas.microsoft.com/office/drawing/2014/main" id="{BF24EAB7-AE2E-4988-9725-27929D987552}"/>
+                <a16:creationId xmlns:a16="http://schemas.microsoft.com/office/drawing/2014/main" id="{B8F2F98B-0CD9-4637-8F2B-9D9530C374F4}"/>
               </a:ext>
             </a:extLst>
           </p:cNvPr>
@@ -24266,7 +25458,7 @@
           <p:cNvPr id="3" name="">
             <a:extLst xmlns:a="http://schemas.openxmlformats.org/drawingml/2006/main">
               <a:ext uri="{FF2B5EF4-FFF2-40B4-BE49-F238E27FC236}">
-                <a16:creationId xmlns:a16="http://schemas.microsoft.com/office/drawing/2014/main" id="{AD8053D4-6348-4BAB-BF96-138302E90E2D}"/>
+                <a16:creationId xmlns:a16="http://schemas.microsoft.com/office/drawing/2014/main" id="{5D0FF44C-D939-44A3-9851-3B82A767D810}"/>
               </a:ext>
             </a:extLst>
           </p:cNvPr>
@@ -25207,7 +26399,7 @@
           <p:cNvPr id="4" name="">
             <a:extLst xmlns:a="http://schemas.openxmlformats.org/drawingml/2006/main">
               <a:ext uri="{FF2B5EF4-FFF2-40B4-BE49-F238E27FC236}">
-                <a16:creationId xmlns:a16="http://schemas.microsoft.com/office/drawing/2014/main" id="{4E12D691-5907-449F-928F-7F0834DD6361}"/>
+                <a16:creationId xmlns:a16="http://schemas.microsoft.com/office/drawing/2014/main" id="{8DDD5E40-5581-47A9-9526-1C7DBEE114E1}"/>
               </a:ext>
             </a:extLst>
           </p:cNvPr>
@@ -25361,7 +26553,7 @@
     </p:spTree>
     <p:extLst>
       <p:ext uri="{BB962C8B-B14F-4D97-AF65-F5344CB8AC3E}">
-        <p14:creationId xmlns:p14="http://schemas.microsoft.com/office/powerpoint/2010/main" val="1916681478"/>
+        <p14:creationId xmlns:p14="http://schemas.microsoft.com/office/powerpoint/2010/main" val="821284345"/>
       </p:ext>
     </p:extLst>
   </p:cSld>
@@ -25392,7 +26584,7 @@
           <p:cNvPr id="5" name="">
             <a:extLst xmlns:a="http://schemas.openxmlformats.org/drawingml/2006/main">
               <a:ext uri="{FF2B5EF4-FFF2-40B4-BE49-F238E27FC236}">
-                <a16:creationId xmlns:a16="http://schemas.microsoft.com/office/drawing/2014/main" id="{E4792D6C-9589-46A9-A46E-C70506C07E36}"/>
+                <a16:creationId xmlns:a16="http://schemas.microsoft.com/office/drawing/2014/main" id="{D5ED4C46-EA2D-4C9F-B638-69C126B831C3}"/>
               </a:ext>
             </a:extLst>
           </p:cNvPr>
@@ -25548,7 +26740,7 @@
           <p:cNvPr id="2" name="">
             <a:extLst xmlns:a="http://schemas.openxmlformats.org/drawingml/2006/main">
               <a:ext uri="{FF2B5EF4-FFF2-40B4-BE49-F238E27FC236}">
-                <a16:creationId xmlns:a16="http://schemas.microsoft.com/office/drawing/2014/main" id="{2BCBA04A-CA5E-451E-ABE3-A27386308BC1}"/>
+                <a16:creationId xmlns:a16="http://schemas.microsoft.com/office/drawing/2014/main" id="{F18BEF0D-9951-4D9F-92F5-234527CBBEB5}"/>
               </a:ext>
             </a:extLst>
           </p:cNvPr>
@@ -25704,7 +26896,7 @@
           <p:cNvPr id="3" name="">
             <a:extLst xmlns:a="http://schemas.openxmlformats.org/drawingml/2006/main">
               <a:ext uri="{FF2B5EF4-FFF2-40B4-BE49-F238E27FC236}">
-                <a16:creationId xmlns:a16="http://schemas.microsoft.com/office/drawing/2014/main" id="{1F022175-6FA5-4113-86EF-5FF8FA0AE457}"/>
+                <a16:creationId xmlns:a16="http://schemas.microsoft.com/office/drawing/2014/main" id="{CD0C24CD-AABB-4C99-945B-4A9068D01F86}"/>
               </a:ext>
             </a:extLst>
           </p:cNvPr>
@@ -26645,7 +27837,7 @@
           <p:cNvPr id="4" name="">
             <a:extLst xmlns:a="http://schemas.openxmlformats.org/drawingml/2006/main">
               <a:ext uri="{FF2B5EF4-FFF2-40B4-BE49-F238E27FC236}">
-                <a16:creationId xmlns:a16="http://schemas.microsoft.com/office/drawing/2014/main" id="{469B3752-0FC8-4F0A-8886-1EAA712D3D7B}"/>
+                <a16:creationId xmlns:a16="http://schemas.microsoft.com/office/drawing/2014/main" id="{6229243D-2EB5-432D-8E7A-ABA1B7DB59D6}"/>
               </a:ext>
             </a:extLst>
           </p:cNvPr>
@@ -26799,7 +27991,7 @@
     </p:spTree>
     <p:extLst>
       <p:ext uri="{BB962C8B-B14F-4D97-AF65-F5344CB8AC3E}">
-        <p14:creationId xmlns:p14="http://schemas.microsoft.com/office/powerpoint/2010/main" val="430434283"/>
+        <p14:creationId xmlns:p14="http://schemas.microsoft.com/office/powerpoint/2010/main" val="1953573351"/>
       </p:ext>
     </p:extLst>
   </p:cSld>
@@ -26830,7 +28022,7 @@
           <p:cNvPr id="5" name="">
             <a:extLst xmlns:a="http://schemas.openxmlformats.org/drawingml/2006/main">
               <a:ext uri="{FF2B5EF4-FFF2-40B4-BE49-F238E27FC236}">
-                <a16:creationId xmlns:a16="http://schemas.microsoft.com/office/drawing/2014/main" id="{C6E39535-6072-4F8D-9ADF-D6360EF066AA}"/>
+                <a16:creationId xmlns:a16="http://schemas.microsoft.com/office/drawing/2014/main" id="{63618A06-7635-4126-BE19-EAEA730C8D77}"/>
               </a:ext>
             </a:extLst>
           </p:cNvPr>
@@ -26986,7 +28178,7 @@
           <p:cNvPr id="2" name="">
             <a:extLst xmlns:a="http://schemas.openxmlformats.org/drawingml/2006/main">
               <a:ext uri="{FF2B5EF4-FFF2-40B4-BE49-F238E27FC236}">
-                <a16:creationId xmlns:a16="http://schemas.microsoft.com/office/drawing/2014/main" id="{9B89996C-8C96-4F7E-993D-11533BBFAFB5}"/>
+                <a16:creationId xmlns:a16="http://schemas.microsoft.com/office/drawing/2014/main" id="{A627BA56-18FF-4C48-81F9-3C812A13A705}"/>
               </a:ext>
             </a:extLst>
           </p:cNvPr>
@@ -27142,7 +28334,7 @@
           <p:cNvPr id="3" name="">
             <a:extLst xmlns:a="http://schemas.openxmlformats.org/drawingml/2006/main">
               <a:ext uri="{FF2B5EF4-FFF2-40B4-BE49-F238E27FC236}">
-                <a16:creationId xmlns:a16="http://schemas.microsoft.com/office/drawing/2014/main" id="{936BA309-0AC3-4EEA-BE9F-7F089D5010EE}"/>
+                <a16:creationId xmlns:a16="http://schemas.microsoft.com/office/drawing/2014/main" id="{4AFCDA0A-8C96-4646-ABD1-783954F22363}"/>
               </a:ext>
             </a:extLst>
           </p:cNvPr>
@@ -28083,7 +29275,7 @@
           <p:cNvPr id="4" name="">
             <a:extLst xmlns:a="http://schemas.openxmlformats.org/drawingml/2006/main">
               <a:ext uri="{FF2B5EF4-FFF2-40B4-BE49-F238E27FC236}">
-                <a16:creationId xmlns:a16="http://schemas.microsoft.com/office/drawing/2014/main" id="{D8D060B3-8F8C-40A7-9391-60D49AF616EE}"/>
+                <a16:creationId xmlns:a16="http://schemas.microsoft.com/office/drawing/2014/main" id="{322D5C08-2FEF-4305-AEB5-FD25843CFA8F}"/>
               </a:ext>
             </a:extLst>
           </p:cNvPr>
@@ -28237,7 +29429,7 @@
     </p:spTree>
     <p:extLst>
       <p:ext uri="{BB962C8B-B14F-4D97-AF65-F5344CB8AC3E}">
-        <p14:creationId xmlns:p14="http://schemas.microsoft.com/office/powerpoint/2010/main" val="2031062820"/>
+        <p14:creationId xmlns:p14="http://schemas.microsoft.com/office/powerpoint/2010/main" val="552198600"/>
       </p:ext>
     </p:extLst>
   </p:cSld>

--- a/deliverables/CycleTwin_pitch_deck.pptx
+++ b/deliverables/CycleTwin_pitch_deck.pptx
@@ -2,32 +2,33 @@
 <file path=ppt/presentation.xml><?xml version="1.0" encoding="utf-8"?>
 <p:presentation xmlns:p="http://schemas.openxmlformats.org/presentationml/2006/main">
   <p:sldMasterIdLst>
-    <p:sldMasterId xmlns:r="http://schemas.openxmlformats.org/officeDocument/2006/relationships" id="2147483648" r:id="R5a7beded8d4843f5"/>
+    <p:sldMasterId xmlns:r="http://schemas.openxmlformats.org/officeDocument/2006/relationships" id="2147483648" r:id="Rfae9457703f94108"/>
   </p:sldMasterIdLst>
   <p:notesMasterIdLst>
-    <p:notesMasterId xmlns:r="http://schemas.openxmlformats.org/officeDocument/2006/relationships" r:id="R6df70b4d45d34c82"/>
+    <p:notesMasterId xmlns:r="http://schemas.openxmlformats.org/officeDocument/2006/relationships" r:id="R147064faaa2346b6"/>
   </p:notesMasterIdLst>
   <p:sldIdLst>
-    <p:sldId xmlns:r="http://schemas.openxmlformats.org/officeDocument/2006/relationships" id="256" r:id="Rb4e86c9e35a549cb"/>
-    <p:sldId xmlns:r="http://schemas.openxmlformats.org/officeDocument/2006/relationships" id="257" r:id="Rf758161433664631"/>
-    <p:sldId xmlns:r="http://schemas.openxmlformats.org/officeDocument/2006/relationships" id="258" r:id="R6b61b17e19534311"/>
-    <p:sldId xmlns:r="http://schemas.openxmlformats.org/officeDocument/2006/relationships" id="259" r:id="R9e50b0e65bd54cd2"/>
-    <p:sldId xmlns:r="http://schemas.openxmlformats.org/officeDocument/2006/relationships" id="260" r:id="Rda29a4c150df4db7"/>
-    <p:sldId xmlns:r="http://schemas.openxmlformats.org/officeDocument/2006/relationships" id="261" r:id="R154f2926e22440c4"/>
-    <p:sldId xmlns:r="http://schemas.openxmlformats.org/officeDocument/2006/relationships" id="262" r:id="Rf9d6095d068344dd"/>
-    <p:sldId xmlns:r="http://schemas.openxmlformats.org/officeDocument/2006/relationships" id="263" r:id="R013aa74be1e14dd8"/>
-    <p:sldId xmlns:r="http://schemas.openxmlformats.org/officeDocument/2006/relationships" id="264" r:id="Rd4caad2c7fb44893"/>
-    <p:sldId xmlns:r="http://schemas.openxmlformats.org/officeDocument/2006/relationships" id="265" r:id="Rd39bf2d1027e4aa5"/>
-    <p:sldId xmlns:r="http://schemas.openxmlformats.org/officeDocument/2006/relationships" id="266" r:id="R992cd28ceef24a67"/>
-    <p:sldId xmlns:r="http://schemas.openxmlformats.org/officeDocument/2006/relationships" id="267" r:id="Rccdc8095e6194429"/>
-    <p:sldId xmlns:r="http://schemas.openxmlformats.org/officeDocument/2006/relationships" id="268" r:id="R45e4abeb994843ab"/>
-    <p:sldId xmlns:r="http://schemas.openxmlformats.org/officeDocument/2006/relationships" id="269" r:id="R8f5f9211c57c444c"/>
-    <p:sldId xmlns:r="http://schemas.openxmlformats.org/officeDocument/2006/relationships" id="270" r:id="R9ffd55ea424c4a91"/>
-    <p:sldId xmlns:r="http://schemas.openxmlformats.org/officeDocument/2006/relationships" id="271" r:id="R47c1a7aef6e14f57"/>
-    <p:sldId xmlns:r="http://schemas.openxmlformats.org/officeDocument/2006/relationships" id="272" r:id="R8c2a17922194496c"/>
-    <p:sldId xmlns:r="http://schemas.openxmlformats.org/officeDocument/2006/relationships" id="273" r:id="R42ba5a4300c54018"/>
-    <p:sldId xmlns:r="http://schemas.openxmlformats.org/officeDocument/2006/relationships" id="274" r:id="Rf5eb3d80cc794182"/>
-    <p:sldId xmlns:r="http://schemas.openxmlformats.org/officeDocument/2006/relationships" id="275" r:id="R68a791a180c94400"/>
+    <p:sldId xmlns:r="http://schemas.openxmlformats.org/officeDocument/2006/relationships" id="256" r:id="Rf557aad83c4940da"/>
+    <p:sldId xmlns:r="http://schemas.openxmlformats.org/officeDocument/2006/relationships" id="257" r:id="R9331ace7a95248da"/>
+    <p:sldId xmlns:r="http://schemas.openxmlformats.org/officeDocument/2006/relationships" id="258" r:id="Rf78c790039894153"/>
+    <p:sldId xmlns:r="http://schemas.openxmlformats.org/officeDocument/2006/relationships" id="259" r:id="R2badd83e02da45fc"/>
+    <p:sldId xmlns:r="http://schemas.openxmlformats.org/officeDocument/2006/relationships" id="260" r:id="Re9c9107c93e14a87"/>
+    <p:sldId xmlns:r="http://schemas.openxmlformats.org/officeDocument/2006/relationships" id="261" r:id="R7da567a8c32f42e2"/>
+    <p:sldId xmlns:r="http://schemas.openxmlformats.org/officeDocument/2006/relationships" id="262" r:id="R4f4e1c391454440f"/>
+    <p:sldId xmlns:r="http://schemas.openxmlformats.org/officeDocument/2006/relationships" id="263" r:id="R9c1747218fd54ba6"/>
+    <p:sldId xmlns:r="http://schemas.openxmlformats.org/officeDocument/2006/relationships" id="264" r:id="R032c5c44456c40f5"/>
+    <p:sldId xmlns:r="http://schemas.openxmlformats.org/officeDocument/2006/relationships" id="265" r:id="Rbf89894c1fe6417c"/>
+    <p:sldId xmlns:r="http://schemas.openxmlformats.org/officeDocument/2006/relationships" id="266" r:id="R60ed62a6878244fe"/>
+    <p:sldId xmlns:r="http://schemas.openxmlformats.org/officeDocument/2006/relationships" id="267" r:id="R8120bcc7a36942da"/>
+    <p:sldId xmlns:r="http://schemas.openxmlformats.org/officeDocument/2006/relationships" id="268" r:id="Ree6bfe517fc3412f"/>
+    <p:sldId xmlns:r="http://schemas.openxmlformats.org/officeDocument/2006/relationships" id="269" r:id="R9e4adbbff0814531"/>
+    <p:sldId xmlns:r="http://schemas.openxmlformats.org/officeDocument/2006/relationships" id="270" r:id="Redda48aa55e94b4e"/>
+    <p:sldId xmlns:r="http://schemas.openxmlformats.org/officeDocument/2006/relationships" id="271" r:id="R6bb4b20d55d74fad"/>
+    <p:sldId xmlns:r="http://schemas.openxmlformats.org/officeDocument/2006/relationships" id="272" r:id="R39fd318a385c4745"/>
+    <p:sldId xmlns:r="http://schemas.openxmlformats.org/officeDocument/2006/relationships" id="273" r:id="R215bfecb16694c65"/>
+    <p:sldId xmlns:r="http://schemas.openxmlformats.org/officeDocument/2006/relationships" id="274" r:id="R7f98072a23704a8a"/>
+    <p:sldId xmlns:r="http://schemas.openxmlformats.org/officeDocument/2006/relationships" id="275" r:id="R9b1cc108dccd4ee3"/>
+    <p:sldId xmlns:r="http://schemas.openxmlformats.org/officeDocument/2006/relationships" id="276" r:id="R0d833728838f4d51"/>
   </p:sldIdLst>
   <p:sldSz cx="12192000" cy="6858000"/>
   <p:notesSz cx="6858000" cy="9144000"/>
@@ -881,7 +882,7 @@
           <a:lstStyle xmlns:a="http://schemas.openxmlformats.org/drawingml/2006/main"/>
           <a:p xmlns:a="http://schemas.openxmlformats.org/drawingml/2006/main">
             <a:r>
-              <a:t>Source: docs/claims.json, generated by scripts/build_claims.py. All project metrics are synthetic development results. Decision-support research display</a:t>
+              <a:t>Source: docs/claims.json, generated by scripts/build_claims.py. All project metrics are synthetic development results. Fixed Tier-2 day-18 model and threshold under predeclared perturbations</a:t>
             </a:r>
           </a:p>
         </p:txBody>
@@ -951,7 +952,7 @@
           <a:lstStyle xmlns:a="http://schemas.openxmlformats.org/drawingml/2006/main"/>
           <a:p xmlns:a="http://schemas.openxmlformats.org/drawingml/2006/main">
             <a:r>
-              <a:t>Source: docs/claims.json, generated by scripts/build_claims.py. All project metrics are synthetic development results. Missing safety information causes abstention</a:t>
+              <a:t>Source: docs/claims.json, generated by scripts/build_claims.py. All project metrics are synthetic development results. Decision-support research display</a:t>
             </a:r>
           </a:p>
         </p:txBody>
@@ -1021,7 +1022,7 @@
           <a:lstStyle xmlns:a="http://schemas.openxmlformats.org/drawingml/2006/main"/>
           <a:p xmlns:a="http://schemas.openxmlformats.org/drawingml/2006/main">
             <a:r>
-              <a:t>Source: docs/claims.json, generated by scripts/build_claims.py. All project metrics are synthetic development results. Clear boundaries around simulated physiology</a:t>
+              <a:t>Source: docs/claims.json, generated by scripts/build_claims.py. All project metrics are synthetic development results. Missing safety information causes abstention</a:t>
             </a:r>
           </a:p>
         </p:txBody>
@@ -1091,7 +1092,7 @@
           <a:lstStyle xmlns:a="http://schemas.openxmlformats.org/drawingml/2006/main"/>
           <a:p xmlns:a="http://schemas.openxmlformats.org/drawingml/2006/main">
             <a:r>
-              <a:t>Source: docs/claims.json, generated by scripts/build_claims.py. All project metrics are synthetic development results. All declared Kushi scenarios remain visible</a:t>
+              <a:t>Source: docs/claims.json, generated by scripts/build_claims.py. All project metrics are synthetic development results. Clear boundaries around simulated physiology</a:t>
             </a:r>
           </a:p>
         </p:txBody>
@@ -1161,7 +1162,7 @@
           <a:lstStyle xmlns:a="http://schemas.openxmlformats.org/drawingml/2006/main"/>
           <a:p xmlns:a="http://schemas.openxmlformats.org/drawingml/2006/main">
             <a:r>
-              <a:t>Source: docs/claims.json, generated by scripts/build_claims.py. All project metrics are synthetic development results. Synthetic recovery is not prospective evidence in women</a:t>
+              <a:t>Source: docs/claims.json, generated by scripts/build_claims.py. All project metrics are synthetic development results. All declared Kushi scenarios remain visible</a:t>
             </a:r>
           </a:p>
         </p:txBody>
@@ -1262,6 +1263,76 @@
 </file>
 
 <file path=ppt/notesSlides/notesSlide20.xml><?xml version="1.0" encoding="utf-8"?>
+<p:notes xmlns:p="http://schemas.openxmlformats.org/presentationml/2006/main">
+  <p:cSld>
+    <p:spTree>
+      <p:nvGrpSpPr>
+        <p:cNvPr id="1" name=""/>
+        <p:cNvGrpSpPr/>
+        <p:nvPr/>
+      </p:nvGrpSpPr>
+      <p:grpSpPr>
+        <a:xfrm xmlns:a="http://schemas.openxmlformats.org/drawingml/2006/main"/>
+      </p:grpSpPr>
+      <p:sp>
+        <p:nvSpPr>
+          <p:cNvPr id="2" name="Slide Image Placeholder 1"/>
+          <p:cNvSpPr>
+            <a:spLocks xmlns:a="http://schemas.openxmlformats.org/drawingml/2006/main" noGrp="1"/>
+          </p:cNvSpPr>
+          <p:nvPr>
+            <p:ph type="sldImg" idx="0"/>
+          </p:nvPr>
+        </p:nvSpPr>
+        <p:spPr/>
+      </p:sp>
+      <p:sp>
+        <p:nvSpPr>
+          <p:cNvPr id="3" name="Notes Placeholder 2"/>
+          <p:cNvSpPr>
+            <a:spLocks xmlns:a="http://schemas.openxmlformats.org/drawingml/2006/main" noGrp="1"/>
+          </p:cNvSpPr>
+          <p:nvPr>
+            <p:ph type="body" idx="1"/>
+          </p:nvPr>
+        </p:nvSpPr>
+        <p:spPr/>
+        <p:txBody>
+          <a:bodyPr xmlns:a="http://schemas.openxmlformats.org/drawingml/2006/main"/>
+          <a:lstStyle xmlns:a="http://schemas.openxmlformats.org/drawingml/2006/main"/>
+          <a:p xmlns:a="http://schemas.openxmlformats.org/drawingml/2006/main">
+            <a:r>
+              <a:t>Source: docs/claims.json, generated by scripts/build_claims.py. All project metrics are synthetic development results. Synthetic recovery is not prospective evidence in women</a:t>
+            </a:r>
+          </a:p>
+        </p:txBody>
+      </p:sp>
+      <p:sp>
+        <p:nvSpPr>
+          <p:cNvPr id="4" name="Slide Number Placeholder 3"/>
+          <p:cNvSpPr>
+            <a:spLocks xmlns:a="http://schemas.openxmlformats.org/drawingml/2006/main" noGrp="1"/>
+          </p:cNvSpPr>
+          <p:nvPr>
+            <p:ph type="sldNum" idx="5"/>
+          </p:nvPr>
+        </p:nvSpPr>
+        <p:spPr/>
+        <p:txBody>
+          <a:bodyPr xmlns:a="http://schemas.openxmlformats.org/drawingml/2006/main"/>
+          <a:lstStyle xmlns:a="http://schemas.openxmlformats.org/drawingml/2006/main"/>
+          <a:p xmlns:a="http://schemas.openxmlformats.org/drawingml/2006/main"/>
+        </p:txBody>
+      </p:sp>
+    </p:spTree>
+  </p:cSld>
+  <p:clrMapOvr>
+    <a:masterClrMapping xmlns:a="http://schemas.openxmlformats.org/drawingml/2006/main"/>
+  </p:clrMapOvr>
+</p:notes>
+</file>
+
+<file path=ppt/notesSlides/notesSlide21.xml><?xml version="1.0" encoding="utf-8"?>
 <p:notes xmlns:p="http://schemas.openxmlformats.org/presentationml/2006/main">
   <p:cSld>
     <p:spTree>
@@ -1838,7 +1909,7 @@
           <p:cNvPr id="3" name="Title">
             <a:extLst xmlns:a="http://schemas.openxmlformats.org/drawingml/2006/main">
               <a:ext uri="{FF2B5EF4-FFF2-40B4-BE49-F238E27FC236}">
-                <a16:creationId xmlns:a16="http://schemas.microsoft.com/office/drawing/2014/main" id="{95D6F8BB-3D77-49A7-B106-771713CE1F2B}"/>
+                <a16:creationId xmlns:a16="http://schemas.microsoft.com/office/drawing/2014/main" id="{E786BABB-9FEF-438F-92B9-29EAD459B205}"/>
               </a:ext>
             </a:extLst>
           </p:cNvPr>
@@ -2067,7 +2138,7 @@
           <p:cNvPr id="2" name="Subtitle">
             <a:extLst xmlns:a="http://schemas.openxmlformats.org/drawingml/2006/main">
               <a:ext uri="{FF2B5EF4-FFF2-40B4-BE49-F238E27FC236}">
-                <a16:creationId xmlns:a16="http://schemas.microsoft.com/office/drawing/2014/main" id="{91AA7F28-E936-49BE-98C4-D11ED6B5A868}"/>
+                <a16:creationId xmlns:a16="http://schemas.microsoft.com/office/drawing/2014/main" id="{7217CEA5-129C-44C5-A422-5F912EBA9CA9}"/>
               </a:ext>
             </a:extLst>
           </p:cNvPr>
@@ -2313,7 +2384,7 @@
           <p:cNvPr id="2" name="Section title">
             <a:extLst xmlns:a="http://schemas.openxmlformats.org/drawingml/2006/main">
               <a:ext uri="{FF2B5EF4-FFF2-40B4-BE49-F238E27FC236}">
-                <a16:creationId xmlns:a16="http://schemas.microsoft.com/office/drawing/2014/main" id="{EAE37D27-1DBB-465D-80C2-3D42A1A37134}"/>
+                <a16:creationId xmlns:a16="http://schemas.microsoft.com/office/drawing/2014/main" id="{9AAB8492-DB05-46ED-A3F1-27062765E49C}"/>
               </a:ext>
             </a:extLst>
           </p:cNvPr>
@@ -2559,7 +2630,7 @@
           <p:cNvPr id="3" name="Title">
             <a:extLst xmlns:a="http://schemas.openxmlformats.org/drawingml/2006/main">
               <a:ext uri="{FF2B5EF4-FFF2-40B4-BE49-F238E27FC236}">
-                <a16:creationId xmlns:a16="http://schemas.microsoft.com/office/drawing/2014/main" id="{AA0E9EA8-E6A6-4FE3-953F-4C022741F097}"/>
+                <a16:creationId xmlns:a16="http://schemas.microsoft.com/office/drawing/2014/main" id="{1497F6E1-6C50-4F5F-9F3E-540CD62CDA02}"/>
               </a:ext>
             </a:extLst>
           </p:cNvPr>
@@ -2788,7 +2859,7 @@
           <p:cNvPr id="2" name="Body">
             <a:extLst xmlns:a="http://schemas.openxmlformats.org/drawingml/2006/main">
               <a:ext uri="{FF2B5EF4-FFF2-40B4-BE49-F238E27FC236}">
-                <a16:creationId xmlns:a16="http://schemas.microsoft.com/office/drawing/2014/main" id="{4F95C5DC-B33C-4DDC-80FA-EFF7F4378B6D}"/>
+                <a16:creationId xmlns:a16="http://schemas.microsoft.com/office/drawing/2014/main" id="{0E1E696E-6DBF-4D7F-8BC7-1124564FF638}"/>
               </a:ext>
             </a:extLst>
           </p:cNvPr>
@@ -3034,7 +3105,7 @@
           <p:cNvPr id="4" name="Title">
             <a:extLst xmlns:a="http://schemas.openxmlformats.org/drawingml/2006/main">
               <a:ext uri="{FF2B5EF4-FFF2-40B4-BE49-F238E27FC236}">
-                <a16:creationId xmlns:a16="http://schemas.microsoft.com/office/drawing/2014/main" id="{232D67FB-13FF-4119-9F65-B1709F828939}"/>
+                <a16:creationId xmlns:a16="http://schemas.microsoft.com/office/drawing/2014/main" id="{F6A0DF5B-3226-4237-86EC-3ACBE488EDA7}"/>
               </a:ext>
             </a:extLst>
           </p:cNvPr>
@@ -3263,7 +3334,7 @@
           <p:cNvPr id="2" name="Left column">
             <a:extLst xmlns:a="http://schemas.openxmlformats.org/drawingml/2006/main">
               <a:ext uri="{FF2B5EF4-FFF2-40B4-BE49-F238E27FC236}">
-                <a16:creationId xmlns:a16="http://schemas.microsoft.com/office/drawing/2014/main" id="{8370B4C8-032A-4C8E-A9E3-FC71B1B26C0D}"/>
+                <a16:creationId xmlns:a16="http://schemas.microsoft.com/office/drawing/2014/main" id="{8A75B17F-5081-469F-96CD-3CD64403A81C}"/>
               </a:ext>
             </a:extLst>
           </p:cNvPr>
@@ -3492,7 +3563,7 @@
           <p:cNvPr id="3" name="Right column">
             <a:extLst xmlns:a="http://schemas.openxmlformats.org/drawingml/2006/main">
               <a:ext uri="{FF2B5EF4-FFF2-40B4-BE49-F238E27FC236}">
-                <a16:creationId xmlns:a16="http://schemas.microsoft.com/office/drawing/2014/main" id="{ECFBD221-BEB9-4569-99D5-D118459BEF34}"/>
+                <a16:creationId xmlns:a16="http://schemas.microsoft.com/office/drawing/2014/main" id="{AB02F836-4294-4117-9A31-2F9025D40C18}"/>
               </a:ext>
             </a:extLst>
           </p:cNvPr>
@@ -3738,7 +3809,7 @@
           <p:cNvPr id="3" name="Title">
             <a:extLst xmlns:a="http://schemas.openxmlformats.org/drawingml/2006/main">
               <a:ext uri="{FF2B5EF4-FFF2-40B4-BE49-F238E27FC236}">
-                <a16:creationId xmlns:a16="http://schemas.microsoft.com/office/drawing/2014/main" id="{AFA965A5-CB9E-41AC-A69A-8FC73C04DEE1}"/>
+                <a16:creationId xmlns:a16="http://schemas.microsoft.com/office/drawing/2014/main" id="{8DC2002E-9CA6-4FFB-96B7-235DB24A0DC6}"/>
               </a:ext>
             </a:extLst>
           </p:cNvPr>
@@ -3967,7 +4038,7 @@
           <p:cNvPr id="2" name="Left column">
             <a:extLst xmlns:a="http://schemas.openxmlformats.org/drawingml/2006/main">
               <a:ext uri="{FF2B5EF4-FFF2-40B4-BE49-F238E27FC236}">
-                <a16:creationId xmlns:a16="http://schemas.microsoft.com/office/drawing/2014/main" id="{D7040A7A-011D-4516-8D8C-5ECDD4550546}"/>
+                <a16:creationId xmlns:a16="http://schemas.microsoft.com/office/drawing/2014/main" id="{9549474A-2CD2-4F03-972E-79DCF744132D}"/>
               </a:ext>
             </a:extLst>
           </p:cNvPr>
@@ -4234,12 +4305,12 @@
   </p:cSld>
   <p:clrMap bg1="lt1" tx1="dk1" bg2="lt2" tx2="dk2" accent1="accent1" accent2="accent2" accent3="accent3" accent4="accent4" accent5="accent5" accent6="accent6" hlink="hlink" folHlink="folHlink"/>
   <p:sldLayoutIdLst>
-    <p:sldLayoutId xmlns:r="http://schemas.openxmlformats.org/officeDocument/2006/relationships" id="2147483649" r:id="R431b620912b24883"/>
-    <p:sldLayoutId xmlns:r="http://schemas.openxmlformats.org/officeDocument/2006/relationships" id="2147483650" r:id="R4fc9d416ecd148da"/>
-    <p:sldLayoutId xmlns:r="http://schemas.openxmlformats.org/officeDocument/2006/relationships" id="2147483651" r:id="Ra8396d1f4dec450c"/>
-    <p:sldLayoutId xmlns:r="http://schemas.openxmlformats.org/officeDocument/2006/relationships" id="2147483652" r:id="R3caf3dd91a27420f"/>
-    <p:sldLayoutId xmlns:r="http://schemas.openxmlformats.org/officeDocument/2006/relationships" id="2147483653" r:id="R3faa9439bf9d405d"/>
-    <p:sldLayoutId xmlns:r="http://schemas.openxmlformats.org/officeDocument/2006/relationships" id="2147483654" r:id="Rb4f3798a4ae94c85"/>
+    <p:sldLayoutId xmlns:r="http://schemas.openxmlformats.org/officeDocument/2006/relationships" id="2147483649" r:id="R6a57324cc267414c"/>
+    <p:sldLayoutId xmlns:r="http://schemas.openxmlformats.org/officeDocument/2006/relationships" id="2147483650" r:id="R7294ae0d36c541b8"/>
+    <p:sldLayoutId xmlns:r="http://schemas.openxmlformats.org/officeDocument/2006/relationships" id="2147483651" r:id="Rac6f97a283214115"/>
+    <p:sldLayoutId xmlns:r="http://schemas.openxmlformats.org/officeDocument/2006/relationships" id="2147483652" r:id="R1b8c0ec805bb4537"/>
+    <p:sldLayoutId xmlns:r="http://schemas.openxmlformats.org/officeDocument/2006/relationships" id="2147483653" r:id="Rfb21e096b67448e1"/>
+    <p:sldLayoutId xmlns:r="http://schemas.openxmlformats.org/officeDocument/2006/relationships" id="2147483654" r:id="R9b5c923640db4702"/>
   </p:sldLayoutIdLst>
   <p:txStyles>
     <p:titleStyle>
@@ -4790,7 +4861,7 @@
           <p:cNvPr id="7" name="">
             <a:extLst xmlns:a="http://schemas.openxmlformats.org/drawingml/2006/main">
               <a:ext uri="{FF2B5EF4-FFF2-40B4-BE49-F238E27FC236}">
-                <a16:creationId xmlns:a16="http://schemas.microsoft.com/office/drawing/2014/main" id="{D9586753-21E6-4D3D-AF4B-E7470D3070C8}"/>
+                <a16:creationId xmlns:a16="http://schemas.microsoft.com/office/drawing/2014/main" id="{3988E129-4D51-4095-8A98-7C599745ED3A}"/>
               </a:ext>
             </a:extLst>
           </p:cNvPr>
@@ -4946,7 +5017,7 @@
           <p:cNvPr id="2" name="">
             <a:extLst xmlns:a="http://schemas.openxmlformats.org/drawingml/2006/main">
               <a:ext uri="{FF2B5EF4-FFF2-40B4-BE49-F238E27FC236}">
-                <a16:creationId xmlns:a16="http://schemas.microsoft.com/office/drawing/2014/main" id="{F270C8C2-4AC4-408C-8561-B2230F507BF6}"/>
+                <a16:creationId xmlns:a16="http://schemas.microsoft.com/office/drawing/2014/main" id="{E4C2F775-7B71-45BE-BCA3-D9595D9E8810}"/>
               </a:ext>
             </a:extLst>
           </p:cNvPr>
@@ -5102,7 +5173,7 @@
           <p:cNvPr id="3" name="">
             <a:extLst xmlns:a="http://schemas.openxmlformats.org/drawingml/2006/main">
               <a:ext uri="{FF2B5EF4-FFF2-40B4-BE49-F238E27FC236}">
-                <a16:creationId xmlns:a16="http://schemas.microsoft.com/office/drawing/2014/main" id="{0219DA60-429D-4610-874E-DA3184D2B25B}"/>
+                <a16:creationId xmlns:a16="http://schemas.microsoft.com/office/drawing/2014/main" id="{D627E5B5-09D5-4EB2-BF7F-F11430E6FE43}"/>
               </a:ext>
             </a:extLst>
           </p:cNvPr>
@@ -5258,7 +5329,7 @@
           <p:cNvPr id="4" name="">
             <a:extLst xmlns:a="http://schemas.openxmlformats.org/drawingml/2006/main">
               <a:ext uri="{FF2B5EF4-FFF2-40B4-BE49-F238E27FC236}">
-                <a16:creationId xmlns:a16="http://schemas.microsoft.com/office/drawing/2014/main" id="{7FFEDDEC-212A-4798-8B22-76A1E554E2D6}"/>
+                <a16:creationId xmlns:a16="http://schemas.microsoft.com/office/drawing/2014/main" id="{4F0E0282-27CA-44B6-93E9-4B5BB46DFA7C}"/>
               </a:ext>
             </a:extLst>
           </p:cNvPr>
@@ -5414,7 +5485,7 @@
           <p:cNvPr id="5" name="">
             <a:extLst xmlns:a="http://schemas.openxmlformats.org/drawingml/2006/main">
               <a:ext uri="{FF2B5EF4-FFF2-40B4-BE49-F238E27FC236}">
-                <a16:creationId xmlns:a16="http://schemas.microsoft.com/office/drawing/2014/main" id="{A3878661-93CA-49F5-8714-A9A5C49F22D1}"/>
+                <a16:creationId xmlns:a16="http://schemas.microsoft.com/office/drawing/2014/main" id="{3C54C9C3-1DB8-424B-AD12-516E586C709A}"/>
               </a:ext>
             </a:extLst>
           </p:cNvPr>
@@ -5570,7 +5641,7 @@
           <p:cNvPr id="6" name="">
             <a:extLst xmlns:a="http://schemas.openxmlformats.org/drawingml/2006/main">
               <a:ext uri="{FF2B5EF4-FFF2-40B4-BE49-F238E27FC236}">
-                <a16:creationId xmlns:a16="http://schemas.microsoft.com/office/drawing/2014/main" id="{FD3E68A8-B2F6-4313-992D-9CC010E3858D}"/>
+                <a16:creationId xmlns:a16="http://schemas.microsoft.com/office/drawing/2014/main" id="{44146816-86F9-4ED8-9840-705584D1E6A1}"/>
               </a:ext>
             </a:extLst>
           </p:cNvPr>
@@ -5724,7 +5795,7 @@
     </p:spTree>
     <p:extLst>
       <p:ext uri="{BB962C8B-B14F-4D97-AF65-F5344CB8AC3E}">
-        <p14:creationId xmlns:p14="http://schemas.microsoft.com/office/powerpoint/2010/main" val="264838298"/>
+        <p14:creationId xmlns:p14="http://schemas.microsoft.com/office/powerpoint/2010/main" val="938715336"/>
       </p:ext>
     </p:extLst>
   </p:cSld>
@@ -5755,7 +5826,7 @@
           <p:cNvPr id="5" name="">
             <a:extLst xmlns:a="http://schemas.openxmlformats.org/drawingml/2006/main">
               <a:ext uri="{FF2B5EF4-FFF2-40B4-BE49-F238E27FC236}">
-                <a16:creationId xmlns:a16="http://schemas.microsoft.com/office/drawing/2014/main" id="{B9909A45-8CDF-4BCB-8953-3C6FA85F1E72}"/>
+                <a16:creationId xmlns:a16="http://schemas.microsoft.com/office/drawing/2014/main" id="{8348AA37-F436-4552-87C7-4DE5B9A73BA8}"/>
               </a:ext>
             </a:extLst>
           </p:cNvPr>
@@ -5911,7 +5982,7 @@
           <p:cNvPr id="2" name="">
             <a:extLst xmlns:a="http://schemas.openxmlformats.org/drawingml/2006/main">
               <a:ext uri="{FF2B5EF4-FFF2-40B4-BE49-F238E27FC236}">
-                <a16:creationId xmlns:a16="http://schemas.microsoft.com/office/drawing/2014/main" id="{B27AF26C-EFBB-4F16-B753-C916C0C88D75}"/>
+                <a16:creationId xmlns:a16="http://schemas.microsoft.com/office/drawing/2014/main" id="{175B7E42-ED84-4F33-894D-54F20A00E111}"/>
               </a:ext>
             </a:extLst>
           </p:cNvPr>
@@ -6067,7 +6138,7 @@
           <p:cNvPr id="3" name="">
             <a:extLst xmlns:a="http://schemas.openxmlformats.org/drawingml/2006/main">
               <a:ext uri="{FF2B5EF4-FFF2-40B4-BE49-F238E27FC236}">
-                <a16:creationId xmlns:a16="http://schemas.microsoft.com/office/drawing/2014/main" id="{C39D8455-A410-41E6-BA9C-9C177FE74F7B}"/>
+                <a16:creationId xmlns:a16="http://schemas.microsoft.com/office/drawing/2014/main" id="{49007DD7-8BA4-43F3-BC13-6DA05820DAE7}"/>
               </a:ext>
             </a:extLst>
           </p:cNvPr>
@@ -7008,7 +7079,7 @@
           <p:cNvPr id="4" name="">
             <a:extLst xmlns:a="http://schemas.openxmlformats.org/drawingml/2006/main">
               <a:ext uri="{FF2B5EF4-FFF2-40B4-BE49-F238E27FC236}">
-                <a16:creationId xmlns:a16="http://schemas.microsoft.com/office/drawing/2014/main" id="{66443F40-04F2-4519-8C1C-362CB34EAF92}"/>
+                <a16:creationId xmlns:a16="http://schemas.microsoft.com/office/drawing/2014/main" id="{843A7D43-F445-4F8F-ACD9-70288BC85A53}"/>
               </a:ext>
             </a:extLst>
           </p:cNvPr>
@@ -7162,7 +7233,7 @@
     </p:spTree>
     <p:extLst>
       <p:ext uri="{BB962C8B-B14F-4D97-AF65-F5344CB8AC3E}">
-        <p14:creationId xmlns:p14="http://schemas.microsoft.com/office/powerpoint/2010/main" val="580191467"/>
+        <p14:creationId xmlns:p14="http://schemas.microsoft.com/office/powerpoint/2010/main" val="1344973518"/>
       </p:ext>
     </p:extLst>
   </p:cSld>
@@ -7193,7 +7264,7 @@
           <p:cNvPr id="5" name="">
             <a:extLst xmlns:a="http://schemas.openxmlformats.org/drawingml/2006/main">
               <a:ext uri="{FF2B5EF4-FFF2-40B4-BE49-F238E27FC236}">
-                <a16:creationId xmlns:a16="http://schemas.microsoft.com/office/drawing/2014/main" id="{AFE5CFF7-23D4-4C79-AE86-4A80951D3F9E}"/>
+                <a16:creationId xmlns:a16="http://schemas.microsoft.com/office/drawing/2014/main" id="{5ED4F7C2-9B67-4FA2-A8EA-197AA907D6A2}"/>
               </a:ext>
             </a:extLst>
           </p:cNvPr>
@@ -7349,7 +7420,7 @@
           <p:cNvPr id="2" name="">
             <a:extLst xmlns:a="http://schemas.openxmlformats.org/drawingml/2006/main">
               <a:ext uri="{FF2B5EF4-FFF2-40B4-BE49-F238E27FC236}">
-                <a16:creationId xmlns:a16="http://schemas.microsoft.com/office/drawing/2014/main" id="{015EDA80-284C-43BD-A9AB-C4BFE35DE6D2}"/>
+                <a16:creationId xmlns:a16="http://schemas.microsoft.com/office/drawing/2014/main" id="{9F0CC611-856D-49F7-9EC0-ADA982D2F02C}"/>
               </a:ext>
             </a:extLst>
           </p:cNvPr>
@@ -7505,7 +7576,7 @@
           <p:cNvPr id="3" name="">
             <a:extLst xmlns:a="http://schemas.openxmlformats.org/drawingml/2006/main">
               <a:ext uri="{FF2B5EF4-FFF2-40B4-BE49-F238E27FC236}">
-                <a16:creationId xmlns:a16="http://schemas.microsoft.com/office/drawing/2014/main" id="{DBEC1A0F-E59D-428A-B6C0-5B7D6B1BA2D5}"/>
+                <a16:creationId xmlns:a16="http://schemas.microsoft.com/office/drawing/2014/main" id="{6D65A0DD-DD67-426C-8B5D-26E7EF6F8484}"/>
               </a:ext>
             </a:extLst>
           </p:cNvPr>
@@ -8446,7 +8517,7 @@
           <p:cNvPr id="4" name="">
             <a:extLst xmlns:a="http://schemas.openxmlformats.org/drawingml/2006/main">
               <a:ext uri="{FF2B5EF4-FFF2-40B4-BE49-F238E27FC236}">
-                <a16:creationId xmlns:a16="http://schemas.microsoft.com/office/drawing/2014/main" id="{56062EA8-AAD4-4A8E-A6E4-653D3CA85FD3}"/>
+                <a16:creationId xmlns:a16="http://schemas.microsoft.com/office/drawing/2014/main" id="{3A85CD30-4B3B-434A-A2CB-74A5D8769A47}"/>
               </a:ext>
             </a:extLst>
           </p:cNvPr>
@@ -8600,7 +8671,7 @@
     </p:spTree>
     <p:extLst>
       <p:ext uri="{BB962C8B-B14F-4D97-AF65-F5344CB8AC3E}">
-        <p14:creationId xmlns:p14="http://schemas.microsoft.com/office/powerpoint/2010/main" val="2212100"/>
+        <p14:creationId xmlns:p14="http://schemas.microsoft.com/office/powerpoint/2010/main" val="192318932"/>
       </p:ext>
     </p:extLst>
   </p:cSld>
@@ -8631,7 +8702,7 @@
           <p:cNvPr id="5" name="">
             <a:extLst xmlns:a="http://schemas.openxmlformats.org/drawingml/2006/main">
               <a:ext uri="{FF2B5EF4-FFF2-40B4-BE49-F238E27FC236}">
-                <a16:creationId xmlns:a16="http://schemas.microsoft.com/office/drawing/2014/main" id="{153B0F0C-5F6F-4FE0-8922-A807AFE88672}"/>
+                <a16:creationId xmlns:a16="http://schemas.microsoft.com/office/drawing/2014/main" id="{8578EEF7-4876-441E-83FF-5724709B79B6}"/>
               </a:ext>
             </a:extLst>
           </p:cNvPr>
@@ -8787,7 +8858,7 @@
           <p:cNvPr id="2" name="">
             <a:extLst xmlns:a="http://schemas.openxmlformats.org/drawingml/2006/main">
               <a:ext uri="{FF2B5EF4-FFF2-40B4-BE49-F238E27FC236}">
-                <a16:creationId xmlns:a16="http://schemas.microsoft.com/office/drawing/2014/main" id="{61AD6A80-A640-4F96-AA9F-BDF492C6B6D7}"/>
+                <a16:creationId xmlns:a16="http://schemas.microsoft.com/office/drawing/2014/main" id="{B4389E0B-39C2-4BDD-B3D7-302E825E9528}"/>
               </a:ext>
             </a:extLst>
           </p:cNvPr>
@@ -8943,7 +9014,7 @@
           <p:cNvPr id="3" name="">
             <a:extLst xmlns:a="http://schemas.openxmlformats.org/drawingml/2006/main">
               <a:ext uri="{FF2B5EF4-FFF2-40B4-BE49-F238E27FC236}">
-                <a16:creationId xmlns:a16="http://schemas.microsoft.com/office/drawing/2014/main" id="{CB8E4700-B51A-462C-9062-1F90B844CFAD}"/>
+                <a16:creationId xmlns:a16="http://schemas.microsoft.com/office/drawing/2014/main" id="{589BB60F-AA0A-4CDE-A174-836712093753}"/>
               </a:ext>
             </a:extLst>
           </p:cNvPr>
@@ -9884,7 +9955,7 @@
           <p:cNvPr id="4" name="">
             <a:extLst xmlns:a="http://schemas.openxmlformats.org/drawingml/2006/main">
               <a:ext uri="{FF2B5EF4-FFF2-40B4-BE49-F238E27FC236}">
-                <a16:creationId xmlns:a16="http://schemas.microsoft.com/office/drawing/2014/main" id="{1C289156-810B-4082-972E-7CCBDD44E5FB}"/>
+                <a16:creationId xmlns:a16="http://schemas.microsoft.com/office/drawing/2014/main" id="{D3207E45-C7BB-480A-84E9-D48F59B397DA}"/>
               </a:ext>
             </a:extLst>
           </p:cNvPr>
@@ -10038,7 +10109,7 @@
     </p:spTree>
     <p:extLst>
       <p:ext uri="{BB962C8B-B14F-4D97-AF65-F5344CB8AC3E}">
-        <p14:creationId xmlns:p14="http://schemas.microsoft.com/office/powerpoint/2010/main" val="2095842235"/>
+        <p14:creationId xmlns:p14="http://schemas.microsoft.com/office/powerpoint/2010/main" val="1985599065"/>
       </p:ext>
     </p:extLst>
   </p:cSld>
@@ -10069,7 +10140,7 @@
           <p:cNvPr id="8" name="">
             <a:extLst xmlns:a="http://schemas.openxmlformats.org/drawingml/2006/main">
               <a:ext uri="{FF2B5EF4-FFF2-40B4-BE49-F238E27FC236}">
-                <a16:creationId xmlns:a16="http://schemas.microsoft.com/office/drawing/2014/main" id="{7C025EA1-0656-430F-BEA1-BB79391363D8}"/>
+                <a16:creationId xmlns:a16="http://schemas.microsoft.com/office/drawing/2014/main" id="{B90DBC38-612D-4181-9E2B-7F8B562EFF74}"/>
               </a:ext>
             </a:extLst>
           </p:cNvPr>
@@ -10225,7 +10296,7 @@
           <p:cNvPr id="2" name="">
             <a:extLst xmlns:a="http://schemas.openxmlformats.org/drawingml/2006/main">
               <a:ext uri="{FF2B5EF4-FFF2-40B4-BE49-F238E27FC236}">
-                <a16:creationId xmlns:a16="http://schemas.microsoft.com/office/drawing/2014/main" id="{4B151199-0C65-4961-96D8-956A09DC1057}"/>
+                <a16:creationId xmlns:a16="http://schemas.microsoft.com/office/drawing/2014/main" id="{2DAF0BDA-52D6-4A81-A8B6-69CB036881CF}"/>
               </a:ext>
             </a:extLst>
           </p:cNvPr>
@@ -10381,7 +10452,7 @@
           <p:cNvPr id="3" name="">
             <a:extLst xmlns:a="http://schemas.openxmlformats.org/drawingml/2006/main">
               <a:ext uri="{FF2B5EF4-FFF2-40B4-BE49-F238E27FC236}">
-                <a16:creationId xmlns:a16="http://schemas.microsoft.com/office/drawing/2014/main" id="{A484B111-108F-469F-86ED-F22AA55AD9E9}"/>
+                <a16:creationId xmlns:a16="http://schemas.microsoft.com/office/drawing/2014/main" id="{79AB39C6-7BAD-40B7-B843-9F7B7984899F}"/>
               </a:ext>
             </a:extLst>
           </p:cNvPr>
@@ -10537,7 +10608,7 @@
           <p:cNvPr id="4" name="">
             <a:extLst xmlns:a="http://schemas.openxmlformats.org/drawingml/2006/main">
               <a:ext uri="{FF2B5EF4-FFF2-40B4-BE49-F238E27FC236}">
-                <a16:creationId xmlns:a16="http://schemas.microsoft.com/office/drawing/2014/main" id="{ECDC96E0-4F04-414F-A194-A9AE2F554043}"/>
+                <a16:creationId xmlns:a16="http://schemas.microsoft.com/office/drawing/2014/main" id="{4129CD82-9750-4BF0-B922-2DF3AE0BF324}"/>
               </a:ext>
             </a:extLst>
           </p:cNvPr>
@@ -10693,7 +10764,7 @@
           <p:cNvPr id="5" name="">
             <a:extLst xmlns:a="http://schemas.openxmlformats.org/drawingml/2006/main">
               <a:ext uri="{FF2B5EF4-FFF2-40B4-BE49-F238E27FC236}">
-                <a16:creationId xmlns:a16="http://schemas.microsoft.com/office/drawing/2014/main" id="{95F5C0EF-A99C-45BC-87C2-B97E3E511658}"/>
+                <a16:creationId xmlns:a16="http://schemas.microsoft.com/office/drawing/2014/main" id="{7D375374-8569-4C35-BCB5-451ABE62A712}"/>
               </a:ext>
             </a:extLst>
           </p:cNvPr>
@@ -10849,7 +10920,7 @@
           <p:cNvPr id="6" name="">
             <a:extLst xmlns:a="http://schemas.openxmlformats.org/drawingml/2006/main">
               <a:ext uri="{FF2B5EF4-FFF2-40B4-BE49-F238E27FC236}">
-                <a16:creationId xmlns:a16="http://schemas.microsoft.com/office/drawing/2014/main" id="{1115A65E-4FB5-4AB4-B088-4595611F11DE}"/>
+                <a16:creationId xmlns:a16="http://schemas.microsoft.com/office/drawing/2014/main" id="{B4625457-75DA-45B5-8A00-11B43CCD45DE}"/>
               </a:ext>
             </a:extLst>
           </p:cNvPr>
@@ -11005,7 +11076,7 @@
           <p:cNvPr id="7" name="">
             <a:extLst xmlns:a="http://schemas.openxmlformats.org/drawingml/2006/main">
               <a:ext uri="{FF2B5EF4-FFF2-40B4-BE49-F238E27FC236}">
-                <a16:creationId xmlns:a16="http://schemas.microsoft.com/office/drawing/2014/main" id="{CC1A842D-ED59-4933-AF0E-7349E5AA57BB}"/>
+                <a16:creationId xmlns:a16="http://schemas.microsoft.com/office/drawing/2014/main" id="{7CD382B9-9D9A-4B8D-ABB8-7245EC5AA93D}"/>
               </a:ext>
             </a:extLst>
           </p:cNvPr>
@@ -11159,7 +11230,7 @@
     </p:spTree>
     <p:extLst>
       <p:ext uri="{BB962C8B-B14F-4D97-AF65-F5344CB8AC3E}">
-        <p14:creationId xmlns:p14="http://schemas.microsoft.com/office/powerpoint/2010/main" val="307789533"/>
+        <p14:creationId xmlns:p14="http://schemas.microsoft.com/office/powerpoint/2010/main" val="1630714935"/>
       </p:ext>
     </p:extLst>
   </p:cSld>
@@ -11190,7 +11261,7 @@
           <p:cNvPr id="8" name="">
             <a:extLst xmlns:a="http://schemas.openxmlformats.org/drawingml/2006/main">
               <a:ext uri="{FF2B5EF4-FFF2-40B4-BE49-F238E27FC236}">
-                <a16:creationId xmlns:a16="http://schemas.microsoft.com/office/drawing/2014/main" id="{11937E64-A87D-4F01-BAB2-1E289852F337}"/>
+                <a16:creationId xmlns:a16="http://schemas.microsoft.com/office/drawing/2014/main" id="{91E5C76E-D860-41B0-A64D-05ECA2B9F5E9}"/>
               </a:ext>
             </a:extLst>
           </p:cNvPr>
@@ -11346,7 +11417,7 @@
           <p:cNvPr id="2" name="">
             <a:extLst xmlns:a="http://schemas.openxmlformats.org/drawingml/2006/main">
               <a:ext uri="{FF2B5EF4-FFF2-40B4-BE49-F238E27FC236}">
-                <a16:creationId xmlns:a16="http://schemas.microsoft.com/office/drawing/2014/main" id="{EEF4E267-9289-487E-A80E-5E5B8F61035A}"/>
+                <a16:creationId xmlns:a16="http://schemas.microsoft.com/office/drawing/2014/main" id="{571F4764-22F7-4070-A725-2F77F5B461D8}"/>
               </a:ext>
             </a:extLst>
           </p:cNvPr>
@@ -11502,7 +11573,7 @@
           <p:cNvPr id="3" name="">
             <a:extLst xmlns:a="http://schemas.openxmlformats.org/drawingml/2006/main">
               <a:ext uri="{FF2B5EF4-FFF2-40B4-BE49-F238E27FC236}">
-                <a16:creationId xmlns:a16="http://schemas.microsoft.com/office/drawing/2014/main" id="{678CC568-D813-4733-983F-D96A07508C0C}"/>
+                <a16:creationId xmlns:a16="http://schemas.microsoft.com/office/drawing/2014/main" id="{39419659-A82A-4F42-A63E-D6B214E2E71B}"/>
               </a:ext>
             </a:extLst>
           </p:cNvPr>
@@ -11658,7 +11729,7 @@
           <p:cNvPr id="4" name="">
             <a:extLst xmlns:a="http://schemas.openxmlformats.org/drawingml/2006/main">
               <a:ext uri="{FF2B5EF4-FFF2-40B4-BE49-F238E27FC236}">
-                <a16:creationId xmlns:a16="http://schemas.microsoft.com/office/drawing/2014/main" id="{D45E85C1-2862-4E50-A3AB-A67BD52E339E}"/>
+                <a16:creationId xmlns:a16="http://schemas.microsoft.com/office/drawing/2014/main" id="{1EEEC69A-4A42-4B6B-A1D3-566B950850E4}"/>
               </a:ext>
             </a:extLst>
           </p:cNvPr>
@@ -11814,7 +11885,7 @@
           <p:cNvPr id="5" name="">
             <a:extLst xmlns:a="http://schemas.openxmlformats.org/drawingml/2006/main">
               <a:ext uri="{FF2B5EF4-FFF2-40B4-BE49-F238E27FC236}">
-                <a16:creationId xmlns:a16="http://schemas.microsoft.com/office/drawing/2014/main" id="{BEC78A00-2A30-48BD-A587-E137A5FDDC28}"/>
+                <a16:creationId xmlns:a16="http://schemas.microsoft.com/office/drawing/2014/main" id="{98E80A7E-E6F4-454F-8024-3C7D271EBE41}"/>
               </a:ext>
             </a:extLst>
           </p:cNvPr>
@@ -11970,7 +12041,7 @@
           <p:cNvPr id="6" name="">
             <a:extLst xmlns:a="http://schemas.openxmlformats.org/drawingml/2006/main">
               <a:ext uri="{FF2B5EF4-FFF2-40B4-BE49-F238E27FC236}">
-                <a16:creationId xmlns:a16="http://schemas.microsoft.com/office/drawing/2014/main" id="{0802AD0E-4CB9-42DF-863C-56CCDE2D6326}"/>
+                <a16:creationId xmlns:a16="http://schemas.microsoft.com/office/drawing/2014/main" id="{DB088A1A-8B11-4877-B70A-627DFBD0EE63}"/>
               </a:ext>
             </a:extLst>
           </p:cNvPr>
@@ -12126,7 +12197,7 @@
           <p:cNvPr id="7" name="">
             <a:extLst xmlns:a="http://schemas.openxmlformats.org/drawingml/2006/main">
               <a:ext uri="{FF2B5EF4-FFF2-40B4-BE49-F238E27FC236}">
-                <a16:creationId xmlns:a16="http://schemas.microsoft.com/office/drawing/2014/main" id="{A14F3CD8-E2C8-43DB-8236-B2A08D10F731}"/>
+                <a16:creationId xmlns:a16="http://schemas.microsoft.com/office/drawing/2014/main" id="{EF6D3C5C-C383-4E17-86C9-0A07D4FD07FB}"/>
               </a:ext>
             </a:extLst>
           </p:cNvPr>
@@ -12280,7 +12351,7 @@
     </p:spTree>
     <p:extLst>
       <p:ext uri="{BB962C8B-B14F-4D97-AF65-F5344CB8AC3E}">
-        <p14:creationId xmlns:p14="http://schemas.microsoft.com/office/powerpoint/2010/main" val="1888272187"/>
+        <p14:creationId xmlns:p14="http://schemas.microsoft.com/office/powerpoint/2010/main" val="572899434"/>
       </p:ext>
     </p:extLst>
   </p:cSld>
@@ -12311,7 +12382,7 @@
           <p:cNvPr id="8" name="">
             <a:extLst xmlns:a="http://schemas.openxmlformats.org/drawingml/2006/main">
               <a:ext uri="{FF2B5EF4-FFF2-40B4-BE49-F238E27FC236}">
-                <a16:creationId xmlns:a16="http://schemas.microsoft.com/office/drawing/2014/main" id="{945EB002-62A6-4855-B896-D54CAF0F2A06}"/>
+                <a16:creationId xmlns:a16="http://schemas.microsoft.com/office/drawing/2014/main" id="{5A454E1F-A3D5-403B-9F63-6EF081A225DB}"/>
               </a:ext>
             </a:extLst>
           </p:cNvPr>
@@ -12457,7 +12528,7 @@
                 <a:ea typeface="Arial"/>
                 <a:cs typeface="Arial"/>
               </a:rPr>
-              <a:t>What the clinician view shows</a:t>
+              <a:t>Frozen synthetic robustness extension</a:t>
             </a:r>
           </a:p>
         </p:txBody>
@@ -12467,7 +12538,7 @@
           <p:cNvPr id="2" name="">
             <a:extLst xmlns:a="http://schemas.openxmlformats.org/drawingml/2006/main">
               <a:ext uri="{FF2B5EF4-FFF2-40B4-BE49-F238E27FC236}">
-                <a16:creationId xmlns:a16="http://schemas.microsoft.com/office/drawing/2014/main" id="{4FD0418F-7987-4147-8E36-22F45FA78682}"/>
+                <a16:creationId xmlns:a16="http://schemas.microsoft.com/office/drawing/2014/main" id="{DFD9C850-40C3-477A-AE6D-1E91709A3874}"/>
               </a:ext>
             </a:extLst>
           </p:cNvPr>
@@ -12613,7 +12684,7 @@
                 <a:ea typeface="Arial"/>
                 <a:cs typeface="Arial"/>
               </a:rPr>
-              <a:t>Decision-support research display</a:t>
+              <a:t>Fixed Tier-2 day-18 model and threshold under predeclared perturbations</a:t>
             </a:r>
           </a:p>
         </p:txBody>
@@ -12623,7 +12694,7 @@
           <p:cNvPr id="3" name="">
             <a:extLst xmlns:a="http://schemas.openxmlformats.org/drawingml/2006/main">
               <a:ext uri="{FF2B5EF4-FFF2-40B4-BE49-F238E27FC236}">
-                <a16:creationId xmlns:a16="http://schemas.microsoft.com/office/drawing/2014/main" id="{C7D73A5D-0985-4EB3-94EE-4A8E9141B9D3}"/>
+                <a16:creationId xmlns:a16="http://schemas.microsoft.com/office/drawing/2014/main" id="{F880620C-7C1C-4301-BEE0-A7FB8B8A8AE2}"/>
               </a:ext>
             </a:extLst>
           </p:cNvPr>
@@ -12769,7 +12840,7 @@
                 <a:ea typeface="Arial"/>
                 <a:cs typeface="Arial"/>
               </a:rPr>
-              <a:t>Fitted probability beside its own validation threshold and held-out model evidence</a:t>
+              <a:t>At 60% additional forced missing temperature readings: AUROC 0.884, Brier 0.140, safety withholding 1.000</a:t>
             </a:r>
           </a:p>
         </p:txBody>
@@ -12779,7 +12850,7 @@
           <p:cNvPr id="4" name="">
             <a:extLst xmlns:a="http://schemas.openxmlformats.org/drawingml/2006/main">
               <a:ext uri="{FF2B5EF4-FFF2-40B4-BE49-F238E27FC236}">
-                <a16:creationId xmlns:a16="http://schemas.microsoft.com/office/drawing/2014/main" id="{0234BD02-084C-49AB-8B77-AB12DEF0CF1A}"/>
+                <a16:creationId xmlns:a16="http://schemas.microsoft.com/office/drawing/2014/main" id="{A668FABB-0108-4332-AED8-36AA7D9A2F05}"/>
               </a:ext>
             </a:extLst>
           </p:cNvPr>
@@ -12925,7 +12996,7 @@
                 <a:ea typeface="Arial"/>
                 <a:cs typeface="Arial"/>
               </a:rPr>
-              <a:t>Exact additive feature contributions and explicit imputation</a:t>
+              <a:t>At +0.01°C/day drift: AUROC 0.906, Brier 0.300</a:t>
             </a:r>
           </a:p>
         </p:txBody>
@@ -12935,7 +13006,7 @@
           <p:cNvPr id="5" name="">
             <a:extLst xmlns:a="http://schemas.openxmlformats.org/drawingml/2006/main">
               <a:ext uri="{FF2B5EF4-FFF2-40B4-BE49-F238E27FC236}">
-                <a16:creationId xmlns:a16="http://schemas.microsoft.com/office/drawing/2014/main" id="{CDBE144F-51E8-4E3A-9573-F5176FB15671}"/>
+                <a16:creationId xmlns:a16="http://schemas.microsoft.com/office/drawing/2014/main" id="{6EBBBA92-5145-4014-B431-FE860AE005BF}"/>
               </a:ext>
             </a:extLst>
           </p:cNvPr>
@@ -13081,7 +13152,7 @@
                 <a:ea typeface="Arial"/>
                 <a:cs typeface="Arial"/>
               </a:rPr>
-              <a:t>Heuristic day estimate and conditional, illustrative day band</a:t>
+              <a:t>At a +4-day generated timing shift on independent synthetic cohorts: AUROC 0.863, Brier 0.145</a:t>
             </a:r>
           </a:p>
         </p:txBody>
@@ -13091,7 +13162,7 @@
           <p:cNvPr id="6" name="">
             <a:extLst xmlns:a="http://schemas.openxmlformats.org/drawingml/2006/main">
               <a:ext uri="{FF2B5EF4-FFF2-40B4-BE49-F238E27FC236}">
-                <a16:creationId xmlns:a16="http://schemas.microsoft.com/office/drawing/2014/main" id="{63189A01-D4B9-4AE5-A459-FB1C0BFD2685}"/>
+                <a16:creationId xmlns:a16="http://schemas.microsoft.com/office/drawing/2014/main" id="{F61E8184-0E51-4D35-BC44-5ABBA2BFF89F}"/>
               </a:ext>
             </a:extLst>
           </p:cNvPr>
@@ -13237,7 +13308,7 @@
                 <a:ea typeface="Arial"/>
                 <a:cs typeface="Arial"/>
               </a:rPr>
-              <a:t>Data-quality ribbon and the reason for any withholding</a:t>
+              <a:t>These are simulator sensitivity tests, not device robustness or clinical validation.</a:t>
             </a:r>
           </a:p>
         </p:txBody>
@@ -13247,7 +13318,7 @@
           <p:cNvPr id="7" name="">
             <a:extLst xmlns:a="http://schemas.openxmlformats.org/drawingml/2006/main">
               <a:ext uri="{FF2B5EF4-FFF2-40B4-BE49-F238E27FC236}">
-                <a16:creationId xmlns:a16="http://schemas.microsoft.com/office/drawing/2014/main" id="{FF053A48-2CE7-47A6-8F38-804D81E9796E}"/>
+                <a16:creationId xmlns:a16="http://schemas.microsoft.com/office/drawing/2014/main" id="{D23E5EC0-7A5E-494A-A434-B54D40CCFC05}"/>
               </a:ext>
             </a:extLst>
           </p:cNvPr>
@@ -13401,7 +13472,7 @@
     </p:spTree>
     <p:extLst>
       <p:ext uri="{BB962C8B-B14F-4D97-AF65-F5344CB8AC3E}">
-        <p14:creationId xmlns:p14="http://schemas.microsoft.com/office/powerpoint/2010/main" val="897357230"/>
+        <p14:creationId xmlns:p14="http://schemas.microsoft.com/office/powerpoint/2010/main" val="1374095653"/>
       </p:ext>
     </p:extLst>
   </p:cSld>
@@ -13432,7 +13503,7 @@
           <p:cNvPr id="8" name="">
             <a:extLst xmlns:a="http://schemas.openxmlformats.org/drawingml/2006/main">
               <a:ext uri="{FF2B5EF4-FFF2-40B4-BE49-F238E27FC236}">
-                <a16:creationId xmlns:a16="http://schemas.microsoft.com/office/drawing/2014/main" id="{BAEA32E4-A858-4B34-9154-8B46FF12CFA1}"/>
+                <a16:creationId xmlns:a16="http://schemas.microsoft.com/office/drawing/2014/main" id="{EECDFFC5-019E-49B1-8010-4933C1CAF06D}"/>
               </a:ext>
             </a:extLst>
           </p:cNvPr>
@@ -13578,7 +13649,7 @@
                 <a:ea typeface="Arial"/>
                 <a:cs typeface="Arial"/>
               </a:rPr>
-              <a:t>Guardrails live</a:t>
+              <a:t>What the clinician view shows</a:t>
             </a:r>
           </a:p>
         </p:txBody>
@@ -13588,7 +13659,7 @@
           <p:cNvPr id="2" name="">
             <a:extLst xmlns:a="http://schemas.openxmlformats.org/drawingml/2006/main">
               <a:ext uri="{FF2B5EF4-FFF2-40B4-BE49-F238E27FC236}">
-                <a16:creationId xmlns:a16="http://schemas.microsoft.com/office/drawing/2014/main" id="{CBFC6036-9E26-43F1-85DC-2F0185402F42}"/>
+                <a16:creationId xmlns:a16="http://schemas.microsoft.com/office/drawing/2014/main" id="{F9ECBC8B-0221-42C2-90FC-93F7DAE73983}"/>
               </a:ext>
             </a:extLst>
           </p:cNvPr>
@@ -13734,7 +13805,7 @@
                 <a:ea typeface="Arial"/>
                 <a:cs typeface="Arial"/>
               </a:rPr>
-              <a:t>Missing safety information causes abstention</a:t>
+              <a:t>Decision-support research display</a:t>
             </a:r>
           </a:p>
         </p:txBody>
@@ -13744,7 +13815,7 @@
           <p:cNvPr id="3" name="">
             <a:extLst xmlns:a="http://schemas.openxmlformats.org/drawingml/2006/main">
               <a:ext uri="{FF2B5EF4-FFF2-40B4-BE49-F238E27FC236}">
-                <a16:creationId xmlns:a16="http://schemas.microsoft.com/office/drawing/2014/main" id="{DC794401-4048-4E25-8849-DEF40D7EA505}"/>
+                <a16:creationId xmlns:a16="http://schemas.microsoft.com/office/drawing/2014/main" id="{F8ADF42E-FC8A-413E-9769-C77D193C0905}"/>
               </a:ext>
             </a:extLst>
           </p:cNvPr>
@@ -13890,7 +13961,7 @@
                 <a:ea typeface="Arial"/>
                 <a:cs typeface="Arial"/>
               </a:rPr>
-              <a:t>Contraception, thyroid and prolactin flags, age and pregnancy-related states</a:t>
+              <a:t>Fitted probability beside its own validation threshold and held-out model evidence</a:t>
             </a:r>
           </a:p>
         </p:txBody>
@@ -13900,7 +13971,7 @@
           <p:cNvPr id="4" name="">
             <a:extLst xmlns:a="http://schemas.openxmlformats.org/drawingml/2006/main">
               <a:ext uri="{FF2B5EF4-FFF2-40B4-BE49-F238E27FC236}">
-                <a16:creationId xmlns:a16="http://schemas.microsoft.com/office/drawing/2014/main" id="{8CA8FA71-0BF3-4C75-961B-3B6ED69C76B4}"/>
+                <a16:creationId xmlns:a16="http://schemas.microsoft.com/office/drawing/2014/main" id="{4FB1D2E7-A888-4738-8615-166DC6ADA4E3}"/>
               </a:ext>
             </a:extLst>
           </p:cNvPr>
@@ -14046,7 +14117,7 @@
                 <a:ea typeface="Arial"/>
                 <a:cs typeface="Arial"/>
               </a:rPr>
-              <a:t>Early post-menarche, perimenopause and insufficient observed temperature</a:t>
+              <a:t>Exact additive feature contributions and explicit imputation</a:t>
             </a:r>
           </a:p>
         </p:txBody>
@@ -14056,7 +14127,7 @@
           <p:cNvPr id="5" name="">
             <a:extLst xmlns:a="http://schemas.openxmlformats.org/drawingml/2006/main">
               <a:ext uri="{FF2B5EF4-FFF2-40B4-BE49-F238E27FC236}">
-                <a16:creationId xmlns:a16="http://schemas.microsoft.com/office/drawing/2014/main" id="{2C2AA11F-8E35-47E0-AF55-3FEF61783BE7}"/>
+                <a16:creationId xmlns:a16="http://schemas.microsoft.com/office/drawing/2014/main" id="{20FB4BA8-71F9-4751-99D0-AE99BC0AB941}"/>
               </a:ext>
             </a:extLst>
           </p:cNvPr>
@@ -14202,7 +14273,7 @@
                 <a:ea typeface="Arial"/>
                 <a:cs typeface="Arial"/>
               </a:rPr>
-              <a:t>Withholding removes personal scores, intervals, explanations, sandbox outputs and alerts</a:t>
+              <a:t>Heuristic day estimate and conditional, illustrative day band</a:t>
             </a:r>
           </a:p>
         </p:txBody>
@@ -14212,7 +14283,7 @@
           <p:cNvPr id="6" name="">
             <a:extLst xmlns:a="http://schemas.openxmlformats.org/drawingml/2006/main">
               <a:ext uri="{FF2B5EF4-FFF2-40B4-BE49-F238E27FC236}">
-                <a16:creationId xmlns:a16="http://schemas.microsoft.com/office/drawing/2014/main" id="{85ED1FF3-84AD-4709-9954-DA553DDB696E}"/>
+                <a16:creationId xmlns:a16="http://schemas.microsoft.com/office/drawing/2014/main" id="{BCDAA4CC-0107-4785-9760-D259BA7341FB}"/>
               </a:ext>
             </a:extLst>
           </p:cNvPr>
@@ -14358,7 +14429,7 @@
                 <a:ea typeface="Arial"/>
                 <a:cs typeface="Arial"/>
               </a:rPr>
-              <a:t>The workflow is synthetic and its safety effectiveness has not been clinically evaluated</a:t>
+              <a:t>Data-quality ribbon and the reason for any withholding</a:t>
             </a:r>
           </a:p>
         </p:txBody>
@@ -14368,7 +14439,7 @@
           <p:cNvPr id="7" name="">
             <a:extLst xmlns:a="http://schemas.openxmlformats.org/drawingml/2006/main">
               <a:ext uri="{FF2B5EF4-FFF2-40B4-BE49-F238E27FC236}">
-                <a16:creationId xmlns:a16="http://schemas.microsoft.com/office/drawing/2014/main" id="{F1EE0F2B-1E69-4789-A79A-9414EE11E1C3}"/>
+                <a16:creationId xmlns:a16="http://schemas.microsoft.com/office/drawing/2014/main" id="{C2E28703-371E-443B-86C7-BF2BD3417E0C}"/>
               </a:ext>
             </a:extLst>
           </p:cNvPr>
@@ -14522,7 +14593,7 @@
     </p:spTree>
     <p:extLst>
       <p:ext uri="{BB962C8B-B14F-4D97-AF65-F5344CB8AC3E}">
-        <p14:creationId xmlns:p14="http://schemas.microsoft.com/office/powerpoint/2010/main" val="1788330719"/>
+        <p14:creationId xmlns:p14="http://schemas.microsoft.com/office/powerpoint/2010/main" val="1519758742"/>
       </p:ext>
     </p:extLst>
   </p:cSld>
@@ -14553,7 +14624,7 @@
           <p:cNvPr id="8" name="">
             <a:extLst xmlns:a="http://schemas.openxmlformats.org/drawingml/2006/main">
               <a:ext uri="{FF2B5EF4-FFF2-40B4-BE49-F238E27FC236}">
-                <a16:creationId xmlns:a16="http://schemas.microsoft.com/office/drawing/2014/main" id="{DA09ED37-3E00-432B-9384-D6701D6CA4F4}"/>
+                <a16:creationId xmlns:a16="http://schemas.microsoft.com/office/drawing/2014/main" id="{3C584D94-C290-41C0-9BAA-8AC5E8A95555}"/>
               </a:ext>
             </a:extLst>
           </p:cNvPr>
@@ -14699,7 +14770,7 @@
                 <a:ea typeface="Arial"/>
                 <a:cs typeface="Arial"/>
               </a:rPr>
-              <a:t>The twin and assumption sandbox</a:t>
+              <a:t>Guardrails live</a:t>
             </a:r>
           </a:p>
         </p:txBody>
@@ -14709,7 +14780,7 @@
           <p:cNvPr id="2" name="">
             <a:extLst xmlns:a="http://schemas.openxmlformats.org/drawingml/2006/main">
               <a:ext uri="{FF2B5EF4-FFF2-40B4-BE49-F238E27FC236}">
-                <a16:creationId xmlns:a16="http://schemas.microsoft.com/office/drawing/2014/main" id="{8E90A1AE-BA3C-4A17-A469-8D2A45238E9B}"/>
+                <a16:creationId xmlns:a16="http://schemas.microsoft.com/office/drawing/2014/main" id="{3BC668A5-F95F-45A5-8412-B035B6F31655}"/>
               </a:ext>
             </a:extLst>
           </p:cNvPr>
@@ -14855,7 +14926,7 @@
                 <a:ea typeface="Arial"/>
                 <a:cs typeface="Arial"/>
               </a:rPr>
-              <a:t>Clear boundaries around simulated physiology</a:t>
+              <a:t>Missing safety information causes abstention</a:t>
             </a:r>
           </a:p>
         </p:txBody>
@@ -14865,7 +14936,7 @@
           <p:cNvPr id="3" name="">
             <a:extLst xmlns:a="http://schemas.openxmlformats.org/drawingml/2006/main">
               <a:ext uri="{FF2B5EF4-FFF2-40B4-BE49-F238E27FC236}">
-                <a16:creationId xmlns:a16="http://schemas.microsoft.com/office/drawing/2014/main" id="{BF723035-898F-4BC6-996B-567FFBBD1B9A}"/>
+                <a16:creationId xmlns:a16="http://schemas.microsoft.com/office/drawing/2014/main" id="{AF11796A-D932-4800-9757-AD158270DBC4}"/>
               </a:ext>
             </a:extLst>
           </p:cNvPr>
@@ -15011,7 +15082,7 @@
                 <a:ea typeface="Arial"/>
                 <a:cs typeface="Arial"/>
               </a:rPr>
-              <a:t>Reproductive and metabolic equations generate an illustrative state trajectory</a:t>
+              <a:t>Contraception, thyroid and prolactin flags, age and pregnancy-related states</a:t>
             </a:r>
           </a:p>
         </p:txBody>
@@ -15021,7 +15092,7 @@
           <p:cNvPr id="4" name="">
             <a:extLst xmlns:a="http://schemas.openxmlformats.org/drawingml/2006/main">
               <a:ext uri="{FF2B5EF4-FFF2-40B4-BE49-F238E27FC236}">
-                <a16:creationId xmlns:a16="http://schemas.microsoft.com/office/drawing/2014/main" id="{63A89E44-F000-4C5B-AFB8-2D1A0A604780}"/>
+                <a16:creationId xmlns:a16="http://schemas.microsoft.com/office/drawing/2014/main" id="{A97C1DD4-6454-4F7A-B69A-D12394909BFB}"/>
               </a:ext>
             </a:extLst>
           </p:cNvPr>
@@ -15167,7 +15238,7 @@
                 <a:ea typeface="Arial"/>
                 <a:cs typeface="Arial"/>
               </a:rPr>
-              <a:t>The twin does not affect the logistic score or its reported performance</a:t>
+              <a:t>Early post-menarche, perimenopause and insufficient observed temperature</a:t>
             </a:r>
           </a:p>
         </p:txBody>
@@ -15177,7 +15248,7 @@
           <p:cNvPr id="5" name="">
             <a:extLst xmlns:a="http://schemas.openxmlformats.org/drawingml/2006/main">
               <a:ext uri="{FF2B5EF4-FFF2-40B4-BE49-F238E27FC236}">
-                <a16:creationId xmlns:a16="http://schemas.microsoft.com/office/drawing/2014/main" id="{E7176569-4AED-4847-A733-173CD10AF596}"/>
+                <a16:creationId xmlns:a16="http://schemas.microsoft.com/office/drawing/2014/main" id="{6E045CD0-86C4-4D3D-9936-D99F16D6BBE0}"/>
               </a:ext>
             </a:extLst>
           </p:cNvPr>
@@ -15323,7 +15394,7 @@
                 <a:ea typeface="Arial"/>
                 <a:cs typeface="Arial"/>
               </a:rPr>
-              <a:t>The sandbox edits invented model inputs. It does not predict a treatment effect</a:t>
+              <a:t>Withholding removes personal scores, intervals, explanations, sandbox outputs and alerts</a:t>
             </a:r>
           </a:p>
         </p:txBody>
@@ -15333,7 +15404,7 @@
           <p:cNvPr id="6" name="">
             <a:extLst xmlns:a="http://schemas.openxmlformats.org/drawingml/2006/main">
               <a:ext uri="{FF2B5EF4-FFF2-40B4-BE49-F238E27FC236}">
-                <a16:creationId xmlns:a16="http://schemas.microsoft.com/office/drawing/2014/main" id="{ECD1221E-97B8-42D3-8474-8BE066F6FF48}"/>
+                <a16:creationId xmlns:a16="http://schemas.microsoft.com/office/drawing/2014/main" id="{C47C9EE2-FB99-422F-A8EA-7CECFB5EA148}"/>
               </a:ext>
             </a:extLst>
           </p:cNvPr>
@@ -15479,7 +15550,7 @@
                 <a:ea typeface="Arial"/>
                 <a:cs typeface="Arial"/>
               </a:rPr>
-              <a:t>Glucose threshold crossings are simulated counts, not an evaluated glucose forecast</a:t>
+              <a:t>The workflow is synthetic and its safety effectiveness has not been clinically evaluated</a:t>
             </a:r>
           </a:p>
         </p:txBody>
@@ -15489,7 +15560,7 @@
           <p:cNvPr id="7" name="">
             <a:extLst xmlns:a="http://schemas.openxmlformats.org/drawingml/2006/main">
               <a:ext uri="{FF2B5EF4-FFF2-40B4-BE49-F238E27FC236}">
-                <a16:creationId xmlns:a16="http://schemas.microsoft.com/office/drawing/2014/main" id="{40FAFBF4-3E39-423F-87FA-B9C27263D773}"/>
+                <a16:creationId xmlns:a16="http://schemas.microsoft.com/office/drawing/2014/main" id="{8EB9827A-ADD1-4F40-B26C-63AFF4D64E6F}"/>
               </a:ext>
             </a:extLst>
           </p:cNvPr>
@@ -15643,7 +15714,7 @@
     </p:spTree>
     <p:extLst>
       <p:ext uri="{BB962C8B-B14F-4D97-AF65-F5344CB8AC3E}">
-        <p14:creationId xmlns:p14="http://schemas.microsoft.com/office/powerpoint/2010/main" val="2129590959"/>
+        <p14:creationId xmlns:p14="http://schemas.microsoft.com/office/powerpoint/2010/main" val="801165215"/>
       </p:ext>
     </p:extLst>
   </p:cSld>
@@ -15674,7 +15745,7 @@
           <p:cNvPr id="8" name="">
             <a:extLst xmlns:a="http://schemas.openxmlformats.org/drawingml/2006/main">
               <a:ext uri="{FF2B5EF4-FFF2-40B4-BE49-F238E27FC236}">
-                <a16:creationId xmlns:a16="http://schemas.microsoft.com/office/drawing/2014/main" id="{01F1546D-08F9-4C3A-91CE-71498F4C8923}"/>
+                <a16:creationId xmlns:a16="http://schemas.microsoft.com/office/drawing/2014/main" id="{7D565724-4331-478B-9021-09FE9C9154E1}"/>
               </a:ext>
             </a:extLst>
           </p:cNvPr>
@@ -15820,7 +15891,7 @@
                 <a:ea typeface="Arial"/>
                 <a:cs typeface="Arial"/>
               </a:rPr>
-              <a:t>Where it fails</a:t>
+              <a:t>The twin and assumption sandbox</a:t>
             </a:r>
           </a:p>
         </p:txBody>
@@ -15830,7 +15901,7 @@
           <p:cNvPr id="2" name="">
             <a:extLst xmlns:a="http://schemas.openxmlformats.org/drawingml/2006/main">
               <a:ext uri="{FF2B5EF4-FFF2-40B4-BE49-F238E27FC236}">
-                <a16:creationId xmlns:a16="http://schemas.microsoft.com/office/drawing/2014/main" id="{3417B2C8-035E-4192-B42C-016A04F1526D}"/>
+                <a16:creationId xmlns:a16="http://schemas.microsoft.com/office/drawing/2014/main" id="{F8F3DEA9-C9AB-4D3C-A347-8F99DD0C68BA}"/>
               </a:ext>
             </a:extLst>
           </p:cNvPr>
@@ -15976,7 +16047,7 @@
                 <a:ea typeface="Arial"/>
                 <a:cs typeface="Arial"/>
               </a:rPr>
-              <a:t>All declared Kushi scenarios remain visible</a:t>
+              <a:t>Clear boundaries around simulated physiology</a:t>
             </a:r>
           </a:p>
         </p:txBody>
@@ -15986,7 +16057,7 @@
           <p:cNvPr id="3" name="">
             <a:extLst xmlns:a="http://schemas.openxmlformats.org/drawingml/2006/main">
               <a:ext uri="{FF2B5EF4-FFF2-40B4-BE49-F238E27FC236}">
-                <a16:creationId xmlns:a16="http://schemas.microsoft.com/office/drawing/2014/main" id="{BBBDF89E-8792-4C99-889F-6E83C82E3D3D}"/>
+                <a16:creationId xmlns:a16="http://schemas.microsoft.com/office/drawing/2014/main" id="{1E298368-7F0D-4381-956D-6EF0BE527134}"/>
               </a:ext>
             </a:extLst>
           </p:cNvPr>
@@ -16132,7 +16203,7 @@
                 <a:ea typeface="Arial"/>
                 <a:cs typeface="Arial"/>
               </a:rPr>
-              <a:t>Display the fixed scenario seeds with misses, false alarms or withholding unchanged</a:t>
+              <a:t>Reproductive and metabolic equations generate an illustrative state trajectory</a:t>
             </a:r>
           </a:p>
         </p:txBody>
@@ -16142,7 +16213,7 @@
           <p:cNvPr id="4" name="">
             <a:extLst xmlns:a="http://schemas.openxmlformats.org/drawingml/2006/main">
               <a:ext uri="{FF2B5EF4-FFF2-40B4-BE49-F238E27FC236}">
-                <a16:creationId xmlns:a16="http://schemas.microsoft.com/office/drawing/2014/main" id="{EAEE3BA3-5E7A-4290-ADB9-CE09429D0CC2}"/>
+                <a16:creationId xmlns:a16="http://schemas.microsoft.com/office/drawing/2014/main" id="{C78EF5E0-172D-45C5-B550-A64572DDE12B}"/>
               </a:ext>
             </a:extLst>
           </p:cNvPr>
@@ -16288,7 +16359,7 @@
                 <a:ea typeface="Arial"/>
                 <a:cs typeface="Arial"/>
               </a:rPr>
-              <a:t>Different snapshots can fall back to calendar even when sensors are available</a:t>
+              <a:t>The twin does not affect the logistic score or its reported performance</a:t>
             </a:r>
           </a:p>
         </p:txBody>
@@ -16298,7 +16369,7 @@
           <p:cNvPr id="5" name="">
             <a:extLst xmlns:a="http://schemas.openxmlformats.org/drawingml/2006/main">
               <a:ext uri="{FF2B5EF4-FFF2-40B4-BE49-F238E27FC236}">
-                <a16:creationId xmlns:a16="http://schemas.microsoft.com/office/drawing/2014/main" id="{572BF4D6-E190-4733-BB1B-C016C6C60743}"/>
+                <a16:creationId xmlns:a16="http://schemas.microsoft.com/office/drawing/2014/main" id="{EE05EE50-17E7-41AC-BC85-3F84DA85133A}"/>
               </a:ext>
             </a:extLst>
           </p:cNvPr>
@@ -16444,7 +16515,7 @@
                 <a:ea typeface="Arial"/>
                 <a:cs typeface="Arial"/>
               </a:rPr>
-              <a:t>A class set containing both outcomes does not identify one result</a:t>
+              <a:t>The sandbox edits invented model inputs. It does not predict a treatment effect</a:t>
             </a:r>
           </a:p>
         </p:txBody>
@@ -16454,7 +16525,7 @@
           <p:cNvPr id="6" name="">
             <a:extLst xmlns:a="http://schemas.openxmlformats.org/drawingml/2006/main">
               <a:ext uri="{FF2B5EF4-FFF2-40B4-BE49-F238E27FC236}">
-                <a16:creationId xmlns:a16="http://schemas.microsoft.com/office/drawing/2014/main" id="{CFA78623-3F7E-4040-8A42-0C79AA0D8839}"/>
+                <a16:creationId xmlns:a16="http://schemas.microsoft.com/office/drawing/2014/main" id="{E0081B18-7238-4C91-ADC2-7CCA34B65AD7}"/>
               </a:ext>
             </a:extLst>
           </p:cNvPr>
@@ -16600,7 +16671,7 @@
                 <a:ea typeface="Arial"/>
                 <a:cs typeface="Arial"/>
               </a:rPr>
-              <a:t>Robustness, state-estimator and conformal coverage evidence remain separate work</a:t>
+              <a:t>Glucose threshold crossings are simulated counts, not an evaluated glucose forecast</a:t>
             </a:r>
           </a:p>
         </p:txBody>
@@ -16610,7 +16681,7 @@
           <p:cNvPr id="7" name="">
             <a:extLst xmlns:a="http://schemas.openxmlformats.org/drawingml/2006/main">
               <a:ext uri="{FF2B5EF4-FFF2-40B4-BE49-F238E27FC236}">
-                <a16:creationId xmlns:a16="http://schemas.microsoft.com/office/drawing/2014/main" id="{337CAF91-E980-477C-AAF6-0A0288B8F59B}"/>
+                <a16:creationId xmlns:a16="http://schemas.microsoft.com/office/drawing/2014/main" id="{40937E73-563B-4B40-BE92-823D4F2EF181}"/>
               </a:ext>
             </a:extLst>
           </p:cNvPr>
@@ -16764,7 +16835,7 @@
     </p:spTree>
     <p:extLst>
       <p:ext uri="{BB962C8B-B14F-4D97-AF65-F5344CB8AC3E}">
-        <p14:creationId xmlns:p14="http://schemas.microsoft.com/office/powerpoint/2010/main" val="232754227"/>
+        <p14:creationId xmlns:p14="http://schemas.microsoft.com/office/powerpoint/2010/main" val="608564641"/>
       </p:ext>
     </p:extLst>
   </p:cSld>
@@ -16795,7 +16866,7 @@
           <p:cNvPr id="8" name="">
             <a:extLst xmlns:a="http://schemas.openxmlformats.org/drawingml/2006/main">
               <a:ext uri="{FF2B5EF4-FFF2-40B4-BE49-F238E27FC236}">
-                <a16:creationId xmlns:a16="http://schemas.microsoft.com/office/drawing/2014/main" id="{F3329DA4-2BF8-4170-8B42-76C3B133B011}"/>
+                <a16:creationId xmlns:a16="http://schemas.microsoft.com/office/drawing/2014/main" id="{1A1F3D28-46FA-46E5-B075-ACEAC3AEF65A}"/>
               </a:ext>
             </a:extLst>
           </p:cNvPr>
@@ -16941,7 +17012,7 @@
                 <a:ea typeface="Arial"/>
                 <a:cs typeface="Arial"/>
               </a:rPr>
-              <a:t>Validity limits</a:t>
+              <a:t>Where it fails</a:t>
             </a:r>
           </a:p>
         </p:txBody>
@@ -16951,7 +17022,7 @@
           <p:cNvPr id="2" name="">
             <a:extLst xmlns:a="http://schemas.openxmlformats.org/drawingml/2006/main">
               <a:ext uri="{FF2B5EF4-FFF2-40B4-BE49-F238E27FC236}">
-                <a16:creationId xmlns:a16="http://schemas.microsoft.com/office/drawing/2014/main" id="{E167DA7D-DE3F-4A5E-ACCE-DBADB42CCCDC}"/>
+                <a16:creationId xmlns:a16="http://schemas.microsoft.com/office/drawing/2014/main" id="{B45815A4-1D7A-4AF8-B063-2A1354D282D6}"/>
               </a:ext>
             </a:extLst>
           </p:cNvPr>
@@ -17097,7 +17168,7 @@
                 <a:ea typeface="Arial"/>
                 <a:cs typeface="Arial"/>
               </a:rPr>
-              <a:t>Synthetic recovery is not prospective evidence in women</a:t>
+              <a:t>All declared Kushi scenarios remain visible</a:t>
             </a:r>
           </a:p>
         </p:txBody>
@@ -17107,7 +17178,7 @@
           <p:cNvPr id="3" name="">
             <a:extLst xmlns:a="http://schemas.openxmlformats.org/drawingml/2006/main">
               <a:ext uri="{FF2B5EF4-FFF2-40B4-BE49-F238E27FC236}">
-                <a16:creationId xmlns:a16="http://schemas.microsoft.com/office/drawing/2014/main" id="{F8BA37D1-8E8B-42D8-B7C1-2FC62A50D869}"/>
+                <a16:creationId xmlns:a16="http://schemas.microsoft.com/office/drawing/2014/main" id="{0752F1CE-154A-4D80-83C1-253F3B33F180}"/>
               </a:ext>
             </a:extLst>
           </p:cNvPr>
@@ -17253,7 +17324,7 @@
                 <a:ea typeface="Arial"/>
                 <a:cs typeface="Arial"/>
               </a:rPr>
-              <a:t>Labels and sensor changes share generator assumptions</a:t>
+              <a:t>Display the fixed scenario seeds with misses, false alarms or withholding unchanged</a:t>
             </a:r>
           </a:p>
         </p:txBody>
@@ -17263,7 +17334,7 @@
           <p:cNvPr id="4" name="">
             <a:extLst xmlns:a="http://schemas.openxmlformats.org/drawingml/2006/main">
               <a:ext uri="{FF2B5EF4-FFF2-40B4-BE49-F238E27FC236}">
-                <a16:creationId xmlns:a16="http://schemas.microsoft.com/office/drawing/2014/main" id="{2AB8899F-689C-496F-8408-1FFD320281DD}"/>
+                <a16:creationId xmlns:a16="http://schemas.microsoft.com/office/drawing/2014/main" id="{FC0AC2CC-0128-457D-9004-DE0F88730F71}"/>
               </a:ext>
             </a:extLst>
           </p:cNvPr>
@@ -17409,7 +17480,7 @@
                 <a:ea typeface="Arial"/>
                 <a:cs typeface="Arial"/>
               </a:rPr>
-              <a:t>EHR-lite includes a label-generating internal latent</a:t>
+              <a:t>Different snapshots can fall back to calendar even when sensors are available</a:t>
             </a:r>
           </a:p>
         </p:txBody>
@@ -17419,7 +17490,7 @@
           <p:cNvPr id="5" name="">
             <a:extLst xmlns:a="http://schemas.openxmlformats.org/drawingml/2006/main">
               <a:ext uri="{FF2B5EF4-FFF2-40B4-BE49-F238E27FC236}">
-                <a16:creationId xmlns:a16="http://schemas.microsoft.com/office/drawing/2014/main" id="{ECFDFF20-512E-4013-9F38-A768C26D4D52}"/>
+                <a16:creationId xmlns:a16="http://schemas.microsoft.com/office/drawing/2014/main" id="{C8757CEB-6F9F-451A-ADD6-92038404D0D8}"/>
               </a:ext>
             </a:extLst>
           </p:cNvPr>
@@ -17565,7 +17636,7 @@
                 <a:ea typeface="Arial"/>
                 <a:cs typeface="Arial"/>
               </a:rPr>
-              <a:t>Old test seeds were reused during development</a:t>
+              <a:t>A class set containing both outcomes does not identify one result</a:t>
             </a:r>
           </a:p>
         </p:txBody>
@@ -17575,7 +17646,7 @@
           <p:cNvPr id="6" name="">
             <a:extLst xmlns:a="http://schemas.openxmlformats.org/drawingml/2006/main">
               <a:ext uri="{FF2B5EF4-FFF2-40B4-BE49-F238E27FC236}">
-                <a16:creationId xmlns:a16="http://schemas.microsoft.com/office/drawing/2014/main" id="{0088E84B-2BE8-4D9D-96B0-82BE4286EFD9}"/>
+                <a16:creationId xmlns:a16="http://schemas.microsoft.com/office/drawing/2014/main" id="{C99E22DA-28FD-47FE-A9D8-C61B7274331D}"/>
               </a:ext>
             </a:extLst>
           </p:cNvPr>
@@ -17721,7 +17792,7 @@
                 <a:ea typeface="Arial"/>
                 <a:cs typeface="Arial"/>
               </a:rPr>
-              <a:t>The frozen synthetic sequential alert policy is evaluated; robustness and clinical safety effectiveness remain separate work</a:t>
+              <a:t>Robustness, state-estimator and conformal coverage evidence remain separate work</a:t>
             </a:r>
           </a:p>
         </p:txBody>
@@ -17731,7 +17802,7 @@
           <p:cNvPr id="7" name="">
             <a:extLst xmlns:a="http://schemas.openxmlformats.org/drawingml/2006/main">
               <a:ext uri="{FF2B5EF4-FFF2-40B4-BE49-F238E27FC236}">
-                <a16:creationId xmlns:a16="http://schemas.microsoft.com/office/drawing/2014/main" id="{4A70C16E-7525-43A8-A17C-F606AFE32C2C}"/>
+                <a16:creationId xmlns:a16="http://schemas.microsoft.com/office/drawing/2014/main" id="{602A2E67-A92C-4AD9-8829-7C9305C658F8}"/>
               </a:ext>
             </a:extLst>
           </p:cNvPr>
@@ -17885,7 +17956,7 @@
     </p:spTree>
     <p:extLst>
       <p:ext uri="{BB962C8B-B14F-4D97-AF65-F5344CB8AC3E}">
-        <p14:creationId xmlns:p14="http://schemas.microsoft.com/office/powerpoint/2010/main" val="1696317739"/>
+        <p14:creationId xmlns:p14="http://schemas.microsoft.com/office/powerpoint/2010/main" val="295180852"/>
       </p:ext>
     </p:extLst>
   </p:cSld>
@@ -17916,7 +17987,7 @@
           <p:cNvPr id="7" name="">
             <a:extLst xmlns:a="http://schemas.openxmlformats.org/drawingml/2006/main">
               <a:ext uri="{FF2B5EF4-FFF2-40B4-BE49-F238E27FC236}">
-                <a16:creationId xmlns:a16="http://schemas.microsoft.com/office/drawing/2014/main" id="{04D9337E-0838-469F-9013-1DD6B65D7D9F}"/>
+                <a16:creationId xmlns:a16="http://schemas.microsoft.com/office/drawing/2014/main" id="{D20EB1BD-76D4-434D-9A51-4FFA62D1DCB3}"/>
               </a:ext>
             </a:extLst>
           </p:cNvPr>
@@ -18072,7 +18143,7 @@
           <p:cNvPr id="2" name="">
             <a:extLst xmlns:a="http://schemas.openxmlformats.org/drawingml/2006/main">
               <a:ext uri="{FF2B5EF4-FFF2-40B4-BE49-F238E27FC236}">
-                <a16:creationId xmlns:a16="http://schemas.microsoft.com/office/drawing/2014/main" id="{972765EC-522A-4833-B187-20012955E411}"/>
+                <a16:creationId xmlns:a16="http://schemas.microsoft.com/office/drawing/2014/main" id="{6EFC3AB6-8670-46D7-A49C-4265E78FCA53}"/>
               </a:ext>
             </a:extLst>
           </p:cNvPr>
@@ -18228,7 +18299,7 @@
           <p:cNvPr id="3" name="">
             <a:extLst xmlns:a="http://schemas.openxmlformats.org/drawingml/2006/main">
               <a:ext uri="{FF2B5EF4-FFF2-40B4-BE49-F238E27FC236}">
-                <a16:creationId xmlns:a16="http://schemas.microsoft.com/office/drawing/2014/main" id="{52E49CB4-34B5-4026-8091-533123822998}"/>
+                <a16:creationId xmlns:a16="http://schemas.microsoft.com/office/drawing/2014/main" id="{773E7AC3-F4DB-4BEB-A371-7DD2347218A6}"/>
               </a:ext>
             </a:extLst>
           </p:cNvPr>
@@ -18384,7 +18455,7 @@
           <p:cNvPr id="4" name="">
             <a:extLst xmlns:a="http://schemas.openxmlformats.org/drawingml/2006/main">
               <a:ext uri="{FF2B5EF4-FFF2-40B4-BE49-F238E27FC236}">
-                <a16:creationId xmlns:a16="http://schemas.microsoft.com/office/drawing/2014/main" id="{0841B78E-3A80-4AE7-8459-581BF776FBA3}"/>
+                <a16:creationId xmlns:a16="http://schemas.microsoft.com/office/drawing/2014/main" id="{3B9E38F4-4DF0-45F3-BC12-C95526CE0F11}"/>
               </a:ext>
             </a:extLst>
           </p:cNvPr>
@@ -18540,7 +18611,7 @@
           <p:cNvPr id="5" name="">
             <a:extLst xmlns:a="http://schemas.openxmlformats.org/drawingml/2006/main">
               <a:ext uri="{FF2B5EF4-FFF2-40B4-BE49-F238E27FC236}">
-                <a16:creationId xmlns:a16="http://schemas.microsoft.com/office/drawing/2014/main" id="{6B057D0C-2055-4AC6-9C36-2CF090A3872F}"/>
+                <a16:creationId xmlns:a16="http://schemas.microsoft.com/office/drawing/2014/main" id="{6634D97C-F63E-4019-9CA2-519F21F589BD}"/>
               </a:ext>
             </a:extLst>
           </p:cNvPr>
@@ -18696,7 +18767,7 @@
           <p:cNvPr id="6" name="">
             <a:extLst xmlns:a="http://schemas.openxmlformats.org/drawingml/2006/main">
               <a:ext uri="{FF2B5EF4-FFF2-40B4-BE49-F238E27FC236}">
-                <a16:creationId xmlns:a16="http://schemas.microsoft.com/office/drawing/2014/main" id="{8BB2493F-77FA-47A2-9F11-69E35A7480C4}"/>
+                <a16:creationId xmlns:a16="http://schemas.microsoft.com/office/drawing/2014/main" id="{B3E1C422-F5D6-4DAF-98B8-F190275AC37E}"/>
               </a:ext>
             </a:extLst>
           </p:cNvPr>
@@ -18850,7 +18921,7 @@
     </p:spTree>
     <p:extLst>
       <p:ext uri="{BB962C8B-B14F-4D97-AF65-F5344CB8AC3E}">
-        <p14:creationId xmlns:p14="http://schemas.microsoft.com/office/powerpoint/2010/main" val="365168251"/>
+        <p14:creationId xmlns:p14="http://schemas.microsoft.com/office/powerpoint/2010/main" val="1644788255"/>
       </p:ext>
     </p:extLst>
   </p:cSld>
@@ -18881,7 +18952,7 @@
           <p:cNvPr id="8" name="">
             <a:extLst xmlns:a="http://schemas.openxmlformats.org/drawingml/2006/main">
               <a:ext uri="{FF2B5EF4-FFF2-40B4-BE49-F238E27FC236}">
-                <a16:creationId xmlns:a16="http://schemas.microsoft.com/office/drawing/2014/main" id="{FD76F626-F58E-4FF1-A3D9-80613A10A75A}"/>
+                <a16:creationId xmlns:a16="http://schemas.microsoft.com/office/drawing/2014/main" id="{7904107C-3864-47D8-B3AE-AF8A7C489408}"/>
               </a:ext>
             </a:extLst>
           </p:cNvPr>
@@ -19027,7 +19098,7 @@
                 <a:ea typeface="Arial"/>
                 <a:cs typeface="Arial"/>
               </a:rPr>
-              <a:t>Reproducible demonstration</a:t>
+              <a:t>Validity limits</a:t>
             </a:r>
           </a:p>
         </p:txBody>
@@ -19037,7 +19108,7 @@
           <p:cNvPr id="2" name="">
             <a:extLst xmlns:a="http://schemas.openxmlformats.org/drawingml/2006/main">
               <a:ext uri="{FF2B5EF4-FFF2-40B4-BE49-F238E27FC236}">
-                <a16:creationId xmlns:a16="http://schemas.microsoft.com/office/drawing/2014/main" id="{87CCA7E0-2533-4FBF-A5D7-B11C60FFE107}"/>
+                <a16:creationId xmlns:a16="http://schemas.microsoft.com/office/drawing/2014/main" id="{C5383BB5-9E23-4EF1-AD65-BC54546C75D4}"/>
               </a:ext>
             </a:extLst>
           </p:cNvPr>
@@ -19183,7 +19254,7 @@
                 <a:ea typeface="Arial"/>
                 <a:cs typeface="Arial"/>
               </a:rPr>
-              <a:t>Public source, inspectable artifacts and explicit next work</a:t>
+              <a:t>Synthetic recovery is not prospective evidence in women</a:t>
             </a:r>
           </a:p>
         </p:txBody>
@@ -19193,7 +19264,7 @@
           <p:cNvPr id="3" name="">
             <a:extLst xmlns:a="http://schemas.openxmlformats.org/drawingml/2006/main">
               <a:ext uri="{FF2B5EF4-FFF2-40B4-BE49-F238E27FC236}">
-                <a16:creationId xmlns:a16="http://schemas.microsoft.com/office/drawing/2014/main" id="{F904FFA4-C74C-469C-9AA1-1674B631C9D4}"/>
+                <a16:creationId xmlns:a16="http://schemas.microsoft.com/office/drawing/2014/main" id="{A31667CE-4B2B-4100-9630-145018B59EA5}"/>
               </a:ext>
             </a:extLst>
           </p:cNvPr>
@@ -19339,7 +19410,7 @@
                 <a:ea typeface="Arial"/>
                 <a:cs typeface="Arial"/>
               </a:rPr>
-              <a:t>README, model cards and the audit link every claim to evidence</a:t>
+              <a:t>Labels and sensor changes share generator assumptions</a:t>
             </a:r>
           </a:p>
         </p:txBody>
@@ -19349,7 +19420,7 @@
           <p:cNvPr id="4" name="">
             <a:extLst xmlns:a="http://schemas.openxmlformats.org/drawingml/2006/main">
               <a:ext uri="{FF2B5EF4-FFF2-40B4-BE49-F238E27FC236}">
-                <a16:creationId xmlns:a16="http://schemas.microsoft.com/office/drawing/2014/main" id="{C9161CA6-1BC7-4D30-AFB8-2F263D959883}"/>
+                <a16:creationId xmlns:a16="http://schemas.microsoft.com/office/drawing/2014/main" id="{073B1E26-69A2-4133-8260-C077409CB725}"/>
               </a:ext>
             </a:extLst>
           </p:cNvPr>
@@ -19495,7 +19566,7 @@
                 <a:ea typeface="Arial"/>
                 <a:cs typeface="Arial"/>
               </a:rPr>
-              <a:t>Persisted inference reproduces the benchmark and exposes exact feature calculations</a:t>
+              <a:t>EHR-lite includes a label-generating internal latent</a:t>
             </a:r>
           </a:p>
         </p:txBody>
@@ -19505,7 +19576,7 @@
           <p:cNvPr id="5" name="">
             <a:extLst xmlns:a="http://schemas.openxmlformats.org/drawingml/2006/main">
               <a:ext uri="{FF2B5EF4-FFF2-40B4-BE49-F238E27FC236}">
-                <a16:creationId xmlns:a16="http://schemas.microsoft.com/office/drawing/2014/main" id="{E28E54A4-819C-4C7C-9C5F-6FB9A6851738}"/>
+                <a16:creationId xmlns:a16="http://schemas.microsoft.com/office/drawing/2014/main" id="{CD544DC9-AB48-4AAE-A8C5-98F17A25DF91}"/>
               </a:ext>
             </a:extLst>
           </p:cNvPr>
@@ -19651,7 +19722,7 @@
                 <a:ea typeface="Arial"/>
                 <a:cs typeface="Arial"/>
               </a:rPr>
-              <a:t>The required video remains a human recording and upload task</a:t>
+              <a:t>Old test seeds were reused during development</a:t>
             </a:r>
           </a:p>
         </p:txBody>
@@ -19661,7 +19732,7 @@
           <p:cNvPr id="6" name="">
             <a:extLst xmlns:a="http://schemas.openxmlformats.org/drawingml/2006/main">
               <a:ext uri="{FF2B5EF4-FFF2-40B4-BE49-F238E27FC236}">
-                <a16:creationId xmlns:a16="http://schemas.microsoft.com/office/drawing/2014/main" id="{48807AB4-5C9D-4826-8BA4-84875E416202}"/>
+                <a16:creationId xmlns:a16="http://schemas.microsoft.com/office/drawing/2014/main" id="{298D7161-D4E3-4108-BC66-775A81698C24}"/>
               </a:ext>
             </a:extLst>
           </p:cNvPr>
@@ -19807,7 +19878,7 @@
                 <a:ea typeface="Arial"/>
                 <a:cs typeface="Arial"/>
               </a:rPr>
-              <a:t>Clinical validation, clinician feedback and sim-to-real evaluation remain outstanding</a:t>
+              <a:t>The frozen synthetic sequential alert policy is evaluated; robustness and clinical safety effectiveness remain separate work</a:t>
             </a:r>
           </a:p>
         </p:txBody>
@@ -19817,7 +19888,7 @@
           <p:cNvPr id="7" name="">
             <a:extLst xmlns:a="http://schemas.openxmlformats.org/drawingml/2006/main">
               <a:ext uri="{FF2B5EF4-FFF2-40B4-BE49-F238E27FC236}">
-                <a16:creationId xmlns:a16="http://schemas.microsoft.com/office/drawing/2014/main" id="{85794A38-1779-4C6D-8DAF-0F045524C7A2}"/>
+                <a16:creationId xmlns:a16="http://schemas.microsoft.com/office/drawing/2014/main" id="{C84B435C-86A2-4EBA-9C45-75B25A500C6D}"/>
               </a:ext>
             </a:extLst>
           </p:cNvPr>
@@ -19971,7 +20042,1128 @@
     </p:spTree>
     <p:extLst>
       <p:ext uri="{BB962C8B-B14F-4D97-AF65-F5344CB8AC3E}">
-        <p14:creationId xmlns:p14="http://schemas.microsoft.com/office/powerpoint/2010/main" val="2120411180"/>
+        <p14:creationId xmlns:p14="http://schemas.microsoft.com/office/powerpoint/2010/main" val="1558307281"/>
+      </p:ext>
+    </p:extLst>
+  </p:cSld>
+</p:sld>
+</file>
+
+<file path=ppt/slides/slide21.xml><?xml version="1.0" encoding="utf-8"?>
+<p:sld xmlns:p="http://schemas.openxmlformats.org/presentationml/2006/main">
+  <p:cSld>
+    <p:bg>
+      <p:bgPr>
+        <a:solidFill xmlns:a="http://schemas.openxmlformats.org/drawingml/2006/main">
+          <a:srgbClr val="FAFAF8"/>
+        </a:solidFill>
+      </p:bgPr>
+    </p:bg>
+    <p:spTree>
+      <p:nvGrpSpPr>
+        <p:cNvPr id="1" name=""/>
+        <p:cNvGrpSpPr/>
+        <p:nvPr/>
+      </p:nvGrpSpPr>
+      <p:grpSpPr>
+        <a:xfrm xmlns:a="http://schemas.openxmlformats.org/drawingml/2006/main"/>
+      </p:grpSpPr>
+      <p:sp>
+        <p:nvSpPr>
+          <p:cNvPr id="8" name="">
+            <a:extLst xmlns:a="http://schemas.openxmlformats.org/drawingml/2006/main">
+              <a:ext uri="{FF2B5EF4-FFF2-40B4-BE49-F238E27FC236}">
+                <a16:creationId xmlns:a16="http://schemas.microsoft.com/office/drawing/2014/main" id="{4EFB85F9-864C-46C1-9356-E76234A93D9B}"/>
+              </a:ext>
+            </a:extLst>
+          </p:cNvPr>
+          <p:cNvSpPr>
+            <a:spLocks xmlns:a="http://schemas.openxmlformats.org/drawingml/2006/main" noGrp="1"/>
+          </p:cNvSpPr>
+          <p:nvPr/>
+        </p:nvSpPr>
+        <p:spPr>
+          <a:xfrm xmlns:a="http://schemas.openxmlformats.org/drawingml/2006/main">
+            <a:off x="609600" y="457200"/>
+            <a:ext cx="10972800" cy="762000"/>
+          </a:xfrm>
+          <a:prstGeom xmlns:a="http://schemas.openxmlformats.org/drawingml/2006/main" prst="rect">
+            <a:avLst/>
+          </a:prstGeom>
+          <a:noFill xmlns:a="http://schemas.openxmlformats.org/drawingml/2006/main"/>
+          <a:ln xmlns:a="http://schemas.openxmlformats.org/drawingml/2006/main" w="0">
+            <a:noFill/>
+          </a:ln>
+        </p:spPr>
+        <p:txBody>
+          <a:bodyPr xmlns:a="http://schemas.openxmlformats.org/drawingml/2006/main"/>
+          <a:lstStyle xmlns:a="http://schemas.openxmlformats.org/drawingml/2006/main">
+            <a:defPPr>
+              <a:defRPr sz="3300" b="0">
+                <a:solidFill>
+                  <a:srgbClr val="17242B"/>
+                </a:solidFill>
+                <a:latin typeface="Arial"/>
+                <a:ea typeface="Arial"/>
+                <a:cs typeface="Arial"/>
+              </a:defRPr>
+            </a:defPPr>
+            <a:lvl1pPr>
+              <a:defRPr sz="3300" b="0">
+                <a:solidFill>
+                  <a:srgbClr val="17242B"/>
+                </a:solidFill>
+                <a:latin typeface="Arial"/>
+                <a:ea typeface="Arial"/>
+                <a:cs typeface="Arial"/>
+              </a:defRPr>
+            </a:lvl1pPr>
+            <a:lvl2pPr>
+              <a:defRPr sz="3300" b="0">
+                <a:solidFill>
+                  <a:srgbClr val="17242B"/>
+                </a:solidFill>
+                <a:latin typeface="Arial"/>
+                <a:ea typeface="Arial"/>
+                <a:cs typeface="Arial"/>
+              </a:defRPr>
+            </a:lvl2pPr>
+            <a:lvl3pPr>
+              <a:defRPr sz="3300" b="0">
+                <a:solidFill>
+                  <a:srgbClr val="17242B"/>
+                </a:solidFill>
+                <a:latin typeface="Arial"/>
+                <a:ea typeface="Arial"/>
+                <a:cs typeface="Arial"/>
+              </a:defRPr>
+            </a:lvl3pPr>
+            <a:lvl4pPr>
+              <a:defRPr sz="3300" b="0">
+                <a:solidFill>
+                  <a:srgbClr val="17242B"/>
+                </a:solidFill>
+                <a:latin typeface="Arial"/>
+                <a:ea typeface="Arial"/>
+                <a:cs typeface="Arial"/>
+              </a:defRPr>
+            </a:lvl4pPr>
+            <a:lvl5pPr>
+              <a:defRPr sz="3300" b="0">
+                <a:solidFill>
+                  <a:srgbClr val="17242B"/>
+                </a:solidFill>
+                <a:latin typeface="Arial"/>
+                <a:ea typeface="Arial"/>
+                <a:cs typeface="Arial"/>
+              </a:defRPr>
+            </a:lvl5pPr>
+            <a:lvl6pPr>
+              <a:defRPr sz="3300" b="0">
+                <a:solidFill>
+                  <a:srgbClr val="17242B"/>
+                </a:solidFill>
+                <a:latin typeface="Arial"/>
+                <a:ea typeface="Arial"/>
+                <a:cs typeface="Arial"/>
+              </a:defRPr>
+            </a:lvl6pPr>
+            <a:lvl7pPr>
+              <a:defRPr sz="3300" b="0">
+                <a:solidFill>
+                  <a:srgbClr val="17242B"/>
+                </a:solidFill>
+                <a:latin typeface="Arial"/>
+                <a:ea typeface="Arial"/>
+                <a:cs typeface="Arial"/>
+              </a:defRPr>
+            </a:lvl7pPr>
+            <a:lvl8pPr>
+              <a:defRPr sz="3300" b="0">
+                <a:solidFill>
+                  <a:srgbClr val="17242B"/>
+                </a:solidFill>
+                <a:latin typeface="Arial"/>
+                <a:ea typeface="Arial"/>
+                <a:cs typeface="Arial"/>
+              </a:defRPr>
+            </a:lvl8pPr>
+            <a:lvl9pPr>
+              <a:defRPr sz="3300" b="0">
+                <a:solidFill>
+                  <a:srgbClr val="17242B"/>
+                </a:solidFill>
+                <a:latin typeface="Arial"/>
+                <a:ea typeface="Arial"/>
+                <a:cs typeface="Arial"/>
+              </a:defRPr>
+            </a:lvl9pPr>
+          </a:lstStyle>
+          <a:p xmlns:a="http://schemas.openxmlformats.org/drawingml/2006/main">
+            <a:pPr>
+              <a:defRPr sz="3300" b="0">
+                <a:solidFill>
+                  <a:srgbClr val="17242B"/>
+                </a:solidFill>
+                <a:latin typeface="Arial"/>
+                <a:ea typeface="Arial"/>
+                <a:cs typeface="Arial"/>
+              </a:defRPr>
+            </a:pPr>
+            <a:r>
+              <a:rPr sz="3300" b="0">
+                <a:solidFill>
+                  <a:srgbClr val="17242B"/>
+                </a:solidFill>
+                <a:latin typeface="Arial"/>
+                <a:ea typeface="Arial"/>
+                <a:cs typeface="Arial"/>
+              </a:rPr>
+              <a:t>Reproducible demonstration</a:t>
+            </a:r>
+          </a:p>
+        </p:txBody>
+      </p:sp>
+      <p:sp>
+        <p:nvSpPr>
+          <p:cNvPr id="2" name="">
+            <a:extLst xmlns:a="http://schemas.openxmlformats.org/drawingml/2006/main">
+              <a:ext uri="{FF2B5EF4-FFF2-40B4-BE49-F238E27FC236}">
+                <a16:creationId xmlns:a16="http://schemas.microsoft.com/office/drawing/2014/main" id="{86162C8B-08BF-4DCF-B03B-612ACF4357FD}"/>
+              </a:ext>
+            </a:extLst>
+          </p:cNvPr>
+          <p:cNvSpPr>
+            <a:spLocks xmlns:a="http://schemas.openxmlformats.org/drawingml/2006/main" noGrp="1"/>
+          </p:cNvSpPr>
+          <p:nvPr/>
+        </p:nvSpPr>
+        <p:spPr>
+          <a:xfrm xmlns:a="http://schemas.openxmlformats.org/drawingml/2006/main">
+            <a:off x="609600" y="1257300"/>
+            <a:ext cx="10972800" cy="619125"/>
+          </a:xfrm>
+          <a:prstGeom xmlns:a="http://schemas.openxmlformats.org/drawingml/2006/main" prst="rect">
+            <a:avLst/>
+          </a:prstGeom>
+          <a:noFill xmlns:a="http://schemas.openxmlformats.org/drawingml/2006/main"/>
+          <a:ln xmlns:a="http://schemas.openxmlformats.org/drawingml/2006/main" w="0">
+            <a:noFill/>
+          </a:ln>
+        </p:spPr>
+        <p:txBody>
+          <a:bodyPr xmlns:a="http://schemas.openxmlformats.org/drawingml/2006/main"/>
+          <a:lstStyle xmlns:a="http://schemas.openxmlformats.org/drawingml/2006/main">
+            <a:defPPr>
+              <a:defRPr sz="1800" b="0">
+                <a:solidFill>
+                  <a:srgbClr val="65757B"/>
+                </a:solidFill>
+                <a:latin typeface="Arial"/>
+                <a:ea typeface="Arial"/>
+                <a:cs typeface="Arial"/>
+              </a:defRPr>
+            </a:defPPr>
+            <a:lvl1pPr>
+              <a:defRPr sz="1800" b="0">
+                <a:solidFill>
+                  <a:srgbClr val="65757B"/>
+                </a:solidFill>
+                <a:latin typeface="Arial"/>
+                <a:ea typeface="Arial"/>
+                <a:cs typeface="Arial"/>
+              </a:defRPr>
+            </a:lvl1pPr>
+            <a:lvl2pPr>
+              <a:defRPr sz="1800" b="0">
+                <a:solidFill>
+                  <a:srgbClr val="65757B"/>
+                </a:solidFill>
+                <a:latin typeface="Arial"/>
+                <a:ea typeface="Arial"/>
+                <a:cs typeface="Arial"/>
+              </a:defRPr>
+            </a:lvl2pPr>
+            <a:lvl3pPr>
+              <a:defRPr sz="1800" b="0">
+                <a:solidFill>
+                  <a:srgbClr val="65757B"/>
+                </a:solidFill>
+                <a:latin typeface="Arial"/>
+                <a:ea typeface="Arial"/>
+                <a:cs typeface="Arial"/>
+              </a:defRPr>
+            </a:lvl3pPr>
+            <a:lvl4pPr>
+              <a:defRPr sz="1800" b="0">
+                <a:solidFill>
+                  <a:srgbClr val="65757B"/>
+                </a:solidFill>
+                <a:latin typeface="Arial"/>
+                <a:ea typeface="Arial"/>
+                <a:cs typeface="Arial"/>
+              </a:defRPr>
+            </a:lvl4pPr>
+            <a:lvl5pPr>
+              <a:defRPr sz="1800" b="0">
+                <a:solidFill>
+                  <a:srgbClr val="65757B"/>
+                </a:solidFill>
+                <a:latin typeface="Arial"/>
+                <a:ea typeface="Arial"/>
+                <a:cs typeface="Arial"/>
+              </a:defRPr>
+            </a:lvl5pPr>
+            <a:lvl6pPr>
+              <a:defRPr sz="1800" b="0">
+                <a:solidFill>
+                  <a:srgbClr val="65757B"/>
+                </a:solidFill>
+                <a:latin typeface="Arial"/>
+                <a:ea typeface="Arial"/>
+                <a:cs typeface="Arial"/>
+              </a:defRPr>
+            </a:lvl6pPr>
+            <a:lvl7pPr>
+              <a:defRPr sz="1800" b="0">
+                <a:solidFill>
+                  <a:srgbClr val="65757B"/>
+                </a:solidFill>
+                <a:latin typeface="Arial"/>
+                <a:ea typeface="Arial"/>
+                <a:cs typeface="Arial"/>
+              </a:defRPr>
+            </a:lvl7pPr>
+            <a:lvl8pPr>
+              <a:defRPr sz="1800" b="0">
+                <a:solidFill>
+                  <a:srgbClr val="65757B"/>
+                </a:solidFill>
+                <a:latin typeface="Arial"/>
+                <a:ea typeface="Arial"/>
+                <a:cs typeface="Arial"/>
+              </a:defRPr>
+            </a:lvl8pPr>
+            <a:lvl9pPr>
+              <a:defRPr sz="1800" b="0">
+                <a:solidFill>
+                  <a:srgbClr val="65757B"/>
+                </a:solidFill>
+                <a:latin typeface="Arial"/>
+                <a:ea typeface="Arial"/>
+                <a:cs typeface="Arial"/>
+              </a:defRPr>
+            </a:lvl9pPr>
+          </a:lstStyle>
+          <a:p xmlns:a="http://schemas.openxmlformats.org/drawingml/2006/main">
+            <a:pPr>
+              <a:defRPr sz="1800" b="0">
+                <a:solidFill>
+                  <a:srgbClr val="65757B"/>
+                </a:solidFill>
+                <a:latin typeface="Arial"/>
+                <a:ea typeface="Arial"/>
+                <a:cs typeface="Arial"/>
+              </a:defRPr>
+            </a:pPr>
+            <a:r>
+              <a:rPr sz="1800" b="0">
+                <a:solidFill>
+                  <a:srgbClr val="65757B"/>
+                </a:solidFill>
+                <a:latin typeface="Arial"/>
+                <a:ea typeface="Arial"/>
+                <a:cs typeface="Arial"/>
+              </a:rPr>
+              <a:t>Public source, inspectable artifacts and explicit next work</a:t>
+            </a:r>
+          </a:p>
+        </p:txBody>
+      </p:sp>
+      <p:sp>
+        <p:nvSpPr>
+          <p:cNvPr id="3" name="">
+            <a:extLst xmlns:a="http://schemas.openxmlformats.org/drawingml/2006/main">
+              <a:ext uri="{FF2B5EF4-FFF2-40B4-BE49-F238E27FC236}">
+                <a16:creationId xmlns:a16="http://schemas.microsoft.com/office/drawing/2014/main" id="{B63A1DDD-F9A8-4A0C-81E1-64F709AD0154}"/>
+              </a:ext>
+            </a:extLst>
+          </p:cNvPr>
+          <p:cNvSpPr>
+            <a:spLocks xmlns:a="http://schemas.openxmlformats.org/drawingml/2006/main" noGrp="1"/>
+          </p:cNvSpPr>
+          <p:nvPr/>
+        </p:nvSpPr>
+        <p:spPr>
+          <a:xfrm xmlns:a="http://schemas.openxmlformats.org/drawingml/2006/main">
+            <a:off x="704850" y="2190750"/>
+            <a:ext cx="10668000" cy="838200"/>
+          </a:xfrm>
+          <a:prstGeom xmlns:a="http://schemas.openxmlformats.org/drawingml/2006/main" prst="rect">
+            <a:avLst/>
+          </a:prstGeom>
+          <a:noFill xmlns:a="http://schemas.openxmlformats.org/drawingml/2006/main"/>
+          <a:ln xmlns:a="http://schemas.openxmlformats.org/drawingml/2006/main" w="0">
+            <a:noFill/>
+          </a:ln>
+        </p:spPr>
+        <p:txBody>
+          <a:bodyPr xmlns:a="http://schemas.openxmlformats.org/drawingml/2006/main"/>
+          <a:lstStyle xmlns:a="http://schemas.openxmlformats.org/drawingml/2006/main">
+            <a:defPPr>
+              <a:defRPr sz="2250" b="0">
+                <a:solidFill>
+                  <a:srgbClr val="0E766E"/>
+                </a:solidFill>
+                <a:latin typeface="Arial"/>
+                <a:ea typeface="Arial"/>
+                <a:cs typeface="Arial"/>
+              </a:defRPr>
+            </a:defPPr>
+            <a:lvl1pPr>
+              <a:defRPr sz="2250" b="0">
+                <a:solidFill>
+                  <a:srgbClr val="0E766E"/>
+                </a:solidFill>
+                <a:latin typeface="Arial"/>
+                <a:ea typeface="Arial"/>
+                <a:cs typeface="Arial"/>
+              </a:defRPr>
+            </a:lvl1pPr>
+            <a:lvl2pPr>
+              <a:defRPr sz="2250" b="0">
+                <a:solidFill>
+                  <a:srgbClr val="0E766E"/>
+                </a:solidFill>
+                <a:latin typeface="Arial"/>
+                <a:ea typeface="Arial"/>
+                <a:cs typeface="Arial"/>
+              </a:defRPr>
+            </a:lvl2pPr>
+            <a:lvl3pPr>
+              <a:defRPr sz="2250" b="0">
+                <a:solidFill>
+                  <a:srgbClr val="0E766E"/>
+                </a:solidFill>
+                <a:latin typeface="Arial"/>
+                <a:ea typeface="Arial"/>
+                <a:cs typeface="Arial"/>
+              </a:defRPr>
+            </a:lvl3pPr>
+            <a:lvl4pPr>
+              <a:defRPr sz="2250" b="0">
+                <a:solidFill>
+                  <a:srgbClr val="0E766E"/>
+                </a:solidFill>
+                <a:latin typeface="Arial"/>
+                <a:ea typeface="Arial"/>
+                <a:cs typeface="Arial"/>
+              </a:defRPr>
+            </a:lvl4pPr>
+            <a:lvl5pPr>
+              <a:defRPr sz="2250" b="0">
+                <a:solidFill>
+                  <a:srgbClr val="0E766E"/>
+                </a:solidFill>
+                <a:latin typeface="Arial"/>
+                <a:ea typeface="Arial"/>
+                <a:cs typeface="Arial"/>
+              </a:defRPr>
+            </a:lvl5pPr>
+            <a:lvl6pPr>
+              <a:defRPr sz="2250" b="0">
+                <a:solidFill>
+                  <a:srgbClr val="0E766E"/>
+                </a:solidFill>
+                <a:latin typeface="Arial"/>
+                <a:ea typeface="Arial"/>
+                <a:cs typeface="Arial"/>
+              </a:defRPr>
+            </a:lvl6pPr>
+            <a:lvl7pPr>
+              <a:defRPr sz="2250" b="0">
+                <a:solidFill>
+                  <a:srgbClr val="0E766E"/>
+                </a:solidFill>
+                <a:latin typeface="Arial"/>
+                <a:ea typeface="Arial"/>
+                <a:cs typeface="Arial"/>
+              </a:defRPr>
+            </a:lvl7pPr>
+            <a:lvl8pPr>
+              <a:defRPr sz="2250" b="0">
+                <a:solidFill>
+                  <a:srgbClr val="0E766E"/>
+                </a:solidFill>
+                <a:latin typeface="Arial"/>
+                <a:ea typeface="Arial"/>
+                <a:cs typeface="Arial"/>
+              </a:defRPr>
+            </a:lvl8pPr>
+            <a:lvl9pPr>
+              <a:defRPr sz="2250" b="0">
+                <a:solidFill>
+                  <a:srgbClr val="0E766E"/>
+                </a:solidFill>
+                <a:latin typeface="Arial"/>
+                <a:ea typeface="Arial"/>
+                <a:cs typeface="Arial"/>
+              </a:defRPr>
+            </a:lvl9pPr>
+          </a:lstStyle>
+          <a:p xmlns:a="http://schemas.openxmlformats.org/drawingml/2006/main">
+            <a:pPr>
+              <a:defRPr sz="2250" b="0">
+                <a:solidFill>
+                  <a:srgbClr val="0E766E"/>
+                </a:solidFill>
+                <a:latin typeface="Arial"/>
+                <a:ea typeface="Arial"/>
+                <a:cs typeface="Arial"/>
+              </a:defRPr>
+            </a:pPr>
+            <a:r>
+              <a:rPr sz="2250" b="0">
+                <a:solidFill>
+                  <a:srgbClr val="0E766E"/>
+                </a:solidFill>
+                <a:latin typeface="Arial"/>
+                <a:ea typeface="Arial"/>
+                <a:cs typeface="Arial"/>
+              </a:rPr>
+              <a:t>README, model cards and the audit link every claim to evidence</a:t>
+            </a:r>
+          </a:p>
+        </p:txBody>
+      </p:sp>
+      <p:sp>
+        <p:nvSpPr>
+          <p:cNvPr id="4" name="">
+            <a:extLst xmlns:a="http://schemas.openxmlformats.org/drawingml/2006/main">
+              <a:ext uri="{FF2B5EF4-FFF2-40B4-BE49-F238E27FC236}">
+                <a16:creationId xmlns:a16="http://schemas.microsoft.com/office/drawing/2014/main" id="{EDD01EE2-0D86-4F82-BCC3-9F20BEE763CB}"/>
+              </a:ext>
+            </a:extLst>
+          </p:cNvPr>
+          <p:cNvSpPr>
+            <a:spLocks xmlns:a="http://schemas.openxmlformats.org/drawingml/2006/main" noGrp="1"/>
+          </p:cNvSpPr>
+          <p:nvPr/>
+        </p:nvSpPr>
+        <p:spPr>
+          <a:xfrm xmlns:a="http://schemas.openxmlformats.org/drawingml/2006/main">
+            <a:off x="704850" y="3119438"/>
+            <a:ext cx="10668000" cy="838200"/>
+          </a:xfrm>
+          <a:prstGeom xmlns:a="http://schemas.openxmlformats.org/drawingml/2006/main" prst="rect">
+            <a:avLst/>
+          </a:prstGeom>
+          <a:noFill xmlns:a="http://schemas.openxmlformats.org/drawingml/2006/main"/>
+          <a:ln xmlns:a="http://schemas.openxmlformats.org/drawingml/2006/main" w="0">
+            <a:noFill/>
+          </a:ln>
+        </p:spPr>
+        <p:txBody>
+          <a:bodyPr xmlns:a="http://schemas.openxmlformats.org/drawingml/2006/main"/>
+          <a:lstStyle xmlns:a="http://schemas.openxmlformats.org/drawingml/2006/main">
+            <a:defPPr>
+              <a:defRPr sz="2250" b="0">
+                <a:solidFill>
+                  <a:srgbClr val="17242B"/>
+                </a:solidFill>
+                <a:latin typeface="Arial"/>
+                <a:ea typeface="Arial"/>
+                <a:cs typeface="Arial"/>
+              </a:defRPr>
+            </a:defPPr>
+            <a:lvl1pPr>
+              <a:defRPr sz="2250" b="0">
+                <a:solidFill>
+                  <a:srgbClr val="17242B"/>
+                </a:solidFill>
+                <a:latin typeface="Arial"/>
+                <a:ea typeface="Arial"/>
+                <a:cs typeface="Arial"/>
+              </a:defRPr>
+            </a:lvl1pPr>
+            <a:lvl2pPr>
+              <a:defRPr sz="2250" b="0">
+                <a:solidFill>
+                  <a:srgbClr val="17242B"/>
+                </a:solidFill>
+                <a:latin typeface="Arial"/>
+                <a:ea typeface="Arial"/>
+                <a:cs typeface="Arial"/>
+              </a:defRPr>
+            </a:lvl2pPr>
+            <a:lvl3pPr>
+              <a:defRPr sz="2250" b="0">
+                <a:solidFill>
+                  <a:srgbClr val="17242B"/>
+                </a:solidFill>
+                <a:latin typeface="Arial"/>
+                <a:ea typeface="Arial"/>
+                <a:cs typeface="Arial"/>
+              </a:defRPr>
+            </a:lvl3pPr>
+            <a:lvl4pPr>
+              <a:defRPr sz="2250" b="0">
+                <a:solidFill>
+                  <a:srgbClr val="17242B"/>
+                </a:solidFill>
+                <a:latin typeface="Arial"/>
+                <a:ea typeface="Arial"/>
+                <a:cs typeface="Arial"/>
+              </a:defRPr>
+            </a:lvl4pPr>
+            <a:lvl5pPr>
+              <a:defRPr sz="2250" b="0">
+                <a:solidFill>
+                  <a:srgbClr val="17242B"/>
+                </a:solidFill>
+                <a:latin typeface="Arial"/>
+                <a:ea typeface="Arial"/>
+                <a:cs typeface="Arial"/>
+              </a:defRPr>
+            </a:lvl5pPr>
+            <a:lvl6pPr>
+              <a:defRPr sz="2250" b="0">
+                <a:solidFill>
+                  <a:srgbClr val="17242B"/>
+                </a:solidFill>
+                <a:latin typeface="Arial"/>
+                <a:ea typeface="Arial"/>
+                <a:cs typeface="Arial"/>
+              </a:defRPr>
+            </a:lvl6pPr>
+            <a:lvl7pPr>
+              <a:defRPr sz="2250" b="0">
+                <a:solidFill>
+                  <a:srgbClr val="17242B"/>
+                </a:solidFill>
+                <a:latin typeface="Arial"/>
+                <a:ea typeface="Arial"/>
+                <a:cs typeface="Arial"/>
+              </a:defRPr>
+            </a:lvl7pPr>
+            <a:lvl8pPr>
+              <a:defRPr sz="2250" b="0">
+                <a:solidFill>
+                  <a:srgbClr val="17242B"/>
+                </a:solidFill>
+                <a:latin typeface="Arial"/>
+                <a:ea typeface="Arial"/>
+                <a:cs typeface="Arial"/>
+              </a:defRPr>
+            </a:lvl8pPr>
+            <a:lvl9pPr>
+              <a:defRPr sz="2250" b="0">
+                <a:solidFill>
+                  <a:srgbClr val="17242B"/>
+                </a:solidFill>
+                <a:latin typeface="Arial"/>
+                <a:ea typeface="Arial"/>
+                <a:cs typeface="Arial"/>
+              </a:defRPr>
+            </a:lvl9pPr>
+          </a:lstStyle>
+          <a:p xmlns:a="http://schemas.openxmlformats.org/drawingml/2006/main">
+            <a:pPr>
+              <a:defRPr sz="2250" b="0">
+                <a:solidFill>
+                  <a:srgbClr val="17242B"/>
+                </a:solidFill>
+                <a:latin typeface="Arial"/>
+                <a:ea typeface="Arial"/>
+                <a:cs typeface="Arial"/>
+              </a:defRPr>
+            </a:pPr>
+            <a:r>
+              <a:rPr sz="2250" b="0">
+                <a:solidFill>
+                  <a:srgbClr val="17242B"/>
+                </a:solidFill>
+                <a:latin typeface="Arial"/>
+                <a:ea typeface="Arial"/>
+                <a:cs typeface="Arial"/>
+              </a:rPr>
+              <a:t>Persisted inference reproduces the benchmark and exposes exact feature calculations</a:t>
+            </a:r>
+          </a:p>
+        </p:txBody>
+      </p:sp>
+      <p:sp>
+        <p:nvSpPr>
+          <p:cNvPr id="5" name="">
+            <a:extLst xmlns:a="http://schemas.openxmlformats.org/drawingml/2006/main">
+              <a:ext uri="{FF2B5EF4-FFF2-40B4-BE49-F238E27FC236}">
+                <a16:creationId xmlns:a16="http://schemas.microsoft.com/office/drawing/2014/main" id="{3D6332EB-7736-4E1E-96B9-6F0CAAFE45DC}"/>
+              </a:ext>
+            </a:extLst>
+          </p:cNvPr>
+          <p:cNvSpPr>
+            <a:spLocks xmlns:a="http://schemas.openxmlformats.org/drawingml/2006/main" noGrp="1"/>
+          </p:cNvSpPr>
+          <p:nvPr/>
+        </p:nvSpPr>
+        <p:spPr>
+          <a:xfrm xmlns:a="http://schemas.openxmlformats.org/drawingml/2006/main">
+            <a:off x="704850" y="4048125"/>
+            <a:ext cx="10668000" cy="838200"/>
+          </a:xfrm>
+          <a:prstGeom xmlns:a="http://schemas.openxmlformats.org/drawingml/2006/main" prst="rect">
+            <a:avLst/>
+          </a:prstGeom>
+          <a:noFill xmlns:a="http://schemas.openxmlformats.org/drawingml/2006/main"/>
+          <a:ln xmlns:a="http://schemas.openxmlformats.org/drawingml/2006/main" w="0">
+            <a:noFill/>
+          </a:ln>
+        </p:spPr>
+        <p:txBody>
+          <a:bodyPr xmlns:a="http://schemas.openxmlformats.org/drawingml/2006/main"/>
+          <a:lstStyle xmlns:a="http://schemas.openxmlformats.org/drawingml/2006/main">
+            <a:defPPr>
+              <a:defRPr sz="2250" b="0">
+                <a:solidFill>
+                  <a:srgbClr val="17242B"/>
+                </a:solidFill>
+                <a:latin typeface="Arial"/>
+                <a:ea typeface="Arial"/>
+                <a:cs typeface="Arial"/>
+              </a:defRPr>
+            </a:defPPr>
+            <a:lvl1pPr>
+              <a:defRPr sz="2250" b="0">
+                <a:solidFill>
+                  <a:srgbClr val="17242B"/>
+                </a:solidFill>
+                <a:latin typeface="Arial"/>
+                <a:ea typeface="Arial"/>
+                <a:cs typeface="Arial"/>
+              </a:defRPr>
+            </a:lvl1pPr>
+            <a:lvl2pPr>
+              <a:defRPr sz="2250" b="0">
+                <a:solidFill>
+                  <a:srgbClr val="17242B"/>
+                </a:solidFill>
+                <a:latin typeface="Arial"/>
+                <a:ea typeface="Arial"/>
+                <a:cs typeface="Arial"/>
+              </a:defRPr>
+            </a:lvl2pPr>
+            <a:lvl3pPr>
+              <a:defRPr sz="2250" b="0">
+                <a:solidFill>
+                  <a:srgbClr val="17242B"/>
+                </a:solidFill>
+                <a:latin typeface="Arial"/>
+                <a:ea typeface="Arial"/>
+                <a:cs typeface="Arial"/>
+              </a:defRPr>
+            </a:lvl3pPr>
+            <a:lvl4pPr>
+              <a:defRPr sz="2250" b="0">
+                <a:solidFill>
+                  <a:srgbClr val="17242B"/>
+                </a:solidFill>
+                <a:latin typeface="Arial"/>
+                <a:ea typeface="Arial"/>
+                <a:cs typeface="Arial"/>
+              </a:defRPr>
+            </a:lvl4pPr>
+            <a:lvl5pPr>
+              <a:defRPr sz="2250" b="0">
+                <a:solidFill>
+                  <a:srgbClr val="17242B"/>
+                </a:solidFill>
+                <a:latin typeface="Arial"/>
+                <a:ea typeface="Arial"/>
+                <a:cs typeface="Arial"/>
+              </a:defRPr>
+            </a:lvl5pPr>
+            <a:lvl6pPr>
+              <a:defRPr sz="2250" b="0">
+                <a:solidFill>
+                  <a:srgbClr val="17242B"/>
+                </a:solidFill>
+                <a:latin typeface="Arial"/>
+                <a:ea typeface="Arial"/>
+                <a:cs typeface="Arial"/>
+              </a:defRPr>
+            </a:lvl6pPr>
+            <a:lvl7pPr>
+              <a:defRPr sz="2250" b="0">
+                <a:solidFill>
+                  <a:srgbClr val="17242B"/>
+                </a:solidFill>
+                <a:latin typeface="Arial"/>
+                <a:ea typeface="Arial"/>
+                <a:cs typeface="Arial"/>
+              </a:defRPr>
+            </a:lvl7pPr>
+            <a:lvl8pPr>
+              <a:defRPr sz="2250" b="0">
+                <a:solidFill>
+                  <a:srgbClr val="17242B"/>
+                </a:solidFill>
+                <a:latin typeface="Arial"/>
+                <a:ea typeface="Arial"/>
+                <a:cs typeface="Arial"/>
+              </a:defRPr>
+            </a:lvl8pPr>
+            <a:lvl9pPr>
+              <a:defRPr sz="2250" b="0">
+                <a:solidFill>
+                  <a:srgbClr val="17242B"/>
+                </a:solidFill>
+                <a:latin typeface="Arial"/>
+                <a:ea typeface="Arial"/>
+                <a:cs typeface="Arial"/>
+              </a:defRPr>
+            </a:lvl9pPr>
+          </a:lstStyle>
+          <a:p xmlns:a="http://schemas.openxmlformats.org/drawingml/2006/main">
+            <a:pPr>
+              <a:defRPr sz="2250" b="0">
+                <a:solidFill>
+                  <a:srgbClr val="17242B"/>
+                </a:solidFill>
+                <a:latin typeface="Arial"/>
+                <a:ea typeface="Arial"/>
+                <a:cs typeface="Arial"/>
+              </a:defRPr>
+            </a:pPr>
+            <a:r>
+              <a:rPr sz="2250" b="0">
+                <a:solidFill>
+                  <a:srgbClr val="17242B"/>
+                </a:solidFill>
+                <a:latin typeface="Arial"/>
+                <a:ea typeface="Arial"/>
+                <a:cs typeface="Arial"/>
+              </a:rPr>
+              <a:t>The required video remains a human recording and upload task</a:t>
+            </a:r>
+          </a:p>
+        </p:txBody>
+      </p:sp>
+      <p:sp>
+        <p:nvSpPr>
+          <p:cNvPr id="6" name="">
+            <a:extLst xmlns:a="http://schemas.openxmlformats.org/drawingml/2006/main">
+              <a:ext uri="{FF2B5EF4-FFF2-40B4-BE49-F238E27FC236}">
+                <a16:creationId xmlns:a16="http://schemas.microsoft.com/office/drawing/2014/main" id="{28AFC2CC-828D-4A86-94B8-47BB07FE5F79}"/>
+              </a:ext>
+            </a:extLst>
+          </p:cNvPr>
+          <p:cNvSpPr>
+            <a:spLocks xmlns:a="http://schemas.openxmlformats.org/drawingml/2006/main" noGrp="1"/>
+          </p:cNvSpPr>
+          <p:nvPr/>
+        </p:nvSpPr>
+        <p:spPr>
+          <a:xfrm xmlns:a="http://schemas.openxmlformats.org/drawingml/2006/main">
+            <a:off x="704850" y="4976813"/>
+            <a:ext cx="10668000" cy="838200"/>
+          </a:xfrm>
+          <a:prstGeom xmlns:a="http://schemas.openxmlformats.org/drawingml/2006/main" prst="rect">
+            <a:avLst/>
+          </a:prstGeom>
+          <a:noFill xmlns:a="http://schemas.openxmlformats.org/drawingml/2006/main"/>
+          <a:ln xmlns:a="http://schemas.openxmlformats.org/drawingml/2006/main" w="0">
+            <a:noFill/>
+          </a:ln>
+        </p:spPr>
+        <p:txBody>
+          <a:bodyPr xmlns:a="http://schemas.openxmlformats.org/drawingml/2006/main"/>
+          <a:lstStyle xmlns:a="http://schemas.openxmlformats.org/drawingml/2006/main">
+            <a:defPPr>
+              <a:defRPr sz="2250" b="0">
+                <a:solidFill>
+                  <a:srgbClr val="17242B"/>
+                </a:solidFill>
+                <a:latin typeface="Arial"/>
+                <a:ea typeface="Arial"/>
+                <a:cs typeface="Arial"/>
+              </a:defRPr>
+            </a:defPPr>
+            <a:lvl1pPr>
+              <a:defRPr sz="2250" b="0">
+                <a:solidFill>
+                  <a:srgbClr val="17242B"/>
+                </a:solidFill>
+                <a:latin typeface="Arial"/>
+                <a:ea typeface="Arial"/>
+                <a:cs typeface="Arial"/>
+              </a:defRPr>
+            </a:lvl1pPr>
+            <a:lvl2pPr>
+              <a:defRPr sz="2250" b="0">
+                <a:solidFill>
+                  <a:srgbClr val="17242B"/>
+                </a:solidFill>
+                <a:latin typeface="Arial"/>
+                <a:ea typeface="Arial"/>
+                <a:cs typeface="Arial"/>
+              </a:defRPr>
+            </a:lvl2pPr>
+            <a:lvl3pPr>
+              <a:defRPr sz="2250" b="0">
+                <a:solidFill>
+                  <a:srgbClr val="17242B"/>
+                </a:solidFill>
+                <a:latin typeface="Arial"/>
+                <a:ea typeface="Arial"/>
+                <a:cs typeface="Arial"/>
+              </a:defRPr>
+            </a:lvl3pPr>
+            <a:lvl4pPr>
+              <a:defRPr sz="2250" b="0">
+                <a:solidFill>
+                  <a:srgbClr val="17242B"/>
+                </a:solidFill>
+                <a:latin typeface="Arial"/>
+                <a:ea typeface="Arial"/>
+                <a:cs typeface="Arial"/>
+              </a:defRPr>
+            </a:lvl4pPr>
+            <a:lvl5pPr>
+              <a:defRPr sz="2250" b="0">
+                <a:solidFill>
+                  <a:srgbClr val="17242B"/>
+                </a:solidFill>
+                <a:latin typeface="Arial"/>
+                <a:ea typeface="Arial"/>
+                <a:cs typeface="Arial"/>
+              </a:defRPr>
+            </a:lvl5pPr>
+            <a:lvl6pPr>
+              <a:defRPr sz="2250" b="0">
+                <a:solidFill>
+                  <a:srgbClr val="17242B"/>
+                </a:solidFill>
+                <a:latin typeface="Arial"/>
+                <a:ea typeface="Arial"/>
+                <a:cs typeface="Arial"/>
+              </a:defRPr>
+            </a:lvl6pPr>
+            <a:lvl7pPr>
+              <a:defRPr sz="2250" b="0">
+                <a:solidFill>
+                  <a:srgbClr val="17242B"/>
+                </a:solidFill>
+                <a:latin typeface="Arial"/>
+                <a:ea typeface="Arial"/>
+                <a:cs typeface="Arial"/>
+              </a:defRPr>
+            </a:lvl7pPr>
+            <a:lvl8pPr>
+              <a:defRPr sz="2250" b="0">
+                <a:solidFill>
+                  <a:srgbClr val="17242B"/>
+                </a:solidFill>
+                <a:latin typeface="Arial"/>
+                <a:ea typeface="Arial"/>
+                <a:cs typeface="Arial"/>
+              </a:defRPr>
+            </a:lvl8pPr>
+            <a:lvl9pPr>
+              <a:defRPr sz="2250" b="0">
+                <a:solidFill>
+                  <a:srgbClr val="17242B"/>
+                </a:solidFill>
+                <a:latin typeface="Arial"/>
+                <a:ea typeface="Arial"/>
+                <a:cs typeface="Arial"/>
+              </a:defRPr>
+            </a:lvl9pPr>
+          </a:lstStyle>
+          <a:p xmlns:a="http://schemas.openxmlformats.org/drawingml/2006/main">
+            <a:pPr>
+              <a:defRPr sz="2250" b="0">
+                <a:solidFill>
+                  <a:srgbClr val="17242B"/>
+                </a:solidFill>
+                <a:latin typeface="Arial"/>
+                <a:ea typeface="Arial"/>
+                <a:cs typeface="Arial"/>
+              </a:defRPr>
+            </a:pPr>
+            <a:r>
+              <a:rPr sz="2250" b="0">
+                <a:solidFill>
+                  <a:srgbClr val="17242B"/>
+                </a:solidFill>
+                <a:latin typeface="Arial"/>
+                <a:ea typeface="Arial"/>
+                <a:cs typeface="Arial"/>
+              </a:rPr>
+              <a:t>Clinical validation, clinician feedback and sim-to-real evaluation remain outstanding</a:t>
+            </a:r>
+          </a:p>
+        </p:txBody>
+      </p:sp>
+      <p:sp>
+        <p:nvSpPr>
+          <p:cNvPr id="7" name="">
+            <a:extLst xmlns:a="http://schemas.openxmlformats.org/drawingml/2006/main">
+              <a:ext uri="{FF2B5EF4-FFF2-40B4-BE49-F238E27FC236}">
+                <a16:creationId xmlns:a16="http://schemas.microsoft.com/office/drawing/2014/main" id="{C6CEA286-A2BA-4A30-BFD8-F17865CEF97E}"/>
+              </a:ext>
+            </a:extLst>
+          </p:cNvPr>
+          <p:cNvSpPr>
+            <a:spLocks xmlns:a="http://schemas.openxmlformats.org/drawingml/2006/main" noGrp="1"/>
+          </p:cNvSpPr>
+          <p:nvPr/>
+        </p:nvSpPr>
+        <p:spPr>
+          <a:xfrm xmlns:a="http://schemas.openxmlformats.org/drawingml/2006/main">
+            <a:off x="609600" y="6343650"/>
+            <a:ext cx="10972800" cy="285750"/>
+          </a:xfrm>
+          <a:prstGeom xmlns:a="http://schemas.openxmlformats.org/drawingml/2006/main" prst="rect">
+            <a:avLst/>
+          </a:prstGeom>
+          <a:noFill xmlns:a="http://schemas.openxmlformats.org/drawingml/2006/main"/>
+          <a:ln xmlns:a="http://schemas.openxmlformats.org/drawingml/2006/main" w="0">
+            <a:noFill/>
+          </a:ln>
+        </p:spPr>
+        <p:txBody>
+          <a:bodyPr xmlns:a="http://schemas.openxmlformats.org/drawingml/2006/main"/>
+          <a:lstStyle xmlns:a="http://schemas.openxmlformats.org/drawingml/2006/main">
+            <a:defPPr>
+              <a:defRPr sz="1350" b="0">
+                <a:solidFill>
+                  <a:srgbClr val="65757B"/>
+                </a:solidFill>
+                <a:latin typeface="Arial"/>
+                <a:ea typeface="Arial"/>
+                <a:cs typeface="Arial"/>
+              </a:defRPr>
+            </a:defPPr>
+            <a:lvl1pPr>
+              <a:defRPr sz="1350" b="0">
+                <a:solidFill>
+                  <a:srgbClr val="65757B"/>
+                </a:solidFill>
+                <a:latin typeface="Arial"/>
+                <a:ea typeface="Arial"/>
+                <a:cs typeface="Arial"/>
+              </a:defRPr>
+            </a:lvl1pPr>
+            <a:lvl2pPr>
+              <a:defRPr sz="1350" b="0">
+                <a:solidFill>
+                  <a:srgbClr val="65757B"/>
+                </a:solidFill>
+                <a:latin typeface="Arial"/>
+                <a:ea typeface="Arial"/>
+                <a:cs typeface="Arial"/>
+              </a:defRPr>
+            </a:lvl2pPr>
+            <a:lvl3pPr>
+              <a:defRPr sz="1350" b="0">
+                <a:solidFill>
+                  <a:srgbClr val="65757B"/>
+                </a:solidFill>
+                <a:latin typeface="Arial"/>
+                <a:ea typeface="Arial"/>
+                <a:cs typeface="Arial"/>
+              </a:defRPr>
+            </a:lvl3pPr>
+            <a:lvl4pPr>
+              <a:defRPr sz="1350" b="0">
+                <a:solidFill>
+                  <a:srgbClr val="65757B"/>
+                </a:solidFill>
+                <a:latin typeface="Arial"/>
+                <a:ea typeface="Arial"/>
+                <a:cs typeface="Arial"/>
+              </a:defRPr>
+            </a:lvl4pPr>
+            <a:lvl5pPr>
+              <a:defRPr sz="1350" b="0">
+                <a:solidFill>
+                  <a:srgbClr val="65757B"/>
+                </a:solidFill>
+                <a:latin typeface="Arial"/>
+                <a:ea typeface="Arial"/>
+                <a:cs typeface="Arial"/>
+              </a:defRPr>
+            </a:lvl5pPr>
+            <a:lvl6pPr>
+              <a:defRPr sz="1350" b="0">
+                <a:solidFill>
+                  <a:srgbClr val="65757B"/>
+                </a:solidFill>
+                <a:latin typeface="Arial"/>
+                <a:ea typeface="Arial"/>
+                <a:cs typeface="Arial"/>
+              </a:defRPr>
+            </a:lvl6pPr>
+            <a:lvl7pPr>
+              <a:defRPr sz="1350" b="0">
+                <a:solidFill>
+                  <a:srgbClr val="65757B"/>
+                </a:solidFill>
+                <a:latin typeface="Arial"/>
+                <a:ea typeface="Arial"/>
+                <a:cs typeface="Arial"/>
+              </a:defRPr>
+            </a:lvl7pPr>
+            <a:lvl8pPr>
+              <a:defRPr sz="1350" b="0">
+                <a:solidFill>
+                  <a:srgbClr val="65757B"/>
+                </a:solidFill>
+                <a:latin typeface="Arial"/>
+                <a:ea typeface="Arial"/>
+                <a:cs typeface="Arial"/>
+              </a:defRPr>
+            </a:lvl8pPr>
+            <a:lvl9pPr>
+              <a:defRPr sz="1350" b="0">
+                <a:solidFill>
+                  <a:srgbClr val="65757B"/>
+                </a:solidFill>
+                <a:latin typeface="Arial"/>
+                <a:ea typeface="Arial"/>
+                <a:cs typeface="Arial"/>
+              </a:defRPr>
+            </a:lvl9pPr>
+          </a:lstStyle>
+          <a:p xmlns:a="http://schemas.openxmlformats.org/drawingml/2006/main">
+            <a:pPr>
+              <a:defRPr sz="1350" b="0">
+                <a:solidFill>
+                  <a:srgbClr val="65757B"/>
+                </a:solidFill>
+                <a:latin typeface="Arial"/>
+                <a:ea typeface="Arial"/>
+                <a:cs typeface="Arial"/>
+              </a:defRPr>
+            </a:pPr>
+            <a:r>
+              <a:rPr sz="1350" b="0">
+                <a:solidFill>
+                  <a:srgbClr val="65757B"/>
+                </a:solidFill>
+                <a:latin typeface="Arial"/>
+                <a:ea typeface="Arial"/>
+                <a:cs typeface="Arial"/>
+              </a:rPr>
+              <a:t>Synthetic research prototype. Not for diagnosis, contraception or conception planning.</a:t>
+            </a:r>
+          </a:p>
+        </p:txBody>
+      </p:sp>
+    </p:spTree>
+    <p:extLst>
+      <p:ext uri="{BB962C8B-B14F-4D97-AF65-F5344CB8AC3E}">
+        <p14:creationId xmlns:p14="http://schemas.microsoft.com/office/powerpoint/2010/main" val="1839727424"/>
       </p:ext>
     </p:extLst>
   </p:cSld>
@@ -20002,7 +21194,7 @@
           <p:cNvPr id="8" name="">
             <a:extLst xmlns:a="http://schemas.openxmlformats.org/drawingml/2006/main">
               <a:ext uri="{FF2B5EF4-FFF2-40B4-BE49-F238E27FC236}">
-                <a16:creationId xmlns:a16="http://schemas.microsoft.com/office/drawing/2014/main" id="{D83E79EF-6E18-4E57-99AA-83835FE1BABE}"/>
+                <a16:creationId xmlns:a16="http://schemas.microsoft.com/office/drawing/2014/main" id="{B36368FC-9A8F-4D19-B1EF-8EB2B2AC5DB6}"/>
               </a:ext>
             </a:extLst>
           </p:cNvPr>
@@ -20158,7 +21350,7 @@
           <p:cNvPr id="2" name="">
             <a:extLst xmlns:a="http://schemas.openxmlformats.org/drawingml/2006/main">
               <a:ext uri="{FF2B5EF4-FFF2-40B4-BE49-F238E27FC236}">
-                <a16:creationId xmlns:a16="http://schemas.microsoft.com/office/drawing/2014/main" id="{3870A3D9-A4A9-4295-A143-88C72159EF28}"/>
+                <a16:creationId xmlns:a16="http://schemas.microsoft.com/office/drawing/2014/main" id="{385D7F32-8D98-433B-83CD-79D77B35FEFB}"/>
               </a:ext>
             </a:extLst>
           </p:cNvPr>
@@ -20314,7 +21506,7 @@
           <p:cNvPr id="3" name="">
             <a:extLst xmlns:a="http://schemas.openxmlformats.org/drawingml/2006/main">
               <a:ext uri="{FF2B5EF4-FFF2-40B4-BE49-F238E27FC236}">
-                <a16:creationId xmlns:a16="http://schemas.microsoft.com/office/drawing/2014/main" id="{D1EFDED5-65EC-4E5F-90B2-0EC032BA5050}"/>
+                <a16:creationId xmlns:a16="http://schemas.microsoft.com/office/drawing/2014/main" id="{5231DC8C-B039-46AC-87AA-3D15020C7FAE}"/>
               </a:ext>
             </a:extLst>
           </p:cNvPr>
@@ -20470,7 +21662,7 @@
           <p:cNvPr id="4" name="">
             <a:extLst xmlns:a="http://schemas.openxmlformats.org/drawingml/2006/main">
               <a:ext uri="{FF2B5EF4-FFF2-40B4-BE49-F238E27FC236}">
-                <a16:creationId xmlns:a16="http://schemas.microsoft.com/office/drawing/2014/main" id="{7B4F0C33-B57D-4FCA-BD41-04E852CBF20F}"/>
+                <a16:creationId xmlns:a16="http://schemas.microsoft.com/office/drawing/2014/main" id="{42D49F90-C363-402B-A4E8-CD20D06720D0}"/>
               </a:ext>
             </a:extLst>
           </p:cNvPr>
@@ -20626,7 +21818,7 @@
           <p:cNvPr id="5" name="">
             <a:extLst xmlns:a="http://schemas.openxmlformats.org/drawingml/2006/main">
               <a:ext uri="{FF2B5EF4-FFF2-40B4-BE49-F238E27FC236}">
-                <a16:creationId xmlns:a16="http://schemas.microsoft.com/office/drawing/2014/main" id="{769F2DD1-6657-4C03-ABBA-E7C39CEED19D}"/>
+                <a16:creationId xmlns:a16="http://schemas.microsoft.com/office/drawing/2014/main" id="{5023C667-4934-44FB-946B-092D0C0F2C60}"/>
               </a:ext>
             </a:extLst>
           </p:cNvPr>
@@ -20782,7 +21974,7 @@
           <p:cNvPr id="6" name="">
             <a:extLst xmlns:a="http://schemas.openxmlformats.org/drawingml/2006/main">
               <a:ext uri="{FF2B5EF4-FFF2-40B4-BE49-F238E27FC236}">
-                <a16:creationId xmlns:a16="http://schemas.microsoft.com/office/drawing/2014/main" id="{FFE85B63-7686-4B6C-8561-A0ED9234210C}"/>
+                <a16:creationId xmlns:a16="http://schemas.microsoft.com/office/drawing/2014/main" id="{A235F1BD-2B2E-40B4-9903-E43476DF2F3A}"/>
               </a:ext>
             </a:extLst>
           </p:cNvPr>
@@ -20938,7 +22130,7 @@
           <p:cNvPr id="7" name="">
             <a:extLst xmlns:a="http://schemas.openxmlformats.org/drawingml/2006/main">
               <a:ext uri="{FF2B5EF4-FFF2-40B4-BE49-F238E27FC236}">
-                <a16:creationId xmlns:a16="http://schemas.microsoft.com/office/drawing/2014/main" id="{DBF18C4D-427A-4916-99B3-B9267EA054AE}"/>
+                <a16:creationId xmlns:a16="http://schemas.microsoft.com/office/drawing/2014/main" id="{D6975116-9541-43E1-BD95-9D33499C0D5C}"/>
               </a:ext>
             </a:extLst>
           </p:cNvPr>
@@ -21092,7 +22284,7 @@
     </p:spTree>
     <p:extLst>
       <p:ext uri="{BB962C8B-B14F-4D97-AF65-F5344CB8AC3E}">
-        <p14:creationId xmlns:p14="http://schemas.microsoft.com/office/powerpoint/2010/main" val="750616941"/>
+        <p14:creationId xmlns:p14="http://schemas.microsoft.com/office/powerpoint/2010/main" val="746598386"/>
       </p:ext>
     </p:extLst>
   </p:cSld>
@@ -21123,7 +22315,7 @@
           <p:cNvPr id="7" name="">
             <a:extLst xmlns:a="http://schemas.openxmlformats.org/drawingml/2006/main">
               <a:ext uri="{FF2B5EF4-FFF2-40B4-BE49-F238E27FC236}">
-                <a16:creationId xmlns:a16="http://schemas.microsoft.com/office/drawing/2014/main" id="{EA018C51-0B34-49F1-B294-FF449870E4EA}"/>
+                <a16:creationId xmlns:a16="http://schemas.microsoft.com/office/drawing/2014/main" id="{9AC44C2E-DC99-47BF-A7C6-9788A4DE9406}"/>
               </a:ext>
             </a:extLst>
           </p:cNvPr>
@@ -21279,7 +22471,7 @@
           <p:cNvPr id="2" name="">
             <a:extLst xmlns:a="http://schemas.openxmlformats.org/drawingml/2006/main">
               <a:ext uri="{FF2B5EF4-FFF2-40B4-BE49-F238E27FC236}">
-                <a16:creationId xmlns:a16="http://schemas.microsoft.com/office/drawing/2014/main" id="{74DA6BA5-DB16-4D75-BEAB-17918655AA36}"/>
+                <a16:creationId xmlns:a16="http://schemas.microsoft.com/office/drawing/2014/main" id="{FAF2E72C-E165-47EF-B889-7D4C1F849148}"/>
               </a:ext>
             </a:extLst>
           </p:cNvPr>
@@ -21435,7 +22627,7 @@
           <p:cNvPr id="3" name="">
             <a:extLst xmlns:a="http://schemas.openxmlformats.org/drawingml/2006/main">
               <a:ext uri="{FF2B5EF4-FFF2-40B4-BE49-F238E27FC236}">
-                <a16:creationId xmlns:a16="http://schemas.microsoft.com/office/drawing/2014/main" id="{EEB1CD32-C566-497F-9BB3-49310EDB6476}"/>
+                <a16:creationId xmlns:a16="http://schemas.microsoft.com/office/drawing/2014/main" id="{922B7294-A6BD-4890-AFAE-1C697873490C}"/>
               </a:ext>
             </a:extLst>
           </p:cNvPr>
@@ -21591,7 +22783,7 @@
           <p:cNvPr id="4" name="">
             <a:extLst xmlns:a="http://schemas.openxmlformats.org/drawingml/2006/main">
               <a:ext uri="{FF2B5EF4-FFF2-40B4-BE49-F238E27FC236}">
-                <a16:creationId xmlns:a16="http://schemas.microsoft.com/office/drawing/2014/main" id="{A69A583D-EAA0-43E1-A358-9F8466DBCE7A}"/>
+                <a16:creationId xmlns:a16="http://schemas.microsoft.com/office/drawing/2014/main" id="{DD13364C-3278-4A8A-A804-E8DA0C64C141}"/>
               </a:ext>
             </a:extLst>
           </p:cNvPr>
@@ -21747,7 +22939,7 @@
           <p:cNvPr id="5" name="">
             <a:extLst xmlns:a="http://schemas.openxmlformats.org/drawingml/2006/main">
               <a:ext uri="{FF2B5EF4-FFF2-40B4-BE49-F238E27FC236}">
-                <a16:creationId xmlns:a16="http://schemas.microsoft.com/office/drawing/2014/main" id="{25708DDA-CA9B-424C-BDF5-90DC580E29B0}"/>
+                <a16:creationId xmlns:a16="http://schemas.microsoft.com/office/drawing/2014/main" id="{14F78677-E4D8-4C73-B2A1-0D7FBB052771}"/>
               </a:ext>
             </a:extLst>
           </p:cNvPr>
@@ -21903,7 +23095,7 @@
           <p:cNvPr id="6" name="">
             <a:extLst xmlns:a="http://schemas.openxmlformats.org/drawingml/2006/main">
               <a:ext uri="{FF2B5EF4-FFF2-40B4-BE49-F238E27FC236}">
-                <a16:creationId xmlns:a16="http://schemas.microsoft.com/office/drawing/2014/main" id="{E44559E9-2FCB-4D38-86E7-7CB7B1DD6F26}"/>
+                <a16:creationId xmlns:a16="http://schemas.microsoft.com/office/drawing/2014/main" id="{79F7853F-F112-47B8-B1E9-E6900D5ECE80}"/>
               </a:ext>
             </a:extLst>
           </p:cNvPr>
@@ -22057,7 +23249,7 @@
     </p:spTree>
     <p:extLst>
       <p:ext uri="{BB962C8B-B14F-4D97-AF65-F5344CB8AC3E}">
-        <p14:creationId xmlns:p14="http://schemas.microsoft.com/office/powerpoint/2010/main" val="1465311195"/>
+        <p14:creationId xmlns:p14="http://schemas.microsoft.com/office/powerpoint/2010/main" val="614248147"/>
       </p:ext>
     </p:extLst>
   </p:cSld>
@@ -22088,7 +23280,7 @@
           <p:cNvPr id="14" name="">
             <a:extLst xmlns:a="http://schemas.openxmlformats.org/drawingml/2006/main">
               <a:ext uri="{FF2B5EF4-FFF2-40B4-BE49-F238E27FC236}">
-                <a16:creationId xmlns:a16="http://schemas.microsoft.com/office/drawing/2014/main" id="{F6EC9529-7A32-466B-8FBB-2BA741B991A5}"/>
+                <a16:creationId xmlns:a16="http://schemas.microsoft.com/office/drawing/2014/main" id="{539DE017-D964-40A8-8089-6C8503491D5D}"/>
               </a:ext>
             </a:extLst>
           </p:cNvPr>
@@ -22119,7 +23311,7 @@
           <p:cNvPr id="13" name="">
             <a:extLst xmlns:a="http://schemas.openxmlformats.org/drawingml/2006/main">
               <a:ext uri="{FF2B5EF4-FFF2-40B4-BE49-F238E27FC236}">
-                <a16:creationId xmlns:a16="http://schemas.microsoft.com/office/drawing/2014/main" id="{0C1755E7-6FC3-4810-9854-60A7294F4B2D}"/>
+                <a16:creationId xmlns:a16="http://schemas.microsoft.com/office/drawing/2014/main" id="{D7D6CCDC-4306-41DA-8D81-073C279A0667}"/>
               </a:ext>
             </a:extLst>
           </p:cNvPr>
@@ -22150,7 +23342,7 @@
           <p:cNvPr id="12" name="">
             <a:extLst xmlns:a="http://schemas.openxmlformats.org/drawingml/2006/main">
               <a:ext uri="{FF2B5EF4-FFF2-40B4-BE49-F238E27FC236}">
-                <a16:creationId xmlns:a16="http://schemas.microsoft.com/office/drawing/2014/main" id="{CCEDFC67-13A2-47D1-A611-321C9917C43A}"/>
+                <a16:creationId xmlns:a16="http://schemas.microsoft.com/office/drawing/2014/main" id="{3BF63360-4D37-4404-8333-562F99A1B348}"/>
               </a:ext>
             </a:extLst>
           </p:cNvPr>
@@ -22181,7 +23373,7 @@
           <p:cNvPr id="11" name="">
             <a:extLst xmlns:a="http://schemas.openxmlformats.org/drawingml/2006/main">
               <a:ext uri="{FF2B5EF4-FFF2-40B4-BE49-F238E27FC236}">
-                <a16:creationId xmlns:a16="http://schemas.microsoft.com/office/drawing/2014/main" id="{5C47D27E-0CC1-41BC-ADE5-97E259A6AEBA}"/>
+                <a16:creationId xmlns:a16="http://schemas.microsoft.com/office/drawing/2014/main" id="{56D3A903-1A65-417C-91DD-F0FFBFCCBB94}"/>
               </a:ext>
             </a:extLst>
           </p:cNvPr>
@@ -22214,7 +23406,7 @@
           <p:cNvPr id="10" name="">
             <a:extLst xmlns:a="http://schemas.openxmlformats.org/drawingml/2006/main">
               <a:ext uri="{FF2B5EF4-FFF2-40B4-BE49-F238E27FC236}">
-                <a16:creationId xmlns:a16="http://schemas.microsoft.com/office/drawing/2014/main" id="{0D3D0252-9FD8-43DA-A4F1-262815114FEB}"/>
+                <a16:creationId xmlns:a16="http://schemas.microsoft.com/office/drawing/2014/main" id="{8A6EB14B-F1B6-4F19-83F8-44D26C81DF67}"/>
               </a:ext>
             </a:extLst>
           </p:cNvPr>
@@ -22247,7 +23439,7 @@
           <p:cNvPr id="16" name="">
             <a:extLst xmlns:a="http://schemas.openxmlformats.org/drawingml/2006/main">
               <a:ext uri="{FF2B5EF4-FFF2-40B4-BE49-F238E27FC236}">
-                <a16:creationId xmlns:a16="http://schemas.microsoft.com/office/drawing/2014/main" id="{11AF3406-0847-4B6A-80A8-F1EF8351598D}"/>
+                <a16:creationId xmlns:a16="http://schemas.microsoft.com/office/drawing/2014/main" id="{14C2DFB2-F87D-4EB1-A7AB-6D60CD311F4A}"/>
               </a:ext>
             </a:extLst>
           </p:cNvPr>
@@ -22403,7 +23595,7 @@
           <p:cNvPr id="2" name="">
             <a:extLst xmlns:a="http://schemas.openxmlformats.org/drawingml/2006/main">
               <a:ext uri="{FF2B5EF4-FFF2-40B4-BE49-F238E27FC236}">
-                <a16:creationId xmlns:a16="http://schemas.microsoft.com/office/drawing/2014/main" id="{24CFF850-CA53-4C3D-A704-6977B488928B}"/>
+                <a16:creationId xmlns:a16="http://schemas.microsoft.com/office/drawing/2014/main" id="{1F244C69-6F84-45A0-8203-A8B232DD4D09}"/>
               </a:ext>
             </a:extLst>
           </p:cNvPr>
@@ -22559,7 +23751,7 @@
           <p:cNvPr id="3" name="">
             <a:extLst xmlns:a="http://schemas.openxmlformats.org/drawingml/2006/main">
               <a:ext uri="{FF2B5EF4-FFF2-40B4-BE49-F238E27FC236}">
-                <a16:creationId xmlns:a16="http://schemas.microsoft.com/office/drawing/2014/main" id="{0F7ECB7E-C0A3-4370-909A-656D1818D51D}"/>
+                <a16:creationId xmlns:a16="http://schemas.microsoft.com/office/drawing/2014/main" id="{B941BEA2-D84C-48A0-886A-24104341E4D6}"/>
               </a:ext>
             </a:extLst>
           </p:cNvPr>
@@ -22742,7 +23934,7 @@
           <p:cNvPr id="4" name="">
             <a:extLst xmlns:a="http://schemas.openxmlformats.org/drawingml/2006/main">
               <a:ext uri="{FF2B5EF4-FFF2-40B4-BE49-F238E27FC236}">
-                <a16:creationId xmlns:a16="http://schemas.microsoft.com/office/drawing/2014/main" id="{9779EBD5-EEC6-41BD-8036-6AD662979584}"/>
+                <a16:creationId xmlns:a16="http://schemas.microsoft.com/office/drawing/2014/main" id="{31CA75CA-F239-4CA0-87AF-EA6C4A9A2C54}"/>
               </a:ext>
             </a:extLst>
           </p:cNvPr>
@@ -22925,7 +24117,7 @@
           <p:cNvPr id="5" name="">
             <a:extLst xmlns:a="http://schemas.openxmlformats.org/drawingml/2006/main">
               <a:ext uri="{FF2B5EF4-FFF2-40B4-BE49-F238E27FC236}">
-                <a16:creationId xmlns:a16="http://schemas.microsoft.com/office/drawing/2014/main" id="{73A51120-F346-49BE-8042-AD3C05445CAA}"/>
+                <a16:creationId xmlns:a16="http://schemas.microsoft.com/office/drawing/2014/main" id="{BC089E84-9A90-4C7D-AA9B-34837A497AAD}"/>
               </a:ext>
             </a:extLst>
           </p:cNvPr>
@@ -23108,7 +24300,7 @@
           <p:cNvPr id="6" name="">
             <a:extLst xmlns:a="http://schemas.openxmlformats.org/drawingml/2006/main">
               <a:ext uri="{FF2B5EF4-FFF2-40B4-BE49-F238E27FC236}">
-                <a16:creationId xmlns:a16="http://schemas.microsoft.com/office/drawing/2014/main" id="{9CF5EAC9-59C3-4524-8AC1-EEA2B44E179A}"/>
+                <a16:creationId xmlns:a16="http://schemas.microsoft.com/office/drawing/2014/main" id="{0246612D-FA71-4958-BCEA-806CBF472F36}"/>
               </a:ext>
             </a:extLst>
           </p:cNvPr>
@@ -23291,7 +24483,7 @@
           <p:cNvPr id="7" name="">
             <a:extLst xmlns:a="http://schemas.openxmlformats.org/drawingml/2006/main">
               <a:ext uri="{FF2B5EF4-FFF2-40B4-BE49-F238E27FC236}">
-                <a16:creationId xmlns:a16="http://schemas.microsoft.com/office/drawing/2014/main" id="{D2341C98-5615-4D39-94F6-D4CF05BE077E}"/>
+                <a16:creationId xmlns:a16="http://schemas.microsoft.com/office/drawing/2014/main" id="{71C321A1-EC93-4AAC-BE37-CD9979ABC700}"/>
               </a:ext>
             </a:extLst>
           </p:cNvPr>
@@ -23474,7 +24666,7 @@
           <p:cNvPr id="8" name="">
             <a:extLst xmlns:a="http://schemas.openxmlformats.org/drawingml/2006/main">
               <a:ext uri="{FF2B5EF4-FFF2-40B4-BE49-F238E27FC236}">
-                <a16:creationId xmlns:a16="http://schemas.microsoft.com/office/drawing/2014/main" id="{FA6912AF-2701-492C-AD5B-8DA7D70D305B}"/>
+                <a16:creationId xmlns:a16="http://schemas.microsoft.com/office/drawing/2014/main" id="{0FC57080-4B79-4BBA-AC3C-DB981881142E}"/>
               </a:ext>
             </a:extLst>
           </p:cNvPr>
@@ -23657,7 +24849,7 @@
           <p:cNvPr id="9" name="">
             <a:extLst xmlns:a="http://schemas.openxmlformats.org/drawingml/2006/main">
               <a:ext uri="{FF2B5EF4-FFF2-40B4-BE49-F238E27FC236}">
-                <a16:creationId xmlns:a16="http://schemas.microsoft.com/office/drawing/2014/main" id="{2C23ED14-1F8E-47DD-A45A-C9768DF0C7CC}"/>
+                <a16:creationId xmlns:a16="http://schemas.microsoft.com/office/drawing/2014/main" id="{F25BFB2B-387B-4BCB-ABCB-811BD014753B}"/>
               </a:ext>
             </a:extLst>
           </p:cNvPr>
@@ -23840,7 +25032,7 @@
           <p:cNvPr id="15" name="">
             <a:extLst xmlns:a="http://schemas.openxmlformats.org/drawingml/2006/main">
               <a:ext uri="{FF2B5EF4-FFF2-40B4-BE49-F238E27FC236}">
-                <a16:creationId xmlns:a16="http://schemas.microsoft.com/office/drawing/2014/main" id="{037CEF79-A486-45C5-985E-AD2695E78CC4}"/>
+                <a16:creationId xmlns:a16="http://schemas.microsoft.com/office/drawing/2014/main" id="{32577041-5901-45B7-8E3D-8DF0F752DA71}"/>
               </a:ext>
             </a:extLst>
           </p:cNvPr>
@@ -23994,7 +25186,7 @@
     </p:spTree>
     <p:extLst>
       <p:ext uri="{BB962C8B-B14F-4D97-AF65-F5344CB8AC3E}">
-        <p14:creationId xmlns:p14="http://schemas.microsoft.com/office/powerpoint/2010/main" val="2092572173"/>
+        <p14:creationId xmlns:p14="http://schemas.microsoft.com/office/powerpoint/2010/main" val="429445922"/>
       </p:ext>
     </p:extLst>
   </p:cSld>
@@ -24025,7 +25217,7 @@
           <p:cNvPr id="8" name="">
             <a:extLst xmlns:a="http://schemas.openxmlformats.org/drawingml/2006/main">
               <a:ext uri="{FF2B5EF4-FFF2-40B4-BE49-F238E27FC236}">
-                <a16:creationId xmlns:a16="http://schemas.microsoft.com/office/drawing/2014/main" id="{2B76C865-F55B-4F6E-86E9-0D6FEF9211F1}"/>
+                <a16:creationId xmlns:a16="http://schemas.microsoft.com/office/drawing/2014/main" id="{B2F0AFD1-96CB-4DDB-B6B1-108F6B355897}"/>
               </a:ext>
             </a:extLst>
           </p:cNvPr>
@@ -24181,7 +25373,7 @@
           <p:cNvPr id="2" name="">
             <a:extLst xmlns:a="http://schemas.openxmlformats.org/drawingml/2006/main">
               <a:ext uri="{FF2B5EF4-FFF2-40B4-BE49-F238E27FC236}">
-                <a16:creationId xmlns:a16="http://schemas.microsoft.com/office/drawing/2014/main" id="{13B1AD6A-BF71-47AE-B776-EB7C2361E7A3}"/>
+                <a16:creationId xmlns:a16="http://schemas.microsoft.com/office/drawing/2014/main" id="{A3786859-E797-4D7C-BD6F-2FFC9CE96C62}"/>
               </a:ext>
             </a:extLst>
           </p:cNvPr>
@@ -24337,7 +25529,7 @@
           <p:cNvPr id="3" name="">
             <a:extLst xmlns:a="http://schemas.openxmlformats.org/drawingml/2006/main">
               <a:ext uri="{FF2B5EF4-FFF2-40B4-BE49-F238E27FC236}">
-                <a16:creationId xmlns:a16="http://schemas.microsoft.com/office/drawing/2014/main" id="{C99B913C-F304-4291-9887-A449DEABF8CD}"/>
+                <a16:creationId xmlns:a16="http://schemas.microsoft.com/office/drawing/2014/main" id="{0560052F-BD1E-4240-A300-9705D58CFA79}"/>
               </a:ext>
             </a:extLst>
           </p:cNvPr>
@@ -24493,7 +25685,7 @@
           <p:cNvPr id="4" name="">
             <a:extLst xmlns:a="http://schemas.openxmlformats.org/drawingml/2006/main">
               <a:ext uri="{FF2B5EF4-FFF2-40B4-BE49-F238E27FC236}">
-                <a16:creationId xmlns:a16="http://schemas.microsoft.com/office/drawing/2014/main" id="{B0D526EA-2D61-4CCA-B66B-021794828B8B}"/>
+                <a16:creationId xmlns:a16="http://schemas.microsoft.com/office/drawing/2014/main" id="{D2875AB6-6AC4-4216-8205-1F40BDAC7087}"/>
               </a:ext>
             </a:extLst>
           </p:cNvPr>
@@ -24649,7 +25841,7 @@
           <p:cNvPr id="5" name="">
             <a:extLst xmlns:a="http://schemas.openxmlformats.org/drawingml/2006/main">
               <a:ext uri="{FF2B5EF4-FFF2-40B4-BE49-F238E27FC236}">
-                <a16:creationId xmlns:a16="http://schemas.microsoft.com/office/drawing/2014/main" id="{CD8DEF1C-1C18-4CCB-9AAC-9CB04E14C8E5}"/>
+                <a16:creationId xmlns:a16="http://schemas.microsoft.com/office/drawing/2014/main" id="{68D564C0-28DE-497C-A202-ECC7D36056E9}"/>
               </a:ext>
             </a:extLst>
           </p:cNvPr>
@@ -24805,7 +25997,7 @@
           <p:cNvPr id="6" name="">
             <a:extLst xmlns:a="http://schemas.openxmlformats.org/drawingml/2006/main">
               <a:ext uri="{FF2B5EF4-FFF2-40B4-BE49-F238E27FC236}">
-                <a16:creationId xmlns:a16="http://schemas.microsoft.com/office/drawing/2014/main" id="{051B07D9-7939-4062-8B1F-4AD10DEDB214}"/>
+                <a16:creationId xmlns:a16="http://schemas.microsoft.com/office/drawing/2014/main" id="{651333D3-CCC0-4FF6-9216-794A12FA55E8}"/>
               </a:ext>
             </a:extLst>
           </p:cNvPr>
@@ -24961,7 +26153,7 @@
           <p:cNvPr id="7" name="">
             <a:extLst xmlns:a="http://schemas.openxmlformats.org/drawingml/2006/main">
               <a:ext uri="{FF2B5EF4-FFF2-40B4-BE49-F238E27FC236}">
-                <a16:creationId xmlns:a16="http://schemas.microsoft.com/office/drawing/2014/main" id="{850A6DFA-65A9-46C3-87D4-CF33BEBCFDF8}"/>
+                <a16:creationId xmlns:a16="http://schemas.microsoft.com/office/drawing/2014/main" id="{FE9DCF0B-3204-4B67-8640-0A847517608E}"/>
               </a:ext>
             </a:extLst>
           </p:cNvPr>
@@ -25115,7 +26307,7 @@
     </p:spTree>
     <p:extLst>
       <p:ext uri="{BB962C8B-B14F-4D97-AF65-F5344CB8AC3E}">
-        <p14:creationId xmlns:p14="http://schemas.microsoft.com/office/powerpoint/2010/main" val="815177782"/>
+        <p14:creationId xmlns:p14="http://schemas.microsoft.com/office/powerpoint/2010/main" val="1644269501"/>
       </p:ext>
     </p:extLst>
   </p:cSld>
@@ -25146,7 +26338,7 @@
           <p:cNvPr id="5" name="">
             <a:extLst xmlns:a="http://schemas.openxmlformats.org/drawingml/2006/main">
               <a:ext uri="{FF2B5EF4-FFF2-40B4-BE49-F238E27FC236}">
-                <a16:creationId xmlns:a16="http://schemas.microsoft.com/office/drawing/2014/main" id="{6E520A00-952D-4858-BCFD-85C4856D796C}"/>
+                <a16:creationId xmlns:a16="http://schemas.microsoft.com/office/drawing/2014/main" id="{2F7C59F4-89CB-4005-B0C2-E9BFAE2D9872}"/>
               </a:ext>
             </a:extLst>
           </p:cNvPr>
@@ -25302,7 +26494,7 @@
           <p:cNvPr id="2" name="">
             <a:extLst xmlns:a="http://schemas.openxmlformats.org/drawingml/2006/main">
               <a:ext uri="{FF2B5EF4-FFF2-40B4-BE49-F238E27FC236}">
-                <a16:creationId xmlns:a16="http://schemas.microsoft.com/office/drawing/2014/main" id="{B8F2F98B-0CD9-4637-8F2B-9D9530C374F4}"/>
+                <a16:creationId xmlns:a16="http://schemas.microsoft.com/office/drawing/2014/main" id="{E0EE4D37-081A-4027-93CA-4DDCC811290D}"/>
               </a:ext>
             </a:extLst>
           </p:cNvPr>
@@ -25458,7 +26650,7 @@
           <p:cNvPr id="3" name="">
             <a:extLst xmlns:a="http://schemas.openxmlformats.org/drawingml/2006/main">
               <a:ext uri="{FF2B5EF4-FFF2-40B4-BE49-F238E27FC236}">
-                <a16:creationId xmlns:a16="http://schemas.microsoft.com/office/drawing/2014/main" id="{5D0FF44C-D939-44A3-9851-3B82A767D810}"/>
+                <a16:creationId xmlns:a16="http://schemas.microsoft.com/office/drawing/2014/main" id="{D6652581-4ACD-4CDC-AFE8-5738A145BEB9}"/>
               </a:ext>
             </a:extLst>
           </p:cNvPr>
@@ -26399,7 +27591,7 @@
           <p:cNvPr id="4" name="">
             <a:extLst xmlns:a="http://schemas.openxmlformats.org/drawingml/2006/main">
               <a:ext uri="{FF2B5EF4-FFF2-40B4-BE49-F238E27FC236}">
-                <a16:creationId xmlns:a16="http://schemas.microsoft.com/office/drawing/2014/main" id="{8DDD5E40-5581-47A9-9526-1C7DBEE114E1}"/>
+                <a16:creationId xmlns:a16="http://schemas.microsoft.com/office/drawing/2014/main" id="{21907E07-378D-47ED-A4A7-61C86CF07ECB}"/>
               </a:ext>
             </a:extLst>
           </p:cNvPr>
@@ -26553,7 +27745,7 @@
     </p:spTree>
     <p:extLst>
       <p:ext uri="{BB962C8B-B14F-4D97-AF65-F5344CB8AC3E}">
-        <p14:creationId xmlns:p14="http://schemas.microsoft.com/office/powerpoint/2010/main" val="821284345"/>
+        <p14:creationId xmlns:p14="http://schemas.microsoft.com/office/powerpoint/2010/main" val="1701869629"/>
       </p:ext>
     </p:extLst>
   </p:cSld>
@@ -26584,7 +27776,7 @@
           <p:cNvPr id="5" name="">
             <a:extLst xmlns:a="http://schemas.openxmlformats.org/drawingml/2006/main">
               <a:ext uri="{FF2B5EF4-FFF2-40B4-BE49-F238E27FC236}">
-                <a16:creationId xmlns:a16="http://schemas.microsoft.com/office/drawing/2014/main" id="{D5ED4C46-EA2D-4C9F-B638-69C126B831C3}"/>
+                <a16:creationId xmlns:a16="http://schemas.microsoft.com/office/drawing/2014/main" id="{BF3953AF-5093-41B2-8930-16BD5DF849C5}"/>
               </a:ext>
             </a:extLst>
           </p:cNvPr>
@@ -26740,7 +27932,7 @@
           <p:cNvPr id="2" name="">
             <a:extLst xmlns:a="http://schemas.openxmlformats.org/drawingml/2006/main">
               <a:ext uri="{FF2B5EF4-FFF2-40B4-BE49-F238E27FC236}">
-                <a16:creationId xmlns:a16="http://schemas.microsoft.com/office/drawing/2014/main" id="{F18BEF0D-9951-4D9F-92F5-234527CBBEB5}"/>
+                <a16:creationId xmlns:a16="http://schemas.microsoft.com/office/drawing/2014/main" id="{B6B1AA06-8D85-4DC2-B03D-58B982DE4136}"/>
               </a:ext>
             </a:extLst>
           </p:cNvPr>
@@ -26896,7 +28088,7 @@
           <p:cNvPr id="3" name="">
             <a:extLst xmlns:a="http://schemas.openxmlformats.org/drawingml/2006/main">
               <a:ext uri="{FF2B5EF4-FFF2-40B4-BE49-F238E27FC236}">
-                <a16:creationId xmlns:a16="http://schemas.microsoft.com/office/drawing/2014/main" id="{CD0C24CD-AABB-4C99-945B-4A9068D01F86}"/>
+                <a16:creationId xmlns:a16="http://schemas.microsoft.com/office/drawing/2014/main" id="{A089657D-9986-4E82-94ED-4EB83979C53D}"/>
               </a:ext>
             </a:extLst>
           </p:cNvPr>
@@ -27837,7 +29029,7 @@
           <p:cNvPr id="4" name="">
             <a:extLst xmlns:a="http://schemas.openxmlformats.org/drawingml/2006/main">
               <a:ext uri="{FF2B5EF4-FFF2-40B4-BE49-F238E27FC236}">
-                <a16:creationId xmlns:a16="http://schemas.microsoft.com/office/drawing/2014/main" id="{6229243D-2EB5-432D-8E7A-ABA1B7DB59D6}"/>
+                <a16:creationId xmlns:a16="http://schemas.microsoft.com/office/drawing/2014/main" id="{787D5CA4-BC8E-4B1B-8504-90BA184D7BEF}"/>
               </a:ext>
             </a:extLst>
           </p:cNvPr>
@@ -27991,7 +29183,7 @@
     </p:spTree>
     <p:extLst>
       <p:ext uri="{BB962C8B-B14F-4D97-AF65-F5344CB8AC3E}">
-        <p14:creationId xmlns:p14="http://schemas.microsoft.com/office/powerpoint/2010/main" val="1953573351"/>
+        <p14:creationId xmlns:p14="http://schemas.microsoft.com/office/powerpoint/2010/main" val="111199747"/>
       </p:ext>
     </p:extLst>
   </p:cSld>
@@ -28022,7 +29214,7 @@
           <p:cNvPr id="5" name="">
             <a:extLst xmlns:a="http://schemas.openxmlformats.org/drawingml/2006/main">
               <a:ext uri="{FF2B5EF4-FFF2-40B4-BE49-F238E27FC236}">
-                <a16:creationId xmlns:a16="http://schemas.microsoft.com/office/drawing/2014/main" id="{63618A06-7635-4126-BE19-EAEA730C8D77}"/>
+                <a16:creationId xmlns:a16="http://schemas.microsoft.com/office/drawing/2014/main" id="{B84165F4-6A18-4E30-B57C-B4A175591D0C}"/>
               </a:ext>
             </a:extLst>
           </p:cNvPr>
@@ -28178,7 +29370,7 @@
           <p:cNvPr id="2" name="">
             <a:extLst xmlns:a="http://schemas.openxmlformats.org/drawingml/2006/main">
               <a:ext uri="{FF2B5EF4-FFF2-40B4-BE49-F238E27FC236}">
-                <a16:creationId xmlns:a16="http://schemas.microsoft.com/office/drawing/2014/main" id="{A627BA56-18FF-4C48-81F9-3C812A13A705}"/>
+                <a16:creationId xmlns:a16="http://schemas.microsoft.com/office/drawing/2014/main" id="{DBB43BB3-07B2-4324-8893-D70FA5DD3D75}"/>
               </a:ext>
             </a:extLst>
           </p:cNvPr>
@@ -28334,7 +29526,7 @@
           <p:cNvPr id="3" name="">
             <a:extLst xmlns:a="http://schemas.openxmlformats.org/drawingml/2006/main">
               <a:ext uri="{FF2B5EF4-FFF2-40B4-BE49-F238E27FC236}">
-                <a16:creationId xmlns:a16="http://schemas.microsoft.com/office/drawing/2014/main" id="{4AFCDA0A-8C96-4646-ABD1-783954F22363}"/>
+                <a16:creationId xmlns:a16="http://schemas.microsoft.com/office/drawing/2014/main" id="{88444005-4FC8-4E1A-8B33-FE8595A99C70}"/>
               </a:ext>
             </a:extLst>
           </p:cNvPr>
@@ -29275,7 +30467,7 @@
           <p:cNvPr id="4" name="">
             <a:extLst xmlns:a="http://schemas.openxmlformats.org/drawingml/2006/main">
               <a:ext uri="{FF2B5EF4-FFF2-40B4-BE49-F238E27FC236}">
-                <a16:creationId xmlns:a16="http://schemas.microsoft.com/office/drawing/2014/main" id="{322D5C08-2FEF-4305-AEB5-FD25843CFA8F}"/>
+                <a16:creationId xmlns:a16="http://schemas.microsoft.com/office/drawing/2014/main" id="{88B52DD0-4E3D-4923-A491-6198D447E780}"/>
               </a:ext>
             </a:extLst>
           </p:cNvPr>
@@ -29429,7 +30621,7 @@
     </p:spTree>
     <p:extLst>
       <p:ext uri="{BB962C8B-B14F-4D97-AF65-F5344CB8AC3E}">
-        <p14:creationId xmlns:p14="http://schemas.microsoft.com/office/powerpoint/2010/main" val="552198600"/>
+        <p14:creationId xmlns:p14="http://schemas.microsoft.com/office/powerpoint/2010/main" val="826993060"/>
       </p:ext>
     </p:extLst>
   </p:cSld>

--- a/deliverables/CycleTwin_pitch_deck.pptx
+++ b/deliverables/CycleTwin_pitch_deck.pptx
@@ -2,33 +2,34 @@
 <file path=ppt/presentation.xml><?xml version="1.0" encoding="utf-8"?>
 <p:presentation xmlns:p="http://schemas.openxmlformats.org/presentationml/2006/main">
   <p:sldMasterIdLst>
-    <p:sldMasterId xmlns:r="http://schemas.openxmlformats.org/officeDocument/2006/relationships" id="2147483648" r:id="Rfae9457703f94108"/>
+    <p:sldMasterId xmlns:r="http://schemas.openxmlformats.org/officeDocument/2006/relationships" id="2147483648" r:id="R7d4b2b306ac1411a"/>
   </p:sldMasterIdLst>
   <p:notesMasterIdLst>
-    <p:notesMasterId xmlns:r="http://schemas.openxmlformats.org/officeDocument/2006/relationships" r:id="R147064faaa2346b6"/>
+    <p:notesMasterId xmlns:r="http://schemas.openxmlformats.org/officeDocument/2006/relationships" r:id="R0ee218450be24b36"/>
   </p:notesMasterIdLst>
   <p:sldIdLst>
-    <p:sldId xmlns:r="http://schemas.openxmlformats.org/officeDocument/2006/relationships" id="256" r:id="Rf557aad83c4940da"/>
-    <p:sldId xmlns:r="http://schemas.openxmlformats.org/officeDocument/2006/relationships" id="257" r:id="R9331ace7a95248da"/>
-    <p:sldId xmlns:r="http://schemas.openxmlformats.org/officeDocument/2006/relationships" id="258" r:id="Rf78c790039894153"/>
-    <p:sldId xmlns:r="http://schemas.openxmlformats.org/officeDocument/2006/relationships" id="259" r:id="R2badd83e02da45fc"/>
-    <p:sldId xmlns:r="http://schemas.openxmlformats.org/officeDocument/2006/relationships" id="260" r:id="Re9c9107c93e14a87"/>
-    <p:sldId xmlns:r="http://schemas.openxmlformats.org/officeDocument/2006/relationships" id="261" r:id="R7da567a8c32f42e2"/>
-    <p:sldId xmlns:r="http://schemas.openxmlformats.org/officeDocument/2006/relationships" id="262" r:id="R4f4e1c391454440f"/>
-    <p:sldId xmlns:r="http://schemas.openxmlformats.org/officeDocument/2006/relationships" id="263" r:id="R9c1747218fd54ba6"/>
-    <p:sldId xmlns:r="http://schemas.openxmlformats.org/officeDocument/2006/relationships" id="264" r:id="R032c5c44456c40f5"/>
-    <p:sldId xmlns:r="http://schemas.openxmlformats.org/officeDocument/2006/relationships" id="265" r:id="Rbf89894c1fe6417c"/>
-    <p:sldId xmlns:r="http://schemas.openxmlformats.org/officeDocument/2006/relationships" id="266" r:id="R60ed62a6878244fe"/>
-    <p:sldId xmlns:r="http://schemas.openxmlformats.org/officeDocument/2006/relationships" id="267" r:id="R8120bcc7a36942da"/>
-    <p:sldId xmlns:r="http://schemas.openxmlformats.org/officeDocument/2006/relationships" id="268" r:id="Ree6bfe517fc3412f"/>
-    <p:sldId xmlns:r="http://schemas.openxmlformats.org/officeDocument/2006/relationships" id="269" r:id="R9e4adbbff0814531"/>
-    <p:sldId xmlns:r="http://schemas.openxmlformats.org/officeDocument/2006/relationships" id="270" r:id="Redda48aa55e94b4e"/>
-    <p:sldId xmlns:r="http://schemas.openxmlformats.org/officeDocument/2006/relationships" id="271" r:id="R6bb4b20d55d74fad"/>
-    <p:sldId xmlns:r="http://schemas.openxmlformats.org/officeDocument/2006/relationships" id="272" r:id="R39fd318a385c4745"/>
-    <p:sldId xmlns:r="http://schemas.openxmlformats.org/officeDocument/2006/relationships" id="273" r:id="R215bfecb16694c65"/>
-    <p:sldId xmlns:r="http://schemas.openxmlformats.org/officeDocument/2006/relationships" id="274" r:id="R7f98072a23704a8a"/>
-    <p:sldId xmlns:r="http://schemas.openxmlformats.org/officeDocument/2006/relationships" id="275" r:id="R9b1cc108dccd4ee3"/>
-    <p:sldId xmlns:r="http://schemas.openxmlformats.org/officeDocument/2006/relationships" id="276" r:id="R0d833728838f4d51"/>
+    <p:sldId xmlns:r="http://schemas.openxmlformats.org/officeDocument/2006/relationships" id="256" r:id="R695bac98c1c0432b"/>
+    <p:sldId xmlns:r="http://schemas.openxmlformats.org/officeDocument/2006/relationships" id="257" r:id="R5394636ab84f4246"/>
+    <p:sldId xmlns:r="http://schemas.openxmlformats.org/officeDocument/2006/relationships" id="258" r:id="R04ef364e87ef44f7"/>
+    <p:sldId xmlns:r="http://schemas.openxmlformats.org/officeDocument/2006/relationships" id="259" r:id="R5bf18a3f164b489e"/>
+    <p:sldId xmlns:r="http://schemas.openxmlformats.org/officeDocument/2006/relationships" id="260" r:id="Rb697f210bd8f407d"/>
+    <p:sldId xmlns:r="http://schemas.openxmlformats.org/officeDocument/2006/relationships" id="261" r:id="R16900cbc94974a91"/>
+    <p:sldId xmlns:r="http://schemas.openxmlformats.org/officeDocument/2006/relationships" id="262" r:id="Ra18051a655084944"/>
+    <p:sldId xmlns:r="http://schemas.openxmlformats.org/officeDocument/2006/relationships" id="263" r:id="Rb9e8da5e47a845da"/>
+    <p:sldId xmlns:r="http://schemas.openxmlformats.org/officeDocument/2006/relationships" id="264" r:id="R1d43e70da42e4e0e"/>
+    <p:sldId xmlns:r="http://schemas.openxmlformats.org/officeDocument/2006/relationships" id="265" r:id="R9239a8b8f1a045a3"/>
+    <p:sldId xmlns:r="http://schemas.openxmlformats.org/officeDocument/2006/relationships" id="266" r:id="R3215a47e987343eb"/>
+    <p:sldId xmlns:r="http://schemas.openxmlformats.org/officeDocument/2006/relationships" id="267" r:id="R7d5f97eeffb3497d"/>
+    <p:sldId xmlns:r="http://schemas.openxmlformats.org/officeDocument/2006/relationships" id="268" r:id="R14d8aa81aecb4323"/>
+    <p:sldId xmlns:r="http://schemas.openxmlformats.org/officeDocument/2006/relationships" id="269" r:id="Rc89f3f7da84443d8"/>
+    <p:sldId xmlns:r="http://schemas.openxmlformats.org/officeDocument/2006/relationships" id="270" r:id="Raff49510f8e64d9e"/>
+    <p:sldId xmlns:r="http://schemas.openxmlformats.org/officeDocument/2006/relationships" id="271" r:id="R013cdb24f7bb4240"/>
+    <p:sldId xmlns:r="http://schemas.openxmlformats.org/officeDocument/2006/relationships" id="272" r:id="Rba1c7dcd4a484e36"/>
+    <p:sldId xmlns:r="http://schemas.openxmlformats.org/officeDocument/2006/relationships" id="273" r:id="Rc48b91dc1b804a70"/>
+    <p:sldId xmlns:r="http://schemas.openxmlformats.org/officeDocument/2006/relationships" id="274" r:id="R2685fb2f203e487a"/>
+    <p:sldId xmlns:r="http://schemas.openxmlformats.org/officeDocument/2006/relationships" id="275" r:id="R8b258c4d71a54700"/>
+    <p:sldId xmlns:r="http://schemas.openxmlformats.org/officeDocument/2006/relationships" id="276" r:id="R56e0419dc89d4e8e"/>
+    <p:sldId xmlns:r="http://schemas.openxmlformats.org/officeDocument/2006/relationships" id="277" r:id="R94f1d922b2a74c34"/>
   </p:sldIdLst>
   <p:sldSz cx="12192000" cy="6858000"/>
   <p:notesSz cx="6858000" cy="9144000"/>
@@ -952,7 +953,7 @@
           <a:lstStyle xmlns:a="http://schemas.openxmlformats.org/drawingml/2006/main"/>
           <a:p xmlns:a="http://schemas.openxmlformats.org/drawingml/2006/main">
             <a:r>
-              <a:t>Source: docs/claims.json, generated by scripts/build_claims.py. All project metrics are synthetic development results. Decision-support research display</a:t>
+              <a:t>Source: docs/claims.json, generated by scripts/build_claims.py. All project metrics are synthetic development results. Train-only calendar/static prior plus temperature, RHR and HRV likelihoods</a:t>
             </a:r>
           </a:p>
         </p:txBody>
@@ -1022,7 +1023,7 @@
           <a:lstStyle xmlns:a="http://schemas.openxmlformats.org/drawingml/2006/main"/>
           <a:p xmlns:a="http://schemas.openxmlformats.org/drawingml/2006/main">
             <a:r>
-              <a:t>Source: docs/claims.json, generated by scripts/build_claims.py. All project metrics are synthetic development results. Missing safety information causes abstention</a:t>
+              <a:t>Source: docs/claims.json, generated by scripts/build_claims.py. All project metrics are synthetic development results. Decision-support research display</a:t>
             </a:r>
           </a:p>
         </p:txBody>
@@ -1092,7 +1093,7 @@
           <a:lstStyle xmlns:a="http://schemas.openxmlformats.org/drawingml/2006/main"/>
           <a:p xmlns:a="http://schemas.openxmlformats.org/drawingml/2006/main">
             <a:r>
-              <a:t>Source: docs/claims.json, generated by scripts/build_claims.py. All project metrics are synthetic development results. Clear boundaries around simulated physiology</a:t>
+              <a:t>Source: docs/claims.json, generated by scripts/build_claims.py. All project metrics are synthetic development results. Missing safety information causes abstention</a:t>
             </a:r>
           </a:p>
         </p:txBody>
@@ -1162,7 +1163,7 @@
           <a:lstStyle xmlns:a="http://schemas.openxmlformats.org/drawingml/2006/main"/>
           <a:p xmlns:a="http://schemas.openxmlformats.org/drawingml/2006/main">
             <a:r>
-              <a:t>Source: docs/claims.json, generated by scripts/build_claims.py. All project metrics are synthetic development results. All declared Kushi scenarios remain visible</a:t>
+              <a:t>Source: docs/claims.json, generated by scripts/build_claims.py. All project metrics are synthetic development results. Clear boundaries around simulated physiology</a:t>
             </a:r>
           </a:p>
         </p:txBody>
@@ -1302,6 +1303,76 @@
           <a:lstStyle xmlns:a="http://schemas.openxmlformats.org/drawingml/2006/main"/>
           <a:p xmlns:a="http://schemas.openxmlformats.org/drawingml/2006/main">
             <a:r>
+              <a:t>Source: docs/claims.json, generated by scripts/build_claims.py. All project metrics are synthetic development results. All declared Kushi scenarios remain visible</a:t>
+            </a:r>
+          </a:p>
+        </p:txBody>
+      </p:sp>
+      <p:sp>
+        <p:nvSpPr>
+          <p:cNvPr id="4" name="Slide Number Placeholder 3"/>
+          <p:cNvSpPr>
+            <a:spLocks xmlns:a="http://schemas.openxmlformats.org/drawingml/2006/main" noGrp="1"/>
+          </p:cNvSpPr>
+          <p:nvPr>
+            <p:ph type="sldNum" idx="5"/>
+          </p:nvPr>
+        </p:nvSpPr>
+        <p:spPr/>
+        <p:txBody>
+          <a:bodyPr xmlns:a="http://schemas.openxmlformats.org/drawingml/2006/main"/>
+          <a:lstStyle xmlns:a="http://schemas.openxmlformats.org/drawingml/2006/main"/>
+          <a:p xmlns:a="http://schemas.openxmlformats.org/drawingml/2006/main"/>
+        </p:txBody>
+      </p:sp>
+    </p:spTree>
+  </p:cSld>
+  <p:clrMapOvr>
+    <a:masterClrMapping xmlns:a="http://schemas.openxmlformats.org/drawingml/2006/main"/>
+  </p:clrMapOvr>
+</p:notes>
+</file>
+
+<file path=ppt/notesSlides/notesSlide21.xml><?xml version="1.0" encoding="utf-8"?>
+<p:notes xmlns:p="http://schemas.openxmlformats.org/presentationml/2006/main">
+  <p:cSld>
+    <p:spTree>
+      <p:nvGrpSpPr>
+        <p:cNvPr id="1" name=""/>
+        <p:cNvGrpSpPr/>
+        <p:nvPr/>
+      </p:nvGrpSpPr>
+      <p:grpSpPr>
+        <a:xfrm xmlns:a="http://schemas.openxmlformats.org/drawingml/2006/main"/>
+      </p:grpSpPr>
+      <p:sp>
+        <p:nvSpPr>
+          <p:cNvPr id="2" name="Slide Image Placeholder 1"/>
+          <p:cNvSpPr>
+            <a:spLocks xmlns:a="http://schemas.openxmlformats.org/drawingml/2006/main" noGrp="1"/>
+          </p:cNvSpPr>
+          <p:nvPr>
+            <p:ph type="sldImg" idx="0"/>
+          </p:nvPr>
+        </p:nvSpPr>
+        <p:spPr/>
+      </p:sp>
+      <p:sp>
+        <p:nvSpPr>
+          <p:cNvPr id="3" name="Notes Placeholder 2"/>
+          <p:cNvSpPr>
+            <a:spLocks xmlns:a="http://schemas.openxmlformats.org/drawingml/2006/main" noGrp="1"/>
+          </p:cNvSpPr>
+          <p:nvPr>
+            <p:ph type="body" idx="1"/>
+          </p:nvPr>
+        </p:nvSpPr>
+        <p:spPr/>
+        <p:txBody>
+          <a:bodyPr xmlns:a="http://schemas.openxmlformats.org/drawingml/2006/main"/>
+          <a:lstStyle xmlns:a="http://schemas.openxmlformats.org/drawingml/2006/main"/>
+          <a:p xmlns:a="http://schemas.openxmlformats.org/drawingml/2006/main">
+            <a:r>
               <a:t>Source: docs/claims.json, generated by scripts/build_claims.py. All project metrics are synthetic development results. Synthetic recovery is not prospective evidence in women</a:t>
             </a:r>
           </a:p>
@@ -1332,7 +1403,7 @@
 </p:notes>
 </file>
 
-<file path=ppt/notesSlides/notesSlide21.xml><?xml version="1.0" encoding="utf-8"?>
+<file path=ppt/notesSlides/notesSlide22.xml><?xml version="1.0" encoding="utf-8"?>
 <p:notes xmlns:p="http://schemas.openxmlformats.org/presentationml/2006/main">
   <p:cSld>
     <p:spTree>
@@ -1909,7 +1980,7 @@
           <p:cNvPr id="3" name="Title">
             <a:extLst xmlns:a="http://schemas.openxmlformats.org/drawingml/2006/main">
               <a:ext uri="{FF2B5EF4-FFF2-40B4-BE49-F238E27FC236}">
-                <a16:creationId xmlns:a16="http://schemas.microsoft.com/office/drawing/2014/main" id="{E786BABB-9FEF-438F-92B9-29EAD459B205}"/>
+                <a16:creationId xmlns:a16="http://schemas.microsoft.com/office/drawing/2014/main" id="{277F06F7-32FE-44DB-8EB9-560596C204E5}"/>
               </a:ext>
             </a:extLst>
           </p:cNvPr>
@@ -2138,7 +2209,7 @@
           <p:cNvPr id="2" name="Subtitle">
             <a:extLst xmlns:a="http://schemas.openxmlformats.org/drawingml/2006/main">
               <a:ext uri="{FF2B5EF4-FFF2-40B4-BE49-F238E27FC236}">
-                <a16:creationId xmlns:a16="http://schemas.microsoft.com/office/drawing/2014/main" id="{7217CEA5-129C-44C5-A422-5F912EBA9CA9}"/>
+                <a16:creationId xmlns:a16="http://schemas.microsoft.com/office/drawing/2014/main" id="{CE9130B4-6C3A-4E4D-811C-86749CF20C26}"/>
               </a:ext>
             </a:extLst>
           </p:cNvPr>
@@ -2384,7 +2455,7 @@
           <p:cNvPr id="2" name="Section title">
             <a:extLst xmlns:a="http://schemas.openxmlformats.org/drawingml/2006/main">
               <a:ext uri="{FF2B5EF4-FFF2-40B4-BE49-F238E27FC236}">
-                <a16:creationId xmlns:a16="http://schemas.microsoft.com/office/drawing/2014/main" id="{9AAB8492-DB05-46ED-A3F1-27062765E49C}"/>
+                <a16:creationId xmlns:a16="http://schemas.microsoft.com/office/drawing/2014/main" id="{B8C0A094-9516-4F02-84CE-1F385BB76C52}"/>
               </a:ext>
             </a:extLst>
           </p:cNvPr>
@@ -2630,7 +2701,7 @@
           <p:cNvPr id="3" name="Title">
             <a:extLst xmlns:a="http://schemas.openxmlformats.org/drawingml/2006/main">
               <a:ext uri="{FF2B5EF4-FFF2-40B4-BE49-F238E27FC236}">
-                <a16:creationId xmlns:a16="http://schemas.microsoft.com/office/drawing/2014/main" id="{1497F6E1-6C50-4F5F-9F3E-540CD62CDA02}"/>
+                <a16:creationId xmlns:a16="http://schemas.microsoft.com/office/drawing/2014/main" id="{AD002F4D-C3A4-4858-9E20-CE351157AC69}"/>
               </a:ext>
             </a:extLst>
           </p:cNvPr>
@@ -2859,7 +2930,7 @@
           <p:cNvPr id="2" name="Body">
             <a:extLst xmlns:a="http://schemas.openxmlformats.org/drawingml/2006/main">
               <a:ext uri="{FF2B5EF4-FFF2-40B4-BE49-F238E27FC236}">
-                <a16:creationId xmlns:a16="http://schemas.microsoft.com/office/drawing/2014/main" id="{0E1E696E-6DBF-4D7F-8BC7-1124564FF638}"/>
+                <a16:creationId xmlns:a16="http://schemas.microsoft.com/office/drawing/2014/main" id="{0E5EBCEE-4E2F-49F4-B9D9-E7021809EF55}"/>
               </a:ext>
             </a:extLst>
           </p:cNvPr>
@@ -3105,7 +3176,7 @@
           <p:cNvPr id="4" name="Title">
             <a:extLst xmlns:a="http://schemas.openxmlformats.org/drawingml/2006/main">
               <a:ext uri="{FF2B5EF4-FFF2-40B4-BE49-F238E27FC236}">
-                <a16:creationId xmlns:a16="http://schemas.microsoft.com/office/drawing/2014/main" id="{F6A0DF5B-3226-4237-86EC-3ACBE488EDA7}"/>
+                <a16:creationId xmlns:a16="http://schemas.microsoft.com/office/drawing/2014/main" id="{0DB45550-1C0C-4A4F-84D8-C18C6A72ECAB}"/>
               </a:ext>
             </a:extLst>
           </p:cNvPr>
@@ -3334,7 +3405,7 @@
           <p:cNvPr id="2" name="Left column">
             <a:extLst xmlns:a="http://schemas.openxmlformats.org/drawingml/2006/main">
               <a:ext uri="{FF2B5EF4-FFF2-40B4-BE49-F238E27FC236}">
-                <a16:creationId xmlns:a16="http://schemas.microsoft.com/office/drawing/2014/main" id="{8A75B17F-5081-469F-96CD-3CD64403A81C}"/>
+                <a16:creationId xmlns:a16="http://schemas.microsoft.com/office/drawing/2014/main" id="{A73D95C7-8DE8-4B9C-8AE4-5213287311F8}"/>
               </a:ext>
             </a:extLst>
           </p:cNvPr>
@@ -3563,7 +3634,7 @@
           <p:cNvPr id="3" name="Right column">
             <a:extLst xmlns:a="http://schemas.openxmlformats.org/drawingml/2006/main">
               <a:ext uri="{FF2B5EF4-FFF2-40B4-BE49-F238E27FC236}">
-                <a16:creationId xmlns:a16="http://schemas.microsoft.com/office/drawing/2014/main" id="{AB02F836-4294-4117-9A31-2F9025D40C18}"/>
+                <a16:creationId xmlns:a16="http://schemas.microsoft.com/office/drawing/2014/main" id="{BD6EBFD3-EECE-4A8D-9786-7B5BEB87FCC1}"/>
               </a:ext>
             </a:extLst>
           </p:cNvPr>
@@ -3809,7 +3880,7 @@
           <p:cNvPr id="3" name="Title">
             <a:extLst xmlns:a="http://schemas.openxmlformats.org/drawingml/2006/main">
               <a:ext uri="{FF2B5EF4-FFF2-40B4-BE49-F238E27FC236}">
-                <a16:creationId xmlns:a16="http://schemas.microsoft.com/office/drawing/2014/main" id="{8DC2002E-9CA6-4FFB-96B7-235DB24A0DC6}"/>
+                <a16:creationId xmlns:a16="http://schemas.microsoft.com/office/drawing/2014/main" id="{2F49C918-9E93-4B90-BE6D-A7392972BB3B}"/>
               </a:ext>
             </a:extLst>
           </p:cNvPr>
@@ -4038,7 +4109,7 @@
           <p:cNvPr id="2" name="Left column">
             <a:extLst xmlns:a="http://schemas.openxmlformats.org/drawingml/2006/main">
               <a:ext uri="{FF2B5EF4-FFF2-40B4-BE49-F238E27FC236}">
-                <a16:creationId xmlns:a16="http://schemas.microsoft.com/office/drawing/2014/main" id="{9549474A-2CD2-4F03-972E-79DCF744132D}"/>
+                <a16:creationId xmlns:a16="http://schemas.microsoft.com/office/drawing/2014/main" id="{A672C0EA-50BE-449A-92CD-10BB28EC64BF}"/>
               </a:ext>
             </a:extLst>
           </p:cNvPr>
@@ -4305,12 +4376,12 @@
   </p:cSld>
   <p:clrMap bg1="lt1" tx1="dk1" bg2="lt2" tx2="dk2" accent1="accent1" accent2="accent2" accent3="accent3" accent4="accent4" accent5="accent5" accent6="accent6" hlink="hlink" folHlink="folHlink"/>
   <p:sldLayoutIdLst>
-    <p:sldLayoutId xmlns:r="http://schemas.openxmlformats.org/officeDocument/2006/relationships" id="2147483649" r:id="R6a57324cc267414c"/>
-    <p:sldLayoutId xmlns:r="http://schemas.openxmlformats.org/officeDocument/2006/relationships" id="2147483650" r:id="R7294ae0d36c541b8"/>
-    <p:sldLayoutId xmlns:r="http://schemas.openxmlformats.org/officeDocument/2006/relationships" id="2147483651" r:id="Rac6f97a283214115"/>
-    <p:sldLayoutId xmlns:r="http://schemas.openxmlformats.org/officeDocument/2006/relationships" id="2147483652" r:id="R1b8c0ec805bb4537"/>
-    <p:sldLayoutId xmlns:r="http://schemas.openxmlformats.org/officeDocument/2006/relationships" id="2147483653" r:id="Rfb21e096b67448e1"/>
-    <p:sldLayoutId xmlns:r="http://schemas.openxmlformats.org/officeDocument/2006/relationships" id="2147483654" r:id="R9b5c923640db4702"/>
+    <p:sldLayoutId xmlns:r="http://schemas.openxmlformats.org/officeDocument/2006/relationships" id="2147483649" r:id="R9dcda54b3e604ce0"/>
+    <p:sldLayoutId xmlns:r="http://schemas.openxmlformats.org/officeDocument/2006/relationships" id="2147483650" r:id="Rc579450d0d7d4c38"/>
+    <p:sldLayoutId xmlns:r="http://schemas.openxmlformats.org/officeDocument/2006/relationships" id="2147483651" r:id="R0c64d66b480b4f70"/>
+    <p:sldLayoutId xmlns:r="http://schemas.openxmlformats.org/officeDocument/2006/relationships" id="2147483652" r:id="R80db90f79d9c4bed"/>
+    <p:sldLayoutId xmlns:r="http://schemas.openxmlformats.org/officeDocument/2006/relationships" id="2147483653" r:id="Ra6a3bc7ef01445db"/>
+    <p:sldLayoutId xmlns:r="http://schemas.openxmlformats.org/officeDocument/2006/relationships" id="2147483654" r:id="Ref4cb8964aba4b58"/>
   </p:sldLayoutIdLst>
   <p:txStyles>
     <p:titleStyle>
@@ -4861,7 +4932,7 @@
           <p:cNvPr id="7" name="">
             <a:extLst xmlns:a="http://schemas.openxmlformats.org/drawingml/2006/main">
               <a:ext uri="{FF2B5EF4-FFF2-40B4-BE49-F238E27FC236}">
-                <a16:creationId xmlns:a16="http://schemas.microsoft.com/office/drawing/2014/main" id="{3988E129-4D51-4095-8A98-7C599745ED3A}"/>
+                <a16:creationId xmlns:a16="http://schemas.microsoft.com/office/drawing/2014/main" id="{05BF2B04-30BA-441B-A906-6E3282F574EC}"/>
               </a:ext>
             </a:extLst>
           </p:cNvPr>
@@ -5017,7 +5088,7 @@
           <p:cNvPr id="2" name="">
             <a:extLst xmlns:a="http://schemas.openxmlformats.org/drawingml/2006/main">
               <a:ext uri="{FF2B5EF4-FFF2-40B4-BE49-F238E27FC236}">
-                <a16:creationId xmlns:a16="http://schemas.microsoft.com/office/drawing/2014/main" id="{E4C2F775-7B71-45BE-BCA3-D9595D9E8810}"/>
+                <a16:creationId xmlns:a16="http://schemas.microsoft.com/office/drawing/2014/main" id="{125A2B1C-3A43-4803-ABC1-97213523A173}"/>
               </a:ext>
             </a:extLst>
           </p:cNvPr>
@@ -5173,7 +5244,7 @@
           <p:cNvPr id="3" name="">
             <a:extLst xmlns:a="http://schemas.openxmlformats.org/drawingml/2006/main">
               <a:ext uri="{FF2B5EF4-FFF2-40B4-BE49-F238E27FC236}">
-                <a16:creationId xmlns:a16="http://schemas.microsoft.com/office/drawing/2014/main" id="{D627E5B5-09D5-4EB2-BF7F-F11430E6FE43}"/>
+                <a16:creationId xmlns:a16="http://schemas.microsoft.com/office/drawing/2014/main" id="{77B36349-801F-48D8-AF92-5129D8F7D903}"/>
               </a:ext>
             </a:extLst>
           </p:cNvPr>
@@ -5329,7 +5400,7 @@
           <p:cNvPr id="4" name="">
             <a:extLst xmlns:a="http://schemas.openxmlformats.org/drawingml/2006/main">
               <a:ext uri="{FF2B5EF4-FFF2-40B4-BE49-F238E27FC236}">
-                <a16:creationId xmlns:a16="http://schemas.microsoft.com/office/drawing/2014/main" id="{4F0E0282-27CA-44B6-93E9-4B5BB46DFA7C}"/>
+                <a16:creationId xmlns:a16="http://schemas.microsoft.com/office/drawing/2014/main" id="{0B131C46-E34F-48B3-B05B-3D6F461D6F99}"/>
               </a:ext>
             </a:extLst>
           </p:cNvPr>
@@ -5485,7 +5556,7 @@
           <p:cNvPr id="5" name="">
             <a:extLst xmlns:a="http://schemas.openxmlformats.org/drawingml/2006/main">
               <a:ext uri="{FF2B5EF4-FFF2-40B4-BE49-F238E27FC236}">
-                <a16:creationId xmlns:a16="http://schemas.microsoft.com/office/drawing/2014/main" id="{3C54C9C3-1DB8-424B-AD12-516E586C709A}"/>
+                <a16:creationId xmlns:a16="http://schemas.microsoft.com/office/drawing/2014/main" id="{1D6855DD-6DBA-4AE3-96E2-7589462E67B8}"/>
               </a:ext>
             </a:extLst>
           </p:cNvPr>
@@ -5641,7 +5712,7 @@
           <p:cNvPr id="6" name="">
             <a:extLst xmlns:a="http://schemas.openxmlformats.org/drawingml/2006/main">
               <a:ext uri="{FF2B5EF4-FFF2-40B4-BE49-F238E27FC236}">
-                <a16:creationId xmlns:a16="http://schemas.microsoft.com/office/drawing/2014/main" id="{44146816-86F9-4ED8-9840-705584D1E6A1}"/>
+                <a16:creationId xmlns:a16="http://schemas.microsoft.com/office/drawing/2014/main" id="{45AC38DF-C4E5-4628-92FE-B00C0C9F59A2}"/>
               </a:ext>
             </a:extLst>
           </p:cNvPr>
@@ -5795,7 +5866,7 @@
     </p:spTree>
     <p:extLst>
       <p:ext uri="{BB962C8B-B14F-4D97-AF65-F5344CB8AC3E}">
-        <p14:creationId xmlns:p14="http://schemas.microsoft.com/office/powerpoint/2010/main" val="938715336"/>
+        <p14:creationId xmlns:p14="http://schemas.microsoft.com/office/powerpoint/2010/main" val="1445464003"/>
       </p:ext>
     </p:extLst>
   </p:cSld>
@@ -5826,7 +5897,7 @@
           <p:cNvPr id="5" name="">
             <a:extLst xmlns:a="http://schemas.openxmlformats.org/drawingml/2006/main">
               <a:ext uri="{FF2B5EF4-FFF2-40B4-BE49-F238E27FC236}">
-                <a16:creationId xmlns:a16="http://schemas.microsoft.com/office/drawing/2014/main" id="{8348AA37-F436-4552-87C7-4DE5B9A73BA8}"/>
+                <a16:creationId xmlns:a16="http://schemas.microsoft.com/office/drawing/2014/main" id="{E6A878E9-D170-4A8D-AD07-446C85BB312D}"/>
               </a:ext>
             </a:extLst>
           </p:cNvPr>
@@ -5982,7 +6053,7 @@
           <p:cNvPr id="2" name="">
             <a:extLst xmlns:a="http://schemas.openxmlformats.org/drawingml/2006/main">
               <a:ext uri="{FF2B5EF4-FFF2-40B4-BE49-F238E27FC236}">
-                <a16:creationId xmlns:a16="http://schemas.microsoft.com/office/drawing/2014/main" id="{175B7E42-ED84-4F33-894D-54F20A00E111}"/>
+                <a16:creationId xmlns:a16="http://schemas.microsoft.com/office/drawing/2014/main" id="{6B9FC808-5E48-41BF-8303-CFEDB814B057}"/>
               </a:ext>
             </a:extLst>
           </p:cNvPr>
@@ -6138,7 +6209,7 @@
           <p:cNvPr id="3" name="">
             <a:extLst xmlns:a="http://schemas.openxmlformats.org/drawingml/2006/main">
               <a:ext uri="{FF2B5EF4-FFF2-40B4-BE49-F238E27FC236}">
-                <a16:creationId xmlns:a16="http://schemas.microsoft.com/office/drawing/2014/main" id="{49007DD7-8BA4-43F3-BC13-6DA05820DAE7}"/>
+                <a16:creationId xmlns:a16="http://schemas.microsoft.com/office/drawing/2014/main" id="{F42B9613-3AD8-471B-B07F-30A158CD412F}"/>
               </a:ext>
             </a:extLst>
           </p:cNvPr>
@@ -7079,7 +7150,7 @@
           <p:cNvPr id="4" name="">
             <a:extLst xmlns:a="http://schemas.openxmlformats.org/drawingml/2006/main">
               <a:ext uri="{FF2B5EF4-FFF2-40B4-BE49-F238E27FC236}">
-                <a16:creationId xmlns:a16="http://schemas.microsoft.com/office/drawing/2014/main" id="{843A7D43-F445-4F8F-ACD9-70288BC85A53}"/>
+                <a16:creationId xmlns:a16="http://schemas.microsoft.com/office/drawing/2014/main" id="{9B8CAB5E-C02C-4CD9-9C3C-155B5051014D}"/>
               </a:ext>
             </a:extLst>
           </p:cNvPr>
@@ -7233,7 +7304,7 @@
     </p:spTree>
     <p:extLst>
       <p:ext uri="{BB962C8B-B14F-4D97-AF65-F5344CB8AC3E}">
-        <p14:creationId xmlns:p14="http://schemas.microsoft.com/office/powerpoint/2010/main" val="1344973518"/>
+        <p14:creationId xmlns:p14="http://schemas.microsoft.com/office/powerpoint/2010/main" val="768176721"/>
       </p:ext>
     </p:extLst>
   </p:cSld>
@@ -7264,7 +7335,7 @@
           <p:cNvPr id="5" name="">
             <a:extLst xmlns:a="http://schemas.openxmlformats.org/drawingml/2006/main">
               <a:ext uri="{FF2B5EF4-FFF2-40B4-BE49-F238E27FC236}">
-                <a16:creationId xmlns:a16="http://schemas.microsoft.com/office/drawing/2014/main" id="{5ED4F7C2-9B67-4FA2-A8EA-197AA907D6A2}"/>
+                <a16:creationId xmlns:a16="http://schemas.microsoft.com/office/drawing/2014/main" id="{501E2011-F41D-4F61-9B2B-282D1AC77017}"/>
               </a:ext>
             </a:extLst>
           </p:cNvPr>
@@ -7420,7 +7491,7 @@
           <p:cNvPr id="2" name="">
             <a:extLst xmlns:a="http://schemas.openxmlformats.org/drawingml/2006/main">
               <a:ext uri="{FF2B5EF4-FFF2-40B4-BE49-F238E27FC236}">
-                <a16:creationId xmlns:a16="http://schemas.microsoft.com/office/drawing/2014/main" id="{9F0CC611-856D-49F7-9EC0-ADA982D2F02C}"/>
+                <a16:creationId xmlns:a16="http://schemas.microsoft.com/office/drawing/2014/main" id="{AEAFC7B6-BAF7-4328-AAD6-1F0D9DE76EF7}"/>
               </a:ext>
             </a:extLst>
           </p:cNvPr>
@@ -7576,7 +7647,7 @@
           <p:cNvPr id="3" name="">
             <a:extLst xmlns:a="http://schemas.openxmlformats.org/drawingml/2006/main">
               <a:ext uri="{FF2B5EF4-FFF2-40B4-BE49-F238E27FC236}">
-                <a16:creationId xmlns:a16="http://schemas.microsoft.com/office/drawing/2014/main" id="{6D65A0DD-DD67-426C-8B5D-26E7EF6F8484}"/>
+                <a16:creationId xmlns:a16="http://schemas.microsoft.com/office/drawing/2014/main" id="{E57E8000-C7B8-4B0D-A1B0-5BFA38BA927E}"/>
               </a:ext>
             </a:extLst>
           </p:cNvPr>
@@ -8517,7 +8588,7 @@
           <p:cNvPr id="4" name="">
             <a:extLst xmlns:a="http://schemas.openxmlformats.org/drawingml/2006/main">
               <a:ext uri="{FF2B5EF4-FFF2-40B4-BE49-F238E27FC236}">
-                <a16:creationId xmlns:a16="http://schemas.microsoft.com/office/drawing/2014/main" id="{3A85CD30-4B3B-434A-A2CB-74A5D8769A47}"/>
+                <a16:creationId xmlns:a16="http://schemas.microsoft.com/office/drawing/2014/main" id="{39FAD04B-A774-422F-8C71-396D46DAC2BA}"/>
               </a:ext>
             </a:extLst>
           </p:cNvPr>
@@ -8671,7 +8742,7 @@
     </p:spTree>
     <p:extLst>
       <p:ext uri="{BB962C8B-B14F-4D97-AF65-F5344CB8AC3E}">
-        <p14:creationId xmlns:p14="http://schemas.microsoft.com/office/powerpoint/2010/main" val="192318932"/>
+        <p14:creationId xmlns:p14="http://schemas.microsoft.com/office/powerpoint/2010/main" val="1859484666"/>
       </p:ext>
     </p:extLst>
   </p:cSld>
@@ -8702,7 +8773,7 @@
           <p:cNvPr id="5" name="">
             <a:extLst xmlns:a="http://schemas.openxmlformats.org/drawingml/2006/main">
               <a:ext uri="{FF2B5EF4-FFF2-40B4-BE49-F238E27FC236}">
-                <a16:creationId xmlns:a16="http://schemas.microsoft.com/office/drawing/2014/main" id="{8578EEF7-4876-441E-83FF-5724709B79B6}"/>
+                <a16:creationId xmlns:a16="http://schemas.microsoft.com/office/drawing/2014/main" id="{ABEDAA76-FE6E-450C-873B-DA0E3DC90881}"/>
               </a:ext>
             </a:extLst>
           </p:cNvPr>
@@ -8858,7 +8929,7 @@
           <p:cNvPr id="2" name="">
             <a:extLst xmlns:a="http://schemas.openxmlformats.org/drawingml/2006/main">
               <a:ext uri="{FF2B5EF4-FFF2-40B4-BE49-F238E27FC236}">
-                <a16:creationId xmlns:a16="http://schemas.microsoft.com/office/drawing/2014/main" id="{B4389E0B-39C2-4BDD-B3D7-302E825E9528}"/>
+                <a16:creationId xmlns:a16="http://schemas.microsoft.com/office/drawing/2014/main" id="{FAA60F88-B236-4C3A-93FC-C4B943F3758F}"/>
               </a:ext>
             </a:extLst>
           </p:cNvPr>
@@ -9014,7 +9085,7 @@
           <p:cNvPr id="3" name="">
             <a:extLst xmlns:a="http://schemas.openxmlformats.org/drawingml/2006/main">
               <a:ext uri="{FF2B5EF4-FFF2-40B4-BE49-F238E27FC236}">
-                <a16:creationId xmlns:a16="http://schemas.microsoft.com/office/drawing/2014/main" id="{589BB60F-AA0A-4CDE-A174-836712093753}"/>
+                <a16:creationId xmlns:a16="http://schemas.microsoft.com/office/drawing/2014/main" id="{C90957BB-2C88-4F08-A9DB-381A0E69CC43}"/>
               </a:ext>
             </a:extLst>
           </p:cNvPr>
@@ -9955,7 +10026,7 @@
           <p:cNvPr id="4" name="">
             <a:extLst xmlns:a="http://schemas.openxmlformats.org/drawingml/2006/main">
               <a:ext uri="{FF2B5EF4-FFF2-40B4-BE49-F238E27FC236}">
-                <a16:creationId xmlns:a16="http://schemas.microsoft.com/office/drawing/2014/main" id="{D3207E45-C7BB-480A-84E9-D48F59B397DA}"/>
+                <a16:creationId xmlns:a16="http://schemas.microsoft.com/office/drawing/2014/main" id="{01E6526E-0B66-4D16-9B0B-8BB19E42C95B}"/>
               </a:ext>
             </a:extLst>
           </p:cNvPr>
@@ -10109,7 +10180,7 @@
     </p:spTree>
     <p:extLst>
       <p:ext uri="{BB962C8B-B14F-4D97-AF65-F5344CB8AC3E}">
-        <p14:creationId xmlns:p14="http://schemas.microsoft.com/office/powerpoint/2010/main" val="1985599065"/>
+        <p14:creationId xmlns:p14="http://schemas.microsoft.com/office/powerpoint/2010/main" val="1225438483"/>
       </p:ext>
     </p:extLst>
   </p:cSld>
@@ -10140,7 +10211,7 @@
           <p:cNvPr id="8" name="">
             <a:extLst xmlns:a="http://schemas.openxmlformats.org/drawingml/2006/main">
               <a:ext uri="{FF2B5EF4-FFF2-40B4-BE49-F238E27FC236}">
-                <a16:creationId xmlns:a16="http://schemas.microsoft.com/office/drawing/2014/main" id="{B90DBC38-612D-4181-9E2B-7F8B562EFF74}"/>
+                <a16:creationId xmlns:a16="http://schemas.microsoft.com/office/drawing/2014/main" id="{1C75CCA5-6C5F-4BED-8797-A2A298FC459D}"/>
               </a:ext>
             </a:extLst>
           </p:cNvPr>
@@ -10296,7 +10367,7 @@
           <p:cNvPr id="2" name="">
             <a:extLst xmlns:a="http://schemas.openxmlformats.org/drawingml/2006/main">
               <a:ext uri="{FF2B5EF4-FFF2-40B4-BE49-F238E27FC236}">
-                <a16:creationId xmlns:a16="http://schemas.microsoft.com/office/drawing/2014/main" id="{2DAF0BDA-52D6-4A81-A8B6-69CB036881CF}"/>
+                <a16:creationId xmlns:a16="http://schemas.microsoft.com/office/drawing/2014/main" id="{B535E6A8-CB51-4DA6-A173-05E9E21ABE7C}"/>
               </a:ext>
             </a:extLst>
           </p:cNvPr>
@@ -10452,7 +10523,7 @@
           <p:cNvPr id="3" name="">
             <a:extLst xmlns:a="http://schemas.openxmlformats.org/drawingml/2006/main">
               <a:ext uri="{FF2B5EF4-FFF2-40B4-BE49-F238E27FC236}">
-                <a16:creationId xmlns:a16="http://schemas.microsoft.com/office/drawing/2014/main" id="{79AB39C6-7BAD-40B7-B843-9F7B7984899F}"/>
+                <a16:creationId xmlns:a16="http://schemas.microsoft.com/office/drawing/2014/main" id="{4CC80600-4105-4467-A345-ED914C5CB3C9}"/>
               </a:ext>
             </a:extLst>
           </p:cNvPr>
@@ -10608,7 +10679,7 @@
           <p:cNvPr id="4" name="">
             <a:extLst xmlns:a="http://schemas.openxmlformats.org/drawingml/2006/main">
               <a:ext uri="{FF2B5EF4-FFF2-40B4-BE49-F238E27FC236}">
-                <a16:creationId xmlns:a16="http://schemas.microsoft.com/office/drawing/2014/main" id="{4129CD82-9750-4BF0-B922-2DF3AE0BF324}"/>
+                <a16:creationId xmlns:a16="http://schemas.microsoft.com/office/drawing/2014/main" id="{62C3815A-5A92-4BD6-A3C5-BE2161D01D41}"/>
               </a:ext>
             </a:extLst>
           </p:cNvPr>
@@ -10764,7 +10835,7 @@
           <p:cNvPr id="5" name="">
             <a:extLst xmlns:a="http://schemas.openxmlformats.org/drawingml/2006/main">
               <a:ext uri="{FF2B5EF4-FFF2-40B4-BE49-F238E27FC236}">
-                <a16:creationId xmlns:a16="http://schemas.microsoft.com/office/drawing/2014/main" id="{7D375374-8569-4C35-BCB5-451ABE62A712}"/>
+                <a16:creationId xmlns:a16="http://schemas.microsoft.com/office/drawing/2014/main" id="{15478F83-B360-4875-A7B4-01063756995D}"/>
               </a:ext>
             </a:extLst>
           </p:cNvPr>
@@ -10920,7 +10991,7 @@
           <p:cNvPr id="6" name="">
             <a:extLst xmlns:a="http://schemas.openxmlformats.org/drawingml/2006/main">
               <a:ext uri="{FF2B5EF4-FFF2-40B4-BE49-F238E27FC236}">
-                <a16:creationId xmlns:a16="http://schemas.microsoft.com/office/drawing/2014/main" id="{B4625457-75DA-45B5-8A00-11B43CCD45DE}"/>
+                <a16:creationId xmlns:a16="http://schemas.microsoft.com/office/drawing/2014/main" id="{1A1BF974-125D-4AAD-AF5E-D7DAE24C700F}"/>
               </a:ext>
             </a:extLst>
           </p:cNvPr>
@@ -11076,7 +11147,7 @@
           <p:cNvPr id="7" name="">
             <a:extLst xmlns:a="http://schemas.openxmlformats.org/drawingml/2006/main">
               <a:ext uri="{FF2B5EF4-FFF2-40B4-BE49-F238E27FC236}">
-                <a16:creationId xmlns:a16="http://schemas.microsoft.com/office/drawing/2014/main" id="{7CD382B9-9D9A-4B8D-ABB8-7245EC5AA93D}"/>
+                <a16:creationId xmlns:a16="http://schemas.microsoft.com/office/drawing/2014/main" id="{C881710A-06EF-489A-AD64-3CFA2AF1F3DE}"/>
               </a:ext>
             </a:extLst>
           </p:cNvPr>
@@ -11230,7 +11301,7 @@
     </p:spTree>
     <p:extLst>
       <p:ext uri="{BB962C8B-B14F-4D97-AF65-F5344CB8AC3E}">
-        <p14:creationId xmlns:p14="http://schemas.microsoft.com/office/powerpoint/2010/main" val="1630714935"/>
+        <p14:creationId xmlns:p14="http://schemas.microsoft.com/office/powerpoint/2010/main" val="750060054"/>
       </p:ext>
     </p:extLst>
   </p:cSld>
@@ -11261,7 +11332,7 @@
           <p:cNvPr id="8" name="">
             <a:extLst xmlns:a="http://schemas.openxmlformats.org/drawingml/2006/main">
               <a:ext uri="{FF2B5EF4-FFF2-40B4-BE49-F238E27FC236}">
-                <a16:creationId xmlns:a16="http://schemas.microsoft.com/office/drawing/2014/main" id="{91E5C76E-D860-41B0-A64D-05ECA2B9F5E9}"/>
+                <a16:creationId xmlns:a16="http://schemas.microsoft.com/office/drawing/2014/main" id="{33E1AC63-367D-4992-9E41-71E5500B2E46}"/>
               </a:ext>
             </a:extLst>
           </p:cNvPr>
@@ -11417,7 +11488,7 @@
           <p:cNvPr id="2" name="">
             <a:extLst xmlns:a="http://schemas.openxmlformats.org/drawingml/2006/main">
               <a:ext uri="{FF2B5EF4-FFF2-40B4-BE49-F238E27FC236}">
-                <a16:creationId xmlns:a16="http://schemas.microsoft.com/office/drawing/2014/main" id="{571F4764-22F7-4070-A725-2F77F5B461D8}"/>
+                <a16:creationId xmlns:a16="http://schemas.microsoft.com/office/drawing/2014/main" id="{0CF7381E-17DB-4F4A-8274-5432CCAC31CA}"/>
               </a:ext>
             </a:extLst>
           </p:cNvPr>
@@ -11573,7 +11644,7 @@
           <p:cNvPr id="3" name="">
             <a:extLst xmlns:a="http://schemas.openxmlformats.org/drawingml/2006/main">
               <a:ext uri="{FF2B5EF4-FFF2-40B4-BE49-F238E27FC236}">
-                <a16:creationId xmlns:a16="http://schemas.microsoft.com/office/drawing/2014/main" id="{39419659-A82A-4F42-A63E-D6B214E2E71B}"/>
+                <a16:creationId xmlns:a16="http://schemas.microsoft.com/office/drawing/2014/main" id="{FB33B667-CE48-4D43-9A1E-FC3C61434C92}"/>
               </a:ext>
             </a:extLst>
           </p:cNvPr>
@@ -11729,7 +11800,7 @@
           <p:cNvPr id="4" name="">
             <a:extLst xmlns:a="http://schemas.openxmlformats.org/drawingml/2006/main">
               <a:ext uri="{FF2B5EF4-FFF2-40B4-BE49-F238E27FC236}">
-                <a16:creationId xmlns:a16="http://schemas.microsoft.com/office/drawing/2014/main" id="{1EEEC69A-4A42-4B6B-A1D3-566B950850E4}"/>
+                <a16:creationId xmlns:a16="http://schemas.microsoft.com/office/drawing/2014/main" id="{67C47894-209D-49A3-9D15-1D627072EB0B}"/>
               </a:ext>
             </a:extLst>
           </p:cNvPr>
@@ -11885,7 +11956,7 @@
           <p:cNvPr id="5" name="">
             <a:extLst xmlns:a="http://schemas.openxmlformats.org/drawingml/2006/main">
               <a:ext uri="{FF2B5EF4-FFF2-40B4-BE49-F238E27FC236}">
-                <a16:creationId xmlns:a16="http://schemas.microsoft.com/office/drawing/2014/main" id="{98E80A7E-E6F4-454F-8024-3C7D271EBE41}"/>
+                <a16:creationId xmlns:a16="http://schemas.microsoft.com/office/drawing/2014/main" id="{93B2CA45-B07A-448D-9B22-9E7E18E933A6}"/>
               </a:ext>
             </a:extLst>
           </p:cNvPr>
@@ -12041,7 +12112,7 @@
           <p:cNvPr id="6" name="">
             <a:extLst xmlns:a="http://schemas.openxmlformats.org/drawingml/2006/main">
               <a:ext uri="{FF2B5EF4-FFF2-40B4-BE49-F238E27FC236}">
-                <a16:creationId xmlns:a16="http://schemas.microsoft.com/office/drawing/2014/main" id="{DB088A1A-8B11-4877-B70A-627DFBD0EE63}"/>
+                <a16:creationId xmlns:a16="http://schemas.microsoft.com/office/drawing/2014/main" id="{E680441B-8A88-46F6-ABC0-7EDCA5FAF4B0}"/>
               </a:ext>
             </a:extLst>
           </p:cNvPr>
@@ -12197,7 +12268,7 @@
           <p:cNvPr id="7" name="">
             <a:extLst xmlns:a="http://schemas.openxmlformats.org/drawingml/2006/main">
               <a:ext uri="{FF2B5EF4-FFF2-40B4-BE49-F238E27FC236}">
-                <a16:creationId xmlns:a16="http://schemas.microsoft.com/office/drawing/2014/main" id="{EF6D3C5C-C383-4E17-86C9-0A07D4FD07FB}"/>
+                <a16:creationId xmlns:a16="http://schemas.microsoft.com/office/drawing/2014/main" id="{0969FAC9-6F53-4653-B7D9-F02D562B18D6}"/>
               </a:ext>
             </a:extLst>
           </p:cNvPr>
@@ -12351,7 +12422,7 @@
     </p:spTree>
     <p:extLst>
       <p:ext uri="{BB962C8B-B14F-4D97-AF65-F5344CB8AC3E}">
-        <p14:creationId xmlns:p14="http://schemas.microsoft.com/office/powerpoint/2010/main" val="572899434"/>
+        <p14:creationId xmlns:p14="http://schemas.microsoft.com/office/powerpoint/2010/main" val="2056917565"/>
       </p:ext>
     </p:extLst>
   </p:cSld>
@@ -12382,7 +12453,7 @@
           <p:cNvPr id="8" name="">
             <a:extLst xmlns:a="http://schemas.openxmlformats.org/drawingml/2006/main">
               <a:ext uri="{FF2B5EF4-FFF2-40B4-BE49-F238E27FC236}">
-                <a16:creationId xmlns:a16="http://schemas.microsoft.com/office/drawing/2014/main" id="{5A454E1F-A3D5-403B-9F63-6EF081A225DB}"/>
+                <a16:creationId xmlns:a16="http://schemas.microsoft.com/office/drawing/2014/main" id="{25FBF4B5-3148-4B30-8645-63FC19E12DBA}"/>
               </a:ext>
             </a:extLst>
           </p:cNvPr>
@@ -12538,7 +12609,7 @@
           <p:cNvPr id="2" name="">
             <a:extLst xmlns:a="http://schemas.openxmlformats.org/drawingml/2006/main">
               <a:ext uri="{FF2B5EF4-FFF2-40B4-BE49-F238E27FC236}">
-                <a16:creationId xmlns:a16="http://schemas.microsoft.com/office/drawing/2014/main" id="{DFD9C850-40C3-477A-AE6D-1E91709A3874}"/>
+                <a16:creationId xmlns:a16="http://schemas.microsoft.com/office/drawing/2014/main" id="{5AD29735-459F-423E-9616-9118095E1DC6}"/>
               </a:ext>
             </a:extLst>
           </p:cNvPr>
@@ -12694,7 +12765,7 @@
           <p:cNvPr id="3" name="">
             <a:extLst xmlns:a="http://schemas.openxmlformats.org/drawingml/2006/main">
               <a:ext uri="{FF2B5EF4-FFF2-40B4-BE49-F238E27FC236}">
-                <a16:creationId xmlns:a16="http://schemas.microsoft.com/office/drawing/2014/main" id="{F880620C-7C1C-4301-BEE0-A7FB8B8A8AE2}"/>
+                <a16:creationId xmlns:a16="http://schemas.microsoft.com/office/drawing/2014/main" id="{01B7AB17-DDB0-4FA6-9890-A1F10B34D50D}"/>
               </a:ext>
             </a:extLst>
           </p:cNvPr>
@@ -12850,7 +12921,7 @@
           <p:cNvPr id="4" name="">
             <a:extLst xmlns:a="http://schemas.openxmlformats.org/drawingml/2006/main">
               <a:ext uri="{FF2B5EF4-FFF2-40B4-BE49-F238E27FC236}">
-                <a16:creationId xmlns:a16="http://schemas.microsoft.com/office/drawing/2014/main" id="{A668FABB-0108-4332-AED8-36AA7D9A2F05}"/>
+                <a16:creationId xmlns:a16="http://schemas.microsoft.com/office/drawing/2014/main" id="{7D04DBB6-4E2F-481D-911C-9D5303DC35AB}"/>
               </a:ext>
             </a:extLst>
           </p:cNvPr>
@@ -13006,7 +13077,7 @@
           <p:cNvPr id="5" name="">
             <a:extLst xmlns:a="http://schemas.openxmlformats.org/drawingml/2006/main">
               <a:ext uri="{FF2B5EF4-FFF2-40B4-BE49-F238E27FC236}">
-                <a16:creationId xmlns:a16="http://schemas.microsoft.com/office/drawing/2014/main" id="{6EBBBA92-5145-4014-B431-FE860AE005BF}"/>
+                <a16:creationId xmlns:a16="http://schemas.microsoft.com/office/drawing/2014/main" id="{A970E202-63FF-48DC-B55B-8D63268639EE}"/>
               </a:ext>
             </a:extLst>
           </p:cNvPr>
@@ -13162,7 +13233,7 @@
           <p:cNvPr id="6" name="">
             <a:extLst xmlns:a="http://schemas.openxmlformats.org/drawingml/2006/main">
               <a:ext uri="{FF2B5EF4-FFF2-40B4-BE49-F238E27FC236}">
-                <a16:creationId xmlns:a16="http://schemas.microsoft.com/office/drawing/2014/main" id="{F61E8184-0E51-4D35-BC44-5ABBA2BFF89F}"/>
+                <a16:creationId xmlns:a16="http://schemas.microsoft.com/office/drawing/2014/main" id="{8DA78872-C538-40F1-A179-CBB91D795B02}"/>
               </a:ext>
             </a:extLst>
           </p:cNvPr>
@@ -13318,7 +13389,7 @@
           <p:cNvPr id="7" name="">
             <a:extLst xmlns:a="http://schemas.openxmlformats.org/drawingml/2006/main">
               <a:ext uri="{FF2B5EF4-FFF2-40B4-BE49-F238E27FC236}">
-                <a16:creationId xmlns:a16="http://schemas.microsoft.com/office/drawing/2014/main" id="{D23E5EC0-7A5E-494A-A434-B54D40CCFC05}"/>
+                <a16:creationId xmlns:a16="http://schemas.microsoft.com/office/drawing/2014/main" id="{EAA4DEA6-4D2C-4831-A115-23EA901772D4}"/>
               </a:ext>
             </a:extLst>
           </p:cNvPr>
@@ -13472,7 +13543,7 @@
     </p:spTree>
     <p:extLst>
       <p:ext uri="{BB962C8B-B14F-4D97-AF65-F5344CB8AC3E}">
-        <p14:creationId xmlns:p14="http://schemas.microsoft.com/office/powerpoint/2010/main" val="1374095653"/>
+        <p14:creationId xmlns:p14="http://schemas.microsoft.com/office/powerpoint/2010/main" val="666180066"/>
       </p:ext>
     </p:extLst>
   </p:cSld>
@@ -13503,7 +13574,7 @@
           <p:cNvPr id="8" name="">
             <a:extLst xmlns:a="http://schemas.openxmlformats.org/drawingml/2006/main">
               <a:ext uri="{FF2B5EF4-FFF2-40B4-BE49-F238E27FC236}">
-                <a16:creationId xmlns:a16="http://schemas.microsoft.com/office/drawing/2014/main" id="{EECDFFC5-019E-49B1-8010-4933C1CAF06D}"/>
+                <a16:creationId xmlns:a16="http://schemas.microsoft.com/office/drawing/2014/main" id="{569CA2B9-DCD0-4D14-AE39-AFD393ACDE0D}"/>
               </a:ext>
             </a:extLst>
           </p:cNvPr>
@@ -13649,7 +13720,7 @@
                 <a:ea typeface="Arial"/>
                 <a:cs typeface="Arial"/>
               </a:rPr>
-              <a:t>What the clinician view shows</a:t>
+              <a:t>Timing-posterior check</a:t>
             </a:r>
           </a:p>
         </p:txBody>
@@ -13659,7 +13730,7 @@
           <p:cNvPr id="2" name="">
             <a:extLst xmlns:a="http://schemas.openxmlformats.org/drawingml/2006/main">
               <a:ext uri="{FF2B5EF4-FFF2-40B4-BE49-F238E27FC236}">
-                <a16:creationId xmlns:a16="http://schemas.microsoft.com/office/drawing/2014/main" id="{F9ECBC8B-0221-42C2-90FC-93F7DAE73983}"/>
+                <a16:creationId xmlns:a16="http://schemas.microsoft.com/office/drawing/2014/main" id="{5E4580CC-F4E4-4AA1-ACAA-541E55A45167}"/>
               </a:ext>
             </a:extLst>
           </p:cNvPr>
@@ -13805,7 +13876,7 @@
                 <a:ea typeface="Arial"/>
                 <a:cs typeface="Arial"/>
               </a:rPr>
-              <a:t>Decision-support research display</a:t>
+              <a:t>Train-only calendar/static prior plus temperature, RHR and HRV likelihoods</a:t>
             </a:r>
           </a:p>
         </p:txBody>
@@ -13815,7 +13886,7 @@
           <p:cNvPr id="3" name="">
             <a:extLst xmlns:a="http://schemas.openxmlformats.org/drawingml/2006/main">
               <a:ext uri="{FF2B5EF4-FFF2-40B4-BE49-F238E27FC236}">
-                <a16:creationId xmlns:a16="http://schemas.microsoft.com/office/drawing/2014/main" id="{F8ADF42E-FC8A-413E-9769-C77D193C0905}"/>
+                <a16:creationId xmlns:a16="http://schemas.microsoft.com/office/drawing/2014/main" id="{BB3D8A35-E605-4017-A2B3-6F4EC5D2E9F7}"/>
               </a:ext>
             </a:extLst>
           </p:cNvPr>
@@ -13961,7 +14032,7 @@
                 <a:ea typeface="Arial"/>
                 <a:cs typeface="Arial"/>
               </a:rPr>
-              <a:t>Fitted probability beside its own validation threshold and held-out model evidence</a:t>
+              <a:t>Synthetic Bayesian-posterior Brier 0.098; fitted logistic Brier 0.117</a:t>
             </a:r>
           </a:p>
         </p:txBody>
@@ -13971,7 +14042,7 @@
           <p:cNvPr id="4" name="">
             <a:extLst xmlns:a="http://schemas.openxmlformats.org/drawingml/2006/main">
               <a:ext uri="{FF2B5EF4-FFF2-40B4-BE49-F238E27FC236}">
-                <a16:creationId xmlns:a16="http://schemas.microsoft.com/office/drawing/2014/main" id="{4FB1D2E7-A888-4738-8615-166DC6ADA4E3}"/>
+                <a16:creationId xmlns:a16="http://schemas.microsoft.com/office/drawing/2014/main" id="{F4DAE4A2-92F1-4641-99D6-5BE032E4BADC}"/>
               </a:ext>
             </a:extLst>
           </p:cNvPr>
@@ -14117,7 +14188,7 @@
                 <a:ea typeface="Arial"/>
                 <a:cs typeface="Arial"/>
               </a:rPr>
-              <a:t>Exact additive feature contributions and explicit imputation</a:t>
+              <a:t>Twin minus logistic Brier -0.018, patient-cluster 95% CI [-0.022, -0.014]</a:t>
             </a:r>
           </a:p>
         </p:txBody>
@@ -14127,7 +14198,7 @@
           <p:cNvPr id="5" name="">
             <a:extLst xmlns:a="http://schemas.openxmlformats.org/drawingml/2006/main">
               <a:ext uri="{FF2B5EF4-FFF2-40B4-BE49-F238E27FC236}">
-                <a16:creationId xmlns:a16="http://schemas.microsoft.com/office/drawing/2014/main" id="{20FB4BA8-71F9-4751-99D0-AE99BC0AB941}"/>
+                <a16:creationId xmlns:a16="http://schemas.microsoft.com/office/drawing/2014/main" id="{5C7A3CDF-8FA8-4714-A10E-CD6443EC1A35}"/>
               </a:ext>
             </a:extLst>
           </p:cNvPr>
@@ -14273,7 +14344,7 @@
                 <a:ea typeface="Arial"/>
                 <a:cs typeface="Arial"/>
               </a:rPr>
-              <a:t>Heuristic day estimate and conditional, illustrative day band</a:t>
+              <a:t>noninferior synthetic check; still separate interpretation layer</a:t>
             </a:r>
           </a:p>
         </p:txBody>
@@ -14283,7 +14354,7 @@
           <p:cNvPr id="6" name="">
             <a:extLst xmlns:a="http://schemas.openxmlformats.org/drawingml/2006/main">
               <a:ext uri="{FF2B5EF4-FFF2-40B4-BE49-F238E27FC236}">
-                <a16:creationId xmlns:a16="http://schemas.microsoft.com/office/drawing/2014/main" id="{BCDAA4CC-0107-4785-9760-D259BA7341FB}"/>
+                <a16:creationId xmlns:a16="http://schemas.microsoft.com/office/drawing/2014/main" id="{E9AFB353-6403-4E24-8CC6-2A9483502887}"/>
               </a:ext>
             </a:extLst>
           </p:cNvPr>
@@ -14429,7 +14500,7 @@
                 <a:ea typeface="Arial"/>
                 <a:cs typeface="Arial"/>
               </a:rPr>
-              <a:t>Data-quality ribbon and the reason for any withholding</a:t>
+              <a:t>Separate from the logistic score, threshold, safety gate and alert policy.</a:t>
             </a:r>
           </a:p>
         </p:txBody>
@@ -14439,7 +14510,7 @@
           <p:cNvPr id="7" name="">
             <a:extLst xmlns:a="http://schemas.openxmlformats.org/drawingml/2006/main">
               <a:ext uri="{FF2B5EF4-FFF2-40B4-BE49-F238E27FC236}">
-                <a16:creationId xmlns:a16="http://schemas.microsoft.com/office/drawing/2014/main" id="{C2E28703-371E-443B-86C7-BF2BD3417E0C}"/>
+                <a16:creationId xmlns:a16="http://schemas.microsoft.com/office/drawing/2014/main" id="{B80F02EE-A90A-4C1A-A444-B50D1E544F34}"/>
               </a:ext>
             </a:extLst>
           </p:cNvPr>
@@ -14593,7 +14664,7 @@
     </p:spTree>
     <p:extLst>
       <p:ext uri="{BB962C8B-B14F-4D97-AF65-F5344CB8AC3E}">
-        <p14:creationId xmlns:p14="http://schemas.microsoft.com/office/powerpoint/2010/main" val="1519758742"/>
+        <p14:creationId xmlns:p14="http://schemas.microsoft.com/office/powerpoint/2010/main" val="976302971"/>
       </p:ext>
     </p:extLst>
   </p:cSld>
@@ -14624,7 +14695,7 @@
           <p:cNvPr id="8" name="">
             <a:extLst xmlns:a="http://schemas.openxmlformats.org/drawingml/2006/main">
               <a:ext uri="{FF2B5EF4-FFF2-40B4-BE49-F238E27FC236}">
-                <a16:creationId xmlns:a16="http://schemas.microsoft.com/office/drawing/2014/main" id="{3C584D94-C290-41C0-9BAA-8AC5E8A95555}"/>
+                <a16:creationId xmlns:a16="http://schemas.microsoft.com/office/drawing/2014/main" id="{3FC275CB-9B0C-46D0-900E-608E822F3E17}"/>
               </a:ext>
             </a:extLst>
           </p:cNvPr>
@@ -14770,7 +14841,7 @@
                 <a:ea typeface="Arial"/>
                 <a:cs typeface="Arial"/>
               </a:rPr>
-              <a:t>Guardrails live</a:t>
+              <a:t>What the clinician view shows</a:t>
             </a:r>
           </a:p>
         </p:txBody>
@@ -14780,7 +14851,7 @@
           <p:cNvPr id="2" name="">
             <a:extLst xmlns:a="http://schemas.openxmlformats.org/drawingml/2006/main">
               <a:ext uri="{FF2B5EF4-FFF2-40B4-BE49-F238E27FC236}">
-                <a16:creationId xmlns:a16="http://schemas.microsoft.com/office/drawing/2014/main" id="{3BC668A5-F95F-45A5-8412-B035B6F31655}"/>
+                <a16:creationId xmlns:a16="http://schemas.microsoft.com/office/drawing/2014/main" id="{732A9559-1E6F-4435-80EE-A975E92E7F68}"/>
               </a:ext>
             </a:extLst>
           </p:cNvPr>
@@ -14926,7 +14997,7 @@
                 <a:ea typeface="Arial"/>
                 <a:cs typeface="Arial"/>
               </a:rPr>
-              <a:t>Missing safety information causes abstention</a:t>
+              <a:t>Decision-support research display</a:t>
             </a:r>
           </a:p>
         </p:txBody>
@@ -14936,7 +15007,7 @@
           <p:cNvPr id="3" name="">
             <a:extLst xmlns:a="http://schemas.openxmlformats.org/drawingml/2006/main">
               <a:ext uri="{FF2B5EF4-FFF2-40B4-BE49-F238E27FC236}">
-                <a16:creationId xmlns:a16="http://schemas.microsoft.com/office/drawing/2014/main" id="{AF11796A-D932-4800-9757-AD158270DBC4}"/>
+                <a16:creationId xmlns:a16="http://schemas.microsoft.com/office/drawing/2014/main" id="{A77BAEE1-8E63-4793-ADCF-7C42DAD001FB}"/>
               </a:ext>
             </a:extLst>
           </p:cNvPr>
@@ -15082,7 +15153,7 @@
                 <a:ea typeface="Arial"/>
                 <a:cs typeface="Arial"/>
               </a:rPr>
-              <a:t>Contraception, thyroid and prolactin flags, age and pregnancy-related states</a:t>
+              <a:t>Fitted probability beside its own validation threshold and held-out model evidence</a:t>
             </a:r>
           </a:p>
         </p:txBody>
@@ -15092,7 +15163,7 @@
           <p:cNvPr id="4" name="">
             <a:extLst xmlns:a="http://schemas.openxmlformats.org/drawingml/2006/main">
               <a:ext uri="{FF2B5EF4-FFF2-40B4-BE49-F238E27FC236}">
-                <a16:creationId xmlns:a16="http://schemas.microsoft.com/office/drawing/2014/main" id="{A97C1DD4-6454-4F7A-B69A-D12394909BFB}"/>
+                <a16:creationId xmlns:a16="http://schemas.microsoft.com/office/drawing/2014/main" id="{F79BE5A7-B70A-4917-A6F7-82FEDEBBD561}"/>
               </a:ext>
             </a:extLst>
           </p:cNvPr>
@@ -15238,7 +15309,7 @@
                 <a:ea typeface="Arial"/>
                 <a:cs typeface="Arial"/>
               </a:rPr>
-              <a:t>Early post-menarche, perimenopause and insufficient observed temperature</a:t>
+              <a:t>Exact additive feature contributions and explicit imputation</a:t>
             </a:r>
           </a:p>
         </p:txBody>
@@ -15248,7 +15319,7 @@
           <p:cNvPr id="5" name="">
             <a:extLst xmlns:a="http://schemas.openxmlformats.org/drawingml/2006/main">
               <a:ext uri="{FF2B5EF4-FFF2-40B4-BE49-F238E27FC236}">
-                <a16:creationId xmlns:a16="http://schemas.microsoft.com/office/drawing/2014/main" id="{6E045CD0-86C4-4D3D-9936-D99F16D6BBE0}"/>
+                <a16:creationId xmlns:a16="http://schemas.microsoft.com/office/drawing/2014/main" id="{F15B8A98-679C-4E7E-80C6-D5EB61411D4F}"/>
               </a:ext>
             </a:extLst>
           </p:cNvPr>
@@ -15394,7 +15465,7 @@
                 <a:ea typeface="Arial"/>
                 <a:cs typeface="Arial"/>
               </a:rPr>
-              <a:t>Withholding removes personal scores, intervals, explanations, sandbox outputs and alerts</a:t>
+              <a:t>Heuristic day estimate and conditional, illustrative day band</a:t>
             </a:r>
           </a:p>
         </p:txBody>
@@ -15404,7 +15475,7 @@
           <p:cNvPr id="6" name="">
             <a:extLst xmlns:a="http://schemas.openxmlformats.org/drawingml/2006/main">
               <a:ext uri="{FF2B5EF4-FFF2-40B4-BE49-F238E27FC236}">
-                <a16:creationId xmlns:a16="http://schemas.microsoft.com/office/drawing/2014/main" id="{C47C9EE2-FB99-422F-A8EA-7CECFB5EA148}"/>
+                <a16:creationId xmlns:a16="http://schemas.microsoft.com/office/drawing/2014/main" id="{C462B0B3-9EF4-428C-8107-6943EDE96067}"/>
               </a:ext>
             </a:extLst>
           </p:cNvPr>
@@ -15550,7 +15621,7 @@
                 <a:ea typeface="Arial"/>
                 <a:cs typeface="Arial"/>
               </a:rPr>
-              <a:t>The workflow is synthetic and its safety effectiveness has not been clinically evaluated</a:t>
+              <a:t>Data-quality ribbon and the reason for any withholding</a:t>
             </a:r>
           </a:p>
         </p:txBody>
@@ -15560,7 +15631,7 @@
           <p:cNvPr id="7" name="">
             <a:extLst xmlns:a="http://schemas.openxmlformats.org/drawingml/2006/main">
               <a:ext uri="{FF2B5EF4-FFF2-40B4-BE49-F238E27FC236}">
-                <a16:creationId xmlns:a16="http://schemas.microsoft.com/office/drawing/2014/main" id="{8EB9827A-ADD1-4F40-B26C-63AFF4D64E6F}"/>
+                <a16:creationId xmlns:a16="http://schemas.microsoft.com/office/drawing/2014/main" id="{D7F07C9F-058C-4A09-9879-8872048C8FF8}"/>
               </a:ext>
             </a:extLst>
           </p:cNvPr>
@@ -15714,7 +15785,7 @@
     </p:spTree>
     <p:extLst>
       <p:ext uri="{BB962C8B-B14F-4D97-AF65-F5344CB8AC3E}">
-        <p14:creationId xmlns:p14="http://schemas.microsoft.com/office/powerpoint/2010/main" val="801165215"/>
+        <p14:creationId xmlns:p14="http://schemas.microsoft.com/office/powerpoint/2010/main" val="1335634926"/>
       </p:ext>
     </p:extLst>
   </p:cSld>
@@ -15745,7 +15816,7 @@
           <p:cNvPr id="8" name="">
             <a:extLst xmlns:a="http://schemas.openxmlformats.org/drawingml/2006/main">
               <a:ext uri="{FF2B5EF4-FFF2-40B4-BE49-F238E27FC236}">
-                <a16:creationId xmlns:a16="http://schemas.microsoft.com/office/drawing/2014/main" id="{7D565724-4331-478B-9021-09FE9C9154E1}"/>
+                <a16:creationId xmlns:a16="http://schemas.microsoft.com/office/drawing/2014/main" id="{B203ADC1-65EF-421C-B7F3-5DF4DB43A7B8}"/>
               </a:ext>
             </a:extLst>
           </p:cNvPr>
@@ -15891,7 +15962,7 @@
                 <a:ea typeface="Arial"/>
                 <a:cs typeface="Arial"/>
               </a:rPr>
-              <a:t>The twin and assumption sandbox</a:t>
+              <a:t>Guardrails live</a:t>
             </a:r>
           </a:p>
         </p:txBody>
@@ -15901,7 +15972,7 @@
           <p:cNvPr id="2" name="">
             <a:extLst xmlns:a="http://schemas.openxmlformats.org/drawingml/2006/main">
               <a:ext uri="{FF2B5EF4-FFF2-40B4-BE49-F238E27FC236}">
-                <a16:creationId xmlns:a16="http://schemas.microsoft.com/office/drawing/2014/main" id="{F8F3DEA9-C9AB-4D3C-A347-8F99DD0C68BA}"/>
+                <a16:creationId xmlns:a16="http://schemas.microsoft.com/office/drawing/2014/main" id="{4357B1FF-439B-405B-A118-C1B2B9DE5DC1}"/>
               </a:ext>
             </a:extLst>
           </p:cNvPr>
@@ -16047,7 +16118,7 @@
                 <a:ea typeface="Arial"/>
                 <a:cs typeface="Arial"/>
               </a:rPr>
-              <a:t>Clear boundaries around simulated physiology</a:t>
+              <a:t>Missing safety information causes abstention</a:t>
             </a:r>
           </a:p>
         </p:txBody>
@@ -16057,7 +16128,7 @@
           <p:cNvPr id="3" name="">
             <a:extLst xmlns:a="http://schemas.openxmlformats.org/drawingml/2006/main">
               <a:ext uri="{FF2B5EF4-FFF2-40B4-BE49-F238E27FC236}">
-                <a16:creationId xmlns:a16="http://schemas.microsoft.com/office/drawing/2014/main" id="{1E298368-7F0D-4381-956D-6EF0BE527134}"/>
+                <a16:creationId xmlns:a16="http://schemas.microsoft.com/office/drawing/2014/main" id="{8F0373BF-F2E1-400C-AB89-0AB9AABBA9EA}"/>
               </a:ext>
             </a:extLst>
           </p:cNvPr>
@@ -16203,7 +16274,7 @@
                 <a:ea typeface="Arial"/>
                 <a:cs typeface="Arial"/>
               </a:rPr>
-              <a:t>Reproductive and metabolic equations generate an illustrative state trajectory</a:t>
+              <a:t>Contraception, thyroid and prolactin flags, age and pregnancy-related states</a:t>
             </a:r>
           </a:p>
         </p:txBody>
@@ -16213,7 +16284,7 @@
           <p:cNvPr id="4" name="">
             <a:extLst xmlns:a="http://schemas.openxmlformats.org/drawingml/2006/main">
               <a:ext uri="{FF2B5EF4-FFF2-40B4-BE49-F238E27FC236}">
-                <a16:creationId xmlns:a16="http://schemas.microsoft.com/office/drawing/2014/main" id="{C78EF5E0-172D-45C5-B550-A64572DDE12B}"/>
+                <a16:creationId xmlns:a16="http://schemas.microsoft.com/office/drawing/2014/main" id="{278CFBA0-D076-4331-92E5-258AFB659BF5}"/>
               </a:ext>
             </a:extLst>
           </p:cNvPr>
@@ -16359,7 +16430,7 @@
                 <a:ea typeface="Arial"/>
                 <a:cs typeface="Arial"/>
               </a:rPr>
-              <a:t>The twin does not affect the logistic score or its reported performance</a:t>
+              <a:t>Early post-menarche, perimenopause and insufficient observed temperature</a:t>
             </a:r>
           </a:p>
         </p:txBody>
@@ -16369,7 +16440,7 @@
           <p:cNvPr id="5" name="">
             <a:extLst xmlns:a="http://schemas.openxmlformats.org/drawingml/2006/main">
               <a:ext uri="{FF2B5EF4-FFF2-40B4-BE49-F238E27FC236}">
-                <a16:creationId xmlns:a16="http://schemas.microsoft.com/office/drawing/2014/main" id="{EE05EE50-17E7-41AC-BC85-3F84DA85133A}"/>
+                <a16:creationId xmlns:a16="http://schemas.microsoft.com/office/drawing/2014/main" id="{DC9CB254-0083-4C6F-AF8A-ED600A505F9D}"/>
               </a:ext>
             </a:extLst>
           </p:cNvPr>
@@ -16515,7 +16586,7 @@
                 <a:ea typeface="Arial"/>
                 <a:cs typeface="Arial"/>
               </a:rPr>
-              <a:t>The sandbox edits invented model inputs. It does not predict a treatment effect</a:t>
+              <a:t>Withholding removes personal scores, intervals, explanations, sandbox outputs and alerts</a:t>
             </a:r>
           </a:p>
         </p:txBody>
@@ -16525,7 +16596,7 @@
           <p:cNvPr id="6" name="">
             <a:extLst xmlns:a="http://schemas.openxmlformats.org/drawingml/2006/main">
               <a:ext uri="{FF2B5EF4-FFF2-40B4-BE49-F238E27FC236}">
-                <a16:creationId xmlns:a16="http://schemas.microsoft.com/office/drawing/2014/main" id="{E0081B18-7238-4C91-ADC2-7CCA34B65AD7}"/>
+                <a16:creationId xmlns:a16="http://schemas.microsoft.com/office/drawing/2014/main" id="{F7563380-79D4-43AA-810C-2603607E27B3}"/>
               </a:ext>
             </a:extLst>
           </p:cNvPr>
@@ -16671,7 +16742,7 @@
                 <a:ea typeface="Arial"/>
                 <a:cs typeface="Arial"/>
               </a:rPr>
-              <a:t>Glucose threshold crossings are simulated counts, not an evaluated glucose forecast</a:t>
+              <a:t>The workflow is synthetic and its safety effectiveness has not been clinically evaluated</a:t>
             </a:r>
           </a:p>
         </p:txBody>
@@ -16681,7 +16752,7 @@
           <p:cNvPr id="7" name="">
             <a:extLst xmlns:a="http://schemas.openxmlformats.org/drawingml/2006/main">
               <a:ext uri="{FF2B5EF4-FFF2-40B4-BE49-F238E27FC236}">
-                <a16:creationId xmlns:a16="http://schemas.microsoft.com/office/drawing/2014/main" id="{40937E73-563B-4B40-BE92-823D4F2EF181}"/>
+                <a16:creationId xmlns:a16="http://schemas.microsoft.com/office/drawing/2014/main" id="{DF1081EF-888B-4A4E-A168-AE5F83500416}"/>
               </a:ext>
             </a:extLst>
           </p:cNvPr>
@@ -16835,7 +16906,7 @@
     </p:spTree>
     <p:extLst>
       <p:ext uri="{BB962C8B-B14F-4D97-AF65-F5344CB8AC3E}">
-        <p14:creationId xmlns:p14="http://schemas.microsoft.com/office/powerpoint/2010/main" val="608564641"/>
+        <p14:creationId xmlns:p14="http://schemas.microsoft.com/office/powerpoint/2010/main" val="1014206355"/>
       </p:ext>
     </p:extLst>
   </p:cSld>
@@ -16866,7 +16937,7 @@
           <p:cNvPr id="8" name="">
             <a:extLst xmlns:a="http://schemas.openxmlformats.org/drawingml/2006/main">
               <a:ext uri="{FF2B5EF4-FFF2-40B4-BE49-F238E27FC236}">
-                <a16:creationId xmlns:a16="http://schemas.microsoft.com/office/drawing/2014/main" id="{1A1F3D28-46FA-46E5-B075-ACEAC3AEF65A}"/>
+                <a16:creationId xmlns:a16="http://schemas.microsoft.com/office/drawing/2014/main" id="{3950CE4A-1EB4-4B6F-88D6-9C6DB1C11EB5}"/>
               </a:ext>
             </a:extLst>
           </p:cNvPr>
@@ -17012,7 +17083,7 @@
                 <a:ea typeface="Arial"/>
                 <a:cs typeface="Arial"/>
               </a:rPr>
-              <a:t>Where it fails</a:t>
+              <a:t>The twin and assumption sandbox</a:t>
             </a:r>
           </a:p>
         </p:txBody>
@@ -17022,7 +17093,7 @@
           <p:cNvPr id="2" name="">
             <a:extLst xmlns:a="http://schemas.openxmlformats.org/drawingml/2006/main">
               <a:ext uri="{FF2B5EF4-FFF2-40B4-BE49-F238E27FC236}">
-                <a16:creationId xmlns:a16="http://schemas.microsoft.com/office/drawing/2014/main" id="{B45815A4-1D7A-4AF8-B063-2A1354D282D6}"/>
+                <a16:creationId xmlns:a16="http://schemas.microsoft.com/office/drawing/2014/main" id="{2FEBF43B-64F7-4C16-A9C2-84B0C5E30E58}"/>
               </a:ext>
             </a:extLst>
           </p:cNvPr>
@@ -17168,7 +17239,7 @@
                 <a:ea typeface="Arial"/>
                 <a:cs typeface="Arial"/>
               </a:rPr>
-              <a:t>All declared Kushi scenarios remain visible</a:t>
+              <a:t>Clear boundaries around simulated physiology</a:t>
             </a:r>
           </a:p>
         </p:txBody>
@@ -17178,7 +17249,7 @@
           <p:cNvPr id="3" name="">
             <a:extLst xmlns:a="http://schemas.openxmlformats.org/drawingml/2006/main">
               <a:ext uri="{FF2B5EF4-FFF2-40B4-BE49-F238E27FC236}">
-                <a16:creationId xmlns:a16="http://schemas.microsoft.com/office/drawing/2014/main" id="{0752F1CE-154A-4D80-83C1-253F3B33F180}"/>
+                <a16:creationId xmlns:a16="http://schemas.microsoft.com/office/drawing/2014/main" id="{F243D4DB-5672-4AC6-95DB-54FBD3398CDA}"/>
               </a:ext>
             </a:extLst>
           </p:cNvPr>
@@ -17324,7 +17395,7 @@
                 <a:ea typeface="Arial"/>
                 <a:cs typeface="Arial"/>
               </a:rPr>
-              <a:t>Display the fixed scenario seeds with misses, false alarms or withholding unchanged</a:t>
+              <a:t>Reproductive and metabolic equations generate an illustrative state trajectory</a:t>
             </a:r>
           </a:p>
         </p:txBody>
@@ -17334,7 +17405,7 @@
           <p:cNvPr id="4" name="">
             <a:extLst xmlns:a="http://schemas.openxmlformats.org/drawingml/2006/main">
               <a:ext uri="{FF2B5EF4-FFF2-40B4-BE49-F238E27FC236}">
-                <a16:creationId xmlns:a16="http://schemas.microsoft.com/office/drawing/2014/main" id="{FC0AC2CC-0128-457D-9004-DE0F88730F71}"/>
+                <a16:creationId xmlns:a16="http://schemas.microsoft.com/office/drawing/2014/main" id="{C4BF4858-A229-4A71-9708-060FD13404F7}"/>
               </a:ext>
             </a:extLst>
           </p:cNvPr>
@@ -17480,7 +17551,7 @@
                 <a:ea typeface="Arial"/>
                 <a:cs typeface="Arial"/>
               </a:rPr>
-              <a:t>Different snapshots can fall back to calendar even when sensors are available</a:t>
+              <a:t>The twin does not affect the logistic score or its reported performance</a:t>
             </a:r>
           </a:p>
         </p:txBody>
@@ -17490,7 +17561,7 @@
           <p:cNvPr id="5" name="">
             <a:extLst xmlns:a="http://schemas.openxmlformats.org/drawingml/2006/main">
               <a:ext uri="{FF2B5EF4-FFF2-40B4-BE49-F238E27FC236}">
-                <a16:creationId xmlns:a16="http://schemas.microsoft.com/office/drawing/2014/main" id="{C8757CEB-6F9F-451A-ADD6-92038404D0D8}"/>
+                <a16:creationId xmlns:a16="http://schemas.microsoft.com/office/drawing/2014/main" id="{3A25995D-82D3-421B-9F9D-855097C871F4}"/>
               </a:ext>
             </a:extLst>
           </p:cNvPr>
@@ -17636,7 +17707,7 @@
                 <a:ea typeface="Arial"/>
                 <a:cs typeface="Arial"/>
               </a:rPr>
-              <a:t>A class set containing both outcomes does not identify one result</a:t>
+              <a:t>The sandbox edits invented model inputs. It does not predict a treatment effect</a:t>
             </a:r>
           </a:p>
         </p:txBody>
@@ -17646,7 +17717,7 @@
           <p:cNvPr id="6" name="">
             <a:extLst xmlns:a="http://schemas.openxmlformats.org/drawingml/2006/main">
               <a:ext uri="{FF2B5EF4-FFF2-40B4-BE49-F238E27FC236}">
-                <a16:creationId xmlns:a16="http://schemas.microsoft.com/office/drawing/2014/main" id="{C99E22DA-28FD-47FE-A9D8-C61B7274331D}"/>
+                <a16:creationId xmlns:a16="http://schemas.microsoft.com/office/drawing/2014/main" id="{4A8322C1-C531-4753-B7D2-E7FC58CBD519}"/>
               </a:ext>
             </a:extLst>
           </p:cNvPr>
@@ -17792,7 +17863,7 @@
                 <a:ea typeface="Arial"/>
                 <a:cs typeface="Arial"/>
               </a:rPr>
-              <a:t>Robustness, state-estimator and conformal coverage evidence remain separate work</a:t>
+              <a:t>Glucose threshold crossings are simulated counts, not an evaluated glucose forecast</a:t>
             </a:r>
           </a:p>
         </p:txBody>
@@ -17802,7 +17873,7 @@
           <p:cNvPr id="7" name="">
             <a:extLst xmlns:a="http://schemas.openxmlformats.org/drawingml/2006/main">
               <a:ext uri="{FF2B5EF4-FFF2-40B4-BE49-F238E27FC236}">
-                <a16:creationId xmlns:a16="http://schemas.microsoft.com/office/drawing/2014/main" id="{602A2E67-A92C-4AD9-8829-7C9305C658F8}"/>
+                <a16:creationId xmlns:a16="http://schemas.microsoft.com/office/drawing/2014/main" id="{4B585BEF-FAE3-4C84-BAED-8DB9BA568AE4}"/>
               </a:ext>
             </a:extLst>
           </p:cNvPr>
@@ -17956,7 +18027,7 @@
     </p:spTree>
     <p:extLst>
       <p:ext uri="{BB962C8B-B14F-4D97-AF65-F5344CB8AC3E}">
-        <p14:creationId xmlns:p14="http://schemas.microsoft.com/office/powerpoint/2010/main" val="295180852"/>
+        <p14:creationId xmlns:p14="http://schemas.microsoft.com/office/powerpoint/2010/main" val="1929898752"/>
       </p:ext>
     </p:extLst>
   </p:cSld>
@@ -17987,7 +18058,7 @@
           <p:cNvPr id="7" name="">
             <a:extLst xmlns:a="http://schemas.openxmlformats.org/drawingml/2006/main">
               <a:ext uri="{FF2B5EF4-FFF2-40B4-BE49-F238E27FC236}">
-                <a16:creationId xmlns:a16="http://schemas.microsoft.com/office/drawing/2014/main" id="{D20EB1BD-76D4-434D-9A51-4FFA62D1DCB3}"/>
+                <a16:creationId xmlns:a16="http://schemas.microsoft.com/office/drawing/2014/main" id="{DC3FA923-A129-4B86-ADE5-D266928EF187}"/>
               </a:ext>
             </a:extLst>
           </p:cNvPr>
@@ -18143,7 +18214,7 @@
           <p:cNvPr id="2" name="">
             <a:extLst xmlns:a="http://schemas.openxmlformats.org/drawingml/2006/main">
               <a:ext uri="{FF2B5EF4-FFF2-40B4-BE49-F238E27FC236}">
-                <a16:creationId xmlns:a16="http://schemas.microsoft.com/office/drawing/2014/main" id="{6EFC3AB6-8670-46D7-A49C-4265E78FCA53}"/>
+                <a16:creationId xmlns:a16="http://schemas.microsoft.com/office/drawing/2014/main" id="{410C5053-1F2F-40A8-99D7-B99FD17DF126}"/>
               </a:ext>
             </a:extLst>
           </p:cNvPr>
@@ -18299,7 +18370,7 @@
           <p:cNvPr id="3" name="">
             <a:extLst xmlns:a="http://schemas.openxmlformats.org/drawingml/2006/main">
               <a:ext uri="{FF2B5EF4-FFF2-40B4-BE49-F238E27FC236}">
-                <a16:creationId xmlns:a16="http://schemas.microsoft.com/office/drawing/2014/main" id="{773E7AC3-F4DB-4BEB-A371-7DD2347218A6}"/>
+                <a16:creationId xmlns:a16="http://schemas.microsoft.com/office/drawing/2014/main" id="{C22ACD51-E3E6-4D36-9EC2-EDD9C7A24E5B}"/>
               </a:ext>
             </a:extLst>
           </p:cNvPr>
@@ -18455,7 +18526,7 @@
           <p:cNvPr id="4" name="">
             <a:extLst xmlns:a="http://schemas.openxmlformats.org/drawingml/2006/main">
               <a:ext uri="{FF2B5EF4-FFF2-40B4-BE49-F238E27FC236}">
-                <a16:creationId xmlns:a16="http://schemas.microsoft.com/office/drawing/2014/main" id="{3B9E38F4-4DF0-45F3-BC12-C95526CE0F11}"/>
+                <a16:creationId xmlns:a16="http://schemas.microsoft.com/office/drawing/2014/main" id="{A8D09C9D-194B-4604-9A2C-BFC7FC9AB59E}"/>
               </a:ext>
             </a:extLst>
           </p:cNvPr>
@@ -18611,7 +18682,7 @@
           <p:cNvPr id="5" name="">
             <a:extLst xmlns:a="http://schemas.openxmlformats.org/drawingml/2006/main">
               <a:ext uri="{FF2B5EF4-FFF2-40B4-BE49-F238E27FC236}">
-                <a16:creationId xmlns:a16="http://schemas.microsoft.com/office/drawing/2014/main" id="{6634D97C-F63E-4019-9CA2-519F21F589BD}"/>
+                <a16:creationId xmlns:a16="http://schemas.microsoft.com/office/drawing/2014/main" id="{3A45532D-FDFC-434D-A444-B4DA224B7825}"/>
               </a:ext>
             </a:extLst>
           </p:cNvPr>
@@ -18767,7 +18838,7 @@
           <p:cNvPr id="6" name="">
             <a:extLst xmlns:a="http://schemas.openxmlformats.org/drawingml/2006/main">
               <a:ext uri="{FF2B5EF4-FFF2-40B4-BE49-F238E27FC236}">
-                <a16:creationId xmlns:a16="http://schemas.microsoft.com/office/drawing/2014/main" id="{B3E1C422-F5D6-4DAF-98B8-F190275AC37E}"/>
+                <a16:creationId xmlns:a16="http://schemas.microsoft.com/office/drawing/2014/main" id="{BAD7C07C-73E7-4E33-BC36-8AC4782A0E6D}"/>
               </a:ext>
             </a:extLst>
           </p:cNvPr>
@@ -18921,7 +18992,7 @@
     </p:spTree>
     <p:extLst>
       <p:ext uri="{BB962C8B-B14F-4D97-AF65-F5344CB8AC3E}">
-        <p14:creationId xmlns:p14="http://schemas.microsoft.com/office/powerpoint/2010/main" val="1644788255"/>
+        <p14:creationId xmlns:p14="http://schemas.microsoft.com/office/powerpoint/2010/main" val="1834193981"/>
       </p:ext>
     </p:extLst>
   </p:cSld>
@@ -18952,7 +19023,7 @@
           <p:cNvPr id="8" name="">
             <a:extLst xmlns:a="http://schemas.openxmlformats.org/drawingml/2006/main">
               <a:ext uri="{FF2B5EF4-FFF2-40B4-BE49-F238E27FC236}">
-                <a16:creationId xmlns:a16="http://schemas.microsoft.com/office/drawing/2014/main" id="{7904107C-3864-47D8-B3AE-AF8A7C489408}"/>
+                <a16:creationId xmlns:a16="http://schemas.microsoft.com/office/drawing/2014/main" id="{376E1E29-1D95-4240-80E4-091E3BF3A273}"/>
               </a:ext>
             </a:extLst>
           </p:cNvPr>
@@ -19098,7 +19169,7 @@
                 <a:ea typeface="Arial"/>
                 <a:cs typeface="Arial"/>
               </a:rPr>
-              <a:t>Validity limits</a:t>
+              <a:t>Where it fails</a:t>
             </a:r>
           </a:p>
         </p:txBody>
@@ -19108,7 +19179,7 @@
           <p:cNvPr id="2" name="">
             <a:extLst xmlns:a="http://schemas.openxmlformats.org/drawingml/2006/main">
               <a:ext uri="{FF2B5EF4-FFF2-40B4-BE49-F238E27FC236}">
-                <a16:creationId xmlns:a16="http://schemas.microsoft.com/office/drawing/2014/main" id="{C5383BB5-9E23-4EF1-AD65-BC54546C75D4}"/>
+                <a16:creationId xmlns:a16="http://schemas.microsoft.com/office/drawing/2014/main" id="{0D564456-5546-4AF1-9BF5-E81F5748C2D8}"/>
               </a:ext>
             </a:extLst>
           </p:cNvPr>
@@ -19254,7 +19325,7 @@
                 <a:ea typeface="Arial"/>
                 <a:cs typeface="Arial"/>
               </a:rPr>
-              <a:t>Synthetic recovery is not prospective evidence in women</a:t>
+              <a:t>All declared Kushi scenarios remain visible</a:t>
             </a:r>
           </a:p>
         </p:txBody>
@@ -19264,7 +19335,7 @@
           <p:cNvPr id="3" name="">
             <a:extLst xmlns:a="http://schemas.openxmlformats.org/drawingml/2006/main">
               <a:ext uri="{FF2B5EF4-FFF2-40B4-BE49-F238E27FC236}">
-                <a16:creationId xmlns:a16="http://schemas.microsoft.com/office/drawing/2014/main" id="{A31667CE-4B2B-4100-9630-145018B59EA5}"/>
+                <a16:creationId xmlns:a16="http://schemas.microsoft.com/office/drawing/2014/main" id="{EB9B6677-7A3A-4A0E-BDDB-4AFFEA4AAAB0}"/>
               </a:ext>
             </a:extLst>
           </p:cNvPr>
@@ -19410,7 +19481,7 @@
                 <a:ea typeface="Arial"/>
                 <a:cs typeface="Arial"/>
               </a:rPr>
-              <a:t>Labels and sensor changes share generator assumptions</a:t>
+              <a:t>Display the fixed scenario seeds with misses, false alarms or withholding unchanged</a:t>
             </a:r>
           </a:p>
         </p:txBody>
@@ -19420,7 +19491,7 @@
           <p:cNvPr id="4" name="">
             <a:extLst xmlns:a="http://schemas.openxmlformats.org/drawingml/2006/main">
               <a:ext uri="{FF2B5EF4-FFF2-40B4-BE49-F238E27FC236}">
-                <a16:creationId xmlns:a16="http://schemas.microsoft.com/office/drawing/2014/main" id="{073B1E26-69A2-4133-8260-C077409CB725}"/>
+                <a16:creationId xmlns:a16="http://schemas.microsoft.com/office/drawing/2014/main" id="{F7108AE7-D375-4CCF-93FD-3532324AFA3F}"/>
               </a:ext>
             </a:extLst>
           </p:cNvPr>
@@ -19566,7 +19637,7 @@
                 <a:ea typeface="Arial"/>
                 <a:cs typeface="Arial"/>
               </a:rPr>
-              <a:t>EHR-lite includes a label-generating internal latent</a:t>
+              <a:t>Different snapshots can fall back to calendar even when sensors are available</a:t>
             </a:r>
           </a:p>
         </p:txBody>
@@ -19576,7 +19647,7 @@
           <p:cNvPr id="5" name="">
             <a:extLst xmlns:a="http://schemas.openxmlformats.org/drawingml/2006/main">
               <a:ext uri="{FF2B5EF4-FFF2-40B4-BE49-F238E27FC236}">
-                <a16:creationId xmlns:a16="http://schemas.microsoft.com/office/drawing/2014/main" id="{CD544DC9-AB48-4AAE-A8C5-98F17A25DF91}"/>
+                <a16:creationId xmlns:a16="http://schemas.microsoft.com/office/drawing/2014/main" id="{0AD7E238-2C29-4309-B4D1-1B74AEBE3179}"/>
               </a:ext>
             </a:extLst>
           </p:cNvPr>
@@ -19722,7 +19793,7 @@
                 <a:ea typeface="Arial"/>
                 <a:cs typeface="Arial"/>
               </a:rPr>
-              <a:t>Old test seeds were reused during development</a:t>
+              <a:t>A class set containing both outcomes does not identify one result</a:t>
             </a:r>
           </a:p>
         </p:txBody>
@@ -19732,7 +19803,7 @@
           <p:cNvPr id="6" name="">
             <a:extLst xmlns:a="http://schemas.openxmlformats.org/drawingml/2006/main">
               <a:ext uri="{FF2B5EF4-FFF2-40B4-BE49-F238E27FC236}">
-                <a16:creationId xmlns:a16="http://schemas.microsoft.com/office/drawing/2014/main" id="{298D7161-D4E3-4108-BC66-775A81698C24}"/>
+                <a16:creationId xmlns:a16="http://schemas.microsoft.com/office/drawing/2014/main" id="{02C1F15F-2FD6-4CEE-A965-FBCBC68154AB}"/>
               </a:ext>
             </a:extLst>
           </p:cNvPr>
@@ -19878,7 +19949,7 @@
                 <a:ea typeface="Arial"/>
                 <a:cs typeface="Arial"/>
               </a:rPr>
-              <a:t>The frozen synthetic sequential alert policy is evaluated; robustness and clinical safety effectiveness remain separate work</a:t>
+              <a:t>Robustness, state-estimator and conformal coverage evidence remain separate work</a:t>
             </a:r>
           </a:p>
         </p:txBody>
@@ -19888,7 +19959,7 @@
           <p:cNvPr id="7" name="">
             <a:extLst xmlns:a="http://schemas.openxmlformats.org/drawingml/2006/main">
               <a:ext uri="{FF2B5EF4-FFF2-40B4-BE49-F238E27FC236}">
-                <a16:creationId xmlns:a16="http://schemas.microsoft.com/office/drawing/2014/main" id="{C84B435C-86A2-4EBA-9C45-75B25A500C6D}"/>
+                <a16:creationId xmlns:a16="http://schemas.microsoft.com/office/drawing/2014/main" id="{AD04461B-81D0-45F9-9586-7715715958FA}"/>
               </a:ext>
             </a:extLst>
           </p:cNvPr>
@@ -20042,7 +20113,7 @@
     </p:spTree>
     <p:extLst>
       <p:ext uri="{BB962C8B-B14F-4D97-AF65-F5344CB8AC3E}">
-        <p14:creationId xmlns:p14="http://schemas.microsoft.com/office/powerpoint/2010/main" val="1558307281"/>
+        <p14:creationId xmlns:p14="http://schemas.microsoft.com/office/powerpoint/2010/main" val="1460774960"/>
       </p:ext>
     </p:extLst>
   </p:cSld>
@@ -20073,7 +20144,7 @@
           <p:cNvPr id="8" name="">
             <a:extLst xmlns:a="http://schemas.openxmlformats.org/drawingml/2006/main">
               <a:ext uri="{FF2B5EF4-FFF2-40B4-BE49-F238E27FC236}">
-                <a16:creationId xmlns:a16="http://schemas.microsoft.com/office/drawing/2014/main" id="{4EFB85F9-864C-46C1-9356-E76234A93D9B}"/>
+                <a16:creationId xmlns:a16="http://schemas.microsoft.com/office/drawing/2014/main" id="{CE3536E1-3090-4B90-87C9-C749DB08A0D5}"/>
               </a:ext>
             </a:extLst>
           </p:cNvPr>
@@ -20219,7 +20290,7 @@
                 <a:ea typeface="Arial"/>
                 <a:cs typeface="Arial"/>
               </a:rPr>
-              <a:t>Reproducible demonstration</a:t>
+              <a:t>Validity limits</a:t>
             </a:r>
           </a:p>
         </p:txBody>
@@ -20229,7 +20300,7 @@
           <p:cNvPr id="2" name="">
             <a:extLst xmlns:a="http://schemas.openxmlformats.org/drawingml/2006/main">
               <a:ext uri="{FF2B5EF4-FFF2-40B4-BE49-F238E27FC236}">
-                <a16:creationId xmlns:a16="http://schemas.microsoft.com/office/drawing/2014/main" id="{86162C8B-08BF-4DCF-B03B-612ACF4357FD}"/>
+                <a16:creationId xmlns:a16="http://schemas.microsoft.com/office/drawing/2014/main" id="{0DC5CEAE-46CA-4AEC-B70C-57C620C9A068}"/>
               </a:ext>
             </a:extLst>
           </p:cNvPr>
@@ -20375,7 +20446,7 @@
                 <a:ea typeface="Arial"/>
                 <a:cs typeface="Arial"/>
               </a:rPr>
-              <a:t>Public source, inspectable artifacts and explicit next work</a:t>
+              <a:t>Synthetic recovery is not prospective evidence in women</a:t>
             </a:r>
           </a:p>
         </p:txBody>
@@ -20385,7 +20456,7 @@
           <p:cNvPr id="3" name="">
             <a:extLst xmlns:a="http://schemas.openxmlformats.org/drawingml/2006/main">
               <a:ext uri="{FF2B5EF4-FFF2-40B4-BE49-F238E27FC236}">
-                <a16:creationId xmlns:a16="http://schemas.microsoft.com/office/drawing/2014/main" id="{B63A1DDD-F9A8-4A0C-81E1-64F709AD0154}"/>
+                <a16:creationId xmlns:a16="http://schemas.microsoft.com/office/drawing/2014/main" id="{7BA6F038-1092-4294-9C35-6503EDC415E8}"/>
               </a:ext>
             </a:extLst>
           </p:cNvPr>
@@ -20531,7 +20602,7 @@
                 <a:ea typeface="Arial"/>
                 <a:cs typeface="Arial"/>
               </a:rPr>
-              <a:t>README, model cards and the audit link every claim to evidence</a:t>
+              <a:t>Labels and sensor changes share generator assumptions</a:t>
             </a:r>
           </a:p>
         </p:txBody>
@@ -20541,7 +20612,7 @@
           <p:cNvPr id="4" name="">
             <a:extLst xmlns:a="http://schemas.openxmlformats.org/drawingml/2006/main">
               <a:ext uri="{FF2B5EF4-FFF2-40B4-BE49-F238E27FC236}">
-                <a16:creationId xmlns:a16="http://schemas.microsoft.com/office/drawing/2014/main" id="{EDD01EE2-0D86-4F82-BCC3-9F20BEE763CB}"/>
+                <a16:creationId xmlns:a16="http://schemas.microsoft.com/office/drawing/2014/main" id="{8A95DB0B-2F24-4985-B7DA-BF5F0552A45F}"/>
               </a:ext>
             </a:extLst>
           </p:cNvPr>
@@ -20687,7 +20758,7 @@
                 <a:ea typeface="Arial"/>
                 <a:cs typeface="Arial"/>
               </a:rPr>
-              <a:t>Persisted inference reproduces the benchmark and exposes exact feature calculations</a:t>
+              <a:t>EHR-lite includes a label-generating internal latent</a:t>
             </a:r>
           </a:p>
         </p:txBody>
@@ -20697,7 +20768,7 @@
           <p:cNvPr id="5" name="">
             <a:extLst xmlns:a="http://schemas.openxmlformats.org/drawingml/2006/main">
               <a:ext uri="{FF2B5EF4-FFF2-40B4-BE49-F238E27FC236}">
-                <a16:creationId xmlns:a16="http://schemas.microsoft.com/office/drawing/2014/main" id="{3D6332EB-7736-4E1E-96B9-6F0CAAFE45DC}"/>
+                <a16:creationId xmlns:a16="http://schemas.microsoft.com/office/drawing/2014/main" id="{C121288A-0D19-4BD4-A60D-75DAE659E513}"/>
               </a:ext>
             </a:extLst>
           </p:cNvPr>
@@ -20843,7 +20914,7 @@
                 <a:ea typeface="Arial"/>
                 <a:cs typeface="Arial"/>
               </a:rPr>
-              <a:t>The required video remains a human recording and upload task</a:t>
+              <a:t>Old test seeds were reused during development</a:t>
             </a:r>
           </a:p>
         </p:txBody>
@@ -20853,7 +20924,7 @@
           <p:cNvPr id="6" name="">
             <a:extLst xmlns:a="http://schemas.openxmlformats.org/drawingml/2006/main">
               <a:ext uri="{FF2B5EF4-FFF2-40B4-BE49-F238E27FC236}">
-                <a16:creationId xmlns:a16="http://schemas.microsoft.com/office/drawing/2014/main" id="{28AFC2CC-828D-4A86-94B8-47BB07FE5F79}"/>
+                <a16:creationId xmlns:a16="http://schemas.microsoft.com/office/drawing/2014/main" id="{701891AC-2AD3-4201-A6CA-82E2BFAA7E53}"/>
               </a:ext>
             </a:extLst>
           </p:cNvPr>
@@ -20999,7 +21070,7 @@
                 <a:ea typeface="Arial"/>
                 <a:cs typeface="Arial"/>
               </a:rPr>
-              <a:t>Clinical validation, clinician feedback and sim-to-real evaluation remain outstanding</a:t>
+              <a:t>The frozen synthetic sequential alert policy is evaluated; robustness and clinical safety effectiveness remain separate work</a:t>
             </a:r>
           </a:p>
         </p:txBody>
@@ -21009,7 +21080,7 @@
           <p:cNvPr id="7" name="">
             <a:extLst xmlns:a="http://schemas.openxmlformats.org/drawingml/2006/main">
               <a:ext uri="{FF2B5EF4-FFF2-40B4-BE49-F238E27FC236}">
-                <a16:creationId xmlns:a16="http://schemas.microsoft.com/office/drawing/2014/main" id="{C6CEA286-A2BA-4A30-BFD8-F17865CEF97E}"/>
+                <a16:creationId xmlns:a16="http://schemas.microsoft.com/office/drawing/2014/main" id="{CD28D1FA-427B-48ED-B56B-CC11BD2826AF}"/>
               </a:ext>
             </a:extLst>
           </p:cNvPr>
@@ -21163,7 +21234,1128 @@
     </p:spTree>
     <p:extLst>
       <p:ext uri="{BB962C8B-B14F-4D97-AF65-F5344CB8AC3E}">
-        <p14:creationId xmlns:p14="http://schemas.microsoft.com/office/powerpoint/2010/main" val="1839727424"/>
+        <p14:creationId xmlns:p14="http://schemas.microsoft.com/office/powerpoint/2010/main" val="234902100"/>
+      </p:ext>
+    </p:extLst>
+  </p:cSld>
+</p:sld>
+</file>
+
+<file path=ppt/slides/slide22.xml><?xml version="1.0" encoding="utf-8"?>
+<p:sld xmlns:p="http://schemas.openxmlformats.org/presentationml/2006/main">
+  <p:cSld>
+    <p:bg>
+      <p:bgPr>
+        <a:solidFill xmlns:a="http://schemas.openxmlformats.org/drawingml/2006/main">
+          <a:srgbClr val="FAFAF8"/>
+        </a:solidFill>
+      </p:bgPr>
+    </p:bg>
+    <p:spTree>
+      <p:nvGrpSpPr>
+        <p:cNvPr id="1" name=""/>
+        <p:cNvGrpSpPr/>
+        <p:nvPr/>
+      </p:nvGrpSpPr>
+      <p:grpSpPr>
+        <a:xfrm xmlns:a="http://schemas.openxmlformats.org/drawingml/2006/main"/>
+      </p:grpSpPr>
+      <p:sp>
+        <p:nvSpPr>
+          <p:cNvPr id="8" name="">
+            <a:extLst xmlns:a="http://schemas.openxmlformats.org/drawingml/2006/main">
+              <a:ext uri="{FF2B5EF4-FFF2-40B4-BE49-F238E27FC236}">
+                <a16:creationId xmlns:a16="http://schemas.microsoft.com/office/drawing/2014/main" id="{0FF5A707-1E3F-40EE-B767-959D9668540E}"/>
+              </a:ext>
+            </a:extLst>
+          </p:cNvPr>
+          <p:cNvSpPr>
+            <a:spLocks xmlns:a="http://schemas.openxmlformats.org/drawingml/2006/main" noGrp="1"/>
+          </p:cNvSpPr>
+          <p:nvPr/>
+        </p:nvSpPr>
+        <p:spPr>
+          <a:xfrm xmlns:a="http://schemas.openxmlformats.org/drawingml/2006/main">
+            <a:off x="609600" y="457200"/>
+            <a:ext cx="10972800" cy="762000"/>
+          </a:xfrm>
+          <a:prstGeom xmlns:a="http://schemas.openxmlformats.org/drawingml/2006/main" prst="rect">
+            <a:avLst/>
+          </a:prstGeom>
+          <a:noFill xmlns:a="http://schemas.openxmlformats.org/drawingml/2006/main"/>
+          <a:ln xmlns:a="http://schemas.openxmlformats.org/drawingml/2006/main" w="0">
+            <a:noFill/>
+          </a:ln>
+        </p:spPr>
+        <p:txBody>
+          <a:bodyPr xmlns:a="http://schemas.openxmlformats.org/drawingml/2006/main"/>
+          <a:lstStyle xmlns:a="http://schemas.openxmlformats.org/drawingml/2006/main">
+            <a:defPPr>
+              <a:defRPr sz="3300" b="0">
+                <a:solidFill>
+                  <a:srgbClr val="17242B"/>
+                </a:solidFill>
+                <a:latin typeface="Arial"/>
+                <a:ea typeface="Arial"/>
+                <a:cs typeface="Arial"/>
+              </a:defRPr>
+            </a:defPPr>
+            <a:lvl1pPr>
+              <a:defRPr sz="3300" b="0">
+                <a:solidFill>
+                  <a:srgbClr val="17242B"/>
+                </a:solidFill>
+                <a:latin typeface="Arial"/>
+                <a:ea typeface="Arial"/>
+                <a:cs typeface="Arial"/>
+              </a:defRPr>
+            </a:lvl1pPr>
+            <a:lvl2pPr>
+              <a:defRPr sz="3300" b="0">
+                <a:solidFill>
+                  <a:srgbClr val="17242B"/>
+                </a:solidFill>
+                <a:latin typeface="Arial"/>
+                <a:ea typeface="Arial"/>
+                <a:cs typeface="Arial"/>
+              </a:defRPr>
+            </a:lvl2pPr>
+            <a:lvl3pPr>
+              <a:defRPr sz="3300" b="0">
+                <a:solidFill>
+                  <a:srgbClr val="17242B"/>
+                </a:solidFill>
+                <a:latin typeface="Arial"/>
+                <a:ea typeface="Arial"/>
+                <a:cs typeface="Arial"/>
+              </a:defRPr>
+            </a:lvl3pPr>
+            <a:lvl4pPr>
+              <a:defRPr sz="3300" b="0">
+                <a:solidFill>
+                  <a:srgbClr val="17242B"/>
+                </a:solidFill>
+                <a:latin typeface="Arial"/>
+                <a:ea typeface="Arial"/>
+                <a:cs typeface="Arial"/>
+              </a:defRPr>
+            </a:lvl4pPr>
+            <a:lvl5pPr>
+              <a:defRPr sz="3300" b="0">
+                <a:solidFill>
+                  <a:srgbClr val="17242B"/>
+                </a:solidFill>
+                <a:latin typeface="Arial"/>
+                <a:ea typeface="Arial"/>
+                <a:cs typeface="Arial"/>
+              </a:defRPr>
+            </a:lvl5pPr>
+            <a:lvl6pPr>
+              <a:defRPr sz="3300" b="0">
+                <a:solidFill>
+                  <a:srgbClr val="17242B"/>
+                </a:solidFill>
+                <a:latin typeface="Arial"/>
+                <a:ea typeface="Arial"/>
+                <a:cs typeface="Arial"/>
+              </a:defRPr>
+            </a:lvl6pPr>
+            <a:lvl7pPr>
+              <a:defRPr sz="3300" b="0">
+                <a:solidFill>
+                  <a:srgbClr val="17242B"/>
+                </a:solidFill>
+                <a:latin typeface="Arial"/>
+                <a:ea typeface="Arial"/>
+                <a:cs typeface="Arial"/>
+              </a:defRPr>
+            </a:lvl7pPr>
+            <a:lvl8pPr>
+              <a:defRPr sz="3300" b="0">
+                <a:solidFill>
+                  <a:srgbClr val="17242B"/>
+                </a:solidFill>
+                <a:latin typeface="Arial"/>
+                <a:ea typeface="Arial"/>
+                <a:cs typeface="Arial"/>
+              </a:defRPr>
+            </a:lvl8pPr>
+            <a:lvl9pPr>
+              <a:defRPr sz="3300" b="0">
+                <a:solidFill>
+                  <a:srgbClr val="17242B"/>
+                </a:solidFill>
+                <a:latin typeface="Arial"/>
+                <a:ea typeface="Arial"/>
+                <a:cs typeface="Arial"/>
+              </a:defRPr>
+            </a:lvl9pPr>
+          </a:lstStyle>
+          <a:p xmlns:a="http://schemas.openxmlformats.org/drawingml/2006/main">
+            <a:pPr>
+              <a:defRPr sz="3300" b="0">
+                <a:solidFill>
+                  <a:srgbClr val="17242B"/>
+                </a:solidFill>
+                <a:latin typeface="Arial"/>
+                <a:ea typeface="Arial"/>
+                <a:cs typeface="Arial"/>
+              </a:defRPr>
+            </a:pPr>
+            <a:r>
+              <a:rPr sz="3300" b="0">
+                <a:solidFill>
+                  <a:srgbClr val="17242B"/>
+                </a:solidFill>
+                <a:latin typeface="Arial"/>
+                <a:ea typeface="Arial"/>
+                <a:cs typeface="Arial"/>
+              </a:rPr>
+              <a:t>Reproducible demonstration</a:t>
+            </a:r>
+          </a:p>
+        </p:txBody>
+      </p:sp>
+      <p:sp>
+        <p:nvSpPr>
+          <p:cNvPr id="2" name="">
+            <a:extLst xmlns:a="http://schemas.openxmlformats.org/drawingml/2006/main">
+              <a:ext uri="{FF2B5EF4-FFF2-40B4-BE49-F238E27FC236}">
+                <a16:creationId xmlns:a16="http://schemas.microsoft.com/office/drawing/2014/main" id="{6F2DB348-E9A7-406D-8DA1-E9675C93491F}"/>
+              </a:ext>
+            </a:extLst>
+          </p:cNvPr>
+          <p:cNvSpPr>
+            <a:spLocks xmlns:a="http://schemas.openxmlformats.org/drawingml/2006/main" noGrp="1"/>
+          </p:cNvSpPr>
+          <p:nvPr/>
+        </p:nvSpPr>
+        <p:spPr>
+          <a:xfrm xmlns:a="http://schemas.openxmlformats.org/drawingml/2006/main">
+            <a:off x="609600" y="1257300"/>
+            <a:ext cx="10972800" cy="619125"/>
+          </a:xfrm>
+          <a:prstGeom xmlns:a="http://schemas.openxmlformats.org/drawingml/2006/main" prst="rect">
+            <a:avLst/>
+          </a:prstGeom>
+          <a:noFill xmlns:a="http://schemas.openxmlformats.org/drawingml/2006/main"/>
+          <a:ln xmlns:a="http://schemas.openxmlformats.org/drawingml/2006/main" w="0">
+            <a:noFill/>
+          </a:ln>
+        </p:spPr>
+        <p:txBody>
+          <a:bodyPr xmlns:a="http://schemas.openxmlformats.org/drawingml/2006/main"/>
+          <a:lstStyle xmlns:a="http://schemas.openxmlformats.org/drawingml/2006/main">
+            <a:defPPr>
+              <a:defRPr sz="1800" b="0">
+                <a:solidFill>
+                  <a:srgbClr val="65757B"/>
+                </a:solidFill>
+                <a:latin typeface="Arial"/>
+                <a:ea typeface="Arial"/>
+                <a:cs typeface="Arial"/>
+              </a:defRPr>
+            </a:defPPr>
+            <a:lvl1pPr>
+              <a:defRPr sz="1800" b="0">
+                <a:solidFill>
+                  <a:srgbClr val="65757B"/>
+                </a:solidFill>
+                <a:latin typeface="Arial"/>
+                <a:ea typeface="Arial"/>
+                <a:cs typeface="Arial"/>
+              </a:defRPr>
+            </a:lvl1pPr>
+            <a:lvl2pPr>
+              <a:defRPr sz="1800" b="0">
+                <a:solidFill>
+                  <a:srgbClr val="65757B"/>
+                </a:solidFill>
+                <a:latin typeface="Arial"/>
+                <a:ea typeface="Arial"/>
+                <a:cs typeface="Arial"/>
+              </a:defRPr>
+            </a:lvl2pPr>
+            <a:lvl3pPr>
+              <a:defRPr sz="1800" b="0">
+                <a:solidFill>
+                  <a:srgbClr val="65757B"/>
+                </a:solidFill>
+                <a:latin typeface="Arial"/>
+                <a:ea typeface="Arial"/>
+                <a:cs typeface="Arial"/>
+              </a:defRPr>
+            </a:lvl3pPr>
+            <a:lvl4pPr>
+              <a:defRPr sz="1800" b="0">
+                <a:solidFill>
+                  <a:srgbClr val="65757B"/>
+                </a:solidFill>
+                <a:latin typeface="Arial"/>
+                <a:ea typeface="Arial"/>
+                <a:cs typeface="Arial"/>
+              </a:defRPr>
+            </a:lvl4pPr>
+            <a:lvl5pPr>
+              <a:defRPr sz="1800" b="0">
+                <a:solidFill>
+                  <a:srgbClr val="65757B"/>
+                </a:solidFill>
+                <a:latin typeface="Arial"/>
+                <a:ea typeface="Arial"/>
+                <a:cs typeface="Arial"/>
+              </a:defRPr>
+            </a:lvl5pPr>
+            <a:lvl6pPr>
+              <a:defRPr sz="1800" b="0">
+                <a:solidFill>
+                  <a:srgbClr val="65757B"/>
+                </a:solidFill>
+                <a:latin typeface="Arial"/>
+                <a:ea typeface="Arial"/>
+                <a:cs typeface="Arial"/>
+              </a:defRPr>
+            </a:lvl6pPr>
+            <a:lvl7pPr>
+              <a:defRPr sz="1800" b="0">
+                <a:solidFill>
+                  <a:srgbClr val="65757B"/>
+                </a:solidFill>
+                <a:latin typeface="Arial"/>
+                <a:ea typeface="Arial"/>
+                <a:cs typeface="Arial"/>
+              </a:defRPr>
+            </a:lvl7pPr>
+            <a:lvl8pPr>
+              <a:defRPr sz="1800" b="0">
+                <a:solidFill>
+                  <a:srgbClr val="65757B"/>
+                </a:solidFill>
+                <a:latin typeface="Arial"/>
+                <a:ea typeface="Arial"/>
+                <a:cs typeface="Arial"/>
+              </a:defRPr>
+            </a:lvl8pPr>
+            <a:lvl9pPr>
+              <a:defRPr sz="1800" b="0">
+                <a:solidFill>
+                  <a:srgbClr val="65757B"/>
+                </a:solidFill>
+                <a:latin typeface="Arial"/>
+                <a:ea typeface="Arial"/>
+                <a:cs typeface="Arial"/>
+              </a:defRPr>
+            </a:lvl9pPr>
+          </a:lstStyle>
+          <a:p xmlns:a="http://schemas.openxmlformats.org/drawingml/2006/main">
+            <a:pPr>
+              <a:defRPr sz="1800" b="0">
+                <a:solidFill>
+                  <a:srgbClr val="65757B"/>
+                </a:solidFill>
+                <a:latin typeface="Arial"/>
+                <a:ea typeface="Arial"/>
+                <a:cs typeface="Arial"/>
+              </a:defRPr>
+            </a:pPr>
+            <a:r>
+              <a:rPr sz="1800" b="0">
+                <a:solidFill>
+                  <a:srgbClr val="65757B"/>
+                </a:solidFill>
+                <a:latin typeface="Arial"/>
+                <a:ea typeface="Arial"/>
+                <a:cs typeface="Arial"/>
+              </a:rPr>
+              <a:t>Public source, inspectable artifacts and explicit next work</a:t>
+            </a:r>
+          </a:p>
+        </p:txBody>
+      </p:sp>
+      <p:sp>
+        <p:nvSpPr>
+          <p:cNvPr id="3" name="">
+            <a:extLst xmlns:a="http://schemas.openxmlformats.org/drawingml/2006/main">
+              <a:ext uri="{FF2B5EF4-FFF2-40B4-BE49-F238E27FC236}">
+                <a16:creationId xmlns:a16="http://schemas.microsoft.com/office/drawing/2014/main" id="{DB5BED6B-DB1D-450D-BC41-0C83E99E0242}"/>
+              </a:ext>
+            </a:extLst>
+          </p:cNvPr>
+          <p:cNvSpPr>
+            <a:spLocks xmlns:a="http://schemas.openxmlformats.org/drawingml/2006/main" noGrp="1"/>
+          </p:cNvSpPr>
+          <p:nvPr/>
+        </p:nvSpPr>
+        <p:spPr>
+          <a:xfrm xmlns:a="http://schemas.openxmlformats.org/drawingml/2006/main">
+            <a:off x="704850" y="2190750"/>
+            <a:ext cx="10668000" cy="838200"/>
+          </a:xfrm>
+          <a:prstGeom xmlns:a="http://schemas.openxmlformats.org/drawingml/2006/main" prst="rect">
+            <a:avLst/>
+          </a:prstGeom>
+          <a:noFill xmlns:a="http://schemas.openxmlformats.org/drawingml/2006/main"/>
+          <a:ln xmlns:a="http://schemas.openxmlformats.org/drawingml/2006/main" w="0">
+            <a:noFill/>
+          </a:ln>
+        </p:spPr>
+        <p:txBody>
+          <a:bodyPr xmlns:a="http://schemas.openxmlformats.org/drawingml/2006/main"/>
+          <a:lstStyle xmlns:a="http://schemas.openxmlformats.org/drawingml/2006/main">
+            <a:defPPr>
+              <a:defRPr sz="2250" b="0">
+                <a:solidFill>
+                  <a:srgbClr val="0E766E"/>
+                </a:solidFill>
+                <a:latin typeface="Arial"/>
+                <a:ea typeface="Arial"/>
+                <a:cs typeface="Arial"/>
+              </a:defRPr>
+            </a:defPPr>
+            <a:lvl1pPr>
+              <a:defRPr sz="2250" b="0">
+                <a:solidFill>
+                  <a:srgbClr val="0E766E"/>
+                </a:solidFill>
+                <a:latin typeface="Arial"/>
+                <a:ea typeface="Arial"/>
+                <a:cs typeface="Arial"/>
+              </a:defRPr>
+            </a:lvl1pPr>
+            <a:lvl2pPr>
+              <a:defRPr sz="2250" b="0">
+                <a:solidFill>
+                  <a:srgbClr val="0E766E"/>
+                </a:solidFill>
+                <a:latin typeface="Arial"/>
+                <a:ea typeface="Arial"/>
+                <a:cs typeface="Arial"/>
+              </a:defRPr>
+            </a:lvl2pPr>
+            <a:lvl3pPr>
+              <a:defRPr sz="2250" b="0">
+                <a:solidFill>
+                  <a:srgbClr val="0E766E"/>
+                </a:solidFill>
+                <a:latin typeface="Arial"/>
+                <a:ea typeface="Arial"/>
+                <a:cs typeface="Arial"/>
+              </a:defRPr>
+            </a:lvl3pPr>
+            <a:lvl4pPr>
+              <a:defRPr sz="2250" b="0">
+                <a:solidFill>
+                  <a:srgbClr val="0E766E"/>
+                </a:solidFill>
+                <a:latin typeface="Arial"/>
+                <a:ea typeface="Arial"/>
+                <a:cs typeface="Arial"/>
+              </a:defRPr>
+            </a:lvl4pPr>
+            <a:lvl5pPr>
+              <a:defRPr sz="2250" b="0">
+                <a:solidFill>
+                  <a:srgbClr val="0E766E"/>
+                </a:solidFill>
+                <a:latin typeface="Arial"/>
+                <a:ea typeface="Arial"/>
+                <a:cs typeface="Arial"/>
+              </a:defRPr>
+            </a:lvl5pPr>
+            <a:lvl6pPr>
+              <a:defRPr sz="2250" b="0">
+                <a:solidFill>
+                  <a:srgbClr val="0E766E"/>
+                </a:solidFill>
+                <a:latin typeface="Arial"/>
+                <a:ea typeface="Arial"/>
+                <a:cs typeface="Arial"/>
+              </a:defRPr>
+            </a:lvl6pPr>
+            <a:lvl7pPr>
+              <a:defRPr sz="2250" b="0">
+                <a:solidFill>
+                  <a:srgbClr val="0E766E"/>
+                </a:solidFill>
+                <a:latin typeface="Arial"/>
+                <a:ea typeface="Arial"/>
+                <a:cs typeface="Arial"/>
+              </a:defRPr>
+            </a:lvl7pPr>
+            <a:lvl8pPr>
+              <a:defRPr sz="2250" b="0">
+                <a:solidFill>
+                  <a:srgbClr val="0E766E"/>
+                </a:solidFill>
+                <a:latin typeface="Arial"/>
+                <a:ea typeface="Arial"/>
+                <a:cs typeface="Arial"/>
+              </a:defRPr>
+            </a:lvl8pPr>
+            <a:lvl9pPr>
+              <a:defRPr sz="2250" b="0">
+                <a:solidFill>
+                  <a:srgbClr val="0E766E"/>
+                </a:solidFill>
+                <a:latin typeface="Arial"/>
+                <a:ea typeface="Arial"/>
+                <a:cs typeface="Arial"/>
+              </a:defRPr>
+            </a:lvl9pPr>
+          </a:lstStyle>
+          <a:p xmlns:a="http://schemas.openxmlformats.org/drawingml/2006/main">
+            <a:pPr>
+              <a:defRPr sz="2250" b="0">
+                <a:solidFill>
+                  <a:srgbClr val="0E766E"/>
+                </a:solidFill>
+                <a:latin typeface="Arial"/>
+                <a:ea typeface="Arial"/>
+                <a:cs typeface="Arial"/>
+              </a:defRPr>
+            </a:pPr>
+            <a:r>
+              <a:rPr sz="2250" b="0">
+                <a:solidFill>
+                  <a:srgbClr val="0E766E"/>
+                </a:solidFill>
+                <a:latin typeface="Arial"/>
+                <a:ea typeface="Arial"/>
+                <a:cs typeface="Arial"/>
+              </a:rPr>
+              <a:t>README, model cards and the audit link every claim to evidence</a:t>
+            </a:r>
+          </a:p>
+        </p:txBody>
+      </p:sp>
+      <p:sp>
+        <p:nvSpPr>
+          <p:cNvPr id="4" name="">
+            <a:extLst xmlns:a="http://schemas.openxmlformats.org/drawingml/2006/main">
+              <a:ext uri="{FF2B5EF4-FFF2-40B4-BE49-F238E27FC236}">
+                <a16:creationId xmlns:a16="http://schemas.microsoft.com/office/drawing/2014/main" id="{80BF836F-DD14-409E-9C2C-AAF01E939FE1}"/>
+              </a:ext>
+            </a:extLst>
+          </p:cNvPr>
+          <p:cNvSpPr>
+            <a:spLocks xmlns:a="http://schemas.openxmlformats.org/drawingml/2006/main" noGrp="1"/>
+          </p:cNvSpPr>
+          <p:nvPr/>
+        </p:nvSpPr>
+        <p:spPr>
+          <a:xfrm xmlns:a="http://schemas.openxmlformats.org/drawingml/2006/main">
+            <a:off x="704850" y="3119438"/>
+            <a:ext cx="10668000" cy="838200"/>
+          </a:xfrm>
+          <a:prstGeom xmlns:a="http://schemas.openxmlformats.org/drawingml/2006/main" prst="rect">
+            <a:avLst/>
+          </a:prstGeom>
+          <a:noFill xmlns:a="http://schemas.openxmlformats.org/drawingml/2006/main"/>
+          <a:ln xmlns:a="http://schemas.openxmlformats.org/drawingml/2006/main" w="0">
+            <a:noFill/>
+          </a:ln>
+        </p:spPr>
+        <p:txBody>
+          <a:bodyPr xmlns:a="http://schemas.openxmlformats.org/drawingml/2006/main"/>
+          <a:lstStyle xmlns:a="http://schemas.openxmlformats.org/drawingml/2006/main">
+            <a:defPPr>
+              <a:defRPr sz="2250" b="0">
+                <a:solidFill>
+                  <a:srgbClr val="17242B"/>
+                </a:solidFill>
+                <a:latin typeface="Arial"/>
+                <a:ea typeface="Arial"/>
+                <a:cs typeface="Arial"/>
+              </a:defRPr>
+            </a:defPPr>
+            <a:lvl1pPr>
+              <a:defRPr sz="2250" b="0">
+                <a:solidFill>
+                  <a:srgbClr val="17242B"/>
+                </a:solidFill>
+                <a:latin typeface="Arial"/>
+                <a:ea typeface="Arial"/>
+                <a:cs typeface="Arial"/>
+              </a:defRPr>
+            </a:lvl1pPr>
+            <a:lvl2pPr>
+              <a:defRPr sz="2250" b="0">
+                <a:solidFill>
+                  <a:srgbClr val="17242B"/>
+                </a:solidFill>
+                <a:latin typeface="Arial"/>
+                <a:ea typeface="Arial"/>
+                <a:cs typeface="Arial"/>
+              </a:defRPr>
+            </a:lvl2pPr>
+            <a:lvl3pPr>
+              <a:defRPr sz="2250" b="0">
+                <a:solidFill>
+                  <a:srgbClr val="17242B"/>
+                </a:solidFill>
+                <a:latin typeface="Arial"/>
+                <a:ea typeface="Arial"/>
+                <a:cs typeface="Arial"/>
+              </a:defRPr>
+            </a:lvl3pPr>
+            <a:lvl4pPr>
+              <a:defRPr sz="2250" b="0">
+                <a:solidFill>
+                  <a:srgbClr val="17242B"/>
+                </a:solidFill>
+                <a:latin typeface="Arial"/>
+                <a:ea typeface="Arial"/>
+                <a:cs typeface="Arial"/>
+              </a:defRPr>
+            </a:lvl4pPr>
+            <a:lvl5pPr>
+              <a:defRPr sz="2250" b="0">
+                <a:solidFill>
+                  <a:srgbClr val="17242B"/>
+                </a:solidFill>
+                <a:latin typeface="Arial"/>
+                <a:ea typeface="Arial"/>
+                <a:cs typeface="Arial"/>
+              </a:defRPr>
+            </a:lvl5pPr>
+            <a:lvl6pPr>
+              <a:defRPr sz="2250" b="0">
+                <a:solidFill>
+                  <a:srgbClr val="17242B"/>
+                </a:solidFill>
+                <a:latin typeface="Arial"/>
+                <a:ea typeface="Arial"/>
+                <a:cs typeface="Arial"/>
+              </a:defRPr>
+            </a:lvl6pPr>
+            <a:lvl7pPr>
+              <a:defRPr sz="2250" b="0">
+                <a:solidFill>
+                  <a:srgbClr val="17242B"/>
+                </a:solidFill>
+                <a:latin typeface="Arial"/>
+                <a:ea typeface="Arial"/>
+                <a:cs typeface="Arial"/>
+              </a:defRPr>
+            </a:lvl7pPr>
+            <a:lvl8pPr>
+              <a:defRPr sz="2250" b="0">
+                <a:solidFill>
+                  <a:srgbClr val="17242B"/>
+                </a:solidFill>
+                <a:latin typeface="Arial"/>
+                <a:ea typeface="Arial"/>
+                <a:cs typeface="Arial"/>
+              </a:defRPr>
+            </a:lvl8pPr>
+            <a:lvl9pPr>
+              <a:defRPr sz="2250" b="0">
+                <a:solidFill>
+                  <a:srgbClr val="17242B"/>
+                </a:solidFill>
+                <a:latin typeface="Arial"/>
+                <a:ea typeface="Arial"/>
+                <a:cs typeface="Arial"/>
+              </a:defRPr>
+            </a:lvl9pPr>
+          </a:lstStyle>
+          <a:p xmlns:a="http://schemas.openxmlformats.org/drawingml/2006/main">
+            <a:pPr>
+              <a:defRPr sz="2250" b="0">
+                <a:solidFill>
+                  <a:srgbClr val="17242B"/>
+                </a:solidFill>
+                <a:latin typeface="Arial"/>
+                <a:ea typeface="Arial"/>
+                <a:cs typeface="Arial"/>
+              </a:defRPr>
+            </a:pPr>
+            <a:r>
+              <a:rPr sz="2250" b="0">
+                <a:solidFill>
+                  <a:srgbClr val="17242B"/>
+                </a:solidFill>
+                <a:latin typeface="Arial"/>
+                <a:ea typeface="Arial"/>
+                <a:cs typeface="Arial"/>
+              </a:rPr>
+              <a:t>Persisted inference reproduces the benchmark and exposes exact feature calculations</a:t>
+            </a:r>
+          </a:p>
+        </p:txBody>
+      </p:sp>
+      <p:sp>
+        <p:nvSpPr>
+          <p:cNvPr id="5" name="">
+            <a:extLst xmlns:a="http://schemas.openxmlformats.org/drawingml/2006/main">
+              <a:ext uri="{FF2B5EF4-FFF2-40B4-BE49-F238E27FC236}">
+                <a16:creationId xmlns:a16="http://schemas.microsoft.com/office/drawing/2014/main" id="{878BE501-D8EA-440A-A767-BB5A2D32AACC}"/>
+              </a:ext>
+            </a:extLst>
+          </p:cNvPr>
+          <p:cNvSpPr>
+            <a:spLocks xmlns:a="http://schemas.openxmlformats.org/drawingml/2006/main" noGrp="1"/>
+          </p:cNvSpPr>
+          <p:nvPr/>
+        </p:nvSpPr>
+        <p:spPr>
+          <a:xfrm xmlns:a="http://schemas.openxmlformats.org/drawingml/2006/main">
+            <a:off x="704850" y="4048125"/>
+            <a:ext cx="10668000" cy="838200"/>
+          </a:xfrm>
+          <a:prstGeom xmlns:a="http://schemas.openxmlformats.org/drawingml/2006/main" prst="rect">
+            <a:avLst/>
+          </a:prstGeom>
+          <a:noFill xmlns:a="http://schemas.openxmlformats.org/drawingml/2006/main"/>
+          <a:ln xmlns:a="http://schemas.openxmlformats.org/drawingml/2006/main" w="0">
+            <a:noFill/>
+          </a:ln>
+        </p:spPr>
+        <p:txBody>
+          <a:bodyPr xmlns:a="http://schemas.openxmlformats.org/drawingml/2006/main"/>
+          <a:lstStyle xmlns:a="http://schemas.openxmlformats.org/drawingml/2006/main">
+            <a:defPPr>
+              <a:defRPr sz="2250" b="0">
+                <a:solidFill>
+                  <a:srgbClr val="17242B"/>
+                </a:solidFill>
+                <a:latin typeface="Arial"/>
+                <a:ea typeface="Arial"/>
+                <a:cs typeface="Arial"/>
+              </a:defRPr>
+            </a:defPPr>
+            <a:lvl1pPr>
+              <a:defRPr sz="2250" b="0">
+                <a:solidFill>
+                  <a:srgbClr val="17242B"/>
+                </a:solidFill>
+                <a:latin typeface="Arial"/>
+                <a:ea typeface="Arial"/>
+                <a:cs typeface="Arial"/>
+              </a:defRPr>
+            </a:lvl1pPr>
+            <a:lvl2pPr>
+              <a:defRPr sz="2250" b="0">
+                <a:solidFill>
+                  <a:srgbClr val="17242B"/>
+                </a:solidFill>
+                <a:latin typeface="Arial"/>
+                <a:ea typeface="Arial"/>
+                <a:cs typeface="Arial"/>
+              </a:defRPr>
+            </a:lvl2pPr>
+            <a:lvl3pPr>
+              <a:defRPr sz="2250" b="0">
+                <a:solidFill>
+                  <a:srgbClr val="17242B"/>
+                </a:solidFill>
+                <a:latin typeface="Arial"/>
+                <a:ea typeface="Arial"/>
+                <a:cs typeface="Arial"/>
+              </a:defRPr>
+            </a:lvl3pPr>
+            <a:lvl4pPr>
+              <a:defRPr sz="2250" b="0">
+                <a:solidFill>
+                  <a:srgbClr val="17242B"/>
+                </a:solidFill>
+                <a:latin typeface="Arial"/>
+                <a:ea typeface="Arial"/>
+                <a:cs typeface="Arial"/>
+              </a:defRPr>
+            </a:lvl4pPr>
+            <a:lvl5pPr>
+              <a:defRPr sz="2250" b="0">
+                <a:solidFill>
+                  <a:srgbClr val="17242B"/>
+                </a:solidFill>
+                <a:latin typeface="Arial"/>
+                <a:ea typeface="Arial"/>
+                <a:cs typeface="Arial"/>
+              </a:defRPr>
+            </a:lvl5pPr>
+            <a:lvl6pPr>
+              <a:defRPr sz="2250" b="0">
+                <a:solidFill>
+                  <a:srgbClr val="17242B"/>
+                </a:solidFill>
+                <a:latin typeface="Arial"/>
+                <a:ea typeface="Arial"/>
+                <a:cs typeface="Arial"/>
+              </a:defRPr>
+            </a:lvl6pPr>
+            <a:lvl7pPr>
+              <a:defRPr sz="2250" b="0">
+                <a:solidFill>
+                  <a:srgbClr val="17242B"/>
+                </a:solidFill>
+                <a:latin typeface="Arial"/>
+                <a:ea typeface="Arial"/>
+                <a:cs typeface="Arial"/>
+              </a:defRPr>
+            </a:lvl7pPr>
+            <a:lvl8pPr>
+              <a:defRPr sz="2250" b="0">
+                <a:solidFill>
+                  <a:srgbClr val="17242B"/>
+                </a:solidFill>
+                <a:latin typeface="Arial"/>
+                <a:ea typeface="Arial"/>
+                <a:cs typeface="Arial"/>
+              </a:defRPr>
+            </a:lvl8pPr>
+            <a:lvl9pPr>
+              <a:defRPr sz="2250" b="0">
+                <a:solidFill>
+                  <a:srgbClr val="17242B"/>
+                </a:solidFill>
+                <a:latin typeface="Arial"/>
+                <a:ea typeface="Arial"/>
+                <a:cs typeface="Arial"/>
+              </a:defRPr>
+            </a:lvl9pPr>
+          </a:lstStyle>
+          <a:p xmlns:a="http://schemas.openxmlformats.org/drawingml/2006/main">
+            <a:pPr>
+              <a:defRPr sz="2250" b="0">
+                <a:solidFill>
+                  <a:srgbClr val="17242B"/>
+                </a:solidFill>
+                <a:latin typeface="Arial"/>
+                <a:ea typeface="Arial"/>
+                <a:cs typeface="Arial"/>
+              </a:defRPr>
+            </a:pPr>
+            <a:r>
+              <a:rPr sz="2250" b="0">
+                <a:solidFill>
+                  <a:srgbClr val="17242B"/>
+                </a:solidFill>
+                <a:latin typeface="Arial"/>
+                <a:ea typeface="Arial"/>
+                <a:cs typeface="Arial"/>
+              </a:rPr>
+              <a:t>The required video remains a human recording and upload task</a:t>
+            </a:r>
+          </a:p>
+        </p:txBody>
+      </p:sp>
+      <p:sp>
+        <p:nvSpPr>
+          <p:cNvPr id="6" name="">
+            <a:extLst xmlns:a="http://schemas.openxmlformats.org/drawingml/2006/main">
+              <a:ext uri="{FF2B5EF4-FFF2-40B4-BE49-F238E27FC236}">
+                <a16:creationId xmlns:a16="http://schemas.microsoft.com/office/drawing/2014/main" id="{DDC28FB5-E8B1-47AD-9DFE-713D67A36ED7}"/>
+              </a:ext>
+            </a:extLst>
+          </p:cNvPr>
+          <p:cNvSpPr>
+            <a:spLocks xmlns:a="http://schemas.openxmlformats.org/drawingml/2006/main" noGrp="1"/>
+          </p:cNvSpPr>
+          <p:nvPr/>
+        </p:nvSpPr>
+        <p:spPr>
+          <a:xfrm xmlns:a="http://schemas.openxmlformats.org/drawingml/2006/main">
+            <a:off x="704850" y="4976813"/>
+            <a:ext cx="10668000" cy="838200"/>
+          </a:xfrm>
+          <a:prstGeom xmlns:a="http://schemas.openxmlformats.org/drawingml/2006/main" prst="rect">
+            <a:avLst/>
+          </a:prstGeom>
+          <a:noFill xmlns:a="http://schemas.openxmlformats.org/drawingml/2006/main"/>
+          <a:ln xmlns:a="http://schemas.openxmlformats.org/drawingml/2006/main" w="0">
+            <a:noFill/>
+          </a:ln>
+        </p:spPr>
+        <p:txBody>
+          <a:bodyPr xmlns:a="http://schemas.openxmlformats.org/drawingml/2006/main"/>
+          <a:lstStyle xmlns:a="http://schemas.openxmlformats.org/drawingml/2006/main">
+            <a:defPPr>
+              <a:defRPr sz="2250" b="0">
+                <a:solidFill>
+                  <a:srgbClr val="17242B"/>
+                </a:solidFill>
+                <a:latin typeface="Arial"/>
+                <a:ea typeface="Arial"/>
+                <a:cs typeface="Arial"/>
+              </a:defRPr>
+            </a:defPPr>
+            <a:lvl1pPr>
+              <a:defRPr sz="2250" b="0">
+                <a:solidFill>
+                  <a:srgbClr val="17242B"/>
+                </a:solidFill>
+                <a:latin typeface="Arial"/>
+                <a:ea typeface="Arial"/>
+                <a:cs typeface="Arial"/>
+              </a:defRPr>
+            </a:lvl1pPr>
+            <a:lvl2pPr>
+              <a:defRPr sz="2250" b="0">
+                <a:solidFill>
+                  <a:srgbClr val="17242B"/>
+                </a:solidFill>
+                <a:latin typeface="Arial"/>
+                <a:ea typeface="Arial"/>
+                <a:cs typeface="Arial"/>
+              </a:defRPr>
+            </a:lvl2pPr>
+            <a:lvl3pPr>
+              <a:defRPr sz="2250" b="0">
+                <a:solidFill>
+                  <a:srgbClr val="17242B"/>
+                </a:solidFill>
+                <a:latin typeface="Arial"/>
+                <a:ea typeface="Arial"/>
+                <a:cs typeface="Arial"/>
+              </a:defRPr>
+            </a:lvl3pPr>
+            <a:lvl4pPr>
+              <a:defRPr sz="2250" b="0">
+                <a:solidFill>
+                  <a:srgbClr val="17242B"/>
+                </a:solidFill>
+                <a:latin typeface="Arial"/>
+                <a:ea typeface="Arial"/>
+                <a:cs typeface="Arial"/>
+              </a:defRPr>
+            </a:lvl4pPr>
+            <a:lvl5pPr>
+              <a:defRPr sz="2250" b="0">
+                <a:solidFill>
+                  <a:srgbClr val="17242B"/>
+                </a:solidFill>
+                <a:latin typeface="Arial"/>
+                <a:ea typeface="Arial"/>
+                <a:cs typeface="Arial"/>
+              </a:defRPr>
+            </a:lvl5pPr>
+            <a:lvl6pPr>
+              <a:defRPr sz="2250" b="0">
+                <a:solidFill>
+                  <a:srgbClr val="17242B"/>
+                </a:solidFill>
+                <a:latin typeface="Arial"/>
+                <a:ea typeface="Arial"/>
+                <a:cs typeface="Arial"/>
+              </a:defRPr>
+            </a:lvl6pPr>
+            <a:lvl7pPr>
+              <a:defRPr sz="2250" b="0">
+                <a:solidFill>
+                  <a:srgbClr val="17242B"/>
+                </a:solidFill>
+                <a:latin typeface="Arial"/>
+                <a:ea typeface="Arial"/>
+                <a:cs typeface="Arial"/>
+              </a:defRPr>
+            </a:lvl7pPr>
+            <a:lvl8pPr>
+              <a:defRPr sz="2250" b="0">
+                <a:solidFill>
+                  <a:srgbClr val="17242B"/>
+                </a:solidFill>
+                <a:latin typeface="Arial"/>
+                <a:ea typeface="Arial"/>
+                <a:cs typeface="Arial"/>
+              </a:defRPr>
+            </a:lvl8pPr>
+            <a:lvl9pPr>
+              <a:defRPr sz="2250" b="0">
+                <a:solidFill>
+                  <a:srgbClr val="17242B"/>
+                </a:solidFill>
+                <a:latin typeface="Arial"/>
+                <a:ea typeface="Arial"/>
+                <a:cs typeface="Arial"/>
+              </a:defRPr>
+            </a:lvl9pPr>
+          </a:lstStyle>
+          <a:p xmlns:a="http://schemas.openxmlformats.org/drawingml/2006/main">
+            <a:pPr>
+              <a:defRPr sz="2250" b="0">
+                <a:solidFill>
+                  <a:srgbClr val="17242B"/>
+                </a:solidFill>
+                <a:latin typeface="Arial"/>
+                <a:ea typeface="Arial"/>
+                <a:cs typeface="Arial"/>
+              </a:defRPr>
+            </a:pPr>
+            <a:r>
+              <a:rPr sz="2250" b="0">
+                <a:solidFill>
+                  <a:srgbClr val="17242B"/>
+                </a:solidFill>
+                <a:latin typeface="Arial"/>
+                <a:ea typeface="Arial"/>
+                <a:cs typeface="Arial"/>
+              </a:rPr>
+              <a:t>Clinical validation, clinician feedback and sim-to-real evaluation remain outstanding</a:t>
+            </a:r>
+          </a:p>
+        </p:txBody>
+      </p:sp>
+      <p:sp>
+        <p:nvSpPr>
+          <p:cNvPr id="7" name="">
+            <a:extLst xmlns:a="http://schemas.openxmlformats.org/drawingml/2006/main">
+              <a:ext uri="{FF2B5EF4-FFF2-40B4-BE49-F238E27FC236}">
+                <a16:creationId xmlns:a16="http://schemas.microsoft.com/office/drawing/2014/main" id="{9A3F0CCE-1937-4A1F-85D3-D421BE50EDEE}"/>
+              </a:ext>
+            </a:extLst>
+          </p:cNvPr>
+          <p:cNvSpPr>
+            <a:spLocks xmlns:a="http://schemas.openxmlformats.org/drawingml/2006/main" noGrp="1"/>
+          </p:cNvSpPr>
+          <p:nvPr/>
+        </p:nvSpPr>
+        <p:spPr>
+          <a:xfrm xmlns:a="http://schemas.openxmlformats.org/drawingml/2006/main">
+            <a:off x="609600" y="6343650"/>
+            <a:ext cx="10972800" cy="285750"/>
+          </a:xfrm>
+          <a:prstGeom xmlns:a="http://schemas.openxmlformats.org/drawingml/2006/main" prst="rect">
+            <a:avLst/>
+          </a:prstGeom>
+          <a:noFill xmlns:a="http://schemas.openxmlformats.org/drawingml/2006/main"/>
+          <a:ln xmlns:a="http://schemas.openxmlformats.org/drawingml/2006/main" w="0">
+            <a:noFill/>
+          </a:ln>
+        </p:spPr>
+        <p:txBody>
+          <a:bodyPr xmlns:a="http://schemas.openxmlformats.org/drawingml/2006/main"/>
+          <a:lstStyle xmlns:a="http://schemas.openxmlformats.org/drawingml/2006/main">
+            <a:defPPr>
+              <a:defRPr sz="1350" b="0">
+                <a:solidFill>
+                  <a:srgbClr val="65757B"/>
+                </a:solidFill>
+                <a:latin typeface="Arial"/>
+                <a:ea typeface="Arial"/>
+                <a:cs typeface="Arial"/>
+              </a:defRPr>
+            </a:defPPr>
+            <a:lvl1pPr>
+              <a:defRPr sz="1350" b="0">
+                <a:solidFill>
+                  <a:srgbClr val="65757B"/>
+                </a:solidFill>
+                <a:latin typeface="Arial"/>
+                <a:ea typeface="Arial"/>
+                <a:cs typeface="Arial"/>
+              </a:defRPr>
+            </a:lvl1pPr>
+            <a:lvl2pPr>
+              <a:defRPr sz="1350" b="0">
+                <a:solidFill>
+                  <a:srgbClr val="65757B"/>
+                </a:solidFill>
+                <a:latin typeface="Arial"/>
+                <a:ea typeface="Arial"/>
+                <a:cs typeface="Arial"/>
+              </a:defRPr>
+            </a:lvl2pPr>
+            <a:lvl3pPr>
+              <a:defRPr sz="1350" b="0">
+                <a:solidFill>
+                  <a:srgbClr val="65757B"/>
+                </a:solidFill>
+                <a:latin typeface="Arial"/>
+                <a:ea typeface="Arial"/>
+                <a:cs typeface="Arial"/>
+              </a:defRPr>
+            </a:lvl3pPr>
+            <a:lvl4pPr>
+              <a:defRPr sz="1350" b="0">
+                <a:solidFill>
+                  <a:srgbClr val="65757B"/>
+                </a:solidFill>
+                <a:latin typeface="Arial"/>
+                <a:ea typeface="Arial"/>
+                <a:cs typeface="Arial"/>
+              </a:defRPr>
+            </a:lvl4pPr>
+            <a:lvl5pPr>
+              <a:defRPr sz="1350" b="0">
+                <a:solidFill>
+                  <a:srgbClr val="65757B"/>
+                </a:solidFill>
+                <a:latin typeface="Arial"/>
+                <a:ea typeface="Arial"/>
+                <a:cs typeface="Arial"/>
+              </a:defRPr>
+            </a:lvl5pPr>
+            <a:lvl6pPr>
+              <a:defRPr sz="1350" b="0">
+                <a:solidFill>
+                  <a:srgbClr val="65757B"/>
+                </a:solidFill>
+                <a:latin typeface="Arial"/>
+                <a:ea typeface="Arial"/>
+                <a:cs typeface="Arial"/>
+              </a:defRPr>
+            </a:lvl6pPr>
+            <a:lvl7pPr>
+              <a:defRPr sz="1350" b="0">
+                <a:solidFill>
+                  <a:srgbClr val="65757B"/>
+                </a:solidFill>
+                <a:latin typeface="Arial"/>
+                <a:ea typeface="Arial"/>
+                <a:cs typeface="Arial"/>
+              </a:defRPr>
+            </a:lvl7pPr>
+            <a:lvl8pPr>
+              <a:defRPr sz="1350" b="0">
+                <a:solidFill>
+                  <a:srgbClr val="65757B"/>
+                </a:solidFill>
+                <a:latin typeface="Arial"/>
+                <a:ea typeface="Arial"/>
+                <a:cs typeface="Arial"/>
+              </a:defRPr>
+            </a:lvl8pPr>
+            <a:lvl9pPr>
+              <a:defRPr sz="1350" b="0">
+                <a:solidFill>
+                  <a:srgbClr val="65757B"/>
+                </a:solidFill>
+                <a:latin typeface="Arial"/>
+                <a:ea typeface="Arial"/>
+                <a:cs typeface="Arial"/>
+              </a:defRPr>
+            </a:lvl9pPr>
+          </a:lstStyle>
+          <a:p xmlns:a="http://schemas.openxmlformats.org/drawingml/2006/main">
+            <a:pPr>
+              <a:defRPr sz="1350" b="0">
+                <a:solidFill>
+                  <a:srgbClr val="65757B"/>
+                </a:solidFill>
+                <a:latin typeface="Arial"/>
+                <a:ea typeface="Arial"/>
+                <a:cs typeface="Arial"/>
+              </a:defRPr>
+            </a:pPr>
+            <a:r>
+              <a:rPr sz="1350" b="0">
+                <a:solidFill>
+                  <a:srgbClr val="65757B"/>
+                </a:solidFill>
+                <a:latin typeface="Arial"/>
+                <a:ea typeface="Arial"/>
+                <a:cs typeface="Arial"/>
+              </a:rPr>
+              <a:t>Synthetic research prototype. Not for diagnosis, contraception or conception planning.</a:t>
+            </a:r>
+          </a:p>
+        </p:txBody>
+      </p:sp>
+    </p:spTree>
+    <p:extLst>
+      <p:ext uri="{BB962C8B-B14F-4D97-AF65-F5344CB8AC3E}">
+        <p14:creationId xmlns:p14="http://schemas.microsoft.com/office/powerpoint/2010/main" val="1171115833"/>
       </p:ext>
     </p:extLst>
   </p:cSld>
@@ -21194,7 +22386,7 @@
           <p:cNvPr id="8" name="">
             <a:extLst xmlns:a="http://schemas.openxmlformats.org/drawingml/2006/main">
               <a:ext uri="{FF2B5EF4-FFF2-40B4-BE49-F238E27FC236}">
-                <a16:creationId xmlns:a16="http://schemas.microsoft.com/office/drawing/2014/main" id="{B36368FC-9A8F-4D19-B1EF-8EB2B2AC5DB6}"/>
+                <a16:creationId xmlns:a16="http://schemas.microsoft.com/office/drawing/2014/main" id="{6E2BCE6F-83A8-4920-A9FF-B6BC0BB570BC}"/>
               </a:ext>
             </a:extLst>
           </p:cNvPr>
@@ -21350,7 +22542,7 @@
           <p:cNvPr id="2" name="">
             <a:extLst xmlns:a="http://schemas.openxmlformats.org/drawingml/2006/main">
               <a:ext uri="{FF2B5EF4-FFF2-40B4-BE49-F238E27FC236}">
-                <a16:creationId xmlns:a16="http://schemas.microsoft.com/office/drawing/2014/main" id="{385D7F32-8D98-433B-83CD-79D77B35FEFB}"/>
+                <a16:creationId xmlns:a16="http://schemas.microsoft.com/office/drawing/2014/main" id="{04F479DD-8DBD-43D5-861C-6F956325A4A8}"/>
               </a:ext>
             </a:extLst>
           </p:cNvPr>
@@ -21506,7 +22698,7 @@
           <p:cNvPr id="3" name="">
             <a:extLst xmlns:a="http://schemas.openxmlformats.org/drawingml/2006/main">
               <a:ext uri="{FF2B5EF4-FFF2-40B4-BE49-F238E27FC236}">
-                <a16:creationId xmlns:a16="http://schemas.microsoft.com/office/drawing/2014/main" id="{5231DC8C-B039-46AC-87AA-3D15020C7FAE}"/>
+                <a16:creationId xmlns:a16="http://schemas.microsoft.com/office/drawing/2014/main" id="{938B1AEC-D627-4297-9C1C-0852F495D636}"/>
               </a:ext>
             </a:extLst>
           </p:cNvPr>
@@ -21662,7 +22854,7 @@
           <p:cNvPr id="4" name="">
             <a:extLst xmlns:a="http://schemas.openxmlformats.org/drawingml/2006/main">
               <a:ext uri="{FF2B5EF4-FFF2-40B4-BE49-F238E27FC236}">
-                <a16:creationId xmlns:a16="http://schemas.microsoft.com/office/drawing/2014/main" id="{42D49F90-C363-402B-A4E8-CD20D06720D0}"/>
+                <a16:creationId xmlns:a16="http://schemas.microsoft.com/office/drawing/2014/main" id="{762BF0D0-6963-4107-9044-83FC66DACC42}"/>
               </a:ext>
             </a:extLst>
           </p:cNvPr>
@@ -21818,7 +23010,7 @@
           <p:cNvPr id="5" name="">
             <a:extLst xmlns:a="http://schemas.openxmlformats.org/drawingml/2006/main">
               <a:ext uri="{FF2B5EF4-FFF2-40B4-BE49-F238E27FC236}">
-                <a16:creationId xmlns:a16="http://schemas.microsoft.com/office/drawing/2014/main" id="{5023C667-4934-44FB-946B-092D0C0F2C60}"/>
+                <a16:creationId xmlns:a16="http://schemas.microsoft.com/office/drawing/2014/main" id="{9ABD3F3C-AFFA-4537-8A96-97FEA92E210D}"/>
               </a:ext>
             </a:extLst>
           </p:cNvPr>
@@ -21974,7 +23166,7 @@
           <p:cNvPr id="6" name="">
             <a:extLst xmlns:a="http://schemas.openxmlformats.org/drawingml/2006/main">
               <a:ext uri="{FF2B5EF4-FFF2-40B4-BE49-F238E27FC236}">
-                <a16:creationId xmlns:a16="http://schemas.microsoft.com/office/drawing/2014/main" id="{A235F1BD-2B2E-40B4-9903-E43476DF2F3A}"/>
+                <a16:creationId xmlns:a16="http://schemas.microsoft.com/office/drawing/2014/main" id="{27F81AD3-4096-4976-870C-D6C67DB0B735}"/>
               </a:ext>
             </a:extLst>
           </p:cNvPr>
@@ -22130,7 +23322,7 @@
           <p:cNvPr id="7" name="">
             <a:extLst xmlns:a="http://schemas.openxmlformats.org/drawingml/2006/main">
               <a:ext uri="{FF2B5EF4-FFF2-40B4-BE49-F238E27FC236}">
-                <a16:creationId xmlns:a16="http://schemas.microsoft.com/office/drawing/2014/main" id="{D6975116-9541-43E1-BD95-9D33499C0D5C}"/>
+                <a16:creationId xmlns:a16="http://schemas.microsoft.com/office/drawing/2014/main" id="{76BF0BCD-3947-4D78-B577-99C0F09070D1}"/>
               </a:ext>
             </a:extLst>
           </p:cNvPr>
@@ -22284,7 +23476,7 @@
     </p:spTree>
     <p:extLst>
       <p:ext uri="{BB962C8B-B14F-4D97-AF65-F5344CB8AC3E}">
-        <p14:creationId xmlns:p14="http://schemas.microsoft.com/office/powerpoint/2010/main" val="746598386"/>
+        <p14:creationId xmlns:p14="http://schemas.microsoft.com/office/powerpoint/2010/main" val="1122120946"/>
       </p:ext>
     </p:extLst>
   </p:cSld>
@@ -22315,7 +23507,7 @@
           <p:cNvPr id="7" name="">
             <a:extLst xmlns:a="http://schemas.openxmlformats.org/drawingml/2006/main">
               <a:ext uri="{FF2B5EF4-FFF2-40B4-BE49-F238E27FC236}">
-                <a16:creationId xmlns:a16="http://schemas.microsoft.com/office/drawing/2014/main" id="{9AC44C2E-DC99-47BF-A7C6-9788A4DE9406}"/>
+                <a16:creationId xmlns:a16="http://schemas.microsoft.com/office/drawing/2014/main" id="{B0B77D36-1F4A-4B65-93C8-BC05F6D82177}"/>
               </a:ext>
             </a:extLst>
           </p:cNvPr>
@@ -22471,7 +23663,7 @@
           <p:cNvPr id="2" name="">
             <a:extLst xmlns:a="http://schemas.openxmlformats.org/drawingml/2006/main">
               <a:ext uri="{FF2B5EF4-FFF2-40B4-BE49-F238E27FC236}">
-                <a16:creationId xmlns:a16="http://schemas.microsoft.com/office/drawing/2014/main" id="{FAF2E72C-E165-47EF-B889-7D4C1F849148}"/>
+                <a16:creationId xmlns:a16="http://schemas.microsoft.com/office/drawing/2014/main" id="{094477FA-E8BD-4354-8BC6-ABB0994C7160}"/>
               </a:ext>
             </a:extLst>
           </p:cNvPr>
@@ -22627,7 +23819,7 @@
           <p:cNvPr id="3" name="">
             <a:extLst xmlns:a="http://schemas.openxmlformats.org/drawingml/2006/main">
               <a:ext uri="{FF2B5EF4-FFF2-40B4-BE49-F238E27FC236}">
-                <a16:creationId xmlns:a16="http://schemas.microsoft.com/office/drawing/2014/main" id="{922B7294-A6BD-4890-AFAE-1C697873490C}"/>
+                <a16:creationId xmlns:a16="http://schemas.microsoft.com/office/drawing/2014/main" id="{14F60EEF-E9D7-4B39-975D-D373A2372A5E}"/>
               </a:ext>
             </a:extLst>
           </p:cNvPr>
@@ -22783,7 +23975,7 @@
           <p:cNvPr id="4" name="">
             <a:extLst xmlns:a="http://schemas.openxmlformats.org/drawingml/2006/main">
               <a:ext uri="{FF2B5EF4-FFF2-40B4-BE49-F238E27FC236}">
-                <a16:creationId xmlns:a16="http://schemas.microsoft.com/office/drawing/2014/main" id="{DD13364C-3278-4A8A-A804-E8DA0C64C141}"/>
+                <a16:creationId xmlns:a16="http://schemas.microsoft.com/office/drawing/2014/main" id="{33F9B7CC-0792-430C-A811-17C8E9FB91AE}"/>
               </a:ext>
             </a:extLst>
           </p:cNvPr>
@@ -22939,7 +24131,7 @@
           <p:cNvPr id="5" name="">
             <a:extLst xmlns:a="http://schemas.openxmlformats.org/drawingml/2006/main">
               <a:ext uri="{FF2B5EF4-FFF2-40B4-BE49-F238E27FC236}">
-                <a16:creationId xmlns:a16="http://schemas.microsoft.com/office/drawing/2014/main" id="{14F78677-E4D8-4C73-B2A1-0D7FBB052771}"/>
+                <a16:creationId xmlns:a16="http://schemas.microsoft.com/office/drawing/2014/main" id="{7D18484A-ACB1-45C7-9E6B-1E916FCC7731}"/>
               </a:ext>
             </a:extLst>
           </p:cNvPr>
@@ -23095,7 +24287,7 @@
           <p:cNvPr id="6" name="">
             <a:extLst xmlns:a="http://schemas.openxmlformats.org/drawingml/2006/main">
               <a:ext uri="{FF2B5EF4-FFF2-40B4-BE49-F238E27FC236}">
-                <a16:creationId xmlns:a16="http://schemas.microsoft.com/office/drawing/2014/main" id="{79F7853F-F112-47B8-B1E9-E6900D5ECE80}"/>
+                <a16:creationId xmlns:a16="http://schemas.microsoft.com/office/drawing/2014/main" id="{B9CE7735-DD07-43FB-AB1B-DB6426EF568F}"/>
               </a:ext>
             </a:extLst>
           </p:cNvPr>
@@ -23249,7 +24441,7 @@
     </p:spTree>
     <p:extLst>
       <p:ext uri="{BB962C8B-B14F-4D97-AF65-F5344CB8AC3E}">
-        <p14:creationId xmlns:p14="http://schemas.microsoft.com/office/powerpoint/2010/main" val="614248147"/>
+        <p14:creationId xmlns:p14="http://schemas.microsoft.com/office/powerpoint/2010/main" val="730004488"/>
       </p:ext>
     </p:extLst>
   </p:cSld>
@@ -23280,7 +24472,7 @@
           <p:cNvPr id="14" name="">
             <a:extLst xmlns:a="http://schemas.openxmlformats.org/drawingml/2006/main">
               <a:ext uri="{FF2B5EF4-FFF2-40B4-BE49-F238E27FC236}">
-                <a16:creationId xmlns:a16="http://schemas.microsoft.com/office/drawing/2014/main" id="{539DE017-D964-40A8-8089-6C8503491D5D}"/>
+                <a16:creationId xmlns:a16="http://schemas.microsoft.com/office/drawing/2014/main" id="{BBCBB8F9-6D80-4CA3-9E54-206D832AADE2}"/>
               </a:ext>
             </a:extLst>
           </p:cNvPr>
@@ -23311,7 +24503,7 @@
           <p:cNvPr id="13" name="">
             <a:extLst xmlns:a="http://schemas.openxmlformats.org/drawingml/2006/main">
               <a:ext uri="{FF2B5EF4-FFF2-40B4-BE49-F238E27FC236}">
-                <a16:creationId xmlns:a16="http://schemas.microsoft.com/office/drawing/2014/main" id="{D7D6CCDC-4306-41DA-8D81-073C279A0667}"/>
+                <a16:creationId xmlns:a16="http://schemas.microsoft.com/office/drawing/2014/main" id="{F488DFEF-09F1-45BF-81E2-79BDB5C6223A}"/>
               </a:ext>
             </a:extLst>
           </p:cNvPr>
@@ -23342,7 +24534,7 @@
           <p:cNvPr id="12" name="">
             <a:extLst xmlns:a="http://schemas.openxmlformats.org/drawingml/2006/main">
               <a:ext uri="{FF2B5EF4-FFF2-40B4-BE49-F238E27FC236}">
-                <a16:creationId xmlns:a16="http://schemas.microsoft.com/office/drawing/2014/main" id="{3BF63360-4D37-4404-8333-562F99A1B348}"/>
+                <a16:creationId xmlns:a16="http://schemas.microsoft.com/office/drawing/2014/main" id="{087DC726-3813-4070-986E-0FF9B5F765BE}"/>
               </a:ext>
             </a:extLst>
           </p:cNvPr>
@@ -23373,7 +24565,7 @@
           <p:cNvPr id="11" name="">
             <a:extLst xmlns:a="http://schemas.openxmlformats.org/drawingml/2006/main">
               <a:ext uri="{FF2B5EF4-FFF2-40B4-BE49-F238E27FC236}">
-                <a16:creationId xmlns:a16="http://schemas.microsoft.com/office/drawing/2014/main" id="{56D3A903-1A65-417C-91DD-F0FFBFCCBB94}"/>
+                <a16:creationId xmlns:a16="http://schemas.microsoft.com/office/drawing/2014/main" id="{0A1B7FC1-0369-4C70-AF23-5AD825FD45E0}"/>
               </a:ext>
             </a:extLst>
           </p:cNvPr>
@@ -23406,7 +24598,7 @@
           <p:cNvPr id="10" name="">
             <a:extLst xmlns:a="http://schemas.openxmlformats.org/drawingml/2006/main">
               <a:ext uri="{FF2B5EF4-FFF2-40B4-BE49-F238E27FC236}">
-                <a16:creationId xmlns:a16="http://schemas.microsoft.com/office/drawing/2014/main" id="{8A6EB14B-F1B6-4F19-83F8-44D26C81DF67}"/>
+                <a16:creationId xmlns:a16="http://schemas.microsoft.com/office/drawing/2014/main" id="{8A505008-9083-4184-AC17-BE0D619ADBF1}"/>
               </a:ext>
             </a:extLst>
           </p:cNvPr>
@@ -23439,7 +24631,7 @@
           <p:cNvPr id="16" name="">
             <a:extLst xmlns:a="http://schemas.openxmlformats.org/drawingml/2006/main">
               <a:ext uri="{FF2B5EF4-FFF2-40B4-BE49-F238E27FC236}">
-                <a16:creationId xmlns:a16="http://schemas.microsoft.com/office/drawing/2014/main" id="{14C2DFB2-F87D-4EB1-A7AB-6D60CD311F4A}"/>
+                <a16:creationId xmlns:a16="http://schemas.microsoft.com/office/drawing/2014/main" id="{DF138987-B1C9-425D-AE19-9C49821FA302}"/>
               </a:ext>
             </a:extLst>
           </p:cNvPr>
@@ -23595,7 +24787,7 @@
           <p:cNvPr id="2" name="">
             <a:extLst xmlns:a="http://schemas.openxmlformats.org/drawingml/2006/main">
               <a:ext uri="{FF2B5EF4-FFF2-40B4-BE49-F238E27FC236}">
-                <a16:creationId xmlns:a16="http://schemas.microsoft.com/office/drawing/2014/main" id="{1F244C69-6F84-45A0-8203-A8B232DD4D09}"/>
+                <a16:creationId xmlns:a16="http://schemas.microsoft.com/office/drawing/2014/main" id="{503BF6D7-3961-4B5A-AA23-3309DA0C9F7F}"/>
               </a:ext>
             </a:extLst>
           </p:cNvPr>
@@ -23751,7 +24943,7 @@
           <p:cNvPr id="3" name="">
             <a:extLst xmlns:a="http://schemas.openxmlformats.org/drawingml/2006/main">
               <a:ext uri="{FF2B5EF4-FFF2-40B4-BE49-F238E27FC236}">
-                <a16:creationId xmlns:a16="http://schemas.microsoft.com/office/drawing/2014/main" id="{B941BEA2-D84C-48A0-886A-24104341E4D6}"/>
+                <a16:creationId xmlns:a16="http://schemas.microsoft.com/office/drawing/2014/main" id="{7DEA7CAF-C51B-4762-9FC0-8A322B01858D}"/>
               </a:ext>
             </a:extLst>
           </p:cNvPr>
@@ -23934,7 +25126,7 @@
           <p:cNvPr id="4" name="">
             <a:extLst xmlns:a="http://schemas.openxmlformats.org/drawingml/2006/main">
               <a:ext uri="{FF2B5EF4-FFF2-40B4-BE49-F238E27FC236}">
-                <a16:creationId xmlns:a16="http://schemas.microsoft.com/office/drawing/2014/main" id="{31CA75CA-F239-4CA0-87AF-EA6C4A9A2C54}"/>
+                <a16:creationId xmlns:a16="http://schemas.microsoft.com/office/drawing/2014/main" id="{C2992975-EB28-472E-B853-7B5B0FCFD882}"/>
               </a:ext>
             </a:extLst>
           </p:cNvPr>
@@ -24117,7 +25309,7 @@
           <p:cNvPr id="5" name="">
             <a:extLst xmlns:a="http://schemas.openxmlformats.org/drawingml/2006/main">
               <a:ext uri="{FF2B5EF4-FFF2-40B4-BE49-F238E27FC236}">
-                <a16:creationId xmlns:a16="http://schemas.microsoft.com/office/drawing/2014/main" id="{BC089E84-9A90-4C7D-AA9B-34837A497AAD}"/>
+                <a16:creationId xmlns:a16="http://schemas.microsoft.com/office/drawing/2014/main" id="{9B82D60A-82E8-40A4-9E36-5C2B9923CFEC}"/>
               </a:ext>
             </a:extLst>
           </p:cNvPr>
@@ -24300,7 +25492,7 @@
           <p:cNvPr id="6" name="">
             <a:extLst xmlns:a="http://schemas.openxmlformats.org/drawingml/2006/main">
               <a:ext uri="{FF2B5EF4-FFF2-40B4-BE49-F238E27FC236}">
-                <a16:creationId xmlns:a16="http://schemas.microsoft.com/office/drawing/2014/main" id="{0246612D-FA71-4958-BCEA-806CBF472F36}"/>
+                <a16:creationId xmlns:a16="http://schemas.microsoft.com/office/drawing/2014/main" id="{042E3088-31D9-47AB-979F-AE84446B0FA8}"/>
               </a:ext>
             </a:extLst>
           </p:cNvPr>
@@ -24483,7 +25675,7 @@
           <p:cNvPr id="7" name="">
             <a:extLst xmlns:a="http://schemas.openxmlformats.org/drawingml/2006/main">
               <a:ext uri="{FF2B5EF4-FFF2-40B4-BE49-F238E27FC236}">
-                <a16:creationId xmlns:a16="http://schemas.microsoft.com/office/drawing/2014/main" id="{71C321A1-EC93-4AAC-BE37-CD9979ABC700}"/>
+                <a16:creationId xmlns:a16="http://schemas.microsoft.com/office/drawing/2014/main" id="{1B22B207-EE4D-46F5-822F-4E311160A0DB}"/>
               </a:ext>
             </a:extLst>
           </p:cNvPr>
@@ -24666,7 +25858,7 @@
           <p:cNvPr id="8" name="">
             <a:extLst xmlns:a="http://schemas.openxmlformats.org/drawingml/2006/main">
               <a:ext uri="{FF2B5EF4-FFF2-40B4-BE49-F238E27FC236}">
-                <a16:creationId xmlns:a16="http://schemas.microsoft.com/office/drawing/2014/main" id="{0FC57080-4B79-4BBA-AC3C-DB981881142E}"/>
+                <a16:creationId xmlns:a16="http://schemas.microsoft.com/office/drawing/2014/main" id="{C9E5DB1A-6A9F-48EE-8987-8316ADFEBE91}"/>
               </a:ext>
             </a:extLst>
           </p:cNvPr>
@@ -24849,7 +26041,7 @@
           <p:cNvPr id="9" name="">
             <a:extLst xmlns:a="http://schemas.openxmlformats.org/drawingml/2006/main">
               <a:ext uri="{FF2B5EF4-FFF2-40B4-BE49-F238E27FC236}">
-                <a16:creationId xmlns:a16="http://schemas.microsoft.com/office/drawing/2014/main" id="{F25BFB2B-387B-4BCB-ABCB-811BD014753B}"/>
+                <a16:creationId xmlns:a16="http://schemas.microsoft.com/office/drawing/2014/main" id="{D79990B9-AF0E-4E81-8562-BBCA694CFC57}"/>
               </a:ext>
             </a:extLst>
           </p:cNvPr>
@@ -25032,7 +26224,7 @@
           <p:cNvPr id="15" name="">
             <a:extLst xmlns:a="http://schemas.openxmlformats.org/drawingml/2006/main">
               <a:ext uri="{FF2B5EF4-FFF2-40B4-BE49-F238E27FC236}">
-                <a16:creationId xmlns:a16="http://schemas.microsoft.com/office/drawing/2014/main" id="{32577041-5901-45B7-8E3D-8DF0F752DA71}"/>
+                <a16:creationId xmlns:a16="http://schemas.microsoft.com/office/drawing/2014/main" id="{273E1A96-0CF0-47A7-8BAB-DE873D8430CB}"/>
               </a:ext>
             </a:extLst>
           </p:cNvPr>
@@ -25186,7 +26378,7 @@
     </p:spTree>
     <p:extLst>
       <p:ext uri="{BB962C8B-B14F-4D97-AF65-F5344CB8AC3E}">
-        <p14:creationId xmlns:p14="http://schemas.microsoft.com/office/powerpoint/2010/main" val="429445922"/>
+        <p14:creationId xmlns:p14="http://schemas.microsoft.com/office/powerpoint/2010/main" val="1634058767"/>
       </p:ext>
     </p:extLst>
   </p:cSld>
@@ -25217,7 +26409,7 @@
           <p:cNvPr id="8" name="">
             <a:extLst xmlns:a="http://schemas.openxmlformats.org/drawingml/2006/main">
               <a:ext uri="{FF2B5EF4-FFF2-40B4-BE49-F238E27FC236}">
-                <a16:creationId xmlns:a16="http://schemas.microsoft.com/office/drawing/2014/main" id="{B2F0AFD1-96CB-4DDB-B6B1-108F6B355897}"/>
+                <a16:creationId xmlns:a16="http://schemas.microsoft.com/office/drawing/2014/main" id="{F7BF9165-7E8F-4983-AFF2-521A422AC099}"/>
               </a:ext>
             </a:extLst>
           </p:cNvPr>
@@ -25373,7 +26565,7 @@
           <p:cNvPr id="2" name="">
             <a:extLst xmlns:a="http://schemas.openxmlformats.org/drawingml/2006/main">
               <a:ext uri="{FF2B5EF4-FFF2-40B4-BE49-F238E27FC236}">
-                <a16:creationId xmlns:a16="http://schemas.microsoft.com/office/drawing/2014/main" id="{A3786859-E797-4D7C-BD6F-2FFC9CE96C62}"/>
+                <a16:creationId xmlns:a16="http://schemas.microsoft.com/office/drawing/2014/main" id="{372C7E82-D213-4EF8-8363-722541417178}"/>
               </a:ext>
             </a:extLst>
           </p:cNvPr>
@@ -25529,7 +26721,7 @@
           <p:cNvPr id="3" name="">
             <a:extLst xmlns:a="http://schemas.openxmlformats.org/drawingml/2006/main">
               <a:ext uri="{FF2B5EF4-FFF2-40B4-BE49-F238E27FC236}">
-                <a16:creationId xmlns:a16="http://schemas.microsoft.com/office/drawing/2014/main" id="{0560052F-BD1E-4240-A300-9705D58CFA79}"/>
+                <a16:creationId xmlns:a16="http://schemas.microsoft.com/office/drawing/2014/main" id="{C3C48302-E7D6-4F5C-BAF1-6CED674FF252}"/>
               </a:ext>
             </a:extLst>
           </p:cNvPr>
@@ -25685,7 +26877,7 @@
           <p:cNvPr id="4" name="">
             <a:extLst xmlns:a="http://schemas.openxmlformats.org/drawingml/2006/main">
               <a:ext uri="{FF2B5EF4-FFF2-40B4-BE49-F238E27FC236}">
-                <a16:creationId xmlns:a16="http://schemas.microsoft.com/office/drawing/2014/main" id="{D2875AB6-6AC4-4216-8205-1F40BDAC7087}"/>
+                <a16:creationId xmlns:a16="http://schemas.microsoft.com/office/drawing/2014/main" id="{295117A8-CC49-45A5-BE18-69E08BED47FE}"/>
               </a:ext>
             </a:extLst>
           </p:cNvPr>
@@ -25841,7 +27033,7 @@
           <p:cNvPr id="5" name="">
             <a:extLst xmlns:a="http://schemas.openxmlformats.org/drawingml/2006/main">
               <a:ext uri="{FF2B5EF4-FFF2-40B4-BE49-F238E27FC236}">
-                <a16:creationId xmlns:a16="http://schemas.microsoft.com/office/drawing/2014/main" id="{68D564C0-28DE-497C-A202-ECC7D36056E9}"/>
+                <a16:creationId xmlns:a16="http://schemas.microsoft.com/office/drawing/2014/main" id="{1347A0BE-DF8E-4B3B-9FB0-0F46B105B93F}"/>
               </a:ext>
             </a:extLst>
           </p:cNvPr>
@@ -25997,7 +27189,7 @@
           <p:cNvPr id="6" name="">
             <a:extLst xmlns:a="http://schemas.openxmlformats.org/drawingml/2006/main">
               <a:ext uri="{FF2B5EF4-FFF2-40B4-BE49-F238E27FC236}">
-                <a16:creationId xmlns:a16="http://schemas.microsoft.com/office/drawing/2014/main" id="{651333D3-CCC0-4FF6-9216-794A12FA55E8}"/>
+                <a16:creationId xmlns:a16="http://schemas.microsoft.com/office/drawing/2014/main" id="{9B303B32-ACAC-417F-BAAD-BF336AC32ECA}"/>
               </a:ext>
             </a:extLst>
           </p:cNvPr>
@@ -26153,7 +27345,7 @@
           <p:cNvPr id="7" name="">
             <a:extLst xmlns:a="http://schemas.openxmlformats.org/drawingml/2006/main">
               <a:ext uri="{FF2B5EF4-FFF2-40B4-BE49-F238E27FC236}">
-                <a16:creationId xmlns:a16="http://schemas.microsoft.com/office/drawing/2014/main" id="{FE9DCF0B-3204-4B67-8640-0A847517608E}"/>
+                <a16:creationId xmlns:a16="http://schemas.microsoft.com/office/drawing/2014/main" id="{B3CCF067-6BAC-420B-ACDD-B25A68068136}"/>
               </a:ext>
             </a:extLst>
           </p:cNvPr>
@@ -26307,7 +27499,7 @@
     </p:spTree>
     <p:extLst>
       <p:ext uri="{BB962C8B-B14F-4D97-AF65-F5344CB8AC3E}">
-        <p14:creationId xmlns:p14="http://schemas.microsoft.com/office/powerpoint/2010/main" val="1644269501"/>
+        <p14:creationId xmlns:p14="http://schemas.microsoft.com/office/powerpoint/2010/main" val="185248387"/>
       </p:ext>
     </p:extLst>
   </p:cSld>
@@ -26338,7 +27530,7 @@
           <p:cNvPr id="5" name="">
             <a:extLst xmlns:a="http://schemas.openxmlformats.org/drawingml/2006/main">
               <a:ext uri="{FF2B5EF4-FFF2-40B4-BE49-F238E27FC236}">
-                <a16:creationId xmlns:a16="http://schemas.microsoft.com/office/drawing/2014/main" id="{2F7C59F4-89CB-4005-B0C2-E9BFAE2D9872}"/>
+                <a16:creationId xmlns:a16="http://schemas.microsoft.com/office/drawing/2014/main" id="{209A0F94-7C42-433A-A9CF-BE0AAC6E38AC}"/>
               </a:ext>
             </a:extLst>
           </p:cNvPr>
@@ -26494,7 +27686,7 @@
           <p:cNvPr id="2" name="">
             <a:extLst xmlns:a="http://schemas.openxmlformats.org/drawingml/2006/main">
               <a:ext uri="{FF2B5EF4-FFF2-40B4-BE49-F238E27FC236}">
-                <a16:creationId xmlns:a16="http://schemas.microsoft.com/office/drawing/2014/main" id="{E0EE4D37-081A-4027-93CA-4DDCC811290D}"/>
+                <a16:creationId xmlns:a16="http://schemas.microsoft.com/office/drawing/2014/main" id="{2EA42DC6-04BE-4CC3-B515-0F41C257DC79}"/>
               </a:ext>
             </a:extLst>
           </p:cNvPr>
@@ -26650,7 +27842,7 @@
           <p:cNvPr id="3" name="">
             <a:extLst xmlns:a="http://schemas.openxmlformats.org/drawingml/2006/main">
               <a:ext uri="{FF2B5EF4-FFF2-40B4-BE49-F238E27FC236}">
-                <a16:creationId xmlns:a16="http://schemas.microsoft.com/office/drawing/2014/main" id="{D6652581-4ACD-4CDC-AFE8-5738A145BEB9}"/>
+                <a16:creationId xmlns:a16="http://schemas.microsoft.com/office/drawing/2014/main" id="{04FA5D1A-31F7-452D-826E-803E4D3D7407}"/>
               </a:ext>
             </a:extLst>
           </p:cNvPr>
@@ -27591,7 +28783,7 @@
           <p:cNvPr id="4" name="">
             <a:extLst xmlns:a="http://schemas.openxmlformats.org/drawingml/2006/main">
               <a:ext uri="{FF2B5EF4-FFF2-40B4-BE49-F238E27FC236}">
-                <a16:creationId xmlns:a16="http://schemas.microsoft.com/office/drawing/2014/main" id="{21907E07-378D-47ED-A4A7-61C86CF07ECB}"/>
+                <a16:creationId xmlns:a16="http://schemas.microsoft.com/office/drawing/2014/main" id="{81296C22-19ED-4800-AB83-B3F2F42ACC3E}"/>
               </a:ext>
             </a:extLst>
           </p:cNvPr>
@@ -27745,7 +28937,7 @@
     </p:spTree>
     <p:extLst>
       <p:ext uri="{BB962C8B-B14F-4D97-AF65-F5344CB8AC3E}">
-        <p14:creationId xmlns:p14="http://schemas.microsoft.com/office/powerpoint/2010/main" val="1701869629"/>
+        <p14:creationId xmlns:p14="http://schemas.microsoft.com/office/powerpoint/2010/main" val="376549112"/>
       </p:ext>
     </p:extLst>
   </p:cSld>
@@ -27776,7 +28968,7 @@
           <p:cNvPr id="5" name="">
             <a:extLst xmlns:a="http://schemas.openxmlformats.org/drawingml/2006/main">
               <a:ext uri="{FF2B5EF4-FFF2-40B4-BE49-F238E27FC236}">
-                <a16:creationId xmlns:a16="http://schemas.microsoft.com/office/drawing/2014/main" id="{BF3953AF-5093-41B2-8930-16BD5DF849C5}"/>
+                <a16:creationId xmlns:a16="http://schemas.microsoft.com/office/drawing/2014/main" id="{B6737BEF-C1A8-4388-B379-CAE33F608528}"/>
               </a:ext>
             </a:extLst>
           </p:cNvPr>
@@ -27932,7 +29124,7 @@
           <p:cNvPr id="2" name="">
             <a:extLst xmlns:a="http://schemas.openxmlformats.org/drawingml/2006/main">
               <a:ext uri="{FF2B5EF4-FFF2-40B4-BE49-F238E27FC236}">
-                <a16:creationId xmlns:a16="http://schemas.microsoft.com/office/drawing/2014/main" id="{B6B1AA06-8D85-4DC2-B03D-58B982DE4136}"/>
+                <a16:creationId xmlns:a16="http://schemas.microsoft.com/office/drawing/2014/main" id="{A4A9357E-FA02-4E9E-9BA1-9CE0FB5D7BB8}"/>
               </a:ext>
             </a:extLst>
           </p:cNvPr>
@@ -28088,7 +29280,7 @@
           <p:cNvPr id="3" name="">
             <a:extLst xmlns:a="http://schemas.openxmlformats.org/drawingml/2006/main">
               <a:ext uri="{FF2B5EF4-FFF2-40B4-BE49-F238E27FC236}">
-                <a16:creationId xmlns:a16="http://schemas.microsoft.com/office/drawing/2014/main" id="{A089657D-9986-4E82-94ED-4EB83979C53D}"/>
+                <a16:creationId xmlns:a16="http://schemas.microsoft.com/office/drawing/2014/main" id="{509C99CC-B63D-4FE3-8DB0-387263C04FD1}"/>
               </a:ext>
             </a:extLst>
           </p:cNvPr>
@@ -29029,7 +30221,7 @@
           <p:cNvPr id="4" name="">
             <a:extLst xmlns:a="http://schemas.openxmlformats.org/drawingml/2006/main">
               <a:ext uri="{FF2B5EF4-FFF2-40B4-BE49-F238E27FC236}">
-                <a16:creationId xmlns:a16="http://schemas.microsoft.com/office/drawing/2014/main" id="{787D5CA4-BC8E-4B1B-8504-90BA184D7BEF}"/>
+                <a16:creationId xmlns:a16="http://schemas.microsoft.com/office/drawing/2014/main" id="{52ED59BE-D1CE-44FC-9A86-7124B72668C7}"/>
               </a:ext>
             </a:extLst>
           </p:cNvPr>
@@ -29183,7 +30375,7 @@
     </p:spTree>
     <p:extLst>
       <p:ext uri="{BB962C8B-B14F-4D97-AF65-F5344CB8AC3E}">
-        <p14:creationId xmlns:p14="http://schemas.microsoft.com/office/powerpoint/2010/main" val="111199747"/>
+        <p14:creationId xmlns:p14="http://schemas.microsoft.com/office/powerpoint/2010/main" val="998706509"/>
       </p:ext>
     </p:extLst>
   </p:cSld>
@@ -29214,7 +30406,7 @@
           <p:cNvPr id="5" name="">
             <a:extLst xmlns:a="http://schemas.openxmlformats.org/drawingml/2006/main">
               <a:ext uri="{FF2B5EF4-FFF2-40B4-BE49-F238E27FC236}">
-                <a16:creationId xmlns:a16="http://schemas.microsoft.com/office/drawing/2014/main" id="{B84165F4-6A18-4E30-B57C-B4A175591D0C}"/>
+                <a16:creationId xmlns:a16="http://schemas.microsoft.com/office/drawing/2014/main" id="{5E76E4FC-90E8-4829-8626-3B6EF14CCBA3}"/>
               </a:ext>
             </a:extLst>
           </p:cNvPr>
@@ -29370,7 +30562,7 @@
           <p:cNvPr id="2" name="">
             <a:extLst xmlns:a="http://schemas.openxmlformats.org/drawingml/2006/main">
               <a:ext uri="{FF2B5EF4-FFF2-40B4-BE49-F238E27FC236}">
-                <a16:creationId xmlns:a16="http://schemas.microsoft.com/office/drawing/2014/main" id="{DBB43BB3-07B2-4324-8893-D70FA5DD3D75}"/>
+                <a16:creationId xmlns:a16="http://schemas.microsoft.com/office/drawing/2014/main" id="{0A16E22F-DFFF-4105-B7EE-2248838AB32E}"/>
               </a:ext>
             </a:extLst>
           </p:cNvPr>
@@ -29526,7 +30718,7 @@
           <p:cNvPr id="3" name="">
             <a:extLst xmlns:a="http://schemas.openxmlformats.org/drawingml/2006/main">
               <a:ext uri="{FF2B5EF4-FFF2-40B4-BE49-F238E27FC236}">
-                <a16:creationId xmlns:a16="http://schemas.microsoft.com/office/drawing/2014/main" id="{88444005-4FC8-4E1A-8B33-FE8595A99C70}"/>
+                <a16:creationId xmlns:a16="http://schemas.microsoft.com/office/drawing/2014/main" id="{655FFD51-14FE-4074-BED7-203F2FAFBC3D}"/>
               </a:ext>
             </a:extLst>
           </p:cNvPr>
@@ -30467,7 +31659,7 @@
           <p:cNvPr id="4" name="">
             <a:extLst xmlns:a="http://schemas.openxmlformats.org/drawingml/2006/main">
               <a:ext uri="{FF2B5EF4-FFF2-40B4-BE49-F238E27FC236}">
-                <a16:creationId xmlns:a16="http://schemas.microsoft.com/office/drawing/2014/main" id="{88B52DD0-4E3D-4923-A491-6198D447E780}"/>
+                <a16:creationId xmlns:a16="http://schemas.microsoft.com/office/drawing/2014/main" id="{54400D89-5CF6-421D-9DC7-B746CF872DD5}"/>
               </a:ext>
             </a:extLst>
           </p:cNvPr>
@@ -30621,7 +31813,7 @@
     </p:spTree>
     <p:extLst>
       <p:ext uri="{BB962C8B-B14F-4D97-AF65-F5344CB8AC3E}">
-        <p14:creationId xmlns:p14="http://schemas.microsoft.com/office/powerpoint/2010/main" val="826993060"/>
+        <p14:creationId xmlns:p14="http://schemas.microsoft.com/office/powerpoint/2010/main" val="1048883238"/>
       </p:ext>
     </p:extLst>
   </p:cSld>

--- a/deliverables/CycleTwin_pitch_deck.pptx
+++ b/deliverables/CycleTwin_pitch_deck.pptx
@@ -2,34 +2,35 @@
 <file path=ppt/presentation.xml><?xml version="1.0" encoding="utf-8"?>
 <p:presentation xmlns:p="http://schemas.openxmlformats.org/presentationml/2006/main">
   <p:sldMasterIdLst>
-    <p:sldMasterId xmlns:r="http://schemas.openxmlformats.org/officeDocument/2006/relationships" id="2147483648" r:id="R7d4b2b306ac1411a"/>
+    <p:sldMasterId xmlns:r="http://schemas.openxmlformats.org/officeDocument/2006/relationships" id="2147483648" r:id="R022bbf2371384e7e"/>
   </p:sldMasterIdLst>
   <p:notesMasterIdLst>
-    <p:notesMasterId xmlns:r="http://schemas.openxmlformats.org/officeDocument/2006/relationships" r:id="R0ee218450be24b36"/>
+    <p:notesMasterId xmlns:r="http://schemas.openxmlformats.org/officeDocument/2006/relationships" r:id="R69bdd9ed61064775"/>
   </p:notesMasterIdLst>
   <p:sldIdLst>
-    <p:sldId xmlns:r="http://schemas.openxmlformats.org/officeDocument/2006/relationships" id="256" r:id="R695bac98c1c0432b"/>
-    <p:sldId xmlns:r="http://schemas.openxmlformats.org/officeDocument/2006/relationships" id="257" r:id="R5394636ab84f4246"/>
-    <p:sldId xmlns:r="http://schemas.openxmlformats.org/officeDocument/2006/relationships" id="258" r:id="R04ef364e87ef44f7"/>
-    <p:sldId xmlns:r="http://schemas.openxmlformats.org/officeDocument/2006/relationships" id="259" r:id="R5bf18a3f164b489e"/>
-    <p:sldId xmlns:r="http://schemas.openxmlformats.org/officeDocument/2006/relationships" id="260" r:id="Rb697f210bd8f407d"/>
-    <p:sldId xmlns:r="http://schemas.openxmlformats.org/officeDocument/2006/relationships" id="261" r:id="R16900cbc94974a91"/>
-    <p:sldId xmlns:r="http://schemas.openxmlformats.org/officeDocument/2006/relationships" id="262" r:id="Ra18051a655084944"/>
-    <p:sldId xmlns:r="http://schemas.openxmlformats.org/officeDocument/2006/relationships" id="263" r:id="Rb9e8da5e47a845da"/>
-    <p:sldId xmlns:r="http://schemas.openxmlformats.org/officeDocument/2006/relationships" id="264" r:id="R1d43e70da42e4e0e"/>
-    <p:sldId xmlns:r="http://schemas.openxmlformats.org/officeDocument/2006/relationships" id="265" r:id="R9239a8b8f1a045a3"/>
-    <p:sldId xmlns:r="http://schemas.openxmlformats.org/officeDocument/2006/relationships" id="266" r:id="R3215a47e987343eb"/>
-    <p:sldId xmlns:r="http://schemas.openxmlformats.org/officeDocument/2006/relationships" id="267" r:id="R7d5f97eeffb3497d"/>
-    <p:sldId xmlns:r="http://schemas.openxmlformats.org/officeDocument/2006/relationships" id="268" r:id="R14d8aa81aecb4323"/>
-    <p:sldId xmlns:r="http://schemas.openxmlformats.org/officeDocument/2006/relationships" id="269" r:id="Rc89f3f7da84443d8"/>
-    <p:sldId xmlns:r="http://schemas.openxmlformats.org/officeDocument/2006/relationships" id="270" r:id="Raff49510f8e64d9e"/>
-    <p:sldId xmlns:r="http://schemas.openxmlformats.org/officeDocument/2006/relationships" id="271" r:id="R013cdb24f7bb4240"/>
-    <p:sldId xmlns:r="http://schemas.openxmlformats.org/officeDocument/2006/relationships" id="272" r:id="Rba1c7dcd4a484e36"/>
-    <p:sldId xmlns:r="http://schemas.openxmlformats.org/officeDocument/2006/relationships" id="273" r:id="Rc48b91dc1b804a70"/>
-    <p:sldId xmlns:r="http://schemas.openxmlformats.org/officeDocument/2006/relationships" id="274" r:id="R2685fb2f203e487a"/>
-    <p:sldId xmlns:r="http://schemas.openxmlformats.org/officeDocument/2006/relationships" id="275" r:id="R8b258c4d71a54700"/>
-    <p:sldId xmlns:r="http://schemas.openxmlformats.org/officeDocument/2006/relationships" id="276" r:id="R56e0419dc89d4e8e"/>
-    <p:sldId xmlns:r="http://schemas.openxmlformats.org/officeDocument/2006/relationships" id="277" r:id="R94f1d922b2a74c34"/>
+    <p:sldId xmlns:r="http://schemas.openxmlformats.org/officeDocument/2006/relationships" id="256" r:id="R9044b8792524431f"/>
+    <p:sldId xmlns:r="http://schemas.openxmlformats.org/officeDocument/2006/relationships" id="257" r:id="R87b50f836a9749d1"/>
+    <p:sldId xmlns:r="http://schemas.openxmlformats.org/officeDocument/2006/relationships" id="258" r:id="R44fc400979f24c00"/>
+    <p:sldId xmlns:r="http://schemas.openxmlformats.org/officeDocument/2006/relationships" id="259" r:id="Ra1dc79ff648748ce"/>
+    <p:sldId xmlns:r="http://schemas.openxmlformats.org/officeDocument/2006/relationships" id="260" r:id="R926be84a63394149"/>
+    <p:sldId xmlns:r="http://schemas.openxmlformats.org/officeDocument/2006/relationships" id="261" r:id="R40a2a074a75b4ff6"/>
+    <p:sldId xmlns:r="http://schemas.openxmlformats.org/officeDocument/2006/relationships" id="262" r:id="R09571bb9cc784086"/>
+    <p:sldId xmlns:r="http://schemas.openxmlformats.org/officeDocument/2006/relationships" id="263" r:id="R9b1356d44c9d4213"/>
+    <p:sldId xmlns:r="http://schemas.openxmlformats.org/officeDocument/2006/relationships" id="264" r:id="Rec72d905882f4021"/>
+    <p:sldId xmlns:r="http://schemas.openxmlformats.org/officeDocument/2006/relationships" id="265" r:id="R2cceeb1bdd3042a1"/>
+    <p:sldId xmlns:r="http://schemas.openxmlformats.org/officeDocument/2006/relationships" id="266" r:id="Rbacbaedb9f5c44db"/>
+    <p:sldId xmlns:r="http://schemas.openxmlformats.org/officeDocument/2006/relationships" id="267" r:id="R2b4fcbff73fb42cf"/>
+    <p:sldId xmlns:r="http://schemas.openxmlformats.org/officeDocument/2006/relationships" id="268" r:id="Rf052578b66484e16"/>
+    <p:sldId xmlns:r="http://schemas.openxmlformats.org/officeDocument/2006/relationships" id="269" r:id="R58ed9433716e474d"/>
+    <p:sldId xmlns:r="http://schemas.openxmlformats.org/officeDocument/2006/relationships" id="270" r:id="R8bdf460511d54db8"/>
+    <p:sldId xmlns:r="http://schemas.openxmlformats.org/officeDocument/2006/relationships" id="271" r:id="R8391c49f328e4cd3"/>
+    <p:sldId xmlns:r="http://schemas.openxmlformats.org/officeDocument/2006/relationships" id="272" r:id="Rcaa028442aba4768"/>
+    <p:sldId xmlns:r="http://schemas.openxmlformats.org/officeDocument/2006/relationships" id="273" r:id="Rc1a62b097bf145dc"/>
+    <p:sldId xmlns:r="http://schemas.openxmlformats.org/officeDocument/2006/relationships" id="274" r:id="R0c8fdf2830d4434c"/>
+    <p:sldId xmlns:r="http://schemas.openxmlformats.org/officeDocument/2006/relationships" id="275" r:id="R470887ba1789465d"/>
+    <p:sldId xmlns:r="http://schemas.openxmlformats.org/officeDocument/2006/relationships" id="276" r:id="R81650def64f44e89"/>
+    <p:sldId xmlns:r="http://schemas.openxmlformats.org/officeDocument/2006/relationships" id="277" r:id="R6d3588739b794464"/>
+    <p:sldId xmlns:r="http://schemas.openxmlformats.org/officeDocument/2006/relationships" id="278" r:id="Rd7244613aa3641f4"/>
   </p:sldIdLst>
   <p:sldSz cx="12192000" cy="6858000"/>
   <p:notesSz cx="6858000" cy="9144000"/>
@@ -1023,7 +1024,7 @@
           <a:lstStyle xmlns:a="http://schemas.openxmlformats.org/drawingml/2006/main"/>
           <a:p xmlns:a="http://schemas.openxmlformats.org/drawingml/2006/main">
             <a:r>
-              <a:t>Source: docs/claims.json, generated by scripts/build_claims.py. All project metrics are synthetic development results. Decision-support research display</a:t>
+              <a:t>Source: docs/claims.json, generated by scripts/build_claims.py. All project metrics are synthetic development results. Post-freeze, noisy simulator proxies; neither clinical labs nor measured hormones</a:t>
             </a:r>
           </a:p>
         </p:txBody>
@@ -1093,7 +1094,7 @@
           <a:lstStyle xmlns:a="http://schemas.openxmlformats.org/drawingml/2006/main"/>
           <a:p xmlns:a="http://schemas.openxmlformats.org/drawingml/2006/main">
             <a:r>
-              <a:t>Source: docs/claims.json, generated by scripts/build_claims.py. All project metrics are synthetic development results. Missing safety information causes abstention</a:t>
+              <a:t>Source: docs/claims.json, generated by scripts/build_claims.py. All project metrics are synthetic development results. Decision-support research display</a:t>
             </a:r>
           </a:p>
         </p:txBody>
@@ -1163,7 +1164,7 @@
           <a:lstStyle xmlns:a="http://schemas.openxmlformats.org/drawingml/2006/main"/>
           <a:p xmlns:a="http://schemas.openxmlformats.org/drawingml/2006/main">
             <a:r>
-              <a:t>Source: docs/claims.json, generated by scripts/build_claims.py. All project metrics are synthetic development results. Clear boundaries around simulated physiology</a:t>
+              <a:t>Source: docs/claims.json, generated by scripts/build_claims.py. All project metrics are synthetic development results. Missing safety information causes abstention</a:t>
             </a:r>
           </a:p>
         </p:txBody>
@@ -1303,7 +1304,7 @@
           <a:lstStyle xmlns:a="http://schemas.openxmlformats.org/drawingml/2006/main"/>
           <a:p xmlns:a="http://schemas.openxmlformats.org/drawingml/2006/main">
             <a:r>
-              <a:t>Source: docs/claims.json, generated by scripts/build_claims.py. All project metrics are synthetic development results. All declared Kushi scenarios remain visible</a:t>
+              <a:t>Source: docs/claims.json, generated by scripts/build_claims.py. All project metrics are synthetic development results. Clear boundaries around simulated physiology</a:t>
             </a:r>
           </a:p>
         </p:txBody>
@@ -1373,6 +1374,76 @@
           <a:lstStyle xmlns:a="http://schemas.openxmlformats.org/drawingml/2006/main"/>
           <a:p xmlns:a="http://schemas.openxmlformats.org/drawingml/2006/main">
             <a:r>
+              <a:t>Source: docs/claims.json, generated by scripts/build_claims.py. All project metrics are synthetic development results. All declared Kushi scenarios remain visible</a:t>
+            </a:r>
+          </a:p>
+        </p:txBody>
+      </p:sp>
+      <p:sp>
+        <p:nvSpPr>
+          <p:cNvPr id="4" name="Slide Number Placeholder 3"/>
+          <p:cNvSpPr>
+            <a:spLocks xmlns:a="http://schemas.openxmlformats.org/drawingml/2006/main" noGrp="1"/>
+          </p:cNvSpPr>
+          <p:nvPr>
+            <p:ph type="sldNum" idx="5"/>
+          </p:nvPr>
+        </p:nvSpPr>
+        <p:spPr/>
+        <p:txBody>
+          <a:bodyPr xmlns:a="http://schemas.openxmlformats.org/drawingml/2006/main"/>
+          <a:lstStyle xmlns:a="http://schemas.openxmlformats.org/drawingml/2006/main"/>
+          <a:p xmlns:a="http://schemas.openxmlformats.org/drawingml/2006/main"/>
+        </p:txBody>
+      </p:sp>
+    </p:spTree>
+  </p:cSld>
+  <p:clrMapOvr>
+    <a:masterClrMapping xmlns:a="http://schemas.openxmlformats.org/drawingml/2006/main"/>
+  </p:clrMapOvr>
+</p:notes>
+</file>
+
+<file path=ppt/notesSlides/notesSlide22.xml><?xml version="1.0" encoding="utf-8"?>
+<p:notes xmlns:p="http://schemas.openxmlformats.org/presentationml/2006/main">
+  <p:cSld>
+    <p:spTree>
+      <p:nvGrpSpPr>
+        <p:cNvPr id="1" name=""/>
+        <p:cNvGrpSpPr/>
+        <p:nvPr/>
+      </p:nvGrpSpPr>
+      <p:grpSpPr>
+        <a:xfrm xmlns:a="http://schemas.openxmlformats.org/drawingml/2006/main"/>
+      </p:grpSpPr>
+      <p:sp>
+        <p:nvSpPr>
+          <p:cNvPr id="2" name="Slide Image Placeholder 1"/>
+          <p:cNvSpPr>
+            <a:spLocks xmlns:a="http://schemas.openxmlformats.org/drawingml/2006/main" noGrp="1"/>
+          </p:cNvSpPr>
+          <p:nvPr>
+            <p:ph type="sldImg" idx="0"/>
+          </p:nvPr>
+        </p:nvSpPr>
+        <p:spPr/>
+      </p:sp>
+      <p:sp>
+        <p:nvSpPr>
+          <p:cNvPr id="3" name="Notes Placeholder 2"/>
+          <p:cNvSpPr>
+            <a:spLocks xmlns:a="http://schemas.openxmlformats.org/drawingml/2006/main" noGrp="1"/>
+          </p:cNvSpPr>
+          <p:nvPr>
+            <p:ph type="body" idx="1"/>
+          </p:nvPr>
+        </p:nvSpPr>
+        <p:spPr/>
+        <p:txBody>
+          <a:bodyPr xmlns:a="http://schemas.openxmlformats.org/drawingml/2006/main"/>
+          <a:lstStyle xmlns:a="http://schemas.openxmlformats.org/drawingml/2006/main"/>
+          <a:p xmlns:a="http://schemas.openxmlformats.org/drawingml/2006/main">
+            <a:r>
               <a:t>Source: docs/claims.json, generated by scripts/build_claims.py. All project metrics are synthetic development results. Synthetic recovery is not prospective evidence in women</a:t>
             </a:r>
           </a:p>
@@ -1403,7 +1474,7 @@
 </p:notes>
 </file>
 
-<file path=ppt/notesSlides/notesSlide22.xml><?xml version="1.0" encoding="utf-8"?>
+<file path=ppt/notesSlides/notesSlide23.xml><?xml version="1.0" encoding="utf-8"?>
 <p:notes xmlns:p="http://schemas.openxmlformats.org/presentationml/2006/main">
   <p:cSld>
     <p:spTree>
@@ -1980,7 +2051,7 @@
           <p:cNvPr id="3" name="Title">
             <a:extLst xmlns:a="http://schemas.openxmlformats.org/drawingml/2006/main">
               <a:ext uri="{FF2B5EF4-FFF2-40B4-BE49-F238E27FC236}">
-                <a16:creationId xmlns:a16="http://schemas.microsoft.com/office/drawing/2014/main" id="{277F06F7-32FE-44DB-8EB9-560596C204E5}"/>
+                <a16:creationId xmlns:a16="http://schemas.microsoft.com/office/drawing/2014/main" id="{97BD19DC-5232-4218-8401-826A2262DC5C}"/>
               </a:ext>
             </a:extLst>
           </p:cNvPr>
@@ -2209,7 +2280,7 @@
           <p:cNvPr id="2" name="Subtitle">
             <a:extLst xmlns:a="http://schemas.openxmlformats.org/drawingml/2006/main">
               <a:ext uri="{FF2B5EF4-FFF2-40B4-BE49-F238E27FC236}">
-                <a16:creationId xmlns:a16="http://schemas.microsoft.com/office/drawing/2014/main" id="{CE9130B4-6C3A-4E4D-811C-86749CF20C26}"/>
+                <a16:creationId xmlns:a16="http://schemas.microsoft.com/office/drawing/2014/main" id="{E02398BD-675A-4F94-9016-130F91138B63}"/>
               </a:ext>
             </a:extLst>
           </p:cNvPr>
@@ -2455,7 +2526,7 @@
           <p:cNvPr id="2" name="Section title">
             <a:extLst xmlns:a="http://schemas.openxmlformats.org/drawingml/2006/main">
               <a:ext uri="{FF2B5EF4-FFF2-40B4-BE49-F238E27FC236}">
-                <a16:creationId xmlns:a16="http://schemas.microsoft.com/office/drawing/2014/main" id="{B8C0A094-9516-4F02-84CE-1F385BB76C52}"/>
+                <a16:creationId xmlns:a16="http://schemas.microsoft.com/office/drawing/2014/main" id="{0DF00755-2FBB-418A-9DA5-B1E2F001B0C6}"/>
               </a:ext>
             </a:extLst>
           </p:cNvPr>
@@ -2701,7 +2772,7 @@
           <p:cNvPr id="3" name="Title">
             <a:extLst xmlns:a="http://schemas.openxmlformats.org/drawingml/2006/main">
               <a:ext uri="{FF2B5EF4-FFF2-40B4-BE49-F238E27FC236}">
-                <a16:creationId xmlns:a16="http://schemas.microsoft.com/office/drawing/2014/main" id="{AD002F4D-C3A4-4858-9E20-CE351157AC69}"/>
+                <a16:creationId xmlns:a16="http://schemas.microsoft.com/office/drawing/2014/main" id="{D711EF7B-1CC2-4ECC-BD24-1D0B261881D1}"/>
               </a:ext>
             </a:extLst>
           </p:cNvPr>
@@ -2930,7 +3001,7 @@
           <p:cNvPr id="2" name="Body">
             <a:extLst xmlns:a="http://schemas.openxmlformats.org/drawingml/2006/main">
               <a:ext uri="{FF2B5EF4-FFF2-40B4-BE49-F238E27FC236}">
-                <a16:creationId xmlns:a16="http://schemas.microsoft.com/office/drawing/2014/main" id="{0E5EBCEE-4E2F-49F4-B9D9-E7021809EF55}"/>
+                <a16:creationId xmlns:a16="http://schemas.microsoft.com/office/drawing/2014/main" id="{1DA8B94D-6DE5-4A38-A328-66E22323C8E4}"/>
               </a:ext>
             </a:extLst>
           </p:cNvPr>
@@ -3176,7 +3247,7 @@
           <p:cNvPr id="4" name="Title">
             <a:extLst xmlns:a="http://schemas.openxmlformats.org/drawingml/2006/main">
               <a:ext uri="{FF2B5EF4-FFF2-40B4-BE49-F238E27FC236}">
-                <a16:creationId xmlns:a16="http://schemas.microsoft.com/office/drawing/2014/main" id="{0DB45550-1C0C-4A4F-84D8-C18C6A72ECAB}"/>
+                <a16:creationId xmlns:a16="http://schemas.microsoft.com/office/drawing/2014/main" id="{BDBA444A-D8CA-43B8-BF79-6139E0EA2986}"/>
               </a:ext>
             </a:extLst>
           </p:cNvPr>
@@ -3405,7 +3476,7 @@
           <p:cNvPr id="2" name="Left column">
             <a:extLst xmlns:a="http://schemas.openxmlformats.org/drawingml/2006/main">
               <a:ext uri="{FF2B5EF4-FFF2-40B4-BE49-F238E27FC236}">
-                <a16:creationId xmlns:a16="http://schemas.microsoft.com/office/drawing/2014/main" id="{A73D95C7-8DE8-4B9C-8AE4-5213287311F8}"/>
+                <a16:creationId xmlns:a16="http://schemas.microsoft.com/office/drawing/2014/main" id="{2057A942-84CC-4DE6-9FC0-4B198D8B0718}"/>
               </a:ext>
             </a:extLst>
           </p:cNvPr>
@@ -3634,7 +3705,7 @@
           <p:cNvPr id="3" name="Right column">
             <a:extLst xmlns:a="http://schemas.openxmlformats.org/drawingml/2006/main">
               <a:ext uri="{FF2B5EF4-FFF2-40B4-BE49-F238E27FC236}">
-                <a16:creationId xmlns:a16="http://schemas.microsoft.com/office/drawing/2014/main" id="{BD6EBFD3-EECE-4A8D-9786-7B5BEB87FCC1}"/>
+                <a16:creationId xmlns:a16="http://schemas.microsoft.com/office/drawing/2014/main" id="{704F7A0E-7718-4140-A2D8-D5BAE304A110}"/>
               </a:ext>
             </a:extLst>
           </p:cNvPr>
@@ -3880,7 +3951,7 @@
           <p:cNvPr id="3" name="Title">
             <a:extLst xmlns:a="http://schemas.openxmlformats.org/drawingml/2006/main">
               <a:ext uri="{FF2B5EF4-FFF2-40B4-BE49-F238E27FC236}">
-                <a16:creationId xmlns:a16="http://schemas.microsoft.com/office/drawing/2014/main" id="{2F49C918-9E93-4B90-BE6D-A7392972BB3B}"/>
+                <a16:creationId xmlns:a16="http://schemas.microsoft.com/office/drawing/2014/main" id="{7F644A14-5F5B-4D79-A639-5B9F7CFB56D1}"/>
               </a:ext>
             </a:extLst>
           </p:cNvPr>
@@ -4109,7 +4180,7 @@
           <p:cNvPr id="2" name="Left column">
             <a:extLst xmlns:a="http://schemas.openxmlformats.org/drawingml/2006/main">
               <a:ext uri="{FF2B5EF4-FFF2-40B4-BE49-F238E27FC236}">
-                <a16:creationId xmlns:a16="http://schemas.microsoft.com/office/drawing/2014/main" id="{A672C0EA-50BE-449A-92CD-10BB28EC64BF}"/>
+                <a16:creationId xmlns:a16="http://schemas.microsoft.com/office/drawing/2014/main" id="{9435EEBC-3B0C-47EF-B3F8-9623E64FBECD}"/>
               </a:ext>
             </a:extLst>
           </p:cNvPr>
@@ -4376,12 +4447,12 @@
   </p:cSld>
   <p:clrMap bg1="lt1" tx1="dk1" bg2="lt2" tx2="dk2" accent1="accent1" accent2="accent2" accent3="accent3" accent4="accent4" accent5="accent5" accent6="accent6" hlink="hlink" folHlink="folHlink"/>
   <p:sldLayoutIdLst>
-    <p:sldLayoutId xmlns:r="http://schemas.openxmlformats.org/officeDocument/2006/relationships" id="2147483649" r:id="R9dcda54b3e604ce0"/>
-    <p:sldLayoutId xmlns:r="http://schemas.openxmlformats.org/officeDocument/2006/relationships" id="2147483650" r:id="Rc579450d0d7d4c38"/>
-    <p:sldLayoutId xmlns:r="http://schemas.openxmlformats.org/officeDocument/2006/relationships" id="2147483651" r:id="R0c64d66b480b4f70"/>
-    <p:sldLayoutId xmlns:r="http://schemas.openxmlformats.org/officeDocument/2006/relationships" id="2147483652" r:id="R80db90f79d9c4bed"/>
-    <p:sldLayoutId xmlns:r="http://schemas.openxmlformats.org/officeDocument/2006/relationships" id="2147483653" r:id="Ra6a3bc7ef01445db"/>
-    <p:sldLayoutId xmlns:r="http://schemas.openxmlformats.org/officeDocument/2006/relationships" id="2147483654" r:id="Ref4cb8964aba4b58"/>
+    <p:sldLayoutId xmlns:r="http://schemas.openxmlformats.org/officeDocument/2006/relationships" id="2147483649" r:id="R311d30ab41754ffc"/>
+    <p:sldLayoutId xmlns:r="http://schemas.openxmlformats.org/officeDocument/2006/relationships" id="2147483650" r:id="Rfdd47719d29942b8"/>
+    <p:sldLayoutId xmlns:r="http://schemas.openxmlformats.org/officeDocument/2006/relationships" id="2147483651" r:id="Rdc09e317ae434436"/>
+    <p:sldLayoutId xmlns:r="http://schemas.openxmlformats.org/officeDocument/2006/relationships" id="2147483652" r:id="Rd9471f505f4f434b"/>
+    <p:sldLayoutId xmlns:r="http://schemas.openxmlformats.org/officeDocument/2006/relationships" id="2147483653" r:id="Rea2f2bcd31fc477c"/>
+    <p:sldLayoutId xmlns:r="http://schemas.openxmlformats.org/officeDocument/2006/relationships" id="2147483654" r:id="R43d80cd5741e4877"/>
   </p:sldLayoutIdLst>
   <p:txStyles>
     <p:titleStyle>
@@ -4932,7 +5003,7 @@
           <p:cNvPr id="7" name="">
             <a:extLst xmlns:a="http://schemas.openxmlformats.org/drawingml/2006/main">
               <a:ext uri="{FF2B5EF4-FFF2-40B4-BE49-F238E27FC236}">
-                <a16:creationId xmlns:a16="http://schemas.microsoft.com/office/drawing/2014/main" id="{05BF2B04-30BA-441B-A906-6E3282F574EC}"/>
+                <a16:creationId xmlns:a16="http://schemas.microsoft.com/office/drawing/2014/main" id="{26473A48-8334-466D-ADD9-ADB9E4E5642D}"/>
               </a:ext>
             </a:extLst>
           </p:cNvPr>
@@ -5088,7 +5159,7 @@
           <p:cNvPr id="2" name="">
             <a:extLst xmlns:a="http://schemas.openxmlformats.org/drawingml/2006/main">
               <a:ext uri="{FF2B5EF4-FFF2-40B4-BE49-F238E27FC236}">
-                <a16:creationId xmlns:a16="http://schemas.microsoft.com/office/drawing/2014/main" id="{125A2B1C-3A43-4803-ABC1-97213523A173}"/>
+                <a16:creationId xmlns:a16="http://schemas.microsoft.com/office/drawing/2014/main" id="{A40D0977-5089-4DB7-A698-1018335E5FD6}"/>
               </a:ext>
             </a:extLst>
           </p:cNvPr>
@@ -5244,7 +5315,7 @@
           <p:cNvPr id="3" name="">
             <a:extLst xmlns:a="http://schemas.openxmlformats.org/drawingml/2006/main">
               <a:ext uri="{FF2B5EF4-FFF2-40B4-BE49-F238E27FC236}">
-                <a16:creationId xmlns:a16="http://schemas.microsoft.com/office/drawing/2014/main" id="{77B36349-801F-48D8-AF92-5129D8F7D903}"/>
+                <a16:creationId xmlns:a16="http://schemas.microsoft.com/office/drawing/2014/main" id="{A8270AB2-4E37-4890-A566-FA318B337385}"/>
               </a:ext>
             </a:extLst>
           </p:cNvPr>
@@ -5400,7 +5471,7 @@
           <p:cNvPr id="4" name="">
             <a:extLst xmlns:a="http://schemas.openxmlformats.org/drawingml/2006/main">
               <a:ext uri="{FF2B5EF4-FFF2-40B4-BE49-F238E27FC236}">
-                <a16:creationId xmlns:a16="http://schemas.microsoft.com/office/drawing/2014/main" id="{0B131C46-E34F-48B3-B05B-3D6F461D6F99}"/>
+                <a16:creationId xmlns:a16="http://schemas.microsoft.com/office/drawing/2014/main" id="{8CFB877D-2040-463E-8C02-2F5D315EA152}"/>
               </a:ext>
             </a:extLst>
           </p:cNvPr>
@@ -5556,7 +5627,7 @@
           <p:cNvPr id="5" name="">
             <a:extLst xmlns:a="http://schemas.openxmlformats.org/drawingml/2006/main">
               <a:ext uri="{FF2B5EF4-FFF2-40B4-BE49-F238E27FC236}">
-                <a16:creationId xmlns:a16="http://schemas.microsoft.com/office/drawing/2014/main" id="{1D6855DD-6DBA-4AE3-96E2-7589462E67B8}"/>
+                <a16:creationId xmlns:a16="http://schemas.microsoft.com/office/drawing/2014/main" id="{74A3729A-7FA2-4956-8AF5-DD919F8BDFB9}"/>
               </a:ext>
             </a:extLst>
           </p:cNvPr>
@@ -5712,7 +5783,7 @@
           <p:cNvPr id="6" name="">
             <a:extLst xmlns:a="http://schemas.openxmlformats.org/drawingml/2006/main">
               <a:ext uri="{FF2B5EF4-FFF2-40B4-BE49-F238E27FC236}">
-                <a16:creationId xmlns:a16="http://schemas.microsoft.com/office/drawing/2014/main" id="{45AC38DF-C4E5-4628-92FE-B00C0C9F59A2}"/>
+                <a16:creationId xmlns:a16="http://schemas.microsoft.com/office/drawing/2014/main" id="{A2383141-6AE3-42A3-9F48-8E03D5205A8A}"/>
               </a:ext>
             </a:extLst>
           </p:cNvPr>
@@ -5866,7 +5937,7 @@
     </p:spTree>
     <p:extLst>
       <p:ext uri="{BB962C8B-B14F-4D97-AF65-F5344CB8AC3E}">
-        <p14:creationId xmlns:p14="http://schemas.microsoft.com/office/powerpoint/2010/main" val="1445464003"/>
+        <p14:creationId xmlns:p14="http://schemas.microsoft.com/office/powerpoint/2010/main" val="192811216"/>
       </p:ext>
     </p:extLst>
   </p:cSld>
@@ -5897,7 +5968,7 @@
           <p:cNvPr id="5" name="">
             <a:extLst xmlns:a="http://schemas.openxmlformats.org/drawingml/2006/main">
               <a:ext uri="{FF2B5EF4-FFF2-40B4-BE49-F238E27FC236}">
-                <a16:creationId xmlns:a16="http://schemas.microsoft.com/office/drawing/2014/main" id="{E6A878E9-D170-4A8D-AD07-446C85BB312D}"/>
+                <a16:creationId xmlns:a16="http://schemas.microsoft.com/office/drawing/2014/main" id="{BD4896D0-CEEA-430C-B563-672084DFC6A1}"/>
               </a:ext>
             </a:extLst>
           </p:cNvPr>
@@ -6053,7 +6124,7 @@
           <p:cNvPr id="2" name="">
             <a:extLst xmlns:a="http://schemas.openxmlformats.org/drawingml/2006/main">
               <a:ext uri="{FF2B5EF4-FFF2-40B4-BE49-F238E27FC236}">
-                <a16:creationId xmlns:a16="http://schemas.microsoft.com/office/drawing/2014/main" id="{6B9FC808-5E48-41BF-8303-CFEDB814B057}"/>
+                <a16:creationId xmlns:a16="http://schemas.microsoft.com/office/drawing/2014/main" id="{CE178817-1690-4B10-AEFE-A64F4180517D}"/>
               </a:ext>
             </a:extLst>
           </p:cNvPr>
@@ -6209,7 +6280,7 @@
           <p:cNvPr id="3" name="">
             <a:extLst xmlns:a="http://schemas.openxmlformats.org/drawingml/2006/main">
               <a:ext uri="{FF2B5EF4-FFF2-40B4-BE49-F238E27FC236}">
-                <a16:creationId xmlns:a16="http://schemas.microsoft.com/office/drawing/2014/main" id="{F42B9613-3AD8-471B-B07F-30A158CD412F}"/>
+                <a16:creationId xmlns:a16="http://schemas.microsoft.com/office/drawing/2014/main" id="{D21A9A9A-58CA-4738-AEB6-439AC28FDA64}"/>
               </a:ext>
             </a:extLst>
           </p:cNvPr>
@@ -7150,7 +7221,7 @@
           <p:cNvPr id="4" name="">
             <a:extLst xmlns:a="http://schemas.openxmlformats.org/drawingml/2006/main">
               <a:ext uri="{FF2B5EF4-FFF2-40B4-BE49-F238E27FC236}">
-                <a16:creationId xmlns:a16="http://schemas.microsoft.com/office/drawing/2014/main" id="{9B8CAB5E-C02C-4CD9-9C3C-155B5051014D}"/>
+                <a16:creationId xmlns:a16="http://schemas.microsoft.com/office/drawing/2014/main" id="{2FF2674E-B8D0-4C2C-906C-1AC97F3E95DC}"/>
               </a:ext>
             </a:extLst>
           </p:cNvPr>
@@ -7304,7 +7375,7 @@
     </p:spTree>
     <p:extLst>
       <p:ext uri="{BB962C8B-B14F-4D97-AF65-F5344CB8AC3E}">
-        <p14:creationId xmlns:p14="http://schemas.microsoft.com/office/powerpoint/2010/main" val="768176721"/>
+        <p14:creationId xmlns:p14="http://schemas.microsoft.com/office/powerpoint/2010/main" val="2123916718"/>
       </p:ext>
     </p:extLst>
   </p:cSld>
@@ -7335,7 +7406,7 @@
           <p:cNvPr id="5" name="">
             <a:extLst xmlns:a="http://schemas.openxmlformats.org/drawingml/2006/main">
               <a:ext uri="{FF2B5EF4-FFF2-40B4-BE49-F238E27FC236}">
-                <a16:creationId xmlns:a16="http://schemas.microsoft.com/office/drawing/2014/main" id="{501E2011-F41D-4F61-9B2B-282D1AC77017}"/>
+                <a16:creationId xmlns:a16="http://schemas.microsoft.com/office/drawing/2014/main" id="{F8FA9CEF-6D75-4E42-8FB8-D361B4A1E1BF}"/>
               </a:ext>
             </a:extLst>
           </p:cNvPr>
@@ -7491,7 +7562,7 @@
           <p:cNvPr id="2" name="">
             <a:extLst xmlns:a="http://schemas.openxmlformats.org/drawingml/2006/main">
               <a:ext uri="{FF2B5EF4-FFF2-40B4-BE49-F238E27FC236}">
-                <a16:creationId xmlns:a16="http://schemas.microsoft.com/office/drawing/2014/main" id="{AEAFC7B6-BAF7-4328-AAD6-1F0D9DE76EF7}"/>
+                <a16:creationId xmlns:a16="http://schemas.microsoft.com/office/drawing/2014/main" id="{5774E13F-B8D3-4D96-9AE2-2497530FF63A}"/>
               </a:ext>
             </a:extLst>
           </p:cNvPr>
@@ -7647,7 +7718,7 @@
           <p:cNvPr id="3" name="">
             <a:extLst xmlns:a="http://schemas.openxmlformats.org/drawingml/2006/main">
               <a:ext uri="{FF2B5EF4-FFF2-40B4-BE49-F238E27FC236}">
-                <a16:creationId xmlns:a16="http://schemas.microsoft.com/office/drawing/2014/main" id="{E57E8000-C7B8-4B0D-A1B0-5BFA38BA927E}"/>
+                <a16:creationId xmlns:a16="http://schemas.microsoft.com/office/drawing/2014/main" id="{9D5DFC84-907C-4298-AE70-995787408F61}"/>
               </a:ext>
             </a:extLst>
           </p:cNvPr>
@@ -8588,7 +8659,7 @@
           <p:cNvPr id="4" name="">
             <a:extLst xmlns:a="http://schemas.openxmlformats.org/drawingml/2006/main">
               <a:ext uri="{FF2B5EF4-FFF2-40B4-BE49-F238E27FC236}">
-                <a16:creationId xmlns:a16="http://schemas.microsoft.com/office/drawing/2014/main" id="{39FAD04B-A774-422F-8C71-396D46DAC2BA}"/>
+                <a16:creationId xmlns:a16="http://schemas.microsoft.com/office/drawing/2014/main" id="{EABD27A4-E043-488F-861F-76C1E07F4EDD}"/>
               </a:ext>
             </a:extLst>
           </p:cNvPr>
@@ -8742,7 +8813,7 @@
     </p:spTree>
     <p:extLst>
       <p:ext uri="{BB962C8B-B14F-4D97-AF65-F5344CB8AC3E}">
-        <p14:creationId xmlns:p14="http://schemas.microsoft.com/office/powerpoint/2010/main" val="1859484666"/>
+        <p14:creationId xmlns:p14="http://schemas.microsoft.com/office/powerpoint/2010/main" val="1184063966"/>
       </p:ext>
     </p:extLst>
   </p:cSld>
@@ -8773,7 +8844,7 @@
           <p:cNvPr id="5" name="">
             <a:extLst xmlns:a="http://schemas.openxmlformats.org/drawingml/2006/main">
               <a:ext uri="{FF2B5EF4-FFF2-40B4-BE49-F238E27FC236}">
-                <a16:creationId xmlns:a16="http://schemas.microsoft.com/office/drawing/2014/main" id="{ABEDAA76-FE6E-450C-873B-DA0E3DC90881}"/>
+                <a16:creationId xmlns:a16="http://schemas.microsoft.com/office/drawing/2014/main" id="{3EE43271-778A-47A0-A6F8-3ADAD2679E64}"/>
               </a:ext>
             </a:extLst>
           </p:cNvPr>
@@ -8929,7 +9000,7 @@
           <p:cNvPr id="2" name="">
             <a:extLst xmlns:a="http://schemas.openxmlformats.org/drawingml/2006/main">
               <a:ext uri="{FF2B5EF4-FFF2-40B4-BE49-F238E27FC236}">
-                <a16:creationId xmlns:a16="http://schemas.microsoft.com/office/drawing/2014/main" id="{FAA60F88-B236-4C3A-93FC-C4B943F3758F}"/>
+                <a16:creationId xmlns:a16="http://schemas.microsoft.com/office/drawing/2014/main" id="{A716D2B1-CBDF-450A-8796-8E9D039622A5}"/>
               </a:ext>
             </a:extLst>
           </p:cNvPr>
@@ -9085,7 +9156,7 @@
           <p:cNvPr id="3" name="">
             <a:extLst xmlns:a="http://schemas.openxmlformats.org/drawingml/2006/main">
               <a:ext uri="{FF2B5EF4-FFF2-40B4-BE49-F238E27FC236}">
-                <a16:creationId xmlns:a16="http://schemas.microsoft.com/office/drawing/2014/main" id="{C90957BB-2C88-4F08-A9DB-381A0E69CC43}"/>
+                <a16:creationId xmlns:a16="http://schemas.microsoft.com/office/drawing/2014/main" id="{54F5BF5F-7784-43B4-976F-4E82D5F1F8DF}"/>
               </a:ext>
             </a:extLst>
           </p:cNvPr>
@@ -10026,7 +10097,7 @@
           <p:cNvPr id="4" name="">
             <a:extLst xmlns:a="http://schemas.openxmlformats.org/drawingml/2006/main">
               <a:ext uri="{FF2B5EF4-FFF2-40B4-BE49-F238E27FC236}">
-                <a16:creationId xmlns:a16="http://schemas.microsoft.com/office/drawing/2014/main" id="{01E6526E-0B66-4D16-9B0B-8BB19E42C95B}"/>
+                <a16:creationId xmlns:a16="http://schemas.microsoft.com/office/drawing/2014/main" id="{1B25562C-579F-4080-B0C7-E4FDA75305F2}"/>
               </a:ext>
             </a:extLst>
           </p:cNvPr>
@@ -10180,7 +10251,7 @@
     </p:spTree>
     <p:extLst>
       <p:ext uri="{BB962C8B-B14F-4D97-AF65-F5344CB8AC3E}">
-        <p14:creationId xmlns:p14="http://schemas.microsoft.com/office/powerpoint/2010/main" val="1225438483"/>
+        <p14:creationId xmlns:p14="http://schemas.microsoft.com/office/powerpoint/2010/main" val="1302439402"/>
       </p:ext>
     </p:extLst>
   </p:cSld>
@@ -10211,7 +10282,7 @@
           <p:cNvPr id="8" name="">
             <a:extLst xmlns:a="http://schemas.openxmlformats.org/drawingml/2006/main">
               <a:ext uri="{FF2B5EF4-FFF2-40B4-BE49-F238E27FC236}">
-                <a16:creationId xmlns:a16="http://schemas.microsoft.com/office/drawing/2014/main" id="{1C75CCA5-6C5F-4BED-8797-A2A298FC459D}"/>
+                <a16:creationId xmlns:a16="http://schemas.microsoft.com/office/drawing/2014/main" id="{36DF5B0B-4896-4E94-9C11-7FA62ED197D7}"/>
               </a:ext>
             </a:extLst>
           </p:cNvPr>
@@ -10367,7 +10438,7 @@
           <p:cNvPr id="2" name="">
             <a:extLst xmlns:a="http://schemas.openxmlformats.org/drawingml/2006/main">
               <a:ext uri="{FF2B5EF4-FFF2-40B4-BE49-F238E27FC236}">
-                <a16:creationId xmlns:a16="http://schemas.microsoft.com/office/drawing/2014/main" id="{B535E6A8-CB51-4DA6-A173-05E9E21ABE7C}"/>
+                <a16:creationId xmlns:a16="http://schemas.microsoft.com/office/drawing/2014/main" id="{2F934D38-3DCE-4E56-A09E-BD4EB90A6107}"/>
               </a:ext>
             </a:extLst>
           </p:cNvPr>
@@ -10523,7 +10594,7 @@
           <p:cNvPr id="3" name="">
             <a:extLst xmlns:a="http://schemas.openxmlformats.org/drawingml/2006/main">
               <a:ext uri="{FF2B5EF4-FFF2-40B4-BE49-F238E27FC236}">
-                <a16:creationId xmlns:a16="http://schemas.microsoft.com/office/drawing/2014/main" id="{4CC80600-4105-4467-A345-ED914C5CB3C9}"/>
+                <a16:creationId xmlns:a16="http://schemas.microsoft.com/office/drawing/2014/main" id="{56164660-1FBD-4993-A525-C3CE1F640FA8}"/>
               </a:ext>
             </a:extLst>
           </p:cNvPr>
@@ -10679,7 +10750,7 @@
           <p:cNvPr id="4" name="">
             <a:extLst xmlns:a="http://schemas.openxmlformats.org/drawingml/2006/main">
               <a:ext uri="{FF2B5EF4-FFF2-40B4-BE49-F238E27FC236}">
-                <a16:creationId xmlns:a16="http://schemas.microsoft.com/office/drawing/2014/main" id="{62C3815A-5A92-4BD6-A3C5-BE2161D01D41}"/>
+                <a16:creationId xmlns:a16="http://schemas.microsoft.com/office/drawing/2014/main" id="{FE2A83DD-DAAE-4F50-95B2-307414461104}"/>
               </a:ext>
             </a:extLst>
           </p:cNvPr>
@@ -10835,7 +10906,7 @@
           <p:cNvPr id="5" name="">
             <a:extLst xmlns:a="http://schemas.openxmlformats.org/drawingml/2006/main">
               <a:ext uri="{FF2B5EF4-FFF2-40B4-BE49-F238E27FC236}">
-                <a16:creationId xmlns:a16="http://schemas.microsoft.com/office/drawing/2014/main" id="{15478F83-B360-4875-A7B4-01063756995D}"/>
+                <a16:creationId xmlns:a16="http://schemas.microsoft.com/office/drawing/2014/main" id="{516D97C7-E700-4ADF-8D6D-0DBCFD8A53E1}"/>
               </a:ext>
             </a:extLst>
           </p:cNvPr>
@@ -10991,7 +11062,7 @@
           <p:cNvPr id="6" name="">
             <a:extLst xmlns:a="http://schemas.openxmlformats.org/drawingml/2006/main">
               <a:ext uri="{FF2B5EF4-FFF2-40B4-BE49-F238E27FC236}">
-                <a16:creationId xmlns:a16="http://schemas.microsoft.com/office/drawing/2014/main" id="{1A1BF974-125D-4AAD-AF5E-D7DAE24C700F}"/>
+                <a16:creationId xmlns:a16="http://schemas.microsoft.com/office/drawing/2014/main" id="{A1DCD20D-C602-425F-ADA6-455F1FC52441}"/>
               </a:ext>
             </a:extLst>
           </p:cNvPr>
@@ -11147,7 +11218,7 @@
           <p:cNvPr id="7" name="">
             <a:extLst xmlns:a="http://schemas.openxmlformats.org/drawingml/2006/main">
               <a:ext uri="{FF2B5EF4-FFF2-40B4-BE49-F238E27FC236}">
-                <a16:creationId xmlns:a16="http://schemas.microsoft.com/office/drawing/2014/main" id="{C881710A-06EF-489A-AD64-3CFA2AF1F3DE}"/>
+                <a16:creationId xmlns:a16="http://schemas.microsoft.com/office/drawing/2014/main" id="{AA106C60-3F03-42B8-8C7F-C79F87C480F2}"/>
               </a:ext>
             </a:extLst>
           </p:cNvPr>
@@ -11301,7 +11372,7 @@
     </p:spTree>
     <p:extLst>
       <p:ext uri="{BB962C8B-B14F-4D97-AF65-F5344CB8AC3E}">
-        <p14:creationId xmlns:p14="http://schemas.microsoft.com/office/powerpoint/2010/main" val="750060054"/>
+        <p14:creationId xmlns:p14="http://schemas.microsoft.com/office/powerpoint/2010/main" val="338080318"/>
       </p:ext>
     </p:extLst>
   </p:cSld>
@@ -11332,7 +11403,7 @@
           <p:cNvPr id="8" name="">
             <a:extLst xmlns:a="http://schemas.openxmlformats.org/drawingml/2006/main">
               <a:ext uri="{FF2B5EF4-FFF2-40B4-BE49-F238E27FC236}">
-                <a16:creationId xmlns:a16="http://schemas.microsoft.com/office/drawing/2014/main" id="{33E1AC63-367D-4992-9E41-71E5500B2E46}"/>
+                <a16:creationId xmlns:a16="http://schemas.microsoft.com/office/drawing/2014/main" id="{67B30375-E040-401C-B5A4-BDAC0A8BA4B7}"/>
               </a:ext>
             </a:extLst>
           </p:cNvPr>
@@ -11488,7 +11559,7 @@
           <p:cNvPr id="2" name="">
             <a:extLst xmlns:a="http://schemas.openxmlformats.org/drawingml/2006/main">
               <a:ext uri="{FF2B5EF4-FFF2-40B4-BE49-F238E27FC236}">
-                <a16:creationId xmlns:a16="http://schemas.microsoft.com/office/drawing/2014/main" id="{0CF7381E-17DB-4F4A-8274-5432CCAC31CA}"/>
+                <a16:creationId xmlns:a16="http://schemas.microsoft.com/office/drawing/2014/main" id="{909AEC6B-3D06-4E9A-A6C1-4975D8045CC3}"/>
               </a:ext>
             </a:extLst>
           </p:cNvPr>
@@ -11644,7 +11715,7 @@
           <p:cNvPr id="3" name="">
             <a:extLst xmlns:a="http://schemas.openxmlformats.org/drawingml/2006/main">
               <a:ext uri="{FF2B5EF4-FFF2-40B4-BE49-F238E27FC236}">
-                <a16:creationId xmlns:a16="http://schemas.microsoft.com/office/drawing/2014/main" id="{FB33B667-CE48-4D43-9A1E-FC3C61434C92}"/>
+                <a16:creationId xmlns:a16="http://schemas.microsoft.com/office/drawing/2014/main" id="{09B1C61B-E1A1-4C56-BD9E-87B171F960E3}"/>
               </a:ext>
             </a:extLst>
           </p:cNvPr>
@@ -11800,7 +11871,7 @@
           <p:cNvPr id="4" name="">
             <a:extLst xmlns:a="http://schemas.openxmlformats.org/drawingml/2006/main">
               <a:ext uri="{FF2B5EF4-FFF2-40B4-BE49-F238E27FC236}">
-                <a16:creationId xmlns:a16="http://schemas.microsoft.com/office/drawing/2014/main" id="{67C47894-209D-49A3-9D15-1D627072EB0B}"/>
+                <a16:creationId xmlns:a16="http://schemas.microsoft.com/office/drawing/2014/main" id="{BFCAC42A-4D39-4059-93EB-E2F37C1FB2D5}"/>
               </a:ext>
             </a:extLst>
           </p:cNvPr>
@@ -11956,7 +12027,7 @@
           <p:cNvPr id="5" name="">
             <a:extLst xmlns:a="http://schemas.openxmlformats.org/drawingml/2006/main">
               <a:ext uri="{FF2B5EF4-FFF2-40B4-BE49-F238E27FC236}">
-                <a16:creationId xmlns:a16="http://schemas.microsoft.com/office/drawing/2014/main" id="{93B2CA45-B07A-448D-9B22-9E7E18E933A6}"/>
+                <a16:creationId xmlns:a16="http://schemas.microsoft.com/office/drawing/2014/main" id="{9C40CA21-60F9-4142-8A62-9D91FE261741}"/>
               </a:ext>
             </a:extLst>
           </p:cNvPr>
@@ -12112,7 +12183,7 @@
           <p:cNvPr id="6" name="">
             <a:extLst xmlns:a="http://schemas.openxmlformats.org/drawingml/2006/main">
               <a:ext uri="{FF2B5EF4-FFF2-40B4-BE49-F238E27FC236}">
-                <a16:creationId xmlns:a16="http://schemas.microsoft.com/office/drawing/2014/main" id="{E680441B-8A88-46F6-ABC0-7EDCA5FAF4B0}"/>
+                <a16:creationId xmlns:a16="http://schemas.microsoft.com/office/drawing/2014/main" id="{47B8921E-1C47-4E4B-B5BD-57B196D36021}"/>
               </a:ext>
             </a:extLst>
           </p:cNvPr>
@@ -12268,7 +12339,7 @@
           <p:cNvPr id="7" name="">
             <a:extLst xmlns:a="http://schemas.openxmlformats.org/drawingml/2006/main">
               <a:ext uri="{FF2B5EF4-FFF2-40B4-BE49-F238E27FC236}">
-                <a16:creationId xmlns:a16="http://schemas.microsoft.com/office/drawing/2014/main" id="{0969FAC9-6F53-4653-B7D9-F02D562B18D6}"/>
+                <a16:creationId xmlns:a16="http://schemas.microsoft.com/office/drawing/2014/main" id="{93818CA3-9194-4148-812B-99FC4E983A4D}"/>
               </a:ext>
             </a:extLst>
           </p:cNvPr>
@@ -12422,7 +12493,7 @@
     </p:spTree>
     <p:extLst>
       <p:ext uri="{BB962C8B-B14F-4D97-AF65-F5344CB8AC3E}">
-        <p14:creationId xmlns:p14="http://schemas.microsoft.com/office/powerpoint/2010/main" val="2056917565"/>
+        <p14:creationId xmlns:p14="http://schemas.microsoft.com/office/powerpoint/2010/main" val="158435233"/>
       </p:ext>
     </p:extLst>
   </p:cSld>
@@ -12453,7 +12524,7 @@
           <p:cNvPr id="8" name="">
             <a:extLst xmlns:a="http://schemas.openxmlformats.org/drawingml/2006/main">
               <a:ext uri="{FF2B5EF4-FFF2-40B4-BE49-F238E27FC236}">
-                <a16:creationId xmlns:a16="http://schemas.microsoft.com/office/drawing/2014/main" id="{25FBF4B5-3148-4B30-8645-63FC19E12DBA}"/>
+                <a16:creationId xmlns:a16="http://schemas.microsoft.com/office/drawing/2014/main" id="{F7403624-50DF-43F9-A1A7-496B5507D59A}"/>
               </a:ext>
             </a:extLst>
           </p:cNvPr>
@@ -12609,7 +12680,7 @@
           <p:cNvPr id="2" name="">
             <a:extLst xmlns:a="http://schemas.openxmlformats.org/drawingml/2006/main">
               <a:ext uri="{FF2B5EF4-FFF2-40B4-BE49-F238E27FC236}">
-                <a16:creationId xmlns:a16="http://schemas.microsoft.com/office/drawing/2014/main" id="{5AD29735-459F-423E-9616-9118095E1DC6}"/>
+                <a16:creationId xmlns:a16="http://schemas.microsoft.com/office/drawing/2014/main" id="{011D15E2-B2B0-46F9-81E1-936CCB29501C}"/>
               </a:ext>
             </a:extLst>
           </p:cNvPr>
@@ -12765,7 +12836,7 @@
           <p:cNvPr id="3" name="">
             <a:extLst xmlns:a="http://schemas.openxmlformats.org/drawingml/2006/main">
               <a:ext uri="{FF2B5EF4-FFF2-40B4-BE49-F238E27FC236}">
-                <a16:creationId xmlns:a16="http://schemas.microsoft.com/office/drawing/2014/main" id="{01B7AB17-DDB0-4FA6-9890-A1F10B34D50D}"/>
+                <a16:creationId xmlns:a16="http://schemas.microsoft.com/office/drawing/2014/main" id="{52EEC423-F5DC-453A-9DFC-34047874C898}"/>
               </a:ext>
             </a:extLst>
           </p:cNvPr>
@@ -12921,7 +12992,7 @@
           <p:cNvPr id="4" name="">
             <a:extLst xmlns:a="http://schemas.openxmlformats.org/drawingml/2006/main">
               <a:ext uri="{FF2B5EF4-FFF2-40B4-BE49-F238E27FC236}">
-                <a16:creationId xmlns:a16="http://schemas.microsoft.com/office/drawing/2014/main" id="{7D04DBB6-4E2F-481D-911C-9D5303DC35AB}"/>
+                <a16:creationId xmlns:a16="http://schemas.microsoft.com/office/drawing/2014/main" id="{AE810D4A-06F8-4123-855D-EBD38AD67BD6}"/>
               </a:ext>
             </a:extLst>
           </p:cNvPr>
@@ -13077,7 +13148,7 @@
           <p:cNvPr id="5" name="">
             <a:extLst xmlns:a="http://schemas.openxmlformats.org/drawingml/2006/main">
               <a:ext uri="{FF2B5EF4-FFF2-40B4-BE49-F238E27FC236}">
-                <a16:creationId xmlns:a16="http://schemas.microsoft.com/office/drawing/2014/main" id="{A970E202-63FF-48DC-B55B-8D63268639EE}"/>
+                <a16:creationId xmlns:a16="http://schemas.microsoft.com/office/drawing/2014/main" id="{396511BD-10F9-408B-8811-3F6C18CD8038}"/>
               </a:ext>
             </a:extLst>
           </p:cNvPr>
@@ -13233,7 +13304,7 @@
           <p:cNvPr id="6" name="">
             <a:extLst xmlns:a="http://schemas.openxmlformats.org/drawingml/2006/main">
               <a:ext uri="{FF2B5EF4-FFF2-40B4-BE49-F238E27FC236}">
-                <a16:creationId xmlns:a16="http://schemas.microsoft.com/office/drawing/2014/main" id="{8DA78872-C538-40F1-A179-CBB91D795B02}"/>
+                <a16:creationId xmlns:a16="http://schemas.microsoft.com/office/drawing/2014/main" id="{4FAD790F-BBD0-496B-B44B-F6BCF5B00494}"/>
               </a:ext>
             </a:extLst>
           </p:cNvPr>
@@ -13389,7 +13460,7 @@
           <p:cNvPr id="7" name="">
             <a:extLst xmlns:a="http://schemas.openxmlformats.org/drawingml/2006/main">
               <a:ext uri="{FF2B5EF4-FFF2-40B4-BE49-F238E27FC236}">
-                <a16:creationId xmlns:a16="http://schemas.microsoft.com/office/drawing/2014/main" id="{EAA4DEA6-4D2C-4831-A115-23EA901772D4}"/>
+                <a16:creationId xmlns:a16="http://schemas.microsoft.com/office/drawing/2014/main" id="{031E8C87-475C-4AC0-9493-A8F00CD90C50}"/>
               </a:ext>
             </a:extLst>
           </p:cNvPr>
@@ -13543,7 +13614,7 @@
     </p:spTree>
     <p:extLst>
       <p:ext uri="{BB962C8B-B14F-4D97-AF65-F5344CB8AC3E}">
-        <p14:creationId xmlns:p14="http://schemas.microsoft.com/office/powerpoint/2010/main" val="666180066"/>
+        <p14:creationId xmlns:p14="http://schemas.microsoft.com/office/powerpoint/2010/main" val="636422513"/>
       </p:ext>
     </p:extLst>
   </p:cSld>
@@ -13574,7 +13645,7 @@
           <p:cNvPr id="8" name="">
             <a:extLst xmlns:a="http://schemas.openxmlformats.org/drawingml/2006/main">
               <a:ext uri="{FF2B5EF4-FFF2-40B4-BE49-F238E27FC236}">
-                <a16:creationId xmlns:a16="http://schemas.microsoft.com/office/drawing/2014/main" id="{569CA2B9-DCD0-4D14-AE39-AFD393ACDE0D}"/>
+                <a16:creationId xmlns:a16="http://schemas.microsoft.com/office/drawing/2014/main" id="{1460A269-6F44-4809-BD76-49F3BEA51BA9}"/>
               </a:ext>
             </a:extLst>
           </p:cNvPr>
@@ -13730,7 +13801,7 @@
           <p:cNvPr id="2" name="">
             <a:extLst xmlns:a="http://schemas.openxmlformats.org/drawingml/2006/main">
               <a:ext uri="{FF2B5EF4-FFF2-40B4-BE49-F238E27FC236}">
-                <a16:creationId xmlns:a16="http://schemas.microsoft.com/office/drawing/2014/main" id="{5E4580CC-F4E4-4AA1-ACAA-541E55A45167}"/>
+                <a16:creationId xmlns:a16="http://schemas.microsoft.com/office/drawing/2014/main" id="{5577371A-C31E-49CB-B27D-25F915357335}"/>
               </a:ext>
             </a:extLst>
           </p:cNvPr>
@@ -13886,7 +13957,7 @@
           <p:cNvPr id="3" name="">
             <a:extLst xmlns:a="http://schemas.openxmlformats.org/drawingml/2006/main">
               <a:ext uri="{FF2B5EF4-FFF2-40B4-BE49-F238E27FC236}">
-                <a16:creationId xmlns:a16="http://schemas.microsoft.com/office/drawing/2014/main" id="{BB3D8A35-E605-4017-A2B3-6F4EC5D2E9F7}"/>
+                <a16:creationId xmlns:a16="http://schemas.microsoft.com/office/drawing/2014/main" id="{6EE38999-7685-4DEA-8834-642B04F21864}"/>
               </a:ext>
             </a:extLst>
           </p:cNvPr>
@@ -14042,7 +14113,7 @@
           <p:cNvPr id="4" name="">
             <a:extLst xmlns:a="http://schemas.openxmlformats.org/drawingml/2006/main">
               <a:ext uri="{FF2B5EF4-FFF2-40B4-BE49-F238E27FC236}">
-                <a16:creationId xmlns:a16="http://schemas.microsoft.com/office/drawing/2014/main" id="{F4DAE4A2-92F1-4641-99D6-5BE032E4BADC}"/>
+                <a16:creationId xmlns:a16="http://schemas.microsoft.com/office/drawing/2014/main" id="{9BAE2B28-F6F3-425B-B112-7A8A41BC3ACD}"/>
               </a:ext>
             </a:extLst>
           </p:cNvPr>
@@ -14198,7 +14269,7 @@
           <p:cNvPr id="5" name="">
             <a:extLst xmlns:a="http://schemas.openxmlformats.org/drawingml/2006/main">
               <a:ext uri="{FF2B5EF4-FFF2-40B4-BE49-F238E27FC236}">
-                <a16:creationId xmlns:a16="http://schemas.microsoft.com/office/drawing/2014/main" id="{5C7A3CDF-8FA8-4714-A10E-CD6443EC1A35}"/>
+                <a16:creationId xmlns:a16="http://schemas.microsoft.com/office/drawing/2014/main" id="{EA035486-7F40-499A-A0AC-19792FEF9529}"/>
               </a:ext>
             </a:extLst>
           </p:cNvPr>
@@ -14354,7 +14425,7 @@
           <p:cNvPr id="6" name="">
             <a:extLst xmlns:a="http://schemas.openxmlformats.org/drawingml/2006/main">
               <a:ext uri="{FF2B5EF4-FFF2-40B4-BE49-F238E27FC236}">
-                <a16:creationId xmlns:a16="http://schemas.microsoft.com/office/drawing/2014/main" id="{E9AFB353-6403-4E24-8CC6-2A9483502887}"/>
+                <a16:creationId xmlns:a16="http://schemas.microsoft.com/office/drawing/2014/main" id="{C51D491B-69FD-4CDA-B1A8-664B624E5DC7}"/>
               </a:ext>
             </a:extLst>
           </p:cNvPr>
@@ -14510,7 +14581,7 @@
           <p:cNvPr id="7" name="">
             <a:extLst xmlns:a="http://schemas.openxmlformats.org/drawingml/2006/main">
               <a:ext uri="{FF2B5EF4-FFF2-40B4-BE49-F238E27FC236}">
-                <a16:creationId xmlns:a16="http://schemas.microsoft.com/office/drawing/2014/main" id="{B80F02EE-A90A-4C1A-A444-B50D1E544F34}"/>
+                <a16:creationId xmlns:a16="http://schemas.microsoft.com/office/drawing/2014/main" id="{A58AC426-00D3-4247-ACDE-739206008DC1}"/>
               </a:ext>
             </a:extLst>
           </p:cNvPr>
@@ -14664,7 +14735,7 @@
     </p:spTree>
     <p:extLst>
       <p:ext uri="{BB962C8B-B14F-4D97-AF65-F5344CB8AC3E}">
-        <p14:creationId xmlns:p14="http://schemas.microsoft.com/office/powerpoint/2010/main" val="976302971"/>
+        <p14:creationId xmlns:p14="http://schemas.microsoft.com/office/powerpoint/2010/main" val="289484834"/>
       </p:ext>
     </p:extLst>
   </p:cSld>
@@ -14695,7 +14766,7 @@
           <p:cNvPr id="8" name="">
             <a:extLst xmlns:a="http://schemas.openxmlformats.org/drawingml/2006/main">
               <a:ext uri="{FF2B5EF4-FFF2-40B4-BE49-F238E27FC236}">
-                <a16:creationId xmlns:a16="http://schemas.microsoft.com/office/drawing/2014/main" id="{3FC275CB-9B0C-46D0-900E-608E822F3E17}"/>
+                <a16:creationId xmlns:a16="http://schemas.microsoft.com/office/drawing/2014/main" id="{6B6A620E-72B5-4463-9777-FC9078A4C011}"/>
               </a:ext>
             </a:extLst>
           </p:cNvPr>
@@ -14841,7 +14912,7 @@
                 <a:ea typeface="Arial"/>
                 <a:cs typeface="Arial"/>
               </a:rPr>
-              <a:t>What the clinician view shows</a:t>
+              <a:t>Simulated assay-like extension</a:t>
             </a:r>
           </a:p>
         </p:txBody>
@@ -14851,7 +14922,7 @@
           <p:cNvPr id="2" name="">
             <a:extLst xmlns:a="http://schemas.openxmlformats.org/drawingml/2006/main">
               <a:ext uri="{FF2B5EF4-FFF2-40B4-BE49-F238E27FC236}">
-                <a16:creationId xmlns:a16="http://schemas.microsoft.com/office/drawing/2014/main" id="{732A9559-1E6F-4435-80EE-A975E92E7F68}"/>
+                <a16:creationId xmlns:a16="http://schemas.microsoft.com/office/drawing/2014/main" id="{D0558853-9D72-48AC-AE50-63D47C6CC522}"/>
               </a:ext>
             </a:extLst>
           </p:cNvPr>
@@ -14997,7 +15068,7 @@
                 <a:ea typeface="Arial"/>
                 <a:cs typeface="Arial"/>
               </a:rPr>
-              <a:t>Decision-support research display</a:t>
+              <a:t>Post-freeze, noisy simulator proxies; neither clinical labs nor measured hormones</a:t>
             </a:r>
           </a:p>
         </p:txBody>
@@ -15007,7 +15078,7 @@
           <p:cNvPr id="3" name="">
             <a:extLst xmlns:a="http://schemas.openxmlformats.org/drawingml/2006/main">
               <a:ext uri="{FF2B5EF4-FFF2-40B4-BE49-F238E27FC236}">
-                <a16:creationId xmlns:a16="http://schemas.microsoft.com/office/drawing/2014/main" id="{A77BAEE1-8E63-4793-ADCF-7C42DAD001FB}"/>
+                <a16:creationId xmlns:a16="http://schemas.microsoft.com/office/drawing/2014/main" id="{AF9AD0DD-7ED4-4AAD-8737-8767ECD3189C}"/>
               </a:ext>
             </a:extLst>
           </p:cNvPr>
@@ -15153,7 +15224,7 @@
                 <a:ea typeface="Arial"/>
                 <a:cs typeface="Arial"/>
               </a:rPr>
-              <a:t>Fitted probability beside its own validation threshold and held-out model evidence</a:t>
+              <a:t>Tier 2 plus simulated assay-like indices: AUROC 0.907, standard AP 0.885, Brier 0.118</a:t>
             </a:r>
           </a:p>
         </p:txBody>
@@ -15163,7 +15234,7 @@
           <p:cNvPr id="4" name="">
             <a:extLst xmlns:a="http://schemas.openxmlformats.org/drawingml/2006/main">
               <a:ext uri="{FF2B5EF4-FFF2-40B4-BE49-F238E27FC236}">
-                <a16:creationId xmlns:a16="http://schemas.microsoft.com/office/drawing/2014/main" id="{F79BE5A7-B70A-4917-A6F7-82FEDEBBD561}"/>
+                <a16:creationId xmlns:a16="http://schemas.microsoft.com/office/drawing/2014/main" id="{2C444E03-E031-4C92-9AA2-01F1C812E9FD}"/>
               </a:ext>
             </a:extLst>
           </p:cNvPr>
@@ -15309,7 +15380,7 @@
                 <a:ea typeface="Arial"/>
                 <a:cs typeface="Arial"/>
               </a:rPr>
-              <a:t>Exact additive feature contributions and explicit imputation</a:t>
+              <a:t>Original Tier-3 oracle-adjacent internal reference: AUROC 0.907, Brier 0.117</a:t>
             </a:r>
           </a:p>
         </p:txBody>
@@ -15319,7 +15390,7 @@
           <p:cNvPr id="5" name="">
             <a:extLst xmlns:a="http://schemas.openxmlformats.org/drawingml/2006/main">
               <a:ext uri="{FF2B5EF4-FFF2-40B4-BE49-F238E27FC236}">
-                <a16:creationId xmlns:a16="http://schemas.microsoft.com/office/drawing/2014/main" id="{F15B8A98-679C-4E7E-80C6-D5EB61411D4F}"/>
+                <a16:creationId xmlns:a16="http://schemas.microsoft.com/office/drawing/2014/main" id="{70C7E095-30B6-44B5-B14C-39D27F944446}"/>
               </a:ext>
             </a:extLst>
           </p:cNvPr>
@@ -15465,7 +15536,7 @@
                 <a:ea typeface="Arial"/>
                 <a:cs typeface="Arial"/>
               </a:rPr>
-              <a:t>Heuristic day estimate and conditional, illustrative day band</a:t>
+              <a:t>The proxy uses positive exp(latent) values and independent 15% CV assay noise.</a:t>
             </a:r>
           </a:p>
         </p:txBody>
@@ -15475,7 +15546,7 @@
           <p:cNvPr id="6" name="">
             <a:extLst xmlns:a="http://schemas.openxmlformats.org/drawingml/2006/main">
               <a:ext uri="{FF2B5EF4-FFF2-40B4-BE49-F238E27FC236}">
-                <a16:creationId xmlns:a16="http://schemas.microsoft.com/office/drawing/2014/main" id="{C462B0B3-9EF4-428C-8107-6943EDE96067}"/>
+                <a16:creationId xmlns:a16="http://schemas.microsoft.com/office/drawing/2014/main" id="{1F3E2EC8-4245-4793-B10A-73819C64571F}"/>
               </a:ext>
             </a:extLst>
           </p:cNvPr>
@@ -15621,7 +15692,7 @@
                 <a:ea typeface="Arial"/>
                 <a:cs typeface="Arial"/>
               </a:rPr>
-              <a:t>Data-quality ribbon and the reason for any withholding</a:t>
+              <a:t>It retains simulator-internal leakage risk and is not a clinical EHR-fusion claim.</a:t>
             </a:r>
           </a:p>
         </p:txBody>
@@ -15631,7 +15702,7 @@
           <p:cNvPr id="7" name="">
             <a:extLst xmlns:a="http://schemas.openxmlformats.org/drawingml/2006/main">
               <a:ext uri="{FF2B5EF4-FFF2-40B4-BE49-F238E27FC236}">
-                <a16:creationId xmlns:a16="http://schemas.microsoft.com/office/drawing/2014/main" id="{D7F07C9F-058C-4A09-9879-8872048C8FF8}"/>
+                <a16:creationId xmlns:a16="http://schemas.microsoft.com/office/drawing/2014/main" id="{9CCF5759-F6B3-4254-BB1A-BD27AB7DFFEF}"/>
               </a:ext>
             </a:extLst>
           </p:cNvPr>
@@ -15785,7 +15856,7 @@
     </p:spTree>
     <p:extLst>
       <p:ext uri="{BB962C8B-B14F-4D97-AF65-F5344CB8AC3E}">
-        <p14:creationId xmlns:p14="http://schemas.microsoft.com/office/powerpoint/2010/main" val="1335634926"/>
+        <p14:creationId xmlns:p14="http://schemas.microsoft.com/office/powerpoint/2010/main" val="856969992"/>
       </p:ext>
     </p:extLst>
   </p:cSld>
@@ -15816,7 +15887,7 @@
           <p:cNvPr id="8" name="">
             <a:extLst xmlns:a="http://schemas.openxmlformats.org/drawingml/2006/main">
               <a:ext uri="{FF2B5EF4-FFF2-40B4-BE49-F238E27FC236}">
-                <a16:creationId xmlns:a16="http://schemas.microsoft.com/office/drawing/2014/main" id="{B203ADC1-65EF-421C-B7F3-5DF4DB43A7B8}"/>
+                <a16:creationId xmlns:a16="http://schemas.microsoft.com/office/drawing/2014/main" id="{91E9E351-73B0-4562-A4D7-AED9425115CC}"/>
               </a:ext>
             </a:extLst>
           </p:cNvPr>
@@ -15962,7 +16033,7 @@
                 <a:ea typeface="Arial"/>
                 <a:cs typeface="Arial"/>
               </a:rPr>
-              <a:t>Guardrails live</a:t>
+              <a:t>What the clinician view shows</a:t>
             </a:r>
           </a:p>
         </p:txBody>
@@ -15972,7 +16043,7 @@
           <p:cNvPr id="2" name="">
             <a:extLst xmlns:a="http://schemas.openxmlformats.org/drawingml/2006/main">
               <a:ext uri="{FF2B5EF4-FFF2-40B4-BE49-F238E27FC236}">
-                <a16:creationId xmlns:a16="http://schemas.microsoft.com/office/drawing/2014/main" id="{4357B1FF-439B-405B-A118-C1B2B9DE5DC1}"/>
+                <a16:creationId xmlns:a16="http://schemas.microsoft.com/office/drawing/2014/main" id="{2D7DCDD6-E59C-46EC-8C3E-2F513C85B3BD}"/>
               </a:ext>
             </a:extLst>
           </p:cNvPr>
@@ -16118,7 +16189,7 @@
                 <a:ea typeface="Arial"/>
                 <a:cs typeface="Arial"/>
               </a:rPr>
-              <a:t>Missing safety information causes abstention</a:t>
+              <a:t>Decision-support research display</a:t>
             </a:r>
           </a:p>
         </p:txBody>
@@ -16128,7 +16199,7 @@
           <p:cNvPr id="3" name="">
             <a:extLst xmlns:a="http://schemas.openxmlformats.org/drawingml/2006/main">
               <a:ext uri="{FF2B5EF4-FFF2-40B4-BE49-F238E27FC236}">
-                <a16:creationId xmlns:a16="http://schemas.microsoft.com/office/drawing/2014/main" id="{8F0373BF-F2E1-400C-AB89-0AB9AABBA9EA}"/>
+                <a16:creationId xmlns:a16="http://schemas.microsoft.com/office/drawing/2014/main" id="{DDB0911C-AFD0-4AF9-AF70-187C62F39618}"/>
               </a:ext>
             </a:extLst>
           </p:cNvPr>
@@ -16274,7 +16345,7 @@
                 <a:ea typeface="Arial"/>
                 <a:cs typeface="Arial"/>
               </a:rPr>
-              <a:t>Contraception, thyroid and prolactin flags, age and pregnancy-related states</a:t>
+              <a:t>Fitted probability beside its own validation threshold and held-out model evidence</a:t>
             </a:r>
           </a:p>
         </p:txBody>
@@ -16284,7 +16355,7 @@
           <p:cNvPr id="4" name="">
             <a:extLst xmlns:a="http://schemas.openxmlformats.org/drawingml/2006/main">
               <a:ext uri="{FF2B5EF4-FFF2-40B4-BE49-F238E27FC236}">
-                <a16:creationId xmlns:a16="http://schemas.microsoft.com/office/drawing/2014/main" id="{278CFBA0-D076-4331-92E5-258AFB659BF5}"/>
+                <a16:creationId xmlns:a16="http://schemas.microsoft.com/office/drawing/2014/main" id="{72F853DF-1D7B-4BA2-A271-77E532986EA0}"/>
               </a:ext>
             </a:extLst>
           </p:cNvPr>
@@ -16430,7 +16501,7 @@
                 <a:ea typeface="Arial"/>
                 <a:cs typeface="Arial"/>
               </a:rPr>
-              <a:t>Early post-menarche, perimenopause and insufficient observed temperature</a:t>
+              <a:t>Exact additive feature contributions and explicit imputation</a:t>
             </a:r>
           </a:p>
         </p:txBody>
@@ -16440,7 +16511,7 @@
           <p:cNvPr id="5" name="">
             <a:extLst xmlns:a="http://schemas.openxmlformats.org/drawingml/2006/main">
               <a:ext uri="{FF2B5EF4-FFF2-40B4-BE49-F238E27FC236}">
-                <a16:creationId xmlns:a16="http://schemas.microsoft.com/office/drawing/2014/main" id="{DC9CB254-0083-4C6F-AF8A-ED600A505F9D}"/>
+                <a16:creationId xmlns:a16="http://schemas.microsoft.com/office/drawing/2014/main" id="{5B2A49BC-3007-4A49-9246-9D12626DBAA0}"/>
               </a:ext>
             </a:extLst>
           </p:cNvPr>
@@ -16586,7 +16657,7 @@
                 <a:ea typeface="Arial"/>
                 <a:cs typeface="Arial"/>
               </a:rPr>
-              <a:t>Withholding removes personal scores, intervals, explanations, sandbox outputs and alerts</a:t>
+              <a:t>Heuristic day estimate and conditional, illustrative day band</a:t>
             </a:r>
           </a:p>
         </p:txBody>
@@ -16596,7 +16667,7 @@
           <p:cNvPr id="6" name="">
             <a:extLst xmlns:a="http://schemas.openxmlformats.org/drawingml/2006/main">
               <a:ext uri="{FF2B5EF4-FFF2-40B4-BE49-F238E27FC236}">
-                <a16:creationId xmlns:a16="http://schemas.microsoft.com/office/drawing/2014/main" id="{F7563380-79D4-43AA-810C-2603607E27B3}"/>
+                <a16:creationId xmlns:a16="http://schemas.microsoft.com/office/drawing/2014/main" id="{6674D85B-8F87-4D5B-A089-4E2FF4026BB5}"/>
               </a:ext>
             </a:extLst>
           </p:cNvPr>
@@ -16742,7 +16813,7 @@
                 <a:ea typeface="Arial"/>
                 <a:cs typeface="Arial"/>
               </a:rPr>
-              <a:t>The workflow is synthetic and its safety effectiveness has not been clinically evaluated</a:t>
+              <a:t>Data-quality ribbon and the reason for any withholding</a:t>
             </a:r>
           </a:p>
         </p:txBody>
@@ -16752,7 +16823,7 @@
           <p:cNvPr id="7" name="">
             <a:extLst xmlns:a="http://schemas.openxmlformats.org/drawingml/2006/main">
               <a:ext uri="{FF2B5EF4-FFF2-40B4-BE49-F238E27FC236}">
-                <a16:creationId xmlns:a16="http://schemas.microsoft.com/office/drawing/2014/main" id="{DF1081EF-888B-4A4E-A168-AE5F83500416}"/>
+                <a16:creationId xmlns:a16="http://schemas.microsoft.com/office/drawing/2014/main" id="{CF1324FC-7752-4DE3-8A89-E7D3813FA6B1}"/>
               </a:ext>
             </a:extLst>
           </p:cNvPr>
@@ -16906,7 +16977,7 @@
     </p:spTree>
     <p:extLst>
       <p:ext uri="{BB962C8B-B14F-4D97-AF65-F5344CB8AC3E}">
-        <p14:creationId xmlns:p14="http://schemas.microsoft.com/office/powerpoint/2010/main" val="1014206355"/>
+        <p14:creationId xmlns:p14="http://schemas.microsoft.com/office/powerpoint/2010/main" val="1868794265"/>
       </p:ext>
     </p:extLst>
   </p:cSld>
@@ -16937,7 +17008,7 @@
           <p:cNvPr id="8" name="">
             <a:extLst xmlns:a="http://schemas.openxmlformats.org/drawingml/2006/main">
               <a:ext uri="{FF2B5EF4-FFF2-40B4-BE49-F238E27FC236}">
-                <a16:creationId xmlns:a16="http://schemas.microsoft.com/office/drawing/2014/main" id="{3950CE4A-1EB4-4B6F-88D6-9C6DB1C11EB5}"/>
+                <a16:creationId xmlns:a16="http://schemas.microsoft.com/office/drawing/2014/main" id="{1F343908-9422-43B9-802D-58A129C4C9DF}"/>
               </a:ext>
             </a:extLst>
           </p:cNvPr>
@@ -17083,7 +17154,7 @@
                 <a:ea typeface="Arial"/>
                 <a:cs typeface="Arial"/>
               </a:rPr>
-              <a:t>The twin and assumption sandbox</a:t>
+              <a:t>Guardrails live</a:t>
             </a:r>
           </a:p>
         </p:txBody>
@@ -17093,7 +17164,7 @@
           <p:cNvPr id="2" name="">
             <a:extLst xmlns:a="http://schemas.openxmlformats.org/drawingml/2006/main">
               <a:ext uri="{FF2B5EF4-FFF2-40B4-BE49-F238E27FC236}">
-                <a16:creationId xmlns:a16="http://schemas.microsoft.com/office/drawing/2014/main" id="{2FEBF43B-64F7-4C16-A9C2-84B0C5E30E58}"/>
+                <a16:creationId xmlns:a16="http://schemas.microsoft.com/office/drawing/2014/main" id="{D63CBC86-C074-4186-9CC6-37DCF317BC46}"/>
               </a:ext>
             </a:extLst>
           </p:cNvPr>
@@ -17239,7 +17310,7 @@
                 <a:ea typeface="Arial"/>
                 <a:cs typeface="Arial"/>
               </a:rPr>
-              <a:t>Clear boundaries around simulated physiology</a:t>
+              <a:t>Missing safety information causes abstention</a:t>
             </a:r>
           </a:p>
         </p:txBody>
@@ -17249,7 +17320,7 @@
           <p:cNvPr id="3" name="">
             <a:extLst xmlns:a="http://schemas.openxmlformats.org/drawingml/2006/main">
               <a:ext uri="{FF2B5EF4-FFF2-40B4-BE49-F238E27FC236}">
-                <a16:creationId xmlns:a16="http://schemas.microsoft.com/office/drawing/2014/main" id="{F243D4DB-5672-4AC6-95DB-54FBD3398CDA}"/>
+                <a16:creationId xmlns:a16="http://schemas.microsoft.com/office/drawing/2014/main" id="{5933F78B-E51E-4DB8-8798-880189B88D9A}"/>
               </a:ext>
             </a:extLst>
           </p:cNvPr>
@@ -17395,7 +17466,7 @@
                 <a:ea typeface="Arial"/>
                 <a:cs typeface="Arial"/>
               </a:rPr>
-              <a:t>Reproductive and metabolic equations generate an illustrative state trajectory</a:t>
+              <a:t>Contraception, thyroid and prolactin flags, age and pregnancy-related states</a:t>
             </a:r>
           </a:p>
         </p:txBody>
@@ -17405,7 +17476,7 @@
           <p:cNvPr id="4" name="">
             <a:extLst xmlns:a="http://schemas.openxmlformats.org/drawingml/2006/main">
               <a:ext uri="{FF2B5EF4-FFF2-40B4-BE49-F238E27FC236}">
-                <a16:creationId xmlns:a16="http://schemas.microsoft.com/office/drawing/2014/main" id="{C4BF4858-A229-4A71-9708-060FD13404F7}"/>
+                <a16:creationId xmlns:a16="http://schemas.microsoft.com/office/drawing/2014/main" id="{86B77C33-981C-47B2-B49A-B749F8C8E7C8}"/>
               </a:ext>
             </a:extLst>
           </p:cNvPr>
@@ -17551,7 +17622,7 @@
                 <a:ea typeface="Arial"/>
                 <a:cs typeface="Arial"/>
               </a:rPr>
-              <a:t>The twin does not affect the logistic score or its reported performance</a:t>
+              <a:t>Early post-menarche, perimenopause and insufficient observed temperature</a:t>
             </a:r>
           </a:p>
         </p:txBody>
@@ -17561,7 +17632,7 @@
           <p:cNvPr id="5" name="">
             <a:extLst xmlns:a="http://schemas.openxmlformats.org/drawingml/2006/main">
               <a:ext uri="{FF2B5EF4-FFF2-40B4-BE49-F238E27FC236}">
-                <a16:creationId xmlns:a16="http://schemas.microsoft.com/office/drawing/2014/main" id="{3A25995D-82D3-421B-9F9D-855097C871F4}"/>
+                <a16:creationId xmlns:a16="http://schemas.microsoft.com/office/drawing/2014/main" id="{D5325B66-EF3D-4A2B-8880-F77FB0385D38}"/>
               </a:ext>
             </a:extLst>
           </p:cNvPr>
@@ -17707,7 +17778,7 @@
                 <a:ea typeface="Arial"/>
                 <a:cs typeface="Arial"/>
               </a:rPr>
-              <a:t>The sandbox edits invented model inputs. It does not predict a treatment effect</a:t>
+              <a:t>Withholding removes personal scores, intervals, explanations, sandbox outputs and alerts</a:t>
             </a:r>
           </a:p>
         </p:txBody>
@@ -17717,7 +17788,7 @@
           <p:cNvPr id="6" name="">
             <a:extLst xmlns:a="http://schemas.openxmlformats.org/drawingml/2006/main">
               <a:ext uri="{FF2B5EF4-FFF2-40B4-BE49-F238E27FC236}">
-                <a16:creationId xmlns:a16="http://schemas.microsoft.com/office/drawing/2014/main" id="{4A8322C1-C531-4753-B7D2-E7FC58CBD519}"/>
+                <a16:creationId xmlns:a16="http://schemas.microsoft.com/office/drawing/2014/main" id="{FCC1D15E-FF7A-4B02-BC81-5CB106ACC07B}"/>
               </a:ext>
             </a:extLst>
           </p:cNvPr>
@@ -17863,7 +17934,7 @@
                 <a:ea typeface="Arial"/>
                 <a:cs typeface="Arial"/>
               </a:rPr>
-              <a:t>Glucose threshold crossings are simulated counts, not an evaluated glucose forecast</a:t>
+              <a:t>The workflow is synthetic and its safety effectiveness has not been clinically evaluated</a:t>
             </a:r>
           </a:p>
         </p:txBody>
@@ -17873,7 +17944,7 @@
           <p:cNvPr id="7" name="">
             <a:extLst xmlns:a="http://schemas.openxmlformats.org/drawingml/2006/main">
               <a:ext uri="{FF2B5EF4-FFF2-40B4-BE49-F238E27FC236}">
-                <a16:creationId xmlns:a16="http://schemas.microsoft.com/office/drawing/2014/main" id="{4B585BEF-FAE3-4C84-BAED-8DB9BA568AE4}"/>
+                <a16:creationId xmlns:a16="http://schemas.microsoft.com/office/drawing/2014/main" id="{EAC0B5AD-C82C-4656-BCC1-D774448FB21A}"/>
               </a:ext>
             </a:extLst>
           </p:cNvPr>
@@ -18027,7 +18098,7 @@
     </p:spTree>
     <p:extLst>
       <p:ext uri="{BB962C8B-B14F-4D97-AF65-F5344CB8AC3E}">
-        <p14:creationId xmlns:p14="http://schemas.microsoft.com/office/powerpoint/2010/main" val="1929898752"/>
+        <p14:creationId xmlns:p14="http://schemas.microsoft.com/office/powerpoint/2010/main" val="1420939024"/>
       </p:ext>
     </p:extLst>
   </p:cSld>
@@ -18058,7 +18129,7 @@
           <p:cNvPr id="7" name="">
             <a:extLst xmlns:a="http://schemas.openxmlformats.org/drawingml/2006/main">
               <a:ext uri="{FF2B5EF4-FFF2-40B4-BE49-F238E27FC236}">
-                <a16:creationId xmlns:a16="http://schemas.microsoft.com/office/drawing/2014/main" id="{DC3FA923-A129-4B86-ADE5-D266928EF187}"/>
+                <a16:creationId xmlns:a16="http://schemas.microsoft.com/office/drawing/2014/main" id="{CA37A447-0061-4CB6-8C6D-2545D3C6CCFB}"/>
               </a:ext>
             </a:extLst>
           </p:cNvPr>
@@ -18214,7 +18285,7 @@
           <p:cNvPr id="2" name="">
             <a:extLst xmlns:a="http://schemas.openxmlformats.org/drawingml/2006/main">
               <a:ext uri="{FF2B5EF4-FFF2-40B4-BE49-F238E27FC236}">
-                <a16:creationId xmlns:a16="http://schemas.microsoft.com/office/drawing/2014/main" id="{410C5053-1F2F-40A8-99D7-B99FD17DF126}"/>
+                <a16:creationId xmlns:a16="http://schemas.microsoft.com/office/drawing/2014/main" id="{E948C2CF-E609-4FE8-8940-BC264960E8AB}"/>
               </a:ext>
             </a:extLst>
           </p:cNvPr>
@@ -18370,7 +18441,7 @@
           <p:cNvPr id="3" name="">
             <a:extLst xmlns:a="http://schemas.openxmlformats.org/drawingml/2006/main">
               <a:ext uri="{FF2B5EF4-FFF2-40B4-BE49-F238E27FC236}">
-                <a16:creationId xmlns:a16="http://schemas.microsoft.com/office/drawing/2014/main" id="{C22ACD51-E3E6-4D36-9EC2-EDD9C7A24E5B}"/>
+                <a16:creationId xmlns:a16="http://schemas.microsoft.com/office/drawing/2014/main" id="{5B4B916E-2701-472F-B104-B12C8C67D52F}"/>
               </a:ext>
             </a:extLst>
           </p:cNvPr>
@@ -18526,7 +18597,7 @@
           <p:cNvPr id="4" name="">
             <a:extLst xmlns:a="http://schemas.openxmlformats.org/drawingml/2006/main">
               <a:ext uri="{FF2B5EF4-FFF2-40B4-BE49-F238E27FC236}">
-                <a16:creationId xmlns:a16="http://schemas.microsoft.com/office/drawing/2014/main" id="{A8D09C9D-194B-4604-9A2C-BFC7FC9AB59E}"/>
+                <a16:creationId xmlns:a16="http://schemas.microsoft.com/office/drawing/2014/main" id="{3D7D5640-53EA-4959-8C01-395449690D86}"/>
               </a:ext>
             </a:extLst>
           </p:cNvPr>
@@ -18682,7 +18753,7 @@
           <p:cNvPr id="5" name="">
             <a:extLst xmlns:a="http://schemas.openxmlformats.org/drawingml/2006/main">
               <a:ext uri="{FF2B5EF4-FFF2-40B4-BE49-F238E27FC236}">
-                <a16:creationId xmlns:a16="http://schemas.microsoft.com/office/drawing/2014/main" id="{3A45532D-FDFC-434D-A444-B4DA224B7825}"/>
+                <a16:creationId xmlns:a16="http://schemas.microsoft.com/office/drawing/2014/main" id="{4B965457-1FCC-4217-B062-C015EC50AE2F}"/>
               </a:ext>
             </a:extLst>
           </p:cNvPr>
@@ -18838,7 +18909,7 @@
           <p:cNvPr id="6" name="">
             <a:extLst xmlns:a="http://schemas.openxmlformats.org/drawingml/2006/main">
               <a:ext uri="{FF2B5EF4-FFF2-40B4-BE49-F238E27FC236}">
-                <a16:creationId xmlns:a16="http://schemas.microsoft.com/office/drawing/2014/main" id="{BAD7C07C-73E7-4E33-BC36-8AC4782A0E6D}"/>
+                <a16:creationId xmlns:a16="http://schemas.microsoft.com/office/drawing/2014/main" id="{21B811DA-17DB-45A0-A1C6-229062E8F704}"/>
               </a:ext>
             </a:extLst>
           </p:cNvPr>
@@ -18992,7 +19063,7 @@
     </p:spTree>
     <p:extLst>
       <p:ext uri="{BB962C8B-B14F-4D97-AF65-F5344CB8AC3E}">
-        <p14:creationId xmlns:p14="http://schemas.microsoft.com/office/powerpoint/2010/main" val="1834193981"/>
+        <p14:creationId xmlns:p14="http://schemas.microsoft.com/office/powerpoint/2010/main" val="1120814962"/>
       </p:ext>
     </p:extLst>
   </p:cSld>
@@ -19023,7 +19094,7 @@
           <p:cNvPr id="8" name="">
             <a:extLst xmlns:a="http://schemas.openxmlformats.org/drawingml/2006/main">
               <a:ext uri="{FF2B5EF4-FFF2-40B4-BE49-F238E27FC236}">
-                <a16:creationId xmlns:a16="http://schemas.microsoft.com/office/drawing/2014/main" id="{376E1E29-1D95-4240-80E4-091E3BF3A273}"/>
+                <a16:creationId xmlns:a16="http://schemas.microsoft.com/office/drawing/2014/main" id="{161B1A60-14E4-45F8-82A6-69F6F2F8D745}"/>
               </a:ext>
             </a:extLst>
           </p:cNvPr>
@@ -19169,7 +19240,7 @@
                 <a:ea typeface="Arial"/>
                 <a:cs typeface="Arial"/>
               </a:rPr>
-              <a:t>Where it fails</a:t>
+              <a:t>The twin and assumption sandbox</a:t>
             </a:r>
           </a:p>
         </p:txBody>
@@ -19179,7 +19250,7 @@
           <p:cNvPr id="2" name="">
             <a:extLst xmlns:a="http://schemas.openxmlformats.org/drawingml/2006/main">
               <a:ext uri="{FF2B5EF4-FFF2-40B4-BE49-F238E27FC236}">
-                <a16:creationId xmlns:a16="http://schemas.microsoft.com/office/drawing/2014/main" id="{0D564456-5546-4AF1-9BF5-E81F5748C2D8}"/>
+                <a16:creationId xmlns:a16="http://schemas.microsoft.com/office/drawing/2014/main" id="{35385C7D-B8FA-4AA5-AADA-B1DF7FE7E8D0}"/>
               </a:ext>
             </a:extLst>
           </p:cNvPr>
@@ -19325,7 +19396,7 @@
                 <a:ea typeface="Arial"/>
                 <a:cs typeface="Arial"/>
               </a:rPr>
-              <a:t>All declared Kushi scenarios remain visible</a:t>
+              <a:t>Clear boundaries around simulated physiology</a:t>
             </a:r>
           </a:p>
         </p:txBody>
@@ -19335,7 +19406,7 @@
           <p:cNvPr id="3" name="">
             <a:extLst xmlns:a="http://schemas.openxmlformats.org/drawingml/2006/main">
               <a:ext uri="{FF2B5EF4-FFF2-40B4-BE49-F238E27FC236}">
-                <a16:creationId xmlns:a16="http://schemas.microsoft.com/office/drawing/2014/main" id="{EB9B6677-7A3A-4A0E-BDDB-4AFFEA4AAAB0}"/>
+                <a16:creationId xmlns:a16="http://schemas.microsoft.com/office/drawing/2014/main" id="{AA654F55-F31E-45FE-8BB7-03AA78C442D1}"/>
               </a:ext>
             </a:extLst>
           </p:cNvPr>
@@ -19481,7 +19552,7 @@
                 <a:ea typeface="Arial"/>
                 <a:cs typeface="Arial"/>
               </a:rPr>
-              <a:t>Display the fixed scenario seeds with misses, false alarms or withholding unchanged</a:t>
+              <a:t>Reproductive and metabolic equations generate an illustrative state trajectory</a:t>
             </a:r>
           </a:p>
         </p:txBody>
@@ -19491,7 +19562,7 @@
           <p:cNvPr id="4" name="">
             <a:extLst xmlns:a="http://schemas.openxmlformats.org/drawingml/2006/main">
               <a:ext uri="{FF2B5EF4-FFF2-40B4-BE49-F238E27FC236}">
-                <a16:creationId xmlns:a16="http://schemas.microsoft.com/office/drawing/2014/main" id="{F7108AE7-D375-4CCF-93FD-3532324AFA3F}"/>
+                <a16:creationId xmlns:a16="http://schemas.microsoft.com/office/drawing/2014/main" id="{908E2EC1-17D6-425F-A1F2-FA29F301F983}"/>
               </a:ext>
             </a:extLst>
           </p:cNvPr>
@@ -19637,7 +19708,7 @@
                 <a:ea typeface="Arial"/>
                 <a:cs typeface="Arial"/>
               </a:rPr>
-              <a:t>Different snapshots can fall back to calendar even when sensors are available</a:t>
+              <a:t>The twin does not affect the logistic score or its reported performance</a:t>
             </a:r>
           </a:p>
         </p:txBody>
@@ -19647,7 +19718,7 @@
           <p:cNvPr id="5" name="">
             <a:extLst xmlns:a="http://schemas.openxmlformats.org/drawingml/2006/main">
               <a:ext uri="{FF2B5EF4-FFF2-40B4-BE49-F238E27FC236}">
-                <a16:creationId xmlns:a16="http://schemas.microsoft.com/office/drawing/2014/main" id="{0AD7E238-2C29-4309-B4D1-1B74AEBE3179}"/>
+                <a16:creationId xmlns:a16="http://schemas.microsoft.com/office/drawing/2014/main" id="{C66C7178-264F-4969-BA03-3A95254B8038}"/>
               </a:ext>
             </a:extLst>
           </p:cNvPr>
@@ -19793,7 +19864,7 @@
                 <a:ea typeface="Arial"/>
                 <a:cs typeface="Arial"/>
               </a:rPr>
-              <a:t>A class set containing both outcomes does not identify one result</a:t>
+              <a:t>The sandbox edits invented model inputs. It does not predict a treatment effect</a:t>
             </a:r>
           </a:p>
         </p:txBody>
@@ -19803,7 +19874,7 @@
           <p:cNvPr id="6" name="">
             <a:extLst xmlns:a="http://schemas.openxmlformats.org/drawingml/2006/main">
               <a:ext uri="{FF2B5EF4-FFF2-40B4-BE49-F238E27FC236}">
-                <a16:creationId xmlns:a16="http://schemas.microsoft.com/office/drawing/2014/main" id="{02C1F15F-2FD6-4CEE-A965-FBCBC68154AB}"/>
+                <a16:creationId xmlns:a16="http://schemas.microsoft.com/office/drawing/2014/main" id="{41F8A063-1237-4F1A-8821-D5736FB6926F}"/>
               </a:ext>
             </a:extLst>
           </p:cNvPr>
@@ -19949,7 +20020,7 @@
                 <a:ea typeface="Arial"/>
                 <a:cs typeface="Arial"/>
               </a:rPr>
-              <a:t>Robustness, state-estimator and conformal coverage evidence remain separate work</a:t>
+              <a:t>Glucose threshold crossings are simulated counts, not an evaluated glucose forecast</a:t>
             </a:r>
           </a:p>
         </p:txBody>
@@ -19959,7 +20030,7 @@
           <p:cNvPr id="7" name="">
             <a:extLst xmlns:a="http://schemas.openxmlformats.org/drawingml/2006/main">
               <a:ext uri="{FF2B5EF4-FFF2-40B4-BE49-F238E27FC236}">
-                <a16:creationId xmlns:a16="http://schemas.microsoft.com/office/drawing/2014/main" id="{AD04461B-81D0-45F9-9586-7715715958FA}"/>
+                <a16:creationId xmlns:a16="http://schemas.microsoft.com/office/drawing/2014/main" id="{DB020C94-A7F6-4847-8692-4A6946FF0F52}"/>
               </a:ext>
             </a:extLst>
           </p:cNvPr>
@@ -20113,7 +20184,7 @@
     </p:spTree>
     <p:extLst>
       <p:ext uri="{BB962C8B-B14F-4D97-AF65-F5344CB8AC3E}">
-        <p14:creationId xmlns:p14="http://schemas.microsoft.com/office/powerpoint/2010/main" val="1460774960"/>
+        <p14:creationId xmlns:p14="http://schemas.microsoft.com/office/powerpoint/2010/main" val="401506136"/>
       </p:ext>
     </p:extLst>
   </p:cSld>
@@ -20144,7 +20215,7 @@
           <p:cNvPr id="8" name="">
             <a:extLst xmlns:a="http://schemas.openxmlformats.org/drawingml/2006/main">
               <a:ext uri="{FF2B5EF4-FFF2-40B4-BE49-F238E27FC236}">
-                <a16:creationId xmlns:a16="http://schemas.microsoft.com/office/drawing/2014/main" id="{CE3536E1-3090-4B90-87C9-C749DB08A0D5}"/>
+                <a16:creationId xmlns:a16="http://schemas.microsoft.com/office/drawing/2014/main" id="{B0FC7238-A939-4419-9875-6DF4CFD207A7}"/>
               </a:ext>
             </a:extLst>
           </p:cNvPr>
@@ -20290,7 +20361,7 @@
                 <a:ea typeface="Arial"/>
                 <a:cs typeface="Arial"/>
               </a:rPr>
-              <a:t>Validity limits</a:t>
+              <a:t>Where it fails</a:t>
             </a:r>
           </a:p>
         </p:txBody>
@@ -20300,7 +20371,7 @@
           <p:cNvPr id="2" name="">
             <a:extLst xmlns:a="http://schemas.openxmlformats.org/drawingml/2006/main">
               <a:ext uri="{FF2B5EF4-FFF2-40B4-BE49-F238E27FC236}">
-                <a16:creationId xmlns:a16="http://schemas.microsoft.com/office/drawing/2014/main" id="{0DC5CEAE-46CA-4AEC-B70C-57C620C9A068}"/>
+                <a16:creationId xmlns:a16="http://schemas.microsoft.com/office/drawing/2014/main" id="{BE987E8A-4E9E-4705-9F03-C3F8C6534082}"/>
               </a:ext>
             </a:extLst>
           </p:cNvPr>
@@ -20446,7 +20517,7 @@
                 <a:ea typeface="Arial"/>
                 <a:cs typeface="Arial"/>
               </a:rPr>
-              <a:t>Synthetic recovery is not prospective evidence in women</a:t>
+              <a:t>All declared Kushi scenarios remain visible</a:t>
             </a:r>
           </a:p>
         </p:txBody>
@@ -20456,7 +20527,7 @@
           <p:cNvPr id="3" name="">
             <a:extLst xmlns:a="http://schemas.openxmlformats.org/drawingml/2006/main">
               <a:ext uri="{FF2B5EF4-FFF2-40B4-BE49-F238E27FC236}">
-                <a16:creationId xmlns:a16="http://schemas.microsoft.com/office/drawing/2014/main" id="{7BA6F038-1092-4294-9C35-6503EDC415E8}"/>
+                <a16:creationId xmlns:a16="http://schemas.microsoft.com/office/drawing/2014/main" id="{8D4D3EE3-EA7A-49D2-9C43-E3164F53C86A}"/>
               </a:ext>
             </a:extLst>
           </p:cNvPr>
@@ -20602,7 +20673,7 @@
                 <a:ea typeface="Arial"/>
                 <a:cs typeface="Arial"/>
               </a:rPr>
-              <a:t>Labels and sensor changes share generator assumptions</a:t>
+              <a:t>Display the fixed scenario seeds with misses, false alarms or withholding unchanged</a:t>
             </a:r>
           </a:p>
         </p:txBody>
@@ -20612,7 +20683,7 @@
           <p:cNvPr id="4" name="">
             <a:extLst xmlns:a="http://schemas.openxmlformats.org/drawingml/2006/main">
               <a:ext uri="{FF2B5EF4-FFF2-40B4-BE49-F238E27FC236}">
-                <a16:creationId xmlns:a16="http://schemas.microsoft.com/office/drawing/2014/main" id="{8A95DB0B-2F24-4985-B7DA-BF5F0552A45F}"/>
+                <a16:creationId xmlns:a16="http://schemas.microsoft.com/office/drawing/2014/main" id="{549FB455-A84C-48C7-91F8-D50E6DF465E3}"/>
               </a:ext>
             </a:extLst>
           </p:cNvPr>
@@ -20758,7 +20829,7 @@
                 <a:ea typeface="Arial"/>
                 <a:cs typeface="Arial"/>
               </a:rPr>
-              <a:t>EHR-lite includes a label-generating internal latent</a:t>
+              <a:t>Different snapshots can fall back to calendar even when sensors are available</a:t>
             </a:r>
           </a:p>
         </p:txBody>
@@ -20768,7 +20839,7 @@
           <p:cNvPr id="5" name="">
             <a:extLst xmlns:a="http://schemas.openxmlformats.org/drawingml/2006/main">
               <a:ext uri="{FF2B5EF4-FFF2-40B4-BE49-F238E27FC236}">
-                <a16:creationId xmlns:a16="http://schemas.microsoft.com/office/drawing/2014/main" id="{C121288A-0D19-4BD4-A60D-75DAE659E513}"/>
+                <a16:creationId xmlns:a16="http://schemas.microsoft.com/office/drawing/2014/main" id="{CB418193-5DD5-4DFC-9032-FB32C5FD1401}"/>
               </a:ext>
             </a:extLst>
           </p:cNvPr>
@@ -20914,7 +20985,7 @@
                 <a:ea typeface="Arial"/>
                 <a:cs typeface="Arial"/>
               </a:rPr>
-              <a:t>Old test seeds were reused during development</a:t>
+              <a:t>A class set containing both outcomes does not identify one result</a:t>
             </a:r>
           </a:p>
         </p:txBody>
@@ -20924,7 +20995,7 @@
           <p:cNvPr id="6" name="">
             <a:extLst xmlns:a="http://schemas.openxmlformats.org/drawingml/2006/main">
               <a:ext uri="{FF2B5EF4-FFF2-40B4-BE49-F238E27FC236}">
-                <a16:creationId xmlns:a16="http://schemas.microsoft.com/office/drawing/2014/main" id="{701891AC-2AD3-4201-A6CA-82E2BFAA7E53}"/>
+                <a16:creationId xmlns:a16="http://schemas.microsoft.com/office/drawing/2014/main" id="{8CE94B74-9F6B-418D-B927-828E399958E8}"/>
               </a:ext>
             </a:extLst>
           </p:cNvPr>
@@ -21070,7 +21141,7 @@
                 <a:ea typeface="Arial"/>
                 <a:cs typeface="Arial"/>
               </a:rPr>
-              <a:t>The frozen synthetic sequential alert policy is evaluated; robustness and clinical safety effectiveness remain separate work</a:t>
+              <a:t>Robustness, state-estimator and conformal coverage evidence remain separate work</a:t>
             </a:r>
           </a:p>
         </p:txBody>
@@ -21080,7 +21151,7 @@
           <p:cNvPr id="7" name="">
             <a:extLst xmlns:a="http://schemas.openxmlformats.org/drawingml/2006/main">
               <a:ext uri="{FF2B5EF4-FFF2-40B4-BE49-F238E27FC236}">
-                <a16:creationId xmlns:a16="http://schemas.microsoft.com/office/drawing/2014/main" id="{CD28D1FA-427B-48ED-B56B-CC11BD2826AF}"/>
+                <a16:creationId xmlns:a16="http://schemas.microsoft.com/office/drawing/2014/main" id="{A155821B-7182-4369-AC12-E68C821ADA0F}"/>
               </a:ext>
             </a:extLst>
           </p:cNvPr>
@@ -21234,7 +21305,7 @@
     </p:spTree>
     <p:extLst>
       <p:ext uri="{BB962C8B-B14F-4D97-AF65-F5344CB8AC3E}">
-        <p14:creationId xmlns:p14="http://schemas.microsoft.com/office/powerpoint/2010/main" val="234902100"/>
+        <p14:creationId xmlns:p14="http://schemas.microsoft.com/office/powerpoint/2010/main" val="2038421875"/>
       </p:ext>
     </p:extLst>
   </p:cSld>
@@ -21265,7 +21336,7 @@
           <p:cNvPr id="8" name="">
             <a:extLst xmlns:a="http://schemas.openxmlformats.org/drawingml/2006/main">
               <a:ext uri="{FF2B5EF4-FFF2-40B4-BE49-F238E27FC236}">
-                <a16:creationId xmlns:a16="http://schemas.microsoft.com/office/drawing/2014/main" id="{0FF5A707-1E3F-40EE-B767-959D9668540E}"/>
+                <a16:creationId xmlns:a16="http://schemas.microsoft.com/office/drawing/2014/main" id="{5C6E457E-3CAF-419E-A187-ACDC7592F944}"/>
               </a:ext>
             </a:extLst>
           </p:cNvPr>
@@ -21411,7 +21482,7 @@
                 <a:ea typeface="Arial"/>
                 <a:cs typeface="Arial"/>
               </a:rPr>
-              <a:t>Reproducible demonstration</a:t>
+              <a:t>Validity limits</a:t>
             </a:r>
           </a:p>
         </p:txBody>
@@ -21421,7 +21492,7 @@
           <p:cNvPr id="2" name="">
             <a:extLst xmlns:a="http://schemas.openxmlformats.org/drawingml/2006/main">
               <a:ext uri="{FF2B5EF4-FFF2-40B4-BE49-F238E27FC236}">
-                <a16:creationId xmlns:a16="http://schemas.microsoft.com/office/drawing/2014/main" id="{6F2DB348-E9A7-406D-8DA1-E9675C93491F}"/>
+                <a16:creationId xmlns:a16="http://schemas.microsoft.com/office/drawing/2014/main" id="{8EB62AA3-8B67-409B-8A77-342B26EDC558}"/>
               </a:ext>
             </a:extLst>
           </p:cNvPr>
@@ -21567,7 +21638,7 @@
                 <a:ea typeface="Arial"/>
                 <a:cs typeface="Arial"/>
               </a:rPr>
-              <a:t>Public source, inspectable artifacts and explicit next work</a:t>
+              <a:t>Synthetic recovery is not prospective evidence in women</a:t>
             </a:r>
           </a:p>
         </p:txBody>
@@ -21577,7 +21648,7 @@
           <p:cNvPr id="3" name="">
             <a:extLst xmlns:a="http://schemas.openxmlformats.org/drawingml/2006/main">
               <a:ext uri="{FF2B5EF4-FFF2-40B4-BE49-F238E27FC236}">
-                <a16:creationId xmlns:a16="http://schemas.microsoft.com/office/drawing/2014/main" id="{DB5BED6B-DB1D-450D-BC41-0C83E99E0242}"/>
+                <a16:creationId xmlns:a16="http://schemas.microsoft.com/office/drawing/2014/main" id="{26C02930-CB7A-45B4-875F-793EC14078B6}"/>
               </a:ext>
             </a:extLst>
           </p:cNvPr>
@@ -21723,7 +21794,7 @@
                 <a:ea typeface="Arial"/>
                 <a:cs typeface="Arial"/>
               </a:rPr>
-              <a:t>README, model cards and the audit link every claim to evidence</a:t>
+              <a:t>Labels and sensor changes share generator assumptions</a:t>
             </a:r>
           </a:p>
         </p:txBody>
@@ -21733,7 +21804,7 @@
           <p:cNvPr id="4" name="">
             <a:extLst xmlns:a="http://schemas.openxmlformats.org/drawingml/2006/main">
               <a:ext uri="{FF2B5EF4-FFF2-40B4-BE49-F238E27FC236}">
-                <a16:creationId xmlns:a16="http://schemas.microsoft.com/office/drawing/2014/main" id="{80BF836F-DD14-409E-9C2C-AAF01E939FE1}"/>
+                <a16:creationId xmlns:a16="http://schemas.microsoft.com/office/drawing/2014/main" id="{348D5E42-6089-49C0-B737-F0E84661CF67}"/>
               </a:ext>
             </a:extLst>
           </p:cNvPr>
@@ -21879,7 +21950,7 @@
                 <a:ea typeface="Arial"/>
                 <a:cs typeface="Arial"/>
               </a:rPr>
-              <a:t>Persisted inference reproduces the benchmark and exposes exact feature calculations</a:t>
+              <a:t>EHR-lite includes a label-generating internal latent</a:t>
             </a:r>
           </a:p>
         </p:txBody>
@@ -21889,7 +21960,7 @@
           <p:cNvPr id="5" name="">
             <a:extLst xmlns:a="http://schemas.openxmlformats.org/drawingml/2006/main">
               <a:ext uri="{FF2B5EF4-FFF2-40B4-BE49-F238E27FC236}">
-                <a16:creationId xmlns:a16="http://schemas.microsoft.com/office/drawing/2014/main" id="{878BE501-D8EA-440A-A767-BB5A2D32AACC}"/>
+                <a16:creationId xmlns:a16="http://schemas.microsoft.com/office/drawing/2014/main" id="{EBD3F200-6273-4BB9-90C4-369431A639C7}"/>
               </a:ext>
             </a:extLst>
           </p:cNvPr>
@@ -22035,7 +22106,7 @@
                 <a:ea typeface="Arial"/>
                 <a:cs typeface="Arial"/>
               </a:rPr>
-              <a:t>The required video remains a human recording and upload task</a:t>
+              <a:t>Old test seeds were reused during development</a:t>
             </a:r>
           </a:p>
         </p:txBody>
@@ -22045,7 +22116,7 @@
           <p:cNvPr id="6" name="">
             <a:extLst xmlns:a="http://schemas.openxmlformats.org/drawingml/2006/main">
               <a:ext uri="{FF2B5EF4-FFF2-40B4-BE49-F238E27FC236}">
-                <a16:creationId xmlns:a16="http://schemas.microsoft.com/office/drawing/2014/main" id="{DDC28FB5-E8B1-47AD-9DFE-713D67A36ED7}"/>
+                <a16:creationId xmlns:a16="http://schemas.microsoft.com/office/drawing/2014/main" id="{003F74C3-A018-4B69-A817-5E9881FEF01A}"/>
               </a:ext>
             </a:extLst>
           </p:cNvPr>
@@ -22191,7 +22262,7 @@
                 <a:ea typeface="Arial"/>
                 <a:cs typeface="Arial"/>
               </a:rPr>
-              <a:t>Clinical validation, clinician feedback and sim-to-real evaluation remain outstanding</a:t>
+              <a:t>The frozen synthetic sequential alert policy is evaluated; robustness and clinical safety effectiveness remain separate work</a:t>
             </a:r>
           </a:p>
         </p:txBody>
@@ -22201,7 +22272,7 @@
           <p:cNvPr id="7" name="">
             <a:extLst xmlns:a="http://schemas.openxmlformats.org/drawingml/2006/main">
               <a:ext uri="{FF2B5EF4-FFF2-40B4-BE49-F238E27FC236}">
-                <a16:creationId xmlns:a16="http://schemas.microsoft.com/office/drawing/2014/main" id="{9A3F0CCE-1937-4A1F-85D3-D421BE50EDEE}"/>
+                <a16:creationId xmlns:a16="http://schemas.microsoft.com/office/drawing/2014/main" id="{BE047213-D143-4C78-8080-16168F66CCBF}"/>
               </a:ext>
             </a:extLst>
           </p:cNvPr>
@@ -22355,7 +22426,1128 @@
     </p:spTree>
     <p:extLst>
       <p:ext uri="{BB962C8B-B14F-4D97-AF65-F5344CB8AC3E}">
-        <p14:creationId xmlns:p14="http://schemas.microsoft.com/office/powerpoint/2010/main" val="1171115833"/>
+        <p14:creationId xmlns:p14="http://schemas.microsoft.com/office/powerpoint/2010/main" val="1300232263"/>
+      </p:ext>
+    </p:extLst>
+  </p:cSld>
+</p:sld>
+</file>
+
+<file path=ppt/slides/slide23.xml><?xml version="1.0" encoding="utf-8"?>
+<p:sld xmlns:p="http://schemas.openxmlformats.org/presentationml/2006/main">
+  <p:cSld>
+    <p:bg>
+      <p:bgPr>
+        <a:solidFill xmlns:a="http://schemas.openxmlformats.org/drawingml/2006/main">
+          <a:srgbClr val="FAFAF8"/>
+        </a:solidFill>
+      </p:bgPr>
+    </p:bg>
+    <p:spTree>
+      <p:nvGrpSpPr>
+        <p:cNvPr id="1" name=""/>
+        <p:cNvGrpSpPr/>
+        <p:nvPr/>
+      </p:nvGrpSpPr>
+      <p:grpSpPr>
+        <a:xfrm xmlns:a="http://schemas.openxmlformats.org/drawingml/2006/main"/>
+      </p:grpSpPr>
+      <p:sp>
+        <p:nvSpPr>
+          <p:cNvPr id="8" name="">
+            <a:extLst xmlns:a="http://schemas.openxmlformats.org/drawingml/2006/main">
+              <a:ext uri="{FF2B5EF4-FFF2-40B4-BE49-F238E27FC236}">
+                <a16:creationId xmlns:a16="http://schemas.microsoft.com/office/drawing/2014/main" id="{78E9FA32-6E00-4EFA-AC81-58441360E49C}"/>
+              </a:ext>
+            </a:extLst>
+          </p:cNvPr>
+          <p:cNvSpPr>
+            <a:spLocks xmlns:a="http://schemas.openxmlformats.org/drawingml/2006/main" noGrp="1"/>
+          </p:cNvSpPr>
+          <p:nvPr/>
+        </p:nvSpPr>
+        <p:spPr>
+          <a:xfrm xmlns:a="http://schemas.openxmlformats.org/drawingml/2006/main">
+            <a:off x="609600" y="457200"/>
+            <a:ext cx="10972800" cy="762000"/>
+          </a:xfrm>
+          <a:prstGeom xmlns:a="http://schemas.openxmlformats.org/drawingml/2006/main" prst="rect">
+            <a:avLst/>
+          </a:prstGeom>
+          <a:noFill xmlns:a="http://schemas.openxmlformats.org/drawingml/2006/main"/>
+          <a:ln xmlns:a="http://schemas.openxmlformats.org/drawingml/2006/main" w="0">
+            <a:noFill/>
+          </a:ln>
+        </p:spPr>
+        <p:txBody>
+          <a:bodyPr xmlns:a="http://schemas.openxmlformats.org/drawingml/2006/main"/>
+          <a:lstStyle xmlns:a="http://schemas.openxmlformats.org/drawingml/2006/main">
+            <a:defPPr>
+              <a:defRPr sz="3300" b="0">
+                <a:solidFill>
+                  <a:srgbClr val="17242B"/>
+                </a:solidFill>
+                <a:latin typeface="Arial"/>
+                <a:ea typeface="Arial"/>
+                <a:cs typeface="Arial"/>
+              </a:defRPr>
+            </a:defPPr>
+            <a:lvl1pPr>
+              <a:defRPr sz="3300" b="0">
+                <a:solidFill>
+                  <a:srgbClr val="17242B"/>
+                </a:solidFill>
+                <a:latin typeface="Arial"/>
+                <a:ea typeface="Arial"/>
+                <a:cs typeface="Arial"/>
+              </a:defRPr>
+            </a:lvl1pPr>
+            <a:lvl2pPr>
+              <a:defRPr sz="3300" b="0">
+                <a:solidFill>
+                  <a:srgbClr val="17242B"/>
+                </a:solidFill>
+                <a:latin typeface="Arial"/>
+                <a:ea typeface="Arial"/>
+                <a:cs typeface="Arial"/>
+              </a:defRPr>
+            </a:lvl2pPr>
+            <a:lvl3pPr>
+              <a:defRPr sz="3300" b="0">
+                <a:solidFill>
+                  <a:srgbClr val="17242B"/>
+                </a:solidFill>
+                <a:latin typeface="Arial"/>
+                <a:ea typeface="Arial"/>
+                <a:cs typeface="Arial"/>
+              </a:defRPr>
+            </a:lvl3pPr>
+            <a:lvl4pPr>
+              <a:defRPr sz="3300" b="0">
+                <a:solidFill>
+                  <a:srgbClr val="17242B"/>
+                </a:solidFill>
+                <a:latin typeface="Arial"/>
+                <a:ea typeface="Arial"/>
+                <a:cs typeface="Arial"/>
+              </a:defRPr>
+            </a:lvl4pPr>
+            <a:lvl5pPr>
+              <a:defRPr sz="3300" b="0">
+                <a:solidFill>
+                  <a:srgbClr val="17242B"/>
+                </a:solidFill>
+                <a:latin typeface="Arial"/>
+                <a:ea typeface="Arial"/>
+                <a:cs typeface="Arial"/>
+              </a:defRPr>
+            </a:lvl5pPr>
+            <a:lvl6pPr>
+              <a:defRPr sz="3300" b="0">
+                <a:solidFill>
+                  <a:srgbClr val="17242B"/>
+                </a:solidFill>
+                <a:latin typeface="Arial"/>
+                <a:ea typeface="Arial"/>
+                <a:cs typeface="Arial"/>
+              </a:defRPr>
+            </a:lvl6pPr>
+            <a:lvl7pPr>
+              <a:defRPr sz="3300" b="0">
+                <a:solidFill>
+                  <a:srgbClr val="17242B"/>
+                </a:solidFill>
+                <a:latin typeface="Arial"/>
+                <a:ea typeface="Arial"/>
+                <a:cs typeface="Arial"/>
+              </a:defRPr>
+            </a:lvl7pPr>
+            <a:lvl8pPr>
+              <a:defRPr sz="3300" b="0">
+                <a:solidFill>
+                  <a:srgbClr val="17242B"/>
+                </a:solidFill>
+                <a:latin typeface="Arial"/>
+                <a:ea typeface="Arial"/>
+                <a:cs typeface="Arial"/>
+              </a:defRPr>
+            </a:lvl8pPr>
+            <a:lvl9pPr>
+              <a:defRPr sz="3300" b="0">
+                <a:solidFill>
+                  <a:srgbClr val="17242B"/>
+                </a:solidFill>
+                <a:latin typeface="Arial"/>
+                <a:ea typeface="Arial"/>
+                <a:cs typeface="Arial"/>
+              </a:defRPr>
+            </a:lvl9pPr>
+          </a:lstStyle>
+          <a:p xmlns:a="http://schemas.openxmlformats.org/drawingml/2006/main">
+            <a:pPr>
+              <a:defRPr sz="3300" b="0">
+                <a:solidFill>
+                  <a:srgbClr val="17242B"/>
+                </a:solidFill>
+                <a:latin typeface="Arial"/>
+                <a:ea typeface="Arial"/>
+                <a:cs typeface="Arial"/>
+              </a:defRPr>
+            </a:pPr>
+            <a:r>
+              <a:rPr sz="3300" b="0">
+                <a:solidFill>
+                  <a:srgbClr val="17242B"/>
+                </a:solidFill>
+                <a:latin typeface="Arial"/>
+                <a:ea typeface="Arial"/>
+                <a:cs typeface="Arial"/>
+              </a:rPr>
+              <a:t>Reproducible demonstration</a:t>
+            </a:r>
+          </a:p>
+        </p:txBody>
+      </p:sp>
+      <p:sp>
+        <p:nvSpPr>
+          <p:cNvPr id="2" name="">
+            <a:extLst xmlns:a="http://schemas.openxmlformats.org/drawingml/2006/main">
+              <a:ext uri="{FF2B5EF4-FFF2-40B4-BE49-F238E27FC236}">
+                <a16:creationId xmlns:a16="http://schemas.microsoft.com/office/drawing/2014/main" id="{172D9CD0-0584-4C64-AA16-F1B18794E069}"/>
+              </a:ext>
+            </a:extLst>
+          </p:cNvPr>
+          <p:cNvSpPr>
+            <a:spLocks xmlns:a="http://schemas.openxmlformats.org/drawingml/2006/main" noGrp="1"/>
+          </p:cNvSpPr>
+          <p:nvPr/>
+        </p:nvSpPr>
+        <p:spPr>
+          <a:xfrm xmlns:a="http://schemas.openxmlformats.org/drawingml/2006/main">
+            <a:off x="609600" y="1257300"/>
+            <a:ext cx="10972800" cy="619125"/>
+          </a:xfrm>
+          <a:prstGeom xmlns:a="http://schemas.openxmlformats.org/drawingml/2006/main" prst="rect">
+            <a:avLst/>
+          </a:prstGeom>
+          <a:noFill xmlns:a="http://schemas.openxmlformats.org/drawingml/2006/main"/>
+          <a:ln xmlns:a="http://schemas.openxmlformats.org/drawingml/2006/main" w="0">
+            <a:noFill/>
+          </a:ln>
+        </p:spPr>
+        <p:txBody>
+          <a:bodyPr xmlns:a="http://schemas.openxmlformats.org/drawingml/2006/main"/>
+          <a:lstStyle xmlns:a="http://schemas.openxmlformats.org/drawingml/2006/main">
+            <a:defPPr>
+              <a:defRPr sz="1800" b="0">
+                <a:solidFill>
+                  <a:srgbClr val="65757B"/>
+                </a:solidFill>
+                <a:latin typeface="Arial"/>
+                <a:ea typeface="Arial"/>
+                <a:cs typeface="Arial"/>
+              </a:defRPr>
+            </a:defPPr>
+            <a:lvl1pPr>
+              <a:defRPr sz="1800" b="0">
+                <a:solidFill>
+                  <a:srgbClr val="65757B"/>
+                </a:solidFill>
+                <a:latin typeface="Arial"/>
+                <a:ea typeface="Arial"/>
+                <a:cs typeface="Arial"/>
+              </a:defRPr>
+            </a:lvl1pPr>
+            <a:lvl2pPr>
+              <a:defRPr sz="1800" b="0">
+                <a:solidFill>
+                  <a:srgbClr val="65757B"/>
+                </a:solidFill>
+                <a:latin typeface="Arial"/>
+                <a:ea typeface="Arial"/>
+                <a:cs typeface="Arial"/>
+              </a:defRPr>
+            </a:lvl2pPr>
+            <a:lvl3pPr>
+              <a:defRPr sz="1800" b="0">
+                <a:solidFill>
+                  <a:srgbClr val="65757B"/>
+                </a:solidFill>
+                <a:latin typeface="Arial"/>
+                <a:ea typeface="Arial"/>
+                <a:cs typeface="Arial"/>
+              </a:defRPr>
+            </a:lvl3pPr>
+            <a:lvl4pPr>
+              <a:defRPr sz="1800" b="0">
+                <a:solidFill>
+                  <a:srgbClr val="65757B"/>
+                </a:solidFill>
+                <a:latin typeface="Arial"/>
+                <a:ea typeface="Arial"/>
+                <a:cs typeface="Arial"/>
+              </a:defRPr>
+            </a:lvl4pPr>
+            <a:lvl5pPr>
+              <a:defRPr sz="1800" b="0">
+                <a:solidFill>
+                  <a:srgbClr val="65757B"/>
+                </a:solidFill>
+                <a:latin typeface="Arial"/>
+                <a:ea typeface="Arial"/>
+                <a:cs typeface="Arial"/>
+              </a:defRPr>
+            </a:lvl5pPr>
+            <a:lvl6pPr>
+              <a:defRPr sz="1800" b="0">
+                <a:solidFill>
+                  <a:srgbClr val="65757B"/>
+                </a:solidFill>
+                <a:latin typeface="Arial"/>
+                <a:ea typeface="Arial"/>
+                <a:cs typeface="Arial"/>
+              </a:defRPr>
+            </a:lvl6pPr>
+            <a:lvl7pPr>
+              <a:defRPr sz="1800" b="0">
+                <a:solidFill>
+                  <a:srgbClr val="65757B"/>
+                </a:solidFill>
+                <a:latin typeface="Arial"/>
+                <a:ea typeface="Arial"/>
+                <a:cs typeface="Arial"/>
+              </a:defRPr>
+            </a:lvl7pPr>
+            <a:lvl8pPr>
+              <a:defRPr sz="1800" b="0">
+                <a:solidFill>
+                  <a:srgbClr val="65757B"/>
+                </a:solidFill>
+                <a:latin typeface="Arial"/>
+                <a:ea typeface="Arial"/>
+                <a:cs typeface="Arial"/>
+              </a:defRPr>
+            </a:lvl8pPr>
+            <a:lvl9pPr>
+              <a:defRPr sz="1800" b="0">
+                <a:solidFill>
+                  <a:srgbClr val="65757B"/>
+                </a:solidFill>
+                <a:latin typeface="Arial"/>
+                <a:ea typeface="Arial"/>
+                <a:cs typeface="Arial"/>
+              </a:defRPr>
+            </a:lvl9pPr>
+          </a:lstStyle>
+          <a:p xmlns:a="http://schemas.openxmlformats.org/drawingml/2006/main">
+            <a:pPr>
+              <a:defRPr sz="1800" b="0">
+                <a:solidFill>
+                  <a:srgbClr val="65757B"/>
+                </a:solidFill>
+                <a:latin typeface="Arial"/>
+                <a:ea typeface="Arial"/>
+                <a:cs typeface="Arial"/>
+              </a:defRPr>
+            </a:pPr>
+            <a:r>
+              <a:rPr sz="1800" b="0">
+                <a:solidFill>
+                  <a:srgbClr val="65757B"/>
+                </a:solidFill>
+                <a:latin typeface="Arial"/>
+                <a:ea typeface="Arial"/>
+                <a:cs typeface="Arial"/>
+              </a:rPr>
+              <a:t>Public source, inspectable artifacts and explicit next work</a:t>
+            </a:r>
+          </a:p>
+        </p:txBody>
+      </p:sp>
+      <p:sp>
+        <p:nvSpPr>
+          <p:cNvPr id="3" name="">
+            <a:extLst xmlns:a="http://schemas.openxmlformats.org/drawingml/2006/main">
+              <a:ext uri="{FF2B5EF4-FFF2-40B4-BE49-F238E27FC236}">
+                <a16:creationId xmlns:a16="http://schemas.microsoft.com/office/drawing/2014/main" id="{7D5D87CE-C7F2-4FEE-B16C-A1F36033DFAB}"/>
+              </a:ext>
+            </a:extLst>
+          </p:cNvPr>
+          <p:cNvSpPr>
+            <a:spLocks xmlns:a="http://schemas.openxmlformats.org/drawingml/2006/main" noGrp="1"/>
+          </p:cNvSpPr>
+          <p:nvPr/>
+        </p:nvSpPr>
+        <p:spPr>
+          <a:xfrm xmlns:a="http://schemas.openxmlformats.org/drawingml/2006/main">
+            <a:off x="704850" y="2190750"/>
+            <a:ext cx="10668000" cy="838200"/>
+          </a:xfrm>
+          <a:prstGeom xmlns:a="http://schemas.openxmlformats.org/drawingml/2006/main" prst="rect">
+            <a:avLst/>
+          </a:prstGeom>
+          <a:noFill xmlns:a="http://schemas.openxmlformats.org/drawingml/2006/main"/>
+          <a:ln xmlns:a="http://schemas.openxmlformats.org/drawingml/2006/main" w="0">
+            <a:noFill/>
+          </a:ln>
+        </p:spPr>
+        <p:txBody>
+          <a:bodyPr xmlns:a="http://schemas.openxmlformats.org/drawingml/2006/main"/>
+          <a:lstStyle xmlns:a="http://schemas.openxmlformats.org/drawingml/2006/main">
+            <a:defPPr>
+              <a:defRPr sz="2250" b="0">
+                <a:solidFill>
+                  <a:srgbClr val="0E766E"/>
+                </a:solidFill>
+                <a:latin typeface="Arial"/>
+                <a:ea typeface="Arial"/>
+                <a:cs typeface="Arial"/>
+              </a:defRPr>
+            </a:defPPr>
+            <a:lvl1pPr>
+              <a:defRPr sz="2250" b="0">
+                <a:solidFill>
+                  <a:srgbClr val="0E766E"/>
+                </a:solidFill>
+                <a:latin typeface="Arial"/>
+                <a:ea typeface="Arial"/>
+                <a:cs typeface="Arial"/>
+              </a:defRPr>
+            </a:lvl1pPr>
+            <a:lvl2pPr>
+              <a:defRPr sz="2250" b="0">
+                <a:solidFill>
+                  <a:srgbClr val="0E766E"/>
+                </a:solidFill>
+                <a:latin typeface="Arial"/>
+                <a:ea typeface="Arial"/>
+                <a:cs typeface="Arial"/>
+              </a:defRPr>
+            </a:lvl2pPr>
+            <a:lvl3pPr>
+              <a:defRPr sz="2250" b="0">
+                <a:solidFill>
+                  <a:srgbClr val="0E766E"/>
+                </a:solidFill>
+                <a:latin typeface="Arial"/>
+                <a:ea typeface="Arial"/>
+                <a:cs typeface="Arial"/>
+              </a:defRPr>
+            </a:lvl3pPr>
+            <a:lvl4pPr>
+              <a:defRPr sz="2250" b="0">
+                <a:solidFill>
+                  <a:srgbClr val="0E766E"/>
+                </a:solidFill>
+                <a:latin typeface="Arial"/>
+                <a:ea typeface="Arial"/>
+                <a:cs typeface="Arial"/>
+              </a:defRPr>
+            </a:lvl4pPr>
+            <a:lvl5pPr>
+              <a:defRPr sz="2250" b="0">
+                <a:solidFill>
+                  <a:srgbClr val="0E766E"/>
+                </a:solidFill>
+                <a:latin typeface="Arial"/>
+                <a:ea typeface="Arial"/>
+                <a:cs typeface="Arial"/>
+              </a:defRPr>
+            </a:lvl5pPr>
+            <a:lvl6pPr>
+              <a:defRPr sz="2250" b="0">
+                <a:solidFill>
+                  <a:srgbClr val="0E766E"/>
+                </a:solidFill>
+                <a:latin typeface="Arial"/>
+                <a:ea typeface="Arial"/>
+                <a:cs typeface="Arial"/>
+              </a:defRPr>
+            </a:lvl6pPr>
+            <a:lvl7pPr>
+              <a:defRPr sz="2250" b="0">
+                <a:solidFill>
+                  <a:srgbClr val="0E766E"/>
+                </a:solidFill>
+                <a:latin typeface="Arial"/>
+                <a:ea typeface="Arial"/>
+                <a:cs typeface="Arial"/>
+              </a:defRPr>
+            </a:lvl7pPr>
+            <a:lvl8pPr>
+              <a:defRPr sz="2250" b="0">
+                <a:solidFill>
+                  <a:srgbClr val="0E766E"/>
+                </a:solidFill>
+                <a:latin typeface="Arial"/>
+                <a:ea typeface="Arial"/>
+                <a:cs typeface="Arial"/>
+              </a:defRPr>
+            </a:lvl8pPr>
+            <a:lvl9pPr>
+              <a:defRPr sz="2250" b="0">
+                <a:solidFill>
+                  <a:srgbClr val="0E766E"/>
+                </a:solidFill>
+                <a:latin typeface="Arial"/>
+                <a:ea typeface="Arial"/>
+                <a:cs typeface="Arial"/>
+              </a:defRPr>
+            </a:lvl9pPr>
+          </a:lstStyle>
+          <a:p xmlns:a="http://schemas.openxmlformats.org/drawingml/2006/main">
+            <a:pPr>
+              <a:defRPr sz="2250" b="0">
+                <a:solidFill>
+                  <a:srgbClr val="0E766E"/>
+                </a:solidFill>
+                <a:latin typeface="Arial"/>
+                <a:ea typeface="Arial"/>
+                <a:cs typeface="Arial"/>
+              </a:defRPr>
+            </a:pPr>
+            <a:r>
+              <a:rPr sz="2250" b="0">
+                <a:solidFill>
+                  <a:srgbClr val="0E766E"/>
+                </a:solidFill>
+                <a:latin typeface="Arial"/>
+                <a:ea typeface="Arial"/>
+                <a:cs typeface="Arial"/>
+              </a:rPr>
+              <a:t>README, model cards and the audit link every claim to evidence</a:t>
+            </a:r>
+          </a:p>
+        </p:txBody>
+      </p:sp>
+      <p:sp>
+        <p:nvSpPr>
+          <p:cNvPr id="4" name="">
+            <a:extLst xmlns:a="http://schemas.openxmlformats.org/drawingml/2006/main">
+              <a:ext uri="{FF2B5EF4-FFF2-40B4-BE49-F238E27FC236}">
+                <a16:creationId xmlns:a16="http://schemas.microsoft.com/office/drawing/2014/main" id="{1DAAB8CC-7E64-4FC1-8EF8-4CE24E8E77B7}"/>
+              </a:ext>
+            </a:extLst>
+          </p:cNvPr>
+          <p:cNvSpPr>
+            <a:spLocks xmlns:a="http://schemas.openxmlformats.org/drawingml/2006/main" noGrp="1"/>
+          </p:cNvSpPr>
+          <p:nvPr/>
+        </p:nvSpPr>
+        <p:spPr>
+          <a:xfrm xmlns:a="http://schemas.openxmlformats.org/drawingml/2006/main">
+            <a:off x="704850" y="3119438"/>
+            <a:ext cx="10668000" cy="838200"/>
+          </a:xfrm>
+          <a:prstGeom xmlns:a="http://schemas.openxmlformats.org/drawingml/2006/main" prst="rect">
+            <a:avLst/>
+          </a:prstGeom>
+          <a:noFill xmlns:a="http://schemas.openxmlformats.org/drawingml/2006/main"/>
+          <a:ln xmlns:a="http://schemas.openxmlformats.org/drawingml/2006/main" w="0">
+            <a:noFill/>
+          </a:ln>
+        </p:spPr>
+        <p:txBody>
+          <a:bodyPr xmlns:a="http://schemas.openxmlformats.org/drawingml/2006/main"/>
+          <a:lstStyle xmlns:a="http://schemas.openxmlformats.org/drawingml/2006/main">
+            <a:defPPr>
+              <a:defRPr sz="2250" b="0">
+                <a:solidFill>
+                  <a:srgbClr val="17242B"/>
+                </a:solidFill>
+                <a:latin typeface="Arial"/>
+                <a:ea typeface="Arial"/>
+                <a:cs typeface="Arial"/>
+              </a:defRPr>
+            </a:defPPr>
+            <a:lvl1pPr>
+              <a:defRPr sz="2250" b="0">
+                <a:solidFill>
+                  <a:srgbClr val="17242B"/>
+                </a:solidFill>
+                <a:latin typeface="Arial"/>
+                <a:ea typeface="Arial"/>
+                <a:cs typeface="Arial"/>
+              </a:defRPr>
+            </a:lvl1pPr>
+            <a:lvl2pPr>
+              <a:defRPr sz="2250" b="0">
+                <a:solidFill>
+                  <a:srgbClr val="17242B"/>
+                </a:solidFill>
+                <a:latin typeface="Arial"/>
+                <a:ea typeface="Arial"/>
+                <a:cs typeface="Arial"/>
+              </a:defRPr>
+            </a:lvl2pPr>
+            <a:lvl3pPr>
+              <a:defRPr sz="2250" b="0">
+                <a:solidFill>
+                  <a:srgbClr val="17242B"/>
+                </a:solidFill>
+                <a:latin typeface="Arial"/>
+                <a:ea typeface="Arial"/>
+                <a:cs typeface="Arial"/>
+              </a:defRPr>
+            </a:lvl3pPr>
+            <a:lvl4pPr>
+              <a:defRPr sz="2250" b="0">
+                <a:solidFill>
+                  <a:srgbClr val="17242B"/>
+                </a:solidFill>
+                <a:latin typeface="Arial"/>
+                <a:ea typeface="Arial"/>
+                <a:cs typeface="Arial"/>
+              </a:defRPr>
+            </a:lvl4pPr>
+            <a:lvl5pPr>
+              <a:defRPr sz="2250" b="0">
+                <a:solidFill>
+                  <a:srgbClr val="17242B"/>
+                </a:solidFill>
+                <a:latin typeface="Arial"/>
+                <a:ea typeface="Arial"/>
+                <a:cs typeface="Arial"/>
+              </a:defRPr>
+            </a:lvl5pPr>
+            <a:lvl6pPr>
+              <a:defRPr sz="2250" b="0">
+                <a:solidFill>
+                  <a:srgbClr val="17242B"/>
+                </a:solidFill>
+                <a:latin typeface="Arial"/>
+                <a:ea typeface="Arial"/>
+                <a:cs typeface="Arial"/>
+              </a:defRPr>
+            </a:lvl6pPr>
+            <a:lvl7pPr>
+              <a:defRPr sz="2250" b="0">
+                <a:solidFill>
+                  <a:srgbClr val="17242B"/>
+                </a:solidFill>
+                <a:latin typeface="Arial"/>
+                <a:ea typeface="Arial"/>
+                <a:cs typeface="Arial"/>
+              </a:defRPr>
+            </a:lvl7pPr>
+            <a:lvl8pPr>
+              <a:defRPr sz="2250" b="0">
+                <a:solidFill>
+                  <a:srgbClr val="17242B"/>
+                </a:solidFill>
+                <a:latin typeface="Arial"/>
+                <a:ea typeface="Arial"/>
+                <a:cs typeface="Arial"/>
+              </a:defRPr>
+            </a:lvl8pPr>
+            <a:lvl9pPr>
+              <a:defRPr sz="2250" b="0">
+                <a:solidFill>
+                  <a:srgbClr val="17242B"/>
+                </a:solidFill>
+                <a:latin typeface="Arial"/>
+                <a:ea typeface="Arial"/>
+                <a:cs typeface="Arial"/>
+              </a:defRPr>
+            </a:lvl9pPr>
+          </a:lstStyle>
+          <a:p xmlns:a="http://schemas.openxmlformats.org/drawingml/2006/main">
+            <a:pPr>
+              <a:defRPr sz="2250" b="0">
+                <a:solidFill>
+                  <a:srgbClr val="17242B"/>
+                </a:solidFill>
+                <a:latin typeface="Arial"/>
+                <a:ea typeface="Arial"/>
+                <a:cs typeface="Arial"/>
+              </a:defRPr>
+            </a:pPr>
+            <a:r>
+              <a:rPr sz="2250" b="0">
+                <a:solidFill>
+                  <a:srgbClr val="17242B"/>
+                </a:solidFill>
+                <a:latin typeface="Arial"/>
+                <a:ea typeface="Arial"/>
+                <a:cs typeface="Arial"/>
+              </a:rPr>
+              <a:t>Persisted inference reproduces the benchmark and exposes exact feature calculations</a:t>
+            </a:r>
+          </a:p>
+        </p:txBody>
+      </p:sp>
+      <p:sp>
+        <p:nvSpPr>
+          <p:cNvPr id="5" name="">
+            <a:extLst xmlns:a="http://schemas.openxmlformats.org/drawingml/2006/main">
+              <a:ext uri="{FF2B5EF4-FFF2-40B4-BE49-F238E27FC236}">
+                <a16:creationId xmlns:a16="http://schemas.microsoft.com/office/drawing/2014/main" id="{C2F993E3-3AE9-4311-8F99-D7E028B0E653}"/>
+              </a:ext>
+            </a:extLst>
+          </p:cNvPr>
+          <p:cNvSpPr>
+            <a:spLocks xmlns:a="http://schemas.openxmlformats.org/drawingml/2006/main" noGrp="1"/>
+          </p:cNvSpPr>
+          <p:nvPr/>
+        </p:nvSpPr>
+        <p:spPr>
+          <a:xfrm xmlns:a="http://schemas.openxmlformats.org/drawingml/2006/main">
+            <a:off x="704850" y="4048125"/>
+            <a:ext cx="10668000" cy="838200"/>
+          </a:xfrm>
+          <a:prstGeom xmlns:a="http://schemas.openxmlformats.org/drawingml/2006/main" prst="rect">
+            <a:avLst/>
+          </a:prstGeom>
+          <a:noFill xmlns:a="http://schemas.openxmlformats.org/drawingml/2006/main"/>
+          <a:ln xmlns:a="http://schemas.openxmlformats.org/drawingml/2006/main" w="0">
+            <a:noFill/>
+          </a:ln>
+        </p:spPr>
+        <p:txBody>
+          <a:bodyPr xmlns:a="http://schemas.openxmlformats.org/drawingml/2006/main"/>
+          <a:lstStyle xmlns:a="http://schemas.openxmlformats.org/drawingml/2006/main">
+            <a:defPPr>
+              <a:defRPr sz="2250" b="0">
+                <a:solidFill>
+                  <a:srgbClr val="17242B"/>
+                </a:solidFill>
+                <a:latin typeface="Arial"/>
+                <a:ea typeface="Arial"/>
+                <a:cs typeface="Arial"/>
+              </a:defRPr>
+            </a:defPPr>
+            <a:lvl1pPr>
+              <a:defRPr sz="2250" b="0">
+                <a:solidFill>
+                  <a:srgbClr val="17242B"/>
+                </a:solidFill>
+                <a:latin typeface="Arial"/>
+                <a:ea typeface="Arial"/>
+                <a:cs typeface="Arial"/>
+              </a:defRPr>
+            </a:lvl1pPr>
+            <a:lvl2pPr>
+              <a:defRPr sz="2250" b="0">
+                <a:solidFill>
+                  <a:srgbClr val="17242B"/>
+                </a:solidFill>
+                <a:latin typeface="Arial"/>
+                <a:ea typeface="Arial"/>
+                <a:cs typeface="Arial"/>
+              </a:defRPr>
+            </a:lvl2pPr>
+            <a:lvl3pPr>
+              <a:defRPr sz="2250" b="0">
+                <a:solidFill>
+                  <a:srgbClr val="17242B"/>
+                </a:solidFill>
+                <a:latin typeface="Arial"/>
+                <a:ea typeface="Arial"/>
+                <a:cs typeface="Arial"/>
+              </a:defRPr>
+            </a:lvl3pPr>
+            <a:lvl4pPr>
+              <a:defRPr sz="2250" b="0">
+                <a:solidFill>
+                  <a:srgbClr val="17242B"/>
+                </a:solidFill>
+                <a:latin typeface="Arial"/>
+                <a:ea typeface="Arial"/>
+                <a:cs typeface="Arial"/>
+              </a:defRPr>
+            </a:lvl4pPr>
+            <a:lvl5pPr>
+              <a:defRPr sz="2250" b="0">
+                <a:solidFill>
+                  <a:srgbClr val="17242B"/>
+                </a:solidFill>
+                <a:latin typeface="Arial"/>
+                <a:ea typeface="Arial"/>
+                <a:cs typeface="Arial"/>
+              </a:defRPr>
+            </a:lvl5pPr>
+            <a:lvl6pPr>
+              <a:defRPr sz="2250" b="0">
+                <a:solidFill>
+                  <a:srgbClr val="17242B"/>
+                </a:solidFill>
+                <a:latin typeface="Arial"/>
+                <a:ea typeface="Arial"/>
+                <a:cs typeface="Arial"/>
+              </a:defRPr>
+            </a:lvl6pPr>
+            <a:lvl7pPr>
+              <a:defRPr sz="2250" b="0">
+                <a:solidFill>
+                  <a:srgbClr val="17242B"/>
+                </a:solidFill>
+                <a:latin typeface="Arial"/>
+                <a:ea typeface="Arial"/>
+                <a:cs typeface="Arial"/>
+              </a:defRPr>
+            </a:lvl7pPr>
+            <a:lvl8pPr>
+              <a:defRPr sz="2250" b="0">
+                <a:solidFill>
+                  <a:srgbClr val="17242B"/>
+                </a:solidFill>
+                <a:latin typeface="Arial"/>
+                <a:ea typeface="Arial"/>
+                <a:cs typeface="Arial"/>
+              </a:defRPr>
+            </a:lvl8pPr>
+            <a:lvl9pPr>
+              <a:defRPr sz="2250" b="0">
+                <a:solidFill>
+                  <a:srgbClr val="17242B"/>
+                </a:solidFill>
+                <a:latin typeface="Arial"/>
+                <a:ea typeface="Arial"/>
+                <a:cs typeface="Arial"/>
+              </a:defRPr>
+            </a:lvl9pPr>
+          </a:lstStyle>
+          <a:p xmlns:a="http://schemas.openxmlformats.org/drawingml/2006/main">
+            <a:pPr>
+              <a:defRPr sz="2250" b="0">
+                <a:solidFill>
+                  <a:srgbClr val="17242B"/>
+                </a:solidFill>
+                <a:latin typeface="Arial"/>
+                <a:ea typeface="Arial"/>
+                <a:cs typeface="Arial"/>
+              </a:defRPr>
+            </a:pPr>
+            <a:r>
+              <a:rPr sz="2250" b="0">
+                <a:solidFill>
+                  <a:srgbClr val="17242B"/>
+                </a:solidFill>
+                <a:latin typeface="Arial"/>
+                <a:ea typeface="Arial"/>
+                <a:cs typeface="Arial"/>
+              </a:rPr>
+              <a:t>The required video remains a human recording and upload task</a:t>
+            </a:r>
+          </a:p>
+        </p:txBody>
+      </p:sp>
+      <p:sp>
+        <p:nvSpPr>
+          <p:cNvPr id="6" name="">
+            <a:extLst xmlns:a="http://schemas.openxmlformats.org/drawingml/2006/main">
+              <a:ext uri="{FF2B5EF4-FFF2-40B4-BE49-F238E27FC236}">
+                <a16:creationId xmlns:a16="http://schemas.microsoft.com/office/drawing/2014/main" id="{945173F9-CD06-40F4-9D2D-00F94B22E83C}"/>
+              </a:ext>
+            </a:extLst>
+          </p:cNvPr>
+          <p:cNvSpPr>
+            <a:spLocks xmlns:a="http://schemas.openxmlformats.org/drawingml/2006/main" noGrp="1"/>
+          </p:cNvSpPr>
+          <p:nvPr/>
+        </p:nvSpPr>
+        <p:spPr>
+          <a:xfrm xmlns:a="http://schemas.openxmlformats.org/drawingml/2006/main">
+            <a:off x="704850" y="4976813"/>
+            <a:ext cx="10668000" cy="838200"/>
+          </a:xfrm>
+          <a:prstGeom xmlns:a="http://schemas.openxmlformats.org/drawingml/2006/main" prst="rect">
+            <a:avLst/>
+          </a:prstGeom>
+          <a:noFill xmlns:a="http://schemas.openxmlformats.org/drawingml/2006/main"/>
+          <a:ln xmlns:a="http://schemas.openxmlformats.org/drawingml/2006/main" w="0">
+            <a:noFill/>
+          </a:ln>
+        </p:spPr>
+        <p:txBody>
+          <a:bodyPr xmlns:a="http://schemas.openxmlformats.org/drawingml/2006/main"/>
+          <a:lstStyle xmlns:a="http://schemas.openxmlformats.org/drawingml/2006/main">
+            <a:defPPr>
+              <a:defRPr sz="2250" b="0">
+                <a:solidFill>
+                  <a:srgbClr val="17242B"/>
+                </a:solidFill>
+                <a:latin typeface="Arial"/>
+                <a:ea typeface="Arial"/>
+                <a:cs typeface="Arial"/>
+              </a:defRPr>
+            </a:defPPr>
+            <a:lvl1pPr>
+              <a:defRPr sz="2250" b="0">
+                <a:solidFill>
+                  <a:srgbClr val="17242B"/>
+                </a:solidFill>
+                <a:latin typeface="Arial"/>
+                <a:ea typeface="Arial"/>
+                <a:cs typeface="Arial"/>
+              </a:defRPr>
+            </a:lvl1pPr>
+            <a:lvl2pPr>
+              <a:defRPr sz="2250" b="0">
+                <a:solidFill>
+                  <a:srgbClr val="17242B"/>
+                </a:solidFill>
+                <a:latin typeface="Arial"/>
+                <a:ea typeface="Arial"/>
+                <a:cs typeface="Arial"/>
+              </a:defRPr>
+            </a:lvl2pPr>
+            <a:lvl3pPr>
+              <a:defRPr sz="2250" b="0">
+                <a:solidFill>
+                  <a:srgbClr val="17242B"/>
+                </a:solidFill>
+                <a:latin typeface="Arial"/>
+                <a:ea typeface="Arial"/>
+                <a:cs typeface="Arial"/>
+              </a:defRPr>
+            </a:lvl3pPr>
+            <a:lvl4pPr>
+              <a:defRPr sz="2250" b="0">
+                <a:solidFill>
+                  <a:srgbClr val="17242B"/>
+                </a:solidFill>
+                <a:latin typeface="Arial"/>
+                <a:ea typeface="Arial"/>
+                <a:cs typeface="Arial"/>
+              </a:defRPr>
+            </a:lvl4pPr>
+            <a:lvl5pPr>
+              <a:defRPr sz="2250" b="0">
+                <a:solidFill>
+                  <a:srgbClr val="17242B"/>
+                </a:solidFill>
+                <a:latin typeface="Arial"/>
+                <a:ea typeface="Arial"/>
+                <a:cs typeface="Arial"/>
+              </a:defRPr>
+            </a:lvl5pPr>
+            <a:lvl6pPr>
+              <a:defRPr sz="2250" b="0">
+                <a:solidFill>
+                  <a:srgbClr val="17242B"/>
+                </a:solidFill>
+                <a:latin typeface="Arial"/>
+                <a:ea typeface="Arial"/>
+                <a:cs typeface="Arial"/>
+              </a:defRPr>
+            </a:lvl6pPr>
+            <a:lvl7pPr>
+              <a:defRPr sz="2250" b="0">
+                <a:solidFill>
+                  <a:srgbClr val="17242B"/>
+                </a:solidFill>
+                <a:latin typeface="Arial"/>
+                <a:ea typeface="Arial"/>
+                <a:cs typeface="Arial"/>
+              </a:defRPr>
+            </a:lvl7pPr>
+            <a:lvl8pPr>
+              <a:defRPr sz="2250" b="0">
+                <a:solidFill>
+                  <a:srgbClr val="17242B"/>
+                </a:solidFill>
+                <a:latin typeface="Arial"/>
+                <a:ea typeface="Arial"/>
+                <a:cs typeface="Arial"/>
+              </a:defRPr>
+            </a:lvl8pPr>
+            <a:lvl9pPr>
+              <a:defRPr sz="2250" b="0">
+                <a:solidFill>
+                  <a:srgbClr val="17242B"/>
+                </a:solidFill>
+                <a:latin typeface="Arial"/>
+                <a:ea typeface="Arial"/>
+                <a:cs typeface="Arial"/>
+              </a:defRPr>
+            </a:lvl9pPr>
+          </a:lstStyle>
+          <a:p xmlns:a="http://schemas.openxmlformats.org/drawingml/2006/main">
+            <a:pPr>
+              <a:defRPr sz="2250" b="0">
+                <a:solidFill>
+                  <a:srgbClr val="17242B"/>
+                </a:solidFill>
+                <a:latin typeface="Arial"/>
+                <a:ea typeface="Arial"/>
+                <a:cs typeface="Arial"/>
+              </a:defRPr>
+            </a:pPr>
+            <a:r>
+              <a:rPr sz="2250" b="0">
+                <a:solidFill>
+                  <a:srgbClr val="17242B"/>
+                </a:solidFill>
+                <a:latin typeface="Arial"/>
+                <a:ea typeface="Arial"/>
+                <a:cs typeface="Arial"/>
+              </a:rPr>
+              <a:t>Clinical validation, clinician feedback and sim-to-real evaluation remain outstanding</a:t>
+            </a:r>
+          </a:p>
+        </p:txBody>
+      </p:sp>
+      <p:sp>
+        <p:nvSpPr>
+          <p:cNvPr id="7" name="">
+            <a:extLst xmlns:a="http://schemas.openxmlformats.org/drawingml/2006/main">
+              <a:ext uri="{FF2B5EF4-FFF2-40B4-BE49-F238E27FC236}">
+                <a16:creationId xmlns:a16="http://schemas.microsoft.com/office/drawing/2014/main" id="{68981588-220A-4C8D-B876-A21ADE90ABE5}"/>
+              </a:ext>
+            </a:extLst>
+          </p:cNvPr>
+          <p:cNvSpPr>
+            <a:spLocks xmlns:a="http://schemas.openxmlformats.org/drawingml/2006/main" noGrp="1"/>
+          </p:cNvSpPr>
+          <p:nvPr/>
+        </p:nvSpPr>
+        <p:spPr>
+          <a:xfrm xmlns:a="http://schemas.openxmlformats.org/drawingml/2006/main">
+            <a:off x="609600" y="6343650"/>
+            <a:ext cx="10972800" cy="285750"/>
+          </a:xfrm>
+          <a:prstGeom xmlns:a="http://schemas.openxmlformats.org/drawingml/2006/main" prst="rect">
+            <a:avLst/>
+          </a:prstGeom>
+          <a:noFill xmlns:a="http://schemas.openxmlformats.org/drawingml/2006/main"/>
+          <a:ln xmlns:a="http://schemas.openxmlformats.org/drawingml/2006/main" w="0">
+            <a:noFill/>
+          </a:ln>
+        </p:spPr>
+        <p:txBody>
+          <a:bodyPr xmlns:a="http://schemas.openxmlformats.org/drawingml/2006/main"/>
+          <a:lstStyle xmlns:a="http://schemas.openxmlformats.org/drawingml/2006/main">
+            <a:defPPr>
+              <a:defRPr sz="1350" b="0">
+                <a:solidFill>
+                  <a:srgbClr val="65757B"/>
+                </a:solidFill>
+                <a:latin typeface="Arial"/>
+                <a:ea typeface="Arial"/>
+                <a:cs typeface="Arial"/>
+              </a:defRPr>
+            </a:defPPr>
+            <a:lvl1pPr>
+              <a:defRPr sz="1350" b="0">
+                <a:solidFill>
+                  <a:srgbClr val="65757B"/>
+                </a:solidFill>
+                <a:latin typeface="Arial"/>
+                <a:ea typeface="Arial"/>
+                <a:cs typeface="Arial"/>
+              </a:defRPr>
+            </a:lvl1pPr>
+            <a:lvl2pPr>
+              <a:defRPr sz="1350" b="0">
+                <a:solidFill>
+                  <a:srgbClr val="65757B"/>
+                </a:solidFill>
+                <a:latin typeface="Arial"/>
+                <a:ea typeface="Arial"/>
+                <a:cs typeface="Arial"/>
+              </a:defRPr>
+            </a:lvl2pPr>
+            <a:lvl3pPr>
+              <a:defRPr sz="1350" b="0">
+                <a:solidFill>
+                  <a:srgbClr val="65757B"/>
+                </a:solidFill>
+                <a:latin typeface="Arial"/>
+                <a:ea typeface="Arial"/>
+                <a:cs typeface="Arial"/>
+              </a:defRPr>
+            </a:lvl3pPr>
+            <a:lvl4pPr>
+              <a:defRPr sz="1350" b="0">
+                <a:solidFill>
+                  <a:srgbClr val="65757B"/>
+                </a:solidFill>
+                <a:latin typeface="Arial"/>
+                <a:ea typeface="Arial"/>
+                <a:cs typeface="Arial"/>
+              </a:defRPr>
+            </a:lvl4pPr>
+            <a:lvl5pPr>
+              <a:defRPr sz="1350" b="0">
+                <a:solidFill>
+                  <a:srgbClr val="65757B"/>
+                </a:solidFill>
+                <a:latin typeface="Arial"/>
+                <a:ea typeface="Arial"/>
+                <a:cs typeface="Arial"/>
+              </a:defRPr>
+            </a:lvl5pPr>
+            <a:lvl6pPr>
+              <a:defRPr sz="1350" b="0">
+                <a:solidFill>
+                  <a:srgbClr val="65757B"/>
+                </a:solidFill>
+                <a:latin typeface="Arial"/>
+                <a:ea typeface="Arial"/>
+                <a:cs typeface="Arial"/>
+              </a:defRPr>
+            </a:lvl6pPr>
+            <a:lvl7pPr>
+              <a:defRPr sz="1350" b="0">
+                <a:solidFill>
+                  <a:srgbClr val="65757B"/>
+                </a:solidFill>
+                <a:latin typeface="Arial"/>
+                <a:ea typeface="Arial"/>
+                <a:cs typeface="Arial"/>
+              </a:defRPr>
+            </a:lvl7pPr>
+            <a:lvl8pPr>
+              <a:defRPr sz="1350" b="0">
+                <a:solidFill>
+                  <a:srgbClr val="65757B"/>
+                </a:solidFill>
+                <a:latin typeface="Arial"/>
+                <a:ea typeface="Arial"/>
+                <a:cs typeface="Arial"/>
+              </a:defRPr>
+            </a:lvl8pPr>
+            <a:lvl9pPr>
+              <a:defRPr sz="1350" b="0">
+                <a:solidFill>
+                  <a:srgbClr val="65757B"/>
+                </a:solidFill>
+                <a:latin typeface="Arial"/>
+                <a:ea typeface="Arial"/>
+                <a:cs typeface="Arial"/>
+              </a:defRPr>
+            </a:lvl9pPr>
+          </a:lstStyle>
+          <a:p xmlns:a="http://schemas.openxmlformats.org/drawingml/2006/main">
+            <a:pPr>
+              <a:defRPr sz="1350" b="0">
+                <a:solidFill>
+                  <a:srgbClr val="65757B"/>
+                </a:solidFill>
+                <a:latin typeface="Arial"/>
+                <a:ea typeface="Arial"/>
+                <a:cs typeface="Arial"/>
+              </a:defRPr>
+            </a:pPr>
+            <a:r>
+              <a:rPr sz="1350" b="0">
+                <a:solidFill>
+                  <a:srgbClr val="65757B"/>
+                </a:solidFill>
+                <a:latin typeface="Arial"/>
+                <a:ea typeface="Arial"/>
+                <a:cs typeface="Arial"/>
+              </a:rPr>
+              <a:t>Synthetic research prototype. Not for diagnosis, contraception or conception planning.</a:t>
+            </a:r>
+          </a:p>
+        </p:txBody>
+      </p:sp>
+    </p:spTree>
+    <p:extLst>
+      <p:ext uri="{BB962C8B-B14F-4D97-AF65-F5344CB8AC3E}">
+        <p14:creationId xmlns:p14="http://schemas.microsoft.com/office/powerpoint/2010/main" val="1856834996"/>
       </p:ext>
     </p:extLst>
   </p:cSld>
@@ -22386,7 +23578,7 @@
           <p:cNvPr id="8" name="">
             <a:extLst xmlns:a="http://schemas.openxmlformats.org/drawingml/2006/main">
               <a:ext uri="{FF2B5EF4-FFF2-40B4-BE49-F238E27FC236}">
-                <a16:creationId xmlns:a16="http://schemas.microsoft.com/office/drawing/2014/main" id="{6E2BCE6F-83A8-4920-A9FF-B6BC0BB570BC}"/>
+                <a16:creationId xmlns:a16="http://schemas.microsoft.com/office/drawing/2014/main" id="{BEFE7DDA-9232-46F8-975F-01B62424CD8E}"/>
               </a:ext>
             </a:extLst>
           </p:cNvPr>
@@ -22542,7 +23734,7 @@
           <p:cNvPr id="2" name="">
             <a:extLst xmlns:a="http://schemas.openxmlformats.org/drawingml/2006/main">
               <a:ext uri="{FF2B5EF4-FFF2-40B4-BE49-F238E27FC236}">
-                <a16:creationId xmlns:a16="http://schemas.microsoft.com/office/drawing/2014/main" id="{04F479DD-8DBD-43D5-861C-6F956325A4A8}"/>
+                <a16:creationId xmlns:a16="http://schemas.microsoft.com/office/drawing/2014/main" id="{C6E8D386-77C2-4000-A267-325C82EEB31F}"/>
               </a:ext>
             </a:extLst>
           </p:cNvPr>
@@ -22698,7 +23890,7 @@
           <p:cNvPr id="3" name="">
             <a:extLst xmlns:a="http://schemas.openxmlformats.org/drawingml/2006/main">
               <a:ext uri="{FF2B5EF4-FFF2-40B4-BE49-F238E27FC236}">
-                <a16:creationId xmlns:a16="http://schemas.microsoft.com/office/drawing/2014/main" id="{938B1AEC-D627-4297-9C1C-0852F495D636}"/>
+                <a16:creationId xmlns:a16="http://schemas.microsoft.com/office/drawing/2014/main" id="{D9F858D0-B919-4D71-997D-6C45AE61E96F}"/>
               </a:ext>
             </a:extLst>
           </p:cNvPr>
@@ -22854,7 +24046,7 @@
           <p:cNvPr id="4" name="">
             <a:extLst xmlns:a="http://schemas.openxmlformats.org/drawingml/2006/main">
               <a:ext uri="{FF2B5EF4-FFF2-40B4-BE49-F238E27FC236}">
-                <a16:creationId xmlns:a16="http://schemas.microsoft.com/office/drawing/2014/main" id="{762BF0D0-6963-4107-9044-83FC66DACC42}"/>
+                <a16:creationId xmlns:a16="http://schemas.microsoft.com/office/drawing/2014/main" id="{CEFAD155-62E3-4165-B067-2147D11F779B}"/>
               </a:ext>
             </a:extLst>
           </p:cNvPr>
@@ -23010,7 +24202,7 @@
           <p:cNvPr id="5" name="">
             <a:extLst xmlns:a="http://schemas.openxmlformats.org/drawingml/2006/main">
               <a:ext uri="{FF2B5EF4-FFF2-40B4-BE49-F238E27FC236}">
-                <a16:creationId xmlns:a16="http://schemas.microsoft.com/office/drawing/2014/main" id="{9ABD3F3C-AFFA-4537-8A96-97FEA92E210D}"/>
+                <a16:creationId xmlns:a16="http://schemas.microsoft.com/office/drawing/2014/main" id="{8478B3DF-D54C-400F-8533-552221DDB028}"/>
               </a:ext>
             </a:extLst>
           </p:cNvPr>
@@ -23166,7 +24358,7 @@
           <p:cNvPr id="6" name="">
             <a:extLst xmlns:a="http://schemas.openxmlformats.org/drawingml/2006/main">
               <a:ext uri="{FF2B5EF4-FFF2-40B4-BE49-F238E27FC236}">
-                <a16:creationId xmlns:a16="http://schemas.microsoft.com/office/drawing/2014/main" id="{27F81AD3-4096-4976-870C-D6C67DB0B735}"/>
+                <a16:creationId xmlns:a16="http://schemas.microsoft.com/office/drawing/2014/main" id="{53F06B80-85AA-4071-B4AF-14E105C95DAA}"/>
               </a:ext>
             </a:extLst>
           </p:cNvPr>
@@ -23322,7 +24514,7 @@
           <p:cNvPr id="7" name="">
             <a:extLst xmlns:a="http://schemas.openxmlformats.org/drawingml/2006/main">
               <a:ext uri="{FF2B5EF4-FFF2-40B4-BE49-F238E27FC236}">
-                <a16:creationId xmlns:a16="http://schemas.microsoft.com/office/drawing/2014/main" id="{76BF0BCD-3947-4D78-B577-99C0F09070D1}"/>
+                <a16:creationId xmlns:a16="http://schemas.microsoft.com/office/drawing/2014/main" id="{76E8EBEC-8F44-40A7-8F8C-83BCC1BA1E65}"/>
               </a:ext>
             </a:extLst>
           </p:cNvPr>
@@ -23476,7 +24668,7 @@
     </p:spTree>
     <p:extLst>
       <p:ext uri="{BB962C8B-B14F-4D97-AF65-F5344CB8AC3E}">
-        <p14:creationId xmlns:p14="http://schemas.microsoft.com/office/powerpoint/2010/main" val="1122120946"/>
+        <p14:creationId xmlns:p14="http://schemas.microsoft.com/office/powerpoint/2010/main" val="801780428"/>
       </p:ext>
     </p:extLst>
   </p:cSld>
@@ -23507,7 +24699,7 @@
           <p:cNvPr id="7" name="">
             <a:extLst xmlns:a="http://schemas.openxmlformats.org/drawingml/2006/main">
               <a:ext uri="{FF2B5EF4-FFF2-40B4-BE49-F238E27FC236}">
-                <a16:creationId xmlns:a16="http://schemas.microsoft.com/office/drawing/2014/main" id="{B0B77D36-1F4A-4B65-93C8-BC05F6D82177}"/>
+                <a16:creationId xmlns:a16="http://schemas.microsoft.com/office/drawing/2014/main" id="{1CB106F9-59DC-440E-960D-9EEF9E4DC3A9}"/>
               </a:ext>
             </a:extLst>
           </p:cNvPr>
@@ -23663,7 +24855,7 @@
           <p:cNvPr id="2" name="">
             <a:extLst xmlns:a="http://schemas.openxmlformats.org/drawingml/2006/main">
               <a:ext uri="{FF2B5EF4-FFF2-40B4-BE49-F238E27FC236}">
-                <a16:creationId xmlns:a16="http://schemas.microsoft.com/office/drawing/2014/main" id="{094477FA-E8BD-4354-8BC6-ABB0994C7160}"/>
+                <a16:creationId xmlns:a16="http://schemas.microsoft.com/office/drawing/2014/main" id="{33733DC0-925F-42C8-B3A7-5E1A3C2CA1B8}"/>
               </a:ext>
             </a:extLst>
           </p:cNvPr>
@@ -23819,7 +25011,7 @@
           <p:cNvPr id="3" name="">
             <a:extLst xmlns:a="http://schemas.openxmlformats.org/drawingml/2006/main">
               <a:ext uri="{FF2B5EF4-FFF2-40B4-BE49-F238E27FC236}">
-                <a16:creationId xmlns:a16="http://schemas.microsoft.com/office/drawing/2014/main" id="{14F60EEF-E9D7-4B39-975D-D373A2372A5E}"/>
+                <a16:creationId xmlns:a16="http://schemas.microsoft.com/office/drawing/2014/main" id="{AB1AE05D-1ADE-4986-A084-4AEE26498868}"/>
               </a:ext>
             </a:extLst>
           </p:cNvPr>
@@ -23975,7 +25167,7 @@
           <p:cNvPr id="4" name="">
             <a:extLst xmlns:a="http://schemas.openxmlformats.org/drawingml/2006/main">
               <a:ext uri="{FF2B5EF4-FFF2-40B4-BE49-F238E27FC236}">
-                <a16:creationId xmlns:a16="http://schemas.microsoft.com/office/drawing/2014/main" id="{33F9B7CC-0792-430C-A811-17C8E9FB91AE}"/>
+                <a16:creationId xmlns:a16="http://schemas.microsoft.com/office/drawing/2014/main" id="{2B6D4475-41FF-4B12-AEBC-B1FB363B2BFD}"/>
               </a:ext>
             </a:extLst>
           </p:cNvPr>
@@ -24131,7 +25323,7 @@
           <p:cNvPr id="5" name="">
             <a:extLst xmlns:a="http://schemas.openxmlformats.org/drawingml/2006/main">
               <a:ext uri="{FF2B5EF4-FFF2-40B4-BE49-F238E27FC236}">
-                <a16:creationId xmlns:a16="http://schemas.microsoft.com/office/drawing/2014/main" id="{7D18484A-ACB1-45C7-9E6B-1E916FCC7731}"/>
+                <a16:creationId xmlns:a16="http://schemas.microsoft.com/office/drawing/2014/main" id="{8516C333-926E-4411-B767-D01C0D2718B8}"/>
               </a:ext>
             </a:extLst>
           </p:cNvPr>
@@ -24287,7 +25479,7 @@
           <p:cNvPr id="6" name="">
             <a:extLst xmlns:a="http://schemas.openxmlformats.org/drawingml/2006/main">
               <a:ext uri="{FF2B5EF4-FFF2-40B4-BE49-F238E27FC236}">
-                <a16:creationId xmlns:a16="http://schemas.microsoft.com/office/drawing/2014/main" id="{B9CE7735-DD07-43FB-AB1B-DB6426EF568F}"/>
+                <a16:creationId xmlns:a16="http://schemas.microsoft.com/office/drawing/2014/main" id="{4D7265CD-171A-449F-8930-D82EB026E83B}"/>
               </a:ext>
             </a:extLst>
           </p:cNvPr>
@@ -24441,7 +25633,7 @@
     </p:spTree>
     <p:extLst>
       <p:ext uri="{BB962C8B-B14F-4D97-AF65-F5344CB8AC3E}">
-        <p14:creationId xmlns:p14="http://schemas.microsoft.com/office/powerpoint/2010/main" val="730004488"/>
+        <p14:creationId xmlns:p14="http://schemas.microsoft.com/office/powerpoint/2010/main" val="1824226818"/>
       </p:ext>
     </p:extLst>
   </p:cSld>
@@ -24472,7 +25664,7 @@
           <p:cNvPr id="14" name="">
             <a:extLst xmlns:a="http://schemas.openxmlformats.org/drawingml/2006/main">
               <a:ext uri="{FF2B5EF4-FFF2-40B4-BE49-F238E27FC236}">
-                <a16:creationId xmlns:a16="http://schemas.microsoft.com/office/drawing/2014/main" id="{BBCBB8F9-6D80-4CA3-9E54-206D832AADE2}"/>
+                <a16:creationId xmlns:a16="http://schemas.microsoft.com/office/drawing/2014/main" id="{E3634A9D-92C5-49DC-8AE2-3C26ECEAD85C}"/>
               </a:ext>
             </a:extLst>
           </p:cNvPr>
@@ -24503,7 +25695,7 @@
           <p:cNvPr id="13" name="">
             <a:extLst xmlns:a="http://schemas.openxmlformats.org/drawingml/2006/main">
               <a:ext uri="{FF2B5EF4-FFF2-40B4-BE49-F238E27FC236}">
-                <a16:creationId xmlns:a16="http://schemas.microsoft.com/office/drawing/2014/main" id="{F488DFEF-09F1-45BF-81E2-79BDB5C6223A}"/>
+                <a16:creationId xmlns:a16="http://schemas.microsoft.com/office/drawing/2014/main" id="{A49FE11D-ECC3-456D-B8A6-748A9A5B2C98}"/>
               </a:ext>
             </a:extLst>
           </p:cNvPr>
@@ -24534,7 +25726,7 @@
           <p:cNvPr id="12" name="">
             <a:extLst xmlns:a="http://schemas.openxmlformats.org/drawingml/2006/main">
               <a:ext uri="{FF2B5EF4-FFF2-40B4-BE49-F238E27FC236}">
-                <a16:creationId xmlns:a16="http://schemas.microsoft.com/office/drawing/2014/main" id="{087DC726-3813-4070-986E-0FF9B5F765BE}"/>
+                <a16:creationId xmlns:a16="http://schemas.microsoft.com/office/drawing/2014/main" id="{31557A36-4B83-47F2-8D9F-5AD36E645FF7}"/>
               </a:ext>
             </a:extLst>
           </p:cNvPr>
@@ -24565,7 +25757,7 @@
           <p:cNvPr id="11" name="">
             <a:extLst xmlns:a="http://schemas.openxmlformats.org/drawingml/2006/main">
               <a:ext uri="{FF2B5EF4-FFF2-40B4-BE49-F238E27FC236}">
-                <a16:creationId xmlns:a16="http://schemas.microsoft.com/office/drawing/2014/main" id="{0A1B7FC1-0369-4C70-AF23-5AD825FD45E0}"/>
+                <a16:creationId xmlns:a16="http://schemas.microsoft.com/office/drawing/2014/main" id="{82FECB99-5FFE-4FBF-BB89-C14CEDF691E8}"/>
               </a:ext>
             </a:extLst>
           </p:cNvPr>
@@ -24598,7 +25790,7 @@
           <p:cNvPr id="10" name="">
             <a:extLst xmlns:a="http://schemas.openxmlformats.org/drawingml/2006/main">
               <a:ext uri="{FF2B5EF4-FFF2-40B4-BE49-F238E27FC236}">
-                <a16:creationId xmlns:a16="http://schemas.microsoft.com/office/drawing/2014/main" id="{8A505008-9083-4184-AC17-BE0D619ADBF1}"/>
+                <a16:creationId xmlns:a16="http://schemas.microsoft.com/office/drawing/2014/main" id="{AD083DAC-53C5-4787-88AF-A2B4934EFC75}"/>
               </a:ext>
             </a:extLst>
           </p:cNvPr>
@@ -24631,7 +25823,7 @@
           <p:cNvPr id="16" name="">
             <a:extLst xmlns:a="http://schemas.openxmlformats.org/drawingml/2006/main">
               <a:ext uri="{FF2B5EF4-FFF2-40B4-BE49-F238E27FC236}">
-                <a16:creationId xmlns:a16="http://schemas.microsoft.com/office/drawing/2014/main" id="{DF138987-B1C9-425D-AE19-9C49821FA302}"/>
+                <a16:creationId xmlns:a16="http://schemas.microsoft.com/office/drawing/2014/main" id="{66E59D3F-A257-4303-897B-74D270BFFEB9}"/>
               </a:ext>
             </a:extLst>
           </p:cNvPr>
@@ -24787,7 +25979,7 @@
           <p:cNvPr id="2" name="">
             <a:extLst xmlns:a="http://schemas.openxmlformats.org/drawingml/2006/main">
               <a:ext uri="{FF2B5EF4-FFF2-40B4-BE49-F238E27FC236}">
-                <a16:creationId xmlns:a16="http://schemas.microsoft.com/office/drawing/2014/main" id="{503BF6D7-3961-4B5A-AA23-3309DA0C9F7F}"/>
+                <a16:creationId xmlns:a16="http://schemas.microsoft.com/office/drawing/2014/main" id="{F7CC861A-C54E-4A6A-B180-34D24389844F}"/>
               </a:ext>
             </a:extLst>
           </p:cNvPr>
@@ -24943,7 +26135,7 @@
           <p:cNvPr id="3" name="">
             <a:extLst xmlns:a="http://schemas.openxmlformats.org/drawingml/2006/main">
               <a:ext uri="{FF2B5EF4-FFF2-40B4-BE49-F238E27FC236}">
-                <a16:creationId xmlns:a16="http://schemas.microsoft.com/office/drawing/2014/main" id="{7DEA7CAF-C51B-4762-9FC0-8A322B01858D}"/>
+                <a16:creationId xmlns:a16="http://schemas.microsoft.com/office/drawing/2014/main" id="{924427E9-4B40-4268-8BDA-36C9F2D01DEF}"/>
               </a:ext>
             </a:extLst>
           </p:cNvPr>
@@ -25126,7 +26318,7 @@
           <p:cNvPr id="4" name="">
             <a:extLst xmlns:a="http://schemas.openxmlformats.org/drawingml/2006/main">
               <a:ext uri="{FF2B5EF4-FFF2-40B4-BE49-F238E27FC236}">
-                <a16:creationId xmlns:a16="http://schemas.microsoft.com/office/drawing/2014/main" id="{C2992975-EB28-472E-B853-7B5B0FCFD882}"/>
+                <a16:creationId xmlns:a16="http://schemas.microsoft.com/office/drawing/2014/main" id="{C40B84CD-BC73-41F7-BF22-A6EA231ECB14}"/>
               </a:ext>
             </a:extLst>
           </p:cNvPr>
@@ -25309,7 +26501,7 @@
           <p:cNvPr id="5" name="">
             <a:extLst xmlns:a="http://schemas.openxmlformats.org/drawingml/2006/main">
               <a:ext uri="{FF2B5EF4-FFF2-40B4-BE49-F238E27FC236}">
-                <a16:creationId xmlns:a16="http://schemas.microsoft.com/office/drawing/2014/main" id="{9B82D60A-82E8-40A4-9E36-5C2B9923CFEC}"/>
+                <a16:creationId xmlns:a16="http://schemas.microsoft.com/office/drawing/2014/main" id="{C37FA8DC-4002-43A1-B979-7EDD9DE5BF44}"/>
               </a:ext>
             </a:extLst>
           </p:cNvPr>
@@ -25492,7 +26684,7 @@
           <p:cNvPr id="6" name="">
             <a:extLst xmlns:a="http://schemas.openxmlformats.org/drawingml/2006/main">
               <a:ext uri="{FF2B5EF4-FFF2-40B4-BE49-F238E27FC236}">
-                <a16:creationId xmlns:a16="http://schemas.microsoft.com/office/drawing/2014/main" id="{042E3088-31D9-47AB-979F-AE84446B0FA8}"/>
+                <a16:creationId xmlns:a16="http://schemas.microsoft.com/office/drawing/2014/main" id="{165B07A0-E3BF-46DA-8B37-9494336AE0C5}"/>
               </a:ext>
             </a:extLst>
           </p:cNvPr>
@@ -25675,7 +26867,7 @@
           <p:cNvPr id="7" name="">
             <a:extLst xmlns:a="http://schemas.openxmlformats.org/drawingml/2006/main">
               <a:ext uri="{FF2B5EF4-FFF2-40B4-BE49-F238E27FC236}">
-                <a16:creationId xmlns:a16="http://schemas.microsoft.com/office/drawing/2014/main" id="{1B22B207-EE4D-46F5-822F-4E311160A0DB}"/>
+                <a16:creationId xmlns:a16="http://schemas.microsoft.com/office/drawing/2014/main" id="{B65C1B24-EA5A-4E8C-9C37-C4AA40F190D7}"/>
               </a:ext>
             </a:extLst>
           </p:cNvPr>
@@ -25858,7 +27050,7 @@
           <p:cNvPr id="8" name="">
             <a:extLst xmlns:a="http://schemas.openxmlformats.org/drawingml/2006/main">
               <a:ext uri="{FF2B5EF4-FFF2-40B4-BE49-F238E27FC236}">
-                <a16:creationId xmlns:a16="http://schemas.microsoft.com/office/drawing/2014/main" id="{C9E5DB1A-6A9F-48EE-8987-8316ADFEBE91}"/>
+                <a16:creationId xmlns:a16="http://schemas.microsoft.com/office/drawing/2014/main" id="{6C231096-DBFB-456F-8B90-DBB4CF359A3B}"/>
               </a:ext>
             </a:extLst>
           </p:cNvPr>
@@ -26041,7 +27233,7 @@
           <p:cNvPr id="9" name="">
             <a:extLst xmlns:a="http://schemas.openxmlformats.org/drawingml/2006/main">
               <a:ext uri="{FF2B5EF4-FFF2-40B4-BE49-F238E27FC236}">
-                <a16:creationId xmlns:a16="http://schemas.microsoft.com/office/drawing/2014/main" id="{D79990B9-AF0E-4E81-8562-BBCA694CFC57}"/>
+                <a16:creationId xmlns:a16="http://schemas.microsoft.com/office/drawing/2014/main" id="{D512E8D5-D7F1-4597-8037-A7C46791B1D7}"/>
               </a:ext>
             </a:extLst>
           </p:cNvPr>
@@ -26224,7 +27416,7 @@
           <p:cNvPr id="15" name="">
             <a:extLst xmlns:a="http://schemas.openxmlformats.org/drawingml/2006/main">
               <a:ext uri="{FF2B5EF4-FFF2-40B4-BE49-F238E27FC236}">
-                <a16:creationId xmlns:a16="http://schemas.microsoft.com/office/drawing/2014/main" id="{273E1A96-0CF0-47A7-8BAB-DE873D8430CB}"/>
+                <a16:creationId xmlns:a16="http://schemas.microsoft.com/office/drawing/2014/main" id="{9D9C8176-C3DF-4353-AC6D-9DA47F44267B}"/>
               </a:ext>
             </a:extLst>
           </p:cNvPr>
@@ -26378,7 +27570,7 @@
     </p:spTree>
     <p:extLst>
       <p:ext uri="{BB962C8B-B14F-4D97-AF65-F5344CB8AC3E}">
-        <p14:creationId xmlns:p14="http://schemas.microsoft.com/office/powerpoint/2010/main" val="1634058767"/>
+        <p14:creationId xmlns:p14="http://schemas.microsoft.com/office/powerpoint/2010/main" val="1580844345"/>
       </p:ext>
     </p:extLst>
   </p:cSld>
@@ -26409,7 +27601,7 @@
           <p:cNvPr id="8" name="">
             <a:extLst xmlns:a="http://schemas.openxmlformats.org/drawingml/2006/main">
               <a:ext uri="{FF2B5EF4-FFF2-40B4-BE49-F238E27FC236}">
-                <a16:creationId xmlns:a16="http://schemas.microsoft.com/office/drawing/2014/main" id="{F7BF9165-7E8F-4983-AFF2-521A422AC099}"/>
+                <a16:creationId xmlns:a16="http://schemas.microsoft.com/office/drawing/2014/main" id="{EBC65ECA-D295-4F01-B852-91A04B28E2F9}"/>
               </a:ext>
             </a:extLst>
           </p:cNvPr>
@@ -26565,7 +27757,7 @@
           <p:cNvPr id="2" name="">
             <a:extLst xmlns:a="http://schemas.openxmlformats.org/drawingml/2006/main">
               <a:ext uri="{FF2B5EF4-FFF2-40B4-BE49-F238E27FC236}">
-                <a16:creationId xmlns:a16="http://schemas.microsoft.com/office/drawing/2014/main" id="{372C7E82-D213-4EF8-8363-722541417178}"/>
+                <a16:creationId xmlns:a16="http://schemas.microsoft.com/office/drawing/2014/main" id="{95DAF584-196A-42DB-BB34-7643E9CCFC9C}"/>
               </a:ext>
             </a:extLst>
           </p:cNvPr>
@@ -26721,7 +27913,7 @@
           <p:cNvPr id="3" name="">
             <a:extLst xmlns:a="http://schemas.openxmlformats.org/drawingml/2006/main">
               <a:ext uri="{FF2B5EF4-FFF2-40B4-BE49-F238E27FC236}">
-                <a16:creationId xmlns:a16="http://schemas.microsoft.com/office/drawing/2014/main" id="{C3C48302-E7D6-4F5C-BAF1-6CED674FF252}"/>
+                <a16:creationId xmlns:a16="http://schemas.microsoft.com/office/drawing/2014/main" id="{EAB1A87F-D056-4D10-9939-EC5234A59A04}"/>
               </a:ext>
             </a:extLst>
           </p:cNvPr>
@@ -26877,7 +28069,7 @@
           <p:cNvPr id="4" name="">
             <a:extLst xmlns:a="http://schemas.openxmlformats.org/drawingml/2006/main">
               <a:ext uri="{FF2B5EF4-FFF2-40B4-BE49-F238E27FC236}">
-                <a16:creationId xmlns:a16="http://schemas.microsoft.com/office/drawing/2014/main" id="{295117A8-CC49-45A5-BE18-69E08BED47FE}"/>
+                <a16:creationId xmlns:a16="http://schemas.microsoft.com/office/drawing/2014/main" id="{BEA9124F-060B-4353-AB31-37F4779E0759}"/>
               </a:ext>
             </a:extLst>
           </p:cNvPr>
@@ -27033,7 +28225,7 @@
           <p:cNvPr id="5" name="">
             <a:extLst xmlns:a="http://schemas.openxmlformats.org/drawingml/2006/main">
               <a:ext uri="{FF2B5EF4-FFF2-40B4-BE49-F238E27FC236}">
-                <a16:creationId xmlns:a16="http://schemas.microsoft.com/office/drawing/2014/main" id="{1347A0BE-DF8E-4B3B-9FB0-0F46B105B93F}"/>
+                <a16:creationId xmlns:a16="http://schemas.microsoft.com/office/drawing/2014/main" id="{526BBB62-F718-4DF7-8696-C6ABCC6398F6}"/>
               </a:ext>
             </a:extLst>
           </p:cNvPr>
@@ -27189,7 +28381,7 @@
           <p:cNvPr id="6" name="">
             <a:extLst xmlns:a="http://schemas.openxmlformats.org/drawingml/2006/main">
               <a:ext uri="{FF2B5EF4-FFF2-40B4-BE49-F238E27FC236}">
-                <a16:creationId xmlns:a16="http://schemas.microsoft.com/office/drawing/2014/main" id="{9B303B32-ACAC-417F-BAAD-BF336AC32ECA}"/>
+                <a16:creationId xmlns:a16="http://schemas.microsoft.com/office/drawing/2014/main" id="{1C0632A3-CE3C-4F11-8C71-9090E7583B39}"/>
               </a:ext>
             </a:extLst>
           </p:cNvPr>
@@ -27345,7 +28537,7 @@
           <p:cNvPr id="7" name="">
             <a:extLst xmlns:a="http://schemas.openxmlformats.org/drawingml/2006/main">
               <a:ext uri="{FF2B5EF4-FFF2-40B4-BE49-F238E27FC236}">
-                <a16:creationId xmlns:a16="http://schemas.microsoft.com/office/drawing/2014/main" id="{B3CCF067-6BAC-420B-ACDD-B25A68068136}"/>
+                <a16:creationId xmlns:a16="http://schemas.microsoft.com/office/drawing/2014/main" id="{419FB611-0769-4524-9619-FE3BCF908C68}"/>
               </a:ext>
             </a:extLst>
           </p:cNvPr>
@@ -27499,7 +28691,7 @@
     </p:spTree>
     <p:extLst>
       <p:ext uri="{BB962C8B-B14F-4D97-AF65-F5344CB8AC3E}">
-        <p14:creationId xmlns:p14="http://schemas.microsoft.com/office/powerpoint/2010/main" val="185248387"/>
+        <p14:creationId xmlns:p14="http://schemas.microsoft.com/office/powerpoint/2010/main" val="23827559"/>
       </p:ext>
     </p:extLst>
   </p:cSld>
@@ -27530,7 +28722,7 @@
           <p:cNvPr id="5" name="">
             <a:extLst xmlns:a="http://schemas.openxmlformats.org/drawingml/2006/main">
               <a:ext uri="{FF2B5EF4-FFF2-40B4-BE49-F238E27FC236}">
-                <a16:creationId xmlns:a16="http://schemas.microsoft.com/office/drawing/2014/main" id="{209A0F94-7C42-433A-A9CF-BE0AAC6E38AC}"/>
+                <a16:creationId xmlns:a16="http://schemas.microsoft.com/office/drawing/2014/main" id="{F112C11B-BAFB-4810-8BD7-D050A559C5A2}"/>
               </a:ext>
             </a:extLst>
           </p:cNvPr>
@@ -27686,7 +28878,7 @@
           <p:cNvPr id="2" name="">
             <a:extLst xmlns:a="http://schemas.openxmlformats.org/drawingml/2006/main">
               <a:ext uri="{FF2B5EF4-FFF2-40B4-BE49-F238E27FC236}">
-                <a16:creationId xmlns:a16="http://schemas.microsoft.com/office/drawing/2014/main" id="{2EA42DC6-04BE-4CC3-B515-0F41C257DC79}"/>
+                <a16:creationId xmlns:a16="http://schemas.microsoft.com/office/drawing/2014/main" id="{67C94B45-0DC5-47A4-B906-084E473D66A2}"/>
               </a:ext>
             </a:extLst>
           </p:cNvPr>
@@ -27842,7 +29034,7 @@
           <p:cNvPr id="3" name="">
             <a:extLst xmlns:a="http://schemas.openxmlformats.org/drawingml/2006/main">
               <a:ext uri="{FF2B5EF4-FFF2-40B4-BE49-F238E27FC236}">
-                <a16:creationId xmlns:a16="http://schemas.microsoft.com/office/drawing/2014/main" id="{04FA5D1A-31F7-452D-826E-803E4D3D7407}"/>
+                <a16:creationId xmlns:a16="http://schemas.microsoft.com/office/drawing/2014/main" id="{3AFC4359-074B-48B1-9992-1883CD5E4D90}"/>
               </a:ext>
             </a:extLst>
           </p:cNvPr>
@@ -28783,7 +29975,7 @@
           <p:cNvPr id="4" name="">
             <a:extLst xmlns:a="http://schemas.openxmlformats.org/drawingml/2006/main">
               <a:ext uri="{FF2B5EF4-FFF2-40B4-BE49-F238E27FC236}">
-                <a16:creationId xmlns:a16="http://schemas.microsoft.com/office/drawing/2014/main" id="{81296C22-19ED-4800-AB83-B3F2F42ACC3E}"/>
+                <a16:creationId xmlns:a16="http://schemas.microsoft.com/office/drawing/2014/main" id="{D1B2CDA9-48E8-415E-AADB-B99177080DBD}"/>
               </a:ext>
             </a:extLst>
           </p:cNvPr>
@@ -28937,7 +30129,7 @@
     </p:spTree>
     <p:extLst>
       <p:ext uri="{BB962C8B-B14F-4D97-AF65-F5344CB8AC3E}">
-        <p14:creationId xmlns:p14="http://schemas.microsoft.com/office/powerpoint/2010/main" val="376549112"/>
+        <p14:creationId xmlns:p14="http://schemas.microsoft.com/office/powerpoint/2010/main" val="1222151982"/>
       </p:ext>
     </p:extLst>
   </p:cSld>
@@ -28968,7 +30160,7 @@
           <p:cNvPr id="5" name="">
             <a:extLst xmlns:a="http://schemas.openxmlformats.org/drawingml/2006/main">
               <a:ext uri="{FF2B5EF4-FFF2-40B4-BE49-F238E27FC236}">
-                <a16:creationId xmlns:a16="http://schemas.microsoft.com/office/drawing/2014/main" id="{B6737BEF-C1A8-4388-B379-CAE33F608528}"/>
+                <a16:creationId xmlns:a16="http://schemas.microsoft.com/office/drawing/2014/main" id="{58DA933B-99A3-4E1B-B855-3C3EA8B40DA7}"/>
               </a:ext>
             </a:extLst>
           </p:cNvPr>
@@ -29124,7 +30316,7 @@
           <p:cNvPr id="2" name="">
             <a:extLst xmlns:a="http://schemas.openxmlformats.org/drawingml/2006/main">
               <a:ext uri="{FF2B5EF4-FFF2-40B4-BE49-F238E27FC236}">
-                <a16:creationId xmlns:a16="http://schemas.microsoft.com/office/drawing/2014/main" id="{A4A9357E-FA02-4E9E-9BA1-9CE0FB5D7BB8}"/>
+                <a16:creationId xmlns:a16="http://schemas.microsoft.com/office/drawing/2014/main" id="{3D1605B8-6759-420A-8F94-149BD6982319}"/>
               </a:ext>
             </a:extLst>
           </p:cNvPr>
@@ -29280,7 +30472,7 @@
           <p:cNvPr id="3" name="">
             <a:extLst xmlns:a="http://schemas.openxmlformats.org/drawingml/2006/main">
               <a:ext uri="{FF2B5EF4-FFF2-40B4-BE49-F238E27FC236}">
-                <a16:creationId xmlns:a16="http://schemas.microsoft.com/office/drawing/2014/main" id="{509C99CC-B63D-4FE3-8DB0-387263C04FD1}"/>
+                <a16:creationId xmlns:a16="http://schemas.microsoft.com/office/drawing/2014/main" id="{365C3F6D-6806-4D1D-AAFB-D1FBFAC71F41}"/>
               </a:ext>
             </a:extLst>
           </p:cNvPr>
@@ -30221,7 +31413,7 @@
           <p:cNvPr id="4" name="">
             <a:extLst xmlns:a="http://schemas.openxmlformats.org/drawingml/2006/main">
               <a:ext uri="{FF2B5EF4-FFF2-40B4-BE49-F238E27FC236}">
-                <a16:creationId xmlns:a16="http://schemas.microsoft.com/office/drawing/2014/main" id="{52ED59BE-D1CE-44FC-9A86-7124B72668C7}"/>
+                <a16:creationId xmlns:a16="http://schemas.microsoft.com/office/drawing/2014/main" id="{2F8AB2ED-BEE2-4AE6-83A2-45822935F721}"/>
               </a:ext>
             </a:extLst>
           </p:cNvPr>
@@ -30375,7 +31567,7 @@
     </p:spTree>
     <p:extLst>
       <p:ext uri="{BB962C8B-B14F-4D97-AF65-F5344CB8AC3E}">
-        <p14:creationId xmlns:p14="http://schemas.microsoft.com/office/powerpoint/2010/main" val="998706509"/>
+        <p14:creationId xmlns:p14="http://schemas.microsoft.com/office/powerpoint/2010/main" val="2127579501"/>
       </p:ext>
     </p:extLst>
   </p:cSld>
@@ -30406,7 +31598,7 @@
           <p:cNvPr id="5" name="">
             <a:extLst xmlns:a="http://schemas.openxmlformats.org/drawingml/2006/main">
               <a:ext uri="{FF2B5EF4-FFF2-40B4-BE49-F238E27FC236}">
-                <a16:creationId xmlns:a16="http://schemas.microsoft.com/office/drawing/2014/main" id="{5E76E4FC-90E8-4829-8626-3B6EF14CCBA3}"/>
+                <a16:creationId xmlns:a16="http://schemas.microsoft.com/office/drawing/2014/main" id="{0E49070B-F94F-40BE-B52B-98B560710E77}"/>
               </a:ext>
             </a:extLst>
           </p:cNvPr>
@@ -30562,7 +31754,7 @@
           <p:cNvPr id="2" name="">
             <a:extLst xmlns:a="http://schemas.openxmlformats.org/drawingml/2006/main">
               <a:ext uri="{FF2B5EF4-FFF2-40B4-BE49-F238E27FC236}">
-                <a16:creationId xmlns:a16="http://schemas.microsoft.com/office/drawing/2014/main" id="{0A16E22F-DFFF-4105-B7EE-2248838AB32E}"/>
+                <a16:creationId xmlns:a16="http://schemas.microsoft.com/office/drawing/2014/main" id="{907BBABA-3D41-46F1-90AB-DE3B1492AC48}"/>
               </a:ext>
             </a:extLst>
           </p:cNvPr>
@@ -30718,7 +31910,7 @@
           <p:cNvPr id="3" name="">
             <a:extLst xmlns:a="http://schemas.openxmlformats.org/drawingml/2006/main">
               <a:ext uri="{FF2B5EF4-FFF2-40B4-BE49-F238E27FC236}">
-                <a16:creationId xmlns:a16="http://schemas.microsoft.com/office/drawing/2014/main" id="{655FFD51-14FE-4074-BED7-203F2FAFBC3D}"/>
+                <a16:creationId xmlns:a16="http://schemas.microsoft.com/office/drawing/2014/main" id="{F9F74281-5BEE-455F-9D58-2E8563D4E144}"/>
               </a:ext>
             </a:extLst>
           </p:cNvPr>
@@ -31659,7 +32851,7 @@
           <p:cNvPr id="4" name="">
             <a:extLst xmlns:a="http://schemas.openxmlformats.org/drawingml/2006/main">
               <a:ext uri="{FF2B5EF4-FFF2-40B4-BE49-F238E27FC236}">
-                <a16:creationId xmlns:a16="http://schemas.microsoft.com/office/drawing/2014/main" id="{54400D89-5CF6-421D-9DC7-B746CF872DD5}"/>
+                <a16:creationId xmlns:a16="http://schemas.microsoft.com/office/drawing/2014/main" id="{DE63381D-F72B-4D01-820F-0B1B658E4515}"/>
               </a:ext>
             </a:extLst>
           </p:cNvPr>
@@ -31813,7 +33005,7 @@
     </p:spTree>
     <p:extLst>
       <p:ext uri="{BB962C8B-B14F-4D97-AF65-F5344CB8AC3E}">
-        <p14:creationId xmlns:p14="http://schemas.microsoft.com/office/powerpoint/2010/main" val="1048883238"/>
+        <p14:creationId xmlns:p14="http://schemas.microsoft.com/office/powerpoint/2010/main" val="1469818306"/>
       </p:ext>
     </p:extLst>
   </p:cSld>

--- a/deliverables/CycleTwin_pitch_deck.pptx
+++ b/deliverables/CycleTwin_pitch_deck.pptx
@@ -2,35 +2,36 @@
 <file path=ppt/presentation.xml><?xml version="1.0" encoding="utf-8"?>
 <p:presentation xmlns:p="http://schemas.openxmlformats.org/presentationml/2006/main">
   <p:sldMasterIdLst>
-    <p:sldMasterId xmlns:r="http://schemas.openxmlformats.org/officeDocument/2006/relationships" id="2147483648" r:id="R022bbf2371384e7e"/>
+    <p:sldMasterId xmlns:r="http://schemas.openxmlformats.org/officeDocument/2006/relationships" id="2147483648" r:id="Rb1aaad957f7e40ba"/>
   </p:sldMasterIdLst>
   <p:notesMasterIdLst>
-    <p:notesMasterId xmlns:r="http://schemas.openxmlformats.org/officeDocument/2006/relationships" r:id="R69bdd9ed61064775"/>
+    <p:notesMasterId xmlns:r="http://schemas.openxmlformats.org/officeDocument/2006/relationships" r:id="R7bbf377c7b094852"/>
   </p:notesMasterIdLst>
   <p:sldIdLst>
-    <p:sldId xmlns:r="http://schemas.openxmlformats.org/officeDocument/2006/relationships" id="256" r:id="R9044b8792524431f"/>
-    <p:sldId xmlns:r="http://schemas.openxmlformats.org/officeDocument/2006/relationships" id="257" r:id="R87b50f836a9749d1"/>
-    <p:sldId xmlns:r="http://schemas.openxmlformats.org/officeDocument/2006/relationships" id="258" r:id="R44fc400979f24c00"/>
-    <p:sldId xmlns:r="http://schemas.openxmlformats.org/officeDocument/2006/relationships" id="259" r:id="Ra1dc79ff648748ce"/>
-    <p:sldId xmlns:r="http://schemas.openxmlformats.org/officeDocument/2006/relationships" id="260" r:id="R926be84a63394149"/>
-    <p:sldId xmlns:r="http://schemas.openxmlformats.org/officeDocument/2006/relationships" id="261" r:id="R40a2a074a75b4ff6"/>
-    <p:sldId xmlns:r="http://schemas.openxmlformats.org/officeDocument/2006/relationships" id="262" r:id="R09571bb9cc784086"/>
-    <p:sldId xmlns:r="http://schemas.openxmlformats.org/officeDocument/2006/relationships" id="263" r:id="R9b1356d44c9d4213"/>
-    <p:sldId xmlns:r="http://schemas.openxmlformats.org/officeDocument/2006/relationships" id="264" r:id="Rec72d905882f4021"/>
-    <p:sldId xmlns:r="http://schemas.openxmlformats.org/officeDocument/2006/relationships" id="265" r:id="R2cceeb1bdd3042a1"/>
-    <p:sldId xmlns:r="http://schemas.openxmlformats.org/officeDocument/2006/relationships" id="266" r:id="Rbacbaedb9f5c44db"/>
-    <p:sldId xmlns:r="http://schemas.openxmlformats.org/officeDocument/2006/relationships" id="267" r:id="R2b4fcbff73fb42cf"/>
-    <p:sldId xmlns:r="http://schemas.openxmlformats.org/officeDocument/2006/relationships" id="268" r:id="Rf052578b66484e16"/>
-    <p:sldId xmlns:r="http://schemas.openxmlformats.org/officeDocument/2006/relationships" id="269" r:id="R58ed9433716e474d"/>
-    <p:sldId xmlns:r="http://schemas.openxmlformats.org/officeDocument/2006/relationships" id="270" r:id="R8bdf460511d54db8"/>
-    <p:sldId xmlns:r="http://schemas.openxmlformats.org/officeDocument/2006/relationships" id="271" r:id="R8391c49f328e4cd3"/>
-    <p:sldId xmlns:r="http://schemas.openxmlformats.org/officeDocument/2006/relationships" id="272" r:id="Rcaa028442aba4768"/>
-    <p:sldId xmlns:r="http://schemas.openxmlformats.org/officeDocument/2006/relationships" id="273" r:id="Rc1a62b097bf145dc"/>
-    <p:sldId xmlns:r="http://schemas.openxmlformats.org/officeDocument/2006/relationships" id="274" r:id="R0c8fdf2830d4434c"/>
-    <p:sldId xmlns:r="http://schemas.openxmlformats.org/officeDocument/2006/relationships" id="275" r:id="R470887ba1789465d"/>
-    <p:sldId xmlns:r="http://schemas.openxmlformats.org/officeDocument/2006/relationships" id="276" r:id="R81650def64f44e89"/>
-    <p:sldId xmlns:r="http://schemas.openxmlformats.org/officeDocument/2006/relationships" id="277" r:id="R6d3588739b794464"/>
-    <p:sldId xmlns:r="http://schemas.openxmlformats.org/officeDocument/2006/relationships" id="278" r:id="Rd7244613aa3641f4"/>
+    <p:sldId xmlns:r="http://schemas.openxmlformats.org/officeDocument/2006/relationships" id="256" r:id="R188a46439faa4970"/>
+    <p:sldId xmlns:r="http://schemas.openxmlformats.org/officeDocument/2006/relationships" id="257" r:id="R51968984b8de40e5"/>
+    <p:sldId xmlns:r="http://schemas.openxmlformats.org/officeDocument/2006/relationships" id="258" r:id="Rf0a59c20a7b443da"/>
+    <p:sldId xmlns:r="http://schemas.openxmlformats.org/officeDocument/2006/relationships" id="259" r:id="Rdea6b45de0864fa8"/>
+    <p:sldId xmlns:r="http://schemas.openxmlformats.org/officeDocument/2006/relationships" id="260" r:id="R7e55ee121dda4550"/>
+    <p:sldId xmlns:r="http://schemas.openxmlformats.org/officeDocument/2006/relationships" id="261" r:id="Ra66b23b2e8e54136"/>
+    <p:sldId xmlns:r="http://schemas.openxmlformats.org/officeDocument/2006/relationships" id="262" r:id="Rfb12ad8c9d99489f"/>
+    <p:sldId xmlns:r="http://schemas.openxmlformats.org/officeDocument/2006/relationships" id="263" r:id="R6e921056773e4600"/>
+    <p:sldId xmlns:r="http://schemas.openxmlformats.org/officeDocument/2006/relationships" id="264" r:id="Ra6c3bb2e375e410a"/>
+    <p:sldId xmlns:r="http://schemas.openxmlformats.org/officeDocument/2006/relationships" id="265" r:id="Rb5e8a280ea814f68"/>
+    <p:sldId xmlns:r="http://schemas.openxmlformats.org/officeDocument/2006/relationships" id="266" r:id="Rab76cffa7d38438d"/>
+    <p:sldId xmlns:r="http://schemas.openxmlformats.org/officeDocument/2006/relationships" id="267" r:id="Re181c0ff593a43a1"/>
+    <p:sldId xmlns:r="http://schemas.openxmlformats.org/officeDocument/2006/relationships" id="268" r:id="Rb322b2e7966440a5"/>
+    <p:sldId xmlns:r="http://schemas.openxmlformats.org/officeDocument/2006/relationships" id="269" r:id="R90d7c0ed01c04629"/>
+    <p:sldId xmlns:r="http://schemas.openxmlformats.org/officeDocument/2006/relationships" id="270" r:id="Ree40ffc9281c41a4"/>
+    <p:sldId xmlns:r="http://schemas.openxmlformats.org/officeDocument/2006/relationships" id="271" r:id="R977b2a7dcc7e40e2"/>
+    <p:sldId xmlns:r="http://schemas.openxmlformats.org/officeDocument/2006/relationships" id="272" r:id="R9bd7c6728eb64b9c"/>
+    <p:sldId xmlns:r="http://schemas.openxmlformats.org/officeDocument/2006/relationships" id="273" r:id="R9cf604d4171348d5"/>
+    <p:sldId xmlns:r="http://schemas.openxmlformats.org/officeDocument/2006/relationships" id="274" r:id="R358adbe4e3d7497f"/>
+    <p:sldId xmlns:r="http://schemas.openxmlformats.org/officeDocument/2006/relationships" id="275" r:id="Rce650b1007d94c8b"/>
+    <p:sldId xmlns:r="http://schemas.openxmlformats.org/officeDocument/2006/relationships" id="276" r:id="Ra94ad3574dc34fab"/>
+    <p:sldId xmlns:r="http://schemas.openxmlformats.org/officeDocument/2006/relationships" id="277" r:id="Rd4ec4cdfb1aa4593"/>
+    <p:sldId xmlns:r="http://schemas.openxmlformats.org/officeDocument/2006/relationships" id="278" r:id="R5dbe51e47040463a"/>
+    <p:sldId xmlns:r="http://schemas.openxmlformats.org/officeDocument/2006/relationships" id="279" r:id="Rab4df056a5124648"/>
   </p:sldIdLst>
   <p:sldSz cx="12192000" cy="6858000"/>
   <p:notesSz cx="6858000" cy="9144000"/>
@@ -1094,7 +1095,7 @@
           <a:lstStyle xmlns:a="http://schemas.openxmlformats.org/drawingml/2006/main"/>
           <a:p xmlns:a="http://schemas.openxmlformats.org/drawingml/2006/main">
             <a:r>
-              <a:t>Source: docs/claims.json, generated by scripts/build_claims.py. All project metrics are synthetic development results. Decision-support research display</a:t>
+              <a:t>Source: docs/claims.json, generated by scripts/build_claims.py. All project metrics are synthetic development results. One persisted frozen Tier-2 model on the build host</a:t>
             </a:r>
           </a:p>
         </p:txBody>
@@ -1164,7 +1165,7 @@
           <a:lstStyle xmlns:a="http://schemas.openxmlformats.org/drawingml/2006/main"/>
           <a:p xmlns:a="http://schemas.openxmlformats.org/drawingml/2006/main">
             <a:r>
-              <a:t>Source: docs/claims.json, generated by scripts/build_claims.py. All project metrics are synthetic development results. Missing safety information causes abstention</a:t>
+              <a:t>Source: docs/claims.json, generated by scripts/build_claims.py. All project metrics are synthetic development results. Decision-support research display</a:t>
             </a:r>
           </a:p>
         </p:txBody>
@@ -1304,7 +1305,7 @@
           <a:lstStyle xmlns:a="http://schemas.openxmlformats.org/drawingml/2006/main"/>
           <a:p xmlns:a="http://schemas.openxmlformats.org/drawingml/2006/main">
             <a:r>
-              <a:t>Source: docs/claims.json, generated by scripts/build_claims.py. All project metrics are synthetic development results. Clear boundaries around simulated physiology</a:t>
+              <a:t>Source: docs/claims.json, generated by scripts/build_claims.py. All project metrics are synthetic development results. Missing safety information causes abstention</a:t>
             </a:r>
           </a:p>
         </p:txBody>
@@ -1374,7 +1375,7 @@
           <a:lstStyle xmlns:a="http://schemas.openxmlformats.org/drawingml/2006/main"/>
           <a:p xmlns:a="http://schemas.openxmlformats.org/drawingml/2006/main">
             <a:r>
-              <a:t>Source: docs/claims.json, generated by scripts/build_claims.py. All project metrics are synthetic development results. All declared Kushi scenarios remain visible</a:t>
+              <a:t>Source: docs/claims.json, generated by scripts/build_claims.py. All project metrics are synthetic development results. Clear boundaries around simulated physiology</a:t>
             </a:r>
           </a:p>
         </p:txBody>
@@ -1444,6 +1445,76 @@
           <a:lstStyle xmlns:a="http://schemas.openxmlformats.org/drawingml/2006/main"/>
           <a:p xmlns:a="http://schemas.openxmlformats.org/drawingml/2006/main">
             <a:r>
+              <a:t>Source: docs/claims.json, generated by scripts/build_claims.py. All project metrics are synthetic development results. All declared Kushi scenarios remain visible</a:t>
+            </a:r>
+          </a:p>
+        </p:txBody>
+      </p:sp>
+      <p:sp>
+        <p:nvSpPr>
+          <p:cNvPr id="4" name="Slide Number Placeholder 3"/>
+          <p:cNvSpPr>
+            <a:spLocks xmlns:a="http://schemas.openxmlformats.org/drawingml/2006/main" noGrp="1"/>
+          </p:cNvSpPr>
+          <p:nvPr>
+            <p:ph type="sldNum" idx="5"/>
+          </p:nvPr>
+        </p:nvSpPr>
+        <p:spPr/>
+        <p:txBody>
+          <a:bodyPr xmlns:a="http://schemas.openxmlformats.org/drawingml/2006/main"/>
+          <a:lstStyle xmlns:a="http://schemas.openxmlformats.org/drawingml/2006/main"/>
+          <a:p xmlns:a="http://schemas.openxmlformats.org/drawingml/2006/main"/>
+        </p:txBody>
+      </p:sp>
+    </p:spTree>
+  </p:cSld>
+  <p:clrMapOvr>
+    <a:masterClrMapping xmlns:a="http://schemas.openxmlformats.org/drawingml/2006/main"/>
+  </p:clrMapOvr>
+</p:notes>
+</file>
+
+<file path=ppt/notesSlides/notesSlide23.xml><?xml version="1.0" encoding="utf-8"?>
+<p:notes xmlns:p="http://schemas.openxmlformats.org/presentationml/2006/main">
+  <p:cSld>
+    <p:spTree>
+      <p:nvGrpSpPr>
+        <p:cNvPr id="1" name=""/>
+        <p:cNvGrpSpPr/>
+        <p:nvPr/>
+      </p:nvGrpSpPr>
+      <p:grpSpPr>
+        <a:xfrm xmlns:a="http://schemas.openxmlformats.org/drawingml/2006/main"/>
+      </p:grpSpPr>
+      <p:sp>
+        <p:nvSpPr>
+          <p:cNvPr id="2" name="Slide Image Placeholder 1"/>
+          <p:cNvSpPr>
+            <a:spLocks xmlns:a="http://schemas.openxmlformats.org/drawingml/2006/main" noGrp="1"/>
+          </p:cNvSpPr>
+          <p:nvPr>
+            <p:ph type="sldImg" idx="0"/>
+          </p:nvPr>
+        </p:nvSpPr>
+        <p:spPr/>
+      </p:sp>
+      <p:sp>
+        <p:nvSpPr>
+          <p:cNvPr id="3" name="Notes Placeholder 2"/>
+          <p:cNvSpPr>
+            <a:spLocks xmlns:a="http://schemas.openxmlformats.org/drawingml/2006/main" noGrp="1"/>
+          </p:cNvSpPr>
+          <p:nvPr>
+            <p:ph type="body" idx="1"/>
+          </p:nvPr>
+        </p:nvSpPr>
+        <p:spPr/>
+        <p:txBody>
+          <a:bodyPr xmlns:a="http://schemas.openxmlformats.org/drawingml/2006/main"/>
+          <a:lstStyle xmlns:a="http://schemas.openxmlformats.org/drawingml/2006/main"/>
+          <a:p xmlns:a="http://schemas.openxmlformats.org/drawingml/2006/main">
+            <a:r>
               <a:t>Source: docs/claims.json, generated by scripts/build_claims.py. All project metrics are synthetic development results. Synthetic recovery is not prospective evidence in women</a:t>
             </a:r>
           </a:p>
@@ -1474,7 +1545,7 @@
 </p:notes>
 </file>
 
-<file path=ppt/notesSlides/notesSlide23.xml><?xml version="1.0" encoding="utf-8"?>
+<file path=ppt/notesSlides/notesSlide24.xml><?xml version="1.0" encoding="utf-8"?>
 <p:notes xmlns:p="http://schemas.openxmlformats.org/presentationml/2006/main">
   <p:cSld>
     <p:spTree>
@@ -2051,7 +2122,7 @@
           <p:cNvPr id="3" name="Title">
             <a:extLst xmlns:a="http://schemas.openxmlformats.org/drawingml/2006/main">
               <a:ext uri="{FF2B5EF4-FFF2-40B4-BE49-F238E27FC236}">
-                <a16:creationId xmlns:a16="http://schemas.microsoft.com/office/drawing/2014/main" id="{97BD19DC-5232-4218-8401-826A2262DC5C}"/>
+                <a16:creationId xmlns:a16="http://schemas.microsoft.com/office/drawing/2014/main" id="{2D4BBB5F-DE53-453E-B903-BE86F18BC36F}"/>
               </a:ext>
             </a:extLst>
           </p:cNvPr>
@@ -2280,7 +2351,7 @@
           <p:cNvPr id="2" name="Subtitle">
             <a:extLst xmlns:a="http://schemas.openxmlformats.org/drawingml/2006/main">
               <a:ext uri="{FF2B5EF4-FFF2-40B4-BE49-F238E27FC236}">
-                <a16:creationId xmlns:a16="http://schemas.microsoft.com/office/drawing/2014/main" id="{E02398BD-675A-4F94-9016-130F91138B63}"/>
+                <a16:creationId xmlns:a16="http://schemas.microsoft.com/office/drawing/2014/main" id="{E69FE28F-77FA-491B-9938-E5B7C4210675}"/>
               </a:ext>
             </a:extLst>
           </p:cNvPr>
@@ -2526,7 +2597,7 @@
           <p:cNvPr id="2" name="Section title">
             <a:extLst xmlns:a="http://schemas.openxmlformats.org/drawingml/2006/main">
               <a:ext uri="{FF2B5EF4-FFF2-40B4-BE49-F238E27FC236}">
-                <a16:creationId xmlns:a16="http://schemas.microsoft.com/office/drawing/2014/main" id="{0DF00755-2FBB-418A-9DA5-B1E2F001B0C6}"/>
+                <a16:creationId xmlns:a16="http://schemas.microsoft.com/office/drawing/2014/main" id="{2D30B18B-9E5F-4D24-9D64-25490F3C2123}"/>
               </a:ext>
             </a:extLst>
           </p:cNvPr>
@@ -2772,7 +2843,7 @@
           <p:cNvPr id="3" name="Title">
             <a:extLst xmlns:a="http://schemas.openxmlformats.org/drawingml/2006/main">
               <a:ext uri="{FF2B5EF4-FFF2-40B4-BE49-F238E27FC236}">
-                <a16:creationId xmlns:a16="http://schemas.microsoft.com/office/drawing/2014/main" id="{D711EF7B-1CC2-4ECC-BD24-1D0B261881D1}"/>
+                <a16:creationId xmlns:a16="http://schemas.microsoft.com/office/drawing/2014/main" id="{07E2D8DD-E04B-4883-B879-B4612716CFC7}"/>
               </a:ext>
             </a:extLst>
           </p:cNvPr>
@@ -3001,7 +3072,7 @@
           <p:cNvPr id="2" name="Body">
             <a:extLst xmlns:a="http://schemas.openxmlformats.org/drawingml/2006/main">
               <a:ext uri="{FF2B5EF4-FFF2-40B4-BE49-F238E27FC236}">
-                <a16:creationId xmlns:a16="http://schemas.microsoft.com/office/drawing/2014/main" id="{1DA8B94D-6DE5-4A38-A328-66E22323C8E4}"/>
+                <a16:creationId xmlns:a16="http://schemas.microsoft.com/office/drawing/2014/main" id="{83432764-8CB9-439D-8E9D-1C8DA3606005}"/>
               </a:ext>
             </a:extLst>
           </p:cNvPr>
@@ -3247,7 +3318,7 @@
           <p:cNvPr id="4" name="Title">
             <a:extLst xmlns:a="http://schemas.openxmlformats.org/drawingml/2006/main">
               <a:ext uri="{FF2B5EF4-FFF2-40B4-BE49-F238E27FC236}">
-                <a16:creationId xmlns:a16="http://schemas.microsoft.com/office/drawing/2014/main" id="{BDBA444A-D8CA-43B8-BF79-6139E0EA2986}"/>
+                <a16:creationId xmlns:a16="http://schemas.microsoft.com/office/drawing/2014/main" id="{2568C371-3EE5-4BE4-88D3-0D47C1F602AB}"/>
               </a:ext>
             </a:extLst>
           </p:cNvPr>
@@ -3476,7 +3547,7 @@
           <p:cNvPr id="2" name="Left column">
             <a:extLst xmlns:a="http://schemas.openxmlformats.org/drawingml/2006/main">
               <a:ext uri="{FF2B5EF4-FFF2-40B4-BE49-F238E27FC236}">
-                <a16:creationId xmlns:a16="http://schemas.microsoft.com/office/drawing/2014/main" id="{2057A942-84CC-4DE6-9FC0-4B198D8B0718}"/>
+                <a16:creationId xmlns:a16="http://schemas.microsoft.com/office/drawing/2014/main" id="{9DB31D53-171D-4D4E-9470-BBAD7667181C}"/>
               </a:ext>
             </a:extLst>
           </p:cNvPr>
@@ -3705,7 +3776,7 @@
           <p:cNvPr id="3" name="Right column">
             <a:extLst xmlns:a="http://schemas.openxmlformats.org/drawingml/2006/main">
               <a:ext uri="{FF2B5EF4-FFF2-40B4-BE49-F238E27FC236}">
-                <a16:creationId xmlns:a16="http://schemas.microsoft.com/office/drawing/2014/main" id="{704F7A0E-7718-4140-A2D8-D5BAE304A110}"/>
+                <a16:creationId xmlns:a16="http://schemas.microsoft.com/office/drawing/2014/main" id="{7BA29AC9-DD3E-4995-B1C1-1460D630B2F5}"/>
               </a:ext>
             </a:extLst>
           </p:cNvPr>
@@ -3951,7 +4022,7 @@
           <p:cNvPr id="3" name="Title">
             <a:extLst xmlns:a="http://schemas.openxmlformats.org/drawingml/2006/main">
               <a:ext uri="{FF2B5EF4-FFF2-40B4-BE49-F238E27FC236}">
-                <a16:creationId xmlns:a16="http://schemas.microsoft.com/office/drawing/2014/main" id="{7F644A14-5F5B-4D79-A639-5B9F7CFB56D1}"/>
+                <a16:creationId xmlns:a16="http://schemas.microsoft.com/office/drawing/2014/main" id="{784018AC-6E89-4161-B8EB-A916F7CD9CA9}"/>
               </a:ext>
             </a:extLst>
           </p:cNvPr>
@@ -4180,7 +4251,7 @@
           <p:cNvPr id="2" name="Left column">
             <a:extLst xmlns:a="http://schemas.openxmlformats.org/drawingml/2006/main">
               <a:ext uri="{FF2B5EF4-FFF2-40B4-BE49-F238E27FC236}">
-                <a16:creationId xmlns:a16="http://schemas.microsoft.com/office/drawing/2014/main" id="{9435EEBC-3B0C-47EF-B3F8-9623E64FBECD}"/>
+                <a16:creationId xmlns:a16="http://schemas.microsoft.com/office/drawing/2014/main" id="{4E6EBC6B-6328-4559-88E3-E0A3F21C9D31}"/>
               </a:ext>
             </a:extLst>
           </p:cNvPr>
@@ -4447,12 +4518,12 @@
   </p:cSld>
   <p:clrMap bg1="lt1" tx1="dk1" bg2="lt2" tx2="dk2" accent1="accent1" accent2="accent2" accent3="accent3" accent4="accent4" accent5="accent5" accent6="accent6" hlink="hlink" folHlink="folHlink"/>
   <p:sldLayoutIdLst>
-    <p:sldLayoutId xmlns:r="http://schemas.openxmlformats.org/officeDocument/2006/relationships" id="2147483649" r:id="R311d30ab41754ffc"/>
-    <p:sldLayoutId xmlns:r="http://schemas.openxmlformats.org/officeDocument/2006/relationships" id="2147483650" r:id="Rfdd47719d29942b8"/>
-    <p:sldLayoutId xmlns:r="http://schemas.openxmlformats.org/officeDocument/2006/relationships" id="2147483651" r:id="Rdc09e317ae434436"/>
-    <p:sldLayoutId xmlns:r="http://schemas.openxmlformats.org/officeDocument/2006/relationships" id="2147483652" r:id="Rd9471f505f4f434b"/>
-    <p:sldLayoutId xmlns:r="http://schemas.openxmlformats.org/officeDocument/2006/relationships" id="2147483653" r:id="Rea2f2bcd31fc477c"/>
-    <p:sldLayoutId xmlns:r="http://schemas.openxmlformats.org/officeDocument/2006/relationships" id="2147483654" r:id="R43d80cd5741e4877"/>
+    <p:sldLayoutId xmlns:r="http://schemas.openxmlformats.org/officeDocument/2006/relationships" id="2147483649" r:id="R51d3527a60e74256"/>
+    <p:sldLayoutId xmlns:r="http://schemas.openxmlformats.org/officeDocument/2006/relationships" id="2147483650" r:id="R4dad274505734a1a"/>
+    <p:sldLayoutId xmlns:r="http://schemas.openxmlformats.org/officeDocument/2006/relationships" id="2147483651" r:id="R4ef9ea46dae942f3"/>
+    <p:sldLayoutId xmlns:r="http://schemas.openxmlformats.org/officeDocument/2006/relationships" id="2147483652" r:id="R8348300ce05745a7"/>
+    <p:sldLayoutId xmlns:r="http://schemas.openxmlformats.org/officeDocument/2006/relationships" id="2147483653" r:id="Ref1e56100d1b4d80"/>
+    <p:sldLayoutId xmlns:r="http://schemas.openxmlformats.org/officeDocument/2006/relationships" id="2147483654" r:id="Re402036bab434c4b"/>
   </p:sldLayoutIdLst>
   <p:txStyles>
     <p:titleStyle>
@@ -5003,7 +5074,7 @@
           <p:cNvPr id="7" name="">
             <a:extLst xmlns:a="http://schemas.openxmlformats.org/drawingml/2006/main">
               <a:ext uri="{FF2B5EF4-FFF2-40B4-BE49-F238E27FC236}">
-                <a16:creationId xmlns:a16="http://schemas.microsoft.com/office/drawing/2014/main" id="{26473A48-8334-466D-ADD9-ADB9E4E5642D}"/>
+                <a16:creationId xmlns:a16="http://schemas.microsoft.com/office/drawing/2014/main" id="{8B18721A-5AC0-4D89-9256-92895F8DE891}"/>
               </a:ext>
             </a:extLst>
           </p:cNvPr>
@@ -5159,7 +5230,7 @@
           <p:cNvPr id="2" name="">
             <a:extLst xmlns:a="http://schemas.openxmlformats.org/drawingml/2006/main">
               <a:ext uri="{FF2B5EF4-FFF2-40B4-BE49-F238E27FC236}">
-                <a16:creationId xmlns:a16="http://schemas.microsoft.com/office/drawing/2014/main" id="{A40D0977-5089-4DB7-A698-1018335E5FD6}"/>
+                <a16:creationId xmlns:a16="http://schemas.microsoft.com/office/drawing/2014/main" id="{7D7894E4-6E73-4E41-8117-FDE6CEF2A501}"/>
               </a:ext>
             </a:extLst>
           </p:cNvPr>
@@ -5315,7 +5386,7 @@
           <p:cNvPr id="3" name="">
             <a:extLst xmlns:a="http://schemas.openxmlformats.org/drawingml/2006/main">
               <a:ext uri="{FF2B5EF4-FFF2-40B4-BE49-F238E27FC236}">
-                <a16:creationId xmlns:a16="http://schemas.microsoft.com/office/drawing/2014/main" id="{A8270AB2-4E37-4890-A566-FA318B337385}"/>
+                <a16:creationId xmlns:a16="http://schemas.microsoft.com/office/drawing/2014/main" id="{07B1529E-154B-4EF4-9484-CEAFEB919D4D}"/>
               </a:ext>
             </a:extLst>
           </p:cNvPr>
@@ -5471,7 +5542,7 @@
           <p:cNvPr id="4" name="">
             <a:extLst xmlns:a="http://schemas.openxmlformats.org/drawingml/2006/main">
               <a:ext uri="{FF2B5EF4-FFF2-40B4-BE49-F238E27FC236}">
-                <a16:creationId xmlns:a16="http://schemas.microsoft.com/office/drawing/2014/main" id="{8CFB877D-2040-463E-8C02-2F5D315EA152}"/>
+                <a16:creationId xmlns:a16="http://schemas.microsoft.com/office/drawing/2014/main" id="{61D4E8BD-0E1E-4B82-9F91-66A1C838E70D}"/>
               </a:ext>
             </a:extLst>
           </p:cNvPr>
@@ -5627,7 +5698,7 @@
           <p:cNvPr id="5" name="">
             <a:extLst xmlns:a="http://schemas.openxmlformats.org/drawingml/2006/main">
               <a:ext uri="{FF2B5EF4-FFF2-40B4-BE49-F238E27FC236}">
-                <a16:creationId xmlns:a16="http://schemas.microsoft.com/office/drawing/2014/main" id="{74A3729A-7FA2-4956-8AF5-DD919F8BDFB9}"/>
+                <a16:creationId xmlns:a16="http://schemas.microsoft.com/office/drawing/2014/main" id="{101A6C7C-3AF2-4078-B17A-0D690648B129}"/>
               </a:ext>
             </a:extLst>
           </p:cNvPr>
@@ -5783,7 +5854,7 @@
           <p:cNvPr id="6" name="">
             <a:extLst xmlns:a="http://schemas.openxmlformats.org/drawingml/2006/main">
               <a:ext uri="{FF2B5EF4-FFF2-40B4-BE49-F238E27FC236}">
-                <a16:creationId xmlns:a16="http://schemas.microsoft.com/office/drawing/2014/main" id="{A2383141-6AE3-42A3-9F48-8E03D5205A8A}"/>
+                <a16:creationId xmlns:a16="http://schemas.microsoft.com/office/drawing/2014/main" id="{08143B64-D9C2-4E4D-9182-5011D3F9680E}"/>
               </a:ext>
             </a:extLst>
           </p:cNvPr>
@@ -5937,7 +6008,7 @@
     </p:spTree>
     <p:extLst>
       <p:ext uri="{BB962C8B-B14F-4D97-AF65-F5344CB8AC3E}">
-        <p14:creationId xmlns:p14="http://schemas.microsoft.com/office/powerpoint/2010/main" val="192811216"/>
+        <p14:creationId xmlns:p14="http://schemas.microsoft.com/office/powerpoint/2010/main" val="852272427"/>
       </p:ext>
     </p:extLst>
   </p:cSld>
@@ -5968,7 +6039,7 @@
           <p:cNvPr id="5" name="">
             <a:extLst xmlns:a="http://schemas.openxmlformats.org/drawingml/2006/main">
               <a:ext uri="{FF2B5EF4-FFF2-40B4-BE49-F238E27FC236}">
-                <a16:creationId xmlns:a16="http://schemas.microsoft.com/office/drawing/2014/main" id="{BD4896D0-CEEA-430C-B563-672084DFC6A1}"/>
+                <a16:creationId xmlns:a16="http://schemas.microsoft.com/office/drawing/2014/main" id="{10C9CF7C-7C5D-419A-A8E5-E8180DE323F9}"/>
               </a:ext>
             </a:extLst>
           </p:cNvPr>
@@ -6124,7 +6195,7 @@
           <p:cNvPr id="2" name="">
             <a:extLst xmlns:a="http://schemas.openxmlformats.org/drawingml/2006/main">
               <a:ext uri="{FF2B5EF4-FFF2-40B4-BE49-F238E27FC236}">
-                <a16:creationId xmlns:a16="http://schemas.microsoft.com/office/drawing/2014/main" id="{CE178817-1690-4B10-AEFE-A64F4180517D}"/>
+                <a16:creationId xmlns:a16="http://schemas.microsoft.com/office/drawing/2014/main" id="{EC6B1FCD-F58D-4028-9C13-2DD8ECE2A893}"/>
               </a:ext>
             </a:extLst>
           </p:cNvPr>
@@ -6280,7 +6351,7 @@
           <p:cNvPr id="3" name="">
             <a:extLst xmlns:a="http://schemas.openxmlformats.org/drawingml/2006/main">
               <a:ext uri="{FF2B5EF4-FFF2-40B4-BE49-F238E27FC236}">
-                <a16:creationId xmlns:a16="http://schemas.microsoft.com/office/drawing/2014/main" id="{D21A9A9A-58CA-4738-AEB6-439AC28FDA64}"/>
+                <a16:creationId xmlns:a16="http://schemas.microsoft.com/office/drawing/2014/main" id="{25A8D4B5-465B-41DA-950F-EE0D52DB3130}"/>
               </a:ext>
             </a:extLst>
           </p:cNvPr>
@@ -7221,7 +7292,7 @@
           <p:cNvPr id="4" name="">
             <a:extLst xmlns:a="http://schemas.openxmlformats.org/drawingml/2006/main">
               <a:ext uri="{FF2B5EF4-FFF2-40B4-BE49-F238E27FC236}">
-                <a16:creationId xmlns:a16="http://schemas.microsoft.com/office/drawing/2014/main" id="{2FF2674E-B8D0-4C2C-906C-1AC97F3E95DC}"/>
+                <a16:creationId xmlns:a16="http://schemas.microsoft.com/office/drawing/2014/main" id="{0885CD1B-6673-4EE4-9D9C-1DDFAC3514F8}"/>
               </a:ext>
             </a:extLst>
           </p:cNvPr>
@@ -7375,7 +7446,7 @@
     </p:spTree>
     <p:extLst>
       <p:ext uri="{BB962C8B-B14F-4D97-AF65-F5344CB8AC3E}">
-        <p14:creationId xmlns:p14="http://schemas.microsoft.com/office/powerpoint/2010/main" val="2123916718"/>
+        <p14:creationId xmlns:p14="http://schemas.microsoft.com/office/powerpoint/2010/main" val="1848720890"/>
       </p:ext>
     </p:extLst>
   </p:cSld>
@@ -7406,7 +7477,7 @@
           <p:cNvPr id="5" name="">
             <a:extLst xmlns:a="http://schemas.openxmlformats.org/drawingml/2006/main">
               <a:ext uri="{FF2B5EF4-FFF2-40B4-BE49-F238E27FC236}">
-                <a16:creationId xmlns:a16="http://schemas.microsoft.com/office/drawing/2014/main" id="{F8FA9CEF-6D75-4E42-8FB8-D361B4A1E1BF}"/>
+                <a16:creationId xmlns:a16="http://schemas.microsoft.com/office/drawing/2014/main" id="{916C77D4-73D0-4B90-88D4-1949CF6DA371}"/>
               </a:ext>
             </a:extLst>
           </p:cNvPr>
@@ -7562,7 +7633,7 @@
           <p:cNvPr id="2" name="">
             <a:extLst xmlns:a="http://schemas.openxmlformats.org/drawingml/2006/main">
               <a:ext uri="{FF2B5EF4-FFF2-40B4-BE49-F238E27FC236}">
-                <a16:creationId xmlns:a16="http://schemas.microsoft.com/office/drawing/2014/main" id="{5774E13F-B8D3-4D96-9AE2-2497530FF63A}"/>
+                <a16:creationId xmlns:a16="http://schemas.microsoft.com/office/drawing/2014/main" id="{B4002263-A27E-4C6B-86B9-BDB7CAFA29D4}"/>
               </a:ext>
             </a:extLst>
           </p:cNvPr>
@@ -7718,7 +7789,7 @@
           <p:cNvPr id="3" name="">
             <a:extLst xmlns:a="http://schemas.openxmlformats.org/drawingml/2006/main">
               <a:ext uri="{FF2B5EF4-FFF2-40B4-BE49-F238E27FC236}">
-                <a16:creationId xmlns:a16="http://schemas.microsoft.com/office/drawing/2014/main" id="{9D5DFC84-907C-4298-AE70-995787408F61}"/>
+                <a16:creationId xmlns:a16="http://schemas.microsoft.com/office/drawing/2014/main" id="{4361BC88-FFB8-4202-AEB7-F08F1245D49D}"/>
               </a:ext>
             </a:extLst>
           </p:cNvPr>
@@ -8659,7 +8730,7 @@
           <p:cNvPr id="4" name="">
             <a:extLst xmlns:a="http://schemas.openxmlformats.org/drawingml/2006/main">
               <a:ext uri="{FF2B5EF4-FFF2-40B4-BE49-F238E27FC236}">
-                <a16:creationId xmlns:a16="http://schemas.microsoft.com/office/drawing/2014/main" id="{EABD27A4-E043-488F-861F-76C1E07F4EDD}"/>
+                <a16:creationId xmlns:a16="http://schemas.microsoft.com/office/drawing/2014/main" id="{4991DFA8-B984-43E9-8833-04DBEB5AF4A7}"/>
               </a:ext>
             </a:extLst>
           </p:cNvPr>
@@ -8813,7 +8884,7 @@
     </p:spTree>
     <p:extLst>
       <p:ext uri="{BB962C8B-B14F-4D97-AF65-F5344CB8AC3E}">
-        <p14:creationId xmlns:p14="http://schemas.microsoft.com/office/powerpoint/2010/main" val="1184063966"/>
+        <p14:creationId xmlns:p14="http://schemas.microsoft.com/office/powerpoint/2010/main" val="109122764"/>
       </p:ext>
     </p:extLst>
   </p:cSld>
@@ -8844,7 +8915,7 @@
           <p:cNvPr id="5" name="">
             <a:extLst xmlns:a="http://schemas.openxmlformats.org/drawingml/2006/main">
               <a:ext uri="{FF2B5EF4-FFF2-40B4-BE49-F238E27FC236}">
-                <a16:creationId xmlns:a16="http://schemas.microsoft.com/office/drawing/2014/main" id="{3EE43271-778A-47A0-A6F8-3ADAD2679E64}"/>
+                <a16:creationId xmlns:a16="http://schemas.microsoft.com/office/drawing/2014/main" id="{ACAD1545-786B-4CEA-8A00-FA15DCE25A12}"/>
               </a:ext>
             </a:extLst>
           </p:cNvPr>
@@ -9000,7 +9071,7 @@
           <p:cNvPr id="2" name="">
             <a:extLst xmlns:a="http://schemas.openxmlformats.org/drawingml/2006/main">
               <a:ext uri="{FF2B5EF4-FFF2-40B4-BE49-F238E27FC236}">
-                <a16:creationId xmlns:a16="http://schemas.microsoft.com/office/drawing/2014/main" id="{A716D2B1-CBDF-450A-8796-8E9D039622A5}"/>
+                <a16:creationId xmlns:a16="http://schemas.microsoft.com/office/drawing/2014/main" id="{00B17499-4F0E-44E8-873C-535EF2AFCF22}"/>
               </a:ext>
             </a:extLst>
           </p:cNvPr>
@@ -9156,7 +9227,7 @@
           <p:cNvPr id="3" name="">
             <a:extLst xmlns:a="http://schemas.openxmlformats.org/drawingml/2006/main">
               <a:ext uri="{FF2B5EF4-FFF2-40B4-BE49-F238E27FC236}">
-                <a16:creationId xmlns:a16="http://schemas.microsoft.com/office/drawing/2014/main" id="{54F5BF5F-7784-43B4-976F-4E82D5F1F8DF}"/>
+                <a16:creationId xmlns:a16="http://schemas.microsoft.com/office/drawing/2014/main" id="{47CDB106-5DF9-48E1-B14B-B8CC7E1E823B}"/>
               </a:ext>
             </a:extLst>
           </p:cNvPr>
@@ -10097,7 +10168,7 @@
           <p:cNvPr id="4" name="">
             <a:extLst xmlns:a="http://schemas.openxmlformats.org/drawingml/2006/main">
               <a:ext uri="{FF2B5EF4-FFF2-40B4-BE49-F238E27FC236}">
-                <a16:creationId xmlns:a16="http://schemas.microsoft.com/office/drawing/2014/main" id="{1B25562C-579F-4080-B0C7-E4FDA75305F2}"/>
+                <a16:creationId xmlns:a16="http://schemas.microsoft.com/office/drawing/2014/main" id="{73BE4E61-AAF1-4239-A367-B55066D781AD}"/>
               </a:ext>
             </a:extLst>
           </p:cNvPr>
@@ -10251,7 +10322,7 @@
     </p:spTree>
     <p:extLst>
       <p:ext uri="{BB962C8B-B14F-4D97-AF65-F5344CB8AC3E}">
-        <p14:creationId xmlns:p14="http://schemas.microsoft.com/office/powerpoint/2010/main" val="1302439402"/>
+        <p14:creationId xmlns:p14="http://schemas.microsoft.com/office/powerpoint/2010/main" val="1521844835"/>
       </p:ext>
     </p:extLst>
   </p:cSld>
@@ -10282,7 +10353,7 @@
           <p:cNvPr id="8" name="">
             <a:extLst xmlns:a="http://schemas.openxmlformats.org/drawingml/2006/main">
               <a:ext uri="{FF2B5EF4-FFF2-40B4-BE49-F238E27FC236}">
-                <a16:creationId xmlns:a16="http://schemas.microsoft.com/office/drawing/2014/main" id="{36DF5B0B-4896-4E94-9C11-7FA62ED197D7}"/>
+                <a16:creationId xmlns:a16="http://schemas.microsoft.com/office/drawing/2014/main" id="{0726193A-5666-4872-885F-BCD4FDFCADA3}"/>
               </a:ext>
             </a:extLst>
           </p:cNvPr>
@@ -10438,7 +10509,7 @@
           <p:cNvPr id="2" name="">
             <a:extLst xmlns:a="http://schemas.openxmlformats.org/drawingml/2006/main">
               <a:ext uri="{FF2B5EF4-FFF2-40B4-BE49-F238E27FC236}">
-                <a16:creationId xmlns:a16="http://schemas.microsoft.com/office/drawing/2014/main" id="{2F934D38-3DCE-4E56-A09E-BD4EB90A6107}"/>
+                <a16:creationId xmlns:a16="http://schemas.microsoft.com/office/drawing/2014/main" id="{44040A97-F57A-4E8D-B7A4-B27DFB26FDDB}"/>
               </a:ext>
             </a:extLst>
           </p:cNvPr>
@@ -10594,7 +10665,7 @@
           <p:cNvPr id="3" name="">
             <a:extLst xmlns:a="http://schemas.openxmlformats.org/drawingml/2006/main">
               <a:ext uri="{FF2B5EF4-FFF2-40B4-BE49-F238E27FC236}">
-                <a16:creationId xmlns:a16="http://schemas.microsoft.com/office/drawing/2014/main" id="{56164660-1FBD-4993-A525-C3CE1F640FA8}"/>
+                <a16:creationId xmlns:a16="http://schemas.microsoft.com/office/drawing/2014/main" id="{091837EF-E939-4DC2-9D4D-42FE69EF5B61}"/>
               </a:ext>
             </a:extLst>
           </p:cNvPr>
@@ -10750,7 +10821,7 @@
           <p:cNvPr id="4" name="">
             <a:extLst xmlns:a="http://schemas.openxmlformats.org/drawingml/2006/main">
               <a:ext uri="{FF2B5EF4-FFF2-40B4-BE49-F238E27FC236}">
-                <a16:creationId xmlns:a16="http://schemas.microsoft.com/office/drawing/2014/main" id="{FE2A83DD-DAAE-4F50-95B2-307414461104}"/>
+                <a16:creationId xmlns:a16="http://schemas.microsoft.com/office/drawing/2014/main" id="{844785B1-C09E-4067-9635-13F3D3EC931F}"/>
               </a:ext>
             </a:extLst>
           </p:cNvPr>
@@ -10906,7 +10977,7 @@
           <p:cNvPr id="5" name="">
             <a:extLst xmlns:a="http://schemas.openxmlformats.org/drawingml/2006/main">
               <a:ext uri="{FF2B5EF4-FFF2-40B4-BE49-F238E27FC236}">
-                <a16:creationId xmlns:a16="http://schemas.microsoft.com/office/drawing/2014/main" id="{516D97C7-E700-4ADF-8D6D-0DBCFD8A53E1}"/>
+                <a16:creationId xmlns:a16="http://schemas.microsoft.com/office/drawing/2014/main" id="{B0B30BBE-C298-4C45-B326-547E7B866608}"/>
               </a:ext>
             </a:extLst>
           </p:cNvPr>
@@ -11062,7 +11133,7 @@
           <p:cNvPr id="6" name="">
             <a:extLst xmlns:a="http://schemas.openxmlformats.org/drawingml/2006/main">
               <a:ext uri="{FF2B5EF4-FFF2-40B4-BE49-F238E27FC236}">
-                <a16:creationId xmlns:a16="http://schemas.microsoft.com/office/drawing/2014/main" id="{A1DCD20D-C602-425F-ADA6-455F1FC52441}"/>
+                <a16:creationId xmlns:a16="http://schemas.microsoft.com/office/drawing/2014/main" id="{ED3C9387-1DB5-451A-A214-0ED8779A3C22}"/>
               </a:ext>
             </a:extLst>
           </p:cNvPr>
@@ -11218,7 +11289,7 @@
           <p:cNvPr id="7" name="">
             <a:extLst xmlns:a="http://schemas.openxmlformats.org/drawingml/2006/main">
               <a:ext uri="{FF2B5EF4-FFF2-40B4-BE49-F238E27FC236}">
-                <a16:creationId xmlns:a16="http://schemas.microsoft.com/office/drawing/2014/main" id="{AA106C60-3F03-42B8-8C7F-C79F87C480F2}"/>
+                <a16:creationId xmlns:a16="http://schemas.microsoft.com/office/drawing/2014/main" id="{55CA1F82-DCF6-4A6C-83B9-1A450018B7DF}"/>
               </a:ext>
             </a:extLst>
           </p:cNvPr>
@@ -11372,7 +11443,7 @@
     </p:spTree>
     <p:extLst>
       <p:ext uri="{BB962C8B-B14F-4D97-AF65-F5344CB8AC3E}">
-        <p14:creationId xmlns:p14="http://schemas.microsoft.com/office/powerpoint/2010/main" val="338080318"/>
+        <p14:creationId xmlns:p14="http://schemas.microsoft.com/office/powerpoint/2010/main" val="2121143619"/>
       </p:ext>
     </p:extLst>
   </p:cSld>
@@ -11403,7 +11474,7 @@
           <p:cNvPr id="8" name="">
             <a:extLst xmlns:a="http://schemas.openxmlformats.org/drawingml/2006/main">
               <a:ext uri="{FF2B5EF4-FFF2-40B4-BE49-F238E27FC236}">
-                <a16:creationId xmlns:a16="http://schemas.microsoft.com/office/drawing/2014/main" id="{67B30375-E040-401C-B5A4-BDAC0A8BA4B7}"/>
+                <a16:creationId xmlns:a16="http://schemas.microsoft.com/office/drawing/2014/main" id="{9298082A-7E0C-42DB-8AF5-579BE9CAA02A}"/>
               </a:ext>
             </a:extLst>
           </p:cNvPr>
@@ -11559,7 +11630,7 @@
           <p:cNvPr id="2" name="">
             <a:extLst xmlns:a="http://schemas.openxmlformats.org/drawingml/2006/main">
               <a:ext uri="{FF2B5EF4-FFF2-40B4-BE49-F238E27FC236}">
-                <a16:creationId xmlns:a16="http://schemas.microsoft.com/office/drawing/2014/main" id="{909AEC6B-3D06-4E9A-A6C1-4975D8045CC3}"/>
+                <a16:creationId xmlns:a16="http://schemas.microsoft.com/office/drawing/2014/main" id="{D584683A-841E-471C-9FCD-CBEA43503B6C}"/>
               </a:ext>
             </a:extLst>
           </p:cNvPr>
@@ -11715,7 +11786,7 @@
           <p:cNvPr id="3" name="">
             <a:extLst xmlns:a="http://schemas.openxmlformats.org/drawingml/2006/main">
               <a:ext uri="{FF2B5EF4-FFF2-40B4-BE49-F238E27FC236}">
-                <a16:creationId xmlns:a16="http://schemas.microsoft.com/office/drawing/2014/main" id="{09B1C61B-E1A1-4C56-BD9E-87B171F960E3}"/>
+                <a16:creationId xmlns:a16="http://schemas.microsoft.com/office/drawing/2014/main" id="{6DDDBFB1-562B-4374-B084-448C82A96D90}"/>
               </a:ext>
             </a:extLst>
           </p:cNvPr>
@@ -11871,7 +11942,7 @@
           <p:cNvPr id="4" name="">
             <a:extLst xmlns:a="http://schemas.openxmlformats.org/drawingml/2006/main">
               <a:ext uri="{FF2B5EF4-FFF2-40B4-BE49-F238E27FC236}">
-                <a16:creationId xmlns:a16="http://schemas.microsoft.com/office/drawing/2014/main" id="{BFCAC42A-4D39-4059-93EB-E2F37C1FB2D5}"/>
+                <a16:creationId xmlns:a16="http://schemas.microsoft.com/office/drawing/2014/main" id="{5076C298-F0C2-429C-A4CB-D5C0357CFAC0}"/>
               </a:ext>
             </a:extLst>
           </p:cNvPr>
@@ -12027,7 +12098,7 @@
           <p:cNvPr id="5" name="">
             <a:extLst xmlns:a="http://schemas.openxmlformats.org/drawingml/2006/main">
               <a:ext uri="{FF2B5EF4-FFF2-40B4-BE49-F238E27FC236}">
-                <a16:creationId xmlns:a16="http://schemas.microsoft.com/office/drawing/2014/main" id="{9C40CA21-60F9-4142-8A62-9D91FE261741}"/>
+                <a16:creationId xmlns:a16="http://schemas.microsoft.com/office/drawing/2014/main" id="{DA658915-BF31-47CE-A7DC-5697590199D9}"/>
               </a:ext>
             </a:extLst>
           </p:cNvPr>
@@ -12183,7 +12254,7 @@
           <p:cNvPr id="6" name="">
             <a:extLst xmlns:a="http://schemas.openxmlformats.org/drawingml/2006/main">
               <a:ext uri="{FF2B5EF4-FFF2-40B4-BE49-F238E27FC236}">
-                <a16:creationId xmlns:a16="http://schemas.microsoft.com/office/drawing/2014/main" id="{47B8921E-1C47-4E4B-B5BD-57B196D36021}"/>
+                <a16:creationId xmlns:a16="http://schemas.microsoft.com/office/drawing/2014/main" id="{4C5DEA57-1FC8-46F4-9532-4A1BCBF6D371}"/>
               </a:ext>
             </a:extLst>
           </p:cNvPr>
@@ -12339,7 +12410,7 @@
           <p:cNvPr id="7" name="">
             <a:extLst xmlns:a="http://schemas.openxmlformats.org/drawingml/2006/main">
               <a:ext uri="{FF2B5EF4-FFF2-40B4-BE49-F238E27FC236}">
-                <a16:creationId xmlns:a16="http://schemas.microsoft.com/office/drawing/2014/main" id="{93818CA3-9194-4148-812B-99FC4E983A4D}"/>
+                <a16:creationId xmlns:a16="http://schemas.microsoft.com/office/drawing/2014/main" id="{8EF5C538-4D6B-49ED-A585-7A4C550C191D}"/>
               </a:ext>
             </a:extLst>
           </p:cNvPr>
@@ -12493,7 +12564,7 @@
     </p:spTree>
     <p:extLst>
       <p:ext uri="{BB962C8B-B14F-4D97-AF65-F5344CB8AC3E}">
-        <p14:creationId xmlns:p14="http://schemas.microsoft.com/office/powerpoint/2010/main" val="158435233"/>
+        <p14:creationId xmlns:p14="http://schemas.microsoft.com/office/powerpoint/2010/main" val="1887289768"/>
       </p:ext>
     </p:extLst>
   </p:cSld>
@@ -12524,7 +12595,7 @@
           <p:cNvPr id="8" name="">
             <a:extLst xmlns:a="http://schemas.openxmlformats.org/drawingml/2006/main">
               <a:ext uri="{FF2B5EF4-FFF2-40B4-BE49-F238E27FC236}">
-                <a16:creationId xmlns:a16="http://schemas.microsoft.com/office/drawing/2014/main" id="{F7403624-50DF-43F9-A1A7-496B5507D59A}"/>
+                <a16:creationId xmlns:a16="http://schemas.microsoft.com/office/drawing/2014/main" id="{43B85CEA-CDD8-471D-82BC-1E3ABF6D7703}"/>
               </a:ext>
             </a:extLst>
           </p:cNvPr>
@@ -12680,7 +12751,7 @@
           <p:cNvPr id="2" name="">
             <a:extLst xmlns:a="http://schemas.openxmlformats.org/drawingml/2006/main">
               <a:ext uri="{FF2B5EF4-FFF2-40B4-BE49-F238E27FC236}">
-                <a16:creationId xmlns:a16="http://schemas.microsoft.com/office/drawing/2014/main" id="{011D15E2-B2B0-46F9-81E1-936CCB29501C}"/>
+                <a16:creationId xmlns:a16="http://schemas.microsoft.com/office/drawing/2014/main" id="{05C05276-1B8F-40D2-A0D0-1F212EB7C17E}"/>
               </a:ext>
             </a:extLst>
           </p:cNvPr>
@@ -12836,7 +12907,7 @@
           <p:cNvPr id="3" name="">
             <a:extLst xmlns:a="http://schemas.openxmlformats.org/drawingml/2006/main">
               <a:ext uri="{FF2B5EF4-FFF2-40B4-BE49-F238E27FC236}">
-                <a16:creationId xmlns:a16="http://schemas.microsoft.com/office/drawing/2014/main" id="{52EEC423-F5DC-453A-9DFC-34047874C898}"/>
+                <a16:creationId xmlns:a16="http://schemas.microsoft.com/office/drawing/2014/main" id="{0D4B24A5-D972-408D-BDB8-2D663003CA4F}"/>
               </a:ext>
             </a:extLst>
           </p:cNvPr>
@@ -12992,7 +13063,7 @@
           <p:cNvPr id="4" name="">
             <a:extLst xmlns:a="http://schemas.openxmlformats.org/drawingml/2006/main">
               <a:ext uri="{FF2B5EF4-FFF2-40B4-BE49-F238E27FC236}">
-                <a16:creationId xmlns:a16="http://schemas.microsoft.com/office/drawing/2014/main" id="{AE810D4A-06F8-4123-855D-EBD38AD67BD6}"/>
+                <a16:creationId xmlns:a16="http://schemas.microsoft.com/office/drawing/2014/main" id="{47CB960F-E400-4EB3-BA2A-01674FE85870}"/>
               </a:ext>
             </a:extLst>
           </p:cNvPr>
@@ -13148,7 +13219,7 @@
           <p:cNvPr id="5" name="">
             <a:extLst xmlns:a="http://schemas.openxmlformats.org/drawingml/2006/main">
               <a:ext uri="{FF2B5EF4-FFF2-40B4-BE49-F238E27FC236}">
-                <a16:creationId xmlns:a16="http://schemas.microsoft.com/office/drawing/2014/main" id="{396511BD-10F9-408B-8811-3F6C18CD8038}"/>
+                <a16:creationId xmlns:a16="http://schemas.microsoft.com/office/drawing/2014/main" id="{0A70C31D-DD86-4566-A74D-C1EE2653D5F5}"/>
               </a:ext>
             </a:extLst>
           </p:cNvPr>
@@ -13304,7 +13375,7 @@
           <p:cNvPr id="6" name="">
             <a:extLst xmlns:a="http://schemas.openxmlformats.org/drawingml/2006/main">
               <a:ext uri="{FF2B5EF4-FFF2-40B4-BE49-F238E27FC236}">
-                <a16:creationId xmlns:a16="http://schemas.microsoft.com/office/drawing/2014/main" id="{4FAD790F-BBD0-496B-B44B-F6BCF5B00494}"/>
+                <a16:creationId xmlns:a16="http://schemas.microsoft.com/office/drawing/2014/main" id="{A9E4C8EE-63C6-494F-8E95-527D9E4B060E}"/>
               </a:ext>
             </a:extLst>
           </p:cNvPr>
@@ -13460,7 +13531,7 @@
           <p:cNvPr id="7" name="">
             <a:extLst xmlns:a="http://schemas.openxmlformats.org/drawingml/2006/main">
               <a:ext uri="{FF2B5EF4-FFF2-40B4-BE49-F238E27FC236}">
-                <a16:creationId xmlns:a16="http://schemas.microsoft.com/office/drawing/2014/main" id="{031E8C87-475C-4AC0-9493-A8F00CD90C50}"/>
+                <a16:creationId xmlns:a16="http://schemas.microsoft.com/office/drawing/2014/main" id="{C052C863-1CB4-4F5F-BFF0-7AF2072DB23C}"/>
               </a:ext>
             </a:extLst>
           </p:cNvPr>
@@ -13614,7 +13685,7 @@
     </p:spTree>
     <p:extLst>
       <p:ext uri="{BB962C8B-B14F-4D97-AF65-F5344CB8AC3E}">
-        <p14:creationId xmlns:p14="http://schemas.microsoft.com/office/powerpoint/2010/main" val="636422513"/>
+        <p14:creationId xmlns:p14="http://schemas.microsoft.com/office/powerpoint/2010/main" val="1679465683"/>
       </p:ext>
     </p:extLst>
   </p:cSld>
@@ -13645,7 +13716,7 @@
           <p:cNvPr id="8" name="">
             <a:extLst xmlns:a="http://schemas.openxmlformats.org/drawingml/2006/main">
               <a:ext uri="{FF2B5EF4-FFF2-40B4-BE49-F238E27FC236}">
-                <a16:creationId xmlns:a16="http://schemas.microsoft.com/office/drawing/2014/main" id="{1460A269-6F44-4809-BD76-49F3BEA51BA9}"/>
+                <a16:creationId xmlns:a16="http://schemas.microsoft.com/office/drawing/2014/main" id="{5F589291-E4D2-43EE-9FB2-C3211734573D}"/>
               </a:ext>
             </a:extLst>
           </p:cNvPr>
@@ -13801,7 +13872,7 @@
           <p:cNvPr id="2" name="">
             <a:extLst xmlns:a="http://schemas.openxmlformats.org/drawingml/2006/main">
               <a:ext uri="{FF2B5EF4-FFF2-40B4-BE49-F238E27FC236}">
-                <a16:creationId xmlns:a16="http://schemas.microsoft.com/office/drawing/2014/main" id="{5577371A-C31E-49CB-B27D-25F915357335}"/>
+                <a16:creationId xmlns:a16="http://schemas.microsoft.com/office/drawing/2014/main" id="{CF6668FC-B49C-44C5-AE9C-E88F083772F4}"/>
               </a:ext>
             </a:extLst>
           </p:cNvPr>
@@ -13957,7 +14028,7 @@
           <p:cNvPr id="3" name="">
             <a:extLst xmlns:a="http://schemas.openxmlformats.org/drawingml/2006/main">
               <a:ext uri="{FF2B5EF4-FFF2-40B4-BE49-F238E27FC236}">
-                <a16:creationId xmlns:a16="http://schemas.microsoft.com/office/drawing/2014/main" id="{6EE38999-7685-4DEA-8834-642B04F21864}"/>
+                <a16:creationId xmlns:a16="http://schemas.microsoft.com/office/drawing/2014/main" id="{05A16212-DD2B-4362-9E41-9B64F161684E}"/>
               </a:ext>
             </a:extLst>
           </p:cNvPr>
@@ -14113,7 +14184,7 @@
           <p:cNvPr id="4" name="">
             <a:extLst xmlns:a="http://schemas.openxmlformats.org/drawingml/2006/main">
               <a:ext uri="{FF2B5EF4-FFF2-40B4-BE49-F238E27FC236}">
-                <a16:creationId xmlns:a16="http://schemas.microsoft.com/office/drawing/2014/main" id="{9BAE2B28-F6F3-425B-B112-7A8A41BC3ACD}"/>
+                <a16:creationId xmlns:a16="http://schemas.microsoft.com/office/drawing/2014/main" id="{343DB384-D20F-4302-B19E-453B6FA540FB}"/>
               </a:ext>
             </a:extLst>
           </p:cNvPr>
@@ -14269,7 +14340,7 @@
           <p:cNvPr id="5" name="">
             <a:extLst xmlns:a="http://schemas.openxmlformats.org/drawingml/2006/main">
               <a:ext uri="{FF2B5EF4-FFF2-40B4-BE49-F238E27FC236}">
-                <a16:creationId xmlns:a16="http://schemas.microsoft.com/office/drawing/2014/main" id="{EA035486-7F40-499A-A0AC-19792FEF9529}"/>
+                <a16:creationId xmlns:a16="http://schemas.microsoft.com/office/drawing/2014/main" id="{875501FF-9012-494D-819C-ED019FFC3B27}"/>
               </a:ext>
             </a:extLst>
           </p:cNvPr>
@@ -14425,7 +14496,7 @@
           <p:cNvPr id="6" name="">
             <a:extLst xmlns:a="http://schemas.openxmlformats.org/drawingml/2006/main">
               <a:ext uri="{FF2B5EF4-FFF2-40B4-BE49-F238E27FC236}">
-                <a16:creationId xmlns:a16="http://schemas.microsoft.com/office/drawing/2014/main" id="{C51D491B-69FD-4CDA-B1A8-664B624E5DC7}"/>
+                <a16:creationId xmlns:a16="http://schemas.microsoft.com/office/drawing/2014/main" id="{1ED1719E-F163-4F19-8FA1-626DC125C0B6}"/>
               </a:ext>
             </a:extLst>
           </p:cNvPr>
@@ -14581,7 +14652,7 @@
           <p:cNvPr id="7" name="">
             <a:extLst xmlns:a="http://schemas.openxmlformats.org/drawingml/2006/main">
               <a:ext uri="{FF2B5EF4-FFF2-40B4-BE49-F238E27FC236}">
-                <a16:creationId xmlns:a16="http://schemas.microsoft.com/office/drawing/2014/main" id="{A58AC426-00D3-4247-ACDE-739206008DC1}"/>
+                <a16:creationId xmlns:a16="http://schemas.microsoft.com/office/drawing/2014/main" id="{E9374BA9-28EE-4EDD-BEC7-7F130C00CD8A}"/>
               </a:ext>
             </a:extLst>
           </p:cNvPr>
@@ -14735,7 +14806,7 @@
     </p:spTree>
     <p:extLst>
       <p:ext uri="{BB962C8B-B14F-4D97-AF65-F5344CB8AC3E}">
-        <p14:creationId xmlns:p14="http://schemas.microsoft.com/office/powerpoint/2010/main" val="289484834"/>
+        <p14:creationId xmlns:p14="http://schemas.microsoft.com/office/powerpoint/2010/main" val="1010455688"/>
       </p:ext>
     </p:extLst>
   </p:cSld>
@@ -14766,7 +14837,7 @@
           <p:cNvPr id="8" name="">
             <a:extLst xmlns:a="http://schemas.openxmlformats.org/drawingml/2006/main">
               <a:ext uri="{FF2B5EF4-FFF2-40B4-BE49-F238E27FC236}">
-                <a16:creationId xmlns:a16="http://schemas.microsoft.com/office/drawing/2014/main" id="{6B6A620E-72B5-4463-9777-FC9078A4C011}"/>
+                <a16:creationId xmlns:a16="http://schemas.microsoft.com/office/drawing/2014/main" id="{994B4A38-9E05-413F-9BDC-C80F72D984EE}"/>
               </a:ext>
             </a:extLst>
           </p:cNvPr>
@@ -14922,7 +14993,7 @@
           <p:cNvPr id="2" name="">
             <a:extLst xmlns:a="http://schemas.openxmlformats.org/drawingml/2006/main">
               <a:ext uri="{FF2B5EF4-FFF2-40B4-BE49-F238E27FC236}">
-                <a16:creationId xmlns:a16="http://schemas.microsoft.com/office/drawing/2014/main" id="{D0558853-9D72-48AC-AE50-63D47C6CC522}"/>
+                <a16:creationId xmlns:a16="http://schemas.microsoft.com/office/drawing/2014/main" id="{FC6273F6-D9C9-4ABA-A7E3-A8F70AE4507E}"/>
               </a:ext>
             </a:extLst>
           </p:cNvPr>
@@ -15078,7 +15149,7 @@
           <p:cNvPr id="3" name="">
             <a:extLst xmlns:a="http://schemas.openxmlformats.org/drawingml/2006/main">
               <a:ext uri="{FF2B5EF4-FFF2-40B4-BE49-F238E27FC236}">
-                <a16:creationId xmlns:a16="http://schemas.microsoft.com/office/drawing/2014/main" id="{AF9AD0DD-7ED4-4AAD-8737-8767ECD3189C}"/>
+                <a16:creationId xmlns:a16="http://schemas.microsoft.com/office/drawing/2014/main" id="{7DFDECB0-E476-4D71-B041-5A4DA371A9DD}"/>
               </a:ext>
             </a:extLst>
           </p:cNvPr>
@@ -15234,7 +15305,7 @@
           <p:cNvPr id="4" name="">
             <a:extLst xmlns:a="http://schemas.openxmlformats.org/drawingml/2006/main">
               <a:ext uri="{FF2B5EF4-FFF2-40B4-BE49-F238E27FC236}">
-                <a16:creationId xmlns:a16="http://schemas.microsoft.com/office/drawing/2014/main" id="{2C444E03-E031-4C92-9AA2-01F1C812E9FD}"/>
+                <a16:creationId xmlns:a16="http://schemas.microsoft.com/office/drawing/2014/main" id="{4276C7B4-E6DB-4028-AA4E-FFC603917659}"/>
               </a:ext>
             </a:extLst>
           </p:cNvPr>
@@ -15390,7 +15461,7 @@
           <p:cNvPr id="5" name="">
             <a:extLst xmlns:a="http://schemas.openxmlformats.org/drawingml/2006/main">
               <a:ext uri="{FF2B5EF4-FFF2-40B4-BE49-F238E27FC236}">
-                <a16:creationId xmlns:a16="http://schemas.microsoft.com/office/drawing/2014/main" id="{70C7E095-30B6-44B5-B14C-39D27F944446}"/>
+                <a16:creationId xmlns:a16="http://schemas.microsoft.com/office/drawing/2014/main" id="{D814B748-242C-4258-8D79-E023FE16B82B}"/>
               </a:ext>
             </a:extLst>
           </p:cNvPr>
@@ -15546,7 +15617,7 @@
           <p:cNvPr id="6" name="">
             <a:extLst xmlns:a="http://schemas.openxmlformats.org/drawingml/2006/main">
               <a:ext uri="{FF2B5EF4-FFF2-40B4-BE49-F238E27FC236}">
-                <a16:creationId xmlns:a16="http://schemas.microsoft.com/office/drawing/2014/main" id="{1F3E2EC8-4245-4793-B10A-73819C64571F}"/>
+                <a16:creationId xmlns:a16="http://schemas.microsoft.com/office/drawing/2014/main" id="{55EF9FA9-E634-4B25-BEA5-F701A81288EF}"/>
               </a:ext>
             </a:extLst>
           </p:cNvPr>
@@ -15702,7 +15773,7 @@
           <p:cNvPr id="7" name="">
             <a:extLst xmlns:a="http://schemas.openxmlformats.org/drawingml/2006/main">
               <a:ext uri="{FF2B5EF4-FFF2-40B4-BE49-F238E27FC236}">
-                <a16:creationId xmlns:a16="http://schemas.microsoft.com/office/drawing/2014/main" id="{9CCF5759-F6B3-4254-BB1A-BD27AB7DFFEF}"/>
+                <a16:creationId xmlns:a16="http://schemas.microsoft.com/office/drawing/2014/main" id="{1D797BA1-90B9-45E8-8061-0CBB516DD4A3}"/>
               </a:ext>
             </a:extLst>
           </p:cNvPr>
@@ -15856,7 +15927,7 @@
     </p:spTree>
     <p:extLst>
       <p:ext uri="{BB962C8B-B14F-4D97-AF65-F5344CB8AC3E}">
-        <p14:creationId xmlns:p14="http://schemas.microsoft.com/office/powerpoint/2010/main" val="856969992"/>
+        <p14:creationId xmlns:p14="http://schemas.microsoft.com/office/powerpoint/2010/main" val="1968853623"/>
       </p:ext>
     </p:extLst>
   </p:cSld>
@@ -15887,7 +15958,7 @@
           <p:cNvPr id="8" name="">
             <a:extLst xmlns:a="http://schemas.openxmlformats.org/drawingml/2006/main">
               <a:ext uri="{FF2B5EF4-FFF2-40B4-BE49-F238E27FC236}">
-                <a16:creationId xmlns:a16="http://schemas.microsoft.com/office/drawing/2014/main" id="{91E9E351-73B0-4562-A4D7-AED9425115CC}"/>
+                <a16:creationId xmlns:a16="http://schemas.microsoft.com/office/drawing/2014/main" id="{272320BF-F5E2-43FF-9872-33DC981B3C1F}"/>
               </a:ext>
             </a:extLst>
           </p:cNvPr>
@@ -16033,7 +16104,7 @@
                 <a:ea typeface="Arial"/>
                 <a:cs typeface="Arial"/>
               </a:rPr>
-              <a:t>What the clinician view shows</a:t>
+              <a:t>Local operations measurement</a:t>
             </a:r>
           </a:p>
         </p:txBody>
@@ -16043,7 +16114,7 @@
           <p:cNvPr id="2" name="">
             <a:extLst xmlns:a="http://schemas.openxmlformats.org/drawingml/2006/main">
               <a:ext uri="{FF2B5EF4-FFF2-40B4-BE49-F238E27FC236}">
-                <a16:creationId xmlns:a16="http://schemas.microsoft.com/office/drawing/2014/main" id="{2D7DCDD6-E59C-46EC-8C3E-2F513C85B3BD}"/>
+                <a16:creationId xmlns:a16="http://schemas.microsoft.com/office/drawing/2014/main" id="{2D6E85AC-4C45-406E-99FC-3BF1CC3263A3}"/>
               </a:ext>
             </a:extLst>
           </p:cNvPr>
@@ -16189,7 +16260,7 @@
                 <a:ea typeface="Arial"/>
                 <a:cs typeface="Arial"/>
               </a:rPr>
-              <a:t>Decision-support research display</a:t>
+              <a:t>One persisted frozen Tier-2 model on the build host</a:t>
             </a:r>
           </a:p>
         </p:txBody>
@@ -16199,7 +16270,7 @@
           <p:cNvPr id="3" name="">
             <a:extLst xmlns:a="http://schemas.openxmlformats.org/drawingml/2006/main">
               <a:ext uri="{FF2B5EF4-FFF2-40B4-BE49-F238E27FC236}">
-                <a16:creationId xmlns:a16="http://schemas.microsoft.com/office/drawing/2014/main" id="{DDB0911C-AFD0-4AF9-AF70-187C62F39618}"/>
+                <a16:creationId xmlns:a16="http://schemas.microsoft.com/office/drawing/2014/main" id="{142ED4C5-61B1-44E0-998C-521D09ADB5C5}"/>
               </a:ext>
             </a:extLst>
           </p:cNvPr>
@@ -16345,7 +16416,7 @@
                 <a:ea typeface="Arial"/>
                 <a:cs typeface="Arial"/>
               </a:rPr>
-              <a:t>Fitted probability beside its own validation threshold and held-out model evidence</a:t>
+              <a:t>Cold new-process first prediction: 1193.724 ms</a:t>
             </a:r>
           </a:p>
         </p:txBody>
@@ -16355,7 +16426,7 @@
           <p:cNvPr id="4" name="">
             <a:extLst xmlns:a="http://schemas.openxmlformats.org/drawingml/2006/main">
               <a:ext uri="{FF2B5EF4-FFF2-40B4-BE49-F238E27FC236}">
-                <a16:creationId xmlns:a16="http://schemas.microsoft.com/office/drawing/2014/main" id="{72F853DF-1D7B-4BA2-A271-77E532986EA0}"/>
+                <a16:creationId xmlns:a16="http://schemas.microsoft.com/office/drawing/2014/main" id="{0DC1BC1D-5AEF-4CE1-BA99-958392C988BF}"/>
               </a:ext>
             </a:extLst>
           </p:cNvPr>
@@ -16501,7 +16572,7 @@
                 <a:ea typeface="Arial"/>
                 <a:cs typeface="Arial"/>
               </a:rPr>
-              <a:t>Exact additive feature contributions and explicit imputation</a:t>
+              <a:t>Warm inference: mean 0.533 ms, p95 0.565 ms across 1,000 calls</a:t>
             </a:r>
           </a:p>
         </p:txBody>
@@ -16511,7 +16582,7 @@
           <p:cNvPr id="5" name="">
             <a:extLst xmlns:a="http://schemas.openxmlformats.org/drawingml/2006/main">
               <a:ext uri="{FF2B5EF4-FFF2-40B4-BE49-F238E27FC236}">
-                <a16:creationId xmlns:a16="http://schemas.microsoft.com/office/drawing/2014/main" id="{5B2A49BC-3007-4A49-9246-9D12626DBAA0}"/>
+                <a16:creationId xmlns:a16="http://schemas.microsoft.com/office/drawing/2014/main" id="{B007FE7A-B105-431C-BEB6-6C2E7221D5E8}"/>
               </a:ext>
             </a:extLst>
           </p:cNvPr>
@@ -16657,7 +16728,7 @@
                 <a:ea typeface="Arial"/>
                 <a:cs typeface="Arial"/>
               </a:rPr>
-              <a:t>Heuristic day estimate and conditional, illustrative day band</a:t>
+              <a:t>Local process peak RSS: 193104 KiB</a:t>
             </a:r>
           </a:p>
         </p:txBody>
@@ -16667,7 +16738,7 @@
           <p:cNvPr id="6" name="">
             <a:extLst xmlns:a="http://schemas.openxmlformats.org/drawingml/2006/main">
               <a:ext uri="{FF2B5EF4-FFF2-40B4-BE49-F238E27FC236}">
-                <a16:creationId xmlns:a16="http://schemas.microsoft.com/office/drawing/2014/main" id="{6674D85B-8F87-4D5B-A089-4E2FF4026BB5}"/>
+                <a16:creationId xmlns:a16="http://schemas.microsoft.com/office/drawing/2014/main" id="{ADB13A57-841B-4DE1-A735-95B34FA9EB8E}"/>
               </a:ext>
             </a:extLst>
           </p:cNvPr>
@@ -16813,7 +16884,7 @@
                 <a:ea typeface="Arial"/>
                 <a:cs typeface="Arial"/>
               </a:rPr>
-              <a:t>Data-quality ribbon and the reason for any withholding</a:t>
+              <a:t>Host-specific engineering measurement, not a production-service SLA.</a:t>
             </a:r>
           </a:p>
         </p:txBody>
@@ -16823,7 +16894,7 @@
           <p:cNvPr id="7" name="">
             <a:extLst xmlns:a="http://schemas.openxmlformats.org/drawingml/2006/main">
               <a:ext uri="{FF2B5EF4-FFF2-40B4-BE49-F238E27FC236}">
-                <a16:creationId xmlns:a16="http://schemas.microsoft.com/office/drawing/2014/main" id="{CF1324FC-7752-4DE3-8A89-E7D3813FA6B1}"/>
+                <a16:creationId xmlns:a16="http://schemas.microsoft.com/office/drawing/2014/main" id="{91263538-0F01-4527-8B92-B8F3B9AEF3DC}"/>
               </a:ext>
             </a:extLst>
           </p:cNvPr>
@@ -16977,7 +17048,7 @@
     </p:spTree>
     <p:extLst>
       <p:ext uri="{BB962C8B-B14F-4D97-AF65-F5344CB8AC3E}">
-        <p14:creationId xmlns:p14="http://schemas.microsoft.com/office/powerpoint/2010/main" val="1868794265"/>
+        <p14:creationId xmlns:p14="http://schemas.microsoft.com/office/powerpoint/2010/main" val="1302325257"/>
       </p:ext>
     </p:extLst>
   </p:cSld>
@@ -17008,7 +17079,7 @@
           <p:cNvPr id="8" name="">
             <a:extLst xmlns:a="http://schemas.openxmlformats.org/drawingml/2006/main">
               <a:ext uri="{FF2B5EF4-FFF2-40B4-BE49-F238E27FC236}">
-                <a16:creationId xmlns:a16="http://schemas.microsoft.com/office/drawing/2014/main" id="{1F343908-9422-43B9-802D-58A129C4C9DF}"/>
+                <a16:creationId xmlns:a16="http://schemas.microsoft.com/office/drawing/2014/main" id="{C929255A-7E3D-489B-B185-7072AC81CA75}"/>
               </a:ext>
             </a:extLst>
           </p:cNvPr>
@@ -17154,7 +17225,7 @@
                 <a:ea typeface="Arial"/>
                 <a:cs typeface="Arial"/>
               </a:rPr>
-              <a:t>Guardrails live</a:t>
+              <a:t>What the clinician view shows</a:t>
             </a:r>
           </a:p>
         </p:txBody>
@@ -17164,7 +17235,7 @@
           <p:cNvPr id="2" name="">
             <a:extLst xmlns:a="http://schemas.openxmlformats.org/drawingml/2006/main">
               <a:ext uri="{FF2B5EF4-FFF2-40B4-BE49-F238E27FC236}">
-                <a16:creationId xmlns:a16="http://schemas.microsoft.com/office/drawing/2014/main" id="{D63CBC86-C074-4186-9CC6-37DCF317BC46}"/>
+                <a16:creationId xmlns:a16="http://schemas.microsoft.com/office/drawing/2014/main" id="{4041C73A-2DF1-4818-9CBD-19E91A48C3D5}"/>
               </a:ext>
             </a:extLst>
           </p:cNvPr>
@@ -17310,7 +17381,7 @@
                 <a:ea typeface="Arial"/>
                 <a:cs typeface="Arial"/>
               </a:rPr>
-              <a:t>Missing safety information causes abstention</a:t>
+              <a:t>Decision-support research display</a:t>
             </a:r>
           </a:p>
         </p:txBody>
@@ -17320,7 +17391,7 @@
           <p:cNvPr id="3" name="">
             <a:extLst xmlns:a="http://schemas.openxmlformats.org/drawingml/2006/main">
               <a:ext uri="{FF2B5EF4-FFF2-40B4-BE49-F238E27FC236}">
-                <a16:creationId xmlns:a16="http://schemas.microsoft.com/office/drawing/2014/main" id="{5933F78B-E51E-4DB8-8798-880189B88D9A}"/>
+                <a16:creationId xmlns:a16="http://schemas.microsoft.com/office/drawing/2014/main" id="{12CEDB04-A719-4C1E-99CC-FB21273250DB}"/>
               </a:ext>
             </a:extLst>
           </p:cNvPr>
@@ -17466,7 +17537,7 @@
                 <a:ea typeface="Arial"/>
                 <a:cs typeface="Arial"/>
               </a:rPr>
-              <a:t>Contraception, thyroid and prolactin flags, age and pregnancy-related states</a:t>
+              <a:t>Fitted probability beside its own validation threshold and held-out model evidence</a:t>
             </a:r>
           </a:p>
         </p:txBody>
@@ -17476,7 +17547,7 @@
           <p:cNvPr id="4" name="">
             <a:extLst xmlns:a="http://schemas.openxmlformats.org/drawingml/2006/main">
               <a:ext uri="{FF2B5EF4-FFF2-40B4-BE49-F238E27FC236}">
-                <a16:creationId xmlns:a16="http://schemas.microsoft.com/office/drawing/2014/main" id="{86B77C33-981C-47B2-B49A-B749F8C8E7C8}"/>
+                <a16:creationId xmlns:a16="http://schemas.microsoft.com/office/drawing/2014/main" id="{6F8080A4-D234-427A-85DF-32512F8BE6A5}"/>
               </a:ext>
             </a:extLst>
           </p:cNvPr>
@@ -17622,7 +17693,7 @@
                 <a:ea typeface="Arial"/>
                 <a:cs typeface="Arial"/>
               </a:rPr>
-              <a:t>Early post-menarche, perimenopause and insufficient observed temperature</a:t>
+              <a:t>Exact additive feature contributions and explicit imputation</a:t>
             </a:r>
           </a:p>
         </p:txBody>
@@ -17632,7 +17703,7 @@
           <p:cNvPr id="5" name="">
             <a:extLst xmlns:a="http://schemas.openxmlformats.org/drawingml/2006/main">
               <a:ext uri="{FF2B5EF4-FFF2-40B4-BE49-F238E27FC236}">
-                <a16:creationId xmlns:a16="http://schemas.microsoft.com/office/drawing/2014/main" id="{D5325B66-EF3D-4A2B-8880-F77FB0385D38}"/>
+                <a16:creationId xmlns:a16="http://schemas.microsoft.com/office/drawing/2014/main" id="{C8A798D2-092A-4914-9417-B641AA93754A}"/>
               </a:ext>
             </a:extLst>
           </p:cNvPr>
@@ -17778,7 +17849,7 @@
                 <a:ea typeface="Arial"/>
                 <a:cs typeface="Arial"/>
               </a:rPr>
-              <a:t>Withholding removes personal scores, intervals, explanations, sandbox outputs and alerts</a:t>
+              <a:t>Heuristic day estimate and conditional, illustrative day band</a:t>
             </a:r>
           </a:p>
         </p:txBody>
@@ -17788,7 +17859,7 @@
           <p:cNvPr id="6" name="">
             <a:extLst xmlns:a="http://schemas.openxmlformats.org/drawingml/2006/main">
               <a:ext uri="{FF2B5EF4-FFF2-40B4-BE49-F238E27FC236}">
-                <a16:creationId xmlns:a16="http://schemas.microsoft.com/office/drawing/2014/main" id="{FCC1D15E-FF7A-4B02-BC81-5CB106ACC07B}"/>
+                <a16:creationId xmlns:a16="http://schemas.microsoft.com/office/drawing/2014/main" id="{E8A4CFDF-7EC7-40B9-9504-47DC186F638C}"/>
               </a:ext>
             </a:extLst>
           </p:cNvPr>
@@ -17934,7 +18005,7 @@
                 <a:ea typeface="Arial"/>
                 <a:cs typeface="Arial"/>
               </a:rPr>
-              <a:t>The workflow is synthetic and its safety effectiveness has not been clinically evaluated</a:t>
+              <a:t>Data-quality ribbon and the reason for any withholding</a:t>
             </a:r>
           </a:p>
         </p:txBody>
@@ -17944,7 +18015,7 @@
           <p:cNvPr id="7" name="">
             <a:extLst xmlns:a="http://schemas.openxmlformats.org/drawingml/2006/main">
               <a:ext uri="{FF2B5EF4-FFF2-40B4-BE49-F238E27FC236}">
-                <a16:creationId xmlns:a16="http://schemas.microsoft.com/office/drawing/2014/main" id="{EAC0B5AD-C82C-4656-BCC1-D774448FB21A}"/>
+                <a16:creationId xmlns:a16="http://schemas.microsoft.com/office/drawing/2014/main" id="{1B0FBB45-0145-4D9F-B7D6-512C44148C49}"/>
               </a:ext>
             </a:extLst>
           </p:cNvPr>
@@ -18098,7 +18169,7 @@
     </p:spTree>
     <p:extLst>
       <p:ext uri="{BB962C8B-B14F-4D97-AF65-F5344CB8AC3E}">
-        <p14:creationId xmlns:p14="http://schemas.microsoft.com/office/powerpoint/2010/main" val="1420939024"/>
+        <p14:creationId xmlns:p14="http://schemas.microsoft.com/office/powerpoint/2010/main" val="678263841"/>
       </p:ext>
     </p:extLst>
   </p:cSld>
@@ -18129,7 +18200,7 @@
           <p:cNvPr id="7" name="">
             <a:extLst xmlns:a="http://schemas.openxmlformats.org/drawingml/2006/main">
               <a:ext uri="{FF2B5EF4-FFF2-40B4-BE49-F238E27FC236}">
-                <a16:creationId xmlns:a16="http://schemas.microsoft.com/office/drawing/2014/main" id="{CA37A447-0061-4CB6-8C6D-2545D3C6CCFB}"/>
+                <a16:creationId xmlns:a16="http://schemas.microsoft.com/office/drawing/2014/main" id="{D2160DB3-9EAC-498C-9A5B-A7C38CD478A8}"/>
               </a:ext>
             </a:extLst>
           </p:cNvPr>
@@ -18285,7 +18356,7 @@
           <p:cNvPr id="2" name="">
             <a:extLst xmlns:a="http://schemas.openxmlformats.org/drawingml/2006/main">
               <a:ext uri="{FF2B5EF4-FFF2-40B4-BE49-F238E27FC236}">
-                <a16:creationId xmlns:a16="http://schemas.microsoft.com/office/drawing/2014/main" id="{E948C2CF-E609-4FE8-8940-BC264960E8AB}"/>
+                <a16:creationId xmlns:a16="http://schemas.microsoft.com/office/drawing/2014/main" id="{8B4647DA-2BED-4B6A-BB65-86AC7FF7A930}"/>
               </a:ext>
             </a:extLst>
           </p:cNvPr>
@@ -18441,7 +18512,7 @@
           <p:cNvPr id="3" name="">
             <a:extLst xmlns:a="http://schemas.openxmlformats.org/drawingml/2006/main">
               <a:ext uri="{FF2B5EF4-FFF2-40B4-BE49-F238E27FC236}">
-                <a16:creationId xmlns:a16="http://schemas.microsoft.com/office/drawing/2014/main" id="{5B4B916E-2701-472F-B104-B12C8C67D52F}"/>
+                <a16:creationId xmlns:a16="http://schemas.microsoft.com/office/drawing/2014/main" id="{A39F3812-356B-4958-B81F-32C2D47F94C5}"/>
               </a:ext>
             </a:extLst>
           </p:cNvPr>
@@ -18597,7 +18668,7 @@
           <p:cNvPr id="4" name="">
             <a:extLst xmlns:a="http://schemas.openxmlformats.org/drawingml/2006/main">
               <a:ext uri="{FF2B5EF4-FFF2-40B4-BE49-F238E27FC236}">
-                <a16:creationId xmlns:a16="http://schemas.microsoft.com/office/drawing/2014/main" id="{3D7D5640-53EA-4959-8C01-395449690D86}"/>
+                <a16:creationId xmlns:a16="http://schemas.microsoft.com/office/drawing/2014/main" id="{175A3388-4E37-45B6-8968-C892C4795640}"/>
               </a:ext>
             </a:extLst>
           </p:cNvPr>
@@ -18753,7 +18824,7 @@
           <p:cNvPr id="5" name="">
             <a:extLst xmlns:a="http://schemas.openxmlformats.org/drawingml/2006/main">
               <a:ext uri="{FF2B5EF4-FFF2-40B4-BE49-F238E27FC236}">
-                <a16:creationId xmlns:a16="http://schemas.microsoft.com/office/drawing/2014/main" id="{4B965457-1FCC-4217-B062-C015EC50AE2F}"/>
+                <a16:creationId xmlns:a16="http://schemas.microsoft.com/office/drawing/2014/main" id="{63ED7FE8-91F3-4770-8A6D-2C0996EBE8DB}"/>
               </a:ext>
             </a:extLst>
           </p:cNvPr>
@@ -18909,7 +18980,7 @@
           <p:cNvPr id="6" name="">
             <a:extLst xmlns:a="http://schemas.openxmlformats.org/drawingml/2006/main">
               <a:ext uri="{FF2B5EF4-FFF2-40B4-BE49-F238E27FC236}">
-                <a16:creationId xmlns:a16="http://schemas.microsoft.com/office/drawing/2014/main" id="{21B811DA-17DB-45A0-A1C6-229062E8F704}"/>
+                <a16:creationId xmlns:a16="http://schemas.microsoft.com/office/drawing/2014/main" id="{3BBEACA1-21AE-49A2-B4CC-51D20ACEE791}"/>
               </a:ext>
             </a:extLst>
           </p:cNvPr>
@@ -19063,7 +19134,7 @@
     </p:spTree>
     <p:extLst>
       <p:ext uri="{BB962C8B-B14F-4D97-AF65-F5344CB8AC3E}">
-        <p14:creationId xmlns:p14="http://schemas.microsoft.com/office/powerpoint/2010/main" val="1120814962"/>
+        <p14:creationId xmlns:p14="http://schemas.microsoft.com/office/powerpoint/2010/main" val="457391054"/>
       </p:ext>
     </p:extLst>
   </p:cSld>
@@ -19094,7 +19165,7 @@
           <p:cNvPr id="8" name="">
             <a:extLst xmlns:a="http://schemas.openxmlformats.org/drawingml/2006/main">
               <a:ext uri="{FF2B5EF4-FFF2-40B4-BE49-F238E27FC236}">
-                <a16:creationId xmlns:a16="http://schemas.microsoft.com/office/drawing/2014/main" id="{161B1A60-14E4-45F8-82A6-69F6F2F8D745}"/>
+                <a16:creationId xmlns:a16="http://schemas.microsoft.com/office/drawing/2014/main" id="{D38BB6FF-903B-457A-94C5-BCBEC4988B67}"/>
               </a:ext>
             </a:extLst>
           </p:cNvPr>
@@ -19240,7 +19311,7 @@
                 <a:ea typeface="Arial"/>
                 <a:cs typeface="Arial"/>
               </a:rPr>
-              <a:t>The twin and assumption sandbox</a:t>
+              <a:t>Guardrails live</a:t>
             </a:r>
           </a:p>
         </p:txBody>
@@ -19250,7 +19321,7 @@
           <p:cNvPr id="2" name="">
             <a:extLst xmlns:a="http://schemas.openxmlformats.org/drawingml/2006/main">
               <a:ext uri="{FF2B5EF4-FFF2-40B4-BE49-F238E27FC236}">
-                <a16:creationId xmlns:a16="http://schemas.microsoft.com/office/drawing/2014/main" id="{35385C7D-B8FA-4AA5-AADA-B1DF7FE7E8D0}"/>
+                <a16:creationId xmlns:a16="http://schemas.microsoft.com/office/drawing/2014/main" id="{C6059DD2-C547-4A89-AC5E-4533378375A6}"/>
               </a:ext>
             </a:extLst>
           </p:cNvPr>
@@ -19396,7 +19467,7 @@
                 <a:ea typeface="Arial"/>
                 <a:cs typeface="Arial"/>
               </a:rPr>
-              <a:t>Clear boundaries around simulated physiology</a:t>
+              <a:t>Missing safety information causes abstention</a:t>
             </a:r>
           </a:p>
         </p:txBody>
@@ -19406,7 +19477,7 @@
           <p:cNvPr id="3" name="">
             <a:extLst xmlns:a="http://schemas.openxmlformats.org/drawingml/2006/main">
               <a:ext uri="{FF2B5EF4-FFF2-40B4-BE49-F238E27FC236}">
-                <a16:creationId xmlns:a16="http://schemas.microsoft.com/office/drawing/2014/main" id="{AA654F55-F31E-45FE-8BB7-03AA78C442D1}"/>
+                <a16:creationId xmlns:a16="http://schemas.microsoft.com/office/drawing/2014/main" id="{D3BCDABA-A0A2-4BD0-B141-04DF542684C5}"/>
               </a:ext>
             </a:extLst>
           </p:cNvPr>
@@ -19552,7 +19623,7 @@
                 <a:ea typeface="Arial"/>
                 <a:cs typeface="Arial"/>
               </a:rPr>
-              <a:t>Reproductive and metabolic equations generate an illustrative state trajectory</a:t>
+              <a:t>Contraception, thyroid and prolactin flags, age and pregnancy-related states</a:t>
             </a:r>
           </a:p>
         </p:txBody>
@@ -19562,7 +19633,7 @@
           <p:cNvPr id="4" name="">
             <a:extLst xmlns:a="http://schemas.openxmlformats.org/drawingml/2006/main">
               <a:ext uri="{FF2B5EF4-FFF2-40B4-BE49-F238E27FC236}">
-                <a16:creationId xmlns:a16="http://schemas.microsoft.com/office/drawing/2014/main" id="{908E2EC1-17D6-425F-A1F2-FA29F301F983}"/>
+                <a16:creationId xmlns:a16="http://schemas.microsoft.com/office/drawing/2014/main" id="{A48A6DAB-6EDB-4C5D-AAC7-92D53EF74AED}"/>
               </a:ext>
             </a:extLst>
           </p:cNvPr>
@@ -19708,7 +19779,7 @@
                 <a:ea typeface="Arial"/>
                 <a:cs typeface="Arial"/>
               </a:rPr>
-              <a:t>The twin does not affect the logistic score or its reported performance</a:t>
+              <a:t>Early post-menarche, perimenopause and insufficient observed temperature</a:t>
             </a:r>
           </a:p>
         </p:txBody>
@@ -19718,7 +19789,7 @@
           <p:cNvPr id="5" name="">
             <a:extLst xmlns:a="http://schemas.openxmlformats.org/drawingml/2006/main">
               <a:ext uri="{FF2B5EF4-FFF2-40B4-BE49-F238E27FC236}">
-                <a16:creationId xmlns:a16="http://schemas.microsoft.com/office/drawing/2014/main" id="{C66C7178-264F-4969-BA03-3A95254B8038}"/>
+                <a16:creationId xmlns:a16="http://schemas.microsoft.com/office/drawing/2014/main" id="{3E20453B-D53E-4190-B89F-758D7F9EC976}"/>
               </a:ext>
             </a:extLst>
           </p:cNvPr>
@@ -19864,7 +19935,7 @@
                 <a:ea typeface="Arial"/>
                 <a:cs typeface="Arial"/>
               </a:rPr>
-              <a:t>The sandbox edits invented model inputs. It does not predict a treatment effect</a:t>
+              <a:t>Withholding removes personal scores, intervals, explanations, sandbox outputs and alerts</a:t>
             </a:r>
           </a:p>
         </p:txBody>
@@ -19874,7 +19945,7 @@
           <p:cNvPr id="6" name="">
             <a:extLst xmlns:a="http://schemas.openxmlformats.org/drawingml/2006/main">
               <a:ext uri="{FF2B5EF4-FFF2-40B4-BE49-F238E27FC236}">
-                <a16:creationId xmlns:a16="http://schemas.microsoft.com/office/drawing/2014/main" id="{41F8A063-1237-4F1A-8821-D5736FB6926F}"/>
+                <a16:creationId xmlns:a16="http://schemas.microsoft.com/office/drawing/2014/main" id="{65F820B6-EDDE-4911-95F3-BB8B796BD3A5}"/>
               </a:ext>
             </a:extLst>
           </p:cNvPr>
@@ -20020,7 +20091,7 @@
                 <a:ea typeface="Arial"/>
                 <a:cs typeface="Arial"/>
               </a:rPr>
-              <a:t>Glucose threshold crossings are simulated counts, not an evaluated glucose forecast</a:t>
+              <a:t>The workflow is synthetic and its safety effectiveness has not been clinically evaluated</a:t>
             </a:r>
           </a:p>
         </p:txBody>
@@ -20030,7 +20101,7 @@
           <p:cNvPr id="7" name="">
             <a:extLst xmlns:a="http://schemas.openxmlformats.org/drawingml/2006/main">
               <a:ext uri="{FF2B5EF4-FFF2-40B4-BE49-F238E27FC236}">
-                <a16:creationId xmlns:a16="http://schemas.microsoft.com/office/drawing/2014/main" id="{DB020C94-A7F6-4847-8692-4A6946FF0F52}"/>
+                <a16:creationId xmlns:a16="http://schemas.microsoft.com/office/drawing/2014/main" id="{A4841AC9-55C8-4FE5-B0C5-88F5A7F316B6}"/>
               </a:ext>
             </a:extLst>
           </p:cNvPr>
@@ -20184,7 +20255,7 @@
     </p:spTree>
     <p:extLst>
       <p:ext uri="{BB962C8B-B14F-4D97-AF65-F5344CB8AC3E}">
-        <p14:creationId xmlns:p14="http://schemas.microsoft.com/office/powerpoint/2010/main" val="401506136"/>
+        <p14:creationId xmlns:p14="http://schemas.microsoft.com/office/powerpoint/2010/main" val="209014738"/>
       </p:ext>
     </p:extLst>
   </p:cSld>
@@ -20215,7 +20286,7 @@
           <p:cNvPr id="8" name="">
             <a:extLst xmlns:a="http://schemas.openxmlformats.org/drawingml/2006/main">
               <a:ext uri="{FF2B5EF4-FFF2-40B4-BE49-F238E27FC236}">
-                <a16:creationId xmlns:a16="http://schemas.microsoft.com/office/drawing/2014/main" id="{B0FC7238-A939-4419-9875-6DF4CFD207A7}"/>
+                <a16:creationId xmlns:a16="http://schemas.microsoft.com/office/drawing/2014/main" id="{83866DDC-8F5B-412B-8E5F-BFB0387BAF8A}"/>
               </a:ext>
             </a:extLst>
           </p:cNvPr>
@@ -20361,7 +20432,7 @@
                 <a:ea typeface="Arial"/>
                 <a:cs typeface="Arial"/>
               </a:rPr>
-              <a:t>Where it fails</a:t>
+              <a:t>The twin and assumption sandbox</a:t>
             </a:r>
           </a:p>
         </p:txBody>
@@ -20371,7 +20442,7 @@
           <p:cNvPr id="2" name="">
             <a:extLst xmlns:a="http://schemas.openxmlformats.org/drawingml/2006/main">
               <a:ext uri="{FF2B5EF4-FFF2-40B4-BE49-F238E27FC236}">
-                <a16:creationId xmlns:a16="http://schemas.microsoft.com/office/drawing/2014/main" id="{BE987E8A-4E9E-4705-9F03-C3F8C6534082}"/>
+                <a16:creationId xmlns:a16="http://schemas.microsoft.com/office/drawing/2014/main" id="{59E33220-6947-4BBB-9883-E71F33AEFC47}"/>
               </a:ext>
             </a:extLst>
           </p:cNvPr>
@@ -20517,7 +20588,7 @@
                 <a:ea typeface="Arial"/>
                 <a:cs typeface="Arial"/>
               </a:rPr>
-              <a:t>All declared Kushi scenarios remain visible</a:t>
+              <a:t>Clear boundaries around simulated physiology</a:t>
             </a:r>
           </a:p>
         </p:txBody>
@@ -20527,7 +20598,7 @@
           <p:cNvPr id="3" name="">
             <a:extLst xmlns:a="http://schemas.openxmlformats.org/drawingml/2006/main">
               <a:ext uri="{FF2B5EF4-FFF2-40B4-BE49-F238E27FC236}">
-                <a16:creationId xmlns:a16="http://schemas.microsoft.com/office/drawing/2014/main" id="{8D4D3EE3-EA7A-49D2-9C43-E3164F53C86A}"/>
+                <a16:creationId xmlns:a16="http://schemas.microsoft.com/office/drawing/2014/main" id="{3765575A-FCE7-4443-9C00-F2681474210F}"/>
               </a:ext>
             </a:extLst>
           </p:cNvPr>
@@ -20673,7 +20744,7 @@
                 <a:ea typeface="Arial"/>
                 <a:cs typeface="Arial"/>
               </a:rPr>
-              <a:t>Display the fixed scenario seeds with misses, false alarms or withholding unchanged</a:t>
+              <a:t>Reproductive and metabolic equations generate an illustrative state trajectory</a:t>
             </a:r>
           </a:p>
         </p:txBody>
@@ -20683,7 +20754,7 @@
           <p:cNvPr id="4" name="">
             <a:extLst xmlns:a="http://schemas.openxmlformats.org/drawingml/2006/main">
               <a:ext uri="{FF2B5EF4-FFF2-40B4-BE49-F238E27FC236}">
-                <a16:creationId xmlns:a16="http://schemas.microsoft.com/office/drawing/2014/main" id="{549FB455-A84C-48C7-91F8-D50E6DF465E3}"/>
+                <a16:creationId xmlns:a16="http://schemas.microsoft.com/office/drawing/2014/main" id="{D333E036-A45A-45CC-956B-DA6D9678989B}"/>
               </a:ext>
             </a:extLst>
           </p:cNvPr>
@@ -20829,7 +20900,7 @@
                 <a:ea typeface="Arial"/>
                 <a:cs typeface="Arial"/>
               </a:rPr>
-              <a:t>Different snapshots can fall back to calendar even when sensors are available</a:t>
+              <a:t>The twin does not affect the logistic score or its reported performance</a:t>
             </a:r>
           </a:p>
         </p:txBody>
@@ -20839,7 +20910,7 @@
           <p:cNvPr id="5" name="">
             <a:extLst xmlns:a="http://schemas.openxmlformats.org/drawingml/2006/main">
               <a:ext uri="{FF2B5EF4-FFF2-40B4-BE49-F238E27FC236}">
-                <a16:creationId xmlns:a16="http://schemas.microsoft.com/office/drawing/2014/main" id="{CB418193-5DD5-4DFC-9032-FB32C5FD1401}"/>
+                <a16:creationId xmlns:a16="http://schemas.microsoft.com/office/drawing/2014/main" id="{2067E519-5B11-417D-963D-4B7250205144}"/>
               </a:ext>
             </a:extLst>
           </p:cNvPr>
@@ -20985,7 +21056,7 @@
                 <a:ea typeface="Arial"/>
                 <a:cs typeface="Arial"/>
               </a:rPr>
-              <a:t>A class set containing both outcomes does not identify one result</a:t>
+              <a:t>The sandbox edits invented model inputs. It does not predict a treatment effect</a:t>
             </a:r>
           </a:p>
         </p:txBody>
@@ -20995,7 +21066,7 @@
           <p:cNvPr id="6" name="">
             <a:extLst xmlns:a="http://schemas.openxmlformats.org/drawingml/2006/main">
               <a:ext uri="{FF2B5EF4-FFF2-40B4-BE49-F238E27FC236}">
-                <a16:creationId xmlns:a16="http://schemas.microsoft.com/office/drawing/2014/main" id="{8CE94B74-9F6B-418D-B927-828E399958E8}"/>
+                <a16:creationId xmlns:a16="http://schemas.microsoft.com/office/drawing/2014/main" id="{F65F2591-33C2-4908-B4A9-1D318190C654}"/>
               </a:ext>
             </a:extLst>
           </p:cNvPr>
@@ -21141,7 +21212,7 @@
                 <a:ea typeface="Arial"/>
                 <a:cs typeface="Arial"/>
               </a:rPr>
-              <a:t>Robustness, state-estimator and conformal coverage evidence remain separate work</a:t>
+              <a:t>Glucose threshold crossings are simulated counts, not an evaluated glucose forecast</a:t>
             </a:r>
           </a:p>
         </p:txBody>
@@ -21151,7 +21222,7 @@
           <p:cNvPr id="7" name="">
             <a:extLst xmlns:a="http://schemas.openxmlformats.org/drawingml/2006/main">
               <a:ext uri="{FF2B5EF4-FFF2-40B4-BE49-F238E27FC236}">
-                <a16:creationId xmlns:a16="http://schemas.microsoft.com/office/drawing/2014/main" id="{A155821B-7182-4369-AC12-E68C821ADA0F}"/>
+                <a16:creationId xmlns:a16="http://schemas.microsoft.com/office/drawing/2014/main" id="{6D341509-DD70-422C-92CF-E907E6152426}"/>
               </a:ext>
             </a:extLst>
           </p:cNvPr>
@@ -21305,7 +21376,7 @@
     </p:spTree>
     <p:extLst>
       <p:ext uri="{BB962C8B-B14F-4D97-AF65-F5344CB8AC3E}">
-        <p14:creationId xmlns:p14="http://schemas.microsoft.com/office/powerpoint/2010/main" val="2038421875"/>
+        <p14:creationId xmlns:p14="http://schemas.microsoft.com/office/powerpoint/2010/main" val="426738810"/>
       </p:ext>
     </p:extLst>
   </p:cSld>
@@ -21336,7 +21407,7 @@
           <p:cNvPr id="8" name="">
             <a:extLst xmlns:a="http://schemas.openxmlformats.org/drawingml/2006/main">
               <a:ext uri="{FF2B5EF4-FFF2-40B4-BE49-F238E27FC236}">
-                <a16:creationId xmlns:a16="http://schemas.microsoft.com/office/drawing/2014/main" id="{5C6E457E-3CAF-419E-A187-ACDC7592F944}"/>
+                <a16:creationId xmlns:a16="http://schemas.microsoft.com/office/drawing/2014/main" id="{B7943411-4B39-41A7-871D-EE55328BF469}"/>
               </a:ext>
             </a:extLst>
           </p:cNvPr>
@@ -21482,7 +21553,7 @@
                 <a:ea typeface="Arial"/>
                 <a:cs typeface="Arial"/>
               </a:rPr>
-              <a:t>Validity limits</a:t>
+              <a:t>Where it fails</a:t>
             </a:r>
           </a:p>
         </p:txBody>
@@ -21492,7 +21563,7 @@
           <p:cNvPr id="2" name="">
             <a:extLst xmlns:a="http://schemas.openxmlformats.org/drawingml/2006/main">
               <a:ext uri="{FF2B5EF4-FFF2-40B4-BE49-F238E27FC236}">
-                <a16:creationId xmlns:a16="http://schemas.microsoft.com/office/drawing/2014/main" id="{8EB62AA3-8B67-409B-8A77-342B26EDC558}"/>
+                <a16:creationId xmlns:a16="http://schemas.microsoft.com/office/drawing/2014/main" id="{4F4FD038-2527-40FB-8D98-DD1AC6D3DB60}"/>
               </a:ext>
             </a:extLst>
           </p:cNvPr>
@@ -21638,7 +21709,7 @@
                 <a:ea typeface="Arial"/>
                 <a:cs typeface="Arial"/>
               </a:rPr>
-              <a:t>Synthetic recovery is not prospective evidence in women</a:t>
+              <a:t>All declared Kushi scenarios remain visible</a:t>
             </a:r>
           </a:p>
         </p:txBody>
@@ -21648,7 +21719,7 @@
           <p:cNvPr id="3" name="">
             <a:extLst xmlns:a="http://schemas.openxmlformats.org/drawingml/2006/main">
               <a:ext uri="{FF2B5EF4-FFF2-40B4-BE49-F238E27FC236}">
-                <a16:creationId xmlns:a16="http://schemas.microsoft.com/office/drawing/2014/main" id="{26C02930-CB7A-45B4-875F-793EC14078B6}"/>
+                <a16:creationId xmlns:a16="http://schemas.microsoft.com/office/drawing/2014/main" id="{F3D3E837-5938-4691-B470-57C5B882BA0F}"/>
               </a:ext>
             </a:extLst>
           </p:cNvPr>
@@ -21794,7 +21865,7 @@
                 <a:ea typeface="Arial"/>
                 <a:cs typeface="Arial"/>
               </a:rPr>
-              <a:t>Labels and sensor changes share generator assumptions</a:t>
+              <a:t>Display the fixed scenario seeds with misses, false alarms or withholding unchanged</a:t>
             </a:r>
           </a:p>
         </p:txBody>
@@ -21804,7 +21875,7 @@
           <p:cNvPr id="4" name="">
             <a:extLst xmlns:a="http://schemas.openxmlformats.org/drawingml/2006/main">
               <a:ext uri="{FF2B5EF4-FFF2-40B4-BE49-F238E27FC236}">
-                <a16:creationId xmlns:a16="http://schemas.microsoft.com/office/drawing/2014/main" id="{348D5E42-6089-49C0-B737-F0E84661CF67}"/>
+                <a16:creationId xmlns:a16="http://schemas.microsoft.com/office/drawing/2014/main" id="{BB27BF87-D395-4BF1-A7CC-B48382862479}"/>
               </a:ext>
             </a:extLst>
           </p:cNvPr>
@@ -21950,7 +22021,7 @@
                 <a:ea typeface="Arial"/>
                 <a:cs typeface="Arial"/>
               </a:rPr>
-              <a:t>EHR-lite includes a label-generating internal latent</a:t>
+              <a:t>Different snapshots can fall back to calendar even when sensors are available</a:t>
             </a:r>
           </a:p>
         </p:txBody>
@@ -21960,7 +22031,7 @@
           <p:cNvPr id="5" name="">
             <a:extLst xmlns:a="http://schemas.openxmlformats.org/drawingml/2006/main">
               <a:ext uri="{FF2B5EF4-FFF2-40B4-BE49-F238E27FC236}">
-                <a16:creationId xmlns:a16="http://schemas.microsoft.com/office/drawing/2014/main" id="{EBD3F200-6273-4BB9-90C4-369431A639C7}"/>
+                <a16:creationId xmlns:a16="http://schemas.microsoft.com/office/drawing/2014/main" id="{66E96757-3508-4A45-BB50-EC737EAD426B}"/>
               </a:ext>
             </a:extLst>
           </p:cNvPr>
@@ -22106,7 +22177,7 @@
                 <a:ea typeface="Arial"/>
                 <a:cs typeface="Arial"/>
               </a:rPr>
-              <a:t>Old test seeds were reused during development</a:t>
+              <a:t>A class set containing both outcomes does not identify one result</a:t>
             </a:r>
           </a:p>
         </p:txBody>
@@ -22116,7 +22187,7 @@
           <p:cNvPr id="6" name="">
             <a:extLst xmlns:a="http://schemas.openxmlformats.org/drawingml/2006/main">
               <a:ext uri="{FF2B5EF4-FFF2-40B4-BE49-F238E27FC236}">
-                <a16:creationId xmlns:a16="http://schemas.microsoft.com/office/drawing/2014/main" id="{003F74C3-A018-4B69-A817-5E9881FEF01A}"/>
+                <a16:creationId xmlns:a16="http://schemas.microsoft.com/office/drawing/2014/main" id="{BF2219D9-B3C0-45AF-91DD-004D79B74C8D}"/>
               </a:ext>
             </a:extLst>
           </p:cNvPr>
@@ -22262,7 +22333,7 @@
                 <a:ea typeface="Arial"/>
                 <a:cs typeface="Arial"/>
               </a:rPr>
-              <a:t>The frozen synthetic sequential alert policy is evaluated; robustness and clinical safety effectiveness remain separate work</a:t>
+              <a:t>Robustness, state-estimator and conformal coverage evidence remain separate work</a:t>
             </a:r>
           </a:p>
         </p:txBody>
@@ -22272,7 +22343,7 @@
           <p:cNvPr id="7" name="">
             <a:extLst xmlns:a="http://schemas.openxmlformats.org/drawingml/2006/main">
               <a:ext uri="{FF2B5EF4-FFF2-40B4-BE49-F238E27FC236}">
-                <a16:creationId xmlns:a16="http://schemas.microsoft.com/office/drawing/2014/main" id="{BE047213-D143-4C78-8080-16168F66CCBF}"/>
+                <a16:creationId xmlns:a16="http://schemas.microsoft.com/office/drawing/2014/main" id="{6C27A621-DFBB-401E-A92C-57B8618BAA66}"/>
               </a:ext>
             </a:extLst>
           </p:cNvPr>
@@ -22426,7 +22497,7 @@
     </p:spTree>
     <p:extLst>
       <p:ext uri="{BB962C8B-B14F-4D97-AF65-F5344CB8AC3E}">
-        <p14:creationId xmlns:p14="http://schemas.microsoft.com/office/powerpoint/2010/main" val="1300232263"/>
+        <p14:creationId xmlns:p14="http://schemas.microsoft.com/office/powerpoint/2010/main" val="1594774931"/>
       </p:ext>
     </p:extLst>
   </p:cSld>
@@ -22457,7 +22528,7 @@
           <p:cNvPr id="8" name="">
             <a:extLst xmlns:a="http://schemas.openxmlformats.org/drawingml/2006/main">
               <a:ext uri="{FF2B5EF4-FFF2-40B4-BE49-F238E27FC236}">
-                <a16:creationId xmlns:a16="http://schemas.microsoft.com/office/drawing/2014/main" id="{78E9FA32-6E00-4EFA-AC81-58441360E49C}"/>
+                <a16:creationId xmlns:a16="http://schemas.microsoft.com/office/drawing/2014/main" id="{4DFDA76F-B78F-4433-BA7D-32CCE52BAB4B}"/>
               </a:ext>
             </a:extLst>
           </p:cNvPr>
@@ -22603,7 +22674,7 @@
                 <a:ea typeface="Arial"/>
                 <a:cs typeface="Arial"/>
               </a:rPr>
-              <a:t>Reproducible demonstration</a:t>
+              <a:t>Validity limits</a:t>
             </a:r>
           </a:p>
         </p:txBody>
@@ -22613,7 +22684,7 @@
           <p:cNvPr id="2" name="">
             <a:extLst xmlns:a="http://schemas.openxmlformats.org/drawingml/2006/main">
               <a:ext uri="{FF2B5EF4-FFF2-40B4-BE49-F238E27FC236}">
-                <a16:creationId xmlns:a16="http://schemas.microsoft.com/office/drawing/2014/main" id="{172D9CD0-0584-4C64-AA16-F1B18794E069}"/>
+                <a16:creationId xmlns:a16="http://schemas.microsoft.com/office/drawing/2014/main" id="{5011D033-FCE9-44DE-8BE3-AE2984BDBE23}"/>
               </a:ext>
             </a:extLst>
           </p:cNvPr>
@@ -22759,7 +22830,7 @@
                 <a:ea typeface="Arial"/>
                 <a:cs typeface="Arial"/>
               </a:rPr>
-              <a:t>Public source, inspectable artifacts and explicit next work</a:t>
+              <a:t>Synthetic recovery is not prospective evidence in women</a:t>
             </a:r>
           </a:p>
         </p:txBody>
@@ -22769,7 +22840,7 @@
           <p:cNvPr id="3" name="">
             <a:extLst xmlns:a="http://schemas.openxmlformats.org/drawingml/2006/main">
               <a:ext uri="{FF2B5EF4-FFF2-40B4-BE49-F238E27FC236}">
-                <a16:creationId xmlns:a16="http://schemas.microsoft.com/office/drawing/2014/main" id="{7D5D87CE-C7F2-4FEE-B16C-A1F36033DFAB}"/>
+                <a16:creationId xmlns:a16="http://schemas.microsoft.com/office/drawing/2014/main" id="{F1062B21-D951-4EB1-ABCA-E3EF6FC32806}"/>
               </a:ext>
             </a:extLst>
           </p:cNvPr>
@@ -22915,7 +22986,7 @@
                 <a:ea typeface="Arial"/>
                 <a:cs typeface="Arial"/>
               </a:rPr>
-              <a:t>README, model cards and the audit link every claim to evidence</a:t>
+              <a:t>Labels and sensor changes share generator assumptions</a:t>
             </a:r>
           </a:p>
         </p:txBody>
@@ -22925,7 +22996,7 @@
           <p:cNvPr id="4" name="">
             <a:extLst xmlns:a="http://schemas.openxmlformats.org/drawingml/2006/main">
               <a:ext uri="{FF2B5EF4-FFF2-40B4-BE49-F238E27FC236}">
-                <a16:creationId xmlns:a16="http://schemas.microsoft.com/office/drawing/2014/main" id="{1DAAB8CC-7E64-4FC1-8EF8-4CE24E8E77B7}"/>
+                <a16:creationId xmlns:a16="http://schemas.microsoft.com/office/drawing/2014/main" id="{FC3D0983-B966-4A0A-8148-72B9358F693C}"/>
               </a:ext>
             </a:extLst>
           </p:cNvPr>
@@ -23071,7 +23142,7 @@
                 <a:ea typeface="Arial"/>
                 <a:cs typeface="Arial"/>
               </a:rPr>
-              <a:t>Persisted inference reproduces the benchmark and exposes exact feature calculations</a:t>
+              <a:t>EHR-lite includes a label-generating internal latent</a:t>
             </a:r>
           </a:p>
         </p:txBody>
@@ -23081,7 +23152,7 @@
           <p:cNvPr id="5" name="">
             <a:extLst xmlns:a="http://schemas.openxmlformats.org/drawingml/2006/main">
               <a:ext uri="{FF2B5EF4-FFF2-40B4-BE49-F238E27FC236}">
-                <a16:creationId xmlns:a16="http://schemas.microsoft.com/office/drawing/2014/main" id="{C2F993E3-3AE9-4311-8F99-D7E028B0E653}"/>
+                <a16:creationId xmlns:a16="http://schemas.microsoft.com/office/drawing/2014/main" id="{DF297C88-9207-406A-A19B-3902614D9175}"/>
               </a:ext>
             </a:extLst>
           </p:cNvPr>
@@ -23227,7 +23298,7 @@
                 <a:ea typeface="Arial"/>
                 <a:cs typeface="Arial"/>
               </a:rPr>
-              <a:t>The required video remains a human recording and upload task</a:t>
+              <a:t>Old test seeds were reused during development</a:t>
             </a:r>
           </a:p>
         </p:txBody>
@@ -23237,7 +23308,7 @@
           <p:cNvPr id="6" name="">
             <a:extLst xmlns:a="http://schemas.openxmlformats.org/drawingml/2006/main">
               <a:ext uri="{FF2B5EF4-FFF2-40B4-BE49-F238E27FC236}">
-                <a16:creationId xmlns:a16="http://schemas.microsoft.com/office/drawing/2014/main" id="{945173F9-CD06-40F4-9D2D-00F94B22E83C}"/>
+                <a16:creationId xmlns:a16="http://schemas.microsoft.com/office/drawing/2014/main" id="{49B2AE75-746B-44AA-9200-13F9EEFEB19C}"/>
               </a:ext>
             </a:extLst>
           </p:cNvPr>
@@ -23383,7 +23454,7 @@
                 <a:ea typeface="Arial"/>
                 <a:cs typeface="Arial"/>
               </a:rPr>
-              <a:t>Clinical validation, clinician feedback and sim-to-real evaluation remain outstanding</a:t>
+              <a:t>The frozen synthetic sequential alert policy is evaluated; robustness and clinical safety effectiveness remain separate work</a:t>
             </a:r>
           </a:p>
         </p:txBody>
@@ -23393,7 +23464,7 @@
           <p:cNvPr id="7" name="">
             <a:extLst xmlns:a="http://schemas.openxmlformats.org/drawingml/2006/main">
               <a:ext uri="{FF2B5EF4-FFF2-40B4-BE49-F238E27FC236}">
-                <a16:creationId xmlns:a16="http://schemas.microsoft.com/office/drawing/2014/main" id="{68981588-220A-4C8D-B876-A21ADE90ABE5}"/>
+                <a16:creationId xmlns:a16="http://schemas.microsoft.com/office/drawing/2014/main" id="{43C0BDC8-13AC-4228-8413-F5207024B127}"/>
               </a:ext>
             </a:extLst>
           </p:cNvPr>
@@ -23547,7 +23618,1128 @@
     </p:spTree>
     <p:extLst>
       <p:ext uri="{BB962C8B-B14F-4D97-AF65-F5344CB8AC3E}">
-        <p14:creationId xmlns:p14="http://schemas.microsoft.com/office/powerpoint/2010/main" val="1856834996"/>
+        <p14:creationId xmlns:p14="http://schemas.microsoft.com/office/powerpoint/2010/main" val="1558739764"/>
+      </p:ext>
+    </p:extLst>
+  </p:cSld>
+</p:sld>
+</file>
+
+<file path=ppt/slides/slide24.xml><?xml version="1.0" encoding="utf-8"?>
+<p:sld xmlns:p="http://schemas.openxmlformats.org/presentationml/2006/main">
+  <p:cSld>
+    <p:bg>
+      <p:bgPr>
+        <a:solidFill xmlns:a="http://schemas.openxmlformats.org/drawingml/2006/main">
+          <a:srgbClr val="FAFAF8"/>
+        </a:solidFill>
+      </p:bgPr>
+    </p:bg>
+    <p:spTree>
+      <p:nvGrpSpPr>
+        <p:cNvPr id="1" name=""/>
+        <p:cNvGrpSpPr/>
+        <p:nvPr/>
+      </p:nvGrpSpPr>
+      <p:grpSpPr>
+        <a:xfrm xmlns:a="http://schemas.openxmlformats.org/drawingml/2006/main"/>
+      </p:grpSpPr>
+      <p:sp>
+        <p:nvSpPr>
+          <p:cNvPr id="8" name="">
+            <a:extLst xmlns:a="http://schemas.openxmlformats.org/drawingml/2006/main">
+              <a:ext uri="{FF2B5EF4-FFF2-40B4-BE49-F238E27FC236}">
+                <a16:creationId xmlns:a16="http://schemas.microsoft.com/office/drawing/2014/main" id="{CFCB726B-162D-4D32-BB77-29770F104CBE}"/>
+              </a:ext>
+            </a:extLst>
+          </p:cNvPr>
+          <p:cNvSpPr>
+            <a:spLocks xmlns:a="http://schemas.openxmlformats.org/drawingml/2006/main" noGrp="1"/>
+          </p:cNvSpPr>
+          <p:nvPr/>
+        </p:nvSpPr>
+        <p:spPr>
+          <a:xfrm xmlns:a="http://schemas.openxmlformats.org/drawingml/2006/main">
+            <a:off x="609600" y="457200"/>
+            <a:ext cx="10972800" cy="762000"/>
+          </a:xfrm>
+          <a:prstGeom xmlns:a="http://schemas.openxmlformats.org/drawingml/2006/main" prst="rect">
+            <a:avLst/>
+          </a:prstGeom>
+          <a:noFill xmlns:a="http://schemas.openxmlformats.org/drawingml/2006/main"/>
+          <a:ln xmlns:a="http://schemas.openxmlformats.org/drawingml/2006/main" w="0">
+            <a:noFill/>
+          </a:ln>
+        </p:spPr>
+        <p:txBody>
+          <a:bodyPr xmlns:a="http://schemas.openxmlformats.org/drawingml/2006/main"/>
+          <a:lstStyle xmlns:a="http://schemas.openxmlformats.org/drawingml/2006/main">
+            <a:defPPr>
+              <a:defRPr sz="3300" b="0">
+                <a:solidFill>
+                  <a:srgbClr val="17242B"/>
+                </a:solidFill>
+                <a:latin typeface="Arial"/>
+                <a:ea typeface="Arial"/>
+                <a:cs typeface="Arial"/>
+              </a:defRPr>
+            </a:defPPr>
+            <a:lvl1pPr>
+              <a:defRPr sz="3300" b="0">
+                <a:solidFill>
+                  <a:srgbClr val="17242B"/>
+                </a:solidFill>
+                <a:latin typeface="Arial"/>
+                <a:ea typeface="Arial"/>
+                <a:cs typeface="Arial"/>
+              </a:defRPr>
+            </a:lvl1pPr>
+            <a:lvl2pPr>
+              <a:defRPr sz="3300" b="0">
+                <a:solidFill>
+                  <a:srgbClr val="17242B"/>
+                </a:solidFill>
+                <a:latin typeface="Arial"/>
+                <a:ea typeface="Arial"/>
+                <a:cs typeface="Arial"/>
+              </a:defRPr>
+            </a:lvl2pPr>
+            <a:lvl3pPr>
+              <a:defRPr sz="3300" b="0">
+                <a:solidFill>
+                  <a:srgbClr val="17242B"/>
+                </a:solidFill>
+                <a:latin typeface="Arial"/>
+                <a:ea typeface="Arial"/>
+                <a:cs typeface="Arial"/>
+              </a:defRPr>
+            </a:lvl3pPr>
+            <a:lvl4pPr>
+              <a:defRPr sz="3300" b="0">
+                <a:solidFill>
+                  <a:srgbClr val="17242B"/>
+                </a:solidFill>
+                <a:latin typeface="Arial"/>
+                <a:ea typeface="Arial"/>
+                <a:cs typeface="Arial"/>
+              </a:defRPr>
+            </a:lvl4pPr>
+            <a:lvl5pPr>
+              <a:defRPr sz="3300" b="0">
+                <a:solidFill>
+                  <a:srgbClr val="17242B"/>
+                </a:solidFill>
+                <a:latin typeface="Arial"/>
+                <a:ea typeface="Arial"/>
+                <a:cs typeface="Arial"/>
+              </a:defRPr>
+            </a:lvl5pPr>
+            <a:lvl6pPr>
+              <a:defRPr sz="3300" b="0">
+                <a:solidFill>
+                  <a:srgbClr val="17242B"/>
+                </a:solidFill>
+                <a:latin typeface="Arial"/>
+                <a:ea typeface="Arial"/>
+                <a:cs typeface="Arial"/>
+              </a:defRPr>
+            </a:lvl6pPr>
+            <a:lvl7pPr>
+              <a:defRPr sz="3300" b="0">
+                <a:solidFill>
+                  <a:srgbClr val="17242B"/>
+                </a:solidFill>
+                <a:latin typeface="Arial"/>
+                <a:ea typeface="Arial"/>
+                <a:cs typeface="Arial"/>
+              </a:defRPr>
+            </a:lvl7pPr>
+            <a:lvl8pPr>
+              <a:defRPr sz="3300" b="0">
+                <a:solidFill>
+                  <a:srgbClr val="17242B"/>
+                </a:solidFill>
+                <a:latin typeface="Arial"/>
+                <a:ea typeface="Arial"/>
+                <a:cs typeface="Arial"/>
+              </a:defRPr>
+            </a:lvl8pPr>
+            <a:lvl9pPr>
+              <a:defRPr sz="3300" b="0">
+                <a:solidFill>
+                  <a:srgbClr val="17242B"/>
+                </a:solidFill>
+                <a:latin typeface="Arial"/>
+                <a:ea typeface="Arial"/>
+                <a:cs typeface="Arial"/>
+              </a:defRPr>
+            </a:lvl9pPr>
+          </a:lstStyle>
+          <a:p xmlns:a="http://schemas.openxmlformats.org/drawingml/2006/main">
+            <a:pPr>
+              <a:defRPr sz="3300" b="0">
+                <a:solidFill>
+                  <a:srgbClr val="17242B"/>
+                </a:solidFill>
+                <a:latin typeface="Arial"/>
+                <a:ea typeface="Arial"/>
+                <a:cs typeface="Arial"/>
+              </a:defRPr>
+            </a:pPr>
+            <a:r>
+              <a:rPr sz="3300" b="0">
+                <a:solidFill>
+                  <a:srgbClr val="17242B"/>
+                </a:solidFill>
+                <a:latin typeface="Arial"/>
+                <a:ea typeface="Arial"/>
+                <a:cs typeface="Arial"/>
+              </a:rPr>
+              <a:t>Reproducible demonstration</a:t>
+            </a:r>
+          </a:p>
+        </p:txBody>
+      </p:sp>
+      <p:sp>
+        <p:nvSpPr>
+          <p:cNvPr id="2" name="">
+            <a:extLst xmlns:a="http://schemas.openxmlformats.org/drawingml/2006/main">
+              <a:ext uri="{FF2B5EF4-FFF2-40B4-BE49-F238E27FC236}">
+                <a16:creationId xmlns:a16="http://schemas.microsoft.com/office/drawing/2014/main" id="{717BC70F-F0CE-411E-8B8E-C442EA832FFD}"/>
+              </a:ext>
+            </a:extLst>
+          </p:cNvPr>
+          <p:cNvSpPr>
+            <a:spLocks xmlns:a="http://schemas.openxmlformats.org/drawingml/2006/main" noGrp="1"/>
+          </p:cNvSpPr>
+          <p:nvPr/>
+        </p:nvSpPr>
+        <p:spPr>
+          <a:xfrm xmlns:a="http://schemas.openxmlformats.org/drawingml/2006/main">
+            <a:off x="609600" y="1257300"/>
+            <a:ext cx="10972800" cy="619125"/>
+          </a:xfrm>
+          <a:prstGeom xmlns:a="http://schemas.openxmlformats.org/drawingml/2006/main" prst="rect">
+            <a:avLst/>
+          </a:prstGeom>
+          <a:noFill xmlns:a="http://schemas.openxmlformats.org/drawingml/2006/main"/>
+          <a:ln xmlns:a="http://schemas.openxmlformats.org/drawingml/2006/main" w="0">
+            <a:noFill/>
+          </a:ln>
+        </p:spPr>
+        <p:txBody>
+          <a:bodyPr xmlns:a="http://schemas.openxmlformats.org/drawingml/2006/main"/>
+          <a:lstStyle xmlns:a="http://schemas.openxmlformats.org/drawingml/2006/main">
+            <a:defPPr>
+              <a:defRPr sz="1800" b="0">
+                <a:solidFill>
+                  <a:srgbClr val="65757B"/>
+                </a:solidFill>
+                <a:latin typeface="Arial"/>
+                <a:ea typeface="Arial"/>
+                <a:cs typeface="Arial"/>
+              </a:defRPr>
+            </a:defPPr>
+            <a:lvl1pPr>
+              <a:defRPr sz="1800" b="0">
+                <a:solidFill>
+                  <a:srgbClr val="65757B"/>
+                </a:solidFill>
+                <a:latin typeface="Arial"/>
+                <a:ea typeface="Arial"/>
+                <a:cs typeface="Arial"/>
+              </a:defRPr>
+            </a:lvl1pPr>
+            <a:lvl2pPr>
+              <a:defRPr sz="1800" b="0">
+                <a:solidFill>
+                  <a:srgbClr val="65757B"/>
+                </a:solidFill>
+                <a:latin typeface="Arial"/>
+                <a:ea typeface="Arial"/>
+                <a:cs typeface="Arial"/>
+              </a:defRPr>
+            </a:lvl2pPr>
+            <a:lvl3pPr>
+              <a:defRPr sz="1800" b="0">
+                <a:solidFill>
+                  <a:srgbClr val="65757B"/>
+                </a:solidFill>
+                <a:latin typeface="Arial"/>
+                <a:ea typeface="Arial"/>
+                <a:cs typeface="Arial"/>
+              </a:defRPr>
+            </a:lvl3pPr>
+            <a:lvl4pPr>
+              <a:defRPr sz="1800" b="0">
+                <a:solidFill>
+                  <a:srgbClr val="65757B"/>
+                </a:solidFill>
+                <a:latin typeface="Arial"/>
+                <a:ea typeface="Arial"/>
+                <a:cs typeface="Arial"/>
+              </a:defRPr>
+            </a:lvl4pPr>
+            <a:lvl5pPr>
+              <a:defRPr sz="1800" b="0">
+                <a:solidFill>
+                  <a:srgbClr val="65757B"/>
+                </a:solidFill>
+                <a:latin typeface="Arial"/>
+                <a:ea typeface="Arial"/>
+                <a:cs typeface="Arial"/>
+              </a:defRPr>
+            </a:lvl5pPr>
+            <a:lvl6pPr>
+              <a:defRPr sz="1800" b="0">
+                <a:solidFill>
+                  <a:srgbClr val="65757B"/>
+                </a:solidFill>
+                <a:latin typeface="Arial"/>
+                <a:ea typeface="Arial"/>
+                <a:cs typeface="Arial"/>
+              </a:defRPr>
+            </a:lvl6pPr>
+            <a:lvl7pPr>
+              <a:defRPr sz="1800" b="0">
+                <a:solidFill>
+                  <a:srgbClr val="65757B"/>
+                </a:solidFill>
+                <a:latin typeface="Arial"/>
+                <a:ea typeface="Arial"/>
+                <a:cs typeface="Arial"/>
+              </a:defRPr>
+            </a:lvl7pPr>
+            <a:lvl8pPr>
+              <a:defRPr sz="1800" b="0">
+                <a:solidFill>
+                  <a:srgbClr val="65757B"/>
+                </a:solidFill>
+                <a:latin typeface="Arial"/>
+                <a:ea typeface="Arial"/>
+                <a:cs typeface="Arial"/>
+              </a:defRPr>
+            </a:lvl8pPr>
+            <a:lvl9pPr>
+              <a:defRPr sz="1800" b="0">
+                <a:solidFill>
+                  <a:srgbClr val="65757B"/>
+                </a:solidFill>
+                <a:latin typeface="Arial"/>
+                <a:ea typeface="Arial"/>
+                <a:cs typeface="Arial"/>
+              </a:defRPr>
+            </a:lvl9pPr>
+          </a:lstStyle>
+          <a:p xmlns:a="http://schemas.openxmlformats.org/drawingml/2006/main">
+            <a:pPr>
+              <a:defRPr sz="1800" b="0">
+                <a:solidFill>
+                  <a:srgbClr val="65757B"/>
+                </a:solidFill>
+                <a:latin typeface="Arial"/>
+                <a:ea typeface="Arial"/>
+                <a:cs typeface="Arial"/>
+              </a:defRPr>
+            </a:pPr>
+            <a:r>
+              <a:rPr sz="1800" b="0">
+                <a:solidFill>
+                  <a:srgbClr val="65757B"/>
+                </a:solidFill>
+                <a:latin typeface="Arial"/>
+                <a:ea typeface="Arial"/>
+                <a:cs typeface="Arial"/>
+              </a:rPr>
+              <a:t>Public source, inspectable artifacts and explicit next work</a:t>
+            </a:r>
+          </a:p>
+        </p:txBody>
+      </p:sp>
+      <p:sp>
+        <p:nvSpPr>
+          <p:cNvPr id="3" name="">
+            <a:extLst xmlns:a="http://schemas.openxmlformats.org/drawingml/2006/main">
+              <a:ext uri="{FF2B5EF4-FFF2-40B4-BE49-F238E27FC236}">
+                <a16:creationId xmlns:a16="http://schemas.microsoft.com/office/drawing/2014/main" id="{510FA8F9-6CC5-4D0E-83E4-7AC77EB8762C}"/>
+              </a:ext>
+            </a:extLst>
+          </p:cNvPr>
+          <p:cNvSpPr>
+            <a:spLocks xmlns:a="http://schemas.openxmlformats.org/drawingml/2006/main" noGrp="1"/>
+          </p:cNvSpPr>
+          <p:nvPr/>
+        </p:nvSpPr>
+        <p:spPr>
+          <a:xfrm xmlns:a="http://schemas.openxmlformats.org/drawingml/2006/main">
+            <a:off x="704850" y="2190750"/>
+            <a:ext cx="10668000" cy="838200"/>
+          </a:xfrm>
+          <a:prstGeom xmlns:a="http://schemas.openxmlformats.org/drawingml/2006/main" prst="rect">
+            <a:avLst/>
+          </a:prstGeom>
+          <a:noFill xmlns:a="http://schemas.openxmlformats.org/drawingml/2006/main"/>
+          <a:ln xmlns:a="http://schemas.openxmlformats.org/drawingml/2006/main" w="0">
+            <a:noFill/>
+          </a:ln>
+        </p:spPr>
+        <p:txBody>
+          <a:bodyPr xmlns:a="http://schemas.openxmlformats.org/drawingml/2006/main"/>
+          <a:lstStyle xmlns:a="http://schemas.openxmlformats.org/drawingml/2006/main">
+            <a:defPPr>
+              <a:defRPr sz="2250" b="0">
+                <a:solidFill>
+                  <a:srgbClr val="0E766E"/>
+                </a:solidFill>
+                <a:latin typeface="Arial"/>
+                <a:ea typeface="Arial"/>
+                <a:cs typeface="Arial"/>
+              </a:defRPr>
+            </a:defPPr>
+            <a:lvl1pPr>
+              <a:defRPr sz="2250" b="0">
+                <a:solidFill>
+                  <a:srgbClr val="0E766E"/>
+                </a:solidFill>
+                <a:latin typeface="Arial"/>
+                <a:ea typeface="Arial"/>
+                <a:cs typeface="Arial"/>
+              </a:defRPr>
+            </a:lvl1pPr>
+            <a:lvl2pPr>
+              <a:defRPr sz="2250" b="0">
+                <a:solidFill>
+                  <a:srgbClr val="0E766E"/>
+                </a:solidFill>
+                <a:latin typeface="Arial"/>
+                <a:ea typeface="Arial"/>
+                <a:cs typeface="Arial"/>
+              </a:defRPr>
+            </a:lvl2pPr>
+            <a:lvl3pPr>
+              <a:defRPr sz="2250" b="0">
+                <a:solidFill>
+                  <a:srgbClr val="0E766E"/>
+                </a:solidFill>
+                <a:latin typeface="Arial"/>
+                <a:ea typeface="Arial"/>
+                <a:cs typeface="Arial"/>
+              </a:defRPr>
+            </a:lvl3pPr>
+            <a:lvl4pPr>
+              <a:defRPr sz="2250" b="0">
+                <a:solidFill>
+                  <a:srgbClr val="0E766E"/>
+                </a:solidFill>
+                <a:latin typeface="Arial"/>
+                <a:ea typeface="Arial"/>
+                <a:cs typeface="Arial"/>
+              </a:defRPr>
+            </a:lvl4pPr>
+            <a:lvl5pPr>
+              <a:defRPr sz="2250" b="0">
+                <a:solidFill>
+                  <a:srgbClr val="0E766E"/>
+                </a:solidFill>
+                <a:latin typeface="Arial"/>
+                <a:ea typeface="Arial"/>
+                <a:cs typeface="Arial"/>
+              </a:defRPr>
+            </a:lvl5pPr>
+            <a:lvl6pPr>
+              <a:defRPr sz="2250" b="0">
+                <a:solidFill>
+                  <a:srgbClr val="0E766E"/>
+                </a:solidFill>
+                <a:latin typeface="Arial"/>
+                <a:ea typeface="Arial"/>
+                <a:cs typeface="Arial"/>
+              </a:defRPr>
+            </a:lvl6pPr>
+            <a:lvl7pPr>
+              <a:defRPr sz="2250" b="0">
+                <a:solidFill>
+                  <a:srgbClr val="0E766E"/>
+                </a:solidFill>
+                <a:latin typeface="Arial"/>
+                <a:ea typeface="Arial"/>
+                <a:cs typeface="Arial"/>
+              </a:defRPr>
+            </a:lvl7pPr>
+            <a:lvl8pPr>
+              <a:defRPr sz="2250" b="0">
+                <a:solidFill>
+                  <a:srgbClr val="0E766E"/>
+                </a:solidFill>
+                <a:latin typeface="Arial"/>
+                <a:ea typeface="Arial"/>
+                <a:cs typeface="Arial"/>
+              </a:defRPr>
+            </a:lvl8pPr>
+            <a:lvl9pPr>
+              <a:defRPr sz="2250" b="0">
+                <a:solidFill>
+                  <a:srgbClr val="0E766E"/>
+                </a:solidFill>
+                <a:latin typeface="Arial"/>
+                <a:ea typeface="Arial"/>
+                <a:cs typeface="Arial"/>
+              </a:defRPr>
+            </a:lvl9pPr>
+          </a:lstStyle>
+          <a:p xmlns:a="http://schemas.openxmlformats.org/drawingml/2006/main">
+            <a:pPr>
+              <a:defRPr sz="2250" b="0">
+                <a:solidFill>
+                  <a:srgbClr val="0E766E"/>
+                </a:solidFill>
+                <a:latin typeface="Arial"/>
+                <a:ea typeface="Arial"/>
+                <a:cs typeface="Arial"/>
+              </a:defRPr>
+            </a:pPr>
+            <a:r>
+              <a:rPr sz="2250" b="0">
+                <a:solidFill>
+                  <a:srgbClr val="0E766E"/>
+                </a:solidFill>
+                <a:latin typeface="Arial"/>
+                <a:ea typeface="Arial"/>
+                <a:cs typeface="Arial"/>
+              </a:rPr>
+              <a:t>README, model cards and the audit link every claim to evidence</a:t>
+            </a:r>
+          </a:p>
+        </p:txBody>
+      </p:sp>
+      <p:sp>
+        <p:nvSpPr>
+          <p:cNvPr id="4" name="">
+            <a:extLst xmlns:a="http://schemas.openxmlformats.org/drawingml/2006/main">
+              <a:ext uri="{FF2B5EF4-FFF2-40B4-BE49-F238E27FC236}">
+                <a16:creationId xmlns:a16="http://schemas.microsoft.com/office/drawing/2014/main" id="{8F1763D4-F7F0-47A7-8B55-5241C5C736BD}"/>
+              </a:ext>
+            </a:extLst>
+          </p:cNvPr>
+          <p:cNvSpPr>
+            <a:spLocks xmlns:a="http://schemas.openxmlformats.org/drawingml/2006/main" noGrp="1"/>
+          </p:cNvSpPr>
+          <p:nvPr/>
+        </p:nvSpPr>
+        <p:spPr>
+          <a:xfrm xmlns:a="http://schemas.openxmlformats.org/drawingml/2006/main">
+            <a:off x="704850" y="3119438"/>
+            <a:ext cx="10668000" cy="838200"/>
+          </a:xfrm>
+          <a:prstGeom xmlns:a="http://schemas.openxmlformats.org/drawingml/2006/main" prst="rect">
+            <a:avLst/>
+          </a:prstGeom>
+          <a:noFill xmlns:a="http://schemas.openxmlformats.org/drawingml/2006/main"/>
+          <a:ln xmlns:a="http://schemas.openxmlformats.org/drawingml/2006/main" w="0">
+            <a:noFill/>
+          </a:ln>
+        </p:spPr>
+        <p:txBody>
+          <a:bodyPr xmlns:a="http://schemas.openxmlformats.org/drawingml/2006/main"/>
+          <a:lstStyle xmlns:a="http://schemas.openxmlformats.org/drawingml/2006/main">
+            <a:defPPr>
+              <a:defRPr sz="2250" b="0">
+                <a:solidFill>
+                  <a:srgbClr val="17242B"/>
+                </a:solidFill>
+                <a:latin typeface="Arial"/>
+                <a:ea typeface="Arial"/>
+                <a:cs typeface="Arial"/>
+              </a:defRPr>
+            </a:defPPr>
+            <a:lvl1pPr>
+              <a:defRPr sz="2250" b="0">
+                <a:solidFill>
+                  <a:srgbClr val="17242B"/>
+                </a:solidFill>
+                <a:latin typeface="Arial"/>
+                <a:ea typeface="Arial"/>
+                <a:cs typeface="Arial"/>
+              </a:defRPr>
+            </a:lvl1pPr>
+            <a:lvl2pPr>
+              <a:defRPr sz="2250" b="0">
+                <a:solidFill>
+                  <a:srgbClr val="17242B"/>
+                </a:solidFill>
+                <a:latin typeface="Arial"/>
+                <a:ea typeface="Arial"/>
+                <a:cs typeface="Arial"/>
+              </a:defRPr>
+            </a:lvl2pPr>
+            <a:lvl3pPr>
+              <a:defRPr sz="2250" b="0">
+                <a:solidFill>
+                  <a:srgbClr val="17242B"/>
+                </a:solidFill>
+                <a:latin typeface="Arial"/>
+                <a:ea typeface="Arial"/>
+                <a:cs typeface="Arial"/>
+              </a:defRPr>
+            </a:lvl3pPr>
+            <a:lvl4pPr>
+              <a:defRPr sz="2250" b="0">
+                <a:solidFill>
+                  <a:srgbClr val="17242B"/>
+                </a:solidFill>
+                <a:latin typeface="Arial"/>
+                <a:ea typeface="Arial"/>
+                <a:cs typeface="Arial"/>
+              </a:defRPr>
+            </a:lvl4pPr>
+            <a:lvl5pPr>
+              <a:defRPr sz="2250" b="0">
+                <a:solidFill>
+                  <a:srgbClr val="17242B"/>
+                </a:solidFill>
+                <a:latin typeface="Arial"/>
+                <a:ea typeface="Arial"/>
+                <a:cs typeface="Arial"/>
+              </a:defRPr>
+            </a:lvl5pPr>
+            <a:lvl6pPr>
+              <a:defRPr sz="2250" b="0">
+                <a:solidFill>
+                  <a:srgbClr val="17242B"/>
+                </a:solidFill>
+                <a:latin typeface="Arial"/>
+                <a:ea typeface="Arial"/>
+                <a:cs typeface="Arial"/>
+              </a:defRPr>
+            </a:lvl6pPr>
+            <a:lvl7pPr>
+              <a:defRPr sz="2250" b="0">
+                <a:solidFill>
+                  <a:srgbClr val="17242B"/>
+                </a:solidFill>
+                <a:latin typeface="Arial"/>
+                <a:ea typeface="Arial"/>
+                <a:cs typeface="Arial"/>
+              </a:defRPr>
+            </a:lvl7pPr>
+            <a:lvl8pPr>
+              <a:defRPr sz="2250" b="0">
+                <a:solidFill>
+                  <a:srgbClr val="17242B"/>
+                </a:solidFill>
+                <a:latin typeface="Arial"/>
+                <a:ea typeface="Arial"/>
+                <a:cs typeface="Arial"/>
+              </a:defRPr>
+            </a:lvl8pPr>
+            <a:lvl9pPr>
+              <a:defRPr sz="2250" b="0">
+                <a:solidFill>
+                  <a:srgbClr val="17242B"/>
+                </a:solidFill>
+                <a:latin typeface="Arial"/>
+                <a:ea typeface="Arial"/>
+                <a:cs typeface="Arial"/>
+              </a:defRPr>
+            </a:lvl9pPr>
+          </a:lstStyle>
+          <a:p xmlns:a="http://schemas.openxmlformats.org/drawingml/2006/main">
+            <a:pPr>
+              <a:defRPr sz="2250" b="0">
+                <a:solidFill>
+                  <a:srgbClr val="17242B"/>
+                </a:solidFill>
+                <a:latin typeface="Arial"/>
+                <a:ea typeface="Arial"/>
+                <a:cs typeface="Arial"/>
+              </a:defRPr>
+            </a:pPr>
+            <a:r>
+              <a:rPr sz="2250" b="0">
+                <a:solidFill>
+                  <a:srgbClr val="17242B"/>
+                </a:solidFill>
+                <a:latin typeface="Arial"/>
+                <a:ea typeface="Arial"/>
+                <a:cs typeface="Arial"/>
+              </a:rPr>
+              <a:t>Persisted inference reproduces the benchmark and exposes exact feature calculations</a:t>
+            </a:r>
+          </a:p>
+        </p:txBody>
+      </p:sp>
+      <p:sp>
+        <p:nvSpPr>
+          <p:cNvPr id="5" name="">
+            <a:extLst xmlns:a="http://schemas.openxmlformats.org/drawingml/2006/main">
+              <a:ext uri="{FF2B5EF4-FFF2-40B4-BE49-F238E27FC236}">
+                <a16:creationId xmlns:a16="http://schemas.microsoft.com/office/drawing/2014/main" id="{7986BB6F-E500-4B0C-A66E-7FE6BD2589BD}"/>
+              </a:ext>
+            </a:extLst>
+          </p:cNvPr>
+          <p:cNvSpPr>
+            <a:spLocks xmlns:a="http://schemas.openxmlformats.org/drawingml/2006/main" noGrp="1"/>
+          </p:cNvSpPr>
+          <p:nvPr/>
+        </p:nvSpPr>
+        <p:spPr>
+          <a:xfrm xmlns:a="http://schemas.openxmlformats.org/drawingml/2006/main">
+            <a:off x="704850" y="4048125"/>
+            <a:ext cx="10668000" cy="838200"/>
+          </a:xfrm>
+          <a:prstGeom xmlns:a="http://schemas.openxmlformats.org/drawingml/2006/main" prst="rect">
+            <a:avLst/>
+          </a:prstGeom>
+          <a:noFill xmlns:a="http://schemas.openxmlformats.org/drawingml/2006/main"/>
+          <a:ln xmlns:a="http://schemas.openxmlformats.org/drawingml/2006/main" w="0">
+            <a:noFill/>
+          </a:ln>
+        </p:spPr>
+        <p:txBody>
+          <a:bodyPr xmlns:a="http://schemas.openxmlformats.org/drawingml/2006/main"/>
+          <a:lstStyle xmlns:a="http://schemas.openxmlformats.org/drawingml/2006/main">
+            <a:defPPr>
+              <a:defRPr sz="2250" b="0">
+                <a:solidFill>
+                  <a:srgbClr val="17242B"/>
+                </a:solidFill>
+                <a:latin typeface="Arial"/>
+                <a:ea typeface="Arial"/>
+                <a:cs typeface="Arial"/>
+              </a:defRPr>
+            </a:defPPr>
+            <a:lvl1pPr>
+              <a:defRPr sz="2250" b="0">
+                <a:solidFill>
+                  <a:srgbClr val="17242B"/>
+                </a:solidFill>
+                <a:latin typeface="Arial"/>
+                <a:ea typeface="Arial"/>
+                <a:cs typeface="Arial"/>
+              </a:defRPr>
+            </a:lvl1pPr>
+            <a:lvl2pPr>
+              <a:defRPr sz="2250" b="0">
+                <a:solidFill>
+                  <a:srgbClr val="17242B"/>
+                </a:solidFill>
+                <a:latin typeface="Arial"/>
+                <a:ea typeface="Arial"/>
+                <a:cs typeface="Arial"/>
+              </a:defRPr>
+            </a:lvl2pPr>
+            <a:lvl3pPr>
+              <a:defRPr sz="2250" b="0">
+                <a:solidFill>
+                  <a:srgbClr val="17242B"/>
+                </a:solidFill>
+                <a:latin typeface="Arial"/>
+                <a:ea typeface="Arial"/>
+                <a:cs typeface="Arial"/>
+              </a:defRPr>
+            </a:lvl3pPr>
+            <a:lvl4pPr>
+              <a:defRPr sz="2250" b="0">
+                <a:solidFill>
+                  <a:srgbClr val="17242B"/>
+                </a:solidFill>
+                <a:latin typeface="Arial"/>
+                <a:ea typeface="Arial"/>
+                <a:cs typeface="Arial"/>
+              </a:defRPr>
+            </a:lvl4pPr>
+            <a:lvl5pPr>
+              <a:defRPr sz="2250" b="0">
+                <a:solidFill>
+                  <a:srgbClr val="17242B"/>
+                </a:solidFill>
+                <a:latin typeface="Arial"/>
+                <a:ea typeface="Arial"/>
+                <a:cs typeface="Arial"/>
+              </a:defRPr>
+            </a:lvl5pPr>
+            <a:lvl6pPr>
+              <a:defRPr sz="2250" b="0">
+                <a:solidFill>
+                  <a:srgbClr val="17242B"/>
+                </a:solidFill>
+                <a:latin typeface="Arial"/>
+                <a:ea typeface="Arial"/>
+                <a:cs typeface="Arial"/>
+              </a:defRPr>
+            </a:lvl6pPr>
+            <a:lvl7pPr>
+              <a:defRPr sz="2250" b="0">
+                <a:solidFill>
+                  <a:srgbClr val="17242B"/>
+                </a:solidFill>
+                <a:latin typeface="Arial"/>
+                <a:ea typeface="Arial"/>
+                <a:cs typeface="Arial"/>
+              </a:defRPr>
+            </a:lvl7pPr>
+            <a:lvl8pPr>
+              <a:defRPr sz="2250" b="0">
+                <a:solidFill>
+                  <a:srgbClr val="17242B"/>
+                </a:solidFill>
+                <a:latin typeface="Arial"/>
+                <a:ea typeface="Arial"/>
+                <a:cs typeface="Arial"/>
+              </a:defRPr>
+            </a:lvl8pPr>
+            <a:lvl9pPr>
+              <a:defRPr sz="2250" b="0">
+                <a:solidFill>
+                  <a:srgbClr val="17242B"/>
+                </a:solidFill>
+                <a:latin typeface="Arial"/>
+                <a:ea typeface="Arial"/>
+                <a:cs typeface="Arial"/>
+              </a:defRPr>
+            </a:lvl9pPr>
+          </a:lstStyle>
+          <a:p xmlns:a="http://schemas.openxmlformats.org/drawingml/2006/main">
+            <a:pPr>
+              <a:defRPr sz="2250" b="0">
+                <a:solidFill>
+                  <a:srgbClr val="17242B"/>
+                </a:solidFill>
+                <a:latin typeface="Arial"/>
+                <a:ea typeface="Arial"/>
+                <a:cs typeface="Arial"/>
+              </a:defRPr>
+            </a:pPr>
+            <a:r>
+              <a:rPr sz="2250" b="0">
+                <a:solidFill>
+                  <a:srgbClr val="17242B"/>
+                </a:solidFill>
+                <a:latin typeface="Arial"/>
+                <a:ea typeface="Arial"/>
+                <a:cs typeface="Arial"/>
+              </a:rPr>
+              <a:t>The required video remains a human recording and upload task</a:t>
+            </a:r>
+          </a:p>
+        </p:txBody>
+      </p:sp>
+      <p:sp>
+        <p:nvSpPr>
+          <p:cNvPr id="6" name="">
+            <a:extLst xmlns:a="http://schemas.openxmlformats.org/drawingml/2006/main">
+              <a:ext uri="{FF2B5EF4-FFF2-40B4-BE49-F238E27FC236}">
+                <a16:creationId xmlns:a16="http://schemas.microsoft.com/office/drawing/2014/main" id="{1839DAE6-4E3A-4EBB-BCB4-DE8B495D6391}"/>
+              </a:ext>
+            </a:extLst>
+          </p:cNvPr>
+          <p:cNvSpPr>
+            <a:spLocks xmlns:a="http://schemas.openxmlformats.org/drawingml/2006/main" noGrp="1"/>
+          </p:cNvSpPr>
+          <p:nvPr/>
+        </p:nvSpPr>
+        <p:spPr>
+          <a:xfrm xmlns:a="http://schemas.openxmlformats.org/drawingml/2006/main">
+            <a:off x="704850" y="4976813"/>
+            <a:ext cx="10668000" cy="838200"/>
+          </a:xfrm>
+          <a:prstGeom xmlns:a="http://schemas.openxmlformats.org/drawingml/2006/main" prst="rect">
+            <a:avLst/>
+          </a:prstGeom>
+          <a:noFill xmlns:a="http://schemas.openxmlformats.org/drawingml/2006/main"/>
+          <a:ln xmlns:a="http://schemas.openxmlformats.org/drawingml/2006/main" w="0">
+            <a:noFill/>
+          </a:ln>
+        </p:spPr>
+        <p:txBody>
+          <a:bodyPr xmlns:a="http://schemas.openxmlformats.org/drawingml/2006/main"/>
+          <a:lstStyle xmlns:a="http://schemas.openxmlformats.org/drawingml/2006/main">
+            <a:defPPr>
+              <a:defRPr sz="2250" b="0">
+                <a:solidFill>
+                  <a:srgbClr val="17242B"/>
+                </a:solidFill>
+                <a:latin typeface="Arial"/>
+                <a:ea typeface="Arial"/>
+                <a:cs typeface="Arial"/>
+              </a:defRPr>
+            </a:defPPr>
+            <a:lvl1pPr>
+              <a:defRPr sz="2250" b="0">
+                <a:solidFill>
+                  <a:srgbClr val="17242B"/>
+                </a:solidFill>
+                <a:latin typeface="Arial"/>
+                <a:ea typeface="Arial"/>
+                <a:cs typeface="Arial"/>
+              </a:defRPr>
+            </a:lvl1pPr>
+            <a:lvl2pPr>
+              <a:defRPr sz="2250" b="0">
+                <a:solidFill>
+                  <a:srgbClr val="17242B"/>
+                </a:solidFill>
+                <a:latin typeface="Arial"/>
+                <a:ea typeface="Arial"/>
+                <a:cs typeface="Arial"/>
+              </a:defRPr>
+            </a:lvl2pPr>
+            <a:lvl3pPr>
+              <a:defRPr sz="2250" b="0">
+                <a:solidFill>
+                  <a:srgbClr val="17242B"/>
+                </a:solidFill>
+                <a:latin typeface="Arial"/>
+                <a:ea typeface="Arial"/>
+                <a:cs typeface="Arial"/>
+              </a:defRPr>
+            </a:lvl3pPr>
+            <a:lvl4pPr>
+              <a:defRPr sz="2250" b="0">
+                <a:solidFill>
+                  <a:srgbClr val="17242B"/>
+                </a:solidFill>
+                <a:latin typeface="Arial"/>
+                <a:ea typeface="Arial"/>
+                <a:cs typeface="Arial"/>
+              </a:defRPr>
+            </a:lvl4pPr>
+            <a:lvl5pPr>
+              <a:defRPr sz="2250" b="0">
+                <a:solidFill>
+                  <a:srgbClr val="17242B"/>
+                </a:solidFill>
+                <a:latin typeface="Arial"/>
+                <a:ea typeface="Arial"/>
+                <a:cs typeface="Arial"/>
+              </a:defRPr>
+            </a:lvl5pPr>
+            <a:lvl6pPr>
+              <a:defRPr sz="2250" b="0">
+                <a:solidFill>
+                  <a:srgbClr val="17242B"/>
+                </a:solidFill>
+                <a:latin typeface="Arial"/>
+                <a:ea typeface="Arial"/>
+                <a:cs typeface="Arial"/>
+              </a:defRPr>
+            </a:lvl6pPr>
+            <a:lvl7pPr>
+              <a:defRPr sz="2250" b="0">
+                <a:solidFill>
+                  <a:srgbClr val="17242B"/>
+                </a:solidFill>
+                <a:latin typeface="Arial"/>
+                <a:ea typeface="Arial"/>
+                <a:cs typeface="Arial"/>
+              </a:defRPr>
+            </a:lvl7pPr>
+            <a:lvl8pPr>
+              <a:defRPr sz="2250" b="0">
+                <a:solidFill>
+                  <a:srgbClr val="17242B"/>
+                </a:solidFill>
+                <a:latin typeface="Arial"/>
+                <a:ea typeface="Arial"/>
+                <a:cs typeface="Arial"/>
+              </a:defRPr>
+            </a:lvl8pPr>
+            <a:lvl9pPr>
+              <a:defRPr sz="2250" b="0">
+                <a:solidFill>
+                  <a:srgbClr val="17242B"/>
+                </a:solidFill>
+                <a:latin typeface="Arial"/>
+                <a:ea typeface="Arial"/>
+                <a:cs typeface="Arial"/>
+              </a:defRPr>
+            </a:lvl9pPr>
+          </a:lstStyle>
+          <a:p xmlns:a="http://schemas.openxmlformats.org/drawingml/2006/main">
+            <a:pPr>
+              <a:defRPr sz="2250" b="0">
+                <a:solidFill>
+                  <a:srgbClr val="17242B"/>
+                </a:solidFill>
+                <a:latin typeface="Arial"/>
+                <a:ea typeface="Arial"/>
+                <a:cs typeface="Arial"/>
+              </a:defRPr>
+            </a:pPr>
+            <a:r>
+              <a:rPr sz="2250" b="0">
+                <a:solidFill>
+                  <a:srgbClr val="17242B"/>
+                </a:solidFill>
+                <a:latin typeface="Arial"/>
+                <a:ea typeface="Arial"/>
+                <a:cs typeface="Arial"/>
+              </a:rPr>
+              <a:t>Clinical validation, clinician feedback and sim-to-real evaluation remain outstanding</a:t>
+            </a:r>
+          </a:p>
+        </p:txBody>
+      </p:sp>
+      <p:sp>
+        <p:nvSpPr>
+          <p:cNvPr id="7" name="">
+            <a:extLst xmlns:a="http://schemas.openxmlformats.org/drawingml/2006/main">
+              <a:ext uri="{FF2B5EF4-FFF2-40B4-BE49-F238E27FC236}">
+                <a16:creationId xmlns:a16="http://schemas.microsoft.com/office/drawing/2014/main" id="{AA0EE77B-BE90-42A4-9161-FDEB49E6043D}"/>
+              </a:ext>
+            </a:extLst>
+          </p:cNvPr>
+          <p:cNvSpPr>
+            <a:spLocks xmlns:a="http://schemas.openxmlformats.org/drawingml/2006/main" noGrp="1"/>
+          </p:cNvSpPr>
+          <p:nvPr/>
+        </p:nvSpPr>
+        <p:spPr>
+          <a:xfrm xmlns:a="http://schemas.openxmlformats.org/drawingml/2006/main">
+            <a:off x="609600" y="6343650"/>
+            <a:ext cx="10972800" cy="285750"/>
+          </a:xfrm>
+          <a:prstGeom xmlns:a="http://schemas.openxmlformats.org/drawingml/2006/main" prst="rect">
+            <a:avLst/>
+          </a:prstGeom>
+          <a:noFill xmlns:a="http://schemas.openxmlformats.org/drawingml/2006/main"/>
+          <a:ln xmlns:a="http://schemas.openxmlformats.org/drawingml/2006/main" w="0">
+            <a:noFill/>
+          </a:ln>
+        </p:spPr>
+        <p:txBody>
+          <a:bodyPr xmlns:a="http://schemas.openxmlformats.org/drawingml/2006/main"/>
+          <a:lstStyle xmlns:a="http://schemas.openxmlformats.org/drawingml/2006/main">
+            <a:defPPr>
+              <a:defRPr sz="1350" b="0">
+                <a:solidFill>
+                  <a:srgbClr val="65757B"/>
+                </a:solidFill>
+                <a:latin typeface="Arial"/>
+                <a:ea typeface="Arial"/>
+                <a:cs typeface="Arial"/>
+              </a:defRPr>
+            </a:defPPr>
+            <a:lvl1pPr>
+              <a:defRPr sz="1350" b="0">
+                <a:solidFill>
+                  <a:srgbClr val="65757B"/>
+                </a:solidFill>
+                <a:latin typeface="Arial"/>
+                <a:ea typeface="Arial"/>
+                <a:cs typeface="Arial"/>
+              </a:defRPr>
+            </a:lvl1pPr>
+            <a:lvl2pPr>
+              <a:defRPr sz="1350" b="0">
+                <a:solidFill>
+                  <a:srgbClr val="65757B"/>
+                </a:solidFill>
+                <a:latin typeface="Arial"/>
+                <a:ea typeface="Arial"/>
+                <a:cs typeface="Arial"/>
+              </a:defRPr>
+            </a:lvl2pPr>
+            <a:lvl3pPr>
+              <a:defRPr sz="1350" b="0">
+                <a:solidFill>
+                  <a:srgbClr val="65757B"/>
+                </a:solidFill>
+                <a:latin typeface="Arial"/>
+                <a:ea typeface="Arial"/>
+                <a:cs typeface="Arial"/>
+              </a:defRPr>
+            </a:lvl3pPr>
+            <a:lvl4pPr>
+              <a:defRPr sz="1350" b="0">
+                <a:solidFill>
+                  <a:srgbClr val="65757B"/>
+                </a:solidFill>
+                <a:latin typeface="Arial"/>
+                <a:ea typeface="Arial"/>
+                <a:cs typeface="Arial"/>
+              </a:defRPr>
+            </a:lvl4pPr>
+            <a:lvl5pPr>
+              <a:defRPr sz="1350" b="0">
+                <a:solidFill>
+                  <a:srgbClr val="65757B"/>
+                </a:solidFill>
+                <a:latin typeface="Arial"/>
+                <a:ea typeface="Arial"/>
+                <a:cs typeface="Arial"/>
+              </a:defRPr>
+            </a:lvl5pPr>
+            <a:lvl6pPr>
+              <a:defRPr sz="1350" b="0">
+                <a:solidFill>
+                  <a:srgbClr val="65757B"/>
+                </a:solidFill>
+                <a:latin typeface="Arial"/>
+                <a:ea typeface="Arial"/>
+                <a:cs typeface="Arial"/>
+              </a:defRPr>
+            </a:lvl6pPr>
+            <a:lvl7pPr>
+              <a:defRPr sz="1350" b="0">
+                <a:solidFill>
+                  <a:srgbClr val="65757B"/>
+                </a:solidFill>
+                <a:latin typeface="Arial"/>
+                <a:ea typeface="Arial"/>
+                <a:cs typeface="Arial"/>
+              </a:defRPr>
+            </a:lvl7pPr>
+            <a:lvl8pPr>
+              <a:defRPr sz="1350" b="0">
+                <a:solidFill>
+                  <a:srgbClr val="65757B"/>
+                </a:solidFill>
+                <a:latin typeface="Arial"/>
+                <a:ea typeface="Arial"/>
+                <a:cs typeface="Arial"/>
+              </a:defRPr>
+            </a:lvl8pPr>
+            <a:lvl9pPr>
+              <a:defRPr sz="1350" b="0">
+                <a:solidFill>
+                  <a:srgbClr val="65757B"/>
+                </a:solidFill>
+                <a:latin typeface="Arial"/>
+                <a:ea typeface="Arial"/>
+                <a:cs typeface="Arial"/>
+              </a:defRPr>
+            </a:lvl9pPr>
+          </a:lstStyle>
+          <a:p xmlns:a="http://schemas.openxmlformats.org/drawingml/2006/main">
+            <a:pPr>
+              <a:defRPr sz="1350" b="0">
+                <a:solidFill>
+                  <a:srgbClr val="65757B"/>
+                </a:solidFill>
+                <a:latin typeface="Arial"/>
+                <a:ea typeface="Arial"/>
+                <a:cs typeface="Arial"/>
+              </a:defRPr>
+            </a:pPr>
+            <a:r>
+              <a:rPr sz="1350" b="0">
+                <a:solidFill>
+                  <a:srgbClr val="65757B"/>
+                </a:solidFill>
+                <a:latin typeface="Arial"/>
+                <a:ea typeface="Arial"/>
+                <a:cs typeface="Arial"/>
+              </a:rPr>
+              <a:t>Synthetic research prototype. Not for diagnosis, contraception or conception planning.</a:t>
+            </a:r>
+          </a:p>
+        </p:txBody>
+      </p:sp>
+    </p:spTree>
+    <p:extLst>
+      <p:ext uri="{BB962C8B-B14F-4D97-AF65-F5344CB8AC3E}">
+        <p14:creationId xmlns:p14="http://schemas.microsoft.com/office/powerpoint/2010/main" val="365079596"/>
       </p:ext>
     </p:extLst>
   </p:cSld>
@@ -23578,7 +24770,7 @@
           <p:cNvPr id="8" name="">
             <a:extLst xmlns:a="http://schemas.openxmlformats.org/drawingml/2006/main">
               <a:ext uri="{FF2B5EF4-FFF2-40B4-BE49-F238E27FC236}">
-                <a16:creationId xmlns:a16="http://schemas.microsoft.com/office/drawing/2014/main" id="{BEFE7DDA-9232-46F8-975F-01B62424CD8E}"/>
+                <a16:creationId xmlns:a16="http://schemas.microsoft.com/office/drawing/2014/main" id="{045CAB8A-2195-4462-8FB4-B6E40C6CF9DF}"/>
               </a:ext>
             </a:extLst>
           </p:cNvPr>
@@ -23734,7 +24926,7 @@
           <p:cNvPr id="2" name="">
             <a:extLst xmlns:a="http://schemas.openxmlformats.org/drawingml/2006/main">
               <a:ext uri="{FF2B5EF4-FFF2-40B4-BE49-F238E27FC236}">
-                <a16:creationId xmlns:a16="http://schemas.microsoft.com/office/drawing/2014/main" id="{C6E8D386-77C2-4000-A267-325C82EEB31F}"/>
+                <a16:creationId xmlns:a16="http://schemas.microsoft.com/office/drawing/2014/main" id="{EBED2DE4-7A30-40DF-B8CF-EF66D5F45C2E}"/>
               </a:ext>
             </a:extLst>
           </p:cNvPr>
@@ -23890,7 +25082,7 @@
           <p:cNvPr id="3" name="">
             <a:extLst xmlns:a="http://schemas.openxmlformats.org/drawingml/2006/main">
               <a:ext uri="{FF2B5EF4-FFF2-40B4-BE49-F238E27FC236}">
-                <a16:creationId xmlns:a16="http://schemas.microsoft.com/office/drawing/2014/main" id="{D9F858D0-B919-4D71-997D-6C45AE61E96F}"/>
+                <a16:creationId xmlns:a16="http://schemas.microsoft.com/office/drawing/2014/main" id="{2787612D-6833-4886-93F8-8CCDE32AD8BA}"/>
               </a:ext>
             </a:extLst>
           </p:cNvPr>
@@ -24046,7 +25238,7 @@
           <p:cNvPr id="4" name="">
             <a:extLst xmlns:a="http://schemas.openxmlformats.org/drawingml/2006/main">
               <a:ext uri="{FF2B5EF4-FFF2-40B4-BE49-F238E27FC236}">
-                <a16:creationId xmlns:a16="http://schemas.microsoft.com/office/drawing/2014/main" id="{CEFAD155-62E3-4165-B067-2147D11F779B}"/>
+                <a16:creationId xmlns:a16="http://schemas.microsoft.com/office/drawing/2014/main" id="{69E02A95-6683-441C-846E-8312FD06DCEC}"/>
               </a:ext>
             </a:extLst>
           </p:cNvPr>
@@ -24202,7 +25394,7 @@
           <p:cNvPr id="5" name="">
             <a:extLst xmlns:a="http://schemas.openxmlformats.org/drawingml/2006/main">
               <a:ext uri="{FF2B5EF4-FFF2-40B4-BE49-F238E27FC236}">
-                <a16:creationId xmlns:a16="http://schemas.microsoft.com/office/drawing/2014/main" id="{8478B3DF-D54C-400F-8533-552221DDB028}"/>
+                <a16:creationId xmlns:a16="http://schemas.microsoft.com/office/drawing/2014/main" id="{E7EF65EA-A493-4760-838B-56CC7A7812C0}"/>
               </a:ext>
             </a:extLst>
           </p:cNvPr>
@@ -24358,7 +25550,7 @@
           <p:cNvPr id="6" name="">
             <a:extLst xmlns:a="http://schemas.openxmlformats.org/drawingml/2006/main">
               <a:ext uri="{FF2B5EF4-FFF2-40B4-BE49-F238E27FC236}">
-                <a16:creationId xmlns:a16="http://schemas.microsoft.com/office/drawing/2014/main" id="{53F06B80-85AA-4071-B4AF-14E105C95DAA}"/>
+                <a16:creationId xmlns:a16="http://schemas.microsoft.com/office/drawing/2014/main" id="{3E7DA9B8-9810-40F2-8230-1BA3CA4B76A2}"/>
               </a:ext>
             </a:extLst>
           </p:cNvPr>
@@ -24514,7 +25706,7 @@
           <p:cNvPr id="7" name="">
             <a:extLst xmlns:a="http://schemas.openxmlformats.org/drawingml/2006/main">
               <a:ext uri="{FF2B5EF4-FFF2-40B4-BE49-F238E27FC236}">
-                <a16:creationId xmlns:a16="http://schemas.microsoft.com/office/drawing/2014/main" id="{76E8EBEC-8F44-40A7-8F8C-83BCC1BA1E65}"/>
+                <a16:creationId xmlns:a16="http://schemas.microsoft.com/office/drawing/2014/main" id="{27AEE777-7D43-421B-9CF0-BED7C2D83D85}"/>
               </a:ext>
             </a:extLst>
           </p:cNvPr>
@@ -24668,7 +25860,7 @@
     </p:spTree>
     <p:extLst>
       <p:ext uri="{BB962C8B-B14F-4D97-AF65-F5344CB8AC3E}">
-        <p14:creationId xmlns:p14="http://schemas.microsoft.com/office/powerpoint/2010/main" val="801780428"/>
+        <p14:creationId xmlns:p14="http://schemas.microsoft.com/office/powerpoint/2010/main" val="541574163"/>
       </p:ext>
     </p:extLst>
   </p:cSld>
@@ -24699,7 +25891,7 @@
           <p:cNvPr id="7" name="">
             <a:extLst xmlns:a="http://schemas.openxmlformats.org/drawingml/2006/main">
               <a:ext uri="{FF2B5EF4-FFF2-40B4-BE49-F238E27FC236}">
-                <a16:creationId xmlns:a16="http://schemas.microsoft.com/office/drawing/2014/main" id="{1CB106F9-59DC-440E-960D-9EEF9E4DC3A9}"/>
+                <a16:creationId xmlns:a16="http://schemas.microsoft.com/office/drawing/2014/main" id="{97E1EF6F-3A1D-40E6-A3F1-5084A56935F8}"/>
               </a:ext>
             </a:extLst>
           </p:cNvPr>
@@ -24855,7 +26047,7 @@
           <p:cNvPr id="2" name="">
             <a:extLst xmlns:a="http://schemas.openxmlformats.org/drawingml/2006/main">
               <a:ext uri="{FF2B5EF4-FFF2-40B4-BE49-F238E27FC236}">
-                <a16:creationId xmlns:a16="http://schemas.microsoft.com/office/drawing/2014/main" id="{33733DC0-925F-42C8-B3A7-5E1A3C2CA1B8}"/>
+                <a16:creationId xmlns:a16="http://schemas.microsoft.com/office/drawing/2014/main" id="{E77AB112-CEAA-462A-A3FC-0941BCD1013D}"/>
               </a:ext>
             </a:extLst>
           </p:cNvPr>
@@ -25011,7 +26203,7 @@
           <p:cNvPr id="3" name="">
             <a:extLst xmlns:a="http://schemas.openxmlformats.org/drawingml/2006/main">
               <a:ext uri="{FF2B5EF4-FFF2-40B4-BE49-F238E27FC236}">
-                <a16:creationId xmlns:a16="http://schemas.microsoft.com/office/drawing/2014/main" id="{AB1AE05D-1ADE-4986-A084-4AEE26498868}"/>
+                <a16:creationId xmlns:a16="http://schemas.microsoft.com/office/drawing/2014/main" id="{558308E6-7EEB-4461-99F7-8B311C17C91C}"/>
               </a:ext>
             </a:extLst>
           </p:cNvPr>
@@ -25167,7 +26359,7 @@
           <p:cNvPr id="4" name="">
             <a:extLst xmlns:a="http://schemas.openxmlformats.org/drawingml/2006/main">
               <a:ext uri="{FF2B5EF4-FFF2-40B4-BE49-F238E27FC236}">
-                <a16:creationId xmlns:a16="http://schemas.microsoft.com/office/drawing/2014/main" id="{2B6D4475-41FF-4B12-AEBC-B1FB363B2BFD}"/>
+                <a16:creationId xmlns:a16="http://schemas.microsoft.com/office/drawing/2014/main" id="{C506E515-1677-406C-92AA-FC7D06A85E87}"/>
               </a:ext>
             </a:extLst>
           </p:cNvPr>
@@ -25323,7 +26515,7 @@
           <p:cNvPr id="5" name="">
             <a:extLst xmlns:a="http://schemas.openxmlformats.org/drawingml/2006/main">
               <a:ext uri="{FF2B5EF4-FFF2-40B4-BE49-F238E27FC236}">
-                <a16:creationId xmlns:a16="http://schemas.microsoft.com/office/drawing/2014/main" id="{8516C333-926E-4411-B767-D01C0D2718B8}"/>
+                <a16:creationId xmlns:a16="http://schemas.microsoft.com/office/drawing/2014/main" id="{907C32B8-0867-41A7-B24B-EF79F3D8E86A}"/>
               </a:ext>
             </a:extLst>
           </p:cNvPr>
@@ -25479,7 +26671,7 @@
           <p:cNvPr id="6" name="">
             <a:extLst xmlns:a="http://schemas.openxmlformats.org/drawingml/2006/main">
               <a:ext uri="{FF2B5EF4-FFF2-40B4-BE49-F238E27FC236}">
-                <a16:creationId xmlns:a16="http://schemas.microsoft.com/office/drawing/2014/main" id="{4D7265CD-171A-449F-8930-D82EB026E83B}"/>
+                <a16:creationId xmlns:a16="http://schemas.microsoft.com/office/drawing/2014/main" id="{96FBF50D-6DD6-4DCD-B9A1-FB01E839B6FE}"/>
               </a:ext>
             </a:extLst>
           </p:cNvPr>
@@ -25633,7 +26825,7 @@
     </p:spTree>
     <p:extLst>
       <p:ext uri="{BB962C8B-B14F-4D97-AF65-F5344CB8AC3E}">
-        <p14:creationId xmlns:p14="http://schemas.microsoft.com/office/powerpoint/2010/main" val="1824226818"/>
+        <p14:creationId xmlns:p14="http://schemas.microsoft.com/office/powerpoint/2010/main" val="1443381721"/>
       </p:ext>
     </p:extLst>
   </p:cSld>
@@ -25664,7 +26856,7 @@
           <p:cNvPr id="14" name="">
             <a:extLst xmlns:a="http://schemas.openxmlformats.org/drawingml/2006/main">
               <a:ext uri="{FF2B5EF4-FFF2-40B4-BE49-F238E27FC236}">
-                <a16:creationId xmlns:a16="http://schemas.microsoft.com/office/drawing/2014/main" id="{E3634A9D-92C5-49DC-8AE2-3C26ECEAD85C}"/>
+                <a16:creationId xmlns:a16="http://schemas.microsoft.com/office/drawing/2014/main" id="{FC49562F-ACC6-4399-9719-564E6E89773F}"/>
               </a:ext>
             </a:extLst>
           </p:cNvPr>
@@ -25695,7 +26887,7 @@
           <p:cNvPr id="13" name="">
             <a:extLst xmlns:a="http://schemas.openxmlformats.org/drawingml/2006/main">
               <a:ext uri="{FF2B5EF4-FFF2-40B4-BE49-F238E27FC236}">
-                <a16:creationId xmlns:a16="http://schemas.microsoft.com/office/drawing/2014/main" id="{A49FE11D-ECC3-456D-B8A6-748A9A5B2C98}"/>
+                <a16:creationId xmlns:a16="http://schemas.microsoft.com/office/drawing/2014/main" id="{0637B75C-57F4-4CDD-B89C-DE24EE5E2F88}"/>
               </a:ext>
             </a:extLst>
           </p:cNvPr>
@@ -25726,7 +26918,7 @@
           <p:cNvPr id="12" name="">
             <a:extLst xmlns:a="http://schemas.openxmlformats.org/drawingml/2006/main">
               <a:ext uri="{FF2B5EF4-FFF2-40B4-BE49-F238E27FC236}">
-                <a16:creationId xmlns:a16="http://schemas.microsoft.com/office/drawing/2014/main" id="{31557A36-4B83-47F2-8D9F-5AD36E645FF7}"/>
+                <a16:creationId xmlns:a16="http://schemas.microsoft.com/office/drawing/2014/main" id="{B2D9C4E2-99EB-4B89-8832-D3EE67C6C203}"/>
               </a:ext>
             </a:extLst>
           </p:cNvPr>
@@ -25757,7 +26949,7 @@
           <p:cNvPr id="11" name="">
             <a:extLst xmlns:a="http://schemas.openxmlformats.org/drawingml/2006/main">
               <a:ext uri="{FF2B5EF4-FFF2-40B4-BE49-F238E27FC236}">
-                <a16:creationId xmlns:a16="http://schemas.microsoft.com/office/drawing/2014/main" id="{82FECB99-5FFE-4FBF-BB89-C14CEDF691E8}"/>
+                <a16:creationId xmlns:a16="http://schemas.microsoft.com/office/drawing/2014/main" id="{34298D20-A91C-47AF-B566-4235A2AAE3C2}"/>
               </a:ext>
             </a:extLst>
           </p:cNvPr>
@@ -25790,7 +26982,7 @@
           <p:cNvPr id="10" name="">
             <a:extLst xmlns:a="http://schemas.openxmlformats.org/drawingml/2006/main">
               <a:ext uri="{FF2B5EF4-FFF2-40B4-BE49-F238E27FC236}">
-                <a16:creationId xmlns:a16="http://schemas.microsoft.com/office/drawing/2014/main" id="{AD083DAC-53C5-4787-88AF-A2B4934EFC75}"/>
+                <a16:creationId xmlns:a16="http://schemas.microsoft.com/office/drawing/2014/main" id="{24ACFF25-D172-43A9-B7FD-64A143C4BF5B}"/>
               </a:ext>
             </a:extLst>
           </p:cNvPr>
@@ -25823,7 +27015,7 @@
           <p:cNvPr id="16" name="">
             <a:extLst xmlns:a="http://schemas.openxmlformats.org/drawingml/2006/main">
               <a:ext uri="{FF2B5EF4-FFF2-40B4-BE49-F238E27FC236}">
-                <a16:creationId xmlns:a16="http://schemas.microsoft.com/office/drawing/2014/main" id="{66E59D3F-A257-4303-897B-74D270BFFEB9}"/>
+                <a16:creationId xmlns:a16="http://schemas.microsoft.com/office/drawing/2014/main" id="{D183FBF1-2226-4EF2-9736-09C66F77ACA1}"/>
               </a:ext>
             </a:extLst>
           </p:cNvPr>
@@ -25979,7 +27171,7 @@
           <p:cNvPr id="2" name="">
             <a:extLst xmlns:a="http://schemas.openxmlformats.org/drawingml/2006/main">
               <a:ext uri="{FF2B5EF4-FFF2-40B4-BE49-F238E27FC236}">
-                <a16:creationId xmlns:a16="http://schemas.microsoft.com/office/drawing/2014/main" id="{F7CC861A-C54E-4A6A-B180-34D24389844F}"/>
+                <a16:creationId xmlns:a16="http://schemas.microsoft.com/office/drawing/2014/main" id="{9D294192-8A10-4E6F-8322-A5AFA21B03A3}"/>
               </a:ext>
             </a:extLst>
           </p:cNvPr>
@@ -26135,7 +27327,7 @@
           <p:cNvPr id="3" name="">
             <a:extLst xmlns:a="http://schemas.openxmlformats.org/drawingml/2006/main">
               <a:ext uri="{FF2B5EF4-FFF2-40B4-BE49-F238E27FC236}">
-                <a16:creationId xmlns:a16="http://schemas.microsoft.com/office/drawing/2014/main" id="{924427E9-4B40-4268-8BDA-36C9F2D01DEF}"/>
+                <a16:creationId xmlns:a16="http://schemas.microsoft.com/office/drawing/2014/main" id="{6650AF72-B2CD-49C4-A365-162C46CE0720}"/>
               </a:ext>
             </a:extLst>
           </p:cNvPr>
@@ -26318,7 +27510,7 @@
           <p:cNvPr id="4" name="">
             <a:extLst xmlns:a="http://schemas.openxmlformats.org/drawingml/2006/main">
               <a:ext uri="{FF2B5EF4-FFF2-40B4-BE49-F238E27FC236}">
-                <a16:creationId xmlns:a16="http://schemas.microsoft.com/office/drawing/2014/main" id="{C40B84CD-BC73-41F7-BF22-A6EA231ECB14}"/>
+                <a16:creationId xmlns:a16="http://schemas.microsoft.com/office/drawing/2014/main" id="{BDF1473A-FD3D-4CE3-953E-F8223A1245F5}"/>
               </a:ext>
             </a:extLst>
           </p:cNvPr>
@@ -26501,7 +27693,7 @@
           <p:cNvPr id="5" name="">
             <a:extLst xmlns:a="http://schemas.openxmlformats.org/drawingml/2006/main">
               <a:ext uri="{FF2B5EF4-FFF2-40B4-BE49-F238E27FC236}">
-                <a16:creationId xmlns:a16="http://schemas.microsoft.com/office/drawing/2014/main" id="{C37FA8DC-4002-43A1-B979-7EDD9DE5BF44}"/>
+                <a16:creationId xmlns:a16="http://schemas.microsoft.com/office/drawing/2014/main" id="{F6D7A2A4-DCCB-4939-8CD5-E85B73F5FEA1}"/>
               </a:ext>
             </a:extLst>
           </p:cNvPr>
@@ -26684,7 +27876,7 @@
           <p:cNvPr id="6" name="">
             <a:extLst xmlns:a="http://schemas.openxmlformats.org/drawingml/2006/main">
               <a:ext uri="{FF2B5EF4-FFF2-40B4-BE49-F238E27FC236}">
-                <a16:creationId xmlns:a16="http://schemas.microsoft.com/office/drawing/2014/main" id="{165B07A0-E3BF-46DA-8B37-9494336AE0C5}"/>
+                <a16:creationId xmlns:a16="http://schemas.microsoft.com/office/drawing/2014/main" id="{4C67BAD4-FC8B-49C5-847D-1BD79D2ED93A}"/>
               </a:ext>
             </a:extLst>
           </p:cNvPr>
@@ -26867,7 +28059,7 @@
           <p:cNvPr id="7" name="">
             <a:extLst xmlns:a="http://schemas.openxmlformats.org/drawingml/2006/main">
               <a:ext uri="{FF2B5EF4-FFF2-40B4-BE49-F238E27FC236}">
-                <a16:creationId xmlns:a16="http://schemas.microsoft.com/office/drawing/2014/main" id="{B65C1B24-EA5A-4E8C-9C37-C4AA40F190D7}"/>
+                <a16:creationId xmlns:a16="http://schemas.microsoft.com/office/drawing/2014/main" id="{552014A8-0DE6-4151-AA5F-28405DB45F5B}"/>
               </a:ext>
             </a:extLst>
           </p:cNvPr>
@@ -27050,7 +28242,7 @@
           <p:cNvPr id="8" name="">
             <a:extLst xmlns:a="http://schemas.openxmlformats.org/drawingml/2006/main">
               <a:ext uri="{FF2B5EF4-FFF2-40B4-BE49-F238E27FC236}">
-                <a16:creationId xmlns:a16="http://schemas.microsoft.com/office/drawing/2014/main" id="{6C231096-DBFB-456F-8B90-DBB4CF359A3B}"/>
+                <a16:creationId xmlns:a16="http://schemas.microsoft.com/office/drawing/2014/main" id="{9B254BD6-845C-4123-A580-702545EDE71F}"/>
               </a:ext>
             </a:extLst>
           </p:cNvPr>
@@ -27233,7 +28425,7 @@
           <p:cNvPr id="9" name="">
             <a:extLst xmlns:a="http://schemas.openxmlformats.org/drawingml/2006/main">
               <a:ext uri="{FF2B5EF4-FFF2-40B4-BE49-F238E27FC236}">
-                <a16:creationId xmlns:a16="http://schemas.microsoft.com/office/drawing/2014/main" id="{D512E8D5-D7F1-4597-8037-A7C46791B1D7}"/>
+                <a16:creationId xmlns:a16="http://schemas.microsoft.com/office/drawing/2014/main" id="{834FDE39-B4CE-4E95-9FFF-1FA5FAD7C419}"/>
               </a:ext>
             </a:extLst>
           </p:cNvPr>
@@ -27416,7 +28608,7 @@
           <p:cNvPr id="15" name="">
             <a:extLst xmlns:a="http://schemas.openxmlformats.org/drawingml/2006/main">
               <a:ext uri="{FF2B5EF4-FFF2-40B4-BE49-F238E27FC236}">
-                <a16:creationId xmlns:a16="http://schemas.microsoft.com/office/drawing/2014/main" id="{9D9C8176-C3DF-4353-AC6D-9DA47F44267B}"/>
+                <a16:creationId xmlns:a16="http://schemas.microsoft.com/office/drawing/2014/main" id="{B043B252-CCEF-4A41-BF36-6D4A8C069FAB}"/>
               </a:ext>
             </a:extLst>
           </p:cNvPr>
@@ -27570,7 +28762,7 @@
     </p:spTree>
     <p:extLst>
       <p:ext uri="{BB962C8B-B14F-4D97-AF65-F5344CB8AC3E}">
-        <p14:creationId xmlns:p14="http://schemas.microsoft.com/office/powerpoint/2010/main" val="1580844345"/>
+        <p14:creationId xmlns:p14="http://schemas.microsoft.com/office/powerpoint/2010/main" val="836216206"/>
       </p:ext>
     </p:extLst>
   </p:cSld>
@@ -27601,7 +28793,7 @@
           <p:cNvPr id="8" name="">
             <a:extLst xmlns:a="http://schemas.openxmlformats.org/drawingml/2006/main">
               <a:ext uri="{FF2B5EF4-FFF2-40B4-BE49-F238E27FC236}">
-                <a16:creationId xmlns:a16="http://schemas.microsoft.com/office/drawing/2014/main" id="{EBC65ECA-D295-4F01-B852-91A04B28E2F9}"/>
+                <a16:creationId xmlns:a16="http://schemas.microsoft.com/office/drawing/2014/main" id="{66103007-9556-4170-AAA9-57902D6692E0}"/>
               </a:ext>
             </a:extLst>
           </p:cNvPr>
@@ -27757,7 +28949,7 @@
           <p:cNvPr id="2" name="">
             <a:extLst xmlns:a="http://schemas.openxmlformats.org/drawingml/2006/main">
               <a:ext uri="{FF2B5EF4-FFF2-40B4-BE49-F238E27FC236}">
-                <a16:creationId xmlns:a16="http://schemas.microsoft.com/office/drawing/2014/main" id="{95DAF584-196A-42DB-BB34-7643E9CCFC9C}"/>
+                <a16:creationId xmlns:a16="http://schemas.microsoft.com/office/drawing/2014/main" id="{DC5888CB-8733-4F0A-96A7-8F3B9A825710}"/>
               </a:ext>
             </a:extLst>
           </p:cNvPr>
@@ -27913,7 +29105,7 @@
           <p:cNvPr id="3" name="">
             <a:extLst xmlns:a="http://schemas.openxmlformats.org/drawingml/2006/main">
               <a:ext uri="{FF2B5EF4-FFF2-40B4-BE49-F238E27FC236}">
-                <a16:creationId xmlns:a16="http://schemas.microsoft.com/office/drawing/2014/main" id="{EAB1A87F-D056-4D10-9939-EC5234A59A04}"/>
+                <a16:creationId xmlns:a16="http://schemas.microsoft.com/office/drawing/2014/main" id="{8591BB30-C15C-499D-8DF5-54B26985730B}"/>
               </a:ext>
             </a:extLst>
           </p:cNvPr>
@@ -28069,7 +29261,7 @@
           <p:cNvPr id="4" name="">
             <a:extLst xmlns:a="http://schemas.openxmlformats.org/drawingml/2006/main">
               <a:ext uri="{FF2B5EF4-FFF2-40B4-BE49-F238E27FC236}">
-                <a16:creationId xmlns:a16="http://schemas.microsoft.com/office/drawing/2014/main" id="{BEA9124F-060B-4353-AB31-37F4779E0759}"/>
+                <a16:creationId xmlns:a16="http://schemas.microsoft.com/office/drawing/2014/main" id="{DC17EAE1-150B-447A-9229-447B55BD7C57}"/>
               </a:ext>
             </a:extLst>
           </p:cNvPr>
@@ -28225,7 +29417,7 @@
           <p:cNvPr id="5" name="">
             <a:extLst xmlns:a="http://schemas.openxmlformats.org/drawingml/2006/main">
               <a:ext uri="{FF2B5EF4-FFF2-40B4-BE49-F238E27FC236}">
-                <a16:creationId xmlns:a16="http://schemas.microsoft.com/office/drawing/2014/main" id="{526BBB62-F718-4DF7-8696-C6ABCC6398F6}"/>
+                <a16:creationId xmlns:a16="http://schemas.microsoft.com/office/drawing/2014/main" id="{9E5B5A21-437E-4A63-9A01-8AF572234201}"/>
               </a:ext>
             </a:extLst>
           </p:cNvPr>
@@ -28381,7 +29573,7 @@
           <p:cNvPr id="6" name="">
             <a:extLst xmlns:a="http://schemas.openxmlformats.org/drawingml/2006/main">
               <a:ext uri="{FF2B5EF4-FFF2-40B4-BE49-F238E27FC236}">
-                <a16:creationId xmlns:a16="http://schemas.microsoft.com/office/drawing/2014/main" id="{1C0632A3-CE3C-4F11-8C71-9090E7583B39}"/>
+                <a16:creationId xmlns:a16="http://schemas.microsoft.com/office/drawing/2014/main" id="{653630A1-48E5-438D-B2E2-842B407ADC59}"/>
               </a:ext>
             </a:extLst>
           </p:cNvPr>
@@ -28537,7 +29729,7 @@
           <p:cNvPr id="7" name="">
             <a:extLst xmlns:a="http://schemas.openxmlformats.org/drawingml/2006/main">
               <a:ext uri="{FF2B5EF4-FFF2-40B4-BE49-F238E27FC236}">
-                <a16:creationId xmlns:a16="http://schemas.microsoft.com/office/drawing/2014/main" id="{419FB611-0769-4524-9619-FE3BCF908C68}"/>
+                <a16:creationId xmlns:a16="http://schemas.microsoft.com/office/drawing/2014/main" id="{26370220-BD39-4F85-9303-14A890A09258}"/>
               </a:ext>
             </a:extLst>
           </p:cNvPr>
@@ -28691,7 +29883,7 @@
     </p:spTree>
     <p:extLst>
       <p:ext uri="{BB962C8B-B14F-4D97-AF65-F5344CB8AC3E}">
-        <p14:creationId xmlns:p14="http://schemas.microsoft.com/office/powerpoint/2010/main" val="23827559"/>
+        <p14:creationId xmlns:p14="http://schemas.microsoft.com/office/powerpoint/2010/main" val="1318278737"/>
       </p:ext>
     </p:extLst>
   </p:cSld>
@@ -28722,7 +29914,7 @@
           <p:cNvPr id="5" name="">
             <a:extLst xmlns:a="http://schemas.openxmlformats.org/drawingml/2006/main">
               <a:ext uri="{FF2B5EF4-FFF2-40B4-BE49-F238E27FC236}">
-                <a16:creationId xmlns:a16="http://schemas.microsoft.com/office/drawing/2014/main" id="{F112C11B-BAFB-4810-8BD7-D050A559C5A2}"/>
+                <a16:creationId xmlns:a16="http://schemas.microsoft.com/office/drawing/2014/main" id="{8CF1F33D-5394-43EB-9363-7F1E0404664D}"/>
               </a:ext>
             </a:extLst>
           </p:cNvPr>
@@ -28878,7 +30070,7 @@
           <p:cNvPr id="2" name="">
             <a:extLst xmlns:a="http://schemas.openxmlformats.org/drawingml/2006/main">
               <a:ext uri="{FF2B5EF4-FFF2-40B4-BE49-F238E27FC236}">
-                <a16:creationId xmlns:a16="http://schemas.microsoft.com/office/drawing/2014/main" id="{67C94B45-0DC5-47A4-B906-084E473D66A2}"/>
+                <a16:creationId xmlns:a16="http://schemas.microsoft.com/office/drawing/2014/main" id="{EF54C113-E1E1-4545-8A6D-F766BEAFA7CA}"/>
               </a:ext>
             </a:extLst>
           </p:cNvPr>
@@ -29034,7 +30226,7 @@
           <p:cNvPr id="3" name="">
             <a:extLst xmlns:a="http://schemas.openxmlformats.org/drawingml/2006/main">
               <a:ext uri="{FF2B5EF4-FFF2-40B4-BE49-F238E27FC236}">
-                <a16:creationId xmlns:a16="http://schemas.microsoft.com/office/drawing/2014/main" id="{3AFC4359-074B-48B1-9992-1883CD5E4D90}"/>
+                <a16:creationId xmlns:a16="http://schemas.microsoft.com/office/drawing/2014/main" id="{B6827532-3A52-4CBD-9E8E-3E07BDE814DE}"/>
               </a:ext>
             </a:extLst>
           </p:cNvPr>
@@ -29975,7 +31167,7 @@
           <p:cNvPr id="4" name="">
             <a:extLst xmlns:a="http://schemas.openxmlformats.org/drawingml/2006/main">
               <a:ext uri="{FF2B5EF4-FFF2-40B4-BE49-F238E27FC236}">
-                <a16:creationId xmlns:a16="http://schemas.microsoft.com/office/drawing/2014/main" id="{D1B2CDA9-48E8-415E-AADB-B99177080DBD}"/>
+                <a16:creationId xmlns:a16="http://schemas.microsoft.com/office/drawing/2014/main" id="{4FCC5B33-7FC2-47B2-BD98-AB82D09EF33E}"/>
               </a:ext>
             </a:extLst>
           </p:cNvPr>
@@ -30129,7 +31321,7 @@
     </p:spTree>
     <p:extLst>
       <p:ext uri="{BB962C8B-B14F-4D97-AF65-F5344CB8AC3E}">
-        <p14:creationId xmlns:p14="http://schemas.microsoft.com/office/powerpoint/2010/main" val="1222151982"/>
+        <p14:creationId xmlns:p14="http://schemas.microsoft.com/office/powerpoint/2010/main" val="1766262571"/>
       </p:ext>
     </p:extLst>
   </p:cSld>
@@ -30160,7 +31352,7 @@
           <p:cNvPr id="5" name="">
             <a:extLst xmlns:a="http://schemas.openxmlformats.org/drawingml/2006/main">
               <a:ext uri="{FF2B5EF4-FFF2-40B4-BE49-F238E27FC236}">
-                <a16:creationId xmlns:a16="http://schemas.microsoft.com/office/drawing/2014/main" id="{58DA933B-99A3-4E1B-B855-3C3EA8B40DA7}"/>
+                <a16:creationId xmlns:a16="http://schemas.microsoft.com/office/drawing/2014/main" id="{2C3288E1-5FF5-4D57-9E9E-D2FDC5C7FD9B}"/>
               </a:ext>
             </a:extLst>
           </p:cNvPr>
@@ -30316,7 +31508,7 @@
           <p:cNvPr id="2" name="">
             <a:extLst xmlns:a="http://schemas.openxmlformats.org/drawingml/2006/main">
               <a:ext uri="{FF2B5EF4-FFF2-40B4-BE49-F238E27FC236}">
-                <a16:creationId xmlns:a16="http://schemas.microsoft.com/office/drawing/2014/main" id="{3D1605B8-6759-420A-8F94-149BD6982319}"/>
+                <a16:creationId xmlns:a16="http://schemas.microsoft.com/office/drawing/2014/main" id="{B5BC3A3E-B879-4D39-84F5-D63F0DC387CC}"/>
               </a:ext>
             </a:extLst>
           </p:cNvPr>
@@ -30472,7 +31664,7 @@
           <p:cNvPr id="3" name="">
             <a:extLst xmlns:a="http://schemas.openxmlformats.org/drawingml/2006/main">
               <a:ext uri="{FF2B5EF4-FFF2-40B4-BE49-F238E27FC236}">
-                <a16:creationId xmlns:a16="http://schemas.microsoft.com/office/drawing/2014/main" id="{365C3F6D-6806-4D1D-AAFB-D1FBFAC71F41}"/>
+                <a16:creationId xmlns:a16="http://schemas.microsoft.com/office/drawing/2014/main" id="{F0163A1C-97BA-4B1C-9B2E-6063609976AC}"/>
               </a:ext>
             </a:extLst>
           </p:cNvPr>
@@ -31413,7 +32605,7 @@
           <p:cNvPr id="4" name="">
             <a:extLst xmlns:a="http://schemas.openxmlformats.org/drawingml/2006/main">
               <a:ext uri="{FF2B5EF4-FFF2-40B4-BE49-F238E27FC236}">
-                <a16:creationId xmlns:a16="http://schemas.microsoft.com/office/drawing/2014/main" id="{2F8AB2ED-BEE2-4AE6-83A2-45822935F721}"/>
+                <a16:creationId xmlns:a16="http://schemas.microsoft.com/office/drawing/2014/main" id="{93BD69DC-D4DB-4BCE-B2EF-D04C3A41E8C0}"/>
               </a:ext>
             </a:extLst>
           </p:cNvPr>
@@ -31567,7 +32759,7 @@
     </p:spTree>
     <p:extLst>
       <p:ext uri="{BB962C8B-B14F-4D97-AF65-F5344CB8AC3E}">
-        <p14:creationId xmlns:p14="http://schemas.microsoft.com/office/powerpoint/2010/main" val="2127579501"/>
+        <p14:creationId xmlns:p14="http://schemas.microsoft.com/office/powerpoint/2010/main" val="494947188"/>
       </p:ext>
     </p:extLst>
   </p:cSld>
@@ -31598,7 +32790,7 @@
           <p:cNvPr id="5" name="">
             <a:extLst xmlns:a="http://schemas.openxmlformats.org/drawingml/2006/main">
               <a:ext uri="{FF2B5EF4-FFF2-40B4-BE49-F238E27FC236}">
-                <a16:creationId xmlns:a16="http://schemas.microsoft.com/office/drawing/2014/main" id="{0E49070B-F94F-40BE-B52B-98B560710E77}"/>
+                <a16:creationId xmlns:a16="http://schemas.microsoft.com/office/drawing/2014/main" id="{F69E4D3B-F3D5-460B-9BC8-E20E1F2710C8}"/>
               </a:ext>
             </a:extLst>
           </p:cNvPr>
@@ -31754,7 +32946,7 @@
           <p:cNvPr id="2" name="">
             <a:extLst xmlns:a="http://schemas.openxmlformats.org/drawingml/2006/main">
               <a:ext uri="{FF2B5EF4-FFF2-40B4-BE49-F238E27FC236}">
-                <a16:creationId xmlns:a16="http://schemas.microsoft.com/office/drawing/2014/main" id="{907BBABA-3D41-46F1-90AB-DE3B1492AC48}"/>
+                <a16:creationId xmlns:a16="http://schemas.microsoft.com/office/drawing/2014/main" id="{2ADBF0D7-C9E8-49C6-9337-CF50F48BC05F}"/>
               </a:ext>
             </a:extLst>
           </p:cNvPr>
@@ -31910,7 +33102,7 @@
           <p:cNvPr id="3" name="">
             <a:extLst xmlns:a="http://schemas.openxmlformats.org/drawingml/2006/main">
               <a:ext uri="{FF2B5EF4-FFF2-40B4-BE49-F238E27FC236}">
-                <a16:creationId xmlns:a16="http://schemas.microsoft.com/office/drawing/2014/main" id="{F9F74281-5BEE-455F-9D58-2E8563D4E144}"/>
+                <a16:creationId xmlns:a16="http://schemas.microsoft.com/office/drawing/2014/main" id="{F7557404-B765-43B4-A7B0-45D2E72FABED}"/>
               </a:ext>
             </a:extLst>
           </p:cNvPr>
@@ -32851,7 +34043,7 @@
           <p:cNvPr id="4" name="">
             <a:extLst xmlns:a="http://schemas.openxmlformats.org/drawingml/2006/main">
               <a:ext uri="{FF2B5EF4-FFF2-40B4-BE49-F238E27FC236}">
-                <a16:creationId xmlns:a16="http://schemas.microsoft.com/office/drawing/2014/main" id="{DE63381D-F72B-4D01-820F-0B1B658E4515}"/>
+                <a16:creationId xmlns:a16="http://schemas.microsoft.com/office/drawing/2014/main" id="{B124B99E-9E85-41F6-A9D0-67C588BB94D4}"/>
               </a:ext>
             </a:extLst>
           </p:cNvPr>
@@ -33005,7 +34197,7 @@
     </p:spTree>
     <p:extLst>
       <p:ext uri="{BB962C8B-B14F-4D97-AF65-F5344CB8AC3E}">
-        <p14:creationId xmlns:p14="http://schemas.microsoft.com/office/powerpoint/2010/main" val="1469818306"/>
+        <p14:creationId xmlns:p14="http://schemas.microsoft.com/office/powerpoint/2010/main" val="238269173"/>
       </p:ext>
     </p:extLst>
   </p:cSld>

--- a/deliverables/CycleTwin_pitch_deck.pptx
+++ b/deliverables/CycleTwin_pitch_deck.pptx
@@ -2,36 +2,37 @@
 <file path=ppt/presentation.xml><?xml version="1.0" encoding="utf-8"?>
 <p:presentation xmlns:p="http://schemas.openxmlformats.org/presentationml/2006/main">
   <p:sldMasterIdLst>
-    <p:sldMasterId xmlns:r="http://schemas.openxmlformats.org/officeDocument/2006/relationships" id="2147483648" r:id="Rb1aaad957f7e40ba"/>
+    <p:sldMasterId xmlns:r="http://schemas.openxmlformats.org/officeDocument/2006/relationships" id="2147483648" r:id="R991c7c23bca84f1e"/>
   </p:sldMasterIdLst>
   <p:notesMasterIdLst>
-    <p:notesMasterId xmlns:r="http://schemas.openxmlformats.org/officeDocument/2006/relationships" r:id="R7bbf377c7b094852"/>
+    <p:notesMasterId xmlns:r="http://schemas.openxmlformats.org/officeDocument/2006/relationships" r:id="R86f16cf20bbd44ca"/>
   </p:notesMasterIdLst>
   <p:sldIdLst>
-    <p:sldId xmlns:r="http://schemas.openxmlformats.org/officeDocument/2006/relationships" id="256" r:id="R188a46439faa4970"/>
-    <p:sldId xmlns:r="http://schemas.openxmlformats.org/officeDocument/2006/relationships" id="257" r:id="R51968984b8de40e5"/>
-    <p:sldId xmlns:r="http://schemas.openxmlformats.org/officeDocument/2006/relationships" id="258" r:id="Rf0a59c20a7b443da"/>
-    <p:sldId xmlns:r="http://schemas.openxmlformats.org/officeDocument/2006/relationships" id="259" r:id="Rdea6b45de0864fa8"/>
-    <p:sldId xmlns:r="http://schemas.openxmlformats.org/officeDocument/2006/relationships" id="260" r:id="R7e55ee121dda4550"/>
-    <p:sldId xmlns:r="http://schemas.openxmlformats.org/officeDocument/2006/relationships" id="261" r:id="Ra66b23b2e8e54136"/>
-    <p:sldId xmlns:r="http://schemas.openxmlformats.org/officeDocument/2006/relationships" id="262" r:id="Rfb12ad8c9d99489f"/>
-    <p:sldId xmlns:r="http://schemas.openxmlformats.org/officeDocument/2006/relationships" id="263" r:id="R6e921056773e4600"/>
-    <p:sldId xmlns:r="http://schemas.openxmlformats.org/officeDocument/2006/relationships" id="264" r:id="Ra6c3bb2e375e410a"/>
-    <p:sldId xmlns:r="http://schemas.openxmlformats.org/officeDocument/2006/relationships" id="265" r:id="Rb5e8a280ea814f68"/>
-    <p:sldId xmlns:r="http://schemas.openxmlformats.org/officeDocument/2006/relationships" id="266" r:id="Rab76cffa7d38438d"/>
-    <p:sldId xmlns:r="http://schemas.openxmlformats.org/officeDocument/2006/relationships" id="267" r:id="Re181c0ff593a43a1"/>
-    <p:sldId xmlns:r="http://schemas.openxmlformats.org/officeDocument/2006/relationships" id="268" r:id="Rb322b2e7966440a5"/>
-    <p:sldId xmlns:r="http://schemas.openxmlformats.org/officeDocument/2006/relationships" id="269" r:id="R90d7c0ed01c04629"/>
-    <p:sldId xmlns:r="http://schemas.openxmlformats.org/officeDocument/2006/relationships" id="270" r:id="Ree40ffc9281c41a4"/>
-    <p:sldId xmlns:r="http://schemas.openxmlformats.org/officeDocument/2006/relationships" id="271" r:id="R977b2a7dcc7e40e2"/>
-    <p:sldId xmlns:r="http://schemas.openxmlformats.org/officeDocument/2006/relationships" id="272" r:id="R9bd7c6728eb64b9c"/>
-    <p:sldId xmlns:r="http://schemas.openxmlformats.org/officeDocument/2006/relationships" id="273" r:id="R9cf604d4171348d5"/>
-    <p:sldId xmlns:r="http://schemas.openxmlformats.org/officeDocument/2006/relationships" id="274" r:id="R358adbe4e3d7497f"/>
-    <p:sldId xmlns:r="http://schemas.openxmlformats.org/officeDocument/2006/relationships" id="275" r:id="Rce650b1007d94c8b"/>
-    <p:sldId xmlns:r="http://schemas.openxmlformats.org/officeDocument/2006/relationships" id="276" r:id="Ra94ad3574dc34fab"/>
-    <p:sldId xmlns:r="http://schemas.openxmlformats.org/officeDocument/2006/relationships" id="277" r:id="Rd4ec4cdfb1aa4593"/>
-    <p:sldId xmlns:r="http://schemas.openxmlformats.org/officeDocument/2006/relationships" id="278" r:id="R5dbe51e47040463a"/>
-    <p:sldId xmlns:r="http://schemas.openxmlformats.org/officeDocument/2006/relationships" id="279" r:id="Rab4df056a5124648"/>
+    <p:sldId xmlns:r="http://schemas.openxmlformats.org/officeDocument/2006/relationships" id="256" r:id="R5cba71670adb46e0"/>
+    <p:sldId xmlns:r="http://schemas.openxmlformats.org/officeDocument/2006/relationships" id="257" r:id="Re99f9b9044b642fc"/>
+    <p:sldId xmlns:r="http://schemas.openxmlformats.org/officeDocument/2006/relationships" id="258" r:id="Reaa26d34c33f442c"/>
+    <p:sldId xmlns:r="http://schemas.openxmlformats.org/officeDocument/2006/relationships" id="259" r:id="R2f7601efcbcc49b1"/>
+    <p:sldId xmlns:r="http://schemas.openxmlformats.org/officeDocument/2006/relationships" id="260" r:id="R9b8c4c10c9704f1d"/>
+    <p:sldId xmlns:r="http://schemas.openxmlformats.org/officeDocument/2006/relationships" id="261" r:id="Rcfbc3be1befd4163"/>
+    <p:sldId xmlns:r="http://schemas.openxmlformats.org/officeDocument/2006/relationships" id="262" r:id="R19e64c25baa74675"/>
+    <p:sldId xmlns:r="http://schemas.openxmlformats.org/officeDocument/2006/relationships" id="263" r:id="Rc45cc6f726cf4e26"/>
+    <p:sldId xmlns:r="http://schemas.openxmlformats.org/officeDocument/2006/relationships" id="264" r:id="R89ae1a032fd44a9a"/>
+    <p:sldId xmlns:r="http://schemas.openxmlformats.org/officeDocument/2006/relationships" id="265" r:id="R932b7bbc11d64e55"/>
+    <p:sldId xmlns:r="http://schemas.openxmlformats.org/officeDocument/2006/relationships" id="266" r:id="R0d9943a062c8488c"/>
+    <p:sldId xmlns:r="http://schemas.openxmlformats.org/officeDocument/2006/relationships" id="267" r:id="R198baabc47ad40d9"/>
+    <p:sldId xmlns:r="http://schemas.openxmlformats.org/officeDocument/2006/relationships" id="268" r:id="R272f3bfed0c24126"/>
+    <p:sldId xmlns:r="http://schemas.openxmlformats.org/officeDocument/2006/relationships" id="269" r:id="R82bb9febf2b244b8"/>
+    <p:sldId xmlns:r="http://schemas.openxmlformats.org/officeDocument/2006/relationships" id="270" r:id="Rf02a11d4610e415d"/>
+    <p:sldId xmlns:r="http://schemas.openxmlformats.org/officeDocument/2006/relationships" id="271" r:id="R12d5a459bd3b4e09"/>
+    <p:sldId xmlns:r="http://schemas.openxmlformats.org/officeDocument/2006/relationships" id="272" r:id="R239bf4162667479d"/>
+    <p:sldId xmlns:r="http://schemas.openxmlformats.org/officeDocument/2006/relationships" id="273" r:id="R12d989d02a6348ad"/>
+    <p:sldId xmlns:r="http://schemas.openxmlformats.org/officeDocument/2006/relationships" id="274" r:id="R2b5db2fc797d40be"/>
+    <p:sldId xmlns:r="http://schemas.openxmlformats.org/officeDocument/2006/relationships" id="275" r:id="R8f21ebc111fd4040"/>
+    <p:sldId xmlns:r="http://schemas.openxmlformats.org/officeDocument/2006/relationships" id="276" r:id="Rec4dfa1c27fc46b7"/>
+    <p:sldId xmlns:r="http://schemas.openxmlformats.org/officeDocument/2006/relationships" id="277" r:id="Rdd8c4d7dd5df4170"/>
+    <p:sldId xmlns:r="http://schemas.openxmlformats.org/officeDocument/2006/relationships" id="278" r:id="R4119ebb38ea14c7d"/>
+    <p:sldId xmlns:r="http://schemas.openxmlformats.org/officeDocument/2006/relationships" id="279" r:id="R7ecfcf3bd3ad4f3c"/>
+    <p:sldId xmlns:r="http://schemas.openxmlformats.org/officeDocument/2006/relationships" id="280" r:id="Rb8e17169bc5e43a1"/>
   </p:sldIdLst>
   <p:sldSz cx="12192000" cy="6858000"/>
   <p:notesSz cx="6858000" cy="9144000"/>
@@ -1165,7 +1166,7 @@
           <a:lstStyle xmlns:a="http://schemas.openxmlformats.org/drawingml/2006/main"/>
           <a:p xmlns:a="http://schemas.openxmlformats.org/drawingml/2006/main">
             <a:r>
-              <a:t>Source: docs/claims.json, generated by scripts/build_claims.py. All project metrics are synthetic development results. Decision-support research display</a:t>
+              <a:t>Source: docs/claims.json, generated by scripts/build_claims.py. All project metrics are synthetic development results. Marginal classification sets and separate heuristic timing bands</a:t>
             </a:r>
           </a:p>
         </p:txBody>
@@ -1305,7 +1306,7 @@
           <a:lstStyle xmlns:a="http://schemas.openxmlformats.org/drawingml/2006/main"/>
           <a:p xmlns:a="http://schemas.openxmlformats.org/drawingml/2006/main">
             <a:r>
-              <a:t>Source: docs/claims.json, generated by scripts/build_claims.py. All project metrics are synthetic development results. Missing safety information causes abstention</a:t>
+              <a:t>Source: docs/claims.json, generated by scripts/build_claims.py. All project metrics are synthetic development results. Decision-support research display</a:t>
             </a:r>
           </a:p>
         </p:txBody>
@@ -1375,7 +1376,7 @@
           <a:lstStyle xmlns:a="http://schemas.openxmlformats.org/drawingml/2006/main"/>
           <a:p xmlns:a="http://schemas.openxmlformats.org/drawingml/2006/main">
             <a:r>
-              <a:t>Source: docs/claims.json, generated by scripts/build_claims.py. All project metrics are synthetic development results. Clear boundaries around simulated physiology</a:t>
+              <a:t>Source: docs/claims.json, generated by scripts/build_claims.py. All project metrics are synthetic development results. Missing safety information causes abstention</a:t>
             </a:r>
           </a:p>
         </p:txBody>
@@ -1445,7 +1446,7 @@
           <a:lstStyle xmlns:a="http://schemas.openxmlformats.org/drawingml/2006/main"/>
           <a:p xmlns:a="http://schemas.openxmlformats.org/drawingml/2006/main">
             <a:r>
-              <a:t>Source: docs/claims.json, generated by scripts/build_claims.py. All project metrics are synthetic development results. All declared Kushi scenarios remain visible</a:t>
+              <a:t>Source: docs/claims.json, generated by scripts/build_claims.py. All project metrics are synthetic development results. Clear boundaries around simulated physiology</a:t>
             </a:r>
           </a:p>
         </p:txBody>
@@ -1515,6 +1516,76 @@
           <a:lstStyle xmlns:a="http://schemas.openxmlformats.org/drawingml/2006/main"/>
           <a:p xmlns:a="http://schemas.openxmlformats.org/drawingml/2006/main">
             <a:r>
+              <a:t>Source: docs/claims.json, generated by scripts/build_claims.py. All project metrics are synthetic development results. All declared Kushi scenarios remain visible</a:t>
+            </a:r>
+          </a:p>
+        </p:txBody>
+      </p:sp>
+      <p:sp>
+        <p:nvSpPr>
+          <p:cNvPr id="4" name="Slide Number Placeholder 3"/>
+          <p:cNvSpPr>
+            <a:spLocks xmlns:a="http://schemas.openxmlformats.org/drawingml/2006/main" noGrp="1"/>
+          </p:cNvSpPr>
+          <p:nvPr>
+            <p:ph type="sldNum" idx="5"/>
+          </p:nvPr>
+        </p:nvSpPr>
+        <p:spPr/>
+        <p:txBody>
+          <a:bodyPr xmlns:a="http://schemas.openxmlformats.org/drawingml/2006/main"/>
+          <a:lstStyle xmlns:a="http://schemas.openxmlformats.org/drawingml/2006/main"/>
+          <a:p xmlns:a="http://schemas.openxmlformats.org/drawingml/2006/main"/>
+        </p:txBody>
+      </p:sp>
+    </p:spTree>
+  </p:cSld>
+  <p:clrMapOvr>
+    <a:masterClrMapping xmlns:a="http://schemas.openxmlformats.org/drawingml/2006/main"/>
+  </p:clrMapOvr>
+</p:notes>
+</file>
+
+<file path=ppt/notesSlides/notesSlide24.xml><?xml version="1.0" encoding="utf-8"?>
+<p:notes xmlns:p="http://schemas.openxmlformats.org/presentationml/2006/main">
+  <p:cSld>
+    <p:spTree>
+      <p:nvGrpSpPr>
+        <p:cNvPr id="1" name=""/>
+        <p:cNvGrpSpPr/>
+        <p:nvPr/>
+      </p:nvGrpSpPr>
+      <p:grpSpPr>
+        <a:xfrm xmlns:a="http://schemas.openxmlformats.org/drawingml/2006/main"/>
+      </p:grpSpPr>
+      <p:sp>
+        <p:nvSpPr>
+          <p:cNvPr id="2" name="Slide Image Placeholder 1"/>
+          <p:cNvSpPr>
+            <a:spLocks xmlns:a="http://schemas.openxmlformats.org/drawingml/2006/main" noGrp="1"/>
+          </p:cNvSpPr>
+          <p:nvPr>
+            <p:ph type="sldImg" idx="0"/>
+          </p:nvPr>
+        </p:nvSpPr>
+        <p:spPr/>
+      </p:sp>
+      <p:sp>
+        <p:nvSpPr>
+          <p:cNvPr id="3" name="Notes Placeholder 2"/>
+          <p:cNvSpPr>
+            <a:spLocks xmlns:a="http://schemas.openxmlformats.org/drawingml/2006/main" noGrp="1"/>
+          </p:cNvSpPr>
+          <p:nvPr>
+            <p:ph type="body" idx="1"/>
+          </p:nvPr>
+        </p:nvSpPr>
+        <p:spPr/>
+        <p:txBody>
+          <a:bodyPr xmlns:a="http://schemas.openxmlformats.org/drawingml/2006/main"/>
+          <a:lstStyle xmlns:a="http://schemas.openxmlformats.org/drawingml/2006/main"/>
+          <a:p xmlns:a="http://schemas.openxmlformats.org/drawingml/2006/main">
+            <a:r>
               <a:t>Source: docs/claims.json, generated by scripts/build_claims.py. All project metrics are synthetic development results. Synthetic recovery is not prospective evidence in women</a:t>
             </a:r>
           </a:p>
@@ -1545,7 +1616,7 @@
 </p:notes>
 </file>
 
-<file path=ppt/notesSlides/notesSlide24.xml><?xml version="1.0" encoding="utf-8"?>
+<file path=ppt/notesSlides/notesSlide25.xml><?xml version="1.0" encoding="utf-8"?>
 <p:notes xmlns:p="http://schemas.openxmlformats.org/presentationml/2006/main">
   <p:cSld>
     <p:spTree>
@@ -2122,7 +2193,7 @@
           <p:cNvPr id="3" name="Title">
             <a:extLst xmlns:a="http://schemas.openxmlformats.org/drawingml/2006/main">
               <a:ext uri="{FF2B5EF4-FFF2-40B4-BE49-F238E27FC236}">
-                <a16:creationId xmlns:a16="http://schemas.microsoft.com/office/drawing/2014/main" id="{2D4BBB5F-DE53-453E-B903-BE86F18BC36F}"/>
+                <a16:creationId xmlns:a16="http://schemas.microsoft.com/office/drawing/2014/main" id="{87994754-6064-4B91-AAE1-CA15B2917F9E}"/>
               </a:ext>
             </a:extLst>
           </p:cNvPr>
@@ -2351,7 +2422,7 @@
           <p:cNvPr id="2" name="Subtitle">
             <a:extLst xmlns:a="http://schemas.openxmlformats.org/drawingml/2006/main">
               <a:ext uri="{FF2B5EF4-FFF2-40B4-BE49-F238E27FC236}">
-                <a16:creationId xmlns:a16="http://schemas.microsoft.com/office/drawing/2014/main" id="{E69FE28F-77FA-491B-9938-E5B7C4210675}"/>
+                <a16:creationId xmlns:a16="http://schemas.microsoft.com/office/drawing/2014/main" id="{6B5494DD-161C-4CB3-B6A4-10F19E794645}"/>
               </a:ext>
             </a:extLst>
           </p:cNvPr>
@@ -2597,7 +2668,7 @@
           <p:cNvPr id="2" name="Section title">
             <a:extLst xmlns:a="http://schemas.openxmlformats.org/drawingml/2006/main">
               <a:ext uri="{FF2B5EF4-FFF2-40B4-BE49-F238E27FC236}">
-                <a16:creationId xmlns:a16="http://schemas.microsoft.com/office/drawing/2014/main" id="{2D30B18B-9E5F-4D24-9D64-25490F3C2123}"/>
+                <a16:creationId xmlns:a16="http://schemas.microsoft.com/office/drawing/2014/main" id="{D0ABEB84-DD55-431E-A9B2-612E2AEBEDB0}"/>
               </a:ext>
             </a:extLst>
           </p:cNvPr>
@@ -2843,7 +2914,7 @@
           <p:cNvPr id="3" name="Title">
             <a:extLst xmlns:a="http://schemas.openxmlformats.org/drawingml/2006/main">
               <a:ext uri="{FF2B5EF4-FFF2-40B4-BE49-F238E27FC236}">
-                <a16:creationId xmlns:a16="http://schemas.microsoft.com/office/drawing/2014/main" id="{07E2D8DD-E04B-4883-B879-B4612716CFC7}"/>
+                <a16:creationId xmlns:a16="http://schemas.microsoft.com/office/drawing/2014/main" id="{BE8193F8-8872-48B9-8473-9679734FB4AA}"/>
               </a:ext>
             </a:extLst>
           </p:cNvPr>
@@ -3072,7 +3143,7 @@
           <p:cNvPr id="2" name="Body">
             <a:extLst xmlns:a="http://schemas.openxmlformats.org/drawingml/2006/main">
               <a:ext uri="{FF2B5EF4-FFF2-40B4-BE49-F238E27FC236}">
-                <a16:creationId xmlns:a16="http://schemas.microsoft.com/office/drawing/2014/main" id="{83432764-8CB9-439D-8E9D-1C8DA3606005}"/>
+                <a16:creationId xmlns:a16="http://schemas.microsoft.com/office/drawing/2014/main" id="{F37B03E6-8389-49AC-8957-8A87F1810BCF}"/>
               </a:ext>
             </a:extLst>
           </p:cNvPr>
@@ -3318,7 +3389,7 @@
           <p:cNvPr id="4" name="Title">
             <a:extLst xmlns:a="http://schemas.openxmlformats.org/drawingml/2006/main">
               <a:ext uri="{FF2B5EF4-FFF2-40B4-BE49-F238E27FC236}">
-                <a16:creationId xmlns:a16="http://schemas.microsoft.com/office/drawing/2014/main" id="{2568C371-3EE5-4BE4-88D3-0D47C1F602AB}"/>
+                <a16:creationId xmlns:a16="http://schemas.microsoft.com/office/drawing/2014/main" id="{37DE032F-034E-4D74-9201-BB12DCB95E46}"/>
               </a:ext>
             </a:extLst>
           </p:cNvPr>
@@ -3547,7 +3618,7 @@
           <p:cNvPr id="2" name="Left column">
             <a:extLst xmlns:a="http://schemas.openxmlformats.org/drawingml/2006/main">
               <a:ext uri="{FF2B5EF4-FFF2-40B4-BE49-F238E27FC236}">
-                <a16:creationId xmlns:a16="http://schemas.microsoft.com/office/drawing/2014/main" id="{9DB31D53-171D-4D4E-9470-BBAD7667181C}"/>
+                <a16:creationId xmlns:a16="http://schemas.microsoft.com/office/drawing/2014/main" id="{B10E03F9-721A-4F40-810C-1B662CD08873}"/>
               </a:ext>
             </a:extLst>
           </p:cNvPr>
@@ -3776,7 +3847,7 @@
           <p:cNvPr id="3" name="Right column">
             <a:extLst xmlns:a="http://schemas.openxmlformats.org/drawingml/2006/main">
               <a:ext uri="{FF2B5EF4-FFF2-40B4-BE49-F238E27FC236}">
-                <a16:creationId xmlns:a16="http://schemas.microsoft.com/office/drawing/2014/main" id="{7BA29AC9-DD3E-4995-B1C1-1460D630B2F5}"/>
+                <a16:creationId xmlns:a16="http://schemas.microsoft.com/office/drawing/2014/main" id="{757355D0-80D1-4A28-A9B8-C8A01ADD7A2B}"/>
               </a:ext>
             </a:extLst>
           </p:cNvPr>
@@ -4022,7 +4093,7 @@
           <p:cNvPr id="3" name="Title">
             <a:extLst xmlns:a="http://schemas.openxmlformats.org/drawingml/2006/main">
               <a:ext uri="{FF2B5EF4-FFF2-40B4-BE49-F238E27FC236}">
-                <a16:creationId xmlns:a16="http://schemas.microsoft.com/office/drawing/2014/main" id="{784018AC-6E89-4161-B8EB-A916F7CD9CA9}"/>
+                <a16:creationId xmlns:a16="http://schemas.microsoft.com/office/drawing/2014/main" id="{10D00757-EC97-43E1-B115-55887B2496DB}"/>
               </a:ext>
             </a:extLst>
           </p:cNvPr>
@@ -4251,7 +4322,7 @@
           <p:cNvPr id="2" name="Left column">
             <a:extLst xmlns:a="http://schemas.openxmlformats.org/drawingml/2006/main">
               <a:ext uri="{FF2B5EF4-FFF2-40B4-BE49-F238E27FC236}">
-                <a16:creationId xmlns:a16="http://schemas.microsoft.com/office/drawing/2014/main" id="{4E6EBC6B-6328-4559-88E3-E0A3F21C9D31}"/>
+                <a16:creationId xmlns:a16="http://schemas.microsoft.com/office/drawing/2014/main" id="{AE18DD56-094C-44A1-AB58-B708880DE224}"/>
               </a:ext>
             </a:extLst>
           </p:cNvPr>
@@ -4518,12 +4589,12 @@
   </p:cSld>
   <p:clrMap bg1="lt1" tx1="dk1" bg2="lt2" tx2="dk2" accent1="accent1" accent2="accent2" accent3="accent3" accent4="accent4" accent5="accent5" accent6="accent6" hlink="hlink" folHlink="folHlink"/>
   <p:sldLayoutIdLst>
-    <p:sldLayoutId xmlns:r="http://schemas.openxmlformats.org/officeDocument/2006/relationships" id="2147483649" r:id="R51d3527a60e74256"/>
-    <p:sldLayoutId xmlns:r="http://schemas.openxmlformats.org/officeDocument/2006/relationships" id="2147483650" r:id="R4dad274505734a1a"/>
-    <p:sldLayoutId xmlns:r="http://schemas.openxmlformats.org/officeDocument/2006/relationships" id="2147483651" r:id="R4ef9ea46dae942f3"/>
-    <p:sldLayoutId xmlns:r="http://schemas.openxmlformats.org/officeDocument/2006/relationships" id="2147483652" r:id="R8348300ce05745a7"/>
-    <p:sldLayoutId xmlns:r="http://schemas.openxmlformats.org/officeDocument/2006/relationships" id="2147483653" r:id="Ref1e56100d1b4d80"/>
-    <p:sldLayoutId xmlns:r="http://schemas.openxmlformats.org/officeDocument/2006/relationships" id="2147483654" r:id="Re402036bab434c4b"/>
+    <p:sldLayoutId xmlns:r="http://schemas.openxmlformats.org/officeDocument/2006/relationships" id="2147483649" r:id="R6230546c026b4981"/>
+    <p:sldLayoutId xmlns:r="http://schemas.openxmlformats.org/officeDocument/2006/relationships" id="2147483650" r:id="R48a76cf4a0574425"/>
+    <p:sldLayoutId xmlns:r="http://schemas.openxmlformats.org/officeDocument/2006/relationships" id="2147483651" r:id="Re69ea519eba14e04"/>
+    <p:sldLayoutId xmlns:r="http://schemas.openxmlformats.org/officeDocument/2006/relationships" id="2147483652" r:id="Rf60553c6e1624e4c"/>
+    <p:sldLayoutId xmlns:r="http://schemas.openxmlformats.org/officeDocument/2006/relationships" id="2147483653" r:id="R2f4330cbe383441c"/>
+    <p:sldLayoutId xmlns:r="http://schemas.openxmlformats.org/officeDocument/2006/relationships" id="2147483654" r:id="Rd8357877f46244cb"/>
   </p:sldLayoutIdLst>
   <p:txStyles>
     <p:titleStyle>
@@ -5074,7 +5145,7 @@
           <p:cNvPr id="7" name="">
             <a:extLst xmlns:a="http://schemas.openxmlformats.org/drawingml/2006/main">
               <a:ext uri="{FF2B5EF4-FFF2-40B4-BE49-F238E27FC236}">
-                <a16:creationId xmlns:a16="http://schemas.microsoft.com/office/drawing/2014/main" id="{8B18721A-5AC0-4D89-9256-92895F8DE891}"/>
+                <a16:creationId xmlns:a16="http://schemas.microsoft.com/office/drawing/2014/main" id="{B71ED3C0-B497-4AC8-BC4F-D95944B0BB59}"/>
               </a:ext>
             </a:extLst>
           </p:cNvPr>
@@ -5230,7 +5301,7 @@
           <p:cNvPr id="2" name="">
             <a:extLst xmlns:a="http://schemas.openxmlformats.org/drawingml/2006/main">
               <a:ext uri="{FF2B5EF4-FFF2-40B4-BE49-F238E27FC236}">
-                <a16:creationId xmlns:a16="http://schemas.microsoft.com/office/drawing/2014/main" id="{7D7894E4-6E73-4E41-8117-FDE6CEF2A501}"/>
+                <a16:creationId xmlns:a16="http://schemas.microsoft.com/office/drawing/2014/main" id="{29205377-59B0-4C2B-A2BC-E34BA961BEBD}"/>
               </a:ext>
             </a:extLst>
           </p:cNvPr>
@@ -5386,7 +5457,7 @@
           <p:cNvPr id="3" name="">
             <a:extLst xmlns:a="http://schemas.openxmlformats.org/drawingml/2006/main">
               <a:ext uri="{FF2B5EF4-FFF2-40B4-BE49-F238E27FC236}">
-                <a16:creationId xmlns:a16="http://schemas.microsoft.com/office/drawing/2014/main" id="{07B1529E-154B-4EF4-9484-CEAFEB919D4D}"/>
+                <a16:creationId xmlns:a16="http://schemas.microsoft.com/office/drawing/2014/main" id="{538C8E16-8259-4668-A44A-9D774677A515}"/>
               </a:ext>
             </a:extLst>
           </p:cNvPr>
@@ -5542,7 +5613,7 @@
           <p:cNvPr id="4" name="">
             <a:extLst xmlns:a="http://schemas.openxmlformats.org/drawingml/2006/main">
               <a:ext uri="{FF2B5EF4-FFF2-40B4-BE49-F238E27FC236}">
-                <a16:creationId xmlns:a16="http://schemas.microsoft.com/office/drawing/2014/main" id="{61D4E8BD-0E1E-4B82-9F91-66A1C838E70D}"/>
+                <a16:creationId xmlns:a16="http://schemas.microsoft.com/office/drawing/2014/main" id="{C5472F7B-EE68-43F2-9C4A-12671FD4EA5F}"/>
               </a:ext>
             </a:extLst>
           </p:cNvPr>
@@ -5698,7 +5769,7 @@
           <p:cNvPr id="5" name="">
             <a:extLst xmlns:a="http://schemas.openxmlformats.org/drawingml/2006/main">
               <a:ext uri="{FF2B5EF4-FFF2-40B4-BE49-F238E27FC236}">
-                <a16:creationId xmlns:a16="http://schemas.microsoft.com/office/drawing/2014/main" id="{101A6C7C-3AF2-4078-B17A-0D690648B129}"/>
+                <a16:creationId xmlns:a16="http://schemas.microsoft.com/office/drawing/2014/main" id="{043ED1CB-A6B3-4138-A38A-BA5DA61F1A60}"/>
               </a:ext>
             </a:extLst>
           </p:cNvPr>
@@ -5854,7 +5925,7 @@
           <p:cNvPr id="6" name="">
             <a:extLst xmlns:a="http://schemas.openxmlformats.org/drawingml/2006/main">
               <a:ext uri="{FF2B5EF4-FFF2-40B4-BE49-F238E27FC236}">
-                <a16:creationId xmlns:a16="http://schemas.microsoft.com/office/drawing/2014/main" id="{08143B64-D9C2-4E4D-9182-5011D3F9680E}"/>
+                <a16:creationId xmlns:a16="http://schemas.microsoft.com/office/drawing/2014/main" id="{22AAB623-79C1-4553-BFFD-9C84ED3A1AC6}"/>
               </a:ext>
             </a:extLst>
           </p:cNvPr>
@@ -6008,7 +6079,7 @@
     </p:spTree>
     <p:extLst>
       <p:ext uri="{BB962C8B-B14F-4D97-AF65-F5344CB8AC3E}">
-        <p14:creationId xmlns:p14="http://schemas.microsoft.com/office/powerpoint/2010/main" val="852272427"/>
+        <p14:creationId xmlns:p14="http://schemas.microsoft.com/office/powerpoint/2010/main" val="1305109133"/>
       </p:ext>
     </p:extLst>
   </p:cSld>
@@ -6039,7 +6110,7 @@
           <p:cNvPr id="5" name="">
             <a:extLst xmlns:a="http://schemas.openxmlformats.org/drawingml/2006/main">
               <a:ext uri="{FF2B5EF4-FFF2-40B4-BE49-F238E27FC236}">
-                <a16:creationId xmlns:a16="http://schemas.microsoft.com/office/drawing/2014/main" id="{10C9CF7C-7C5D-419A-A8E5-E8180DE323F9}"/>
+                <a16:creationId xmlns:a16="http://schemas.microsoft.com/office/drawing/2014/main" id="{BC973125-ABB8-4635-BB71-DAD1FAF00C03}"/>
               </a:ext>
             </a:extLst>
           </p:cNvPr>
@@ -6195,7 +6266,7 @@
           <p:cNvPr id="2" name="">
             <a:extLst xmlns:a="http://schemas.openxmlformats.org/drawingml/2006/main">
               <a:ext uri="{FF2B5EF4-FFF2-40B4-BE49-F238E27FC236}">
-                <a16:creationId xmlns:a16="http://schemas.microsoft.com/office/drawing/2014/main" id="{EC6B1FCD-F58D-4028-9C13-2DD8ECE2A893}"/>
+                <a16:creationId xmlns:a16="http://schemas.microsoft.com/office/drawing/2014/main" id="{F80E3B4C-9E4C-43AA-9DFB-8C84D1F5ADD1}"/>
               </a:ext>
             </a:extLst>
           </p:cNvPr>
@@ -6351,7 +6422,7 @@
           <p:cNvPr id="3" name="">
             <a:extLst xmlns:a="http://schemas.openxmlformats.org/drawingml/2006/main">
               <a:ext uri="{FF2B5EF4-FFF2-40B4-BE49-F238E27FC236}">
-                <a16:creationId xmlns:a16="http://schemas.microsoft.com/office/drawing/2014/main" id="{25A8D4B5-465B-41DA-950F-EE0D52DB3130}"/>
+                <a16:creationId xmlns:a16="http://schemas.microsoft.com/office/drawing/2014/main" id="{22092E1E-BDA4-4C7F-9AAB-6AD7A24850AF}"/>
               </a:ext>
             </a:extLst>
           </p:cNvPr>
@@ -7292,7 +7363,7 @@
           <p:cNvPr id="4" name="">
             <a:extLst xmlns:a="http://schemas.openxmlformats.org/drawingml/2006/main">
               <a:ext uri="{FF2B5EF4-FFF2-40B4-BE49-F238E27FC236}">
-                <a16:creationId xmlns:a16="http://schemas.microsoft.com/office/drawing/2014/main" id="{0885CD1B-6673-4EE4-9D9C-1DDFAC3514F8}"/>
+                <a16:creationId xmlns:a16="http://schemas.microsoft.com/office/drawing/2014/main" id="{D58C9996-F0E1-4877-8D56-07D6153A47AA}"/>
               </a:ext>
             </a:extLst>
           </p:cNvPr>
@@ -7446,7 +7517,7 @@
     </p:spTree>
     <p:extLst>
       <p:ext uri="{BB962C8B-B14F-4D97-AF65-F5344CB8AC3E}">
-        <p14:creationId xmlns:p14="http://schemas.microsoft.com/office/powerpoint/2010/main" val="1848720890"/>
+        <p14:creationId xmlns:p14="http://schemas.microsoft.com/office/powerpoint/2010/main" val="1978412996"/>
       </p:ext>
     </p:extLst>
   </p:cSld>
@@ -7477,7 +7548,7 @@
           <p:cNvPr id="5" name="">
             <a:extLst xmlns:a="http://schemas.openxmlformats.org/drawingml/2006/main">
               <a:ext uri="{FF2B5EF4-FFF2-40B4-BE49-F238E27FC236}">
-                <a16:creationId xmlns:a16="http://schemas.microsoft.com/office/drawing/2014/main" id="{916C77D4-73D0-4B90-88D4-1949CF6DA371}"/>
+                <a16:creationId xmlns:a16="http://schemas.microsoft.com/office/drawing/2014/main" id="{C40B0E71-6785-4455-8A0C-059C64494FED}"/>
               </a:ext>
             </a:extLst>
           </p:cNvPr>
@@ -7633,7 +7704,7 @@
           <p:cNvPr id="2" name="">
             <a:extLst xmlns:a="http://schemas.openxmlformats.org/drawingml/2006/main">
               <a:ext uri="{FF2B5EF4-FFF2-40B4-BE49-F238E27FC236}">
-                <a16:creationId xmlns:a16="http://schemas.microsoft.com/office/drawing/2014/main" id="{B4002263-A27E-4C6B-86B9-BDB7CAFA29D4}"/>
+                <a16:creationId xmlns:a16="http://schemas.microsoft.com/office/drawing/2014/main" id="{8A1AEA91-C76E-4BC9-BB84-C8B72A340583}"/>
               </a:ext>
             </a:extLst>
           </p:cNvPr>
@@ -7789,7 +7860,7 @@
           <p:cNvPr id="3" name="">
             <a:extLst xmlns:a="http://schemas.openxmlformats.org/drawingml/2006/main">
               <a:ext uri="{FF2B5EF4-FFF2-40B4-BE49-F238E27FC236}">
-                <a16:creationId xmlns:a16="http://schemas.microsoft.com/office/drawing/2014/main" id="{4361BC88-FFB8-4202-AEB7-F08F1245D49D}"/>
+                <a16:creationId xmlns:a16="http://schemas.microsoft.com/office/drawing/2014/main" id="{F5965428-7486-4E37-9210-6914D34A64CA}"/>
               </a:ext>
             </a:extLst>
           </p:cNvPr>
@@ -8730,7 +8801,7 @@
           <p:cNvPr id="4" name="">
             <a:extLst xmlns:a="http://schemas.openxmlformats.org/drawingml/2006/main">
               <a:ext uri="{FF2B5EF4-FFF2-40B4-BE49-F238E27FC236}">
-                <a16:creationId xmlns:a16="http://schemas.microsoft.com/office/drawing/2014/main" id="{4991DFA8-B984-43E9-8833-04DBEB5AF4A7}"/>
+                <a16:creationId xmlns:a16="http://schemas.microsoft.com/office/drawing/2014/main" id="{78BE75DC-070D-4DEE-9762-C37C45AD5FA6}"/>
               </a:ext>
             </a:extLst>
           </p:cNvPr>
@@ -8884,7 +8955,7 @@
     </p:spTree>
     <p:extLst>
       <p:ext uri="{BB962C8B-B14F-4D97-AF65-F5344CB8AC3E}">
-        <p14:creationId xmlns:p14="http://schemas.microsoft.com/office/powerpoint/2010/main" val="109122764"/>
+        <p14:creationId xmlns:p14="http://schemas.microsoft.com/office/powerpoint/2010/main" val="1272832450"/>
       </p:ext>
     </p:extLst>
   </p:cSld>
@@ -8915,7 +8986,7 @@
           <p:cNvPr id="5" name="">
             <a:extLst xmlns:a="http://schemas.openxmlformats.org/drawingml/2006/main">
               <a:ext uri="{FF2B5EF4-FFF2-40B4-BE49-F238E27FC236}">
-                <a16:creationId xmlns:a16="http://schemas.microsoft.com/office/drawing/2014/main" id="{ACAD1545-786B-4CEA-8A00-FA15DCE25A12}"/>
+                <a16:creationId xmlns:a16="http://schemas.microsoft.com/office/drawing/2014/main" id="{F302EAA6-1470-4696-B1AD-A6C50956E93C}"/>
               </a:ext>
             </a:extLst>
           </p:cNvPr>
@@ -9071,7 +9142,7 @@
           <p:cNvPr id="2" name="">
             <a:extLst xmlns:a="http://schemas.openxmlformats.org/drawingml/2006/main">
               <a:ext uri="{FF2B5EF4-FFF2-40B4-BE49-F238E27FC236}">
-                <a16:creationId xmlns:a16="http://schemas.microsoft.com/office/drawing/2014/main" id="{00B17499-4F0E-44E8-873C-535EF2AFCF22}"/>
+                <a16:creationId xmlns:a16="http://schemas.microsoft.com/office/drawing/2014/main" id="{031EB525-0061-452D-BD6F-6FDBAC6545E7}"/>
               </a:ext>
             </a:extLst>
           </p:cNvPr>
@@ -9227,7 +9298,7 @@
           <p:cNvPr id="3" name="">
             <a:extLst xmlns:a="http://schemas.openxmlformats.org/drawingml/2006/main">
               <a:ext uri="{FF2B5EF4-FFF2-40B4-BE49-F238E27FC236}">
-                <a16:creationId xmlns:a16="http://schemas.microsoft.com/office/drawing/2014/main" id="{47CDB106-5DF9-48E1-B14B-B8CC7E1E823B}"/>
+                <a16:creationId xmlns:a16="http://schemas.microsoft.com/office/drawing/2014/main" id="{B91418B7-7974-46F3-ACDC-D9B4CEDDEA53}"/>
               </a:ext>
             </a:extLst>
           </p:cNvPr>
@@ -10168,7 +10239,7 @@
           <p:cNvPr id="4" name="">
             <a:extLst xmlns:a="http://schemas.openxmlformats.org/drawingml/2006/main">
               <a:ext uri="{FF2B5EF4-FFF2-40B4-BE49-F238E27FC236}">
-                <a16:creationId xmlns:a16="http://schemas.microsoft.com/office/drawing/2014/main" id="{73BE4E61-AAF1-4239-A367-B55066D781AD}"/>
+                <a16:creationId xmlns:a16="http://schemas.microsoft.com/office/drawing/2014/main" id="{00A4ECF4-45F9-434D-ADE4-72EDB26BD8B8}"/>
               </a:ext>
             </a:extLst>
           </p:cNvPr>
@@ -10322,7 +10393,7 @@
     </p:spTree>
     <p:extLst>
       <p:ext uri="{BB962C8B-B14F-4D97-AF65-F5344CB8AC3E}">
-        <p14:creationId xmlns:p14="http://schemas.microsoft.com/office/powerpoint/2010/main" val="1521844835"/>
+        <p14:creationId xmlns:p14="http://schemas.microsoft.com/office/powerpoint/2010/main" val="1254686697"/>
       </p:ext>
     </p:extLst>
   </p:cSld>
@@ -10353,7 +10424,7 @@
           <p:cNvPr id="8" name="">
             <a:extLst xmlns:a="http://schemas.openxmlformats.org/drawingml/2006/main">
               <a:ext uri="{FF2B5EF4-FFF2-40B4-BE49-F238E27FC236}">
-                <a16:creationId xmlns:a16="http://schemas.microsoft.com/office/drawing/2014/main" id="{0726193A-5666-4872-885F-BCD4FDFCADA3}"/>
+                <a16:creationId xmlns:a16="http://schemas.microsoft.com/office/drawing/2014/main" id="{9C5DC096-28C5-4A91-B7E4-22BC0F18556A}"/>
               </a:ext>
             </a:extLst>
           </p:cNvPr>
@@ -10509,7 +10580,7 @@
           <p:cNvPr id="2" name="">
             <a:extLst xmlns:a="http://schemas.openxmlformats.org/drawingml/2006/main">
               <a:ext uri="{FF2B5EF4-FFF2-40B4-BE49-F238E27FC236}">
-                <a16:creationId xmlns:a16="http://schemas.microsoft.com/office/drawing/2014/main" id="{44040A97-F57A-4E8D-B7A4-B27DFB26FDDB}"/>
+                <a16:creationId xmlns:a16="http://schemas.microsoft.com/office/drawing/2014/main" id="{29637B2A-3D41-48B0-A5B2-07A07F9CAEA2}"/>
               </a:ext>
             </a:extLst>
           </p:cNvPr>
@@ -10665,7 +10736,7 @@
           <p:cNvPr id="3" name="">
             <a:extLst xmlns:a="http://schemas.openxmlformats.org/drawingml/2006/main">
               <a:ext uri="{FF2B5EF4-FFF2-40B4-BE49-F238E27FC236}">
-                <a16:creationId xmlns:a16="http://schemas.microsoft.com/office/drawing/2014/main" id="{091837EF-E939-4DC2-9D4D-42FE69EF5B61}"/>
+                <a16:creationId xmlns:a16="http://schemas.microsoft.com/office/drawing/2014/main" id="{5506A829-27E9-46A1-92BB-D7317A52FEE3}"/>
               </a:ext>
             </a:extLst>
           </p:cNvPr>
@@ -10821,7 +10892,7 @@
           <p:cNvPr id="4" name="">
             <a:extLst xmlns:a="http://schemas.openxmlformats.org/drawingml/2006/main">
               <a:ext uri="{FF2B5EF4-FFF2-40B4-BE49-F238E27FC236}">
-                <a16:creationId xmlns:a16="http://schemas.microsoft.com/office/drawing/2014/main" id="{844785B1-C09E-4067-9635-13F3D3EC931F}"/>
+                <a16:creationId xmlns:a16="http://schemas.microsoft.com/office/drawing/2014/main" id="{F580300C-15D6-4523-A0B4-01BCC1C43227}"/>
               </a:ext>
             </a:extLst>
           </p:cNvPr>
@@ -10977,7 +11048,7 @@
           <p:cNvPr id="5" name="">
             <a:extLst xmlns:a="http://schemas.openxmlformats.org/drawingml/2006/main">
               <a:ext uri="{FF2B5EF4-FFF2-40B4-BE49-F238E27FC236}">
-                <a16:creationId xmlns:a16="http://schemas.microsoft.com/office/drawing/2014/main" id="{B0B30BBE-C298-4C45-B326-547E7B866608}"/>
+                <a16:creationId xmlns:a16="http://schemas.microsoft.com/office/drawing/2014/main" id="{F3E2B553-C209-44E1-B885-B72973F9D355}"/>
               </a:ext>
             </a:extLst>
           </p:cNvPr>
@@ -11133,7 +11204,7 @@
           <p:cNvPr id="6" name="">
             <a:extLst xmlns:a="http://schemas.openxmlformats.org/drawingml/2006/main">
               <a:ext uri="{FF2B5EF4-FFF2-40B4-BE49-F238E27FC236}">
-                <a16:creationId xmlns:a16="http://schemas.microsoft.com/office/drawing/2014/main" id="{ED3C9387-1DB5-451A-A214-0ED8779A3C22}"/>
+                <a16:creationId xmlns:a16="http://schemas.microsoft.com/office/drawing/2014/main" id="{8A3E2A47-DEDA-4642-8241-1D1AB25841BA}"/>
               </a:ext>
             </a:extLst>
           </p:cNvPr>
@@ -11289,7 +11360,7 @@
           <p:cNvPr id="7" name="">
             <a:extLst xmlns:a="http://schemas.openxmlformats.org/drawingml/2006/main">
               <a:ext uri="{FF2B5EF4-FFF2-40B4-BE49-F238E27FC236}">
-                <a16:creationId xmlns:a16="http://schemas.microsoft.com/office/drawing/2014/main" id="{55CA1F82-DCF6-4A6C-83B9-1A450018B7DF}"/>
+                <a16:creationId xmlns:a16="http://schemas.microsoft.com/office/drawing/2014/main" id="{8C4C1DBA-3C22-4111-A51A-B191E83B33A2}"/>
               </a:ext>
             </a:extLst>
           </p:cNvPr>
@@ -11443,7 +11514,7 @@
     </p:spTree>
     <p:extLst>
       <p:ext uri="{BB962C8B-B14F-4D97-AF65-F5344CB8AC3E}">
-        <p14:creationId xmlns:p14="http://schemas.microsoft.com/office/powerpoint/2010/main" val="2121143619"/>
+        <p14:creationId xmlns:p14="http://schemas.microsoft.com/office/powerpoint/2010/main" val="388202284"/>
       </p:ext>
     </p:extLst>
   </p:cSld>
@@ -11474,7 +11545,7 @@
           <p:cNvPr id="8" name="">
             <a:extLst xmlns:a="http://schemas.openxmlformats.org/drawingml/2006/main">
               <a:ext uri="{FF2B5EF4-FFF2-40B4-BE49-F238E27FC236}">
-                <a16:creationId xmlns:a16="http://schemas.microsoft.com/office/drawing/2014/main" id="{9298082A-7E0C-42DB-8AF5-579BE9CAA02A}"/>
+                <a16:creationId xmlns:a16="http://schemas.microsoft.com/office/drawing/2014/main" id="{7277A4D5-FA60-4095-950F-559473A50745}"/>
               </a:ext>
             </a:extLst>
           </p:cNvPr>
@@ -11630,7 +11701,7 @@
           <p:cNvPr id="2" name="">
             <a:extLst xmlns:a="http://schemas.openxmlformats.org/drawingml/2006/main">
               <a:ext uri="{FF2B5EF4-FFF2-40B4-BE49-F238E27FC236}">
-                <a16:creationId xmlns:a16="http://schemas.microsoft.com/office/drawing/2014/main" id="{D584683A-841E-471C-9FCD-CBEA43503B6C}"/>
+                <a16:creationId xmlns:a16="http://schemas.microsoft.com/office/drawing/2014/main" id="{C3F592F1-9BAB-4C77-871D-07412F9BB6BE}"/>
               </a:ext>
             </a:extLst>
           </p:cNvPr>
@@ -11786,7 +11857,7 @@
           <p:cNvPr id="3" name="">
             <a:extLst xmlns:a="http://schemas.openxmlformats.org/drawingml/2006/main">
               <a:ext uri="{FF2B5EF4-FFF2-40B4-BE49-F238E27FC236}">
-                <a16:creationId xmlns:a16="http://schemas.microsoft.com/office/drawing/2014/main" id="{6DDDBFB1-562B-4374-B084-448C82A96D90}"/>
+                <a16:creationId xmlns:a16="http://schemas.microsoft.com/office/drawing/2014/main" id="{CF5677D4-C285-48D8-95F2-E0688C7B1991}"/>
               </a:ext>
             </a:extLst>
           </p:cNvPr>
@@ -11942,7 +12013,7 @@
           <p:cNvPr id="4" name="">
             <a:extLst xmlns:a="http://schemas.openxmlformats.org/drawingml/2006/main">
               <a:ext uri="{FF2B5EF4-FFF2-40B4-BE49-F238E27FC236}">
-                <a16:creationId xmlns:a16="http://schemas.microsoft.com/office/drawing/2014/main" id="{5076C298-F0C2-429C-A4CB-D5C0357CFAC0}"/>
+                <a16:creationId xmlns:a16="http://schemas.microsoft.com/office/drawing/2014/main" id="{C7332D6F-9B64-4B1D-BE4D-E78D0AE15348}"/>
               </a:ext>
             </a:extLst>
           </p:cNvPr>
@@ -12098,7 +12169,7 @@
           <p:cNvPr id="5" name="">
             <a:extLst xmlns:a="http://schemas.openxmlformats.org/drawingml/2006/main">
               <a:ext uri="{FF2B5EF4-FFF2-40B4-BE49-F238E27FC236}">
-                <a16:creationId xmlns:a16="http://schemas.microsoft.com/office/drawing/2014/main" id="{DA658915-BF31-47CE-A7DC-5697590199D9}"/>
+                <a16:creationId xmlns:a16="http://schemas.microsoft.com/office/drawing/2014/main" id="{86A49A86-A8B5-4E06-9700-C1B3BD6BC403}"/>
               </a:ext>
             </a:extLst>
           </p:cNvPr>
@@ -12254,7 +12325,7 @@
           <p:cNvPr id="6" name="">
             <a:extLst xmlns:a="http://schemas.openxmlformats.org/drawingml/2006/main">
               <a:ext uri="{FF2B5EF4-FFF2-40B4-BE49-F238E27FC236}">
-                <a16:creationId xmlns:a16="http://schemas.microsoft.com/office/drawing/2014/main" id="{4C5DEA57-1FC8-46F4-9532-4A1BCBF6D371}"/>
+                <a16:creationId xmlns:a16="http://schemas.microsoft.com/office/drawing/2014/main" id="{5AF6D332-8D6B-46BF-851C-7ECB3A980E01}"/>
               </a:ext>
             </a:extLst>
           </p:cNvPr>
@@ -12410,7 +12481,7 @@
           <p:cNvPr id="7" name="">
             <a:extLst xmlns:a="http://schemas.openxmlformats.org/drawingml/2006/main">
               <a:ext uri="{FF2B5EF4-FFF2-40B4-BE49-F238E27FC236}">
-                <a16:creationId xmlns:a16="http://schemas.microsoft.com/office/drawing/2014/main" id="{8EF5C538-4D6B-49ED-A585-7A4C550C191D}"/>
+                <a16:creationId xmlns:a16="http://schemas.microsoft.com/office/drawing/2014/main" id="{DC87410C-D179-4361-8E01-DD3106EC328F}"/>
               </a:ext>
             </a:extLst>
           </p:cNvPr>
@@ -12564,7 +12635,7 @@
     </p:spTree>
     <p:extLst>
       <p:ext uri="{BB962C8B-B14F-4D97-AF65-F5344CB8AC3E}">
-        <p14:creationId xmlns:p14="http://schemas.microsoft.com/office/powerpoint/2010/main" val="1887289768"/>
+        <p14:creationId xmlns:p14="http://schemas.microsoft.com/office/powerpoint/2010/main" val="943383499"/>
       </p:ext>
     </p:extLst>
   </p:cSld>
@@ -12595,7 +12666,7 @@
           <p:cNvPr id="8" name="">
             <a:extLst xmlns:a="http://schemas.openxmlformats.org/drawingml/2006/main">
               <a:ext uri="{FF2B5EF4-FFF2-40B4-BE49-F238E27FC236}">
-                <a16:creationId xmlns:a16="http://schemas.microsoft.com/office/drawing/2014/main" id="{43B85CEA-CDD8-471D-82BC-1E3ABF6D7703}"/>
+                <a16:creationId xmlns:a16="http://schemas.microsoft.com/office/drawing/2014/main" id="{E37121E2-0A1B-4B73-927D-4F268D8F7E0B}"/>
               </a:ext>
             </a:extLst>
           </p:cNvPr>
@@ -12751,7 +12822,7 @@
           <p:cNvPr id="2" name="">
             <a:extLst xmlns:a="http://schemas.openxmlformats.org/drawingml/2006/main">
               <a:ext uri="{FF2B5EF4-FFF2-40B4-BE49-F238E27FC236}">
-                <a16:creationId xmlns:a16="http://schemas.microsoft.com/office/drawing/2014/main" id="{05C05276-1B8F-40D2-A0D0-1F212EB7C17E}"/>
+                <a16:creationId xmlns:a16="http://schemas.microsoft.com/office/drawing/2014/main" id="{11820F03-4BD6-48E3-81AF-19E521A14FA6}"/>
               </a:ext>
             </a:extLst>
           </p:cNvPr>
@@ -12907,7 +12978,7 @@
           <p:cNvPr id="3" name="">
             <a:extLst xmlns:a="http://schemas.openxmlformats.org/drawingml/2006/main">
               <a:ext uri="{FF2B5EF4-FFF2-40B4-BE49-F238E27FC236}">
-                <a16:creationId xmlns:a16="http://schemas.microsoft.com/office/drawing/2014/main" id="{0D4B24A5-D972-408D-BDB8-2D663003CA4F}"/>
+                <a16:creationId xmlns:a16="http://schemas.microsoft.com/office/drawing/2014/main" id="{AEC11DB4-C026-4EF7-8055-B5C8D8859D19}"/>
               </a:ext>
             </a:extLst>
           </p:cNvPr>
@@ -13063,7 +13134,7 @@
           <p:cNvPr id="4" name="">
             <a:extLst xmlns:a="http://schemas.openxmlformats.org/drawingml/2006/main">
               <a:ext uri="{FF2B5EF4-FFF2-40B4-BE49-F238E27FC236}">
-                <a16:creationId xmlns:a16="http://schemas.microsoft.com/office/drawing/2014/main" id="{47CB960F-E400-4EB3-BA2A-01674FE85870}"/>
+                <a16:creationId xmlns:a16="http://schemas.microsoft.com/office/drawing/2014/main" id="{303854ED-631D-4EE9-8F73-D0EEB9A9F485}"/>
               </a:ext>
             </a:extLst>
           </p:cNvPr>
@@ -13219,7 +13290,7 @@
           <p:cNvPr id="5" name="">
             <a:extLst xmlns:a="http://schemas.openxmlformats.org/drawingml/2006/main">
               <a:ext uri="{FF2B5EF4-FFF2-40B4-BE49-F238E27FC236}">
-                <a16:creationId xmlns:a16="http://schemas.microsoft.com/office/drawing/2014/main" id="{0A70C31D-DD86-4566-A74D-C1EE2653D5F5}"/>
+                <a16:creationId xmlns:a16="http://schemas.microsoft.com/office/drawing/2014/main" id="{0D688B85-29CB-44BC-9B36-995A0C00B36A}"/>
               </a:ext>
             </a:extLst>
           </p:cNvPr>
@@ -13375,7 +13446,7 @@
           <p:cNvPr id="6" name="">
             <a:extLst xmlns:a="http://schemas.openxmlformats.org/drawingml/2006/main">
               <a:ext uri="{FF2B5EF4-FFF2-40B4-BE49-F238E27FC236}">
-                <a16:creationId xmlns:a16="http://schemas.microsoft.com/office/drawing/2014/main" id="{A9E4C8EE-63C6-494F-8E95-527D9E4B060E}"/>
+                <a16:creationId xmlns:a16="http://schemas.microsoft.com/office/drawing/2014/main" id="{236EAE6C-004E-4ED4-A0AF-EDA46A5D7FA0}"/>
               </a:ext>
             </a:extLst>
           </p:cNvPr>
@@ -13531,7 +13602,7 @@
           <p:cNvPr id="7" name="">
             <a:extLst xmlns:a="http://schemas.openxmlformats.org/drawingml/2006/main">
               <a:ext uri="{FF2B5EF4-FFF2-40B4-BE49-F238E27FC236}">
-                <a16:creationId xmlns:a16="http://schemas.microsoft.com/office/drawing/2014/main" id="{C052C863-1CB4-4F5F-BFF0-7AF2072DB23C}"/>
+                <a16:creationId xmlns:a16="http://schemas.microsoft.com/office/drawing/2014/main" id="{72E7FB4E-44BC-4D56-ABC5-A6C9276E8517}"/>
               </a:ext>
             </a:extLst>
           </p:cNvPr>
@@ -13685,7 +13756,7 @@
     </p:spTree>
     <p:extLst>
       <p:ext uri="{BB962C8B-B14F-4D97-AF65-F5344CB8AC3E}">
-        <p14:creationId xmlns:p14="http://schemas.microsoft.com/office/powerpoint/2010/main" val="1679465683"/>
+        <p14:creationId xmlns:p14="http://schemas.microsoft.com/office/powerpoint/2010/main" val="836043325"/>
       </p:ext>
     </p:extLst>
   </p:cSld>
@@ -13716,7 +13787,7 @@
           <p:cNvPr id="8" name="">
             <a:extLst xmlns:a="http://schemas.openxmlformats.org/drawingml/2006/main">
               <a:ext uri="{FF2B5EF4-FFF2-40B4-BE49-F238E27FC236}">
-                <a16:creationId xmlns:a16="http://schemas.microsoft.com/office/drawing/2014/main" id="{5F589291-E4D2-43EE-9FB2-C3211734573D}"/>
+                <a16:creationId xmlns:a16="http://schemas.microsoft.com/office/drawing/2014/main" id="{E279EC44-20B7-498B-9DA7-FDF851CAC5CC}"/>
               </a:ext>
             </a:extLst>
           </p:cNvPr>
@@ -13872,7 +13943,7 @@
           <p:cNvPr id="2" name="">
             <a:extLst xmlns:a="http://schemas.openxmlformats.org/drawingml/2006/main">
               <a:ext uri="{FF2B5EF4-FFF2-40B4-BE49-F238E27FC236}">
-                <a16:creationId xmlns:a16="http://schemas.microsoft.com/office/drawing/2014/main" id="{CF6668FC-B49C-44C5-AE9C-E88F083772F4}"/>
+                <a16:creationId xmlns:a16="http://schemas.microsoft.com/office/drawing/2014/main" id="{15F17946-E869-4495-AFF4-C85A84F1B9E8}"/>
               </a:ext>
             </a:extLst>
           </p:cNvPr>
@@ -14028,7 +14099,7 @@
           <p:cNvPr id="3" name="">
             <a:extLst xmlns:a="http://schemas.openxmlformats.org/drawingml/2006/main">
               <a:ext uri="{FF2B5EF4-FFF2-40B4-BE49-F238E27FC236}">
-                <a16:creationId xmlns:a16="http://schemas.microsoft.com/office/drawing/2014/main" id="{05A16212-DD2B-4362-9E41-9B64F161684E}"/>
+                <a16:creationId xmlns:a16="http://schemas.microsoft.com/office/drawing/2014/main" id="{58F4C1DA-980A-4A0F-8EAE-D652A5CB1086}"/>
               </a:ext>
             </a:extLst>
           </p:cNvPr>
@@ -14184,7 +14255,7 @@
           <p:cNvPr id="4" name="">
             <a:extLst xmlns:a="http://schemas.openxmlformats.org/drawingml/2006/main">
               <a:ext uri="{FF2B5EF4-FFF2-40B4-BE49-F238E27FC236}">
-                <a16:creationId xmlns:a16="http://schemas.microsoft.com/office/drawing/2014/main" id="{343DB384-D20F-4302-B19E-453B6FA540FB}"/>
+                <a16:creationId xmlns:a16="http://schemas.microsoft.com/office/drawing/2014/main" id="{1A679AFA-8674-4CFB-BFB3-C2A3AB7ADC39}"/>
               </a:ext>
             </a:extLst>
           </p:cNvPr>
@@ -14340,7 +14411,7 @@
           <p:cNvPr id="5" name="">
             <a:extLst xmlns:a="http://schemas.openxmlformats.org/drawingml/2006/main">
               <a:ext uri="{FF2B5EF4-FFF2-40B4-BE49-F238E27FC236}">
-                <a16:creationId xmlns:a16="http://schemas.microsoft.com/office/drawing/2014/main" id="{875501FF-9012-494D-819C-ED019FFC3B27}"/>
+                <a16:creationId xmlns:a16="http://schemas.microsoft.com/office/drawing/2014/main" id="{B4C7631D-21BE-4F02-AA0F-71C0BF0D2773}"/>
               </a:ext>
             </a:extLst>
           </p:cNvPr>
@@ -14496,7 +14567,7 @@
           <p:cNvPr id="6" name="">
             <a:extLst xmlns:a="http://schemas.openxmlformats.org/drawingml/2006/main">
               <a:ext uri="{FF2B5EF4-FFF2-40B4-BE49-F238E27FC236}">
-                <a16:creationId xmlns:a16="http://schemas.microsoft.com/office/drawing/2014/main" id="{1ED1719E-F163-4F19-8FA1-626DC125C0B6}"/>
+                <a16:creationId xmlns:a16="http://schemas.microsoft.com/office/drawing/2014/main" id="{970B8C94-0FD3-46E3-A48C-ECF029D4466C}"/>
               </a:ext>
             </a:extLst>
           </p:cNvPr>
@@ -14652,7 +14723,7 @@
           <p:cNvPr id="7" name="">
             <a:extLst xmlns:a="http://schemas.openxmlformats.org/drawingml/2006/main">
               <a:ext uri="{FF2B5EF4-FFF2-40B4-BE49-F238E27FC236}">
-                <a16:creationId xmlns:a16="http://schemas.microsoft.com/office/drawing/2014/main" id="{E9374BA9-28EE-4EDD-BEC7-7F130C00CD8A}"/>
+                <a16:creationId xmlns:a16="http://schemas.microsoft.com/office/drawing/2014/main" id="{47690DEB-F8E5-4760-BB94-4D1692D55ACF}"/>
               </a:ext>
             </a:extLst>
           </p:cNvPr>
@@ -14806,7 +14877,7 @@
     </p:spTree>
     <p:extLst>
       <p:ext uri="{BB962C8B-B14F-4D97-AF65-F5344CB8AC3E}">
-        <p14:creationId xmlns:p14="http://schemas.microsoft.com/office/powerpoint/2010/main" val="1010455688"/>
+        <p14:creationId xmlns:p14="http://schemas.microsoft.com/office/powerpoint/2010/main" val="1943467221"/>
       </p:ext>
     </p:extLst>
   </p:cSld>
@@ -14837,7 +14908,7 @@
           <p:cNvPr id="8" name="">
             <a:extLst xmlns:a="http://schemas.openxmlformats.org/drawingml/2006/main">
               <a:ext uri="{FF2B5EF4-FFF2-40B4-BE49-F238E27FC236}">
-                <a16:creationId xmlns:a16="http://schemas.microsoft.com/office/drawing/2014/main" id="{994B4A38-9E05-413F-9BDC-C80F72D984EE}"/>
+                <a16:creationId xmlns:a16="http://schemas.microsoft.com/office/drawing/2014/main" id="{1FE81081-EE1B-45D5-9062-99BF21204219}"/>
               </a:ext>
             </a:extLst>
           </p:cNvPr>
@@ -14993,7 +15064,7 @@
           <p:cNvPr id="2" name="">
             <a:extLst xmlns:a="http://schemas.openxmlformats.org/drawingml/2006/main">
               <a:ext uri="{FF2B5EF4-FFF2-40B4-BE49-F238E27FC236}">
-                <a16:creationId xmlns:a16="http://schemas.microsoft.com/office/drawing/2014/main" id="{FC6273F6-D9C9-4ABA-A7E3-A8F70AE4507E}"/>
+                <a16:creationId xmlns:a16="http://schemas.microsoft.com/office/drawing/2014/main" id="{868A1F33-D19A-4440-959D-EA775C3E3ADC}"/>
               </a:ext>
             </a:extLst>
           </p:cNvPr>
@@ -15149,7 +15220,7 @@
           <p:cNvPr id="3" name="">
             <a:extLst xmlns:a="http://schemas.openxmlformats.org/drawingml/2006/main">
               <a:ext uri="{FF2B5EF4-FFF2-40B4-BE49-F238E27FC236}">
-                <a16:creationId xmlns:a16="http://schemas.microsoft.com/office/drawing/2014/main" id="{7DFDECB0-E476-4D71-B041-5A4DA371A9DD}"/>
+                <a16:creationId xmlns:a16="http://schemas.microsoft.com/office/drawing/2014/main" id="{73661F2B-1747-434E-B14F-D7D9A2FCC588}"/>
               </a:ext>
             </a:extLst>
           </p:cNvPr>
@@ -15305,7 +15376,7 @@
           <p:cNvPr id="4" name="">
             <a:extLst xmlns:a="http://schemas.openxmlformats.org/drawingml/2006/main">
               <a:ext uri="{FF2B5EF4-FFF2-40B4-BE49-F238E27FC236}">
-                <a16:creationId xmlns:a16="http://schemas.microsoft.com/office/drawing/2014/main" id="{4276C7B4-E6DB-4028-AA4E-FFC603917659}"/>
+                <a16:creationId xmlns:a16="http://schemas.microsoft.com/office/drawing/2014/main" id="{5005496F-747A-4809-AAA8-87BD7D27D790}"/>
               </a:ext>
             </a:extLst>
           </p:cNvPr>
@@ -15461,7 +15532,7 @@
           <p:cNvPr id="5" name="">
             <a:extLst xmlns:a="http://schemas.openxmlformats.org/drawingml/2006/main">
               <a:ext uri="{FF2B5EF4-FFF2-40B4-BE49-F238E27FC236}">
-                <a16:creationId xmlns:a16="http://schemas.microsoft.com/office/drawing/2014/main" id="{D814B748-242C-4258-8D79-E023FE16B82B}"/>
+                <a16:creationId xmlns:a16="http://schemas.microsoft.com/office/drawing/2014/main" id="{B6AB6F58-DFBC-4137-A2E5-15509C06B09B}"/>
               </a:ext>
             </a:extLst>
           </p:cNvPr>
@@ -15617,7 +15688,7 @@
           <p:cNvPr id="6" name="">
             <a:extLst xmlns:a="http://schemas.openxmlformats.org/drawingml/2006/main">
               <a:ext uri="{FF2B5EF4-FFF2-40B4-BE49-F238E27FC236}">
-                <a16:creationId xmlns:a16="http://schemas.microsoft.com/office/drawing/2014/main" id="{55EF9FA9-E634-4B25-BEA5-F701A81288EF}"/>
+                <a16:creationId xmlns:a16="http://schemas.microsoft.com/office/drawing/2014/main" id="{A15714EC-910E-4EC6-955D-7D789FCC4A86}"/>
               </a:ext>
             </a:extLst>
           </p:cNvPr>
@@ -15773,7 +15844,7 @@
           <p:cNvPr id="7" name="">
             <a:extLst xmlns:a="http://schemas.openxmlformats.org/drawingml/2006/main">
               <a:ext uri="{FF2B5EF4-FFF2-40B4-BE49-F238E27FC236}">
-                <a16:creationId xmlns:a16="http://schemas.microsoft.com/office/drawing/2014/main" id="{1D797BA1-90B9-45E8-8061-0CBB516DD4A3}"/>
+                <a16:creationId xmlns:a16="http://schemas.microsoft.com/office/drawing/2014/main" id="{B48F9D60-A5C9-4FCE-9E26-4FB52C593C3F}"/>
               </a:ext>
             </a:extLst>
           </p:cNvPr>
@@ -15927,7 +15998,7 @@
     </p:spTree>
     <p:extLst>
       <p:ext uri="{BB962C8B-B14F-4D97-AF65-F5344CB8AC3E}">
-        <p14:creationId xmlns:p14="http://schemas.microsoft.com/office/powerpoint/2010/main" val="1968853623"/>
+        <p14:creationId xmlns:p14="http://schemas.microsoft.com/office/powerpoint/2010/main" val="1782079708"/>
       </p:ext>
     </p:extLst>
   </p:cSld>
@@ -15958,7 +16029,7 @@
           <p:cNvPr id="8" name="">
             <a:extLst xmlns:a="http://schemas.openxmlformats.org/drawingml/2006/main">
               <a:ext uri="{FF2B5EF4-FFF2-40B4-BE49-F238E27FC236}">
-                <a16:creationId xmlns:a16="http://schemas.microsoft.com/office/drawing/2014/main" id="{272320BF-F5E2-43FF-9872-33DC981B3C1F}"/>
+                <a16:creationId xmlns:a16="http://schemas.microsoft.com/office/drawing/2014/main" id="{028E2D7E-B917-4FF3-992C-4E1920407834}"/>
               </a:ext>
             </a:extLst>
           </p:cNvPr>
@@ -16114,7 +16185,7 @@
           <p:cNvPr id="2" name="">
             <a:extLst xmlns:a="http://schemas.openxmlformats.org/drawingml/2006/main">
               <a:ext uri="{FF2B5EF4-FFF2-40B4-BE49-F238E27FC236}">
-                <a16:creationId xmlns:a16="http://schemas.microsoft.com/office/drawing/2014/main" id="{2D6E85AC-4C45-406E-99FC-3BF1CC3263A3}"/>
+                <a16:creationId xmlns:a16="http://schemas.microsoft.com/office/drawing/2014/main" id="{6CAD0ABF-3362-4EB0-B57C-B4CE3973BF4C}"/>
               </a:ext>
             </a:extLst>
           </p:cNvPr>
@@ -16270,7 +16341,7 @@
           <p:cNvPr id="3" name="">
             <a:extLst xmlns:a="http://schemas.openxmlformats.org/drawingml/2006/main">
               <a:ext uri="{FF2B5EF4-FFF2-40B4-BE49-F238E27FC236}">
-                <a16:creationId xmlns:a16="http://schemas.microsoft.com/office/drawing/2014/main" id="{142ED4C5-61B1-44E0-998C-521D09ADB5C5}"/>
+                <a16:creationId xmlns:a16="http://schemas.microsoft.com/office/drawing/2014/main" id="{67EBB750-F9D5-4B2D-9DEF-CADBC5EE0E64}"/>
               </a:ext>
             </a:extLst>
           </p:cNvPr>
@@ -16426,7 +16497,7 @@
           <p:cNvPr id="4" name="">
             <a:extLst xmlns:a="http://schemas.openxmlformats.org/drawingml/2006/main">
               <a:ext uri="{FF2B5EF4-FFF2-40B4-BE49-F238E27FC236}">
-                <a16:creationId xmlns:a16="http://schemas.microsoft.com/office/drawing/2014/main" id="{0DC1BC1D-5AEF-4CE1-BA99-958392C988BF}"/>
+                <a16:creationId xmlns:a16="http://schemas.microsoft.com/office/drawing/2014/main" id="{178436DC-D2C6-4AB8-B138-5D8A7DCD955C}"/>
               </a:ext>
             </a:extLst>
           </p:cNvPr>
@@ -16582,7 +16653,7 @@
           <p:cNvPr id="5" name="">
             <a:extLst xmlns:a="http://schemas.openxmlformats.org/drawingml/2006/main">
               <a:ext uri="{FF2B5EF4-FFF2-40B4-BE49-F238E27FC236}">
-                <a16:creationId xmlns:a16="http://schemas.microsoft.com/office/drawing/2014/main" id="{B007FE7A-B105-431C-BEB6-6C2E7221D5E8}"/>
+                <a16:creationId xmlns:a16="http://schemas.microsoft.com/office/drawing/2014/main" id="{701C97E0-094A-467B-9695-0D875CF65BC1}"/>
               </a:ext>
             </a:extLst>
           </p:cNvPr>
@@ -16738,7 +16809,7 @@
           <p:cNvPr id="6" name="">
             <a:extLst xmlns:a="http://schemas.openxmlformats.org/drawingml/2006/main">
               <a:ext uri="{FF2B5EF4-FFF2-40B4-BE49-F238E27FC236}">
-                <a16:creationId xmlns:a16="http://schemas.microsoft.com/office/drawing/2014/main" id="{ADB13A57-841B-4DE1-A735-95B34FA9EB8E}"/>
+                <a16:creationId xmlns:a16="http://schemas.microsoft.com/office/drawing/2014/main" id="{A89690BC-5F40-4784-BF17-A1AC9C4DC453}"/>
               </a:ext>
             </a:extLst>
           </p:cNvPr>
@@ -16894,7 +16965,7 @@
           <p:cNvPr id="7" name="">
             <a:extLst xmlns:a="http://schemas.openxmlformats.org/drawingml/2006/main">
               <a:ext uri="{FF2B5EF4-FFF2-40B4-BE49-F238E27FC236}">
-                <a16:creationId xmlns:a16="http://schemas.microsoft.com/office/drawing/2014/main" id="{91263538-0F01-4527-8B92-B8F3B9AEF3DC}"/>
+                <a16:creationId xmlns:a16="http://schemas.microsoft.com/office/drawing/2014/main" id="{38D2CFF4-D30F-4905-A481-5A3976B3D5E6}"/>
               </a:ext>
             </a:extLst>
           </p:cNvPr>
@@ -17048,7 +17119,7 @@
     </p:spTree>
     <p:extLst>
       <p:ext uri="{BB962C8B-B14F-4D97-AF65-F5344CB8AC3E}">
-        <p14:creationId xmlns:p14="http://schemas.microsoft.com/office/powerpoint/2010/main" val="1302325257"/>
+        <p14:creationId xmlns:p14="http://schemas.microsoft.com/office/powerpoint/2010/main" val="1851121646"/>
       </p:ext>
     </p:extLst>
   </p:cSld>
@@ -17079,7 +17150,7 @@
           <p:cNvPr id="8" name="">
             <a:extLst xmlns:a="http://schemas.openxmlformats.org/drawingml/2006/main">
               <a:ext uri="{FF2B5EF4-FFF2-40B4-BE49-F238E27FC236}">
-                <a16:creationId xmlns:a16="http://schemas.microsoft.com/office/drawing/2014/main" id="{C929255A-7E3D-489B-B185-7072AC81CA75}"/>
+                <a16:creationId xmlns:a16="http://schemas.microsoft.com/office/drawing/2014/main" id="{84A44841-014B-4100-A34A-71EEA85CB5E9}"/>
               </a:ext>
             </a:extLst>
           </p:cNvPr>
@@ -17225,7 +17296,7 @@
                 <a:ea typeface="Arial"/>
                 <a:cs typeface="Arial"/>
               </a:rPr>
-              <a:t>What the clinician view shows</a:t>
+              <a:t>Frozen synthetic conformal coverage</a:t>
             </a:r>
           </a:p>
         </p:txBody>
@@ -17235,7 +17306,7 @@
           <p:cNvPr id="2" name="">
             <a:extLst xmlns:a="http://schemas.openxmlformats.org/drawingml/2006/main">
               <a:ext uri="{FF2B5EF4-FFF2-40B4-BE49-F238E27FC236}">
-                <a16:creationId xmlns:a16="http://schemas.microsoft.com/office/drawing/2014/main" id="{4041C73A-2DF1-4818-9CBD-19E91A48C3D5}"/>
+                <a16:creationId xmlns:a16="http://schemas.microsoft.com/office/drawing/2014/main" id="{F368A4F2-2815-478A-9969-73426E719441}"/>
               </a:ext>
             </a:extLst>
           </p:cNvPr>
@@ -17381,7 +17452,7 @@
                 <a:ea typeface="Arial"/>
                 <a:cs typeface="Arial"/>
               </a:rPr>
-              <a:t>Decision-support research display</a:t>
+              <a:t>Marginal classification sets and separate heuristic timing bands</a:t>
             </a:r>
           </a:p>
         </p:txBody>
@@ -17391,7 +17462,7 @@
           <p:cNvPr id="3" name="">
             <a:extLst xmlns:a="http://schemas.openxmlformats.org/drawingml/2006/main">
               <a:ext uri="{FF2B5EF4-FFF2-40B4-BE49-F238E27FC236}">
-                <a16:creationId xmlns:a16="http://schemas.microsoft.com/office/drawing/2014/main" id="{12CEDB04-A719-4C1E-99CC-FB21273250DB}"/>
+                <a16:creationId xmlns:a16="http://schemas.microsoft.com/office/drawing/2014/main" id="{43435802-F15F-4884-AF22-06B6316FA5B3}"/>
               </a:ext>
             </a:extLst>
           </p:cNvPr>
@@ -17537,7 +17608,7 @@
                 <a:ea typeface="Arial"/>
                 <a:cs typeface="Arial"/>
               </a:rPr>
-              <a:t>Fitted probability beside its own validation threshold and held-out model evidence</a:t>
+              <a:t>Day-18 Tier-2 classification-set coverage: 0.901; mean set size 1.155</a:t>
             </a:r>
           </a:p>
         </p:txBody>
@@ -17547,7 +17618,7 @@
           <p:cNvPr id="4" name="">
             <a:extLst xmlns:a="http://schemas.openxmlformats.org/drawingml/2006/main">
               <a:ext uri="{FF2B5EF4-FFF2-40B4-BE49-F238E27FC236}">
-                <a16:creationId xmlns:a16="http://schemas.microsoft.com/office/drawing/2014/main" id="{6F8080A4-D234-427A-85DF-32512F8BE6A5}"/>
+                <a16:creationId xmlns:a16="http://schemas.microsoft.com/office/drawing/2014/main" id="{E1A9E53A-11EE-40AF-8673-43900F617402}"/>
               </a:ext>
             </a:extLst>
           </p:cNvPr>
@@ -17693,7 +17764,7 @@
                 <a:ea typeface="Arial"/>
                 <a:cs typeface="Arial"/>
               </a:rPr>
-              <a:t>Exact additive feature contributions and explicit imputation</a:t>
+              <a:t>Heuristic ovulation-day band coverage: 0.056; mean width 24.000 days</a:t>
             </a:r>
           </a:p>
         </p:txBody>
@@ -17703,7 +17774,7 @@
           <p:cNvPr id="5" name="">
             <a:extLst xmlns:a="http://schemas.openxmlformats.org/drawingml/2006/main">
               <a:ext uri="{FF2B5EF4-FFF2-40B4-BE49-F238E27FC236}">
-                <a16:creationId xmlns:a16="http://schemas.microsoft.com/office/drawing/2014/main" id="{C8A798D2-092A-4914-9417-B641AA93754A}"/>
+                <a16:creationId xmlns:a16="http://schemas.microsoft.com/office/drawing/2014/main" id="{2C929222-6E7F-41B3-B658-C7E35B7ADA6F}"/>
               </a:ext>
             </a:extLst>
           </p:cNvPr>
@@ -17849,7 +17920,7 @@
                 <a:ea typeface="Arial"/>
                 <a:cs typeface="Arial"/>
               </a:rPr>
-              <a:t>Heuristic day estimate and conditional, illustrative day band</a:t>
+              <a:t>The classification-set result is near its synthetic 90% target.</a:t>
             </a:r>
           </a:p>
         </p:txBody>
@@ -17859,7 +17930,7 @@
           <p:cNvPr id="6" name="">
             <a:extLst xmlns:a="http://schemas.openxmlformats.org/drawingml/2006/main">
               <a:ext uri="{FF2B5EF4-FFF2-40B4-BE49-F238E27FC236}">
-                <a16:creationId xmlns:a16="http://schemas.microsoft.com/office/drawing/2014/main" id="{E8A4CFDF-7EC7-40B9-9504-47DC186F638C}"/>
+                <a16:creationId xmlns:a16="http://schemas.microsoft.com/office/drawing/2014/main" id="{303B2A25-CE52-44AC-8055-6DD2400ECFE8}"/>
               </a:ext>
             </a:extLst>
           </p:cNvPr>
@@ -18005,7 +18076,7 @@
                 <a:ea typeface="Arial"/>
                 <a:cs typeface="Arial"/>
               </a:rPr>
-              <a:t>Data-quality ribbon and the reason for any withholding</a:t>
+              <a:t>The day-band result is poor; do not use it as a reliable timing interval.</a:t>
             </a:r>
           </a:p>
         </p:txBody>
@@ -18015,7 +18086,7 @@
           <p:cNvPr id="7" name="">
             <a:extLst xmlns:a="http://schemas.openxmlformats.org/drawingml/2006/main">
               <a:ext uri="{FF2B5EF4-FFF2-40B4-BE49-F238E27FC236}">
-                <a16:creationId xmlns:a16="http://schemas.microsoft.com/office/drawing/2014/main" id="{1B0FBB45-0145-4D9F-B7D6-512C44148C49}"/>
+                <a16:creationId xmlns:a16="http://schemas.microsoft.com/office/drawing/2014/main" id="{3736AC3E-A2F9-4188-9D34-4F6DF4B23D8E}"/>
               </a:ext>
             </a:extLst>
           </p:cNvPr>
@@ -18169,7 +18240,7 @@
     </p:spTree>
     <p:extLst>
       <p:ext uri="{BB962C8B-B14F-4D97-AF65-F5344CB8AC3E}">
-        <p14:creationId xmlns:p14="http://schemas.microsoft.com/office/powerpoint/2010/main" val="678263841"/>
+        <p14:creationId xmlns:p14="http://schemas.microsoft.com/office/powerpoint/2010/main" val="862311277"/>
       </p:ext>
     </p:extLst>
   </p:cSld>
@@ -18200,7 +18271,7 @@
           <p:cNvPr id="7" name="">
             <a:extLst xmlns:a="http://schemas.openxmlformats.org/drawingml/2006/main">
               <a:ext uri="{FF2B5EF4-FFF2-40B4-BE49-F238E27FC236}">
-                <a16:creationId xmlns:a16="http://schemas.microsoft.com/office/drawing/2014/main" id="{D2160DB3-9EAC-498C-9A5B-A7C38CD478A8}"/>
+                <a16:creationId xmlns:a16="http://schemas.microsoft.com/office/drawing/2014/main" id="{A35BC819-A89B-45AE-B70A-D60876D60EB8}"/>
               </a:ext>
             </a:extLst>
           </p:cNvPr>
@@ -18356,7 +18427,7 @@
           <p:cNvPr id="2" name="">
             <a:extLst xmlns:a="http://schemas.openxmlformats.org/drawingml/2006/main">
               <a:ext uri="{FF2B5EF4-FFF2-40B4-BE49-F238E27FC236}">
-                <a16:creationId xmlns:a16="http://schemas.microsoft.com/office/drawing/2014/main" id="{8B4647DA-2BED-4B6A-BB65-86AC7FF7A930}"/>
+                <a16:creationId xmlns:a16="http://schemas.microsoft.com/office/drawing/2014/main" id="{A92E9375-D666-435A-8DB9-5967A8597C66}"/>
               </a:ext>
             </a:extLst>
           </p:cNvPr>
@@ -18512,7 +18583,7 @@
           <p:cNvPr id="3" name="">
             <a:extLst xmlns:a="http://schemas.openxmlformats.org/drawingml/2006/main">
               <a:ext uri="{FF2B5EF4-FFF2-40B4-BE49-F238E27FC236}">
-                <a16:creationId xmlns:a16="http://schemas.microsoft.com/office/drawing/2014/main" id="{A39F3812-356B-4958-B81F-32C2D47F94C5}"/>
+                <a16:creationId xmlns:a16="http://schemas.microsoft.com/office/drawing/2014/main" id="{4DD70A6D-390C-453F-AC47-AD99E2CA7BFB}"/>
               </a:ext>
             </a:extLst>
           </p:cNvPr>
@@ -18668,7 +18739,7 @@
           <p:cNvPr id="4" name="">
             <a:extLst xmlns:a="http://schemas.openxmlformats.org/drawingml/2006/main">
               <a:ext uri="{FF2B5EF4-FFF2-40B4-BE49-F238E27FC236}">
-                <a16:creationId xmlns:a16="http://schemas.microsoft.com/office/drawing/2014/main" id="{175A3388-4E37-45B6-8968-C892C4795640}"/>
+                <a16:creationId xmlns:a16="http://schemas.microsoft.com/office/drawing/2014/main" id="{6543C354-346D-4038-9BF7-1C4EAC4C3E9D}"/>
               </a:ext>
             </a:extLst>
           </p:cNvPr>
@@ -18824,7 +18895,7 @@
           <p:cNvPr id="5" name="">
             <a:extLst xmlns:a="http://schemas.openxmlformats.org/drawingml/2006/main">
               <a:ext uri="{FF2B5EF4-FFF2-40B4-BE49-F238E27FC236}">
-                <a16:creationId xmlns:a16="http://schemas.microsoft.com/office/drawing/2014/main" id="{63ED7FE8-91F3-4770-8A6D-2C0996EBE8DB}"/>
+                <a16:creationId xmlns:a16="http://schemas.microsoft.com/office/drawing/2014/main" id="{EA84CA15-62A3-4ACC-B2F2-09DF6B9D58D1}"/>
               </a:ext>
             </a:extLst>
           </p:cNvPr>
@@ -18980,7 +19051,7 @@
           <p:cNvPr id="6" name="">
             <a:extLst xmlns:a="http://schemas.openxmlformats.org/drawingml/2006/main">
               <a:ext uri="{FF2B5EF4-FFF2-40B4-BE49-F238E27FC236}">
-                <a16:creationId xmlns:a16="http://schemas.microsoft.com/office/drawing/2014/main" id="{3BBEACA1-21AE-49A2-B4CC-51D20ACEE791}"/>
+                <a16:creationId xmlns:a16="http://schemas.microsoft.com/office/drawing/2014/main" id="{913720A2-9879-4FB7-BC6C-9B029BA9B172}"/>
               </a:ext>
             </a:extLst>
           </p:cNvPr>
@@ -19134,7 +19205,7 @@
     </p:spTree>
     <p:extLst>
       <p:ext uri="{BB962C8B-B14F-4D97-AF65-F5344CB8AC3E}">
-        <p14:creationId xmlns:p14="http://schemas.microsoft.com/office/powerpoint/2010/main" val="457391054"/>
+        <p14:creationId xmlns:p14="http://schemas.microsoft.com/office/powerpoint/2010/main" val="1455915800"/>
       </p:ext>
     </p:extLst>
   </p:cSld>
@@ -19165,7 +19236,7 @@
           <p:cNvPr id="8" name="">
             <a:extLst xmlns:a="http://schemas.openxmlformats.org/drawingml/2006/main">
               <a:ext uri="{FF2B5EF4-FFF2-40B4-BE49-F238E27FC236}">
-                <a16:creationId xmlns:a16="http://schemas.microsoft.com/office/drawing/2014/main" id="{D38BB6FF-903B-457A-94C5-BCBEC4988B67}"/>
+                <a16:creationId xmlns:a16="http://schemas.microsoft.com/office/drawing/2014/main" id="{79FE8DA5-1A14-47BA-8D12-62C3CE5EF157}"/>
               </a:ext>
             </a:extLst>
           </p:cNvPr>
@@ -19311,7 +19382,7 @@
                 <a:ea typeface="Arial"/>
                 <a:cs typeface="Arial"/>
               </a:rPr>
-              <a:t>Guardrails live</a:t>
+              <a:t>What the clinician view shows</a:t>
             </a:r>
           </a:p>
         </p:txBody>
@@ -19321,7 +19392,7 @@
           <p:cNvPr id="2" name="">
             <a:extLst xmlns:a="http://schemas.openxmlformats.org/drawingml/2006/main">
               <a:ext uri="{FF2B5EF4-FFF2-40B4-BE49-F238E27FC236}">
-                <a16:creationId xmlns:a16="http://schemas.microsoft.com/office/drawing/2014/main" id="{C6059DD2-C547-4A89-AC5E-4533378375A6}"/>
+                <a16:creationId xmlns:a16="http://schemas.microsoft.com/office/drawing/2014/main" id="{C57C69B8-113D-4A4C-AA67-15147FE9CC17}"/>
               </a:ext>
             </a:extLst>
           </p:cNvPr>
@@ -19467,7 +19538,7 @@
                 <a:ea typeface="Arial"/>
                 <a:cs typeface="Arial"/>
               </a:rPr>
-              <a:t>Missing safety information causes abstention</a:t>
+              <a:t>Decision-support research display</a:t>
             </a:r>
           </a:p>
         </p:txBody>
@@ -19477,7 +19548,7 @@
           <p:cNvPr id="3" name="">
             <a:extLst xmlns:a="http://schemas.openxmlformats.org/drawingml/2006/main">
               <a:ext uri="{FF2B5EF4-FFF2-40B4-BE49-F238E27FC236}">
-                <a16:creationId xmlns:a16="http://schemas.microsoft.com/office/drawing/2014/main" id="{D3BCDABA-A0A2-4BD0-B141-04DF542684C5}"/>
+                <a16:creationId xmlns:a16="http://schemas.microsoft.com/office/drawing/2014/main" id="{C7F0FEB3-57E2-4381-8A72-3A6EFDAEEC9C}"/>
               </a:ext>
             </a:extLst>
           </p:cNvPr>
@@ -19623,7 +19694,7 @@
                 <a:ea typeface="Arial"/>
                 <a:cs typeface="Arial"/>
               </a:rPr>
-              <a:t>Contraception, thyroid and prolactin flags, age and pregnancy-related states</a:t>
+              <a:t>Fitted probability beside its own validation threshold and held-out model evidence</a:t>
             </a:r>
           </a:p>
         </p:txBody>
@@ -19633,7 +19704,7 @@
           <p:cNvPr id="4" name="">
             <a:extLst xmlns:a="http://schemas.openxmlformats.org/drawingml/2006/main">
               <a:ext uri="{FF2B5EF4-FFF2-40B4-BE49-F238E27FC236}">
-                <a16:creationId xmlns:a16="http://schemas.microsoft.com/office/drawing/2014/main" id="{A48A6DAB-6EDB-4C5D-AAC7-92D53EF74AED}"/>
+                <a16:creationId xmlns:a16="http://schemas.microsoft.com/office/drawing/2014/main" id="{5D14F491-F1CB-463C-9427-A3D66947DB72}"/>
               </a:ext>
             </a:extLst>
           </p:cNvPr>
@@ -19779,7 +19850,7 @@
                 <a:ea typeface="Arial"/>
                 <a:cs typeface="Arial"/>
               </a:rPr>
-              <a:t>Early post-menarche, perimenopause and insufficient observed temperature</a:t>
+              <a:t>Exact additive feature contributions and explicit imputation</a:t>
             </a:r>
           </a:p>
         </p:txBody>
@@ -19789,7 +19860,7 @@
           <p:cNvPr id="5" name="">
             <a:extLst xmlns:a="http://schemas.openxmlformats.org/drawingml/2006/main">
               <a:ext uri="{FF2B5EF4-FFF2-40B4-BE49-F238E27FC236}">
-                <a16:creationId xmlns:a16="http://schemas.microsoft.com/office/drawing/2014/main" id="{3E20453B-D53E-4190-B89F-758D7F9EC976}"/>
+                <a16:creationId xmlns:a16="http://schemas.microsoft.com/office/drawing/2014/main" id="{B6E0F31B-302F-45C8-BECF-A2BC91B749EE}"/>
               </a:ext>
             </a:extLst>
           </p:cNvPr>
@@ -19935,7 +20006,7 @@
                 <a:ea typeface="Arial"/>
                 <a:cs typeface="Arial"/>
               </a:rPr>
-              <a:t>Withholding removes personal scores, intervals, explanations, sandbox outputs and alerts</a:t>
+              <a:t>Heuristic day estimate and conditional, illustrative day band</a:t>
             </a:r>
           </a:p>
         </p:txBody>
@@ -19945,7 +20016,7 @@
           <p:cNvPr id="6" name="">
             <a:extLst xmlns:a="http://schemas.openxmlformats.org/drawingml/2006/main">
               <a:ext uri="{FF2B5EF4-FFF2-40B4-BE49-F238E27FC236}">
-                <a16:creationId xmlns:a16="http://schemas.microsoft.com/office/drawing/2014/main" id="{65F820B6-EDDE-4911-95F3-BB8B796BD3A5}"/>
+                <a16:creationId xmlns:a16="http://schemas.microsoft.com/office/drawing/2014/main" id="{7F74E939-E2CA-4110-8682-FD24C66B9614}"/>
               </a:ext>
             </a:extLst>
           </p:cNvPr>
@@ -20091,7 +20162,7 @@
                 <a:ea typeface="Arial"/>
                 <a:cs typeface="Arial"/>
               </a:rPr>
-              <a:t>The workflow is synthetic and its safety effectiveness has not been clinically evaluated</a:t>
+              <a:t>Data-quality ribbon and the reason for any withholding</a:t>
             </a:r>
           </a:p>
         </p:txBody>
@@ -20101,7 +20172,7 @@
           <p:cNvPr id="7" name="">
             <a:extLst xmlns:a="http://schemas.openxmlformats.org/drawingml/2006/main">
               <a:ext uri="{FF2B5EF4-FFF2-40B4-BE49-F238E27FC236}">
-                <a16:creationId xmlns:a16="http://schemas.microsoft.com/office/drawing/2014/main" id="{A4841AC9-55C8-4FE5-B0C5-88F5A7F316B6}"/>
+                <a16:creationId xmlns:a16="http://schemas.microsoft.com/office/drawing/2014/main" id="{D343BCB5-3E13-45E4-933A-4116360C3088}"/>
               </a:ext>
             </a:extLst>
           </p:cNvPr>
@@ -20255,7 +20326,7 @@
     </p:spTree>
     <p:extLst>
       <p:ext uri="{BB962C8B-B14F-4D97-AF65-F5344CB8AC3E}">
-        <p14:creationId xmlns:p14="http://schemas.microsoft.com/office/powerpoint/2010/main" val="209014738"/>
+        <p14:creationId xmlns:p14="http://schemas.microsoft.com/office/powerpoint/2010/main" val="1759319147"/>
       </p:ext>
     </p:extLst>
   </p:cSld>
@@ -20286,7 +20357,7 @@
           <p:cNvPr id="8" name="">
             <a:extLst xmlns:a="http://schemas.openxmlformats.org/drawingml/2006/main">
               <a:ext uri="{FF2B5EF4-FFF2-40B4-BE49-F238E27FC236}">
-                <a16:creationId xmlns:a16="http://schemas.microsoft.com/office/drawing/2014/main" id="{83866DDC-8F5B-412B-8E5F-BFB0387BAF8A}"/>
+                <a16:creationId xmlns:a16="http://schemas.microsoft.com/office/drawing/2014/main" id="{60EED2CA-F2D2-49C6-AA0E-D1F8A01EF305}"/>
               </a:ext>
             </a:extLst>
           </p:cNvPr>
@@ -20432,7 +20503,7 @@
                 <a:ea typeface="Arial"/>
                 <a:cs typeface="Arial"/>
               </a:rPr>
-              <a:t>The twin and assumption sandbox</a:t>
+              <a:t>Guardrails live</a:t>
             </a:r>
           </a:p>
         </p:txBody>
@@ -20442,7 +20513,7 @@
           <p:cNvPr id="2" name="">
             <a:extLst xmlns:a="http://schemas.openxmlformats.org/drawingml/2006/main">
               <a:ext uri="{FF2B5EF4-FFF2-40B4-BE49-F238E27FC236}">
-                <a16:creationId xmlns:a16="http://schemas.microsoft.com/office/drawing/2014/main" id="{59E33220-6947-4BBB-9883-E71F33AEFC47}"/>
+                <a16:creationId xmlns:a16="http://schemas.microsoft.com/office/drawing/2014/main" id="{5CA61904-DAC8-41A0-A141-92C5E8D04CDC}"/>
               </a:ext>
             </a:extLst>
           </p:cNvPr>
@@ -20588,7 +20659,7 @@
                 <a:ea typeface="Arial"/>
                 <a:cs typeface="Arial"/>
               </a:rPr>
-              <a:t>Clear boundaries around simulated physiology</a:t>
+              <a:t>Missing safety information causes abstention</a:t>
             </a:r>
           </a:p>
         </p:txBody>
@@ -20598,7 +20669,7 @@
           <p:cNvPr id="3" name="">
             <a:extLst xmlns:a="http://schemas.openxmlformats.org/drawingml/2006/main">
               <a:ext uri="{FF2B5EF4-FFF2-40B4-BE49-F238E27FC236}">
-                <a16:creationId xmlns:a16="http://schemas.microsoft.com/office/drawing/2014/main" id="{3765575A-FCE7-4443-9C00-F2681474210F}"/>
+                <a16:creationId xmlns:a16="http://schemas.microsoft.com/office/drawing/2014/main" id="{CA7DB8D9-75D4-4E1F-B154-0F2AE9BCD1D4}"/>
               </a:ext>
             </a:extLst>
           </p:cNvPr>
@@ -20744,7 +20815,7 @@
                 <a:ea typeface="Arial"/>
                 <a:cs typeface="Arial"/>
               </a:rPr>
-              <a:t>Reproductive and metabolic equations generate an illustrative state trajectory</a:t>
+              <a:t>Contraception, thyroid and prolactin flags, age and pregnancy-related states</a:t>
             </a:r>
           </a:p>
         </p:txBody>
@@ -20754,7 +20825,7 @@
           <p:cNvPr id="4" name="">
             <a:extLst xmlns:a="http://schemas.openxmlformats.org/drawingml/2006/main">
               <a:ext uri="{FF2B5EF4-FFF2-40B4-BE49-F238E27FC236}">
-                <a16:creationId xmlns:a16="http://schemas.microsoft.com/office/drawing/2014/main" id="{D333E036-A45A-45CC-956B-DA6D9678989B}"/>
+                <a16:creationId xmlns:a16="http://schemas.microsoft.com/office/drawing/2014/main" id="{12FF4585-2157-4003-8F8E-CC8B2C6C309D}"/>
               </a:ext>
             </a:extLst>
           </p:cNvPr>
@@ -20900,7 +20971,7 @@
                 <a:ea typeface="Arial"/>
                 <a:cs typeface="Arial"/>
               </a:rPr>
-              <a:t>The twin does not affect the logistic score or its reported performance</a:t>
+              <a:t>Early post-menarche, perimenopause and insufficient observed temperature</a:t>
             </a:r>
           </a:p>
         </p:txBody>
@@ -20910,7 +20981,7 @@
           <p:cNvPr id="5" name="">
             <a:extLst xmlns:a="http://schemas.openxmlformats.org/drawingml/2006/main">
               <a:ext uri="{FF2B5EF4-FFF2-40B4-BE49-F238E27FC236}">
-                <a16:creationId xmlns:a16="http://schemas.microsoft.com/office/drawing/2014/main" id="{2067E519-5B11-417D-963D-4B7250205144}"/>
+                <a16:creationId xmlns:a16="http://schemas.microsoft.com/office/drawing/2014/main" id="{5BBF1F29-5DDC-486A-8470-E503DACD6593}"/>
               </a:ext>
             </a:extLst>
           </p:cNvPr>
@@ -21056,7 +21127,7 @@
                 <a:ea typeface="Arial"/>
                 <a:cs typeface="Arial"/>
               </a:rPr>
-              <a:t>The sandbox edits invented model inputs. It does not predict a treatment effect</a:t>
+              <a:t>Withholding removes personal scores, intervals, explanations, sandbox outputs and alerts</a:t>
             </a:r>
           </a:p>
         </p:txBody>
@@ -21066,7 +21137,7 @@
           <p:cNvPr id="6" name="">
             <a:extLst xmlns:a="http://schemas.openxmlformats.org/drawingml/2006/main">
               <a:ext uri="{FF2B5EF4-FFF2-40B4-BE49-F238E27FC236}">
-                <a16:creationId xmlns:a16="http://schemas.microsoft.com/office/drawing/2014/main" id="{F65F2591-33C2-4908-B4A9-1D318190C654}"/>
+                <a16:creationId xmlns:a16="http://schemas.microsoft.com/office/drawing/2014/main" id="{E34384EA-BB99-4584-9109-2A1108D9D641}"/>
               </a:ext>
             </a:extLst>
           </p:cNvPr>
@@ -21212,7 +21283,7 @@
                 <a:ea typeface="Arial"/>
                 <a:cs typeface="Arial"/>
               </a:rPr>
-              <a:t>Glucose threshold crossings are simulated counts, not an evaluated glucose forecast</a:t>
+              <a:t>The workflow is synthetic and its safety effectiveness has not been clinically evaluated</a:t>
             </a:r>
           </a:p>
         </p:txBody>
@@ -21222,7 +21293,7 @@
           <p:cNvPr id="7" name="">
             <a:extLst xmlns:a="http://schemas.openxmlformats.org/drawingml/2006/main">
               <a:ext uri="{FF2B5EF4-FFF2-40B4-BE49-F238E27FC236}">
-                <a16:creationId xmlns:a16="http://schemas.microsoft.com/office/drawing/2014/main" id="{6D341509-DD70-422C-92CF-E907E6152426}"/>
+                <a16:creationId xmlns:a16="http://schemas.microsoft.com/office/drawing/2014/main" id="{F47A5C1C-A420-410B-BCA6-AE6BA80E051C}"/>
               </a:ext>
             </a:extLst>
           </p:cNvPr>
@@ -21376,7 +21447,7 @@
     </p:spTree>
     <p:extLst>
       <p:ext uri="{BB962C8B-B14F-4D97-AF65-F5344CB8AC3E}">
-        <p14:creationId xmlns:p14="http://schemas.microsoft.com/office/powerpoint/2010/main" val="426738810"/>
+        <p14:creationId xmlns:p14="http://schemas.microsoft.com/office/powerpoint/2010/main" val="174039203"/>
       </p:ext>
     </p:extLst>
   </p:cSld>
@@ -21407,7 +21478,7 @@
           <p:cNvPr id="8" name="">
             <a:extLst xmlns:a="http://schemas.openxmlformats.org/drawingml/2006/main">
               <a:ext uri="{FF2B5EF4-FFF2-40B4-BE49-F238E27FC236}">
-                <a16:creationId xmlns:a16="http://schemas.microsoft.com/office/drawing/2014/main" id="{B7943411-4B39-41A7-871D-EE55328BF469}"/>
+                <a16:creationId xmlns:a16="http://schemas.microsoft.com/office/drawing/2014/main" id="{C3C8A354-F815-4869-B86C-5DC105D8BA17}"/>
               </a:ext>
             </a:extLst>
           </p:cNvPr>
@@ -21553,7 +21624,7 @@
                 <a:ea typeface="Arial"/>
                 <a:cs typeface="Arial"/>
               </a:rPr>
-              <a:t>Where it fails</a:t>
+              <a:t>The twin and assumption sandbox</a:t>
             </a:r>
           </a:p>
         </p:txBody>
@@ -21563,7 +21634,7 @@
           <p:cNvPr id="2" name="">
             <a:extLst xmlns:a="http://schemas.openxmlformats.org/drawingml/2006/main">
               <a:ext uri="{FF2B5EF4-FFF2-40B4-BE49-F238E27FC236}">
-                <a16:creationId xmlns:a16="http://schemas.microsoft.com/office/drawing/2014/main" id="{4F4FD038-2527-40FB-8D98-DD1AC6D3DB60}"/>
+                <a16:creationId xmlns:a16="http://schemas.microsoft.com/office/drawing/2014/main" id="{AE40DCC8-6618-479B-A32C-069F5C2F0321}"/>
               </a:ext>
             </a:extLst>
           </p:cNvPr>
@@ -21709,7 +21780,7 @@
                 <a:ea typeface="Arial"/>
                 <a:cs typeface="Arial"/>
               </a:rPr>
-              <a:t>All declared Kushi scenarios remain visible</a:t>
+              <a:t>Clear boundaries around simulated physiology</a:t>
             </a:r>
           </a:p>
         </p:txBody>
@@ -21719,7 +21790,7 @@
           <p:cNvPr id="3" name="">
             <a:extLst xmlns:a="http://schemas.openxmlformats.org/drawingml/2006/main">
               <a:ext uri="{FF2B5EF4-FFF2-40B4-BE49-F238E27FC236}">
-                <a16:creationId xmlns:a16="http://schemas.microsoft.com/office/drawing/2014/main" id="{F3D3E837-5938-4691-B470-57C5B882BA0F}"/>
+                <a16:creationId xmlns:a16="http://schemas.microsoft.com/office/drawing/2014/main" id="{DF864D9B-DAF4-4B78-9780-7D618FA6F0C3}"/>
               </a:ext>
             </a:extLst>
           </p:cNvPr>
@@ -21865,7 +21936,7 @@
                 <a:ea typeface="Arial"/>
                 <a:cs typeface="Arial"/>
               </a:rPr>
-              <a:t>Display the fixed scenario seeds with misses, false alarms or withholding unchanged</a:t>
+              <a:t>Reproductive and metabolic equations generate an illustrative state trajectory</a:t>
             </a:r>
           </a:p>
         </p:txBody>
@@ -21875,7 +21946,7 @@
           <p:cNvPr id="4" name="">
             <a:extLst xmlns:a="http://schemas.openxmlformats.org/drawingml/2006/main">
               <a:ext uri="{FF2B5EF4-FFF2-40B4-BE49-F238E27FC236}">
-                <a16:creationId xmlns:a16="http://schemas.microsoft.com/office/drawing/2014/main" id="{BB27BF87-D395-4BF1-A7CC-B48382862479}"/>
+                <a16:creationId xmlns:a16="http://schemas.microsoft.com/office/drawing/2014/main" id="{A66F11E9-0EC1-4866-8E30-DC906A0662BC}"/>
               </a:ext>
             </a:extLst>
           </p:cNvPr>
@@ -22021,7 +22092,7 @@
                 <a:ea typeface="Arial"/>
                 <a:cs typeface="Arial"/>
               </a:rPr>
-              <a:t>Different snapshots can fall back to calendar even when sensors are available</a:t>
+              <a:t>The twin does not affect the logistic score or its reported performance</a:t>
             </a:r>
           </a:p>
         </p:txBody>
@@ -22031,7 +22102,7 @@
           <p:cNvPr id="5" name="">
             <a:extLst xmlns:a="http://schemas.openxmlformats.org/drawingml/2006/main">
               <a:ext uri="{FF2B5EF4-FFF2-40B4-BE49-F238E27FC236}">
-                <a16:creationId xmlns:a16="http://schemas.microsoft.com/office/drawing/2014/main" id="{66E96757-3508-4A45-BB50-EC737EAD426B}"/>
+                <a16:creationId xmlns:a16="http://schemas.microsoft.com/office/drawing/2014/main" id="{BFB0A947-D045-47D2-BD15-6F409FD4C386}"/>
               </a:ext>
             </a:extLst>
           </p:cNvPr>
@@ -22177,7 +22248,7 @@
                 <a:ea typeface="Arial"/>
                 <a:cs typeface="Arial"/>
               </a:rPr>
-              <a:t>A class set containing both outcomes does not identify one result</a:t>
+              <a:t>The sandbox edits invented model inputs. It does not predict a treatment effect</a:t>
             </a:r>
           </a:p>
         </p:txBody>
@@ -22187,7 +22258,7 @@
           <p:cNvPr id="6" name="">
             <a:extLst xmlns:a="http://schemas.openxmlformats.org/drawingml/2006/main">
               <a:ext uri="{FF2B5EF4-FFF2-40B4-BE49-F238E27FC236}">
-                <a16:creationId xmlns:a16="http://schemas.microsoft.com/office/drawing/2014/main" id="{BF2219D9-B3C0-45AF-91DD-004D79B74C8D}"/>
+                <a16:creationId xmlns:a16="http://schemas.microsoft.com/office/drawing/2014/main" id="{8FB85703-A56A-41DF-9B87-4094372929FD}"/>
               </a:ext>
             </a:extLst>
           </p:cNvPr>
@@ -22333,7 +22404,7 @@
                 <a:ea typeface="Arial"/>
                 <a:cs typeface="Arial"/>
               </a:rPr>
-              <a:t>Robustness, state-estimator and conformal coverage evidence remain separate work</a:t>
+              <a:t>Glucose threshold crossings are simulated counts, not an evaluated glucose forecast</a:t>
             </a:r>
           </a:p>
         </p:txBody>
@@ -22343,7 +22414,7 @@
           <p:cNvPr id="7" name="">
             <a:extLst xmlns:a="http://schemas.openxmlformats.org/drawingml/2006/main">
               <a:ext uri="{FF2B5EF4-FFF2-40B4-BE49-F238E27FC236}">
-                <a16:creationId xmlns:a16="http://schemas.microsoft.com/office/drawing/2014/main" id="{6C27A621-DFBB-401E-A92C-57B8618BAA66}"/>
+                <a16:creationId xmlns:a16="http://schemas.microsoft.com/office/drawing/2014/main" id="{C4320181-631A-4BB8-912E-67B846949928}"/>
               </a:ext>
             </a:extLst>
           </p:cNvPr>
@@ -22497,7 +22568,7 @@
     </p:spTree>
     <p:extLst>
       <p:ext uri="{BB962C8B-B14F-4D97-AF65-F5344CB8AC3E}">
-        <p14:creationId xmlns:p14="http://schemas.microsoft.com/office/powerpoint/2010/main" val="1594774931"/>
+        <p14:creationId xmlns:p14="http://schemas.microsoft.com/office/powerpoint/2010/main" val="1518145393"/>
       </p:ext>
     </p:extLst>
   </p:cSld>
@@ -22528,7 +22599,7 @@
           <p:cNvPr id="8" name="">
             <a:extLst xmlns:a="http://schemas.openxmlformats.org/drawingml/2006/main">
               <a:ext uri="{FF2B5EF4-FFF2-40B4-BE49-F238E27FC236}">
-                <a16:creationId xmlns:a16="http://schemas.microsoft.com/office/drawing/2014/main" id="{4DFDA76F-B78F-4433-BA7D-32CCE52BAB4B}"/>
+                <a16:creationId xmlns:a16="http://schemas.microsoft.com/office/drawing/2014/main" id="{3559F5BA-24DD-40F7-BB73-5DA0B6BAB880}"/>
               </a:ext>
             </a:extLst>
           </p:cNvPr>
@@ -22674,7 +22745,7 @@
                 <a:ea typeface="Arial"/>
                 <a:cs typeface="Arial"/>
               </a:rPr>
-              <a:t>Validity limits</a:t>
+              <a:t>Where it fails</a:t>
             </a:r>
           </a:p>
         </p:txBody>
@@ -22684,7 +22755,7 @@
           <p:cNvPr id="2" name="">
             <a:extLst xmlns:a="http://schemas.openxmlformats.org/drawingml/2006/main">
               <a:ext uri="{FF2B5EF4-FFF2-40B4-BE49-F238E27FC236}">
-                <a16:creationId xmlns:a16="http://schemas.microsoft.com/office/drawing/2014/main" id="{5011D033-FCE9-44DE-8BE3-AE2984BDBE23}"/>
+                <a16:creationId xmlns:a16="http://schemas.microsoft.com/office/drawing/2014/main" id="{F9171D64-034A-4F77-94D5-32F0DE807AA0}"/>
               </a:ext>
             </a:extLst>
           </p:cNvPr>
@@ -22830,7 +22901,7 @@
                 <a:ea typeface="Arial"/>
                 <a:cs typeface="Arial"/>
               </a:rPr>
-              <a:t>Synthetic recovery is not prospective evidence in women</a:t>
+              <a:t>All declared Kushi scenarios remain visible</a:t>
             </a:r>
           </a:p>
         </p:txBody>
@@ -22840,7 +22911,7 @@
           <p:cNvPr id="3" name="">
             <a:extLst xmlns:a="http://schemas.openxmlformats.org/drawingml/2006/main">
               <a:ext uri="{FF2B5EF4-FFF2-40B4-BE49-F238E27FC236}">
-                <a16:creationId xmlns:a16="http://schemas.microsoft.com/office/drawing/2014/main" id="{F1062B21-D951-4EB1-ABCA-E3EF6FC32806}"/>
+                <a16:creationId xmlns:a16="http://schemas.microsoft.com/office/drawing/2014/main" id="{B200C785-0DE3-4435-B037-6F024F6585A3}"/>
               </a:ext>
             </a:extLst>
           </p:cNvPr>
@@ -22986,7 +23057,7 @@
                 <a:ea typeface="Arial"/>
                 <a:cs typeface="Arial"/>
               </a:rPr>
-              <a:t>Labels and sensor changes share generator assumptions</a:t>
+              <a:t>Display the fixed scenario seeds with misses, false alarms or withholding unchanged</a:t>
             </a:r>
           </a:p>
         </p:txBody>
@@ -22996,7 +23067,7 @@
           <p:cNvPr id="4" name="">
             <a:extLst xmlns:a="http://schemas.openxmlformats.org/drawingml/2006/main">
               <a:ext uri="{FF2B5EF4-FFF2-40B4-BE49-F238E27FC236}">
-                <a16:creationId xmlns:a16="http://schemas.microsoft.com/office/drawing/2014/main" id="{FC3D0983-B966-4A0A-8148-72B9358F693C}"/>
+                <a16:creationId xmlns:a16="http://schemas.microsoft.com/office/drawing/2014/main" id="{0470A743-7E88-4F27-8353-180BEEFB40B0}"/>
               </a:ext>
             </a:extLst>
           </p:cNvPr>
@@ -23142,7 +23213,7 @@
                 <a:ea typeface="Arial"/>
                 <a:cs typeface="Arial"/>
               </a:rPr>
-              <a:t>EHR-lite includes a label-generating internal latent</a:t>
+              <a:t>Different snapshots can fall back to calendar even when sensors are available</a:t>
             </a:r>
           </a:p>
         </p:txBody>
@@ -23152,7 +23223,7 @@
           <p:cNvPr id="5" name="">
             <a:extLst xmlns:a="http://schemas.openxmlformats.org/drawingml/2006/main">
               <a:ext uri="{FF2B5EF4-FFF2-40B4-BE49-F238E27FC236}">
-                <a16:creationId xmlns:a16="http://schemas.microsoft.com/office/drawing/2014/main" id="{DF297C88-9207-406A-A19B-3902614D9175}"/>
+                <a16:creationId xmlns:a16="http://schemas.microsoft.com/office/drawing/2014/main" id="{14CB05D6-D4EF-4F8E-B4BF-CC7D64B4E16B}"/>
               </a:ext>
             </a:extLst>
           </p:cNvPr>
@@ -23298,7 +23369,7 @@
                 <a:ea typeface="Arial"/>
                 <a:cs typeface="Arial"/>
               </a:rPr>
-              <a:t>Old test seeds were reused during development</a:t>
+              <a:t>A class set containing both outcomes does not identify one result</a:t>
             </a:r>
           </a:p>
         </p:txBody>
@@ -23308,7 +23379,7 @@
           <p:cNvPr id="6" name="">
             <a:extLst xmlns:a="http://schemas.openxmlformats.org/drawingml/2006/main">
               <a:ext uri="{FF2B5EF4-FFF2-40B4-BE49-F238E27FC236}">
-                <a16:creationId xmlns:a16="http://schemas.microsoft.com/office/drawing/2014/main" id="{49B2AE75-746B-44AA-9200-13F9EEFEB19C}"/>
+                <a16:creationId xmlns:a16="http://schemas.microsoft.com/office/drawing/2014/main" id="{A88599A9-4DCC-44EC-96AD-0AC1B049801F}"/>
               </a:ext>
             </a:extLst>
           </p:cNvPr>
@@ -23454,7 +23525,7 @@
                 <a:ea typeface="Arial"/>
                 <a:cs typeface="Arial"/>
               </a:rPr>
-              <a:t>The frozen synthetic sequential alert policy is evaluated; robustness and clinical safety effectiveness remain separate work</a:t>
+              <a:t>Robustness, state-estimator and conformal coverage evidence remain separate work</a:t>
             </a:r>
           </a:p>
         </p:txBody>
@@ -23464,7 +23535,7 @@
           <p:cNvPr id="7" name="">
             <a:extLst xmlns:a="http://schemas.openxmlformats.org/drawingml/2006/main">
               <a:ext uri="{FF2B5EF4-FFF2-40B4-BE49-F238E27FC236}">
-                <a16:creationId xmlns:a16="http://schemas.microsoft.com/office/drawing/2014/main" id="{43C0BDC8-13AC-4228-8413-F5207024B127}"/>
+                <a16:creationId xmlns:a16="http://schemas.microsoft.com/office/drawing/2014/main" id="{40C538AB-7D31-40F2-8C93-AD57BEA1F43A}"/>
               </a:ext>
             </a:extLst>
           </p:cNvPr>
@@ -23618,7 +23689,7 @@
     </p:spTree>
     <p:extLst>
       <p:ext uri="{BB962C8B-B14F-4D97-AF65-F5344CB8AC3E}">
-        <p14:creationId xmlns:p14="http://schemas.microsoft.com/office/powerpoint/2010/main" val="1558739764"/>
+        <p14:creationId xmlns:p14="http://schemas.microsoft.com/office/powerpoint/2010/main" val="1028821978"/>
       </p:ext>
     </p:extLst>
   </p:cSld>
@@ -23649,7 +23720,7 @@
           <p:cNvPr id="8" name="">
             <a:extLst xmlns:a="http://schemas.openxmlformats.org/drawingml/2006/main">
               <a:ext uri="{FF2B5EF4-FFF2-40B4-BE49-F238E27FC236}">
-                <a16:creationId xmlns:a16="http://schemas.microsoft.com/office/drawing/2014/main" id="{CFCB726B-162D-4D32-BB77-29770F104CBE}"/>
+                <a16:creationId xmlns:a16="http://schemas.microsoft.com/office/drawing/2014/main" id="{B753494B-FDFD-42DD-9706-210F9D459774}"/>
               </a:ext>
             </a:extLst>
           </p:cNvPr>
@@ -23795,7 +23866,7 @@
                 <a:ea typeface="Arial"/>
                 <a:cs typeface="Arial"/>
               </a:rPr>
-              <a:t>Reproducible demonstration</a:t>
+              <a:t>Validity limits</a:t>
             </a:r>
           </a:p>
         </p:txBody>
@@ -23805,7 +23876,7 @@
           <p:cNvPr id="2" name="">
             <a:extLst xmlns:a="http://schemas.openxmlformats.org/drawingml/2006/main">
               <a:ext uri="{FF2B5EF4-FFF2-40B4-BE49-F238E27FC236}">
-                <a16:creationId xmlns:a16="http://schemas.microsoft.com/office/drawing/2014/main" id="{717BC70F-F0CE-411E-8B8E-C442EA832FFD}"/>
+                <a16:creationId xmlns:a16="http://schemas.microsoft.com/office/drawing/2014/main" id="{BA388C74-3CC1-4AA1-A696-1B9BC7EAB9B8}"/>
               </a:ext>
             </a:extLst>
           </p:cNvPr>
@@ -23951,7 +24022,7 @@
                 <a:ea typeface="Arial"/>
                 <a:cs typeface="Arial"/>
               </a:rPr>
-              <a:t>Public source, inspectable artifacts and explicit next work</a:t>
+              <a:t>Synthetic recovery is not prospective evidence in women</a:t>
             </a:r>
           </a:p>
         </p:txBody>
@@ -23961,7 +24032,7 @@
           <p:cNvPr id="3" name="">
             <a:extLst xmlns:a="http://schemas.openxmlformats.org/drawingml/2006/main">
               <a:ext uri="{FF2B5EF4-FFF2-40B4-BE49-F238E27FC236}">
-                <a16:creationId xmlns:a16="http://schemas.microsoft.com/office/drawing/2014/main" id="{510FA8F9-6CC5-4D0E-83E4-7AC77EB8762C}"/>
+                <a16:creationId xmlns:a16="http://schemas.microsoft.com/office/drawing/2014/main" id="{40686DBD-EF98-487C-989A-94B58D52F449}"/>
               </a:ext>
             </a:extLst>
           </p:cNvPr>
@@ -24107,7 +24178,7 @@
                 <a:ea typeface="Arial"/>
                 <a:cs typeface="Arial"/>
               </a:rPr>
-              <a:t>README, model cards and the audit link every claim to evidence</a:t>
+              <a:t>Labels and sensor changes share generator assumptions</a:t>
             </a:r>
           </a:p>
         </p:txBody>
@@ -24117,7 +24188,7 @@
           <p:cNvPr id="4" name="">
             <a:extLst xmlns:a="http://schemas.openxmlformats.org/drawingml/2006/main">
               <a:ext uri="{FF2B5EF4-FFF2-40B4-BE49-F238E27FC236}">
-                <a16:creationId xmlns:a16="http://schemas.microsoft.com/office/drawing/2014/main" id="{8F1763D4-F7F0-47A7-8B55-5241C5C736BD}"/>
+                <a16:creationId xmlns:a16="http://schemas.microsoft.com/office/drawing/2014/main" id="{0A958D12-BF43-4E27-87B9-F7BC36622F6F}"/>
               </a:ext>
             </a:extLst>
           </p:cNvPr>
@@ -24263,7 +24334,7 @@
                 <a:ea typeface="Arial"/>
                 <a:cs typeface="Arial"/>
               </a:rPr>
-              <a:t>Persisted inference reproduces the benchmark and exposes exact feature calculations</a:t>
+              <a:t>EHR-lite includes a label-generating internal latent</a:t>
             </a:r>
           </a:p>
         </p:txBody>
@@ -24273,7 +24344,7 @@
           <p:cNvPr id="5" name="">
             <a:extLst xmlns:a="http://schemas.openxmlformats.org/drawingml/2006/main">
               <a:ext uri="{FF2B5EF4-FFF2-40B4-BE49-F238E27FC236}">
-                <a16:creationId xmlns:a16="http://schemas.microsoft.com/office/drawing/2014/main" id="{7986BB6F-E500-4B0C-A66E-7FE6BD2589BD}"/>
+                <a16:creationId xmlns:a16="http://schemas.microsoft.com/office/drawing/2014/main" id="{6B00FC69-4AF1-460F-AE3A-1FA0901244F5}"/>
               </a:ext>
             </a:extLst>
           </p:cNvPr>
@@ -24419,7 +24490,7 @@
                 <a:ea typeface="Arial"/>
                 <a:cs typeface="Arial"/>
               </a:rPr>
-              <a:t>The required video remains a human recording and upload task</a:t>
+              <a:t>Old test seeds were reused during development</a:t>
             </a:r>
           </a:p>
         </p:txBody>
@@ -24429,7 +24500,7 @@
           <p:cNvPr id="6" name="">
             <a:extLst xmlns:a="http://schemas.openxmlformats.org/drawingml/2006/main">
               <a:ext uri="{FF2B5EF4-FFF2-40B4-BE49-F238E27FC236}">
-                <a16:creationId xmlns:a16="http://schemas.microsoft.com/office/drawing/2014/main" id="{1839DAE6-4E3A-4EBB-BCB4-DE8B495D6391}"/>
+                <a16:creationId xmlns:a16="http://schemas.microsoft.com/office/drawing/2014/main" id="{5D35BB31-30BF-45CE-9ABC-1653AA18AB07}"/>
               </a:ext>
             </a:extLst>
           </p:cNvPr>
@@ -24575,7 +24646,7 @@
                 <a:ea typeface="Arial"/>
                 <a:cs typeface="Arial"/>
               </a:rPr>
-              <a:t>Clinical validation, clinician feedback and sim-to-real evaluation remain outstanding</a:t>
+              <a:t>The frozen synthetic sequential alert policy is evaluated; robustness and clinical safety effectiveness remain separate work</a:t>
             </a:r>
           </a:p>
         </p:txBody>
@@ -24585,7 +24656,7 @@
           <p:cNvPr id="7" name="">
             <a:extLst xmlns:a="http://schemas.openxmlformats.org/drawingml/2006/main">
               <a:ext uri="{FF2B5EF4-FFF2-40B4-BE49-F238E27FC236}">
-                <a16:creationId xmlns:a16="http://schemas.microsoft.com/office/drawing/2014/main" id="{AA0EE77B-BE90-42A4-9161-FDEB49E6043D}"/>
+                <a16:creationId xmlns:a16="http://schemas.microsoft.com/office/drawing/2014/main" id="{4877A320-97E9-457F-8287-A17381FA43E1}"/>
               </a:ext>
             </a:extLst>
           </p:cNvPr>
@@ -24739,7 +24810,1128 @@
     </p:spTree>
     <p:extLst>
       <p:ext uri="{BB962C8B-B14F-4D97-AF65-F5344CB8AC3E}">
-        <p14:creationId xmlns:p14="http://schemas.microsoft.com/office/powerpoint/2010/main" val="365079596"/>
+        <p14:creationId xmlns:p14="http://schemas.microsoft.com/office/powerpoint/2010/main" val="1247170394"/>
+      </p:ext>
+    </p:extLst>
+  </p:cSld>
+</p:sld>
+</file>
+
+<file path=ppt/slides/slide25.xml><?xml version="1.0" encoding="utf-8"?>
+<p:sld xmlns:p="http://schemas.openxmlformats.org/presentationml/2006/main">
+  <p:cSld>
+    <p:bg>
+      <p:bgPr>
+        <a:solidFill xmlns:a="http://schemas.openxmlformats.org/drawingml/2006/main">
+          <a:srgbClr val="FAFAF8"/>
+        </a:solidFill>
+      </p:bgPr>
+    </p:bg>
+    <p:spTree>
+      <p:nvGrpSpPr>
+        <p:cNvPr id="1" name=""/>
+        <p:cNvGrpSpPr/>
+        <p:nvPr/>
+      </p:nvGrpSpPr>
+      <p:grpSpPr>
+        <a:xfrm xmlns:a="http://schemas.openxmlformats.org/drawingml/2006/main"/>
+      </p:grpSpPr>
+      <p:sp>
+        <p:nvSpPr>
+          <p:cNvPr id="8" name="">
+            <a:extLst xmlns:a="http://schemas.openxmlformats.org/drawingml/2006/main">
+              <a:ext uri="{FF2B5EF4-FFF2-40B4-BE49-F238E27FC236}">
+                <a16:creationId xmlns:a16="http://schemas.microsoft.com/office/drawing/2014/main" id="{03233C90-32E1-4315-A4CD-F9A45BFE6B0A}"/>
+              </a:ext>
+            </a:extLst>
+          </p:cNvPr>
+          <p:cNvSpPr>
+            <a:spLocks xmlns:a="http://schemas.openxmlformats.org/drawingml/2006/main" noGrp="1"/>
+          </p:cNvSpPr>
+          <p:nvPr/>
+        </p:nvSpPr>
+        <p:spPr>
+          <a:xfrm xmlns:a="http://schemas.openxmlformats.org/drawingml/2006/main">
+            <a:off x="609600" y="457200"/>
+            <a:ext cx="10972800" cy="762000"/>
+          </a:xfrm>
+          <a:prstGeom xmlns:a="http://schemas.openxmlformats.org/drawingml/2006/main" prst="rect">
+            <a:avLst/>
+          </a:prstGeom>
+          <a:noFill xmlns:a="http://schemas.openxmlformats.org/drawingml/2006/main"/>
+          <a:ln xmlns:a="http://schemas.openxmlformats.org/drawingml/2006/main" w="0">
+            <a:noFill/>
+          </a:ln>
+        </p:spPr>
+        <p:txBody>
+          <a:bodyPr xmlns:a="http://schemas.openxmlformats.org/drawingml/2006/main"/>
+          <a:lstStyle xmlns:a="http://schemas.openxmlformats.org/drawingml/2006/main">
+            <a:defPPr>
+              <a:defRPr sz="3300" b="0">
+                <a:solidFill>
+                  <a:srgbClr val="17242B"/>
+                </a:solidFill>
+                <a:latin typeface="Arial"/>
+                <a:ea typeface="Arial"/>
+                <a:cs typeface="Arial"/>
+              </a:defRPr>
+            </a:defPPr>
+            <a:lvl1pPr>
+              <a:defRPr sz="3300" b="0">
+                <a:solidFill>
+                  <a:srgbClr val="17242B"/>
+                </a:solidFill>
+                <a:latin typeface="Arial"/>
+                <a:ea typeface="Arial"/>
+                <a:cs typeface="Arial"/>
+              </a:defRPr>
+            </a:lvl1pPr>
+            <a:lvl2pPr>
+              <a:defRPr sz="3300" b="0">
+                <a:solidFill>
+                  <a:srgbClr val="17242B"/>
+                </a:solidFill>
+                <a:latin typeface="Arial"/>
+                <a:ea typeface="Arial"/>
+                <a:cs typeface="Arial"/>
+              </a:defRPr>
+            </a:lvl2pPr>
+            <a:lvl3pPr>
+              <a:defRPr sz="3300" b="0">
+                <a:solidFill>
+                  <a:srgbClr val="17242B"/>
+                </a:solidFill>
+                <a:latin typeface="Arial"/>
+                <a:ea typeface="Arial"/>
+                <a:cs typeface="Arial"/>
+              </a:defRPr>
+            </a:lvl3pPr>
+            <a:lvl4pPr>
+              <a:defRPr sz="3300" b="0">
+                <a:solidFill>
+                  <a:srgbClr val="17242B"/>
+                </a:solidFill>
+                <a:latin typeface="Arial"/>
+                <a:ea typeface="Arial"/>
+                <a:cs typeface="Arial"/>
+              </a:defRPr>
+            </a:lvl4pPr>
+            <a:lvl5pPr>
+              <a:defRPr sz="3300" b="0">
+                <a:solidFill>
+                  <a:srgbClr val="17242B"/>
+                </a:solidFill>
+                <a:latin typeface="Arial"/>
+                <a:ea typeface="Arial"/>
+                <a:cs typeface="Arial"/>
+              </a:defRPr>
+            </a:lvl5pPr>
+            <a:lvl6pPr>
+              <a:defRPr sz="3300" b="0">
+                <a:solidFill>
+                  <a:srgbClr val="17242B"/>
+                </a:solidFill>
+                <a:latin typeface="Arial"/>
+                <a:ea typeface="Arial"/>
+                <a:cs typeface="Arial"/>
+              </a:defRPr>
+            </a:lvl6pPr>
+            <a:lvl7pPr>
+              <a:defRPr sz="3300" b="0">
+                <a:solidFill>
+                  <a:srgbClr val="17242B"/>
+                </a:solidFill>
+                <a:latin typeface="Arial"/>
+                <a:ea typeface="Arial"/>
+                <a:cs typeface="Arial"/>
+              </a:defRPr>
+            </a:lvl7pPr>
+            <a:lvl8pPr>
+              <a:defRPr sz="3300" b="0">
+                <a:solidFill>
+                  <a:srgbClr val="17242B"/>
+                </a:solidFill>
+                <a:latin typeface="Arial"/>
+                <a:ea typeface="Arial"/>
+                <a:cs typeface="Arial"/>
+              </a:defRPr>
+            </a:lvl8pPr>
+            <a:lvl9pPr>
+              <a:defRPr sz="3300" b="0">
+                <a:solidFill>
+                  <a:srgbClr val="17242B"/>
+                </a:solidFill>
+                <a:latin typeface="Arial"/>
+                <a:ea typeface="Arial"/>
+                <a:cs typeface="Arial"/>
+              </a:defRPr>
+            </a:lvl9pPr>
+          </a:lstStyle>
+          <a:p xmlns:a="http://schemas.openxmlformats.org/drawingml/2006/main">
+            <a:pPr>
+              <a:defRPr sz="3300" b="0">
+                <a:solidFill>
+                  <a:srgbClr val="17242B"/>
+                </a:solidFill>
+                <a:latin typeface="Arial"/>
+                <a:ea typeface="Arial"/>
+                <a:cs typeface="Arial"/>
+              </a:defRPr>
+            </a:pPr>
+            <a:r>
+              <a:rPr sz="3300" b="0">
+                <a:solidFill>
+                  <a:srgbClr val="17242B"/>
+                </a:solidFill>
+                <a:latin typeface="Arial"/>
+                <a:ea typeface="Arial"/>
+                <a:cs typeface="Arial"/>
+              </a:rPr>
+              <a:t>Reproducible demonstration</a:t>
+            </a:r>
+          </a:p>
+        </p:txBody>
+      </p:sp>
+      <p:sp>
+        <p:nvSpPr>
+          <p:cNvPr id="2" name="">
+            <a:extLst xmlns:a="http://schemas.openxmlformats.org/drawingml/2006/main">
+              <a:ext uri="{FF2B5EF4-FFF2-40B4-BE49-F238E27FC236}">
+                <a16:creationId xmlns:a16="http://schemas.microsoft.com/office/drawing/2014/main" id="{62F92E4F-9D49-4973-9083-84FCFE60F5CE}"/>
+              </a:ext>
+            </a:extLst>
+          </p:cNvPr>
+          <p:cNvSpPr>
+            <a:spLocks xmlns:a="http://schemas.openxmlformats.org/drawingml/2006/main" noGrp="1"/>
+          </p:cNvSpPr>
+          <p:nvPr/>
+        </p:nvSpPr>
+        <p:spPr>
+          <a:xfrm xmlns:a="http://schemas.openxmlformats.org/drawingml/2006/main">
+            <a:off x="609600" y="1257300"/>
+            <a:ext cx="10972800" cy="619125"/>
+          </a:xfrm>
+          <a:prstGeom xmlns:a="http://schemas.openxmlformats.org/drawingml/2006/main" prst="rect">
+            <a:avLst/>
+          </a:prstGeom>
+          <a:noFill xmlns:a="http://schemas.openxmlformats.org/drawingml/2006/main"/>
+          <a:ln xmlns:a="http://schemas.openxmlformats.org/drawingml/2006/main" w="0">
+            <a:noFill/>
+          </a:ln>
+        </p:spPr>
+        <p:txBody>
+          <a:bodyPr xmlns:a="http://schemas.openxmlformats.org/drawingml/2006/main"/>
+          <a:lstStyle xmlns:a="http://schemas.openxmlformats.org/drawingml/2006/main">
+            <a:defPPr>
+              <a:defRPr sz="1800" b="0">
+                <a:solidFill>
+                  <a:srgbClr val="65757B"/>
+                </a:solidFill>
+                <a:latin typeface="Arial"/>
+                <a:ea typeface="Arial"/>
+                <a:cs typeface="Arial"/>
+              </a:defRPr>
+            </a:defPPr>
+            <a:lvl1pPr>
+              <a:defRPr sz="1800" b="0">
+                <a:solidFill>
+                  <a:srgbClr val="65757B"/>
+                </a:solidFill>
+                <a:latin typeface="Arial"/>
+                <a:ea typeface="Arial"/>
+                <a:cs typeface="Arial"/>
+              </a:defRPr>
+            </a:lvl1pPr>
+            <a:lvl2pPr>
+              <a:defRPr sz="1800" b="0">
+                <a:solidFill>
+                  <a:srgbClr val="65757B"/>
+                </a:solidFill>
+                <a:latin typeface="Arial"/>
+                <a:ea typeface="Arial"/>
+                <a:cs typeface="Arial"/>
+              </a:defRPr>
+            </a:lvl2pPr>
+            <a:lvl3pPr>
+              <a:defRPr sz="1800" b="0">
+                <a:solidFill>
+                  <a:srgbClr val="65757B"/>
+                </a:solidFill>
+                <a:latin typeface="Arial"/>
+                <a:ea typeface="Arial"/>
+                <a:cs typeface="Arial"/>
+              </a:defRPr>
+            </a:lvl3pPr>
+            <a:lvl4pPr>
+              <a:defRPr sz="1800" b="0">
+                <a:solidFill>
+                  <a:srgbClr val="65757B"/>
+                </a:solidFill>
+                <a:latin typeface="Arial"/>
+                <a:ea typeface="Arial"/>
+                <a:cs typeface="Arial"/>
+              </a:defRPr>
+            </a:lvl4pPr>
+            <a:lvl5pPr>
+              <a:defRPr sz="1800" b="0">
+                <a:solidFill>
+                  <a:srgbClr val="65757B"/>
+                </a:solidFill>
+                <a:latin typeface="Arial"/>
+                <a:ea typeface="Arial"/>
+                <a:cs typeface="Arial"/>
+              </a:defRPr>
+            </a:lvl5pPr>
+            <a:lvl6pPr>
+              <a:defRPr sz="1800" b="0">
+                <a:solidFill>
+                  <a:srgbClr val="65757B"/>
+                </a:solidFill>
+                <a:latin typeface="Arial"/>
+                <a:ea typeface="Arial"/>
+                <a:cs typeface="Arial"/>
+              </a:defRPr>
+            </a:lvl6pPr>
+            <a:lvl7pPr>
+              <a:defRPr sz="1800" b="0">
+                <a:solidFill>
+                  <a:srgbClr val="65757B"/>
+                </a:solidFill>
+                <a:latin typeface="Arial"/>
+                <a:ea typeface="Arial"/>
+                <a:cs typeface="Arial"/>
+              </a:defRPr>
+            </a:lvl7pPr>
+            <a:lvl8pPr>
+              <a:defRPr sz="1800" b="0">
+                <a:solidFill>
+                  <a:srgbClr val="65757B"/>
+                </a:solidFill>
+                <a:latin typeface="Arial"/>
+                <a:ea typeface="Arial"/>
+                <a:cs typeface="Arial"/>
+              </a:defRPr>
+            </a:lvl8pPr>
+            <a:lvl9pPr>
+              <a:defRPr sz="1800" b="0">
+                <a:solidFill>
+                  <a:srgbClr val="65757B"/>
+                </a:solidFill>
+                <a:latin typeface="Arial"/>
+                <a:ea typeface="Arial"/>
+                <a:cs typeface="Arial"/>
+              </a:defRPr>
+            </a:lvl9pPr>
+          </a:lstStyle>
+          <a:p xmlns:a="http://schemas.openxmlformats.org/drawingml/2006/main">
+            <a:pPr>
+              <a:defRPr sz="1800" b="0">
+                <a:solidFill>
+                  <a:srgbClr val="65757B"/>
+                </a:solidFill>
+                <a:latin typeface="Arial"/>
+                <a:ea typeface="Arial"/>
+                <a:cs typeface="Arial"/>
+              </a:defRPr>
+            </a:pPr>
+            <a:r>
+              <a:rPr sz="1800" b="0">
+                <a:solidFill>
+                  <a:srgbClr val="65757B"/>
+                </a:solidFill>
+                <a:latin typeface="Arial"/>
+                <a:ea typeface="Arial"/>
+                <a:cs typeface="Arial"/>
+              </a:rPr>
+              <a:t>Public source, inspectable artifacts and explicit next work</a:t>
+            </a:r>
+          </a:p>
+        </p:txBody>
+      </p:sp>
+      <p:sp>
+        <p:nvSpPr>
+          <p:cNvPr id="3" name="">
+            <a:extLst xmlns:a="http://schemas.openxmlformats.org/drawingml/2006/main">
+              <a:ext uri="{FF2B5EF4-FFF2-40B4-BE49-F238E27FC236}">
+                <a16:creationId xmlns:a16="http://schemas.microsoft.com/office/drawing/2014/main" id="{7C9F42DB-F345-4915-BE5A-0F160EBB37D3}"/>
+              </a:ext>
+            </a:extLst>
+          </p:cNvPr>
+          <p:cNvSpPr>
+            <a:spLocks xmlns:a="http://schemas.openxmlformats.org/drawingml/2006/main" noGrp="1"/>
+          </p:cNvSpPr>
+          <p:nvPr/>
+        </p:nvSpPr>
+        <p:spPr>
+          <a:xfrm xmlns:a="http://schemas.openxmlformats.org/drawingml/2006/main">
+            <a:off x="704850" y="2190750"/>
+            <a:ext cx="10668000" cy="838200"/>
+          </a:xfrm>
+          <a:prstGeom xmlns:a="http://schemas.openxmlformats.org/drawingml/2006/main" prst="rect">
+            <a:avLst/>
+          </a:prstGeom>
+          <a:noFill xmlns:a="http://schemas.openxmlformats.org/drawingml/2006/main"/>
+          <a:ln xmlns:a="http://schemas.openxmlformats.org/drawingml/2006/main" w="0">
+            <a:noFill/>
+          </a:ln>
+        </p:spPr>
+        <p:txBody>
+          <a:bodyPr xmlns:a="http://schemas.openxmlformats.org/drawingml/2006/main"/>
+          <a:lstStyle xmlns:a="http://schemas.openxmlformats.org/drawingml/2006/main">
+            <a:defPPr>
+              <a:defRPr sz="2250" b="0">
+                <a:solidFill>
+                  <a:srgbClr val="0E766E"/>
+                </a:solidFill>
+                <a:latin typeface="Arial"/>
+                <a:ea typeface="Arial"/>
+                <a:cs typeface="Arial"/>
+              </a:defRPr>
+            </a:defPPr>
+            <a:lvl1pPr>
+              <a:defRPr sz="2250" b="0">
+                <a:solidFill>
+                  <a:srgbClr val="0E766E"/>
+                </a:solidFill>
+                <a:latin typeface="Arial"/>
+                <a:ea typeface="Arial"/>
+                <a:cs typeface="Arial"/>
+              </a:defRPr>
+            </a:lvl1pPr>
+            <a:lvl2pPr>
+              <a:defRPr sz="2250" b="0">
+                <a:solidFill>
+                  <a:srgbClr val="0E766E"/>
+                </a:solidFill>
+                <a:latin typeface="Arial"/>
+                <a:ea typeface="Arial"/>
+                <a:cs typeface="Arial"/>
+              </a:defRPr>
+            </a:lvl2pPr>
+            <a:lvl3pPr>
+              <a:defRPr sz="2250" b="0">
+                <a:solidFill>
+                  <a:srgbClr val="0E766E"/>
+                </a:solidFill>
+                <a:latin typeface="Arial"/>
+                <a:ea typeface="Arial"/>
+                <a:cs typeface="Arial"/>
+              </a:defRPr>
+            </a:lvl3pPr>
+            <a:lvl4pPr>
+              <a:defRPr sz="2250" b="0">
+                <a:solidFill>
+                  <a:srgbClr val="0E766E"/>
+                </a:solidFill>
+                <a:latin typeface="Arial"/>
+                <a:ea typeface="Arial"/>
+                <a:cs typeface="Arial"/>
+              </a:defRPr>
+            </a:lvl4pPr>
+            <a:lvl5pPr>
+              <a:defRPr sz="2250" b="0">
+                <a:solidFill>
+                  <a:srgbClr val="0E766E"/>
+                </a:solidFill>
+                <a:latin typeface="Arial"/>
+                <a:ea typeface="Arial"/>
+                <a:cs typeface="Arial"/>
+              </a:defRPr>
+            </a:lvl5pPr>
+            <a:lvl6pPr>
+              <a:defRPr sz="2250" b="0">
+                <a:solidFill>
+                  <a:srgbClr val="0E766E"/>
+                </a:solidFill>
+                <a:latin typeface="Arial"/>
+                <a:ea typeface="Arial"/>
+                <a:cs typeface="Arial"/>
+              </a:defRPr>
+            </a:lvl6pPr>
+            <a:lvl7pPr>
+              <a:defRPr sz="2250" b="0">
+                <a:solidFill>
+                  <a:srgbClr val="0E766E"/>
+                </a:solidFill>
+                <a:latin typeface="Arial"/>
+                <a:ea typeface="Arial"/>
+                <a:cs typeface="Arial"/>
+              </a:defRPr>
+            </a:lvl7pPr>
+            <a:lvl8pPr>
+              <a:defRPr sz="2250" b="0">
+                <a:solidFill>
+                  <a:srgbClr val="0E766E"/>
+                </a:solidFill>
+                <a:latin typeface="Arial"/>
+                <a:ea typeface="Arial"/>
+                <a:cs typeface="Arial"/>
+              </a:defRPr>
+            </a:lvl8pPr>
+            <a:lvl9pPr>
+              <a:defRPr sz="2250" b="0">
+                <a:solidFill>
+                  <a:srgbClr val="0E766E"/>
+                </a:solidFill>
+                <a:latin typeface="Arial"/>
+                <a:ea typeface="Arial"/>
+                <a:cs typeface="Arial"/>
+              </a:defRPr>
+            </a:lvl9pPr>
+          </a:lstStyle>
+          <a:p xmlns:a="http://schemas.openxmlformats.org/drawingml/2006/main">
+            <a:pPr>
+              <a:defRPr sz="2250" b="0">
+                <a:solidFill>
+                  <a:srgbClr val="0E766E"/>
+                </a:solidFill>
+                <a:latin typeface="Arial"/>
+                <a:ea typeface="Arial"/>
+                <a:cs typeface="Arial"/>
+              </a:defRPr>
+            </a:pPr>
+            <a:r>
+              <a:rPr sz="2250" b="0">
+                <a:solidFill>
+                  <a:srgbClr val="0E766E"/>
+                </a:solidFill>
+                <a:latin typeface="Arial"/>
+                <a:ea typeface="Arial"/>
+                <a:cs typeface="Arial"/>
+              </a:rPr>
+              <a:t>README, model cards and the audit link every claim to evidence</a:t>
+            </a:r>
+          </a:p>
+        </p:txBody>
+      </p:sp>
+      <p:sp>
+        <p:nvSpPr>
+          <p:cNvPr id="4" name="">
+            <a:extLst xmlns:a="http://schemas.openxmlformats.org/drawingml/2006/main">
+              <a:ext uri="{FF2B5EF4-FFF2-40B4-BE49-F238E27FC236}">
+                <a16:creationId xmlns:a16="http://schemas.microsoft.com/office/drawing/2014/main" id="{EDB68E6D-CE6E-4E12-8BE4-BE51ADA66129}"/>
+              </a:ext>
+            </a:extLst>
+          </p:cNvPr>
+          <p:cNvSpPr>
+            <a:spLocks xmlns:a="http://schemas.openxmlformats.org/drawingml/2006/main" noGrp="1"/>
+          </p:cNvSpPr>
+          <p:nvPr/>
+        </p:nvSpPr>
+        <p:spPr>
+          <a:xfrm xmlns:a="http://schemas.openxmlformats.org/drawingml/2006/main">
+            <a:off x="704850" y="3119438"/>
+            <a:ext cx="10668000" cy="838200"/>
+          </a:xfrm>
+          <a:prstGeom xmlns:a="http://schemas.openxmlformats.org/drawingml/2006/main" prst="rect">
+            <a:avLst/>
+          </a:prstGeom>
+          <a:noFill xmlns:a="http://schemas.openxmlformats.org/drawingml/2006/main"/>
+          <a:ln xmlns:a="http://schemas.openxmlformats.org/drawingml/2006/main" w="0">
+            <a:noFill/>
+          </a:ln>
+        </p:spPr>
+        <p:txBody>
+          <a:bodyPr xmlns:a="http://schemas.openxmlformats.org/drawingml/2006/main"/>
+          <a:lstStyle xmlns:a="http://schemas.openxmlformats.org/drawingml/2006/main">
+            <a:defPPr>
+              <a:defRPr sz="2250" b="0">
+                <a:solidFill>
+                  <a:srgbClr val="17242B"/>
+                </a:solidFill>
+                <a:latin typeface="Arial"/>
+                <a:ea typeface="Arial"/>
+                <a:cs typeface="Arial"/>
+              </a:defRPr>
+            </a:defPPr>
+            <a:lvl1pPr>
+              <a:defRPr sz="2250" b="0">
+                <a:solidFill>
+                  <a:srgbClr val="17242B"/>
+                </a:solidFill>
+                <a:latin typeface="Arial"/>
+                <a:ea typeface="Arial"/>
+                <a:cs typeface="Arial"/>
+              </a:defRPr>
+            </a:lvl1pPr>
+            <a:lvl2pPr>
+              <a:defRPr sz="2250" b="0">
+                <a:solidFill>
+                  <a:srgbClr val="17242B"/>
+                </a:solidFill>
+                <a:latin typeface="Arial"/>
+                <a:ea typeface="Arial"/>
+                <a:cs typeface="Arial"/>
+              </a:defRPr>
+            </a:lvl2pPr>
+            <a:lvl3pPr>
+              <a:defRPr sz="2250" b="0">
+                <a:solidFill>
+                  <a:srgbClr val="17242B"/>
+                </a:solidFill>
+                <a:latin typeface="Arial"/>
+                <a:ea typeface="Arial"/>
+                <a:cs typeface="Arial"/>
+              </a:defRPr>
+            </a:lvl3pPr>
+            <a:lvl4pPr>
+              <a:defRPr sz="2250" b="0">
+                <a:solidFill>
+                  <a:srgbClr val="17242B"/>
+                </a:solidFill>
+                <a:latin typeface="Arial"/>
+                <a:ea typeface="Arial"/>
+                <a:cs typeface="Arial"/>
+              </a:defRPr>
+            </a:lvl4pPr>
+            <a:lvl5pPr>
+              <a:defRPr sz="2250" b="0">
+                <a:solidFill>
+                  <a:srgbClr val="17242B"/>
+                </a:solidFill>
+                <a:latin typeface="Arial"/>
+                <a:ea typeface="Arial"/>
+                <a:cs typeface="Arial"/>
+              </a:defRPr>
+            </a:lvl5pPr>
+            <a:lvl6pPr>
+              <a:defRPr sz="2250" b="0">
+                <a:solidFill>
+                  <a:srgbClr val="17242B"/>
+                </a:solidFill>
+                <a:latin typeface="Arial"/>
+                <a:ea typeface="Arial"/>
+                <a:cs typeface="Arial"/>
+              </a:defRPr>
+            </a:lvl6pPr>
+            <a:lvl7pPr>
+              <a:defRPr sz="2250" b="0">
+                <a:solidFill>
+                  <a:srgbClr val="17242B"/>
+                </a:solidFill>
+                <a:latin typeface="Arial"/>
+                <a:ea typeface="Arial"/>
+                <a:cs typeface="Arial"/>
+              </a:defRPr>
+            </a:lvl7pPr>
+            <a:lvl8pPr>
+              <a:defRPr sz="2250" b="0">
+                <a:solidFill>
+                  <a:srgbClr val="17242B"/>
+                </a:solidFill>
+                <a:latin typeface="Arial"/>
+                <a:ea typeface="Arial"/>
+                <a:cs typeface="Arial"/>
+              </a:defRPr>
+            </a:lvl8pPr>
+            <a:lvl9pPr>
+              <a:defRPr sz="2250" b="0">
+                <a:solidFill>
+                  <a:srgbClr val="17242B"/>
+                </a:solidFill>
+                <a:latin typeface="Arial"/>
+                <a:ea typeface="Arial"/>
+                <a:cs typeface="Arial"/>
+              </a:defRPr>
+            </a:lvl9pPr>
+          </a:lstStyle>
+          <a:p xmlns:a="http://schemas.openxmlformats.org/drawingml/2006/main">
+            <a:pPr>
+              <a:defRPr sz="2250" b="0">
+                <a:solidFill>
+                  <a:srgbClr val="17242B"/>
+                </a:solidFill>
+                <a:latin typeface="Arial"/>
+                <a:ea typeface="Arial"/>
+                <a:cs typeface="Arial"/>
+              </a:defRPr>
+            </a:pPr>
+            <a:r>
+              <a:rPr sz="2250" b="0">
+                <a:solidFill>
+                  <a:srgbClr val="17242B"/>
+                </a:solidFill>
+                <a:latin typeface="Arial"/>
+                <a:ea typeface="Arial"/>
+                <a:cs typeface="Arial"/>
+              </a:rPr>
+              <a:t>Persisted inference reproduces the benchmark and exposes exact feature calculations</a:t>
+            </a:r>
+          </a:p>
+        </p:txBody>
+      </p:sp>
+      <p:sp>
+        <p:nvSpPr>
+          <p:cNvPr id="5" name="">
+            <a:extLst xmlns:a="http://schemas.openxmlformats.org/drawingml/2006/main">
+              <a:ext uri="{FF2B5EF4-FFF2-40B4-BE49-F238E27FC236}">
+                <a16:creationId xmlns:a16="http://schemas.microsoft.com/office/drawing/2014/main" id="{5100C02D-97AB-4976-B095-09E13373DFF3}"/>
+              </a:ext>
+            </a:extLst>
+          </p:cNvPr>
+          <p:cNvSpPr>
+            <a:spLocks xmlns:a="http://schemas.openxmlformats.org/drawingml/2006/main" noGrp="1"/>
+          </p:cNvSpPr>
+          <p:nvPr/>
+        </p:nvSpPr>
+        <p:spPr>
+          <a:xfrm xmlns:a="http://schemas.openxmlformats.org/drawingml/2006/main">
+            <a:off x="704850" y="4048125"/>
+            <a:ext cx="10668000" cy="838200"/>
+          </a:xfrm>
+          <a:prstGeom xmlns:a="http://schemas.openxmlformats.org/drawingml/2006/main" prst="rect">
+            <a:avLst/>
+          </a:prstGeom>
+          <a:noFill xmlns:a="http://schemas.openxmlformats.org/drawingml/2006/main"/>
+          <a:ln xmlns:a="http://schemas.openxmlformats.org/drawingml/2006/main" w="0">
+            <a:noFill/>
+          </a:ln>
+        </p:spPr>
+        <p:txBody>
+          <a:bodyPr xmlns:a="http://schemas.openxmlformats.org/drawingml/2006/main"/>
+          <a:lstStyle xmlns:a="http://schemas.openxmlformats.org/drawingml/2006/main">
+            <a:defPPr>
+              <a:defRPr sz="2250" b="0">
+                <a:solidFill>
+                  <a:srgbClr val="17242B"/>
+                </a:solidFill>
+                <a:latin typeface="Arial"/>
+                <a:ea typeface="Arial"/>
+                <a:cs typeface="Arial"/>
+              </a:defRPr>
+            </a:defPPr>
+            <a:lvl1pPr>
+              <a:defRPr sz="2250" b="0">
+                <a:solidFill>
+                  <a:srgbClr val="17242B"/>
+                </a:solidFill>
+                <a:latin typeface="Arial"/>
+                <a:ea typeface="Arial"/>
+                <a:cs typeface="Arial"/>
+              </a:defRPr>
+            </a:lvl1pPr>
+            <a:lvl2pPr>
+              <a:defRPr sz="2250" b="0">
+                <a:solidFill>
+                  <a:srgbClr val="17242B"/>
+                </a:solidFill>
+                <a:latin typeface="Arial"/>
+                <a:ea typeface="Arial"/>
+                <a:cs typeface="Arial"/>
+              </a:defRPr>
+            </a:lvl2pPr>
+            <a:lvl3pPr>
+              <a:defRPr sz="2250" b="0">
+                <a:solidFill>
+                  <a:srgbClr val="17242B"/>
+                </a:solidFill>
+                <a:latin typeface="Arial"/>
+                <a:ea typeface="Arial"/>
+                <a:cs typeface="Arial"/>
+              </a:defRPr>
+            </a:lvl3pPr>
+            <a:lvl4pPr>
+              <a:defRPr sz="2250" b="0">
+                <a:solidFill>
+                  <a:srgbClr val="17242B"/>
+                </a:solidFill>
+                <a:latin typeface="Arial"/>
+                <a:ea typeface="Arial"/>
+                <a:cs typeface="Arial"/>
+              </a:defRPr>
+            </a:lvl4pPr>
+            <a:lvl5pPr>
+              <a:defRPr sz="2250" b="0">
+                <a:solidFill>
+                  <a:srgbClr val="17242B"/>
+                </a:solidFill>
+                <a:latin typeface="Arial"/>
+                <a:ea typeface="Arial"/>
+                <a:cs typeface="Arial"/>
+              </a:defRPr>
+            </a:lvl5pPr>
+            <a:lvl6pPr>
+              <a:defRPr sz="2250" b="0">
+                <a:solidFill>
+                  <a:srgbClr val="17242B"/>
+                </a:solidFill>
+                <a:latin typeface="Arial"/>
+                <a:ea typeface="Arial"/>
+                <a:cs typeface="Arial"/>
+              </a:defRPr>
+            </a:lvl6pPr>
+            <a:lvl7pPr>
+              <a:defRPr sz="2250" b="0">
+                <a:solidFill>
+                  <a:srgbClr val="17242B"/>
+                </a:solidFill>
+                <a:latin typeface="Arial"/>
+                <a:ea typeface="Arial"/>
+                <a:cs typeface="Arial"/>
+              </a:defRPr>
+            </a:lvl7pPr>
+            <a:lvl8pPr>
+              <a:defRPr sz="2250" b="0">
+                <a:solidFill>
+                  <a:srgbClr val="17242B"/>
+                </a:solidFill>
+                <a:latin typeface="Arial"/>
+                <a:ea typeface="Arial"/>
+                <a:cs typeface="Arial"/>
+              </a:defRPr>
+            </a:lvl8pPr>
+            <a:lvl9pPr>
+              <a:defRPr sz="2250" b="0">
+                <a:solidFill>
+                  <a:srgbClr val="17242B"/>
+                </a:solidFill>
+                <a:latin typeface="Arial"/>
+                <a:ea typeface="Arial"/>
+                <a:cs typeface="Arial"/>
+              </a:defRPr>
+            </a:lvl9pPr>
+          </a:lstStyle>
+          <a:p xmlns:a="http://schemas.openxmlformats.org/drawingml/2006/main">
+            <a:pPr>
+              <a:defRPr sz="2250" b="0">
+                <a:solidFill>
+                  <a:srgbClr val="17242B"/>
+                </a:solidFill>
+                <a:latin typeface="Arial"/>
+                <a:ea typeface="Arial"/>
+                <a:cs typeface="Arial"/>
+              </a:defRPr>
+            </a:pPr>
+            <a:r>
+              <a:rPr sz="2250" b="0">
+                <a:solidFill>
+                  <a:srgbClr val="17242B"/>
+                </a:solidFill>
+                <a:latin typeface="Arial"/>
+                <a:ea typeface="Arial"/>
+                <a:cs typeface="Arial"/>
+              </a:rPr>
+              <a:t>The required video remains a human recording and upload task</a:t>
+            </a:r>
+          </a:p>
+        </p:txBody>
+      </p:sp>
+      <p:sp>
+        <p:nvSpPr>
+          <p:cNvPr id="6" name="">
+            <a:extLst xmlns:a="http://schemas.openxmlformats.org/drawingml/2006/main">
+              <a:ext uri="{FF2B5EF4-FFF2-40B4-BE49-F238E27FC236}">
+                <a16:creationId xmlns:a16="http://schemas.microsoft.com/office/drawing/2014/main" id="{A6C41F10-6C7E-4FB6-B593-61BE58074BB8}"/>
+              </a:ext>
+            </a:extLst>
+          </p:cNvPr>
+          <p:cNvSpPr>
+            <a:spLocks xmlns:a="http://schemas.openxmlformats.org/drawingml/2006/main" noGrp="1"/>
+          </p:cNvSpPr>
+          <p:nvPr/>
+        </p:nvSpPr>
+        <p:spPr>
+          <a:xfrm xmlns:a="http://schemas.openxmlformats.org/drawingml/2006/main">
+            <a:off x="704850" y="4976813"/>
+            <a:ext cx="10668000" cy="838200"/>
+          </a:xfrm>
+          <a:prstGeom xmlns:a="http://schemas.openxmlformats.org/drawingml/2006/main" prst="rect">
+            <a:avLst/>
+          </a:prstGeom>
+          <a:noFill xmlns:a="http://schemas.openxmlformats.org/drawingml/2006/main"/>
+          <a:ln xmlns:a="http://schemas.openxmlformats.org/drawingml/2006/main" w="0">
+            <a:noFill/>
+          </a:ln>
+        </p:spPr>
+        <p:txBody>
+          <a:bodyPr xmlns:a="http://schemas.openxmlformats.org/drawingml/2006/main"/>
+          <a:lstStyle xmlns:a="http://schemas.openxmlformats.org/drawingml/2006/main">
+            <a:defPPr>
+              <a:defRPr sz="2250" b="0">
+                <a:solidFill>
+                  <a:srgbClr val="17242B"/>
+                </a:solidFill>
+                <a:latin typeface="Arial"/>
+                <a:ea typeface="Arial"/>
+                <a:cs typeface="Arial"/>
+              </a:defRPr>
+            </a:defPPr>
+            <a:lvl1pPr>
+              <a:defRPr sz="2250" b="0">
+                <a:solidFill>
+                  <a:srgbClr val="17242B"/>
+                </a:solidFill>
+                <a:latin typeface="Arial"/>
+                <a:ea typeface="Arial"/>
+                <a:cs typeface="Arial"/>
+              </a:defRPr>
+            </a:lvl1pPr>
+            <a:lvl2pPr>
+              <a:defRPr sz="2250" b="0">
+                <a:solidFill>
+                  <a:srgbClr val="17242B"/>
+                </a:solidFill>
+                <a:latin typeface="Arial"/>
+                <a:ea typeface="Arial"/>
+                <a:cs typeface="Arial"/>
+              </a:defRPr>
+            </a:lvl2pPr>
+            <a:lvl3pPr>
+              <a:defRPr sz="2250" b="0">
+                <a:solidFill>
+                  <a:srgbClr val="17242B"/>
+                </a:solidFill>
+                <a:latin typeface="Arial"/>
+                <a:ea typeface="Arial"/>
+                <a:cs typeface="Arial"/>
+              </a:defRPr>
+            </a:lvl3pPr>
+            <a:lvl4pPr>
+              <a:defRPr sz="2250" b="0">
+                <a:solidFill>
+                  <a:srgbClr val="17242B"/>
+                </a:solidFill>
+                <a:latin typeface="Arial"/>
+                <a:ea typeface="Arial"/>
+                <a:cs typeface="Arial"/>
+              </a:defRPr>
+            </a:lvl4pPr>
+            <a:lvl5pPr>
+              <a:defRPr sz="2250" b="0">
+                <a:solidFill>
+                  <a:srgbClr val="17242B"/>
+                </a:solidFill>
+                <a:latin typeface="Arial"/>
+                <a:ea typeface="Arial"/>
+                <a:cs typeface="Arial"/>
+              </a:defRPr>
+            </a:lvl5pPr>
+            <a:lvl6pPr>
+              <a:defRPr sz="2250" b="0">
+                <a:solidFill>
+                  <a:srgbClr val="17242B"/>
+                </a:solidFill>
+                <a:latin typeface="Arial"/>
+                <a:ea typeface="Arial"/>
+                <a:cs typeface="Arial"/>
+              </a:defRPr>
+            </a:lvl6pPr>
+            <a:lvl7pPr>
+              <a:defRPr sz="2250" b="0">
+                <a:solidFill>
+                  <a:srgbClr val="17242B"/>
+                </a:solidFill>
+                <a:latin typeface="Arial"/>
+                <a:ea typeface="Arial"/>
+                <a:cs typeface="Arial"/>
+              </a:defRPr>
+            </a:lvl7pPr>
+            <a:lvl8pPr>
+              <a:defRPr sz="2250" b="0">
+                <a:solidFill>
+                  <a:srgbClr val="17242B"/>
+                </a:solidFill>
+                <a:latin typeface="Arial"/>
+                <a:ea typeface="Arial"/>
+                <a:cs typeface="Arial"/>
+              </a:defRPr>
+            </a:lvl8pPr>
+            <a:lvl9pPr>
+              <a:defRPr sz="2250" b="0">
+                <a:solidFill>
+                  <a:srgbClr val="17242B"/>
+                </a:solidFill>
+                <a:latin typeface="Arial"/>
+                <a:ea typeface="Arial"/>
+                <a:cs typeface="Arial"/>
+              </a:defRPr>
+            </a:lvl9pPr>
+          </a:lstStyle>
+          <a:p xmlns:a="http://schemas.openxmlformats.org/drawingml/2006/main">
+            <a:pPr>
+              <a:defRPr sz="2250" b="0">
+                <a:solidFill>
+                  <a:srgbClr val="17242B"/>
+                </a:solidFill>
+                <a:latin typeface="Arial"/>
+                <a:ea typeface="Arial"/>
+                <a:cs typeface="Arial"/>
+              </a:defRPr>
+            </a:pPr>
+            <a:r>
+              <a:rPr sz="2250" b="0">
+                <a:solidFill>
+                  <a:srgbClr val="17242B"/>
+                </a:solidFill>
+                <a:latin typeface="Arial"/>
+                <a:ea typeface="Arial"/>
+                <a:cs typeface="Arial"/>
+              </a:rPr>
+              <a:t>Clinical validation, clinician feedback and sim-to-real evaluation remain outstanding</a:t>
+            </a:r>
+          </a:p>
+        </p:txBody>
+      </p:sp>
+      <p:sp>
+        <p:nvSpPr>
+          <p:cNvPr id="7" name="">
+            <a:extLst xmlns:a="http://schemas.openxmlformats.org/drawingml/2006/main">
+              <a:ext uri="{FF2B5EF4-FFF2-40B4-BE49-F238E27FC236}">
+                <a16:creationId xmlns:a16="http://schemas.microsoft.com/office/drawing/2014/main" id="{DDF2C3F3-B0AA-442A-845A-12F453EAB09A}"/>
+              </a:ext>
+            </a:extLst>
+          </p:cNvPr>
+          <p:cNvSpPr>
+            <a:spLocks xmlns:a="http://schemas.openxmlformats.org/drawingml/2006/main" noGrp="1"/>
+          </p:cNvSpPr>
+          <p:nvPr/>
+        </p:nvSpPr>
+        <p:spPr>
+          <a:xfrm xmlns:a="http://schemas.openxmlformats.org/drawingml/2006/main">
+            <a:off x="609600" y="6343650"/>
+            <a:ext cx="10972800" cy="285750"/>
+          </a:xfrm>
+          <a:prstGeom xmlns:a="http://schemas.openxmlformats.org/drawingml/2006/main" prst="rect">
+            <a:avLst/>
+          </a:prstGeom>
+          <a:noFill xmlns:a="http://schemas.openxmlformats.org/drawingml/2006/main"/>
+          <a:ln xmlns:a="http://schemas.openxmlformats.org/drawingml/2006/main" w="0">
+            <a:noFill/>
+          </a:ln>
+        </p:spPr>
+        <p:txBody>
+          <a:bodyPr xmlns:a="http://schemas.openxmlformats.org/drawingml/2006/main"/>
+          <a:lstStyle xmlns:a="http://schemas.openxmlformats.org/drawingml/2006/main">
+            <a:defPPr>
+              <a:defRPr sz="1350" b="0">
+                <a:solidFill>
+                  <a:srgbClr val="65757B"/>
+                </a:solidFill>
+                <a:latin typeface="Arial"/>
+                <a:ea typeface="Arial"/>
+                <a:cs typeface="Arial"/>
+              </a:defRPr>
+            </a:defPPr>
+            <a:lvl1pPr>
+              <a:defRPr sz="1350" b="0">
+                <a:solidFill>
+                  <a:srgbClr val="65757B"/>
+                </a:solidFill>
+                <a:latin typeface="Arial"/>
+                <a:ea typeface="Arial"/>
+                <a:cs typeface="Arial"/>
+              </a:defRPr>
+            </a:lvl1pPr>
+            <a:lvl2pPr>
+              <a:defRPr sz="1350" b="0">
+                <a:solidFill>
+                  <a:srgbClr val="65757B"/>
+                </a:solidFill>
+                <a:latin typeface="Arial"/>
+                <a:ea typeface="Arial"/>
+                <a:cs typeface="Arial"/>
+              </a:defRPr>
+            </a:lvl2pPr>
+            <a:lvl3pPr>
+              <a:defRPr sz="1350" b="0">
+                <a:solidFill>
+                  <a:srgbClr val="65757B"/>
+                </a:solidFill>
+                <a:latin typeface="Arial"/>
+                <a:ea typeface="Arial"/>
+                <a:cs typeface="Arial"/>
+              </a:defRPr>
+            </a:lvl3pPr>
+            <a:lvl4pPr>
+              <a:defRPr sz="1350" b="0">
+                <a:solidFill>
+                  <a:srgbClr val="65757B"/>
+                </a:solidFill>
+                <a:latin typeface="Arial"/>
+                <a:ea typeface="Arial"/>
+                <a:cs typeface="Arial"/>
+              </a:defRPr>
+            </a:lvl4pPr>
+            <a:lvl5pPr>
+              <a:defRPr sz="1350" b="0">
+                <a:solidFill>
+                  <a:srgbClr val="65757B"/>
+                </a:solidFill>
+                <a:latin typeface="Arial"/>
+                <a:ea typeface="Arial"/>
+                <a:cs typeface="Arial"/>
+              </a:defRPr>
+            </a:lvl5pPr>
+            <a:lvl6pPr>
+              <a:defRPr sz="1350" b="0">
+                <a:solidFill>
+                  <a:srgbClr val="65757B"/>
+                </a:solidFill>
+                <a:latin typeface="Arial"/>
+                <a:ea typeface="Arial"/>
+                <a:cs typeface="Arial"/>
+              </a:defRPr>
+            </a:lvl6pPr>
+            <a:lvl7pPr>
+              <a:defRPr sz="1350" b="0">
+                <a:solidFill>
+                  <a:srgbClr val="65757B"/>
+                </a:solidFill>
+                <a:latin typeface="Arial"/>
+                <a:ea typeface="Arial"/>
+                <a:cs typeface="Arial"/>
+              </a:defRPr>
+            </a:lvl7pPr>
+            <a:lvl8pPr>
+              <a:defRPr sz="1350" b="0">
+                <a:solidFill>
+                  <a:srgbClr val="65757B"/>
+                </a:solidFill>
+                <a:latin typeface="Arial"/>
+                <a:ea typeface="Arial"/>
+                <a:cs typeface="Arial"/>
+              </a:defRPr>
+            </a:lvl8pPr>
+            <a:lvl9pPr>
+              <a:defRPr sz="1350" b="0">
+                <a:solidFill>
+                  <a:srgbClr val="65757B"/>
+                </a:solidFill>
+                <a:latin typeface="Arial"/>
+                <a:ea typeface="Arial"/>
+                <a:cs typeface="Arial"/>
+              </a:defRPr>
+            </a:lvl9pPr>
+          </a:lstStyle>
+          <a:p xmlns:a="http://schemas.openxmlformats.org/drawingml/2006/main">
+            <a:pPr>
+              <a:defRPr sz="1350" b="0">
+                <a:solidFill>
+                  <a:srgbClr val="65757B"/>
+                </a:solidFill>
+                <a:latin typeface="Arial"/>
+                <a:ea typeface="Arial"/>
+                <a:cs typeface="Arial"/>
+              </a:defRPr>
+            </a:pPr>
+            <a:r>
+              <a:rPr sz="1350" b="0">
+                <a:solidFill>
+                  <a:srgbClr val="65757B"/>
+                </a:solidFill>
+                <a:latin typeface="Arial"/>
+                <a:ea typeface="Arial"/>
+                <a:cs typeface="Arial"/>
+              </a:rPr>
+              <a:t>Synthetic research prototype. Not for diagnosis, contraception or conception planning.</a:t>
+            </a:r>
+          </a:p>
+        </p:txBody>
+      </p:sp>
+    </p:spTree>
+    <p:extLst>
+      <p:ext uri="{BB962C8B-B14F-4D97-AF65-F5344CB8AC3E}">
+        <p14:creationId xmlns:p14="http://schemas.microsoft.com/office/powerpoint/2010/main" val="660487840"/>
       </p:ext>
     </p:extLst>
   </p:cSld>
@@ -24770,7 +25962,7 @@
           <p:cNvPr id="8" name="">
             <a:extLst xmlns:a="http://schemas.openxmlformats.org/drawingml/2006/main">
               <a:ext uri="{FF2B5EF4-FFF2-40B4-BE49-F238E27FC236}">
-                <a16:creationId xmlns:a16="http://schemas.microsoft.com/office/drawing/2014/main" id="{045CAB8A-2195-4462-8FB4-B6E40C6CF9DF}"/>
+                <a16:creationId xmlns:a16="http://schemas.microsoft.com/office/drawing/2014/main" id="{04F10932-5D61-43A2-BF41-A198D72F2B06}"/>
               </a:ext>
             </a:extLst>
           </p:cNvPr>
@@ -24926,7 +26118,7 @@
           <p:cNvPr id="2" name="">
             <a:extLst xmlns:a="http://schemas.openxmlformats.org/drawingml/2006/main">
               <a:ext uri="{FF2B5EF4-FFF2-40B4-BE49-F238E27FC236}">
-                <a16:creationId xmlns:a16="http://schemas.microsoft.com/office/drawing/2014/main" id="{EBED2DE4-7A30-40DF-B8CF-EF66D5F45C2E}"/>
+                <a16:creationId xmlns:a16="http://schemas.microsoft.com/office/drawing/2014/main" id="{4BA0615A-FD2E-48CC-91C6-D6FEA4BB174D}"/>
               </a:ext>
             </a:extLst>
           </p:cNvPr>
@@ -25082,7 +26274,7 @@
           <p:cNvPr id="3" name="">
             <a:extLst xmlns:a="http://schemas.openxmlformats.org/drawingml/2006/main">
               <a:ext uri="{FF2B5EF4-FFF2-40B4-BE49-F238E27FC236}">
-                <a16:creationId xmlns:a16="http://schemas.microsoft.com/office/drawing/2014/main" id="{2787612D-6833-4886-93F8-8CCDE32AD8BA}"/>
+                <a16:creationId xmlns:a16="http://schemas.microsoft.com/office/drawing/2014/main" id="{177CFCA6-8F3D-47A8-ABE1-C3CDEE47D18F}"/>
               </a:ext>
             </a:extLst>
           </p:cNvPr>
@@ -25238,7 +26430,7 @@
           <p:cNvPr id="4" name="">
             <a:extLst xmlns:a="http://schemas.openxmlformats.org/drawingml/2006/main">
               <a:ext uri="{FF2B5EF4-FFF2-40B4-BE49-F238E27FC236}">
-                <a16:creationId xmlns:a16="http://schemas.microsoft.com/office/drawing/2014/main" id="{69E02A95-6683-441C-846E-8312FD06DCEC}"/>
+                <a16:creationId xmlns:a16="http://schemas.microsoft.com/office/drawing/2014/main" id="{EBB1FEA4-99D3-4C65-8C0C-8D287ECF48F2}"/>
               </a:ext>
             </a:extLst>
           </p:cNvPr>
@@ -25394,7 +26586,7 @@
           <p:cNvPr id="5" name="">
             <a:extLst xmlns:a="http://schemas.openxmlformats.org/drawingml/2006/main">
               <a:ext uri="{FF2B5EF4-FFF2-40B4-BE49-F238E27FC236}">
-                <a16:creationId xmlns:a16="http://schemas.microsoft.com/office/drawing/2014/main" id="{E7EF65EA-A493-4760-838B-56CC7A7812C0}"/>
+                <a16:creationId xmlns:a16="http://schemas.microsoft.com/office/drawing/2014/main" id="{EAB16CB3-75F7-4FD8-A50F-34A9F19A4C05}"/>
               </a:ext>
             </a:extLst>
           </p:cNvPr>
@@ -25550,7 +26742,7 @@
           <p:cNvPr id="6" name="">
             <a:extLst xmlns:a="http://schemas.openxmlformats.org/drawingml/2006/main">
               <a:ext uri="{FF2B5EF4-FFF2-40B4-BE49-F238E27FC236}">
-                <a16:creationId xmlns:a16="http://schemas.microsoft.com/office/drawing/2014/main" id="{3E7DA9B8-9810-40F2-8230-1BA3CA4B76A2}"/>
+                <a16:creationId xmlns:a16="http://schemas.microsoft.com/office/drawing/2014/main" id="{92E9F4DE-7087-4756-A0E0-89240A03395D}"/>
               </a:ext>
             </a:extLst>
           </p:cNvPr>
@@ -25706,7 +26898,7 @@
           <p:cNvPr id="7" name="">
             <a:extLst xmlns:a="http://schemas.openxmlformats.org/drawingml/2006/main">
               <a:ext uri="{FF2B5EF4-FFF2-40B4-BE49-F238E27FC236}">
-                <a16:creationId xmlns:a16="http://schemas.microsoft.com/office/drawing/2014/main" id="{27AEE777-7D43-421B-9CF0-BED7C2D83D85}"/>
+                <a16:creationId xmlns:a16="http://schemas.microsoft.com/office/drawing/2014/main" id="{17C1427A-56B6-43EA-A525-A80DE298EFBE}"/>
               </a:ext>
             </a:extLst>
           </p:cNvPr>
@@ -25860,7 +27052,7 @@
     </p:spTree>
     <p:extLst>
       <p:ext uri="{BB962C8B-B14F-4D97-AF65-F5344CB8AC3E}">
-        <p14:creationId xmlns:p14="http://schemas.microsoft.com/office/powerpoint/2010/main" val="541574163"/>
+        <p14:creationId xmlns:p14="http://schemas.microsoft.com/office/powerpoint/2010/main" val="1360169619"/>
       </p:ext>
     </p:extLst>
   </p:cSld>
@@ -25891,7 +27083,7 @@
           <p:cNvPr id="7" name="">
             <a:extLst xmlns:a="http://schemas.openxmlformats.org/drawingml/2006/main">
               <a:ext uri="{FF2B5EF4-FFF2-40B4-BE49-F238E27FC236}">
-                <a16:creationId xmlns:a16="http://schemas.microsoft.com/office/drawing/2014/main" id="{97E1EF6F-3A1D-40E6-A3F1-5084A56935F8}"/>
+                <a16:creationId xmlns:a16="http://schemas.microsoft.com/office/drawing/2014/main" id="{355A7553-33D3-424E-8562-69889ACA9860}"/>
               </a:ext>
             </a:extLst>
           </p:cNvPr>
@@ -26047,7 +27239,7 @@
           <p:cNvPr id="2" name="">
             <a:extLst xmlns:a="http://schemas.openxmlformats.org/drawingml/2006/main">
               <a:ext uri="{FF2B5EF4-FFF2-40B4-BE49-F238E27FC236}">
-                <a16:creationId xmlns:a16="http://schemas.microsoft.com/office/drawing/2014/main" id="{E77AB112-CEAA-462A-A3FC-0941BCD1013D}"/>
+                <a16:creationId xmlns:a16="http://schemas.microsoft.com/office/drawing/2014/main" id="{25B535F2-9D65-4C81-A21D-5941115A20E5}"/>
               </a:ext>
             </a:extLst>
           </p:cNvPr>
@@ -26203,7 +27395,7 @@
           <p:cNvPr id="3" name="">
             <a:extLst xmlns:a="http://schemas.openxmlformats.org/drawingml/2006/main">
               <a:ext uri="{FF2B5EF4-FFF2-40B4-BE49-F238E27FC236}">
-                <a16:creationId xmlns:a16="http://schemas.microsoft.com/office/drawing/2014/main" id="{558308E6-7EEB-4461-99F7-8B311C17C91C}"/>
+                <a16:creationId xmlns:a16="http://schemas.microsoft.com/office/drawing/2014/main" id="{7BEAA500-F8BD-405B-94AC-3EFC4F2B2A73}"/>
               </a:ext>
             </a:extLst>
           </p:cNvPr>
@@ -26359,7 +27551,7 @@
           <p:cNvPr id="4" name="">
             <a:extLst xmlns:a="http://schemas.openxmlformats.org/drawingml/2006/main">
               <a:ext uri="{FF2B5EF4-FFF2-40B4-BE49-F238E27FC236}">
-                <a16:creationId xmlns:a16="http://schemas.microsoft.com/office/drawing/2014/main" id="{C506E515-1677-406C-92AA-FC7D06A85E87}"/>
+                <a16:creationId xmlns:a16="http://schemas.microsoft.com/office/drawing/2014/main" id="{43B586A4-2984-4C93-8461-0F11FFFF2AB0}"/>
               </a:ext>
             </a:extLst>
           </p:cNvPr>
@@ -26515,7 +27707,7 @@
           <p:cNvPr id="5" name="">
             <a:extLst xmlns:a="http://schemas.openxmlformats.org/drawingml/2006/main">
               <a:ext uri="{FF2B5EF4-FFF2-40B4-BE49-F238E27FC236}">
-                <a16:creationId xmlns:a16="http://schemas.microsoft.com/office/drawing/2014/main" id="{907C32B8-0867-41A7-B24B-EF79F3D8E86A}"/>
+                <a16:creationId xmlns:a16="http://schemas.microsoft.com/office/drawing/2014/main" id="{EDB853BC-69F3-428D-B207-EC653BA8FD4C}"/>
               </a:ext>
             </a:extLst>
           </p:cNvPr>
@@ -26671,7 +27863,7 @@
           <p:cNvPr id="6" name="">
             <a:extLst xmlns:a="http://schemas.openxmlformats.org/drawingml/2006/main">
               <a:ext uri="{FF2B5EF4-FFF2-40B4-BE49-F238E27FC236}">
-                <a16:creationId xmlns:a16="http://schemas.microsoft.com/office/drawing/2014/main" id="{96FBF50D-6DD6-4DCD-B9A1-FB01E839B6FE}"/>
+                <a16:creationId xmlns:a16="http://schemas.microsoft.com/office/drawing/2014/main" id="{5D920E5F-E0EA-48B0-B2C6-D5D0E1176D07}"/>
               </a:ext>
             </a:extLst>
           </p:cNvPr>
@@ -26825,7 +28017,7 @@
     </p:spTree>
     <p:extLst>
       <p:ext uri="{BB962C8B-B14F-4D97-AF65-F5344CB8AC3E}">
-        <p14:creationId xmlns:p14="http://schemas.microsoft.com/office/powerpoint/2010/main" val="1443381721"/>
+        <p14:creationId xmlns:p14="http://schemas.microsoft.com/office/powerpoint/2010/main" val="1280123030"/>
       </p:ext>
     </p:extLst>
   </p:cSld>
@@ -26856,7 +28048,7 @@
           <p:cNvPr id="14" name="">
             <a:extLst xmlns:a="http://schemas.openxmlformats.org/drawingml/2006/main">
               <a:ext uri="{FF2B5EF4-FFF2-40B4-BE49-F238E27FC236}">
-                <a16:creationId xmlns:a16="http://schemas.microsoft.com/office/drawing/2014/main" id="{FC49562F-ACC6-4399-9719-564E6E89773F}"/>
+                <a16:creationId xmlns:a16="http://schemas.microsoft.com/office/drawing/2014/main" id="{2EE008CB-7E35-4F9C-83B1-D0F28456E5E0}"/>
               </a:ext>
             </a:extLst>
           </p:cNvPr>
@@ -26887,7 +28079,7 @@
           <p:cNvPr id="13" name="">
             <a:extLst xmlns:a="http://schemas.openxmlformats.org/drawingml/2006/main">
               <a:ext uri="{FF2B5EF4-FFF2-40B4-BE49-F238E27FC236}">
-                <a16:creationId xmlns:a16="http://schemas.microsoft.com/office/drawing/2014/main" id="{0637B75C-57F4-4CDD-B89C-DE24EE5E2F88}"/>
+                <a16:creationId xmlns:a16="http://schemas.microsoft.com/office/drawing/2014/main" id="{32C54B74-1F55-40F9-AD9C-E21B4057A9D0}"/>
               </a:ext>
             </a:extLst>
           </p:cNvPr>
@@ -26918,7 +28110,7 @@
           <p:cNvPr id="12" name="">
             <a:extLst xmlns:a="http://schemas.openxmlformats.org/drawingml/2006/main">
               <a:ext uri="{FF2B5EF4-FFF2-40B4-BE49-F238E27FC236}">
-                <a16:creationId xmlns:a16="http://schemas.microsoft.com/office/drawing/2014/main" id="{B2D9C4E2-99EB-4B89-8832-D3EE67C6C203}"/>
+                <a16:creationId xmlns:a16="http://schemas.microsoft.com/office/drawing/2014/main" id="{1E355422-F9C7-422A-86C7-5F5178FC6359}"/>
               </a:ext>
             </a:extLst>
           </p:cNvPr>
@@ -26949,7 +28141,7 @@
           <p:cNvPr id="11" name="">
             <a:extLst xmlns:a="http://schemas.openxmlformats.org/drawingml/2006/main">
               <a:ext uri="{FF2B5EF4-FFF2-40B4-BE49-F238E27FC236}">
-                <a16:creationId xmlns:a16="http://schemas.microsoft.com/office/drawing/2014/main" id="{34298D20-A91C-47AF-B566-4235A2AAE3C2}"/>
+                <a16:creationId xmlns:a16="http://schemas.microsoft.com/office/drawing/2014/main" id="{5015C378-6862-49F9-9C95-CE2F60E6EC98}"/>
               </a:ext>
             </a:extLst>
           </p:cNvPr>
@@ -26982,7 +28174,7 @@
           <p:cNvPr id="10" name="">
             <a:extLst xmlns:a="http://schemas.openxmlformats.org/drawingml/2006/main">
               <a:ext uri="{FF2B5EF4-FFF2-40B4-BE49-F238E27FC236}">
-                <a16:creationId xmlns:a16="http://schemas.microsoft.com/office/drawing/2014/main" id="{24ACFF25-D172-43A9-B7FD-64A143C4BF5B}"/>
+                <a16:creationId xmlns:a16="http://schemas.microsoft.com/office/drawing/2014/main" id="{E84730C4-6814-4A03-9B64-DF7896FE9C88}"/>
               </a:ext>
             </a:extLst>
           </p:cNvPr>
@@ -27015,7 +28207,7 @@
           <p:cNvPr id="16" name="">
             <a:extLst xmlns:a="http://schemas.openxmlformats.org/drawingml/2006/main">
               <a:ext uri="{FF2B5EF4-FFF2-40B4-BE49-F238E27FC236}">
-                <a16:creationId xmlns:a16="http://schemas.microsoft.com/office/drawing/2014/main" id="{D183FBF1-2226-4EF2-9736-09C66F77ACA1}"/>
+                <a16:creationId xmlns:a16="http://schemas.microsoft.com/office/drawing/2014/main" id="{73CD01E6-9F77-41FA-A281-12A06D28C65F}"/>
               </a:ext>
             </a:extLst>
           </p:cNvPr>
@@ -27171,7 +28363,7 @@
           <p:cNvPr id="2" name="">
             <a:extLst xmlns:a="http://schemas.openxmlformats.org/drawingml/2006/main">
               <a:ext uri="{FF2B5EF4-FFF2-40B4-BE49-F238E27FC236}">
-                <a16:creationId xmlns:a16="http://schemas.microsoft.com/office/drawing/2014/main" id="{9D294192-8A10-4E6F-8322-A5AFA21B03A3}"/>
+                <a16:creationId xmlns:a16="http://schemas.microsoft.com/office/drawing/2014/main" id="{299B51F8-9051-4868-87F1-181ED8EE314D}"/>
               </a:ext>
             </a:extLst>
           </p:cNvPr>
@@ -27327,7 +28519,7 @@
           <p:cNvPr id="3" name="">
             <a:extLst xmlns:a="http://schemas.openxmlformats.org/drawingml/2006/main">
               <a:ext uri="{FF2B5EF4-FFF2-40B4-BE49-F238E27FC236}">
-                <a16:creationId xmlns:a16="http://schemas.microsoft.com/office/drawing/2014/main" id="{6650AF72-B2CD-49C4-A365-162C46CE0720}"/>
+                <a16:creationId xmlns:a16="http://schemas.microsoft.com/office/drawing/2014/main" id="{2FC2148C-07F2-46A0-BA10-82E54C3C7E1D}"/>
               </a:ext>
             </a:extLst>
           </p:cNvPr>
@@ -27510,7 +28702,7 @@
           <p:cNvPr id="4" name="">
             <a:extLst xmlns:a="http://schemas.openxmlformats.org/drawingml/2006/main">
               <a:ext uri="{FF2B5EF4-FFF2-40B4-BE49-F238E27FC236}">
-                <a16:creationId xmlns:a16="http://schemas.microsoft.com/office/drawing/2014/main" id="{BDF1473A-FD3D-4CE3-953E-F8223A1245F5}"/>
+                <a16:creationId xmlns:a16="http://schemas.microsoft.com/office/drawing/2014/main" id="{4E592417-EEA8-429C-B712-991C35416190}"/>
               </a:ext>
             </a:extLst>
           </p:cNvPr>
@@ -27693,7 +28885,7 @@
           <p:cNvPr id="5" name="">
             <a:extLst xmlns:a="http://schemas.openxmlformats.org/drawingml/2006/main">
               <a:ext uri="{FF2B5EF4-FFF2-40B4-BE49-F238E27FC236}">
-                <a16:creationId xmlns:a16="http://schemas.microsoft.com/office/drawing/2014/main" id="{F6D7A2A4-DCCB-4939-8CD5-E85B73F5FEA1}"/>
+                <a16:creationId xmlns:a16="http://schemas.microsoft.com/office/drawing/2014/main" id="{42936D9B-669E-4126-94E2-D37661733BDA}"/>
               </a:ext>
             </a:extLst>
           </p:cNvPr>
@@ -27876,7 +29068,7 @@
           <p:cNvPr id="6" name="">
             <a:extLst xmlns:a="http://schemas.openxmlformats.org/drawingml/2006/main">
               <a:ext uri="{FF2B5EF4-FFF2-40B4-BE49-F238E27FC236}">
-                <a16:creationId xmlns:a16="http://schemas.microsoft.com/office/drawing/2014/main" id="{4C67BAD4-FC8B-49C5-847D-1BD79D2ED93A}"/>
+                <a16:creationId xmlns:a16="http://schemas.microsoft.com/office/drawing/2014/main" id="{E4162F46-4CDE-4DDC-8580-06A1A57BB701}"/>
               </a:ext>
             </a:extLst>
           </p:cNvPr>
@@ -28059,7 +29251,7 @@
           <p:cNvPr id="7" name="">
             <a:extLst xmlns:a="http://schemas.openxmlformats.org/drawingml/2006/main">
               <a:ext uri="{FF2B5EF4-FFF2-40B4-BE49-F238E27FC236}">
-                <a16:creationId xmlns:a16="http://schemas.microsoft.com/office/drawing/2014/main" id="{552014A8-0DE6-4151-AA5F-28405DB45F5B}"/>
+                <a16:creationId xmlns:a16="http://schemas.microsoft.com/office/drawing/2014/main" id="{E24E5CB7-A9F8-4C1C-AB70-41B849900312}"/>
               </a:ext>
             </a:extLst>
           </p:cNvPr>
@@ -28242,7 +29434,7 @@
           <p:cNvPr id="8" name="">
             <a:extLst xmlns:a="http://schemas.openxmlformats.org/drawingml/2006/main">
               <a:ext uri="{FF2B5EF4-FFF2-40B4-BE49-F238E27FC236}">
-                <a16:creationId xmlns:a16="http://schemas.microsoft.com/office/drawing/2014/main" id="{9B254BD6-845C-4123-A580-702545EDE71F}"/>
+                <a16:creationId xmlns:a16="http://schemas.microsoft.com/office/drawing/2014/main" id="{C3251918-D099-40D3-B3EF-2A0AC7DB0773}"/>
               </a:ext>
             </a:extLst>
           </p:cNvPr>
@@ -28425,7 +29617,7 @@
           <p:cNvPr id="9" name="">
             <a:extLst xmlns:a="http://schemas.openxmlformats.org/drawingml/2006/main">
               <a:ext uri="{FF2B5EF4-FFF2-40B4-BE49-F238E27FC236}">
-                <a16:creationId xmlns:a16="http://schemas.microsoft.com/office/drawing/2014/main" id="{834FDE39-B4CE-4E95-9FFF-1FA5FAD7C419}"/>
+                <a16:creationId xmlns:a16="http://schemas.microsoft.com/office/drawing/2014/main" id="{8FB6A8FB-7F39-470C-9E5B-358275C02EAE}"/>
               </a:ext>
             </a:extLst>
           </p:cNvPr>
@@ -28608,7 +29800,7 @@
           <p:cNvPr id="15" name="">
             <a:extLst xmlns:a="http://schemas.openxmlformats.org/drawingml/2006/main">
               <a:ext uri="{FF2B5EF4-FFF2-40B4-BE49-F238E27FC236}">
-                <a16:creationId xmlns:a16="http://schemas.microsoft.com/office/drawing/2014/main" id="{B043B252-CCEF-4A41-BF36-6D4A8C069FAB}"/>
+                <a16:creationId xmlns:a16="http://schemas.microsoft.com/office/drawing/2014/main" id="{F5D0C0A5-F934-4CFF-90C3-34D3885D0B05}"/>
               </a:ext>
             </a:extLst>
           </p:cNvPr>
@@ -28762,7 +29954,7 @@
     </p:spTree>
     <p:extLst>
       <p:ext uri="{BB962C8B-B14F-4D97-AF65-F5344CB8AC3E}">
-        <p14:creationId xmlns:p14="http://schemas.microsoft.com/office/powerpoint/2010/main" val="836216206"/>
+        <p14:creationId xmlns:p14="http://schemas.microsoft.com/office/powerpoint/2010/main" val="140747562"/>
       </p:ext>
     </p:extLst>
   </p:cSld>
@@ -28793,7 +29985,7 @@
           <p:cNvPr id="8" name="">
             <a:extLst xmlns:a="http://schemas.openxmlformats.org/drawingml/2006/main">
               <a:ext uri="{FF2B5EF4-FFF2-40B4-BE49-F238E27FC236}">
-                <a16:creationId xmlns:a16="http://schemas.microsoft.com/office/drawing/2014/main" id="{66103007-9556-4170-AAA9-57902D6692E0}"/>
+                <a16:creationId xmlns:a16="http://schemas.microsoft.com/office/drawing/2014/main" id="{941E2BEB-3290-4880-B36E-654940C2BE83}"/>
               </a:ext>
             </a:extLst>
           </p:cNvPr>
@@ -28949,7 +30141,7 @@
           <p:cNvPr id="2" name="">
             <a:extLst xmlns:a="http://schemas.openxmlformats.org/drawingml/2006/main">
               <a:ext uri="{FF2B5EF4-FFF2-40B4-BE49-F238E27FC236}">
-                <a16:creationId xmlns:a16="http://schemas.microsoft.com/office/drawing/2014/main" id="{DC5888CB-8733-4F0A-96A7-8F3B9A825710}"/>
+                <a16:creationId xmlns:a16="http://schemas.microsoft.com/office/drawing/2014/main" id="{339A5B07-1A4F-4BBF-BDEA-11E94CE3284C}"/>
               </a:ext>
             </a:extLst>
           </p:cNvPr>
@@ -29105,7 +30297,7 @@
           <p:cNvPr id="3" name="">
             <a:extLst xmlns:a="http://schemas.openxmlformats.org/drawingml/2006/main">
               <a:ext uri="{FF2B5EF4-FFF2-40B4-BE49-F238E27FC236}">
-                <a16:creationId xmlns:a16="http://schemas.microsoft.com/office/drawing/2014/main" id="{8591BB30-C15C-499D-8DF5-54B26985730B}"/>
+                <a16:creationId xmlns:a16="http://schemas.microsoft.com/office/drawing/2014/main" id="{AF64079D-6F56-437F-8161-9BE5DF8C161B}"/>
               </a:ext>
             </a:extLst>
           </p:cNvPr>
@@ -29261,7 +30453,7 @@
           <p:cNvPr id="4" name="">
             <a:extLst xmlns:a="http://schemas.openxmlformats.org/drawingml/2006/main">
               <a:ext uri="{FF2B5EF4-FFF2-40B4-BE49-F238E27FC236}">
-                <a16:creationId xmlns:a16="http://schemas.microsoft.com/office/drawing/2014/main" id="{DC17EAE1-150B-447A-9229-447B55BD7C57}"/>
+                <a16:creationId xmlns:a16="http://schemas.microsoft.com/office/drawing/2014/main" id="{B2716B5D-71DB-4991-A4BA-821899BB06FF}"/>
               </a:ext>
             </a:extLst>
           </p:cNvPr>
@@ -29417,7 +30609,7 @@
           <p:cNvPr id="5" name="">
             <a:extLst xmlns:a="http://schemas.openxmlformats.org/drawingml/2006/main">
               <a:ext uri="{FF2B5EF4-FFF2-40B4-BE49-F238E27FC236}">
-                <a16:creationId xmlns:a16="http://schemas.microsoft.com/office/drawing/2014/main" id="{9E5B5A21-437E-4A63-9A01-8AF572234201}"/>
+                <a16:creationId xmlns:a16="http://schemas.microsoft.com/office/drawing/2014/main" id="{E519EE2C-094A-4F5F-AD58-801694EBCE3F}"/>
               </a:ext>
             </a:extLst>
           </p:cNvPr>
@@ -29573,7 +30765,7 @@
           <p:cNvPr id="6" name="">
             <a:extLst xmlns:a="http://schemas.openxmlformats.org/drawingml/2006/main">
               <a:ext uri="{FF2B5EF4-FFF2-40B4-BE49-F238E27FC236}">
-                <a16:creationId xmlns:a16="http://schemas.microsoft.com/office/drawing/2014/main" id="{653630A1-48E5-438D-B2E2-842B407ADC59}"/>
+                <a16:creationId xmlns:a16="http://schemas.microsoft.com/office/drawing/2014/main" id="{D20618D9-B280-46AB-90DE-EF7C5C8495E6}"/>
               </a:ext>
             </a:extLst>
           </p:cNvPr>
@@ -29729,7 +30921,7 @@
           <p:cNvPr id="7" name="">
             <a:extLst xmlns:a="http://schemas.openxmlformats.org/drawingml/2006/main">
               <a:ext uri="{FF2B5EF4-FFF2-40B4-BE49-F238E27FC236}">
-                <a16:creationId xmlns:a16="http://schemas.microsoft.com/office/drawing/2014/main" id="{26370220-BD39-4F85-9303-14A890A09258}"/>
+                <a16:creationId xmlns:a16="http://schemas.microsoft.com/office/drawing/2014/main" id="{9DD4BFCD-8407-4768-987F-920AF24FD0B9}"/>
               </a:ext>
             </a:extLst>
           </p:cNvPr>
@@ -29883,7 +31075,7 @@
     </p:spTree>
     <p:extLst>
       <p:ext uri="{BB962C8B-B14F-4D97-AF65-F5344CB8AC3E}">
-        <p14:creationId xmlns:p14="http://schemas.microsoft.com/office/powerpoint/2010/main" val="1318278737"/>
+        <p14:creationId xmlns:p14="http://schemas.microsoft.com/office/powerpoint/2010/main" val="443626172"/>
       </p:ext>
     </p:extLst>
   </p:cSld>
@@ -29914,7 +31106,7 @@
           <p:cNvPr id="5" name="">
             <a:extLst xmlns:a="http://schemas.openxmlformats.org/drawingml/2006/main">
               <a:ext uri="{FF2B5EF4-FFF2-40B4-BE49-F238E27FC236}">
-                <a16:creationId xmlns:a16="http://schemas.microsoft.com/office/drawing/2014/main" id="{8CF1F33D-5394-43EB-9363-7F1E0404664D}"/>
+                <a16:creationId xmlns:a16="http://schemas.microsoft.com/office/drawing/2014/main" id="{B80DB02D-A217-4E43-88C9-2F546BB862BF}"/>
               </a:ext>
             </a:extLst>
           </p:cNvPr>
@@ -30070,7 +31262,7 @@
           <p:cNvPr id="2" name="">
             <a:extLst xmlns:a="http://schemas.openxmlformats.org/drawingml/2006/main">
               <a:ext uri="{FF2B5EF4-FFF2-40B4-BE49-F238E27FC236}">
-                <a16:creationId xmlns:a16="http://schemas.microsoft.com/office/drawing/2014/main" id="{EF54C113-E1E1-4545-8A6D-F766BEAFA7CA}"/>
+                <a16:creationId xmlns:a16="http://schemas.microsoft.com/office/drawing/2014/main" id="{6EE7D81F-D8B2-43E4-AB2E-20CC1E0B844D}"/>
               </a:ext>
             </a:extLst>
           </p:cNvPr>
@@ -30226,7 +31418,7 @@
           <p:cNvPr id="3" name="">
             <a:extLst xmlns:a="http://schemas.openxmlformats.org/drawingml/2006/main">
               <a:ext uri="{FF2B5EF4-FFF2-40B4-BE49-F238E27FC236}">
-                <a16:creationId xmlns:a16="http://schemas.microsoft.com/office/drawing/2014/main" id="{B6827532-3A52-4CBD-9E8E-3E07BDE814DE}"/>
+                <a16:creationId xmlns:a16="http://schemas.microsoft.com/office/drawing/2014/main" id="{0F8EACDC-6EA8-4551-A4D5-F2FCFFB09899}"/>
               </a:ext>
             </a:extLst>
           </p:cNvPr>
@@ -31167,7 +32359,7 @@
           <p:cNvPr id="4" name="">
             <a:extLst xmlns:a="http://schemas.openxmlformats.org/drawingml/2006/main">
               <a:ext uri="{FF2B5EF4-FFF2-40B4-BE49-F238E27FC236}">
-                <a16:creationId xmlns:a16="http://schemas.microsoft.com/office/drawing/2014/main" id="{4FCC5B33-7FC2-47B2-BD98-AB82D09EF33E}"/>
+                <a16:creationId xmlns:a16="http://schemas.microsoft.com/office/drawing/2014/main" id="{986968BF-B58D-45ED-8C69-18D3FDC238BB}"/>
               </a:ext>
             </a:extLst>
           </p:cNvPr>
@@ -31321,7 +32513,7 @@
     </p:spTree>
     <p:extLst>
       <p:ext uri="{BB962C8B-B14F-4D97-AF65-F5344CB8AC3E}">
-        <p14:creationId xmlns:p14="http://schemas.microsoft.com/office/powerpoint/2010/main" val="1766262571"/>
+        <p14:creationId xmlns:p14="http://schemas.microsoft.com/office/powerpoint/2010/main" val="389262346"/>
       </p:ext>
     </p:extLst>
   </p:cSld>
@@ -31352,7 +32544,7 @@
           <p:cNvPr id="5" name="">
             <a:extLst xmlns:a="http://schemas.openxmlformats.org/drawingml/2006/main">
               <a:ext uri="{FF2B5EF4-FFF2-40B4-BE49-F238E27FC236}">
-                <a16:creationId xmlns:a16="http://schemas.microsoft.com/office/drawing/2014/main" id="{2C3288E1-5FF5-4D57-9E9E-D2FDC5C7FD9B}"/>
+                <a16:creationId xmlns:a16="http://schemas.microsoft.com/office/drawing/2014/main" id="{613A2D11-0C2A-4B43-A6A2-DBCA40E18F27}"/>
               </a:ext>
             </a:extLst>
           </p:cNvPr>
@@ -31508,7 +32700,7 @@
           <p:cNvPr id="2" name="">
             <a:extLst xmlns:a="http://schemas.openxmlformats.org/drawingml/2006/main">
               <a:ext uri="{FF2B5EF4-FFF2-40B4-BE49-F238E27FC236}">
-                <a16:creationId xmlns:a16="http://schemas.microsoft.com/office/drawing/2014/main" id="{B5BC3A3E-B879-4D39-84F5-D63F0DC387CC}"/>
+                <a16:creationId xmlns:a16="http://schemas.microsoft.com/office/drawing/2014/main" id="{8BE0654F-96F6-45E6-801D-2B6EA2D807B0}"/>
               </a:ext>
             </a:extLst>
           </p:cNvPr>
@@ -31664,7 +32856,7 @@
           <p:cNvPr id="3" name="">
             <a:extLst xmlns:a="http://schemas.openxmlformats.org/drawingml/2006/main">
               <a:ext uri="{FF2B5EF4-FFF2-40B4-BE49-F238E27FC236}">
-                <a16:creationId xmlns:a16="http://schemas.microsoft.com/office/drawing/2014/main" id="{F0163A1C-97BA-4B1C-9B2E-6063609976AC}"/>
+                <a16:creationId xmlns:a16="http://schemas.microsoft.com/office/drawing/2014/main" id="{32AC3EE5-8DCC-4127-A2F3-C370D17DC7D9}"/>
               </a:ext>
             </a:extLst>
           </p:cNvPr>
@@ -32605,7 +33797,7 @@
           <p:cNvPr id="4" name="">
             <a:extLst xmlns:a="http://schemas.openxmlformats.org/drawingml/2006/main">
               <a:ext uri="{FF2B5EF4-FFF2-40B4-BE49-F238E27FC236}">
-                <a16:creationId xmlns:a16="http://schemas.microsoft.com/office/drawing/2014/main" id="{93BD69DC-D4DB-4BCE-B2EF-D04C3A41E8C0}"/>
+                <a16:creationId xmlns:a16="http://schemas.microsoft.com/office/drawing/2014/main" id="{8D9030DC-1BD9-41CF-BF60-C882CABFDBFB}"/>
               </a:ext>
             </a:extLst>
           </p:cNvPr>
@@ -32759,7 +33951,7 @@
     </p:spTree>
     <p:extLst>
       <p:ext uri="{BB962C8B-B14F-4D97-AF65-F5344CB8AC3E}">
-        <p14:creationId xmlns:p14="http://schemas.microsoft.com/office/powerpoint/2010/main" val="494947188"/>
+        <p14:creationId xmlns:p14="http://schemas.microsoft.com/office/powerpoint/2010/main" val="1217973899"/>
       </p:ext>
     </p:extLst>
   </p:cSld>
@@ -32790,7 +33982,7 @@
           <p:cNvPr id="5" name="">
             <a:extLst xmlns:a="http://schemas.openxmlformats.org/drawingml/2006/main">
               <a:ext uri="{FF2B5EF4-FFF2-40B4-BE49-F238E27FC236}">
-                <a16:creationId xmlns:a16="http://schemas.microsoft.com/office/drawing/2014/main" id="{F69E4D3B-F3D5-460B-9BC8-E20E1F2710C8}"/>
+                <a16:creationId xmlns:a16="http://schemas.microsoft.com/office/drawing/2014/main" id="{0B74B4ED-3F38-49D8-BE4F-CE27A9E9A170}"/>
               </a:ext>
             </a:extLst>
           </p:cNvPr>
@@ -32946,7 +34138,7 @@
           <p:cNvPr id="2" name="">
             <a:extLst xmlns:a="http://schemas.openxmlformats.org/drawingml/2006/main">
               <a:ext uri="{FF2B5EF4-FFF2-40B4-BE49-F238E27FC236}">
-                <a16:creationId xmlns:a16="http://schemas.microsoft.com/office/drawing/2014/main" id="{2ADBF0D7-C9E8-49C6-9337-CF50F48BC05F}"/>
+                <a16:creationId xmlns:a16="http://schemas.microsoft.com/office/drawing/2014/main" id="{70B09FDA-6A55-421F-A6F5-E2B8AE298530}"/>
               </a:ext>
             </a:extLst>
           </p:cNvPr>
@@ -33102,7 +34294,7 @@
           <p:cNvPr id="3" name="">
             <a:extLst xmlns:a="http://schemas.openxmlformats.org/drawingml/2006/main">
               <a:ext uri="{FF2B5EF4-FFF2-40B4-BE49-F238E27FC236}">
-                <a16:creationId xmlns:a16="http://schemas.microsoft.com/office/drawing/2014/main" id="{F7557404-B765-43B4-A7B0-45D2E72FABED}"/>
+                <a16:creationId xmlns:a16="http://schemas.microsoft.com/office/drawing/2014/main" id="{800431B0-14C3-436D-BE1B-122CC328F3CA}"/>
               </a:ext>
             </a:extLst>
           </p:cNvPr>
@@ -34043,7 +35235,7 @@
           <p:cNvPr id="4" name="">
             <a:extLst xmlns:a="http://schemas.openxmlformats.org/drawingml/2006/main">
               <a:ext uri="{FF2B5EF4-FFF2-40B4-BE49-F238E27FC236}">
-                <a16:creationId xmlns:a16="http://schemas.microsoft.com/office/drawing/2014/main" id="{B124B99E-9E85-41F6-A9D0-67C588BB94D4}"/>
+                <a16:creationId xmlns:a16="http://schemas.microsoft.com/office/drawing/2014/main" id="{F7A8A3AE-3E48-454E-B396-B594268000ED}"/>
               </a:ext>
             </a:extLst>
           </p:cNvPr>
@@ -34197,7 +35389,7 @@
     </p:spTree>
     <p:extLst>
       <p:ext uri="{BB962C8B-B14F-4D97-AF65-F5344CB8AC3E}">
-        <p14:creationId xmlns:p14="http://schemas.microsoft.com/office/powerpoint/2010/main" val="238269173"/>
+        <p14:creationId xmlns:p14="http://schemas.microsoft.com/office/powerpoint/2010/main" val="1605338879"/>
       </p:ext>
     </p:extLst>
   </p:cSld>

--- a/deliverables/CycleTwin_pitch_deck.pptx
+++ b/deliverables/CycleTwin_pitch_deck.pptx
@@ -2,37 +2,37 @@
 <file path=ppt/presentation.xml><?xml version="1.0" encoding="utf-8"?>
 <p:presentation xmlns:p="http://schemas.openxmlformats.org/presentationml/2006/main">
   <p:sldMasterIdLst>
-    <p:sldMasterId xmlns:r="http://schemas.openxmlformats.org/officeDocument/2006/relationships" id="2147483648" r:id="R991c7c23bca84f1e"/>
+    <p:sldMasterId xmlns:r="http://schemas.openxmlformats.org/officeDocument/2006/relationships" id="2147483648" r:id="Rf276a097ae48434a"/>
   </p:sldMasterIdLst>
   <p:notesMasterIdLst>
-    <p:notesMasterId xmlns:r="http://schemas.openxmlformats.org/officeDocument/2006/relationships" r:id="R86f16cf20bbd44ca"/>
+    <p:notesMasterId xmlns:r="http://schemas.openxmlformats.org/officeDocument/2006/relationships" r:id="R095bef8dd19045df"/>
   </p:notesMasterIdLst>
   <p:sldIdLst>
-    <p:sldId xmlns:r="http://schemas.openxmlformats.org/officeDocument/2006/relationships" id="256" r:id="R5cba71670adb46e0"/>
-    <p:sldId xmlns:r="http://schemas.openxmlformats.org/officeDocument/2006/relationships" id="257" r:id="Re99f9b9044b642fc"/>
-    <p:sldId xmlns:r="http://schemas.openxmlformats.org/officeDocument/2006/relationships" id="258" r:id="Reaa26d34c33f442c"/>
-    <p:sldId xmlns:r="http://schemas.openxmlformats.org/officeDocument/2006/relationships" id="259" r:id="R2f7601efcbcc49b1"/>
-    <p:sldId xmlns:r="http://schemas.openxmlformats.org/officeDocument/2006/relationships" id="260" r:id="R9b8c4c10c9704f1d"/>
-    <p:sldId xmlns:r="http://schemas.openxmlformats.org/officeDocument/2006/relationships" id="261" r:id="Rcfbc3be1befd4163"/>
-    <p:sldId xmlns:r="http://schemas.openxmlformats.org/officeDocument/2006/relationships" id="262" r:id="R19e64c25baa74675"/>
-    <p:sldId xmlns:r="http://schemas.openxmlformats.org/officeDocument/2006/relationships" id="263" r:id="Rc45cc6f726cf4e26"/>
-    <p:sldId xmlns:r="http://schemas.openxmlformats.org/officeDocument/2006/relationships" id="264" r:id="R89ae1a032fd44a9a"/>
-    <p:sldId xmlns:r="http://schemas.openxmlformats.org/officeDocument/2006/relationships" id="265" r:id="R932b7bbc11d64e55"/>
-    <p:sldId xmlns:r="http://schemas.openxmlformats.org/officeDocument/2006/relationships" id="266" r:id="R0d9943a062c8488c"/>
-    <p:sldId xmlns:r="http://schemas.openxmlformats.org/officeDocument/2006/relationships" id="267" r:id="R198baabc47ad40d9"/>
-    <p:sldId xmlns:r="http://schemas.openxmlformats.org/officeDocument/2006/relationships" id="268" r:id="R272f3bfed0c24126"/>
-    <p:sldId xmlns:r="http://schemas.openxmlformats.org/officeDocument/2006/relationships" id="269" r:id="R82bb9febf2b244b8"/>
-    <p:sldId xmlns:r="http://schemas.openxmlformats.org/officeDocument/2006/relationships" id="270" r:id="Rf02a11d4610e415d"/>
-    <p:sldId xmlns:r="http://schemas.openxmlformats.org/officeDocument/2006/relationships" id="271" r:id="R12d5a459bd3b4e09"/>
-    <p:sldId xmlns:r="http://schemas.openxmlformats.org/officeDocument/2006/relationships" id="272" r:id="R239bf4162667479d"/>
-    <p:sldId xmlns:r="http://schemas.openxmlformats.org/officeDocument/2006/relationships" id="273" r:id="R12d989d02a6348ad"/>
-    <p:sldId xmlns:r="http://schemas.openxmlformats.org/officeDocument/2006/relationships" id="274" r:id="R2b5db2fc797d40be"/>
-    <p:sldId xmlns:r="http://schemas.openxmlformats.org/officeDocument/2006/relationships" id="275" r:id="R8f21ebc111fd4040"/>
-    <p:sldId xmlns:r="http://schemas.openxmlformats.org/officeDocument/2006/relationships" id="276" r:id="Rec4dfa1c27fc46b7"/>
-    <p:sldId xmlns:r="http://schemas.openxmlformats.org/officeDocument/2006/relationships" id="277" r:id="Rdd8c4d7dd5df4170"/>
-    <p:sldId xmlns:r="http://schemas.openxmlformats.org/officeDocument/2006/relationships" id="278" r:id="R4119ebb38ea14c7d"/>
-    <p:sldId xmlns:r="http://schemas.openxmlformats.org/officeDocument/2006/relationships" id="279" r:id="R7ecfcf3bd3ad4f3c"/>
-    <p:sldId xmlns:r="http://schemas.openxmlformats.org/officeDocument/2006/relationships" id="280" r:id="Rb8e17169bc5e43a1"/>
+    <p:sldId xmlns:r="http://schemas.openxmlformats.org/officeDocument/2006/relationships" id="256" r:id="R21064d2f80714e67"/>
+    <p:sldId xmlns:r="http://schemas.openxmlformats.org/officeDocument/2006/relationships" id="257" r:id="Rdb2e0246419c450c"/>
+    <p:sldId xmlns:r="http://schemas.openxmlformats.org/officeDocument/2006/relationships" id="258" r:id="R0ca3963451524591"/>
+    <p:sldId xmlns:r="http://schemas.openxmlformats.org/officeDocument/2006/relationships" id="259" r:id="Ra8291a74749d4925"/>
+    <p:sldId xmlns:r="http://schemas.openxmlformats.org/officeDocument/2006/relationships" id="260" r:id="R6af7d5da8f2f43cc"/>
+    <p:sldId xmlns:r="http://schemas.openxmlformats.org/officeDocument/2006/relationships" id="261" r:id="R0c8ead5663574756"/>
+    <p:sldId xmlns:r="http://schemas.openxmlformats.org/officeDocument/2006/relationships" id="262" r:id="R3f47569177fd4256"/>
+    <p:sldId xmlns:r="http://schemas.openxmlformats.org/officeDocument/2006/relationships" id="263" r:id="R17ef036c09d84afd"/>
+    <p:sldId xmlns:r="http://schemas.openxmlformats.org/officeDocument/2006/relationships" id="264" r:id="R517aca99f0224fa4"/>
+    <p:sldId xmlns:r="http://schemas.openxmlformats.org/officeDocument/2006/relationships" id="265" r:id="Rdbfdaefbde744d61"/>
+    <p:sldId xmlns:r="http://schemas.openxmlformats.org/officeDocument/2006/relationships" id="266" r:id="R17f6daa23d33480c"/>
+    <p:sldId xmlns:r="http://schemas.openxmlformats.org/officeDocument/2006/relationships" id="267" r:id="Rf162fd3ebeb545f6"/>
+    <p:sldId xmlns:r="http://schemas.openxmlformats.org/officeDocument/2006/relationships" id="268" r:id="Rf8bb64a16d7546ab"/>
+    <p:sldId xmlns:r="http://schemas.openxmlformats.org/officeDocument/2006/relationships" id="269" r:id="Rb6e54571b9b74dbf"/>
+    <p:sldId xmlns:r="http://schemas.openxmlformats.org/officeDocument/2006/relationships" id="270" r:id="R59e5b17bd6b34107"/>
+    <p:sldId xmlns:r="http://schemas.openxmlformats.org/officeDocument/2006/relationships" id="271" r:id="R3122f4139b794358"/>
+    <p:sldId xmlns:r="http://schemas.openxmlformats.org/officeDocument/2006/relationships" id="272" r:id="R218813d7b186437f"/>
+    <p:sldId xmlns:r="http://schemas.openxmlformats.org/officeDocument/2006/relationships" id="273" r:id="R27ef67524e3742ce"/>
+    <p:sldId xmlns:r="http://schemas.openxmlformats.org/officeDocument/2006/relationships" id="274" r:id="R21e7c1d9e4c444ec"/>
+    <p:sldId xmlns:r="http://schemas.openxmlformats.org/officeDocument/2006/relationships" id="275" r:id="R3e75bfb79bdb4580"/>
+    <p:sldId xmlns:r="http://schemas.openxmlformats.org/officeDocument/2006/relationships" id="276" r:id="Red5c373980624f83"/>
+    <p:sldId xmlns:r="http://schemas.openxmlformats.org/officeDocument/2006/relationships" id="277" r:id="Rb81e4925ba89430d"/>
+    <p:sldId xmlns:r="http://schemas.openxmlformats.org/officeDocument/2006/relationships" id="278" r:id="R7b2e386f79dd4d00"/>
+    <p:sldId xmlns:r="http://schemas.openxmlformats.org/officeDocument/2006/relationships" id="279" r:id="R77781c81f9f248a0"/>
+    <p:sldId xmlns:r="http://schemas.openxmlformats.org/officeDocument/2006/relationships" id="280" r:id="R0b77c266ff524852"/>
   </p:sldIdLst>
   <p:sldSz cx="12192000" cy="6858000"/>
   <p:notesSz cx="6858000" cy="9144000"/>
@@ -2193,7 +2193,7 @@
           <p:cNvPr id="3" name="Title">
             <a:extLst xmlns:a="http://schemas.openxmlformats.org/drawingml/2006/main">
               <a:ext uri="{FF2B5EF4-FFF2-40B4-BE49-F238E27FC236}">
-                <a16:creationId xmlns:a16="http://schemas.microsoft.com/office/drawing/2014/main" id="{87994754-6064-4B91-AAE1-CA15B2917F9E}"/>
+                <a16:creationId xmlns:a16="http://schemas.microsoft.com/office/drawing/2014/main" id="{2E18C4FB-FB29-41B2-A556-F809CF5EAB1B}"/>
               </a:ext>
             </a:extLst>
           </p:cNvPr>
@@ -2422,7 +2422,7 @@
           <p:cNvPr id="2" name="Subtitle">
             <a:extLst xmlns:a="http://schemas.openxmlformats.org/drawingml/2006/main">
               <a:ext uri="{FF2B5EF4-FFF2-40B4-BE49-F238E27FC236}">
-                <a16:creationId xmlns:a16="http://schemas.microsoft.com/office/drawing/2014/main" id="{6B5494DD-161C-4CB3-B6A4-10F19E794645}"/>
+                <a16:creationId xmlns:a16="http://schemas.microsoft.com/office/drawing/2014/main" id="{D75F071A-3549-418B-BF09-E0233875DBB6}"/>
               </a:ext>
             </a:extLst>
           </p:cNvPr>
@@ -2668,7 +2668,7 @@
           <p:cNvPr id="2" name="Section title">
             <a:extLst xmlns:a="http://schemas.openxmlformats.org/drawingml/2006/main">
               <a:ext uri="{FF2B5EF4-FFF2-40B4-BE49-F238E27FC236}">
-                <a16:creationId xmlns:a16="http://schemas.microsoft.com/office/drawing/2014/main" id="{D0ABEB84-DD55-431E-A9B2-612E2AEBEDB0}"/>
+                <a16:creationId xmlns:a16="http://schemas.microsoft.com/office/drawing/2014/main" id="{E2F28046-65F5-476F-8231-249D670638C9}"/>
               </a:ext>
             </a:extLst>
           </p:cNvPr>
@@ -2914,7 +2914,7 @@
           <p:cNvPr id="3" name="Title">
             <a:extLst xmlns:a="http://schemas.openxmlformats.org/drawingml/2006/main">
               <a:ext uri="{FF2B5EF4-FFF2-40B4-BE49-F238E27FC236}">
-                <a16:creationId xmlns:a16="http://schemas.microsoft.com/office/drawing/2014/main" id="{BE8193F8-8872-48B9-8473-9679734FB4AA}"/>
+                <a16:creationId xmlns:a16="http://schemas.microsoft.com/office/drawing/2014/main" id="{1AA11D42-C472-4653-82DB-C63FB0C50CA9}"/>
               </a:ext>
             </a:extLst>
           </p:cNvPr>
@@ -3143,7 +3143,7 @@
           <p:cNvPr id="2" name="Body">
             <a:extLst xmlns:a="http://schemas.openxmlformats.org/drawingml/2006/main">
               <a:ext uri="{FF2B5EF4-FFF2-40B4-BE49-F238E27FC236}">
-                <a16:creationId xmlns:a16="http://schemas.microsoft.com/office/drawing/2014/main" id="{F37B03E6-8389-49AC-8957-8A87F1810BCF}"/>
+                <a16:creationId xmlns:a16="http://schemas.microsoft.com/office/drawing/2014/main" id="{A0D1FADD-E773-445A-9273-6168E9B0350D}"/>
               </a:ext>
             </a:extLst>
           </p:cNvPr>
@@ -3389,7 +3389,7 @@
           <p:cNvPr id="4" name="Title">
             <a:extLst xmlns:a="http://schemas.openxmlformats.org/drawingml/2006/main">
               <a:ext uri="{FF2B5EF4-FFF2-40B4-BE49-F238E27FC236}">
-                <a16:creationId xmlns:a16="http://schemas.microsoft.com/office/drawing/2014/main" id="{37DE032F-034E-4D74-9201-BB12DCB95E46}"/>
+                <a16:creationId xmlns:a16="http://schemas.microsoft.com/office/drawing/2014/main" id="{86D1248D-0A6A-4ABE-8883-F2623204B1D3}"/>
               </a:ext>
             </a:extLst>
           </p:cNvPr>
@@ -3618,7 +3618,7 @@
           <p:cNvPr id="2" name="Left column">
             <a:extLst xmlns:a="http://schemas.openxmlformats.org/drawingml/2006/main">
               <a:ext uri="{FF2B5EF4-FFF2-40B4-BE49-F238E27FC236}">
-                <a16:creationId xmlns:a16="http://schemas.microsoft.com/office/drawing/2014/main" id="{B10E03F9-721A-4F40-810C-1B662CD08873}"/>
+                <a16:creationId xmlns:a16="http://schemas.microsoft.com/office/drawing/2014/main" id="{BE50F42E-A6DC-4377-8919-9261E0485CCC}"/>
               </a:ext>
             </a:extLst>
           </p:cNvPr>
@@ -3847,7 +3847,7 @@
           <p:cNvPr id="3" name="Right column">
             <a:extLst xmlns:a="http://schemas.openxmlformats.org/drawingml/2006/main">
               <a:ext uri="{FF2B5EF4-FFF2-40B4-BE49-F238E27FC236}">
-                <a16:creationId xmlns:a16="http://schemas.microsoft.com/office/drawing/2014/main" id="{757355D0-80D1-4A28-A9B8-C8A01ADD7A2B}"/>
+                <a16:creationId xmlns:a16="http://schemas.microsoft.com/office/drawing/2014/main" id="{7CDF4508-1A22-4943-A39F-4933D18168C5}"/>
               </a:ext>
             </a:extLst>
           </p:cNvPr>
@@ -4093,7 +4093,7 @@
           <p:cNvPr id="3" name="Title">
             <a:extLst xmlns:a="http://schemas.openxmlformats.org/drawingml/2006/main">
               <a:ext uri="{FF2B5EF4-FFF2-40B4-BE49-F238E27FC236}">
-                <a16:creationId xmlns:a16="http://schemas.microsoft.com/office/drawing/2014/main" id="{10D00757-EC97-43E1-B115-55887B2496DB}"/>
+                <a16:creationId xmlns:a16="http://schemas.microsoft.com/office/drawing/2014/main" id="{F8CA7FDF-5858-4C7D-8550-C833236B5BB1}"/>
               </a:ext>
             </a:extLst>
           </p:cNvPr>
@@ -4322,7 +4322,7 @@
           <p:cNvPr id="2" name="Left column">
             <a:extLst xmlns:a="http://schemas.openxmlformats.org/drawingml/2006/main">
               <a:ext uri="{FF2B5EF4-FFF2-40B4-BE49-F238E27FC236}">
-                <a16:creationId xmlns:a16="http://schemas.microsoft.com/office/drawing/2014/main" id="{AE18DD56-094C-44A1-AB58-B708880DE224}"/>
+                <a16:creationId xmlns:a16="http://schemas.microsoft.com/office/drawing/2014/main" id="{150C1F34-AC62-4BF0-9689-514A0B9F886C}"/>
               </a:ext>
             </a:extLst>
           </p:cNvPr>
@@ -4589,12 +4589,12 @@
   </p:cSld>
   <p:clrMap bg1="lt1" tx1="dk1" bg2="lt2" tx2="dk2" accent1="accent1" accent2="accent2" accent3="accent3" accent4="accent4" accent5="accent5" accent6="accent6" hlink="hlink" folHlink="folHlink"/>
   <p:sldLayoutIdLst>
-    <p:sldLayoutId xmlns:r="http://schemas.openxmlformats.org/officeDocument/2006/relationships" id="2147483649" r:id="R6230546c026b4981"/>
-    <p:sldLayoutId xmlns:r="http://schemas.openxmlformats.org/officeDocument/2006/relationships" id="2147483650" r:id="R48a76cf4a0574425"/>
-    <p:sldLayoutId xmlns:r="http://schemas.openxmlformats.org/officeDocument/2006/relationships" id="2147483651" r:id="Re69ea519eba14e04"/>
-    <p:sldLayoutId xmlns:r="http://schemas.openxmlformats.org/officeDocument/2006/relationships" id="2147483652" r:id="Rf60553c6e1624e4c"/>
-    <p:sldLayoutId xmlns:r="http://schemas.openxmlformats.org/officeDocument/2006/relationships" id="2147483653" r:id="R2f4330cbe383441c"/>
-    <p:sldLayoutId xmlns:r="http://schemas.openxmlformats.org/officeDocument/2006/relationships" id="2147483654" r:id="Rd8357877f46244cb"/>
+    <p:sldLayoutId xmlns:r="http://schemas.openxmlformats.org/officeDocument/2006/relationships" id="2147483649" r:id="R935420b3caff4bfa"/>
+    <p:sldLayoutId xmlns:r="http://schemas.openxmlformats.org/officeDocument/2006/relationships" id="2147483650" r:id="Rd030c1d9e6254dfd"/>
+    <p:sldLayoutId xmlns:r="http://schemas.openxmlformats.org/officeDocument/2006/relationships" id="2147483651" r:id="R6aa6d731797840e6"/>
+    <p:sldLayoutId xmlns:r="http://schemas.openxmlformats.org/officeDocument/2006/relationships" id="2147483652" r:id="R07e803f7ac484da0"/>
+    <p:sldLayoutId xmlns:r="http://schemas.openxmlformats.org/officeDocument/2006/relationships" id="2147483653" r:id="R13422d30710a4f3c"/>
+    <p:sldLayoutId xmlns:r="http://schemas.openxmlformats.org/officeDocument/2006/relationships" id="2147483654" r:id="Ra0de412d0cec4534"/>
   </p:sldLayoutIdLst>
   <p:txStyles>
     <p:titleStyle>
@@ -5145,7 +5145,7 @@
           <p:cNvPr id="7" name="">
             <a:extLst xmlns:a="http://schemas.openxmlformats.org/drawingml/2006/main">
               <a:ext uri="{FF2B5EF4-FFF2-40B4-BE49-F238E27FC236}">
-                <a16:creationId xmlns:a16="http://schemas.microsoft.com/office/drawing/2014/main" id="{B71ED3C0-B497-4AC8-BC4F-D95944B0BB59}"/>
+                <a16:creationId xmlns:a16="http://schemas.microsoft.com/office/drawing/2014/main" id="{91E5484F-1E68-42A6-888E-5E9BE0A0D700}"/>
               </a:ext>
             </a:extLst>
           </p:cNvPr>
@@ -5301,7 +5301,7 @@
           <p:cNvPr id="2" name="">
             <a:extLst xmlns:a="http://schemas.openxmlformats.org/drawingml/2006/main">
               <a:ext uri="{FF2B5EF4-FFF2-40B4-BE49-F238E27FC236}">
-                <a16:creationId xmlns:a16="http://schemas.microsoft.com/office/drawing/2014/main" id="{29205377-59B0-4C2B-A2BC-E34BA961BEBD}"/>
+                <a16:creationId xmlns:a16="http://schemas.microsoft.com/office/drawing/2014/main" id="{2F93A05A-4678-4B5C-AFA4-886F6AD0526A}"/>
               </a:ext>
             </a:extLst>
           </p:cNvPr>
@@ -5457,7 +5457,7 @@
           <p:cNvPr id="3" name="">
             <a:extLst xmlns:a="http://schemas.openxmlformats.org/drawingml/2006/main">
               <a:ext uri="{FF2B5EF4-FFF2-40B4-BE49-F238E27FC236}">
-                <a16:creationId xmlns:a16="http://schemas.microsoft.com/office/drawing/2014/main" id="{538C8E16-8259-4668-A44A-9D774677A515}"/>
+                <a16:creationId xmlns:a16="http://schemas.microsoft.com/office/drawing/2014/main" id="{07EAFE0D-5AED-4FB2-9BD8-B6BB015D8819}"/>
               </a:ext>
             </a:extLst>
           </p:cNvPr>
@@ -5613,7 +5613,7 @@
           <p:cNvPr id="4" name="">
             <a:extLst xmlns:a="http://schemas.openxmlformats.org/drawingml/2006/main">
               <a:ext uri="{FF2B5EF4-FFF2-40B4-BE49-F238E27FC236}">
-                <a16:creationId xmlns:a16="http://schemas.microsoft.com/office/drawing/2014/main" id="{C5472F7B-EE68-43F2-9C4A-12671FD4EA5F}"/>
+                <a16:creationId xmlns:a16="http://schemas.microsoft.com/office/drawing/2014/main" id="{841DDA9D-838D-4BF0-9482-D89E661C910E}"/>
               </a:ext>
             </a:extLst>
           </p:cNvPr>
@@ -5769,7 +5769,7 @@
           <p:cNvPr id="5" name="">
             <a:extLst xmlns:a="http://schemas.openxmlformats.org/drawingml/2006/main">
               <a:ext uri="{FF2B5EF4-FFF2-40B4-BE49-F238E27FC236}">
-                <a16:creationId xmlns:a16="http://schemas.microsoft.com/office/drawing/2014/main" id="{043ED1CB-A6B3-4138-A38A-BA5DA61F1A60}"/>
+                <a16:creationId xmlns:a16="http://schemas.microsoft.com/office/drawing/2014/main" id="{3831C893-6E1A-4DBE-8959-48A15B030A6F}"/>
               </a:ext>
             </a:extLst>
           </p:cNvPr>
@@ -5925,7 +5925,7 @@
           <p:cNvPr id="6" name="">
             <a:extLst xmlns:a="http://schemas.openxmlformats.org/drawingml/2006/main">
               <a:ext uri="{FF2B5EF4-FFF2-40B4-BE49-F238E27FC236}">
-                <a16:creationId xmlns:a16="http://schemas.microsoft.com/office/drawing/2014/main" id="{22AAB623-79C1-4553-BFFD-9C84ED3A1AC6}"/>
+                <a16:creationId xmlns:a16="http://schemas.microsoft.com/office/drawing/2014/main" id="{A4B00945-751F-45E3-8AE2-0DF860BAECFA}"/>
               </a:ext>
             </a:extLst>
           </p:cNvPr>
@@ -6079,7 +6079,7 @@
     </p:spTree>
     <p:extLst>
       <p:ext uri="{BB962C8B-B14F-4D97-AF65-F5344CB8AC3E}">
-        <p14:creationId xmlns:p14="http://schemas.microsoft.com/office/powerpoint/2010/main" val="1305109133"/>
+        <p14:creationId xmlns:p14="http://schemas.microsoft.com/office/powerpoint/2010/main" val="1510832700"/>
       </p:ext>
     </p:extLst>
   </p:cSld>
@@ -6110,7 +6110,7 @@
           <p:cNvPr id="5" name="">
             <a:extLst xmlns:a="http://schemas.openxmlformats.org/drawingml/2006/main">
               <a:ext uri="{FF2B5EF4-FFF2-40B4-BE49-F238E27FC236}">
-                <a16:creationId xmlns:a16="http://schemas.microsoft.com/office/drawing/2014/main" id="{BC973125-ABB8-4635-BB71-DAD1FAF00C03}"/>
+                <a16:creationId xmlns:a16="http://schemas.microsoft.com/office/drawing/2014/main" id="{382A076E-782B-4DD1-A614-8CF8AE8ACFEF}"/>
               </a:ext>
             </a:extLst>
           </p:cNvPr>
@@ -6266,7 +6266,7 @@
           <p:cNvPr id="2" name="">
             <a:extLst xmlns:a="http://schemas.openxmlformats.org/drawingml/2006/main">
               <a:ext uri="{FF2B5EF4-FFF2-40B4-BE49-F238E27FC236}">
-                <a16:creationId xmlns:a16="http://schemas.microsoft.com/office/drawing/2014/main" id="{F80E3B4C-9E4C-43AA-9DFB-8C84D1F5ADD1}"/>
+                <a16:creationId xmlns:a16="http://schemas.microsoft.com/office/drawing/2014/main" id="{DD57D66E-E128-4F9F-9A79-3E386FFAF370}"/>
               </a:ext>
             </a:extLst>
           </p:cNvPr>
@@ -6422,7 +6422,7 @@
           <p:cNvPr id="3" name="">
             <a:extLst xmlns:a="http://schemas.openxmlformats.org/drawingml/2006/main">
               <a:ext uri="{FF2B5EF4-FFF2-40B4-BE49-F238E27FC236}">
-                <a16:creationId xmlns:a16="http://schemas.microsoft.com/office/drawing/2014/main" id="{22092E1E-BDA4-4C7F-9AAB-6AD7A24850AF}"/>
+                <a16:creationId xmlns:a16="http://schemas.microsoft.com/office/drawing/2014/main" id="{2E126A6D-1A59-4741-A303-11B31DA839F2}"/>
               </a:ext>
             </a:extLst>
           </p:cNvPr>
@@ -7363,7 +7363,7 @@
           <p:cNvPr id="4" name="">
             <a:extLst xmlns:a="http://schemas.openxmlformats.org/drawingml/2006/main">
               <a:ext uri="{FF2B5EF4-FFF2-40B4-BE49-F238E27FC236}">
-                <a16:creationId xmlns:a16="http://schemas.microsoft.com/office/drawing/2014/main" id="{D58C9996-F0E1-4877-8D56-07D6153A47AA}"/>
+                <a16:creationId xmlns:a16="http://schemas.microsoft.com/office/drawing/2014/main" id="{E9F4030C-3587-4C31-AB2B-171942BDC945}"/>
               </a:ext>
             </a:extLst>
           </p:cNvPr>
@@ -7517,7 +7517,7 @@
     </p:spTree>
     <p:extLst>
       <p:ext uri="{BB962C8B-B14F-4D97-AF65-F5344CB8AC3E}">
-        <p14:creationId xmlns:p14="http://schemas.microsoft.com/office/powerpoint/2010/main" val="1978412996"/>
+        <p14:creationId xmlns:p14="http://schemas.microsoft.com/office/powerpoint/2010/main" val="605616080"/>
       </p:ext>
     </p:extLst>
   </p:cSld>
@@ -7548,7 +7548,7 @@
           <p:cNvPr id="5" name="">
             <a:extLst xmlns:a="http://schemas.openxmlformats.org/drawingml/2006/main">
               <a:ext uri="{FF2B5EF4-FFF2-40B4-BE49-F238E27FC236}">
-                <a16:creationId xmlns:a16="http://schemas.microsoft.com/office/drawing/2014/main" id="{C40B0E71-6785-4455-8A0C-059C64494FED}"/>
+                <a16:creationId xmlns:a16="http://schemas.microsoft.com/office/drawing/2014/main" id="{C2C2CA1E-BBC6-4312-ACB6-270591FD6771}"/>
               </a:ext>
             </a:extLst>
           </p:cNvPr>
@@ -7704,7 +7704,7 @@
           <p:cNvPr id="2" name="">
             <a:extLst xmlns:a="http://schemas.openxmlformats.org/drawingml/2006/main">
               <a:ext uri="{FF2B5EF4-FFF2-40B4-BE49-F238E27FC236}">
-                <a16:creationId xmlns:a16="http://schemas.microsoft.com/office/drawing/2014/main" id="{8A1AEA91-C76E-4BC9-BB84-C8B72A340583}"/>
+                <a16:creationId xmlns:a16="http://schemas.microsoft.com/office/drawing/2014/main" id="{39FE5371-84B9-454A-88E9-5554F547030B}"/>
               </a:ext>
             </a:extLst>
           </p:cNvPr>
@@ -7860,7 +7860,7 @@
           <p:cNvPr id="3" name="">
             <a:extLst xmlns:a="http://schemas.openxmlformats.org/drawingml/2006/main">
               <a:ext uri="{FF2B5EF4-FFF2-40B4-BE49-F238E27FC236}">
-                <a16:creationId xmlns:a16="http://schemas.microsoft.com/office/drawing/2014/main" id="{F5965428-7486-4E37-9210-6914D34A64CA}"/>
+                <a16:creationId xmlns:a16="http://schemas.microsoft.com/office/drawing/2014/main" id="{E3899C2D-9D15-445E-90C3-6D67DCAEC020}"/>
               </a:ext>
             </a:extLst>
           </p:cNvPr>
@@ -8801,7 +8801,7 @@
           <p:cNvPr id="4" name="">
             <a:extLst xmlns:a="http://schemas.openxmlformats.org/drawingml/2006/main">
               <a:ext uri="{FF2B5EF4-FFF2-40B4-BE49-F238E27FC236}">
-                <a16:creationId xmlns:a16="http://schemas.microsoft.com/office/drawing/2014/main" id="{78BE75DC-070D-4DEE-9762-C37C45AD5FA6}"/>
+                <a16:creationId xmlns:a16="http://schemas.microsoft.com/office/drawing/2014/main" id="{DCB1EE81-72EB-46BB-8DF7-B74D586AFF24}"/>
               </a:ext>
             </a:extLst>
           </p:cNvPr>
@@ -8955,7 +8955,7 @@
     </p:spTree>
     <p:extLst>
       <p:ext uri="{BB962C8B-B14F-4D97-AF65-F5344CB8AC3E}">
-        <p14:creationId xmlns:p14="http://schemas.microsoft.com/office/powerpoint/2010/main" val="1272832450"/>
+        <p14:creationId xmlns:p14="http://schemas.microsoft.com/office/powerpoint/2010/main" val="350591554"/>
       </p:ext>
     </p:extLst>
   </p:cSld>
@@ -8986,7 +8986,7 @@
           <p:cNvPr id="5" name="">
             <a:extLst xmlns:a="http://schemas.openxmlformats.org/drawingml/2006/main">
               <a:ext uri="{FF2B5EF4-FFF2-40B4-BE49-F238E27FC236}">
-                <a16:creationId xmlns:a16="http://schemas.microsoft.com/office/drawing/2014/main" id="{F302EAA6-1470-4696-B1AD-A6C50956E93C}"/>
+                <a16:creationId xmlns:a16="http://schemas.microsoft.com/office/drawing/2014/main" id="{7014ED4F-5742-45EF-BCB3-74D683355A28}"/>
               </a:ext>
             </a:extLst>
           </p:cNvPr>
@@ -9142,7 +9142,7 @@
           <p:cNvPr id="2" name="">
             <a:extLst xmlns:a="http://schemas.openxmlformats.org/drawingml/2006/main">
               <a:ext uri="{FF2B5EF4-FFF2-40B4-BE49-F238E27FC236}">
-                <a16:creationId xmlns:a16="http://schemas.microsoft.com/office/drawing/2014/main" id="{031EB525-0061-452D-BD6F-6FDBAC6545E7}"/>
+                <a16:creationId xmlns:a16="http://schemas.microsoft.com/office/drawing/2014/main" id="{B9D324DA-CDCF-4B2B-9A57-B020FC026E68}"/>
               </a:ext>
             </a:extLst>
           </p:cNvPr>
@@ -9298,7 +9298,7 @@
           <p:cNvPr id="3" name="">
             <a:extLst xmlns:a="http://schemas.openxmlformats.org/drawingml/2006/main">
               <a:ext uri="{FF2B5EF4-FFF2-40B4-BE49-F238E27FC236}">
-                <a16:creationId xmlns:a16="http://schemas.microsoft.com/office/drawing/2014/main" id="{B91418B7-7974-46F3-ACDC-D9B4CEDDEA53}"/>
+                <a16:creationId xmlns:a16="http://schemas.microsoft.com/office/drawing/2014/main" id="{3D721C9A-0EA6-4EA1-8157-02D7D6237F91}"/>
               </a:ext>
             </a:extLst>
           </p:cNvPr>
@@ -10239,7 +10239,7 @@
           <p:cNvPr id="4" name="">
             <a:extLst xmlns:a="http://schemas.openxmlformats.org/drawingml/2006/main">
               <a:ext uri="{FF2B5EF4-FFF2-40B4-BE49-F238E27FC236}">
-                <a16:creationId xmlns:a16="http://schemas.microsoft.com/office/drawing/2014/main" id="{00A4ECF4-45F9-434D-ADE4-72EDB26BD8B8}"/>
+                <a16:creationId xmlns:a16="http://schemas.microsoft.com/office/drawing/2014/main" id="{59AFDD6D-429D-4E45-B0E1-5E2AFB68AA84}"/>
               </a:ext>
             </a:extLst>
           </p:cNvPr>
@@ -10393,7 +10393,7 @@
     </p:spTree>
     <p:extLst>
       <p:ext uri="{BB962C8B-B14F-4D97-AF65-F5344CB8AC3E}">
-        <p14:creationId xmlns:p14="http://schemas.microsoft.com/office/powerpoint/2010/main" val="1254686697"/>
+        <p14:creationId xmlns:p14="http://schemas.microsoft.com/office/powerpoint/2010/main" val="860678662"/>
       </p:ext>
     </p:extLst>
   </p:cSld>
@@ -10424,7 +10424,7 @@
           <p:cNvPr id="8" name="">
             <a:extLst xmlns:a="http://schemas.openxmlformats.org/drawingml/2006/main">
               <a:ext uri="{FF2B5EF4-FFF2-40B4-BE49-F238E27FC236}">
-                <a16:creationId xmlns:a16="http://schemas.microsoft.com/office/drawing/2014/main" id="{9C5DC096-28C5-4A91-B7E4-22BC0F18556A}"/>
+                <a16:creationId xmlns:a16="http://schemas.microsoft.com/office/drawing/2014/main" id="{EDEC7281-4964-4892-BA6A-CD34FD089625}"/>
               </a:ext>
             </a:extLst>
           </p:cNvPr>
@@ -10580,7 +10580,7 @@
           <p:cNvPr id="2" name="">
             <a:extLst xmlns:a="http://schemas.openxmlformats.org/drawingml/2006/main">
               <a:ext uri="{FF2B5EF4-FFF2-40B4-BE49-F238E27FC236}">
-                <a16:creationId xmlns:a16="http://schemas.microsoft.com/office/drawing/2014/main" id="{29637B2A-3D41-48B0-A5B2-07A07F9CAEA2}"/>
+                <a16:creationId xmlns:a16="http://schemas.microsoft.com/office/drawing/2014/main" id="{A2E90B88-765F-4836-9DA6-4A0104B96B51}"/>
               </a:ext>
             </a:extLst>
           </p:cNvPr>
@@ -10736,7 +10736,7 @@
           <p:cNvPr id="3" name="">
             <a:extLst xmlns:a="http://schemas.openxmlformats.org/drawingml/2006/main">
               <a:ext uri="{FF2B5EF4-FFF2-40B4-BE49-F238E27FC236}">
-                <a16:creationId xmlns:a16="http://schemas.microsoft.com/office/drawing/2014/main" id="{5506A829-27E9-46A1-92BB-D7317A52FEE3}"/>
+                <a16:creationId xmlns:a16="http://schemas.microsoft.com/office/drawing/2014/main" id="{35DFB9FF-0B9C-4502-B6EB-6202E1C0560B}"/>
               </a:ext>
             </a:extLst>
           </p:cNvPr>
@@ -10892,7 +10892,7 @@
           <p:cNvPr id="4" name="">
             <a:extLst xmlns:a="http://schemas.openxmlformats.org/drawingml/2006/main">
               <a:ext uri="{FF2B5EF4-FFF2-40B4-BE49-F238E27FC236}">
-                <a16:creationId xmlns:a16="http://schemas.microsoft.com/office/drawing/2014/main" id="{F580300C-15D6-4523-A0B4-01BCC1C43227}"/>
+                <a16:creationId xmlns:a16="http://schemas.microsoft.com/office/drawing/2014/main" id="{43756A56-9499-475C-866A-E82E79A134C4}"/>
               </a:ext>
             </a:extLst>
           </p:cNvPr>
@@ -11048,7 +11048,7 @@
           <p:cNvPr id="5" name="">
             <a:extLst xmlns:a="http://schemas.openxmlformats.org/drawingml/2006/main">
               <a:ext uri="{FF2B5EF4-FFF2-40B4-BE49-F238E27FC236}">
-                <a16:creationId xmlns:a16="http://schemas.microsoft.com/office/drawing/2014/main" id="{F3E2B553-C209-44E1-B885-B72973F9D355}"/>
+                <a16:creationId xmlns:a16="http://schemas.microsoft.com/office/drawing/2014/main" id="{B1988C94-1D48-4F5D-8EFC-BF927F931475}"/>
               </a:ext>
             </a:extLst>
           </p:cNvPr>
@@ -11204,7 +11204,7 @@
           <p:cNvPr id="6" name="">
             <a:extLst xmlns:a="http://schemas.openxmlformats.org/drawingml/2006/main">
               <a:ext uri="{FF2B5EF4-FFF2-40B4-BE49-F238E27FC236}">
-                <a16:creationId xmlns:a16="http://schemas.microsoft.com/office/drawing/2014/main" id="{8A3E2A47-DEDA-4642-8241-1D1AB25841BA}"/>
+                <a16:creationId xmlns:a16="http://schemas.microsoft.com/office/drawing/2014/main" id="{F3F996E7-E9E6-4DE7-9E69-A98EBE9E71D6}"/>
               </a:ext>
             </a:extLst>
           </p:cNvPr>
@@ -11360,7 +11360,7 @@
           <p:cNvPr id="7" name="">
             <a:extLst xmlns:a="http://schemas.openxmlformats.org/drawingml/2006/main">
               <a:ext uri="{FF2B5EF4-FFF2-40B4-BE49-F238E27FC236}">
-                <a16:creationId xmlns:a16="http://schemas.microsoft.com/office/drawing/2014/main" id="{8C4C1DBA-3C22-4111-A51A-B191E83B33A2}"/>
+                <a16:creationId xmlns:a16="http://schemas.microsoft.com/office/drawing/2014/main" id="{592342EE-FF72-46AA-AD6F-0CEDECF1A751}"/>
               </a:ext>
             </a:extLst>
           </p:cNvPr>
@@ -11514,7 +11514,7 @@
     </p:spTree>
     <p:extLst>
       <p:ext uri="{BB962C8B-B14F-4D97-AF65-F5344CB8AC3E}">
-        <p14:creationId xmlns:p14="http://schemas.microsoft.com/office/powerpoint/2010/main" val="388202284"/>
+        <p14:creationId xmlns:p14="http://schemas.microsoft.com/office/powerpoint/2010/main" val="1184788417"/>
       </p:ext>
     </p:extLst>
   </p:cSld>
@@ -11545,7 +11545,7 @@
           <p:cNvPr id="8" name="">
             <a:extLst xmlns:a="http://schemas.openxmlformats.org/drawingml/2006/main">
               <a:ext uri="{FF2B5EF4-FFF2-40B4-BE49-F238E27FC236}">
-                <a16:creationId xmlns:a16="http://schemas.microsoft.com/office/drawing/2014/main" id="{7277A4D5-FA60-4095-950F-559473A50745}"/>
+                <a16:creationId xmlns:a16="http://schemas.microsoft.com/office/drawing/2014/main" id="{5968CA2A-A26A-4137-AD20-D014D551BA54}"/>
               </a:ext>
             </a:extLst>
           </p:cNvPr>
@@ -11701,7 +11701,7 @@
           <p:cNvPr id="2" name="">
             <a:extLst xmlns:a="http://schemas.openxmlformats.org/drawingml/2006/main">
               <a:ext uri="{FF2B5EF4-FFF2-40B4-BE49-F238E27FC236}">
-                <a16:creationId xmlns:a16="http://schemas.microsoft.com/office/drawing/2014/main" id="{C3F592F1-9BAB-4C77-871D-07412F9BB6BE}"/>
+                <a16:creationId xmlns:a16="http://schemas.microsoft.com/office/drawing/2014/main" id="{4FB22669-8AB7-4B61-A5BC-598E1908B180}"/>
               </a:ext>
             </a:extLst>
           </p:cNvPr>
@@ -11857,7 +11857,7 @@
           <p:cNvPr id="3" name="">
             <a:extLst xmlns:a="http://schemas.openxmlformats.org/drawingml/2006/main">
               <a:ext uri="{FF2B5EF4-FFF2-40B4-BE49-F238E27FC236}">
-                <a16:creationId xmlns:a16="http://schemas.microsoft.com/office/drawing/2014/main" id="{CF5677D4-C285-48D8-95F2-E0688C7B1991}"/>
+                <a16:creationId xmlns:a16="http://schemas.microsoft.com/office/drawing/2014/main" id="{6DC36A53-B84B-4502-AD76-57E3C876C385}"/>
               </a:ext>
             </a:extLst>
           </p:cNvPr>
@@ -12013,7 +12013,7 @@
           <p:cNvPr id="4" name="">
             <a:extLst xmlns:a="http://schemas.openxmlformats.org/drawingml/2006/main">
               <a:ext uri="{FF2B5EF4-FFF2-40B4-BE49-F238E27FC236}">
-                <a16:creationId xmlns:a16="http://schemas.microsoft.com/office/drawing/2014/main" id="{C7332D6F-9B64-4B1D-BE4D-E78D0AE15348}"/>
+                <a16:creationId xmlns:a16="http://schemas.microsoft.com/office/drawing/2014/main" id="{5F546C4B-198C-4C3E-9C82-C6687BAE0EBD}"/>
               </a:ext>
             </a:extLst>
           </p:cNvPr>
@@ -12169,7 +12169,7 @@
           <p:cNvPr id="5" name="">
             <a:extLst xmlns:a="http://schemas.openxmlformats.org/drawingml/2006/main">
               <a:ext uri="{FF2B5EF4-FFF2-40B4-BE49-F238E27FC236}">
-                <a16:creationId xmlns:a16="http://schemas.microsoft.com/office/drawing/2014/main" id="{86A49A86-A8B5-4E06-9700-C1B3BD6BC403}"/>
+                <a16:creationId xmlns:a16="http://schemas.microsoft.com/office/drawing/2014/main" id="{121FBA70-C26B-412A-9F5F-20FEC89E4886}"/>
               </a:ext>
             </a:extLst>
           </p:cNvPr>
@@ -12325,7 +12325,7 @@
           <p:cNvPr id="6" name="">
             <a:extLst xmlns:a="http://schemas.openxmlformats.org/drawingml/2006/main">
               <a:ext uri="{FF2B5EF4-FFF2-40B4-BE49-F238E27FC236}">
-                <a16:creationId xmlns:a16="http://schemas.microsoft.com/office/drawing/2014/main" id="{5AF6D332-8D6B-46BF-851C-7ECB3A980E01}"/>
+                <a16:creationId xmlns:a16="http://schemas.microsoft.com/office/drawing/2014/main" id="{CF770B2A-F0C2-429E-95E5-892E40590268}"/>
               </a:ext>
             </a:extLst>
           </p:cNvPr>
@@ -12481,7 +12481,7 @@
           <p:cNvPr id="7" name="">
             <a:extLst xmlns:a="http://schemas.openxmlformats.org/drawingml/2006/main">
               <a:ext uri="{FF2B5EF4-FFF2-40B4-BE49-F238E27FC236}">
-                <a16:creationId xmlns:a16="http://schemas.microsoft.com/office/drawing/2014/main" id="{DC87410C-D179-4361-8E01-DD3106EC328F}"/>
+                <a16:creationId xmlns:a16="http://schemas.microsoft.com/office/drawing/2014/main" id="{2CB74C93-976C-4F54-B8AA-561BC8C19DA8}"/>
               </a:ext>
             </a:extLst>
           </p:cNvPr>
@@ -12635,7 +12635,7 @@
     </p:spTree>
     <p:extLst>
       <p:ext uri="{BB962C8B-B14F-4D97-AF65-F5344CB8AC3E}">
-        <p14:creationId xmlns:p14="http://schemas.microsoft.com/office/powerpoint/2010/main" val="943383499"/>
+        <p14:creationId xmlns:p14="http://schemas.microsoft.com/office/powerpoint/2010/main" val="1899728392"/>
       </p:ext>
     </p:extLst>
   </p:cSld>
@@ -12666,7 +12666,7 @@
           <p:cNvPr id="8" name="">
             <a:extLst xmlns:a="http://schemas.openxmlformats.org/drawingml/2006/main">
               <a:ext uri="{FF2B5EF4-FFF2-40B4-BE49-F238E27FC236}">
-                <a16:creationId xmlns:a16="http://schemas.microsoft.com/office/drawing/2014/main" id="{E37121E2-0A1B-4B73-927D-4F268D8F7E0B}"/>
+                <a16:creationId xmlns:a16="http://schemas.microsoft.com/office/drawing/2014/main" id="{8850E17E-EA68-49B6-A74D-32F96A06AA58}"/>
               </a:ext>
             </a:extLst>
           </p:cNvPr>
@@ -12822,7 +12822,7 @@
           <p:cNvPr id="2" name="">
             <a:extLst xmlns:a="http://schemas.openxmlformats.org/drawingml/2006/main">
               <a:ext uri="{FF2B5EF4-FFF2-40B4-BE49-F238E27FC236}">
-                <a16:creationId xmlns:a16="http://schemas.microsoft.com/office/drawing/2014/main" id="{11820F03-4BD6-48E3-81AF-19E521A14FA6}"/>
+                <a16:creationId xmlns:a16="http://schemas.microsoft.com/office/drawing/2014/main" id="{F2F3C892-C1C5-4F68-BE31-65A1A8FD9BE5}"/>
               </a:ext>
             </a:extLst>
           </p:cNvPr>
@@ -12978,7 +12978,7 @@
           <p:cNvPr id="3" name="">
             <a:extLst xmlns:a="http://schemas.openxmlformats.org/drawingml/2006/main">
               <a:ext uri="{FF2B5EF4-FFF2-40B4-BE49-F238E27FC236}">
-                <a16:creationId xmlns:a16="http://schemas.microsoft.com/office/drawing/2014/main" id="{AEC11DB4-C026-4EF7-8055-B5C8D8859D19}"/>
+                <a16:creationId xmlns:a16="http://schemas.microsoft.com/office/drawing/2014/main" id="{B50AD25A-3046-4A45-9EDA-F50D8620A89F}"/>
               </a:ext>
             </a:extLst>
           </p:cNvPr>
@@ -13134,7 +13134,7 @@
           <p:cNvPr id="4" name="">
             <a:extLst xmlns:a="http://schemas.openxmlformats.org/drawingml/2006/main">
               <a:ext uri="{FF2B5EF4-FFF2-40B4-BE49-F238E27FC236}">
-                <a16:creationId xmlns:a16="http://schemas.microsoft.com/office/drawing/2014/main" id="{303854ED-631D-4EE9-8F73-D0EEB9A9F485}"/>
+                <a16:creationId xmlns:a16="http://schemas.microsoft.com/office/drawing/2014/main" id="{34DA19B7-02BD-4B95-9D5B-C3E31BEBE3DA}"/>
               </a:ext>
             </a:extLst>
           </p:cNvPr>
@@ -13290,7 +13290,7 @@
           <p:cNvPr id="5" name="">
             <a:extLst xmlns:a="http://schemas.openxmlformats.org/drawingml/2006/main">
               <a:ext uri="{FF2B5EF4-FFF2-40B4-BE49-F238E27FC236}">
-                <a16:creationId xmlns:a16="http://schemas.microsoft.com/office/drawing/2014/main" id="{0D688B85-29CB-44BC-9B36-995A0C00B36A}"/>
+                <a16:creationId xmlns:a16="http://schemas.microsoft.com/office/drawing/2014/main" id="{2F002669-1B2F-44EE-9D61-D6D09219B594}"/>
               </a:ext>
             </a:extLst>
           </p:cNvPr>
@@ -13446,7 +13446,7 @@
           <p:cNvPr id="6" name="">
             <a:extLst xmlns:a="http://schemas.openxmlformats.org/drawingml/2006/main">
               <a:ext uri="{FF2B5EF4-FFF2-40B4-BE49-F238E27FC236}">
-                <a16:creationId xmlns:a16="http://schemas.microsoft.com/office/drawing/2014/main" id="{236EAE6C-004E-4ED4-A0AF-EDA46A5D7FA0}"/>
+                <a16:creationId xmlns:a16="http://schemas.microsoft.com/office/drawing/2014/main" id="{448B335D-CBFA-4332-B5AF-343AA56EBBD2}"/>
               </a:ext>
             </a:extLst>
           </p:cNvPr>
@@ -13602,7 +13602,7 @@
           <p:cNvPr id="7" name="">
             <a:extLst xmlns:a="http://schemas.openxmlformats.org/drawingml/2006/main">
               <a:ext uri="{FF2B5EF4-FFF2-40B4-BE49-F238E27FC236}">
-                <a16:creationId xmlns:a16="http://schemas.microsoft.com/office/drawing/2014/main" id="{72E7FB4E-44BC-4D56-ABC5-A6C9276E8517}"/>
+                <a16:creationId xmlns:a16="http://schemas.microsoft.com/office/drawing/2014/main" id="{D3731343-2368-4FB0-89F7-4ACCB38CFC5B}"/>
               </a:ext>
             </a:extLst>
           </p:cNvPr>
@@ -13756,7 +13756,7 @@
     </p:spTree>
     <p:extLst>
       <p:ext uri="{BB962C8B-B14F-4D97-AF65-F5344CB8AC3E}">
-        <p14:creationId xmlns:p14="http://schemas.microsoft.com/office/powerpoint/2010/main" val="836043325"/>
+        <p14:creationId xmlns:p14="http://schemas.microsoft.com/office/powerpoint/2010/main" val="1103312876"/>
       </p:ext>
     </p:extLst>
   </p:cSld>
@@ -13787,7 +13787,7 @@
           <p:cNvPr id="8" name="">
             <a:extLst xmlns:a="http://schemas.openxmlformats.org/drawingml/2006/main">
               <a:ext uri="{FF2B5EF4-FFF2-40B4-BE49-F238E27FC236}">
-                <a16:creationId xmlns:a16="http://schemas.microsoft.com/office/drawing/2014/main" id="{E279EC44-20B7-498B-9DA7-FDF851CAC5CC}"/>
+                <a16:creationId xmlns:a16="http://schemas.microsoft.com/office/drawing/2014/main" id="{FE629CF2-2098-4C6E-A9D5-7DF614D8C444}"/>
               </a:ext>
             </a:extLst>
           </p:cNvPr>
@@ -13943,7 +13943,7 @@
           <p:cNvPr id="2" name="">
             <a:extLst xmlns:a="http://schemas.openxmlformats.org/drawingml/2006/main">
               <a:ext uri="{FF2B5EF4-FFF2-40B4-BE49-F238E27FC236}">
-                <a16:creationId xmlns:a16="http://schemas.microsoft.com/office/drawing/2014/main" id="{15F17946-E869-4495-AFF4-C85A84F1B9E8}"/>
+                <a16:creationId xmlns:a16="http://schemas.microsoft.com/office/drawing/2014/main" id="{7A715A0A-F040-4BFB-9416-A77611EBD8E2}"/>
               </a:ext>
             </a:extLst>
           </p:cNvPr>
@@ -14099,7 +14099,7 @@
           <p:cNvPr id="3" name="">
             <a:extLst xmlns:a="http://schemas.openxmlformats.org/drawingml/2006/main">
               <a:ext uri="{FF2B5EF4-FFF2-40B4-BE49-F238E27FC236}">
-                <a16:creationId xmlns:a16="http://schemas.microsoft.com/office/drawing/2014/main" id="{58F4C1DA-980A-4A0F-8EAE-D652A5CB1086}"/>
+                <a16:creationId xmlns:a16="http://schemas.microsoft.com/office/drawing/2014/main" id="{4F61681B-B90C-4726-A45E-EDCDAF808B23}"/>
               </a:ext>
             </a:extLst>
           </p:cNvPr>
@@ -14255,7 +14255,7 @@
           <p:cNvPr id="4" name="">
             <a:extLst xmlns:a="http://schemas.openxmlformats.org/drawingml/2006/main">
               <a:ext uri="{FF2B5EF4-FFF2-40B4-BE49-F238E27FC236}">
-                <a16:creationId xmlns:a16="http://schemas.microsoft.com/office/drawing/2014/main" id="{1A679AFA-8674-4CFB-BFB3-C2A3AB7ADC39}"/>
+                <a16:creationId xmlns:a16="http://schemas.microsoft.com/office/drawing/2014/main" id="{BDB55BB1-6486-4107-A610-C655B659E340}"/>
               </a:ext>
             </a:extLst>
           </p:cNvPr>
@@ -14411,7 +14411,7 @@
           <p:cNvPr id="5" name="">
             <a:extLst xmlns:a="http://schemas.openxmlformats.org/drawingml/2006/main">
               <a:ext uri="{FF2B5EF4-FFF2-40B4-BE49-F238E27FC236}">
-                <a16:creationId xmlns:a16="http://schemas.microsoft.com/office/drawing/2014/main" id="{B4C7631D-21BE-4F02-AA0F-71C0BF0D2773}"/>
+                <a16:creationId xmlns:a16="http://schemas.microsoft.com/office/drawing/2014/main" id="{48C80783-0C5D-4E8A-A213-31EC950DA811}"/>
               </a:ext>
             </a:extLst>
           </p:cNvPr>
@@ -14567,7 +14567,7 @@
           <p:cNvPr id="6" name="">
             <a:extLst xmlns:a="http://schemas.openxmlformats.org/drawingml/2006/main">
               <a:ext uri="{FF2B5EF4-FFF2-40B4-BE49-F238E27FC236}">
-                <a16:creationId xmlns:a16="http://schemas.microsoft.com/office/drawing/2014/main" id="{970B8C94-0FD3-46E3-A48C-ECF029D4466C}"/>
+                <a16:creationId xmlns:a16="http://schemas.microsoft.com/office/drawing/2014/main" id="{5768268D-7F86-4A66-8883-289381B4B71A}"/>
               </a:ext>
             </a:extLst>
           </p:cNvPr>
@@ -14723,7 +14723,7 @@
           <p:cNvPr id="7" name="">
             <a:extLst xmlns:a="http://schemas.openxmlformats.org/drawingml/2006/main">
               <a:ext uri="{FF2B5EF4-FFF2-40B4-BE49-F238E27FC236}">
-                <a16:creationId xmlns:a16="http://schemas.microsoft.com/office/drawing/2014/main" id="{47690DEB-F8E5-4760-BB94-4D1692D55ACF}"/>
+                <a16:creationId xmlns:a16="http://schemas.microsoft.com/office/drawing/2014/main" id="{E8FFF8FB-E5BD-44D5-BA82-117DCFA6E314}"/>
               </a:ext>
             </a:extLst>
           </p:cNvPr>
@@ -14877,7 +14877,7 @@
     </p:spTree>
     <p:extLst>
       <p:ext uri="{BB962C8B-B14F-4D97-AF65-F5344CB8AC3E}">
-        <p14:creationId xmlns:p14="http://schemas.microsoft.com/office/powerpoint/2010/main" val="1943467221"/>
+        <p14:creationId xmlns:p14="http://schemas.microsoft.com/office/powerpoint/2010/main" val="1550954698"/>
       </p:ext>
     </p:extLst>
   </p:cSld>
@@ -14908,7 +14908,7 @@
           <p:cNvPr id="8" name="">
             <a:extLst xmlns:a="http://schemas.openxmlformats.org/drawingml/2006/main">
               <a:ext uri="{FF2B5EF4-FFF2-40B4-BE49-F238E27FC236}">
-                <a16:creationId xmlns:a16="http://schemas.microsoft.com/office/drawing/2014/main" id="{1FE81081-EE1B-45D5-9062-99BF21204219}"/>
+                <a16:creationId xmlns:a16="http://schemas.microsoft.com/office/drawing/2014/main" id="{E3D35B10-189C-4F57-90D0-B62D5C64C4C4}"/>
               </a:ext>
             </a:extLst>
           </p:cNvPr>
@@ -15064,7 +15064,7 @@
           <p:cNvPr id="2" name="">
             <a:extLst xmlns:a="http://schemas.openxmlformats.org/drawingml/2006/main">
               <a:ext uri="{FF2B5EF4-FFF2-40B4-BE49-F238E27FC236}">
-                <a16:creationId xmlns:a16="http://schemas.microsoft.com/office/drawing/2014/main" id="{868A1F33-D19A-4440-959D-EA775C3E3ADC}"/>
+                <a16:creationId xmlns:a16="http://schemas.microsoft.com/office/drawing/2014/main" id="{D7F27041-B0D7-4561-A76D-1D7CD0572F0D}"/>
               </a:ext>
             </a:extLst>
           </p:cNvPr>
@@ -15220,7 +15220,7 @@
           <p:cNvPr id="3" name="">
             <a:extLst xmlns:a="http://schemas.openxmlformats.org/drawingml/2006/main">
               <a:ext uri="{FF2B5EF4-FFF2-40B4-BE49-F238E27FC236}">
-                <a16:creationId xmlns:a16="http://schemas.microsoft.com/office/drawing/2014/main" id="{73661F2B-1747-434E-B14F-D7D9A2FCC588}"/>
+                <a16:creationId xmlns:a16="http://schemas.microsoft.com/office/drawing/2014/main" id="{04144DB0-9593-4C2E-B839-A32D33EA699D}"/>
               </a:ext>
             </a:extLst>
           </p:cNvPr>
@@ -15376,7 +15376,7 @@
           <p:cNvPr id="4" name="">
             <a:extLst xmlns:a="http://schemas.openxmlformats.org/drawingml/2006/main">
               <a:ext uri="{FF2B5EF4-FFF2-40B4-BE49-F238E27FC236}">
-                <a16:creationId xmlns:a16="http://schemas.microsoft.com/office/drawing/2014/main" id="{5005496F-747A-4809-AAA8-87BD7D27D790}"/>
+                <a16:creationId xmlns:a16="http://schemas.microsoft.com/office/drawing/2014/main" id="{7B317938-9268-4386-8F2B-80199533CDBD}"/>
               </a:ext>
             </a:extLst>
           </p:cNvPr>
@@ -15532,7 +15532,7 @@
           <p:cNvPr id="5" name="">
             <a:extLst xmlns:a="http://schemas.openxmlformats.org/drawingml/2006/main">
               <a:ext uri="{FF2B5EF4-FFF2-40B4-BE49-F238E27FC236}">
-                <a16:creationId xmlns:a16="http://schemas.microsoft.com/office/drawing/2014/main" id="{B6AB6F58-DFBC-4137-A2E5-15509C06B09B}"/>
+                <a16:creationId xmlns:a16="http://schemas.microsoft.com/office/drawing/2014/main" id="{5CC240F7-7E44-44A1-9AB4-6172A3ABBDFE}"/>
               </a:ext>
             </a:extLst>
           </p:cNvPr>
@@ -15688,7 +15688,7 @@
           <p:cNvPr id="6" name="">
             <a:extLst xmlns:a="http://schemas.openxmlformats.org/drawingml/2006/main">
               <a:ext uri="{FF2B5EF4-FFF2-40B4-BE49-F238E27FC236}">
-                <a16:creationId xmlns:a16="http://schemas.microsoft.com/office/drawing/2014/main" id="{A15714EC-910E-4EC6-955D-7D789FCC4A86}"/>
+                <a16:creationId xmlns:a16="http://schemas.microsoft.com/office/drawing/2014/main" id="{5326F1AC-8B70-413C-94F7-7C41046C97CC}"/>
               </a:ext>
             </a:extLst>
           </p:cNvPr>
@@ -15844,7 +15844,7 @@
           <p:cNvPr id="7" name="">
             <a:extLst xmlns:a="http://schemas.openxmlformats.org/drawingml/2006/main">
               <a:ext uri="{FF2B5EF4-FFF2-40B4-BE49-F238E27FC236}">
-                <a16:creationId xmlns:a16="http://schemas.microsoft.com/office/drawing/2014/main" id="{B48F9D60-A5C9-4FCE-9E26-4FB52C593C3F}"/>
+                <a16:creationId xmlns:a16="http://schemas.microsoft.com/office/drawing/2014/main" id="{92F75E00-FCFD-4A8D-B5B9-C88CF1033A1A}"/>
               </a:ext>
             </a:extLst>
           </p:cNvPr>
@@ -15998,7 +15998,7 @@
     </p:spTree>
     <p:extLst>
       <p:ext uri="{BB962C8B-B14F-4D97-AF65-F5344CB8AC3E}">
-        <p14:creationId xmlns:p14="http://schemas.microsoft.com/office/powerpoint/2010/main" val="1782079708"/>
+        <p14:creationId xmlns:p14="http://schemas.microsoft.com/office/powerpoint/2010/main" val="878639850"/>
       </p:ext>
     </p:extLst>
   </p:cSld>
@@ -16029,7 +16029,7 @@
           <p:cNvPr id="8" name="">
             <a:extLst xmlns:a="http://schemas.openxmlformats.org/drawingml/2006/main">
               <a:ext uri="{FF2B5EF4-FFF2-40B4-BE49-F238E27FC236}">
-                <a16:creationId xmlns:a16="http://schemas.microsoft.com/office/drawing/2014/main" id="{028E2D7E-B917-4FF3-992C-4E1920407834}"/>
+                <a16:creationId xmlns:a16="http://schemas.microsoft.com/office/drawing/2014/main" id="{56B87A91-332B-4961-BDED-C538A7631D80}"/>
               </a:ext>
             </a:extLst>
           </p:cNvPr>
@@ -16185,7 +16185,7 @@
           <p:cNvPr id="2" name="">
             <a:extLst xmlns:a="http://schemas.openxmlformats.org/drawingml/2006/main">
               <a:ext uri="{FF2B5EF4-FFF2-40B4-BE49-F238E27FC236}">
-                <a16:creationId xmlns:a16="http://schemas.microsoft.com/office/drawing/2014/main" id="{6CAD0ABF-3362-4EB0-B57C-B4CE3973BF4C}"/>
+                <a16:creationId xmlns:a16="http://schemas.microsoft.com/office/drawing/2014/main" id="{358AEF2C-6E7A-4420-921E-C4E35385E6A9}"/>
               </a:ext>
             </a:extLst>
           </p:cNvPr>
@@ -16341,7 +16341,7 @@
           <p:cNvPr id="3" name="">
             <a:extLst xmlns:a="http://schemas.openxmlformats.org/drawingml/2006/main">
               <a:ext uri="{FF2B5EF4-FFF2-40B4-BE49-F238E27FC236}">
-                <a16:creationId xmlns:a16="http://schemas.microsoft.com/office/drawing/2014/main" id="{67EBB750-F9D5-4B2D-9DEF-CADBC5EE0E64}"/>
+                <a16:creationId xmlns:a16="http://schemas.microsoft.com/office/drawing/2014/main" id="{2FCA6843-03E0-4D27-BFE7-FEE1E8B301C2}"/>
               </a:ext>
             </a:extLst>
           </p:cNvPr>
@@ -16497,7 +16497,7 @@
           <p:cNvPr id="4" name="">
             <a:extLst xmlns:a="http://schemas.openxmlformats.org/drawingml/2006/main">
               <a:ext uri="{FF2B5EF4-FFF2-40B4-BE49-F238E27FC236}">
-                <a16:creationId xmlns:a16="http://schemas.microsoft.com/office/drawing/2014/main" id="{178436DC-D2C6-4AB8-B138-5D8A7DCD955C}"/>
+                <a16:creationId xmlns:a16="http://schemas.microsoft.com/office/drawing/2014/main" id="{80A4F925-57C8-41D3-B351-0EE44637C75D}"/>
               </a:ext>
             </a:extLst>
           </p:cNvPr>
@@ -16653,7 +16653,7 @@
           <p:cNvPr id="5" name="">
             <a:extLst xmlns:a="http://schemas.openxmlformats.org/drawingml/2006/main">
               <a:ext uri="{FF2B5EF4-FFF2-40B4-BE49-F238E27FC236}">
-                <a16:creationId xmlns:a16="http://schemas.microsoft.com/office/drawing/2014/main" id="{701C97E0-094A-467B-9695-0D875CF65BC1}"/>
+                <a16:creationId xmlns:a16="http://schemas.microsoft.com/office/drawing/2014/main" id="{D68F8F7B-A7D0-44C8-8083-D22BC5FD4A54}"/>
               </a:ext>
             </a:extLst>
           </p:cNvPr>
@@ -16809,7 +16809,7 @@
           <p:cNvPr id="6" name="">
             <a:extLst xmlns:a="http://schemas.openxmlformats.org/drawingml/2006/main">
               <a:ext uri="{FF2B5EF4-FFF2-40B4-BE49-F238E27FC236}">
-                <a16:creationId xmlns:a16="http://schemas.microsoft.com/office/drawing/2014/main" id="{A89690BC-5F40-4784-BF17-A1AC9C4DC453}"/>
+                <a16:creationId xmlns:a16="http://schemas.microsoft.com/office/drawing/2014/main" id="{D70B2F8E-647A-4379-8B4F-1A0988FC8094}"/>
               </a:ext>
             </a:extLst>
           </p:cNvPr>
@@ -16965,7 +16965,7 @@
           <p:cNvPr id="7" name="">
             <a:extLst xmlns:a="http://schemas.openxmlformats.org/drawingml/2006/main">
               <a:ext uri="{FF2B5EF4-FFF2-40B4-BE49-F238E27FC236}">
-                <a16:creationId xmlns:a16="http://schemas.microsoft.com/office/drawing/2014/main" id="{38D2CFF4-D30F-4905-A481-5A3976B3D5E6}"/>
+                <a16:creationId xmlns:a16="http://schemas.microsoft.com/office/drawing/2014/main" id="{B5930492-2158-46BA-A5F9-CD8B4904B688}"/>
               </a:ext>
             </a:extLst>
           </p:cNvPr>
@@ -17119,7 +17119,7 @@
     </p:spTree>
     <p:extLst>
       <p:ext uri="{BB962C8B-B14F-4D97-AF65-F5344CB8AC3E}">
-        <p14:creationId xmlns:p14="http://schemas.microsoft.com/office/powerpoint/2010/main" val="1851121646"/>
+        <p14:creationId xmlns:p14="http://schemas.microsoft.com/office/powerpoint/2010/main" val="1474253695"/>
       </p:ext>
     </p:extLst>
   </p:cSld>
@@ -17150,7 +17150,7 @@
           <p:cNvPr id="8" name="">
             <a:extLst xmlns:a="http://schemas.openxmlformats.org/drawingml/2006/main">
               <a:ext uri="{FF2B5EF4-FFF2-40B4-BE49-F238E27FC236}">
-                <a16:creationId xmlns:a16="http://schemas.microsoft.com/office/drawing/2014/main" id="{84A44841-014B-4100-A34A-71EEA85CB5E9}"/>
+                <a16:creationId xmlns:a16="http://schemas.microsoft.com/office/drawing/2014/main" id="{68C6A2C7-A558-4946-BD75-194BAA42534B}"/>
               </a:ext>
             </a:extLst>
           </p:cNvPr>
@@ -17306,7 +17306,7 @@
           <p:cNvPr id="2" name="">
             <a:extLst xmlns:a="http://schemas.openxmlformats.org/drawingml/2006/main">
               <a:ext uri="{FF2B5EF4-FFF2-40B4-BE49-F238E27FC236}">
-                <a16:creationId xmlns:a16="http://schemas.microsoft.com/office/drawing/2014/main" id="{F368A4F2-2815-478A-9969-73426E719441}"/>
+                <a16:creationId xmlns:a16="http://schemas.microsoft.com/office/drawing/2014/main" id="{F7BF74BA-2B39-434D-8023-89B169F7EC65}"/>
               </a:ext>
             </a:extLst>
           </p:cNvPr>
@@ -17462,7 +17462,7 @@
           <p:cNvPr id="3" name="">
             <a:extLst xmlns:a="http://schemas.openxmlformats.org/drawingml/2006/main">
               <a:ext uri="{FF2B5EF4-FFF2-40B4-BE49-F238E27FC236}">
-                <a16:creationId xmlns:a16="http://schemas.microsoft.com/office/drawing/2014/main" id="{43435802-F15F-4884-AF22-06B6316FA5B3}"/>
+                <a16:creationId xmlns:a16="http://schemas.microsoft.com/office/drawing/2014/main" id="{9DFF6E84-C8C5-46AE-A846-43CB272B765E}"/>
               </a:ext>
             </a:extLst>
           </p:cNvPr>
@@ -17618,7 +17618,7 @@
           <p:cNvPr id="4" name="">
             <a:extLst xmlns:a="http://schemas.openxmlformats.org/drawingml/2006/main">
               <a:ext uri="{FF2B5EF4-FFF2-40B4-BE49-F238E27FC236}">
-                <a16:creationId xmlns:a16="http://schemas.microsoft.com/office/drawing/2014/main" id="{E1A9E53A-11EE-40AF-8673-43900F617402}"/>
+                <a16:creationId xmlns:a16="http://schemas.microsoft.com/office/drawing/2014/main" id="{F96E21D5-3856-4F61-B00A-4189846B030E}"/>
               </a:ext>
             </a:extLst>
           </p:cNvPr>
@@ -17774,7 +17774,7 @@
           <p:cNvPr id="5" name="">
             <a:extLst xmlns:a="http://schemas.openxmlformats.org/drawingml/2006/main">
               <a:ext uri="{FF2B5EF4-FFF2-40B4-BE49-F238E27FC236}">
-                <a16:creationId xmlns:a16="http://schemas.microsoft.com/office/drawing/2014/main" id="{2C929222-6E7F-41B3-B658-C7E35B7ADA6F}"/>
+                <a16:creationId xmlns:a16="http://schemas.microsoft.com/office/drawing/2014/main" id="{ECA2BDE1-2FA3-4C14-90A0-307841342A43}"/>
               </a:ext>
             </a:extLst>
           </p:cNvPr>
@@ -17930,7 +17930,7 @@
           <p:cNvPr id="6" name="">
             <a:extLst xmlns:a="http://schemas.openxmlformats.org/drawingml/2006/main">
               <a:ext uri="{FF2B5EF4-FFF2-40B4-BE49-F238E27FC236}">
-                <a16:creationId xmlns:a16="http://schemas.microsoft.com/office/drawing/2014/main" id="{303B2A25-CE52-44AC-8055-6DD2400ECFE8}"/>
+                <a16:creationId xmlns:a16="http://schemas.microsoft.com/office/drawing/2014/main" id="{876EBC07-AF78-4FF3-B07B-FD2FA8259EE6}"/>
               </a:ext>
             </a:extLst>
           </p:cNvPr>
@@ -18086,7 +18086,7 @@
           <p:cNvPr id="7" name="">
             <a:extLst xmlns:a="http://schemas.openxmlformats.org/drawingml/2006/main">
               <a:ext uri="{FF2B5EF4-FFF2-40B4-BE49-F238E27FC236}">
-                <a16:creationId xmlns:a16="http://schemas.microsoft.com/office/drawing/2014/main" id="{3736AC3E-A2F9-4188-9D34-4F6DF4B23D8E}"/>
+                <a16:creationId xmlns:a16="http://schemas.microsoft.com/office/drawing/2014/main" id="{BA3E55CB-A23D-4693-977E-BE456B54BA28}"/>
               </a:ext>
             </a:extLst>
           </p:cNvPr>
@@ -18240,7 +18240,7 @@
     </p:spTree>
     <p:extLst>
       <p:ext uri="{BB962C8B-B14F-4D97-AF65-F5344CB8AC3E}">
-        <p14:creationId xmlns:p14="http://schemas.microsoft.com/office/powerpoint/2010/main" val="862311277"/>
+        <p14:creationId xmlns:p14="http://schemas.microsoft.com/office/powerpoint/2010/main" val="867676320"/>
       </p:ext>
     </p:extLst>
   </p:cSld>
@@ -18271,7 +18271,7 @@
           <p:cNvPr id="7" name="">
             <a:extLst xmlns:a="http://schemas.openxmlformats.org/drawingml/2006/main">
               <a:ext uri="{FF2B5EF4-FFF2-40B4-BE49-F238E27FC236}">
-                <a16:creationId xmlns:a16="http://schemas.microsoft.com/office/drawing/2014/main" id="{A35BC819-A89B-45AE-B70A-D60876D60EB8}"/>
+                <a16:creationId xmlns:a16="http://schemas.microsoft.com/office/drawing/2014/main" id="{46A2B629-51E2-4820-92C9-6B2B2DD009C3}"/>
               </a:ext>
             </a:extLst>
           </p:cNvPr>
@@ -18427,7 +18427,7 @@
           <p:cNvPr id="2" name="">
             <a:extLst xmlns:a="http://schemas.openxmlformats.org/drawingml/2006/main">
               <a:ext uri="{FF2B5EF4-FFF2-40B4-BE49-F238E27FC236}">
-                <a16:creationId xmlns:a16="http://schemas.microsoft.com/office/drawing/2014/main" id="{A92E9375-D666-435A-8DB9-5967A8597C66}"/>
+                <a16:creationId xmlns:a16="http://schemas.microsoft.com/office/drawing/2014/main" id="{EAF499AF-1C64-4C55-8AE6-DD52C92A2FB9}"/>
               </a:ext>
             </a:extLst>
           </p:cNvPr>
@@ -18583,7 +18583,7 @@
           <p:cNvPr id="3" name="">
             <a:extLst xmlns:a="http://schemas.openxmlformats.org/drawingml/2006/main">
               <a:ext uri="{FF2B5EF4-FFF2-40B4-BE49-F238E27FC236}">
-                <a16:creationId xmlns:a16="http://schemas.microsoft.com/office/drawing/2014/main" id="{4DD70A6D-390C-453F-AC47-AD99E2CA7BFB}"/>
+                <a16:creationId xmlns:a16="http://schemas.microsoft.com/office/drawing/2014/main" id="{DFC2EB87-E04A-493A-BBCE-9808C6A9214B}"/>
               </a:ext>
             </a:extLst>
           </p:cNvPr>
@@ -18739,7 +18739,7 @@
           <p:cNvPr id="4" name="">
             <a:extLst xmlns:a="http://schemas.openxmlformats.org/drawingml/2006/main">
               <a:ext uri="{FF2B5EF4-FFF2-40B4-BE49-F238E27FC236}">
-                <a16:creationId xmlns:a16="http://schemas.microsoft.com/office/drawing/2014/main" id="{6543C354-346D-4038-9BF7-1C4EAC4C3E9D}"/>
+                <a16:creationId xmlns:a16="http://schemas.microsoft.com/office/drawing/2014/main" id="{1D22C1B5-1E48-49B7-90BC-A0C5B32A93E8}"/>
               </a:ext>
             </a:extLst>
           </p:cNvPr>
@@ -18895,7 +18895,7 @@
           <p:cNvPr id="5" name="">
             <a:extLst xmlns:a="http://schemas.openxmlformats.org/drawingml/2006/main">
               <a:ext uri="{FF2B5EF4-FFF2-40B4-BE49-F238E27FC236}">
-                <a16:creationId xmlns:a16="http://schemas.microsoft.com/office/drawing/2014/main" id="{EA84CA15-62A3-4ACC-B2F2-09DF6B9D58D1}"/>
+                <a16:creationId xmlns:a16="http://schemas.microsoft.com/office/drawing/2014/main" id="{3EA63830-457F-4330-9F15-E5ECCD0A152D}"/>
               </a:ext>
             </a:extLst>
           </p:cNvPr>
@@ -19051,7 +19051,7 @@
           <p:cNvPr id="6" name="">
             <a:extLst xmlns:a="http://schemas.openxmlformats.org/drawingml/2006/main">
               <a:ext uri="{FF2B5EF4-FFF2-40B4-BE49-F238E27FC236}">
-                <a16:creationId xmlns:a16="http://schemas.microsoft.com/office/drawing/2014/main" id="{913720A2-9879-4FB7-BC6C-9B029BA9B172}"/>
+                <a16:creationId xmlns:a16="http://schemas.microsoft.com/office/drawing/2014/main" id="{3122A051-2E04-4E1C-9BB5-2E8E87E18336}"/>
               </a:ext>
             </a:extLst>
           </p:cNvPr>
@@ -19205,7 +19205,7 @@
     </p:spTree>
     <p:extLst>
       <p:ext uri="{BB962C8B-B14F-4D97-AF65-F5344CB8AC3E}">
-        <p14:creationId xmlns:p14="http://schemas.microsoft.com/office/powerpoint/2010/main" val="1455915800"/>
+        <p14:creationId xmlns:p14="http://schemas.microsoft.com/office/powerpoint/2010/main" val="595232209"/>
       </p:ext>
     </p:extLst>
   </p:cSld>
@@ -19236,7 +19236,7 @@
           <p:cNvPr id="8" name="">
             <a:extLst xmlns:a="http://schemas.openxmlformats.org/drawingml/2006/main">
               <a:ext uri="{FF2B5EF4-FFF2-40B4-BE49-F238E27FC236}">
-                <a16:creationId xmlns:a16="http://schemas.microsoft.com/office/drawing/2014/main" id="{79FE8DA5-1A14-47BA-8D12-62C3CE5EF157}"/>
+                <a16:creationId xmlns:a16="http://schemas.microsoft.com/office/drawing/2014/main" id="{0F90D83F-B95E-4C7C-863D-05D8A729F6FA}"/>
               </a:ext>
             </a:extLst>
           </p:cNvPr>
@@ -19392,7 +19392,7 @@
           <p:cNvPr id="2" name="">
             <a:extLst xmlns:a="http://schemas.openxmlformats.org/drawingml/2006/main">
               <a:ext uri="{FF2B5EF4-FFF2-40B4-BE49-F238E27FC236}">
-                <a16:creationId xmlns:a16="http://schemas.microsoft.com/office/drawing/2014/main" id="{C57C69B8-113D-4A4C-AA67-15147FE9CC17}"/>
+                <a16:creationId xmlns:a16="http://schemas.microsoft.com/office/drawing/2014/main" id="{6BCCDEAE-9D67-442B-875D-289DEA98E12F}"/>
               </a:ext>
             </a:extLst>
           </p:cNvPr>
@@ -19548,7 +19548,7 @@
           <p:cNvPr id="3" name="">
             <a:extLst xmlns:a="http://schemas.openxmlformats.org/drawingml/2006/main">
               <a:ext uri="{FF2B5EF4-FFF2-40B4-BE49-F238E27FC236}">
-                <a16:creationId xmlns:a16="http://schemas.microsoft.com/office/drawing/2014/main" id="{C7F0FEB3-57E2-4381-8A72-3A6EFDAEEC9C}"/>
+                <a16:creationId xmlns:a16="http://schemas.microsoft.com/office/drawing/2014/main" id="{CBA6A5B8-9433-43E9-8386-1BFC4ED0B2A8}"/>
               </a:ext>
             </a:extLst>
           </p:cNvPr>
@@ -19704,7 +19704,7 @@
           <p:cNvPr id="4" name="">
             <a:extLst xmlns:a="http://schemas.openxmlformats.org/drawingml/2006/main">
               <a:ext uri="{FF2B5EF4-FFF2-40B4-BE49-F238E27FC236}">
-                <a16:creationId xmlns:a16="http://schemas.microsoft.com/office/drawing/2014/main" id="{5D14F491-F1CB-463C-9427-A3D66947DB72}"/>
+                <a16:creationId xmlns:a16="http://schemas.microsoft.com/office/drawing/2014/main" id="{F5751CF2-B531-4CDE-A0E6-13F00B3A06A4}"/>
               </a:ext>
             </a:extLst>
           </p:cNvPr>
@@ -19860,7 +19860,7 @@
           <p:cNvPr id="5" name="">
             <a:extLst xmlns:a="http://schemas.openxmlformats.org/drawingml/2006/main">
               <a:ext uri="{FF2B5EF4-FFF2-40B4-BE49-F238E27FC236}">
-                <a16:creationId xmlns:a16="http://schemas.microsoft.com/office/drawing/2014/main" id="{B6E0F31B-302F-45C8-BECF-A2BC91B749EE}"/>
+                <a16:creationId xmlns:a16="http://schemas.microsoft.com/office/drawing/2014/main" id="{0E8BA545-874B-438A-BA5E-6F08D982AACB}"/>
               </a:ext>
             </a:extLst>
           </p:cNvPr>
@@ -20016,7 +20016,7 @@
           <p:cNvPr id="6" name="">
             <a:extLst xmlns:a="http://schemas.openxmlformats.org/drawingml/2006/main">
               <a:ext uri="{FF2B5EF4-FFF2-40B4-BE49-F238E27FC236}">
-                <a16:creationId xmlns:a16="http://schemas.microsoft.com/office/drawing/2014/main" id="{7F74E939-E2CA-4110-8682-FD24C66B9614}"/>
+                <a16:creationId xmlns:a16="http://schemas.microsoft.com/office/drawing/2014/main" id="{0D9A6D9B-ECF7-4DDA-B738-443E90413E50}"/>
               </a:ext>
             </a:extLst>
           </p:cNvPr>
@@ -20172,7 +20172,7 @@
           <p:cNvPr id="7" name="">
             <a:extLst xmlns:a="http://schemas.openxmlformats.org/drawingml/2006/main">
               <a:ext uri="{FF2B5EF4-FFF2-40B4-BE49-F238E27FC236}">
-                <a16:creationId xmlns:a16="http://schemas.microsoft.com/office/drawing/2014/main" id="{D343BCB5-3E13-45E4-933A-4116360C3088}"/>
+                <a16:creationId xmlns:a16="http://schemas.microsoft.com/office/drawing/2014/main" id="{D2AEB6F3-B17D-49EA-A0DC-700F654802DE}"/>
               </a:ext>
             </a:extLst>
           </p:cNvPr>
@@ -20326,7 +20326,7 @@
     </p:spTree>
     <p:extLst>
       <p:ext uri="{BB962C8B-B14F-4D97-AF65-F5344CB8AC3E}">
-        <p14:creationId xmlns:p14="http://schemas.microsoft.com/office/powerpoint/2010/main" val="1759319147"/>
+        <p14:creationId xmlns:p14="http://schemas.microsoft.com/office/powerpoint/2010/main" val="777649044"/>
       </p:ext>
     </p:extLst>
   </p:cSld>
@@ -20357,7 +20357,7 @@
           <p:cNvPr id="8" name="">
             <a:extLst xmlns:a="http://schemas.openxmlformats.org/drawingml/2006/main">
               <a:ext uri="{FF2B5EF4-FFF2-40B4-BE49-F238E27FC236}">
-                <a16:creationId xmlns:a16="http://schemas.microsoft.com/office/drawing/2014/main" id="{60EED2CA-F2D2-49C6-AA0E-D1F8A01EF305}"/>
+                <a16:creationId xmlns:a16="http://schemas.microsoft.com/office/drawing/2014/main" id="{F99A1E9B-1D61-4B87-BF25-BF56B14036C7}"/>
               </a:ext>
             </a:extLst>
           </p:cNvPr>
@@ -20513,7 +20513,7 @@
           <p:cNvPr id="2" name="">
             <a:extLst xmlns:a="http://schemas.openxmlformats.org/drawingml/2006/main">
               <a:ext uri="{FF2B5EF4-FFF2-40B4-BE49-F238E27FC236}">
-                <a16:creationId xmlns:a16="http://schemas.microsoft.com/office/drawing/2014/main" id="{5CA61904-DAC8-41A0-A141-92C5E8D04CDC}"/>
+                <a16:creationId xmlns:a16="http://schemas.microsoft.com/office/drawing/2014/main" id="{23546EC8-5684-4969-BCD8-48E22A3CB535}"/>
               </a:ext>
             </a:extLst>
           </p:cNvPr>
@@ -20669,7 +20669,7 @@
           <p:cNvPr id="3" name="">
             <a:extLst xmlns:a="http://schemas.openxmlformats.org/drawingml/2006/main">
               <a:ext uri="{FF2B5EF4-FFF2-40B4-BE49-F238E27FC236}">
-                <a16:creationId xmlns:a16="http://schemas.microsoft.com/office/drawing/2014/main" id="{CA7DB8D9-75D4-4E1F-B154-0F2AE9BCD1D4}"/>
+                <a16:creationId xmlns:a16="http://schemas.microsoft.com/office/drawing/2014/main" id="{64082FBA-3D2E-4F68-A25C-F891111DC305}"/>
               </a:ext>
             </a:extLst>
           </p:cNvPr>
@@ -20825,7 +20825,7 @@
           <p:cNvPr id="4" name="">
             <a:extLst xmlns:a="http://schemas.openxmlformats.org/drawingml/2006/main">
               <a:ext uri="{FF2B5EF4-FFF2-40B4-BE49-F238E27FC236}">
-                <a16:creationId xmlns:a16="http://schemas.microsoft.com/office/drawing/2014/main" id="{12FF4585-2157-4003-8F8E-CC8B2C6C309D}"/>
+                <a16:creationId xmlns:a16="http://schemas.microsoft.com/office/drawing/2014/main" id="{E37E4D35-84C7-4104-9FC2-3758C8BA9970}"/>
               </a:ext>
             </a:extLst>
           </p:cNvPr>
@@ -20981,7 +20981,7 @@
           <p:cNvPr id="5" name="">
             <a:extLst xmlns:a="http://schemas.openxmlformats.org/drawingml/2006/main">
               <a:ext uri="{FF2B5EF4-FFF2-40B4-BE49-F238E27FC236}">
-                <a16:creationId xmlns:a16="http://schemas.microsoft.com/office/drawing/2014/main" id="{5BBF1F29-5DDC-486A-8470-E503DACD6593}"/>
+                <a16:creationId xmlns:a16="http://schemas.microsoft.com/office/drawing/2014/main" id="{0BBA1641-5EFA-4B44-B637-F8F2559AE2E0}"/>
               </a:ext>
             </a:extLst>
           </p:cNvPr>
@@ -21137,7 +21137,7 @@
           <p:cNvPr id="6" name="">
             <a:extLst xmlns:a="http://schemas.openxmlformats.org/drawingml/2006/main">
               <a:ext uri="{FF2B5EF4-FFF2-40B4-BE49-F238E27FC236}">
-                <a16:creationId xmlns:a16="http://schemas.microsoft.com/office/drawing/2014/main" id="{E34384EA-BB99-4584-9109-2A1108D9D641}"/>
+                <a16:creationId xmlns:a16="http://schemas.microsoft.com/office/drawing/2014/main" id="{55D3073D-0DB5-42C3-B17E-C47E54680BBE}"/>
               </a:ext>
             </a:extLst>
           </p:cNvPr>
@@ -21293,7 +21293,7 @@
           <p:cNvPr id="7" name="">
             <a:extLst xmlns:a="http://schemas.openxmlformats.org/drawingml/2006/main">
               <a:ext uri="{FF2B5EF4-FFF2-40B4-BE49-F238E27FC236}">
-                <a16:creationId xmlns:a16="http://schemas.microsoft.com/office/drawing/2014/main" id="{F47A5C1C-A420-410B-BCA6-AE6BA80E051C}"/>
+                <a16:creationId xmlns:a16="http://schemas.microsoft.com/office/drawing/2014/main" id="{BAF6F0E5-E27D-4820-A77F-9A87A7F25667}"/>
               </a:ext>
             </a:extLst>
           </p:cNvPr>
@@ -21447,7 +21447,7 @@
     </p:spTree>
     <p:extLst>
       <p:ext uri="{BB962C8B-B14F-4D97-AF65-F5344CB8AC3E}">
-        <p14:creationId xmlns:p14="http://schemas.microsoft.com/office/powerpoint/2010/main" val="174039203"/>
+        <p14:creationId xmlns:p14="http://schemas.microsoft.com/office/powerpoint/2010/main" val="504867335"/>
       </p:ext>
     </p:extLst>
   </p:cSld>
@@ -21478,7 +21478,7 @@
           <p:cNvPr id="8" name="">
             <a:extLst xmlns:a="http://schemas.openxmlformats.org/drawingml/2006/main">
               <a:ext uri="{FF2B5EF4-FFF2-40B4-BE49-F238E27FC236}">
-                <a16:creationId xmlns:a16="http://schemas.microsoft.com/office/drawing/2014/main" id="{C3C8A354-F815-4869-B86C-5DC105D8BA17}"/>
+                <a16:creationId xmlns:a16="http://schemas.microsoft.com/office/drawing/2014/main" id="{90D43BA5-2F48-428C-818F-E7C66CBB34B6}"/>
               </a:ext>
             </a:extLst>
           </p:cNvPr>
@@ -21634,7 +21634,7 @@
           <p:cNvPr id="2" name="">
             <a:extLst xmlns:a="http://schemas.openxmlformats.org/drawingml/2006/main">
               <a:ext uri="{FF2B5EF4-FFF2-40B4-BE49-F238E27FC236}">
-                <a16:creationId xmlns:a16="http://schemas.microsoft.com/office/drawing/2014/main" id="{AE40DCC8-6618-479B-A32C-069F5C2F0321}"/>
+                <a16:creationId xmlns:a16="http://schemas.microsoft.com/office/drawing/2014/main" id="{439635B2-17AA-4842-9AD4-0388D8CA09BF}"/>
               </a:ext>
             </a:extLst>
           </p:cNvPr>
@@ -21790,7 +21790,7 @@
           <p:cNvPr id="3" name="">
             <a:extLst xmlns:a="http://schemas.openxmlformats.org/drawingml/2006/main">
               <a:ext uri="{FF2B5EF4-FFF2-40B4-BE49-F238E27FC236}">
-                <a16:creationId xmlns:a16="http://schemas.microsoft.com/office/drawing/2014/main" id="{DF864D9B-DAF4-4B78-9780-7D618FA6F0C3}"/>
+                <a16:creationId xmlns:a16="http://schemas.microsoft.com/office/drawing/2014/main" id="{43145585-75FE-4F34-BB11-197C3E8D5C60}"/>
               </a:ext>
             </a:extLst>
           </p:cNvPr>
@@ -21946,7 +21946,7 @@
           <p:cNvPr id="4" name="">
             <a:extLst xmlns:a="http://schemas.openxmlformats.org/drawingml/2006/main">
               <a:ext uri="{FF2B5EF4-FFF2-40B4-BE49-F238E27FC236}">
-                <a16:creationId xmlns:a16="http://schemas.microsoft.com/office/drawing/2014/main" id="{A66F11E9-0EC1-4866-8E30-DC906A0662BC}"/>
+                <a16:creationId xmlns:a16="http://schemas.microsoft.com/office/drawing/2014/main" id="{C01B894C-2768-427D-83F1-3B08CB74ADF9}"/>
               </a:ext>
             </a:extLst>
           </p:cNvPr>
@@ -22102,7 +22102,7 @@
           <p:cNvPr id="5" name="">
             <a:extLst xmlns:a="http://schemas.openxmlformats.org/drawingml/2006/main">
               <a:ext uri="{FF2B5EF4-FFF2-40B4-BE49-F238E27FC236}">
-                <a16:creationId xmlns:a16="http://schemas.microsoft.com/office/drawing/2014/main" id="{BFB0A947-D045-47D2-BD15-6F409FD4C386}"/>
+                <a16:creationId xmlns:a16="http://schemas.microsoft.com/office/drawing/2014/main" id="{4156F0C3-BB92-4792-A1F1-63949C9FE25F}"/>
               </a:ext>
             </a:extLst>
           </p:cNvPr>
@@ -22258,7 +22258,7 @@
           <p:cNvPr id="6" name="">
             <a:extLst xmlns:a="http://schemas.openxmlformats.org/drawingml/2006/main">
               <a:ext uri="{FF2B5EF4-FFF2-40B4-BE49-F238E27FC236}">
-                <a16:creationId xmlns:a16="http://schemas.microsoft.com/office/drawing/2014/main" id="{8FB85703-A56A-41DF-9B87-4094372929FD}"/>
+                <a16:creationId xmlns:a16="http://schemas.microsoft.com/office/drawing/2014/main" id="{3E2A3AC3-C354-4265-8130-AAEFDC171B84}"/>
               </a:ext>
             </a:extLst>
           </p:cNvPr>
@@ -22414,7 +22414,7 @@
           <p:cNvPr id="7" name="">
             <a:extLst xmlns:a="http://schemas.openxmlformats.org/drawingml/2006/main">
               <a:ext uri="{FF2B5EF4-FFF2-40B4-BE49-F238E27FC236}">
-                <a16:creationId xmlns:a16="http://schemas.microsoft.com/office/drawing/2014/main" id="{C4320181-631A-4BB8-912E-67B846949928}"/>
+                <a16:creationId xmlns:a16="http://schemas.microsoft.com/office/drawing/2014/main" id="{C884E51D-D810-4770-8736-BC8655240DB2}"/>
               </a:ext>
             </a:extLst>
           </p:cNvPr>
@@ -22568,7 +22568,7 @@
     </p:spTree>
     <p:extLst>
       <p:ext uri="{BB962C8B-B14F-4D97-AF65-F5344CB8AC3E}">
-        <p14:creationId xmlns:p14="http://schemas.microsoft.com/office/powerpoint/2010/main" val="1518145393"/>
+        <p14:creationId xmlns:p14="http://schemas.microsoft.com/office/powerpoint/2010/main" val="1907307906"/>
       </p:ext>
     </p:extLst>
   </p:cSld>
@@ -22599,7 +22599,7 @@
           <p:cNvPr id="8" name="">
             <a:extLst xmlns:a="http://schemas.openxmlformats.org/drawingml/2006/main">
               <a:ext uri="{FF2B5EF4-FFF2-40B4-BE49-F238E27FC236}">
-                <a16:creationId xmlns:a16="http://schemas.microsoft.com/office/drawing/2014/main" id="{3559F5BA-24DD-40F7-BB73-5DA0B6BAB880}"/>
+                <a16:creationId xmlns:a16="http://schemas.microsoft.com/office/drawing/2014/main" id="{31CA82B7-2310-4592-95F0-94646B6C762B}"/>
               </a:ext>
             </a:extLst>
           </p:cNvPr>
@@ -22755,7 +22755,7 @@
           <p:cNvPr id="2" name="">
             <a:extLst xmlns:a="http://schemas.openxmlformats.org/drawingml/2006/main">
               <a:ext uri="{FF2B5EF4-FFF2-40B4-BE49-F238E27FC236}">
-                <a16:creationId xmlns:a16="http://schemas.microsoft.com/office/drawing/2014/main" id="{F9171D64-034A-4F77-94D5-32F0DE807AA0}"/>
+                <a16:creationId xmlns:a16="http://schemas.microsoft.com/office/drawing/2014/main" id="{89BAF06D-F16B-43E9-B734-93889B26D1D2}"/>
               </a:ext>
             </a:extLst>
           </p:cNvPr>
@@ -22911,7 +22911,7 @@
           <p:cNvPr id="3" name="">
             <a:extLst xmlns:a="http://schemas.openxmlformats.org/drawingml/2006/main">
               <a:ext uri="{FF2B5EF4-FFF2-40B4-BE49-F238E27FC236}">
-                <a16:creationId xmlns:a16="http://schemas.microsoft.com/office/drawing/2014/main" id="{B200C785-0DE3-4435-B037-6F024F6585A3}"/>
+                <a16:creationId xmlns:a16="http://schemas.microsoft.com/office/drawing/2014/main" id="{A8774AF3-36A1-483F-B949-00E9358E2233}"/>
               </a:ext>
             </a:extLst>
           </p:cNvPr>
@@ -23067,7 +23067,7 @@
           <p:cNvPr id="4" name="">
             <a:extLst xmlns:a="http://schemas.openxmlformats.org/drawingml/2006/main">
               <a:ext uri="{FF2B5EF4-FFF2-40B4-BE49-F238E27FC236}">
-                <a16:creationId xmlns:a16="http://schemas.microsoft.com/office/drawing/2014/main" id="{0470A743-7E88-4F27-8353-180BEEFB40B0}"/>
+                <a16:creationId xmlns:a16="http://schemas.microsoft.com/office/drawing/2014/main" id="{F9E5AA31-C254-4724-9FB1-63ACD00AD640}"/>
               </a:ext>
             </a:extLst>
           </p:cNvPr>
@@ -23223,7 +23223,7 @@
           <p:cNvPr id="5" name="">
             <a:extLst xmlns:a="http://schemas.openxmlformats.org/drawingml/2006/main">
               <a:ext uri="{FF2B5EF4-FFF2-40B4-BE49-F238E27FC236}">
-                <a16:creationId xmlns:a16="http://schemas.microsoft.com/office/drawing/2014/main" id="{14CB05D6-D4EF-4F8E-B4BF-CC7D64B4E16B}"/>
+                <a16:creationId xmlns:a16="http://schemas.microsoft.com/office/drawing/2014/main" id="{C0179B1F-9234-4ECF-B6D6-55FD190CEA3F}"/>
               </a:ext>
             </a:extLst>
           </p:cNvPr>
@@ -23379,7 +23379,7 @@
           <p:cNvPr id="6" name="">
             <a:extLst xmlns:a="http://schemas.openxmlformats.org/drawingml/2006/main">
               <a:ext uri="{FF2B5EF4-FFF2-40B4-BE49-F238E27FC236}">
-                <a16:creationId xmlns:a16="http://schemas.microsoft.com/office/drawing/2014/main" id="{A88599A9-4DCC-44EC-96AD-0AC1B049801F}"/>
+                <a16:creationId xmlns:a16="http://schemas.microsoft.com/office/drawing/2014/main" id="{4583AA6E-51D6-4EC2-BFAE-2963D3548A40}"/>
               </a:ext>
             </a:extLst>
           </p:cNvPr>
@@ -23525,7 +23525,7 @@
                 <a:ea typeface="Arial"/>
                 <a:cs typeface="Arial"/>
               </a:rPr>
-              <a:t>Robustness, state-estimator and conformal coverage evidence remain separate work</a:t>
+              <a:t>Robustness, timing-posterior and conformal evidence are reported; the heuristic day band fails its frozen coverage check</a:t>
             </a:r>
           </a:p>
         </p:txBody>
@@ -23535,7 +23535,7 @@
           <p:cNvPr id="7" name="">
             <a:extLst xmlns:a="http://schemas.openxmlformats.org/drawingml/2006/main">
               <a:ext uri="{FF2B5EF4-FFF2-40B4-BE49-F238E27FC236}">
-                <a16:creationId xmlns:a16="http://schemas.microsoft.com/office/drawing/2014/main" id="{40C538AB-7D31-40F2-8C93-AD57BEA1F43A}"/>
+                <a16:creationId xmlns:a16="http://schemas.microsoft.com/office/drawing/2014/main" id="{330948C4-F876-4F13-950B-B70424DD30B7}"/>
               </a:ext>
             </a:extLst>
           </p:cNvPr>
@@ -23689,7 +23689,7 @@
     </p:spTree>
     <p:extLst>
       <p:ext uri="{BB962C8B-B14F-4D97-AF65-F5344CB8AC3E}">
-        <p14:creationId xmlns:p14="http://schemas.microsoft.com/office/powerpoint/2010/main" val="1028821978"/>
+        <p14:creationId xmlns:p14="http://schemas.microsoft.com/office/powerpoint/2010/main" val="1804037127"/>
       </p:ext>
     </p:extLst>
   </p:cSld>
@@ -23720,7 +23720,7 @@
           <p:cNvPr id="8" name="">
             <a:extLst xmlns:a="http://schemas.openxmlformats.org/drawingml/2006/main">
               <a:ext uri="{FF2B5EF4-FFF2-40B4-BE49-F238E27FC236}">
-                <a16:creationId xmlns:a16="http://schemas.microsoft.com/office/drawing/2014/main" id="{B753494B-FDFD-42DD-9706-210F9D459774}"/>
+                <a16:creationId xmlns:a16="http://schemas.microsoft.com/office/drawing/2014/main" id="{F7A698AD-5425-4AB2-8B23-EBF26A30EED6}"/>
               </a:ext>
             </a:extLst>
           </p:cNvPr>
@@ -23876,7 +23876,7 @@
           <p:cNvPr id="2" name="">
             <a:extLst xmlns:a="http://schemas.openxmlformats.org/drawingml/2006/main">
               <a:ext uri="{FF2B5EF4-FFF2-40B4-BE49-F238E27FC236}">
-                <a16:creationId xmlns:a16="http://schemas.microsoft.com/office/drawing/2014/main" id="{BA388C74-3CC1-4AA1-A696-1B9BC7EAB9B8}"/>
+                <a16:creationId xmlns:a16="http://schemas.microsoft.com/office/drawing/2014/main" id="{1191A237-2F03-4C00-9781-56008F42590D}"/>
               </a:ext>
             </a:extLst>
           </p:cNvPr>
@@ -24032,7 +24032,7 @@
           <p:cNvPr id="3" name="">
             <a:extLst xmlns:a="http://schemas.openxmlformats.org/drawingml/2006/main">
               <a:ext uri="{FF2B5EF4-FFF2-40B4-BE49-F238E27FC236}">
-                <a16:creationId xmlns:a16="http://schemas.microsoft.com/office/drawing/2014/main" id="{40686DBD-EF98-487C-989A-94B58D52F449}"/>
+                <a16:creationId xmlns:a16="http://schemas.microsoft.com/office/drawing/2014/main" id="{204ADBB3-7A69-4731-97DF-57BF215EBE02}"/>
               </a:ext>
             </a:extLst>
           </p:cNvPr>
@@ -24188,7 +24188,7 @@
           <p:cNvPr id="4" name="">
             <a:extLst xmlns:a="http://schemas.openxmlformats.org/drawingml/2006/main">
               <a:ext uri="{FF2B5EF4-FFF2-40B4-BE49-F238E27FC236}">
-                <a16:creationId xmlns:a16="http://schemas.microsoft.com/office/drawing/2014/main" id="{0A958D12-BF43-4E27-87B9-F7BC36622F6F}"/>
+                <a16:creationId xmlns:a16="http://schemas.microsoft.com/office/drawing/2014/main" id="{64E1F768-E5E3-4C42-890B-6CC4B641CD0B}"/>
               </a:ext>
             </a:extLst>
           </p:cNvPr>
@@ -24344,7 +24344,7 @@
           <p:cNvPr id="5" name="">
             <a:extLst xmlns:a="http://schemas.openxmlformats.org/drawingml/2006/main">
               <a:ext uri="{FF2B5EF4-FFF2-40B4-BE49-F238E27FC236}">
-                <a16:creationId xmlns:a16="http://schemas.microsoft.com/office/drawing/2014/main" id="{6B00FC69-4AF1-460F-AE3A-1FA0901244F5}"/>
+                <a16:creationId xmlns:a16="http://schemas.microsoft.com/office/drawing/2014/main" id="{31786115-2CF5-4383-A3DA-29924C4A4C4D}"/>
               </a:ext>
             </a:extLst>
           </p:cNvPr>
@@ -24500,7 +24500,7 @@
           <p:cNvPr id="6" name="">
             <a:extLst xmlns:a="http://schemas.openxmlformats.org/drawingml/2006/main">
               <a:ext uri="{FF2B5EF4-FFF2-40B4-BE49-F238E27FC236}">
-                <a16:creationId xmlns:a16="http://schemas.microsoft.com/office/drawing/2014/main" id="{5D35BB31-30BF-45CE-9ABC-1653AA18AB07}"/>
+                <a16:creationId xmlns:a16="http://schemas.microsoft.com/office/drawing/2014/main" id="{630C1D4F-4159-4D49-87AD-DEA86A0EFDB7}"/>
               </a:ext>
             </a:extLst>
           </p:cNvPr>
@@ -24656,7 +24656,7 @@
           <p:cNvPr id="7" name="">
             <a:extLst xmlns:a="http://schemas.openxmlformats.org/drawingml/2006/main">
               <a:ext uri="{FF2B5EF4-FFF2-40B4-BE49-F238E27FC236}">
-                <a16:creationId xmlns:a16="http://schemas.microsoft.com/office/drawing/2014/main" id="{4877A320-97E9-457F-8287-A17381FA43E1}"/>
+                <a16:creationId xmlns:a16="http://schemas.microsoft.com/office/drawing/2014/main" id="{6BA568B5-5BE0-41F2-A99F-98E8F6859BA1}"/>
               </a:ext>
             </a:extLst>
           </p:cNvPr>
@@ -24810,7 +24810,7 @@
     </p:spTree>
     <p:extLst>
       <p:ext uri="{BB962C8B-B14F-4D97-AF65-F5344CB8AC3E}">
-        <p14:creationId xmlns:p14="http://schemas.microsoft.com/office/powerpoint/2010/main" val="1247170394"/>
+        <p14:creationId xmlns:p14="http://schemas.microsoft.com/office/powerpoint/2010/main" val="143155237"/>
       </p:ext>
     </p:extLst>
   </p:cSld>
@@ -24841,7 +24841,7 @@
           <p:cNvPr id="8" name="">
             <a:extLst xmlns:a="http://schemas.openxmlformats.org/drawingml/2006/main">
               <a:ext uri="{FF2B5EF4-FFF2-40B4-BE49-F238E27FC236}">
-                <a16:creationId xmlns:a16="http://schemas.microsoft.com/office/drawing/2014/main" id="{03233C90-32E1-4315-A4CD-F9A45BFE6B0A}"/>
+                <a16:creationId xmlns:a16="http://schemas.microsoft.com/office/drawing/2014/main" id="{21F4AB8A-6B0E-42C6-9080-8147B2E106F2}"/>
               </a:ext>
             </a:extLst>
           </p:cNvPr>
@@ -24997,7 +24997,7 @@
           <p:cNvPr id="2" name="">
             <a:extLst xmlns:a="http://schemas.openxmlformats.org/drawingml/2006/main">
               <a:ext uri="{FF2B5EF4-FFF2-40B4-BE49-F238E27FC236}">
-                <a16:creationId xmlns:a16="http://schemas.microsoft.com/office/drawing/2014/main" id="{62F92E4F-9D49-4973-9083-84FCFE60F5CE}"/>
+                <a16:creationId xmlns:a16="http://schemas.microsoft.com/office/drawing/2014/main" id="{48C4D24A-6376-440B-A567-D63B7C142CFB}"/>
               </a:ext>
             </a:extLst>
           </p:cNvPr>
@@ -25153,7 +25153,7 @@
           <p:cNvPr id="3" name="">
             <a:extLst xmlns:a="http://schemas.openxmlformats.org/drawingml/2006/main">
               <a:ext uri="{FF2B5EF4-FFF2-40B4-BE49-F238E27FC236}">
-                <a16:creationId xmlns:a16="http://schemas.microsoft.com/office/drawing/2014/main" id="{7C9F42DB-F345-4915-BE5A-0F160EBB37D3}"/>
+                <a16:creationId xmlns:a16="http://schemas.microsoft.com/office/drawing/2014/main" id="{B8E5373C-16F0-47E3-956D-E60ED9947C24}"/>
               </a:ext>
             </a:extLst>
           </p:cNvPr>
@@ -25309,7 +25309,7 @@
           <p:cNvPr id="4" name="">
             <a:extLst xmlns:a="http://schemas.openxmlformats.org/drawingml/2006/main">
               <a:ext uri="{FF2B5EF4-FFF2-40B4-BE49-F238E27FC236}">
-                <a16:creationId xmlns:a16="http://schemas.microsoft.com/office/drawing/2014/main" id="{EDB68E6D-CE6E-4E12-8BE4-BE51ADA66129}"/>
+                <a16:creationId xmlns:a16="http://schemas.microsoft.com/office/drawing/2014/main" id="{87DA73D8-7598-4395-8CE1-2F6CC8B9352C}"/>
               </a:ext>
             </a:extLst>
           </p:cNvPr>
@@ -25465,7 +25465,7 @@
           <p:cNvPr id="5" name="">
             <a:extLst xmlns:a="http://schemas.openxmlformats.org/drawingml/2006/main">
               <a:ext uri="{FF2B5EF4-FFF2-40B4-BE49-F238E27FC236}">
-                <a16:creationId xmlns:a16="http://schemas.microsoft.com/office/drawing/2014/main" id="{5100C02D-97AB-4976-B095-09E13373DFF3}"/>
+                <a16:creationId xmlns:a16="http://schemas.microsoft.com/office/drawing/2014/main" id="{86120630-54E0-4D17-AFB5-4447A597E184}"/>
               </a:ext>
             </a:extLst>
           </p:cNvPr>
@@ -25621,7 +25621,7 @@
           <p:cNvPr id="6" name="">
             <a:extLst xmlns:a="http://schemas.openxmlformats.org/drawingml/2006/main">
               <a:ext uri="{FF2B5EF4-FFF2-40B4-BE49-F238E27FC236}">
-                <a16:creationId xmlns:a16="http://schemas.microsoft.com/office/drawing/2014/main" id="{A6C41F10-6C7E-4FB6-B593-61BE58074BB8}"/>
+                <a16:creationId xmlns:a16="http://schemas.microsoft.com/office/drawing/2014/main" id="{5E79ACD1-38A5-4E3C-B991-78025322AA38}"/>
               </a:ext>
             </a:extLst>
           </p:cNvPr>
@@ -25777,7 +25777,7 @@
           <p:cNvPr id="7" name="">
             <a:extLst xmlns:a="http://schemas.openxmlformats.org/drawingml/2006/main">
               <a:ext uri="{FF2B5EF4-FFF2-40B4-BE49-F238E27FC236}">
-                <a16:creationId xmlns:a16="http://schemas.microsoft.com/office/drawing/2014/main" id="{DDF2C3F3-B0AA-442A-845A-12F453EAB09A}"/>
+                <a16:creationId xmlns:a16="http://schemas.microsoft.com/office/drawing/2014/main" id="{F608655A-BFE3-4EAE-8670-2BC0DBA4ED12}"/>
               </a:ext>
             </a:extLst>
           </p:cNvPr>
@@ -25931,7 +25931,7 @@
     </p:spTree>
     <p:extLst>
       <p:ext uri="{BB962C8B-B14F-4D97-AF65-F5344CB8AC3E}">
-        <p14:creationId xmlns:p14="http://schemas.microsoft.com/office/powerpoint/2010/main" val="660487840"/>
+        <p14:creationId xmlns:p14="http://schemas.microsoft.com/office/powerpoint/2010/main" val="1398598496"/>
       </p:ext>
     </p:extLst>
   </p:cSld>
@@ -25962,7 +25962,7 @@
           <p:cNvPr id="8" name="">
             <a:extLst xmlns:a="http://schemas.openxmlformats.org/drawingml/2006/main">
               <a:ext uri="{FF2B5EF4-FFF2-40B4-BE49-F238E27FC236}">
-                <a16:creationId xmlns:a16="http://schemas.microsoft.com/office/drawing/2014/main" id="{04F10932-5D61-43A2-BF41-A198D72F2B06}"/>
+                <a16:creationId xmlns:a16="http://schemas.microsoft.com/office/drawing/2014/main" id="{FFA80023-9455-4EAA-9A64-742D3036E9E1}"/>
               </a:ext>
             </a:extLst>
           </p:cNvPr>
@@ -26118,7 +26118,7 @@
           <p:cNvPr id="2" name="">
             <a:extLst xmlns:a="http://schemas.openxmlformats.org/drawingml/2006/main">
               <a:ext uri="{FF2B5EF4-FFF2-40B4-BE49-F238E27FC236}">
-                <a16:creationId xmlns:a16="http://schemas.microsoft.com/office/drawing/2014/main" id="{4BA0615A-FD2E-48CC-91C6-D6FEA4BB174D}"/>
+                <a16:creationId xmlns:a16="http://schemas.microsoft.com/office/drawing/2014/main" id="{0632D1E5-4339-4814-A6ED-51A9ED000CA2}"/>
               </a:ext>
             </a:extLst>
           </p:cNvPr>
@@ -26274,7 +26274,7 @@
           <p:cNvPr id="3" name="">
             <a:extLst xmlns:a="http://schemas.openxmlformats.org/drawingml/2006/main">
               <a:ext uri="{FF2B5EF4-FFF2-40B4-BE49-F238E27FC236}">
-                <a16:creationId xmlns:a16="http://schemas.microsoft.com/office/drawing/2014/main" id="{177CFCA6-8F3D-47A8-ABE1-C3CDEE47D18F}"/>
+                <a16:creationId xmlns:a16="http://schemas.microsoft.com/office/drawing/2014/main" id="{302C2983-C1F8-4886-A04D-6C3479FB8E6D}"/>
               </a:ext>
             </a:extLst>
           </p:cNvPr>
@@ -26430,7 +26430,7 @@
           <p:cNvPr id="4" name="">
             <a:extLst xmlns:a="http://schemas.openxmlformats.org/drawingml/2006/main">
               <a:ext uri="{FF2B5EF4-FFF2-40B4-BE49-F238E27FC236}">
-                <a16:creationId xmlns:a16="http://schemas.microsoft.com/office/drawing/2014/main" id="{EBB1FEA4-99D3-4C65-8C0C-8D287ECF48F2}"/>
+                <a16:creationId xmlns:a16="http://schemas.microsoft.com/office/drawing/2014/main" id="{C80437FB-C5D5-4C04-ABBF-C478375BE93F}"/>
               </a:ext>
             </a:extLst>
           </p:cNvPr>
@@ -26586,7 +26586,7 @@
           <p:cNvPr id="5" name="">
             <a:extLst xmlns:a="http://schemas.openxmlformats.org/drawingml/2006/main">
               <a:ext uri="{FF2B5EF4-FFF2-40B4-BE49-F238E27FC236}">
-                <a16:creationId xmlns:a16="http://schemas.microsoft.com/office/drawing/2014/main" id="{EAB16CB3-75F7-4FD8-A50F-34A9F19A4C05}"/>
+                <a16:creationId xmlns:a16="http://schemas.microsoft.com/office/drawing/2014/main" id="{0EBFD9CF-CCD4-4BAD-B5A0-8DEC1255189F}"/>
               </a:ext>
             </a:extLst>
           </p:cNvPr>
@@ -26742,7 +26742,7 @@
           <p:cNvPr id="6" name="">
             <a:extLst xmlns:a="http://schemas.openxmlformats.org/drawingml/2006/main">
               <a:ext uri="{FF2B5EF4-FFF2-40B4-BE49-F238E27FC236}">
-                <a16:creationId xmlns:a16="http://schemas.microsoft.com/office/drawing/2014/main" id="{92E9F4DE-7087-4756-A0E0-89240A03395D}"/>
+                <a16:creationId xmlns:a16="http://schemas.microsoft.com/office/drawing/2014/main" id="{663A4650-03A6-4C7D-9BD5-30BA8681221A}"/>
               </a:ext>
             </a:extLst>
           </p:cNvPr>
@@ -26898,7 +26898,7 @@
           <p:cNvPr id="7" name="">
             <a:extLst xmlns:a="http://schemas.openxmlformats.org/drawingml/2006/main">
               <a:ext uri="{FF2B5EF4-FFF2-40B4-BE49-F238E27FC236}">
-                <a16:creationId xmlns:a16="http://schemas.microsoft.com/office/drawing/2014/main" id="{17C1427A-56B6-43EA-A525-A80DE298EFBE}"/>
+                <a16:creationId xmlns:a16="http://schemas.microsoft.com/office/drawing/2014/main" id="{BB9C9801-E229-484F-A80A-11825A77AB0D}"/>
               </a:ext>
             </a:extLst>
           </p:cNvPr>
@@ -27052,7 +27052,7 @@
     </p:spTree>
     <p:extLst>
       <p:ext uri="{BB962C8B-B14F-4D97-AF65-F5344CB8AC3E}">
-        <p14:creationId xmlns:p14="http://schemas.microsoft.com/office/powerpoint/2010/main" val="1360169619"/>
+        <p14:creationId xmlns:p14="http://schemas.microsoft.com/office/powerpoint/2010/main" val="1796960292"/>
       </p:ext>
     </p:extLst>
   </p:cSld>
@@ -27083,7 +27083,7 @@
           <p:cNvPr id="7" name="">
             <a:extLst xmlns:a="http://schemas.openxmlformats.org/drawingml/2006/main">
               <a:ext uri="{FF2B5EF4-FFF2-40B4-BE49-F238E27FC236}">
-                <a16:creationId xmlns:a16="http://schemas.microsoft.com/office/drawing/2014/main" id="{355A7553-33D3-424E-8562-69889ACA9860}"/>
+                <a16:creationId xmlns:a16="http://schemas.microsoft.com/office/drawing/2014/main" id="{E2A5147B-4B58-4D0B-87AF-FC381DB49CC7}"/>
               </a:ext>
             </a:extLst>
           </p:cNvPr>
@@ -27239,7 +27239,7 @@
           <p:cNvPr id="2" name="">
             <a:extLst xmlns:a="http://schemas.openxmlformats.org/drawingml/2006/main">
               <a:ext uri="{FF2B5EF4-FFF2-40B4-BE49-F238E27FC236}">
-                <a16:creationId xmlns:a16="http://schemas.microsoft.com/office/drawing/2014/main" id="{25B535F2-9D65-4C81-A21D-5941115A20E5}"/>
+                <a16:creationId xmlns:a16="http://schemas.microsoft.com/office/drawing/2014/main" id="{0E4B5C08-C37F-43BD-9246-B91C5A5AA4A9}"/>
               </a:ext>
             </a:extLst>
           </p:cNvPr>
@@ -27395,7 +27395,7 @@
           <p:cNvPr id="3" name="">
             <a:extLst xmlns:a="http://schemas.openxmlformats.org/drawingml/2006/main">
               <a:ext uri="{FF2B5EF4-FFF2-40B4-BE49-F238E27FC236}">
-                <a16:creationId xmlns:a16="http://schemas.microsoft.com/office/drawing/2014/main" id="{7BEAA500-F8BD-405B-94AC-3EFC4F2B2A73}"/>
+                <a16:creationId xmlns:a16="http://schemas.microsoft.com/office/drawing/2014/main" id="{55D864A9-62B6-4A13-A5A3-14A2CFEF276F}"/>
               </a:ext>
             </a:extLst>
           </p:cNvPr>
@@ -27551,7 +27551,7 @@
           <p:cNvPr id="4" name="">
             <a:extLst xmlns:a="http://schemas.openxmlformats.org/drawingml/2006/main">
               <a:ext uri="{FF2B5EF4-FFF2-40B4-BE49-F238E27FC236}">
-                <a16:creationId xmlns:a16="http://schemas.microsoft.com/office/drawing/2014/main" id="{43B586A4-2984-4C93-8461-0F11FFFF2AB0}"/>
+                <a16:creationId xmlns:a16="http://schemas.microsoft.com/office/drawing/2014/main" id="{44AE1921-E24D-4B51-97F8-058A40274D59}"/>
               </a:ext>
             </a:extLst>
           </p:cNvPr>
@@ -27707,7 +27707,7 @@
           <p:cNvPr id="5" name="">
             <a:extLst xmlns:a="http://schemas.openxmlformats.org/drawingml/2006/main">
               <a:ext uri="{FF2B5EF4-FFF2-40B4-BE49-F238E27FC236}">
-                <a16:creationId xmlns:a16="http://schemas.microsoft.com/office/drawing/2014/main" id="{EDB853BC-69F3-428D-B207-EC653BA8FD4C}"/>
+                <a16:creationId xmlns:a16="http://schemas.microsoft.com/office/drawing/2014/main" id="{A93B64E6-3ECB-4FA3-86AD-B5349D4A0CDD}"/>
               </a:ext>
             </a:extLst>
           </p:cNvPr>
@@ -27863,7 +27863,7 @@
           <p:cNvPr id="6" name="">
             <a:extLst xmlns:a="http://schemas.openxmlformats.org/drawingml/2006/main">
               <a:ext uri="{FF2B5EF4-FFF2-40B4-BE49-F238E27FC236}">
-                <a16:creationId xmlns:a16="http://schemas.microsoft.com/office/drawing/2014/main" id="{5D920E5F-E0EA-48B0-B2C6-D5D0E1176D07}"/>
+                <a16:creationId xmlns:a16="http://schemas.microsoft.com/office/drawing/2014/main" id="{ADC5D96F-A676-41F0-A776-E79604BD94FF}"/>
               </a:ext>
             </a:extLst>
           </p:cNvPr>
@@ -28017,7 +28017,7 @@
     </p:spTree>
     <p:extLst>
       <p:ext uri="{BB962C8B-B14F-4D97-AF65-F5344CB8AC3E}">
-        <p14:creationId xmlns:p14="http://schemas.microsoft.com/office/powerpoint/2010/main" val="1280123030"/>
+        <p14:creationId xmlns:p14="http://schemas.microsoft.com/office/powerpoint/2010/main" val="225277833"/>
       </p:ext>
     </p:extLst>
   </p:cSld>
@@ -28048,7 +28048,7 @@
           <p:cNvPr id="14" name="">
             <a:extLst xmlns:a="http://schemas.openxmlformats.org/drawingml/2006/main">
               <a:ext uri="{FF2B5EF4-FFF2-40B4-BE49-F238E27FC236}">
-                <a16:creationId xmlns:a16="http://schemas.microsoft.com/office/drawing/2014/main" id="{2EE008CB-7E35-4F9C-83B1-D0F28456E5E0}"/>
+                <a16:creationId xmlns:a16="http://schemas.microsoft.com/office/drawing/2014/main" id="{770D5E9A-6B6B-4868-911B-F00B100C11EE}"/>
               </a:ext>
             </a:extLst>
           </p:cNvPr>
@@ -28079,7 +28079,7 @@
           <p:cNvPr id="13" name="">
             <a:extLst xmlns:a="http://schemas.openxmlformats.org/drawingml/2006/main">
               <a:ext uri="{FF2B5EF4-FFF2-40B4-BE49-F238E27FC236}">
-                <a16:creationId xmlns:a16="http://schemas.microsoft.com/office/drawing/2014/main" id="{32C54B74-1F55-40F9-AD9C-E21B4057A9D0}"/>
+                <a16:creationId xmlns:a16="http://schemas.microsoft.com/office/drawing/2014/main" id="{6268264F-074B-48FF-ACC9-27E4E6BEB977}"/>
               </a:ext>
             </a:extLst>
           </p:cNvPr>
@@ -28110,7 +28110,7 @@
           <p:cNvPr id="12" name="">
             <a:extLst xmlns:a="http://schemas.openxmlformats.org/drawingml/2006/main">
               <a:ext uri="{FF2B5EF4-FFF2-40B4-BE49-F238E27FC236}">
-                <a16:creationId xmlns:a16="http://schemas.microsoft.com/office/drawing/2014/main" id="{1E355422-F9C7-422A-86C7-5F5178FC6359}"/>
+                <a16:creationId xmlns:a16="http://schemas.microsoft.com/office/drawing/2014/main" id="{988AAEF1-F209-48BD-AC78-B03B0DCC52E4}"/>
               </a:ext>
             </a:extLst>
           </p:cNvPr>
@@ -28141,7 +28141,7 @@
           <p:cNvPr id="11" name="">
             <a:extLst xmlns:a="http://schemas.openxmlformats.org/drawingml/2006/main">
               <a:ext uri="{FF2B5EF4-FFF2-40B4-BE49-F238E27FC236}">
-                <a16:creationId xmlns:a16="http://schemas.microsoft.com/office/drawing/2014/main" id="{5015C378-6862-49F9-9C95-CE2F60E6EC98}"/>
+                <a16:creationId xmlns:a16="http://schemas.microsoft.com/office/drawing/2014/main" id="{26BF8A20-1F1B-41F2-A8B5-8B93B96F41F5}"/>
               </a:ext>
             </a:extLst>
           </p:cNvPr>
@@ -28174,7 +28174,7 @@
           <p:cNvPr id="10" name="">
             <a:extLst xmlns:a="http://schemas.openxmlformats.org/drawingml/2006/main">
               <a:ext uri="{FF2B5EF4-FFF2-40B4-BE49-F238E27FC236}">
-                <a16:creationId xmlns:a16="http://schemas.microsoft.com/office/drawing/2014/main" id="{E84730C4-6814-4A03-9B64-DF7896FE9C88}"/>
+                <a16:creationId xmlns:a16="http://schemas.microsoft.com/office/drawing/2014/main" id="{474FBE73-F4A2-4D79-83C6-743B8913F0C0}"/>
               </a:ext>
             </a:extLst>
           </p:cNvPr>
@@ -28207,7 +28207,7 @@
           <p:cNvPr id="16" name="">
             <a:extLst xmlns:a="http://schemas.openxmlformats.org/drawingml/2006/main">
               <a:ext uri="{FF2B5EF4-FFF2-40B4-BE49-F238E27FC236}">
-                <a16:creationId xmlns:a16="http://schemas.microsoft.com/office/drawing/2014/main" id="{73CD01E6-9F77-41FA-A281-12A06D28C65F}"/>
+                <a16:creationId xmlns:a16="http://schemas.microsoft.com/office/drawing/2014/main" id="{2C112FFE-6234-4DD1-AFDF-95F4990EE247}"/>
               </a:ext>
             </a:extLst>
           </p:cNvPr>
@@ -28363,7 +28363,7 @@
           <p:cNvPr id="2" name="">
             <a:extLst xmlns:a="http://schemas.openxmlformats.org/drawingml/2006/main">
               <a:ext uri="{FF2B5EF4-FFF2-40B4-BE49-F238E27FC236}">
-                <a16:creationId xmlns:a16="http://schemas.microsoft.com/office/drawing/2014/main" id="{299B51F8-9051-4868-87F1-181ED8EE314D}"/>
+                <a16:creationId xmlns:a16="http://schemas.microsoft.com/office/drawing/2014/main" id="{E83FAD78-A34B-4DC3-B83B-8F481B05AED5}"/>
               </a:ext>
             </a:extLst>
           </p:cNvPr>
@@ -28519,7 +28519,7 @@
           <p:cNvPr id="3" name="">
             <a:extLst xmlns:a="http://schemas.openxmlformats.org/drawingml/2006/main">
               <a:ext uri="{FF2B5EF4-FFF2-40B4-BE49-F238E27FC236}">
-                <a16:creationId xmlns:a16="http://schemas.microsoft.com/office/drawing/2014/main" id="{2FC2148C-07F2-46A0-BA10-82E54C3C7E1D}"/>
+                <a16:creationId xmlns:a16="http://schemas.microsoft.com/office/drawing/2014/main" id="{002C0752-24EC-4C08-AD1E-B9B2E3A55881}"/>
               </a:ext>
             </a:extLst>
           </p:cNvPr>
@@ -28702,7 +28702,7 @@
           <p:cNvPr id="4" name="">
             <a:extLst xmlns:a="http://schemas.openxmlformats.org/drawingml/2006/main">
               <a:ext uri="{FF2B5EF4-FFF2-40B4-BE49-F238E27FC236}">
-                <a16:creationId xmlns:a16="http://schemas.microsoft.com/office/drawing/2014/main" id="{4E592417-EEA8-429C-B712-991C35416190}"/>
+                <a16:creationId xmlns:a16="http://schemas.microsoft.com/office/drawing/2014/main" id="{427D5CFB-DCF9-44E9-9D80-5AA559DD5C6B}"/>
               </a:ext>
             </a:extLst>
           </p:cNvPr>
@@ -28885,7 +28885,7 @@
           <p:cNvPr id="5" name="">
             <a:extLst xmlns:a="http://schemas.openxmlformats.org/drawingml/2006/main">
               <a:ext uri="{FF2B5EF4-FFF2-40B4-BE49-F238E27FC236}">
-                <a16:creationId xmlns:a16="http://schemas.microsoft.com/office/drawing/2014/main" id="{42936D9B-669E-4126-94E2-D37661733BDA}"/>
+                <a16:creationId xmlns:a16="http://schemas.microsoft.com/office/drawing/2014/main" id="{EC24A4DA-B563-446D-913D-AA403CB31F3D}"/>
               </a:ext>
             </a:extLst>
           </p:cNvPr>
@@ -29068,7 +29068,7 @@
           <p:cNvPr id="6" name="">
             <a:extLst xmlns:a="http://schemas.openxmlformats.org/drawingml/2006/main">
               <a:ext uri="{FF2B5EF4-FFF2-40B4-BE49-F238E27FC236}">
-                <a16:creationId xmlns:a16="http://schemas.microsoft.com/office/drawing/2014/main" id="{E4162F46-4CDE-4DDC-8580-06A1A57BB701}"/>
+                <a16:creationId xmlns:a16="http://schemas.microsoft.com/office/drawing/2014/main" id="{180F435E-C602-43CF-8024-9978F343178B}"/>
               </a:ext>
             </a:extLst>
           </p:cNvPr>
@@ -29251,7 +29251,7 @@
           <p:cNvPr id="7" name="">
             <a:extLst xmlns:a="http://schemas.openxmlformats.org/drawingml/2006/main">
               <a:ext uri="{FF2B5EF4-FFF2-40B4-BE49-F238E27FC236}">
-                <a16:creationId xmlns:a16="http://schemas.microsoft.com/office/drawing/2014/main" id="{E24E5CB7-A9F8-4C1C-AB70-41B849900312}"/>
+                <a16:creationId xmlns:a16="http://schemas.microsoft.com/office/drawing/2014/main" id="{2F7A2895-5832-4C4F-85FF-85084988B813}"/>
               </a:ext>
             </a:extLst>
           </p:cNvPr>
@@ -29434,7 +29434,7 @@
           <p:cNvPr id="8" name="">
             <a:extLst xmlns:a="http://schemas.openxmlformats.org/drawingml/2006/main">
               <a:ext uri="{FF2B5EF4-FFF2-40B4-BE49-F238E27FC236}">
-                <a16:creationId xmlns:a16="http://schemas.microsoft.com/office/drawing/2014/main" id="{C3251918-D099-40D3-B3EF-2A0AC7DB0773}"/>
+                <a16:creationId xmlns:a16="http://schemas.microsoft.com/office/drawing/2014/main" id="{E106CBCA-7437-462B-B5F2-7E23CBF2C9B6}"/>
               </a:ext>
             </a:extLst>
           </p:cNvPr>
@@ -29617,7 +29617,7 @@
           <p:cNvPr id="9" name="">
             <a:extLst xmlns:a="http://schemas.openxmlformats.org/drawingml/2006/main">
               <a:ext uri="{FF2B5EF4-FFF2-40B4-BE49-F238E27FC236}">
-                <a16:creationId xmlns:a16="http://schemas.microsoft.com/office/drawing/2014/main" id="{8FB6A8FB-7F39-470C-9E5B-358275C02EAE}"/>
+                <a16:creationId xmlns:a16="http://schemas.microsoft.com/office/drawing/2014/main" id="{60AF1294-CAA7-48DA-B171-5EC31F6EC06D}"/>
               </a:ext>
             </a:extLst>
           </p:cNvPr>
@@ -29800,7 +29800,7 @@
           <p:cNvPr id="15" name="">
             <a:extLst xmlns:a="http://schemas.openxmlformats.org/drawingml/2006/main">
               <a:ext uri="{FF2B5EF4-FFF2-40B4-BE49-F238E27FC236}">
-                <a16:creationId xmlns:a16="http://schemas.microsoft.com/office/drawing/2014/main" id="{F5D0C0A5-F934-4CFF-90C3-34D3885D0B05}"/>
+                <a16:creationId xmlns:a16="http://schemas.microsoft.com/office/drawing/2014/main" id="{BF06A41B-8FF4-49A0-9536-8CFB6B510FF2}"/>
               </a:ext>
             </a:extLst>
           </p:cNvPr>
@@ -29954,7 +29954,7 @@
     </p:spTree>
     <p:extLst>
       <p:ext uri="{BB962C8B-B14F-4D97-AF65-F5344CB8AC3E}">
-        <p14:creationId xmlns:p14="http://schemas.microsoft.com/office/powerpoint/2010/main" val="140747562"/>
+        <p14:creationId xmlns:p14="http://schemas.microsoft.com/office/powerpoint/2010/main" val="312044265"/>
       </p:ext>
     </p:extLst>
   </p:cSld>
@@ -29985,7 +29985,7 @@
           <p:cNvPr id="8" name="">
             <a:extLst xmlns:a="http://schemas.openxmlformats.org/drawingml/2006/main">
               <a:ext uri="{FF2B5EF4-FFF2-40B4-BE49-F238E27FC236}">
-                <a16:creationId xmlns:a16="http://schemas.microsoft.com/office/drawing/2014/main" id="{941E2BEB-3290-4880-B36E-654940C2BE83}"/>
+                <a16:creationId xmlns:a16="http://schemas.microsoft.com/office/drawing/2014/main" id="{D07938BD-8FE9-41E9-86B5-9E6344986098}"/>
               </a:ext>
             </a:extLst>
           </p:cNvPr>
@@ -30141,7 +30141,7 @@
           <p:cNvPr id="2" name="">
             <a:extLst xmlns:a="http://schemas.openxmlformats.org/drawingml/2006/main">
               <a:ext uri="{FF2B5EF4-FFF2-40B4-BE49-F238E27FC236}">
-                <a16:creationId xmlns:a16="http://schemas.microsoft.com/office/drawing/2014/main" id="{339A5B07-1A4F-4BBF-BDEA-11E94CE3284C}"/>
+                <a16:creationId xmlns:a16="http://schemas.microsoft.com/office/drawing/2014/main" id="{3CC82100-8270-43B6-8273-32F877474DD7}"/>
               </a:ext>
             </a:extLst>
           </p:cNvPr>
@@ -30297,7 +30297,7 @@
           <p:cNvPr id="3" name="">
             <a:extLst xmlns:a="http://schemas.openxmlformats.org/drawingml/2006/main">
               <a:ext uri="{FF2B5EF4-FFF2-40B4-BE49-F238E27FC236}">
-                <a16:creationId xmlns:a16="http://schemas.microsoft.com/office/drawing/2014/main" id="{AF64079D-6F56-437F-8161-9BE5DF8C161B}"/>
+                <a16:creationId xmlns:a16="http://schemas.microsoft.com/office/drawing/2014/main" id="{DC9000A0-E4DB-46E6-9333-15AA42F542FB}"/>
               </a:ext>
             </a:extLst>
           </p:cNvPr>
@@ -30453,7 +30453,7 @@
           <p:cNvPr id="4" name="">
             <a:extLst xmlns:a="http://schemas.openxmlformats.org/drawingml/2006/main">
               <a:ext uri="{FF2B5EF4-FFF2-40B4-BE49-F238E27FC236}">
-                <a16:creationId xmlns:a16="http://schemas.microsoft.com/office/drawing/2014/main" id="{B2716B5D-71DB-4991-A4BA-821899BB06FF}"/>
+                <a16:creationId xmlns:a16="http://schemas.microsoft.com/office/drawing/2014/main" id="{C79D0BF1-CA85-4EBB-AEDC-85B18ECD1823}"/>
               </a:ext>
             </a:extLst>
           </p:cNvPr>
@@ -30609,7 +30609,7 @@
           <p:cNvPr id="5" name="">
             <a:extLst xmlns:a="http://schemas.openxmlformats.org/drawingml/2006/main">
               <a:ext uri="{FF2B5EF4-FFF2-40B4-BE49-F238E27FC236}">
-                <a16:creationId xmlns:a16="http://schemas.microsoft.com/office/drawing/2014/main" id="{E519EE2C-094A-4F5F-AD58-801694EBCE3F}"/>
+                <a16:creationId xmlns:a16="http://schemas.microsoft.com/office/drawing/2014/main" id="{B1C540D1-7E99-4C55-8079-A5B4EE02E7A4}"/>
               </a:ext>
             </a:extLst>
           </p:cNvPr>
@@ -30765,7 +30765,7 @@
           <p:cNvPr id="6" name="">
             <a:extLst xmlns:a="http://schemas.openxmlformats.org/drawingml/2006/main">
               <a:ext uri="{FF2B5EF4-FFF2-40B4-BE49-F238E27FC236}">
-                <a16:creationId xmlns:a16="http://schemas.microsoft.com/office/drawing/2014/main" id="{D20618D9-B280-46AB-90DE-EF7C5C8495E6}"/>
+                <a16:creationId xmlns:a16="http://schemas.microsoft.com/office/drawing/2014/main" id="{17912386-EAC0-4648-8628-B7B29BACD8A9}"/>
               </a:ext>
             </a:extLst>
           </p:cNvPr>
@@ -30921,7 +30921,7 @@
           <p:cNvPr id="7" name="">
             <a:extLst xmlns:a="http://schemas.openxmlformats.org/drawingml/2006/main">
               <a:ext uri="{FF2B5EF4-FFF2-40B4-BE49-F238E27FC236}">
-                <a16:creationId xmlns:a16="http://schemas.microsoft.com/office/drawing/2014/main" id="{9DD4BFCD-8407-4768-987F-920AF24FD0B9}"/>
+                <a16:creationId xmlns:a16="http://schemas.microsoft.com/office/drawing/2014/main" id="{69EDF335-9C8A-4FA3-857C-5C639CC5A10E}"/>
               </a:ext>
             </a:extLst>
           </p:cNvPr>
@@ -31075,7 +31075,7 @@
     </p:spTree>
     <p:extLst>
       <p:ext uri="{BB962C8B-B14F-4D97-AF65-F5344CB8AC3E}">
-        <p14:creationId xmlns:p14="http://schemas.microsoft.com/office/powerpoint/2010/main" val="443626172"/>
+        <p14:creationId xmlns:p14="http://schemas.microsoft.com/office/powerpoint/2010/main" val="1174626483"/>
       </p:ext>
     </p:extLst>
   </p:cSld>
@@ -31106,7 +31106,7 @@
           <p:cNvPr id="5" name="">
             <a:extLst xmlns:a="http://schemas.openxmlformats.org/drawingml/2006/main">
               <a:ext uri="{FF2B5EF4-FFF2-40B4-BE49-F238E27FC236}">
-                <a16:creationId xmlns:a16="http://schemas.microsoft.com/office/drawing/2014/main" id="{B80DB02D-A217-4E43-88C9-2F546BB862BF}"/>
+                <a16:creationId xmlns:a16="http://schemas.microsoft.com/office/drawing/2014/main" id="{87CED74E-6897-40C8-86F4-15808AC556BE}"/>
               </a:ext>
             </a:extLst>
           </p:cNvPr>
@@ -31262,7 +31262,7 @@
           <p:cNvPr id="2" name="">
             <a:extLst xmlns:a="http://schemas.openxmlformats.org/drawingml/2006/main">
               <a:ext uri="{FF2B5EF4-FFF2-40B4-BE49-F238E27FC236}">
-                <a16:creationId xmlns:a16="http://schemas.microsoft.com/office/drawing/2014/main" id="{6EE7D81F-D8B2-43E4-AB2E-20CC1E0B844D}"/>
+                <a16:creationId xmlns:a16="http://schemas.microsoft.com/office/drawing/2014/main" id="{82154E5F-7369-4DB8-9864-9271B5641B90}"/>
               </a:ext>
             </a:extLst>
           </p:cNvPr>
@@ -31418,7 +31418,7 @@
           <p:cNvPr id="3" name="">
             <a:extLst xmlns:a="http://schemas.openxmlformats.org/drawingml/2006/main">
               <a:ext uri="{FF2B5EF4-FFF2-40B4-BE49-F238E27FC236}">
-                <a16:creationId xmlns:a16="http://schemas.microsoft.com/office/drawing/2014/main" id="{0F8EACDC-6EA8-4551-A4D5-F2FCFFB09899}"/>
+                <a16:creationId xmlns:a16="http://schemas.microsoft.com/office/drawing/2014/main" id="{5275102F-FB22-45F9-9959-4C1038AA17B8}"/>
               </a:ext>
             </a:extLst>
           </p:cNvPr>
@@ -32359,7 +32359,7 @@
           <p:cNvPr id="4" name="">
             <a:extLst xmlns:a="http://schemas.openxmlformats.org/drawingml/2006/main">
               <a:ext uri="{FF2B5EF4-FFF2-40B4-BE49-F238E27FC236}">
-                <a16:creationId xmlns:a16="http://schemas.microsoft.com/office/drawing/2014/main" id="{986968BF-B58D-45ED-8C69-18D3FDC238BB}"/>
+                <a16:creationId xmlns:a16="http://schemas.microsoft.com/office/drawing/2014/main" id="{939765B4-76C7-4785-8801-6AB646DA3DE1}"/>
               </a:ext>
             </a:extLst>
           </p:cNvPr>
@@ -32513,7 +32513,7 @@
     </p:spTree>
     <p:extLst>
       <p:ext uri="{BB962C8B-B14F-4D97-AF65-F5344CB8AC3E}">
-        <p14:creationId xmlns:p14="http://schemas.microsoft.com/office/powerpoint/2010/main" val="389262346"/>
+        <p14:creationId xmlns:p14="http://schemas.microsoft.com/office/powerpoint/2010/main" val="537403880"/>
       </p:ext>
     </p:extLst>
   </p:cSld>
@@ -32544,7 +32544,7 @@
           <p:cNvPr id="5" name="">
             <a:extLst xmlns:a="http://schemas.openxmlformats.org/drawingml/2006/main">
               <a:ext uri="{FF2B5EF4-FFF2-40B4-BE49-F238E27FC236}">
-                <a16:creationId xmlns:a16="http://schemas.microsoft.com/office/drawing/2014/main" id="{613A2D11-0C2A-4B43-A6A2-DBCA40E18F27}"/>
+                <a16:creationId xmlns:a16="http://schemas.microsoft.com/office/drawing/2014/main" id="{ABC4C162-C6A7-4351-8E86-B48916A6D6FA}"/>
               </a:ext>
             </a:extLst>
           </p:cNvPr>
@@ -32700,7 +32700,7 @@
           <p:cNvPr id="2" name="">
             <a:extLst xmlns:a="http://schemas.openxmlformats.org/drawingml/2006/main">
               <a:ext uri="{FF2B5EF4-FFF2-40B4-BE49-F238E27FC236}">
-                <a16:creationId xmlns:a16="http://schemas.microsoft.com/office/drawing/2014/main" id="{8BE0654F-96F6-45E6-801D-2B6EA2D807B0}"/>
+                <a16:creationId xmlns:a16="http://schemas.microsoft.com/office/drawing/2014/main" id="{D0E0945B-BC91-4DB8-8E8D-7BB80A87B48C}"/>
               </a:ext>
             </a:extLst>
           </p:cNvPr>
@@ -32856,7 +32856,7 @@
           <p:cNvPr id="3" name="">
             <a:extLst xmlns:a="http://schemas.openxmlformats.org/drawingml/2006/main">
               <a:ext uri="{FF2B5EF4-FFF2-40B4-BE49-F238E27FC236}">
-                <a16:creationId xmlns:a16="http://schemas.microsoft.com/office/drawing/2014/main" id="{32AC3EE5-8DCC-4127-A2F3-C370D17DC7D9}"/>
+                <a16:creationId xmlns:a16="http://schemas.microsoft.com/office/drawing/2014/main" id="{8DB19091-9616-43D2-BBE5-0171C2A3B4FF}"/>
               </a:ext>
             </a:extLst>
           </p:cNvPr>
@@ -33797,7 +33797,7 @@
           <p:cNvPr id="4" name="">
             <a:extLst xmlns:a="http://schemas.openxmlformats.org/drawingml/2006/main">
               <a:ext uri="{FF2B5EF4-FFF2-40B4-BE49-F238E27FC236}">
-                <a16:creationId xmlns:a16="http://schemas.microsoft.com/office/drawing/2014/main" id="{8D9030DC-1BD9-41CF-BF60-C882CABFDBFB}"/>
+                <a16:creationId xmlns:a16="http://schemas.microsoft.com/office/drawing/2014/main" id="{82AD5E46-238D-42D6-9F9A-D5EE16F80116}"/>
               </a:ext>
             </a:extLst>
           </p:cNvPr>
@@ -33951,7 +33951,7 @@
     </p:spTree>
     <p:extLst>
       <p:ext uri="{BB962C8B-B14F-4D97-AF65-F5344CB8AC3E}">
-        <p14:creationId xmlns:p14="http://schemas.microsoft.com/office/powerpoint/2010/main" val="1217973899"/>
+        <p14:creationId xmlns:p14="http://schemas.microsoft.com/office/powerpoint/2010/main" val="1570246774"/>
       </p:ext>
     </p:extLst>
   </p:cSld>
@@ -33982,7 +33982,7 @@
           <p:cNvPr id="5" name="">
             <a:extLst xmlns:a="http://schemas.openxmlformats.org/drawingml/2006/main">
               <a:ext uri="{FF2B5EF4-FFF2-40B4-BE49-F238E27FC236}">
-                <a16:creationId xmlns:a16="http://schemas.microsoft.com/office/drawing/2014/main" id="{0B74B4ED-3F38-49D8-BE4F-CE27A9E9A170}"/>
+                <a16:creationId xmlns:a16="http://schemas.microsoft.com/office/drawing/2014/main" id="{48A87C57-153F-44C0-9D7F-038B09A6C2D8}"/>
               </a:ext>
             </a:extLst>
           </p:cNvPr>
@@ -34138,7 +34138,7 @@
           <p:cNvPr id="2" name="">
             <a:extLst xmlns:a="http://schemas.openxmlformats.org/drawingml/2006/main">
               <a:ext uri="{FF2B5EF4-FFF2-40B4-BE49-F238E27FC236}">
-                <a16:creationId xmlns:a16="http://schemas.microsoft.com/office/drawing/2014/main" id="{70B09FDA-6A55-421F-A6F5-E2B8AE298530}"/>
+                <a16:creationId xmlns:a16="http://schemas.microsoft.com/office/drawing/2014/main" id="{8EC552EF-D010-4A81-BA1C-3E4272B15F86}"/>
               </a:ext>
             </a:extLst>
           </p:cNvPr>
@@ -34294,7 +34294,7 @@
           <p:cNvPr id="3" name="">
             <a:extLst xmlns:a="http://schemas.openxmlformats.org/drawingml/2006/main">
               <a:ext uri="{FF2B5EF4-FFF2-40B4-BE49-F238E27FC236}">
-                <a16:creationId xmlns:a16="http://schemas.microsoft.com/office/drawing/2014/main" id="{800431B0-14C3-436D-BE1B-122CC328F3CA}"/>
+                <a16:creationId xmlns:a16="http://schemas.microsoft.com/office/drawing/2014/main" id="{6FDFB464-F805-4C3D-B274-8C1DCAA237F9}"/>
               </a:ext>
             </a:extLst>
           </p:cNvPr>
@@ -35235,7 +35235,7 @@
           <p:cNvPr id="4" name="">
             <a:extLst xmlns:a="http://schemas.openxmlformats.org/drawingml/2006/main">
               <a:ext uri="{FF2B5EF4-FFF2-40B4-BE49-F238E27FC236}">
-                <a16:creationId xmlns:a16="http://schemas.microsoft.com/office/drawing/2014/main" id="{F7A8A3AE-3E48-454E-B396-B594268000ED}"/>
+                <a16:creationId xmlns:a16="http://schemas.microsoft.com/office/drawing/2014/main" id="{D992C91A-8DB8-43C6-828C-94F719A703DA}"/>
               </a:ext>
             </a:extLst>
           </p:cNvPr>
@@ -35389,7 +35389,7 @@
     </p:spTree>
     <p:extLst>
       <p:ext uri="{BB962C8B-B14F-4D97-AF65-F5344CB8AC3E}">
-        <p14:creationId xmlns:p14="http://schemas.microsoft.com/office/powerpoint/2010/main" val="1605338879"/>
+        <p14:creationId xmlns:p14="http://schemas.microsoft.com/office/powerpoint/2010/main" val="299269848"/>
       </p:ext>
     </p:extLst>
   </p:cSld>

--- a/deliverables/CycleTwin_pitch_deck.pptx
+++ b/deliverables/CycleTwin_pitch_deck.pptx
@@ -2,37 +2,37 @@
 <file path=ppt/presentation.xml><?xml version="1.0" encoding="utf-8"?>
 <p:presentation xmlns:p="http://schemas.openxmlformats.org/presentationml/2006/main">
   <p:sldMasterIdLst>
-    <p:sldMasterId xmlns:r="http://schemas.openxmlformats.org/officeDocument/2006/relationships" id="2147483648" r:id="Rf276a097ae48434a"/>
+    <p:sldMasterId xmlns:r="http://schemas.openxmlformats.org/officeDocument/2006/relationships" id="2147483648" r:id="Rc61d4068b0f94f44"/>
   </p:sldMasterIdLst>
   <p:notesMasterIdLst>
-    <p:notesMasterId xmlns:r="http://schemas.openxmlformats.org/officeDocument/2006/relationships" r:id="R095bef8dd19045df"/>
+    <p:notesMasterId xmlns:r="http://schemas.openxmlformats.org/officeDocument/2006/relationships" r:id="R84d1ada5aeb845fe"/>
   </p:notesMasterIdLst>
   <p:sldIdLst>
-    <p:sldId xmlns:r="http://schemas.openxmlformats.org/officeDocument/2006/relationships" id="256" r:id="R21064d2f80714e67"/>
-    <p:sldId xmlns:r="http://schemas.openxmlformats.org/officeDocument/2006/relationships" id="257" r:id="Rdb2e0246419c450c"/>
-    <p:sldId xmlns:r="http://schemas.openxmlformats.org/officeDocument/2006/relationships" id="258" r:id="R0ca3963451524591"/>
-    <p:sldId xmlns:r="http://schemas.openxmlformats.org/officeDocument/2006/relationships" id="259" r:id="Ra8291a74749d4925"/>
-    <p:sldId xmlns:r="http://schemas.openxmlformats.org/officeDocument/2006/relationships" id="260" r:id="R6af7d5da8f2f43cc"/>
-    <p:sldId xmlns:r="http://schemas.openxmlformats.org/officeDocument/2006/relationships" id="261" r:id="R0c8ead5663574756"/>
-    <p:sldId xmlns:r="http://schemas.openxmlformats.org/officeDocument/2006/relationships" id="262" r:id="R3f47569177fd4256"/>
-    <p:sldId xmlns:r="http://schemas.openxmlformats.org/officeDocument/2006/relationships" id="263" r:id="R17ef036c09d84afd"/>
-    <p:sldId xmlns:r="http://schemas.openxmlformats.org/officeDocument/2006/relationships" id="264" r:id="R517aca99f0224fa4"/>
-    <p:sldId xmlns:r="http://schemas.openxmlformats.org/officeDocument/2006/relationships" id="265" r:id="Rdbfdaefbde744d61"/>
-    <p:sldId xmlns:r="http://schemas.openxmlformats.org/officeDocument/2006/relationships" id="266" r:id="R17f6daa23d33480c"/>
-    <p:sldId xmlns:r="http://schemas.openxmlformats.org/officeDocument/2006/relationships" id="267" r:id="Rf162fd3ebeb545f6"/>
-    <p:sldId xmlns:r="http://schemas.openxmlformats.org/officeDocument/2006/relationships" id="268" r:id="Rf8bb64a16d7546ab"/>
-    <p:sldId xmlns:r="http://schemas.openxmlformats.org/officeDocument/2006/relationships" id="269" r:id="Rb6e54571b9b74dbf"/>
-    <p:sldId xmlns:r="http://schemas.openxmlformats.org/officeDocument/2006/relationships" id="270" r:id="R59e5b17bd6b34107"/>
-    <p:sldId xmlns:r="http://schemas.openxmlformats.org/officeDocument/2006/relationships" id="271" r:id="R3122f4139b794358"/>
-    <p:sldId xmlns:r="http://schemas.openxmlformats.org/officeDocument/2006/relationships" id="272" r:id="R218813d7b186437f"/>
-    <p:sldId xmlns:r="http://schemas.openxmlformats.org/officeDocument/2006/relationships" id="273" r:id="R27ef67524e3742ce"/>
-    <p:sldId xmlns:r="http://schemas.openxmlformats.org/officeDocument/2006/relationships" id="274" r:id="R21e7c1d9e4c444ec"/>
-    <p:sldId xmlns:r="http://schemas.openxmlformats.org/officeDocument/2006/relationships" id="275" r:id="R3e75bfb79bdb4580"/>
-    <p:sldId xmlns:r="http://schemas.openxmlformats.org/officeDocument/2006/relationships" id="276" r:id="Red5c373980624f83"/>
-    <p:sldId xmlns:r="http://schemas.openxmlformats.org/officeDocument/2006/relationships" id="277" r:id="Rb81e4925ba89430d"/>
-    <p:sldId xmlns:r="http://schemas.openxmlformats.org/officeDocument/2006/relationships" id="278" r:id="R7b2e386f79dd4d00"/>
-    <p:sldId xmlns:r="http://schemas.openxmlformats.org/officeDocument/2006/relationships" id="279" r:id="R77781c81f9f248a0"/>
-    <p:sldId xmlns:r="http://schemas.openxmlformats.org/officeDocument/2006/relationships" id="280" r:id="R0b77c266ff524852"/>
+    <p:sldId xmlns:r="http://schemas.openxmlformats.org/officeDocument/2006/relationships" id="256" r:id="R5734b8ddcbf6479c"/>
+    <p:sldId xmlns:r="http://schemas.openxmlformats.org/officeDocument/2006/relationships" id="257" r:id="R917c247eb46a4247"/>
+    <p:sldId xmlns:r="http://schemas.openxmlformats.org/officeDocument/2006/relationships" id="258" r:id="R756fdad040a2446c"/>
+    <p:sldId xmlns:r="http://schemas.openxmlformats.org/officeDocument/2006/relationships" id="259" r:id="R497fcadbd9574607"/>
+    <p:sldId xmlns:r="http://schemas.openxmlformats.org/officeDocument/2006/relationships" id="260" r:id="R613ab91549034643"/>
+    <p:sldId xmlns:r="http://schemas.openxmlformats.org/officeDocument/2006/relationships" id="261" r:id="R066cbaabc2bc40bc"/>
+    <p:sldId xmlns:r="http://schemas.openxmlformats.org/officeDocument/2006/relationships" id="262" r:id="R7322188f293a4fa7"/>
+    <p:sldId xmlns:r="http://schemas.openxmlformats.org/officeDocument/2006/relationships" id="263" r:id="Rf9bafca716574abf"/>
+    <p:sldId xmlns:r="http://schemas.openxmlformats.org/officeDocument/2006/relationships" id="264" r:id="Rcff2d64a7ab34ccf"/>
+    <p:sldId xmlns:r="http://schemas.openxmlformats.org/officeDocument/2006/relationships" id="265" r:id="R4d7b0d4227184f46"/>
+    <p:sldId xmlns:r="http://schemas.openxmlformats.org/officeDocument/2006/relationships" id="266" r:id="R5a65a193b6f1460a"/>
+    <p:sldId xmlns:r="http://schemas.openxmlformats.org/officeDocument/2006/relationships" id="267" r:id="R3dedb8a7c5bc4173"/>
+    <p:sldId xmlns:r="http://schemas.openxmlformats.org/officeDocument/2006/relationships" id="268" r:id="R421891fcb6f249e4"/>
+    <p:sldId xmlns:r="http://schemas.openxmlformats.org/officeDocument/2006/relationships" id="269" r:id="R7d625ef7933a47e0"/>
+    <p:sldId xmlns:r="http://schemas.openxmlformats.org/officeDocument/2006/relationships" id="270" r:id="Ra6acad568d1b4243"/>
+    <p:sldId xmlns:r="http://schemas.openxmlformats.org/officeDocument/2006/relationships" id="271" r:id="R08ef8f7a9f4d4563"/>
+    <p:sldId xmlns:r="http://schemas.openxmlformats.org/officeDocument/2006/relationships" id="272" r:id="R94b5d467a7d847fa"/>
+    <p:sldId xmlns:r="http://schemas.openxmlformats.org/officeDocument/2006/relationships" id="273" r:id="Re9cf9dd0629542e6"/>
+    <p:sldId xmlns:r="http://schemas.openxmlformats.org/officeDocument/2006/relationships" id="274" r:id="R4f7fed6f1a22486b"/>
+    <p:sldId xmlns:r="http://schemas.openxmlformats.org/officeDocument/2006/relationships" id="275" r:id="Rf7547da65e894598"/>
+    <p:sldId xmlns:r="http://schemas.openxmlformats.org/officeDocument/2006/relationships" id="276" r:id="Rd9419000113e4ebd"/>
+    <p:sldId xmlns:r="http://schemas.openxmlformats.org/officeDocument/2006/relationships" id="277" r:id="R6a613eae4e4e4988"/>
+    <p:sldId xmlns:r="http://schemas.openxmlformats.org/officeDocument/2006/relationships" id="278" r:id="R571a24305138465f"/>
+    <p:sldId xmlns:r="http://schemas.openxmlformats.org/officeDocument/2006/relationships" id="279" r:id="R2e2ce5adce04453e"/>
+    <p:sldId xmlns:r="http://schemas.openxmlformats.org/officeDocument/2006/relationships" id="280" r:id="Rdf21d6b6f1af4d11"/>
   </p:sldIdLst>
   <p:sldSz cx="12192000" cy="6858000"/>
   <p:notesSz cx="6858000" cy="9144000"/>
@@ -536,7 +536,7 @@
           <a:lstStyle xmlns:a="http://schemas.openxmlformats.org/drawingml/2006/main"/>
           <a:p xmlns:a="http://schemas.openxmlformats.org/drawingml/2006/main">
             <a:r>
-              <a:t>Source: docs/claims.json, generated by scripts/build_claims.py. All project metrics are synthetic development results. Reserved seeds, unchanged train/validation choices, one guarded run</a:t>
+              <a:t>Source: docs/claims.json, generated by scripts/build_claims.py. All project metrics are synthetic development results. Validation retained the calendar fallback for every tier; sensors add no validated gain before the temperature shift appears.</a:t>
             </a:r>
           </a:p>
         </p:txBody>
@@ -2006,7 +2006,7 @@
           <a:lstStyle xmlns:a="http://schemas.openxmlformats.org/drawingml/2006/main"/>
           <a:p xmlns:a="http://schemas.openxmlformats.org/drawingml/2006/main">
             <a:r>
-              <a:t>Source: docs/claims.json, generated by scripts/build_claims.py. All project metrics are synthetic development results. Seed means describe the current generator, not clinical forecasting</a:t>
+              <a:t>Source: docs/claims.json, generated by scripts/build_claims.py. All project metrics are synthetic development results. Validation retained the calendar fallback for every tier; sensors add no validated gain before the temperature shift appears.</a:t>
             </a:r>
           </a:p>
         </p:txBody>
@@ -2193,7 +2193,7 @@
           <p:cNvPr id="3" name="Title">
             <a:extLst xmlns:a="http://schemas.openxmlformats.org/drawingml/2006/main">
               <a:ext uri="{FF2B5EF4-FFF2-40B4-BE49-F238E27FC236}">
-                <a16:creationId xmlns:a16="http://schemas.microsoft.com/office/drawing/2014/main" id="{2E18C4FB-FB29-41B2-A556-F809CF5EAB1B}"/>
+                <a16:creationId xmlns:a16="http://schemas.microsoft.com/office/drawing/2014/main" id="{38F519A5-F79C-40E5-BED1-AADBE1CCD1FB}"/>
               </a:ext>
             </a:extLst>
           </p:cNvPr>
@@ -2422,7 +2422,7 @@
           <p:cNvPr id="2" name="Subtitle">
             <a:extLst xmlns:a="http://schemas.openxmlformats.org/drawingml/2006/main">
               <a:ext uri="{FF2B5EF4-FFF2-40B4-BE49-F238E27FC236}">
-                <a16:creationId xmlns:a16="http://schemas.microsoft.com/office/drawing/2014/main" id="{D75F071A-3549-418B-BF09-E0233875DBB6}"/>
+                <a16:creationId xmlns:a16="http://schemas.microsoft.com/office/drawing/2014/main" id="{867A64C9-7EE6-4CC6-9ED8-B8AD06FC4B92}"/>
               </a:ext>
             </a:extLst>
           </p:cNvPr>
@@ -2668,7 +2668,7 @@
           <p:cNvPr id="2" name="Section title">
             <a:extLst xmlns:a="http://schemas.openxmlformats.org/drawingml/2006/main">
               <a:ext uri="{FF2B5EF4-FFF2-40B4-BE49-F238E27FC236}">
-                <a16:creationId xmlns:a16="http://schemas.microsoft.com/office/drawing/2014/main" id="{E2F28046-65F5-476F-8231-249D670638C9}"/>
+                <a16:creationId xmlns:a16="http://schemas.microsoft.com/office/drawing/2014/main" id="{37FCB222-85D6-4D8C-B90F-C210816CA11A}"/>
               </a:ext>
             </a:extLst>
           </p:cNvPr>
@@ -2914,7 +2914,7 @@
           <p:cNvPr id="3" name="Title">
             <a:extLst xmlns:a="http://schemas.openxmlformats.org/drawingml/2006/main">
               <a:ext uri="{FF2B5EF4-FFF2-40B4-BE49-F238E27FC236}">
-                <a16:creationId xmlns:a16="http://schemas.microsoft.com/office/drawing/2014/main" id="{1AA11D42-C472-4653-82DB-C63FB0C50CA9}"/>
+                <a16:creationId xmlns:a16="http://schemas.microsoft.com/office/drawing/2014/main" id="{4C76E5C7-DDE5-4612-AAAF-65342E11CA43}"/>
               </a:ext>
             </a:extLst>
           </p:cNvPr>
@@ -3143,7 +3143,7 @@
           <p:cNvPr id="2" name="Body">
             <a:extLst xmlns:a="http://schemas.openxmlformats.org/drawingml/2006/main">
               <a:ext uri="{FF2B5EF4-FFF2-40B4-BE49-F238E27FC236}">
-                <a16:creationId xmlns:a16="http://schemas.microsoft.com/office/drawing/2014/main" id="{A0D1FADD-E773-445A-9273-6168E9B0350D}"/>
+                <a16:creationId xmlns:a16="http://schemas.microsoft.com/office/drawing/2014/main" id="{D07E9FB4-FE6F-438F-8133-53E993076512}"/>
               </a:ext>
             </a:extLst>
           </p:cNvPr>
@@ -3389,7 +3389,7 @@
           <p:cNvPr id="4" name="Title">
             <a:extLst xmlns:a="http://schemas.openxmlformats.org/drawingml/2006/main">
               <a:ext uri="{FF2B5EF4-FFF2-40B4-BE49-F238E27FC236}">
-                <a16:creationId xmlns:a16="http://schemas.microsoft.com/office/drawing/2014/main" id="{86D1248D-0A6A-4ABE-8883-F2623204B1D3}"/>
+                <a16:creationId xmlns:a16="http://schemas.microsoft.com/office/drawing/2014/main" id="{E0DE205A-9774-437A-99A9-24EC8CF9AFDC}"/>
               </a:ext>
             </a:extLst>
           </p:cNvPr>
@@ -3618,7 +3618,7 @@
           <p:cNvPr id="2" name="Left column">
             <a:extLst xmlns:a="http://schemas.openxmlformats.org/drawingml/2006/main">
               <a:ext uri="{FF2B5EF4-FFF2-40B4-BE49-F238E27FC236}">
-                <a16:creationId xmlns:a16="http://schemas.microsoft.com/office/drawing/2014/main" id="{BE50F42E-A6DC-4377-8919-9261E0485CCC}"/>
+                <a16:creationId xmlns:a16="http://schemas.microsoft.com/office/drawing/2014/main" id="{66DA7FB2-F461-4F1E-957E-C679D90F9026}"/>
               </a:ext>
             </a:extLst>
           </p:cNvPr>
@@ -3847,7 +3847,7 @@
           <p:cNvPr id="3" name="Right column">
             <a:extLst xmlns:a="http://schemas.openxmlformats.org/drawingml/2006/main">
               <a:ext uri="{FF2B5EF4-FFF2-40B4-BE49-F238E27FC236}">
-                <a16:creationId xmlns:a16="http://schemas.microsoft.com/office/drawing/2014/main" id="{7CDF4508-1A22-4943-A39F-4933D18168C5}"/>
+                <a16:creationId xmlns:a16="http://schemas.microsoft.com/office/drawing/2014/main" id="{8C407D6D-37EC-436D-936E-ED302FD6F318}"/>
               </a:ext>
             </a:extLst>
           </p:cNvPr>
@@ -4093,7 +4093,7 @@
           <p:cNvPr id="3" name="Title">
             <a:extLst xmlns:a="http://schemas.openxmlformats.org/drawingml/2006/main">
               <a:ext uri="{FF2B5EF4-FFF2-40B4-BE49-F238E27FC236}">
-                <a16:creationId xmlns:a16="http://schemas.microsoft.com/office/drawing/2014/main" id="{F8CA7FDF-5858-4C7D-8550-C833236B5BB1}"/>
+                <a16:creationId xmlns:a16="http://schemas.microsoft.com/office/drawing/2014/main" id="{71548C5C-F174-4EEE-83FF-DEBFFED157AA}"/>
               </a:ext>
             </a:extLst>
           </p:cNvPr>
@@ -4322,7 +4322,7 @@
           <p:cNvPr id="2" name="Left column">
             <a:extLst xmlns:a="http://schemas.openxmlformats.org/drawingml/2006/main">
               <a:ext uri="{FF2B5EF4-FFF2-40B4-BE49-F238E27FC236}">
-                <a16:creationId xmlns:a16="http://schemas.microsoft.com/office/drawing/2014/main" id="{150C1F34-AC62-4BF0-9689-514A0B9F886C}"/>
+                <a16:creationId xmlns:a16="http://schemas.microsoft.com/office/drawing/2014/main" id="{DDD671DC-0211-41C6-86AC-DDDEF77D6B5C}"/>
               </a:ext>
             </a:extLst>
           </p:cNvPr>
@@ -4589,12 +4589,12 @@
   </p:cSld>
   <p:clrMap bg1="lt1" tx1="dk1" bg2="lt2" tx2="dk2" accent1="accent1" accent2="accent2" accent3="accent3" accent4="accent4" accent5="accent5" accent6="accent6" hlink="hlink" folHlink="folHlink"/>
   <p:sldLayoutIdLst>
-    <p:sldLayoutId xmlns:r="http://schemas.openxmlformats.org/officeDocument/2006/relationships" id="2147483649" r:id="R935420b3caff4bfa"/>
-    <p:sldLayoutId xmlns:r="http://schemas.openxmlformats.org/officeDocument/2006/relationships" id="2147483650" r:id="Rd030c1d9e6254dfd"/>
-    <p:sldLayoutId xmlns:r="http://schemas.openxmlformats.org/officeDocument/2006/relationships" id="2147483651" r:id="R6aa6d731797840e6"/>
-    <p:sldLayoutId xmlns:r="http://schemas.openxmlformats.org/officeDocument/2006/relationships" id="2147483652" r:id="R07e803f7ac484da0"/>
-    <p:sldLayoutId xmlns:r="http://schemas.openxmlformats.org/officeDocument/2006/relationships" id="2147483653" r:id="R13422d30710a4f3c"/>
-    <p:sldLayoutId xmlns:r="http://schemas.openxmlformats.org/officeDocument/2006/relationships" id="2147483654" r:id="Ra0de412d0cec4534"/>
+    <p:sldLayoutId xmlns:r="http://schemas.openxmlformats.org/officeDocument/2006/relationships" id="2147483649" r:id="R0a13960bf73f4350"/>
+    <p:sldLayoutId xmlns:r="http://schemas.openxmlformats.org/officeDocument/2006/relationships" id="2147483650" r:id="R6c22d28f22be4d93"/>
+    <p:sldLayoutId xmlns:r="http://schemas.openxmlformats.org/officeDocument/2006/relationships" id="2147483651" r:id="Re6ddaeff4c3d45fa"/>
+    <p:sldLayoutId xmlns:r="http://schemas.openxmlformats.org/officeDocument/2006/relationships" id="2147483652" r:id="Reef81d20778941a1"/>
+    <p:sldLayoutId xmlns:r="http://schemas.openxmlformats.org/officeDocument/2006/relationships" id="2147483653" r:id="R720cabc9cda64eec"/>
+    <p:sldLayoutId xmlns:r="http://schemas.openxmlformats.org/officeDocument/2006/relationships" id="2147483654" r:id="R9a064b64dc5a4fbd"/>
   </p:sldLayoutIdLst>
   <p:txStyles>
     <p:titleStyle>
@@ -5145,7 +5145,7 @@
           <p:cNvPr id="7" name="">
             <a:extLst xmlns:a="http://schemas.openxmlformats.org/drawingml/2006/main">
               <a:ext uri="{FF2B5EF4-FFF2-40B4-BE49-F238E27FC236}">
-                <a16:creationId xmlns:a16="http://schemas.microsoft.com/office/drawing/2014/main" id="{91E5484F-1E68-42A6-888E-5E9BE0A0D700}"/>
+                <a16:creationId xmlns:a16="http://schemas.microsoft.com/office/drawing/2014/main" id="{1B77272F-4A0E-4E7F-B6AA-2B7109D3986E}"/>
               </a:ext>
             </a:extLst>
           </p:cNvPr>
@@ -5301,7 +5301,7 @@
           <p:cNvPr id="2" name="">
             <a:extLst xmlns:a="http://schemas.openxmlformats.org/drawingml/2006/main">
               <a:ext uri="{FF2B5EF4-FFF2-40B4-BE49-F238E27FC236}">
-                <a16:creationId xmlns:a16="http://schemas.microsoft.com/office/drawing/2014/main" id="{2F93A05A-4678-4B5C-AFA4-886F6AD0526A}"/>
+                <a16:creationId xmlns:a16="http://schemas.microsoft.com/office/drawing/2014/main" id="{9E3F6007-70BA-4687-A6DD-2847980CD4A8}"/>
               </a:ext>
             </a:extLst>
           </p:cNvPr>
@@ -5457,7 +5457,7 @@
           <p:cNvPr id="3" name="">
             <a:extLst xmlns:a="http://schemas.openxmlformats.org/drawingml/2006/main">
               <a:ext uri="{FF2B5EF4-FFF2-40B4-BE49-F238E27FC236}">
-                <a16:creationId xmlns:a16="http://schemas.microsoft.com/office/drawing/2014/main" id="{07EAFE0D-5AED-4FB2-9BD8-B6BB015D8819}"/>
+                <a16:creationId xmlns:a16="http://schemas.microsoft.com/office/drawing/2014/main" id="{BD882B3A-5E25-462C-AFE8-3656C5B13CA6}"/>
               </a:ext>
             </a:extLst>
           </p:cNvPr>
@@ -5613,7 +5613,7 @@
           <p:cNvPr id="4" name="">
             <a:extLst xmlns:a="http://schemas.openxmlformats.org/drawingml/2006/main">
               <a:ext uri="{FF2B5EF4-FFF2-40B4-BE49-F238E27FC236}">
-                <a16:creationId xmlns:a16="http://schemas.microsoft.com/office/drawing/2014/main" id="{841DDA9D-838D-4BF0-9482-D89E661C910E}"/>
+                <a16:creationId xmlns:a16="http://schemas.microsoft.com/office/drawing/2014/main" id="{78942D09-4F39-4AF2-9E16-34D44BFE2D7D}"/>
               </a:ext>
             </a:extLst>
           </p:cNvPr>
@@ -5769,7 +5769,7 @@
           <p:cNvPr id="5" name="">
             <a:extLst xmlns:a="http://schemas.openxmlformats.org/drawingml/2006/main">
               <a:ext uri="{FF2B5EF4-FFF2-40B4-BE49-F238E27FC236}">
-                <a16:creationId xmlns:a16="http://schemas.microsoft.com/office/drawing/2014/main" id="{3831C893-6E1A-4DBE-8959-48A15B030A6F}"/>
+                <a16:creationId xmlns:a16="http://schemas.microsoft.com/office/drawing/2014/main" id="{AFA3DC95-6245-486B-BFD4-5E444113421F}"/>
               </a:ext>
             </a:extLst>
           </p:cNvPr>
@@ -5925,7 +5925,7 @@
           <p:cNvPr id="6" name="">
             <a:extLst xmlns:a="http://schemas.openxmlformats.org/drawingml/2006/main">
               <a:ext uri="{FF2B5EF4-FFF2-40B4-BE49-F238E27FC236}">
-                <a16:creationId xmlns:a16="http://schemas.microsoft.com/office/drawing/2014/main" id="{A4B00945-751F-45E3-8AE2-0DF860BAECFA}"/>
+                <a16:creationId xmlns:a16="http://schemas.microsoft.com/office/drawing/2014/main" id="{84947C79-0C80-43E0-B08E-CF8444295D84}"/>
               </a:ext>
             </a:extLst>
           </p:cNvPr>
@@ -6079,7 +6079,7 @@
     </p:spTree>
     <p:extLst>
       <p:ext uri="{BB962C8B-B14F-4D97-AF65-F5344CB8AC3E}">
-        <p14:creationId xmlns:p14="http://schemas.microsoft.com/office/powerpoint/2010/main" val="1510832700"/>
+        <p14:creationId xmlns:p14="http://schemas.microsoft.com/office/powerpoint/2010/main" val="1440886202"/>
       </p:ext>
     </p:extLst>
   </p:cSld>
@@ -6110,7 +6110,7 @@
           <p:cNvPr id="5" name="">
             <a:extLst xmlns:a="http://schemas.openxmlformats.org/drawingml/2006/main">
               <a:ext uri="{FF2B5EF4-FFF2-40B4-BE49-F238E27FC236}">
-                <a16:creationId xmlns:a16="http://schemas.microsoft.com/office/drawing/2014/main" id="{382A076E-782B-4DD1-A614-8CF8AE8ACFEF}"/>
+                <a16:creationId xmlns:a16="http://schemas.microsoft.com/office/drawing/2014/main" id="{509C6F94-0CE8-4628-9CF7-F10BC73673E1}"/>
               </a:ext>
             </a:extLst>
           </p:cNvPr>
@@ -6266,7 +6266,7 @@
           <p:cNvPr id="2" name="">
             <a:extLst xmlns:a="http://schemas.openxmlformats.org/drawingml/2006/main">
               <a:ext uri="{FF2B5EF4-FFF2-40B4-BE49-F238E27FC236}">
-                <a16:creationId xmlns:a16="http://schemas.microsoft.com/office/drawing/2014/main" id="{DD57D66E-E128-4F9F-9A79-3E386FFAF370}"/>
+                <a16:creationId xmlns:a16="http://schemas.microsoft.com/office/drawing/2014/main" id="{2C6F20CE-4F77-4A8C-92AC-70E36E4F5E2E}"/>
               </a:ext>
             </a:extLst>
           </p:cNvPr>
@@ -6412,7 +6412,7 @@
                 <a:ea typeface="Arial"/>
                 <a:cs typeface="Arial"/>
               </a:rPr>
-              <a:t>Reserved seeds, unchanged train/validation choices, one guarded run</a:t>
+              <a:t>Validation retained the calendar fallback for every tier; sensors add no validated gain before the temperature shift appears.</a:t>
             </a:r>
           </a:p>
         </p:txBody>
@@ -6422,7 +6422,7 @@
           <p:cNvPr id="3" name="">
             <a:extLst xmlns:a="http://schemas.openxmlformats.org/drawingml/2006/main">
               <a:ext uri="{FF2B5EF4-FFF2-40B4-BE49-F238E27FC236}">
-                <a16:creationId xmlns:a16="http://schemas.microsoft.com/office/drawing/2014/main" id="{2E126A6D-1A59-4741-A303-11B31DA839F2}"/>
+                <a16:creationId xmlns:a16="http://schemas.microsoft.com/office/drawing/2014/main" id="{0DC68C3B-7E0C-40F6-864A-117531BE8F87}"/>
               </a:ext>
             </a:extLst>
           </p:cNvPr>
@@ -7363,7 +7363,7 @@
           <p:cNvPr id="4" name="">
             <a:extLst xmlns:a="http://schemas.openxmlformats.org/drawingml/2006/main">
               <a:ext uri="{FF2B5EF4-FFF2-40B4-BE49-F238E27FC236}">
-                <a16:creationId xmlns:a16="http://schemas.microsoft.com/office/drawing/2014/main" id="{E9F4030C-3587-4C31-AB2B-171942BDC945}"/>
+                <a16:creationId xmlns:a16="http://schemas.microsoft.com/office/drawing/2014/main" id="{D02972A1-1B8E-4EC8-9926-02F230DDB0FE}"/>
               </a:ext>
             </a:extLst>
           </p:cNvPr>
@@ -7517,7 +7517,7 @@
     </p:spTree>
     <p:extLst>
       <p:ext uri="{BB962C8B-B14F-4D97-AF65-F5344CB8AC3E}">
-        <p14:creationId xmlns:p14="http://schemas.microsoft.com/office/powerpoint/2010/main" val="605616080"/>
+        <p14:creationId xmlns:p14="http://schemas.microsoft.com/office/powerpoint/2010/main" val="2144446468"/>
       </p:ext>
     </p:extLst>
   </p:cSld>
@@ -7548,7 +7548,7 @@
           <p:cNvPr id="5" name="">
             <a:extLst xmlns:a="http://schemas.openxmlformats.org/drawingml/2006/main">
               <a:ext uri="{FF2B5EF4-FFF2-40B4-BE49-F238E27FC236}">
-                <a16:creationId xmlns:a16="http://schemas.microsoft.com/office/drawing/2014/main" id="{C2C2CA1E-BBC6-4312-ACB6-270591FD6771}"/>
+                <a16:creationId xmlns:a16="http://schemas.microsoft.com/office/drawing/2014/main" id="{17C36281-9537-4D32-A0DC-64507379818F}"/>
               </a:ext>
             </a:extLst>
           </p:cNvPr>
@@ -7704,7 +7704,7 @@
           <p:cNvPr id="2" name="">
             <a:extLst xmlns:a="http://schemas.openxmlformats.org/drawingml/2006/main">
               <a:ext uri="{FF2B5EF4-FFF2-40B4-BE49-F238E27FC236}">
-                <a16:creationId xmlns:a16="http://schemas.microsoft.com/office/drawing/2014/main" id="{39FE5371-84B9-454A-88E9-5554F547030B}"/>
+                <a16:creationId xmlns:a16="http://schemas.microsoft.com/office/drawing/2014/main" id="{301F124A-EB22-4E7B-BB87-4B62790F21BB}"/>
               </a:ext>
             </a:extLst>
           </p:cNvPr>
@@ -7860,7 +7860,7 @@
           <p:cNvPr id="3" name="">
             <a:extLst xmlns:a="http://schemas.openxmlformats.org/drawingml/2006/main">
               <a:ext uri="{FF2B5EF4-FFF2-40B4-BE49-F238E27FC236}">
-                <a16:creationId xmlns:a16="http://schemas.microsoft.com/office/drawing/2014/main" id="{E3899C2D-9D15-445E-90C3-6D67DCAEC020}"/>
+                <a16:creationId xmlns:a16="http://schemas.microsoft.com/office/drawing/2014/main" id="{AAD410FD-2320-4056-A46F-C1571F6B57C6}"/>
               </a:ext>
             </a:extLst>
           </p:cNvPr>
@@ -8801,7 +8801,7 @@
           <p:cNvPr id="4" name="">
             <a:extLst xmlns:a="http://schemas.openxmlformats.org/drawingml/2006/main">
               <a:ext uri="{FF2B5EF4-FFF2-40B4-BE49-F238E27FC236}">
-                <a16:creationId xmlns:a16="http://schemas.microsoft.com/office/drawing/2014/main" id="{DCB1EE81-72EB-46BB-8DF7-B74D586AFF24}"/>
+                <a16:creationId xmlns:a16="http://schemas.microsoft.com/office/drawing/2014/main" id="{9187E10F-8C10-4CA7-8D02-48D7E4BE3C9C}"/>
               </a:ext>
             </a:extLst>
           </p:cNvPr>
@@ -8955,7 +8955,7 @@
     </p:spTree>
     <p:extLst>
       <p:ext uri="{BB962C8B-B14F-4D97-AF65-F5344CB8AC3E}">
-        <p14:creationId xmlns:p14="http://schemas.microsoft.com/office/powerpoint/2010/main" val="350591554"/>
+        <p14:creationId xmlns:p14="http://schemas.microsoft.com/office/powerpoint/2010/main" val="1945147355"/>
       </p:ext>
     </p:extLst>
   </p:cSld>
@@ -8986,7 +8986,7 @@
           <p:cNvPr id="5" name="">
             <a:extLst xmlns:a="http://schemas.openxmlformats.org/drawingml/2006/main">
               <a:ext uri="{FF2B5EF4-FFF2-40B4-BE49-F238E27FC236}">
-                <a16:creationId xmlns:a16="http://schemas.microsoft.com/office/drawing/2014/main" id="{7014ED4F-5742-45EF-BCB3-74D683355A28}"/>
+                <a16:creationId xmlns:a16="http://schemas.microsoft.com/office/drawing/2014/main" id="{D9ED54D8-DEF6-4513-B2F8-08C0A0E2305A}"/>
               </a:ext>
             </a:extLst>
           </p:cNvPr>
@@ -9142,7 +9142,7 @@
           <p:cNvPr id="2" name="">
             <a:extLst xmlns:a="http://schemas.openxmlformats.org/drawingml/2006/main">
               <a:ext uri="{FF2B5EF4-FFF2-40B4-BE49-F238E27FC236}">
-                <a16:creationId xmlns:a16="http://schemas.microsoft.com/office/drawing/2014/main" id="{B9D324DA-CDCF-4B2B-9A57-B020FC026E68}"/>
+                <a16:creationId xmlns:a16="http://schemas.microsoft.com/office/drawing/2014/main" id="{70F97E38-2B1B-4827-8224-AE414CBB9486}"/>
               </a:ext>
             </a:extLst>
           </p:cNvPr>
@@ -9298,7 +9298,7 @@
           <p:cNvPr id="3" name="">
             <a:extLst xmlns:a="http://schemas.openxmlformats.org/drawingml/2006/main">
               <a:ext uri="{FF2B5EF4-FFF2-40B4-BE49-F238E27FC236}">
-                <a16:creationId xmlns:a16="http://schemas.microsoft.com/office/drawing/2014/main" id="{3D721C9A-0EA6-4EA1-8157-02D7D6237F91}"/>
+                <a16:creationId xmlns:a16="http://schemas.microsoft.com/office/drawing/2014/main" id="{2DDE1399-358D-4895-9F93-3714166CC3B8}"/>
               </a:ext>
             </a:extLst>
           </p:cNvPr>
@@ -10239,7 +10239,7 @@
           <p:cNvPr id="4" name="">
             <a:extLst xmlns:a="http://schemas.openxmlformats.org/drawingml/2006/main">
               <a:ext uri="{FF2B5EF4-FFF2-40B4-BE49-F238E27FC236}">
-                <a16:creationId xmlns:a16="http://schemas.microsoft.com/office/drawing/2014/main" id="{59AFDD6D-429D-4E45-B0E1-5E2AFB68AA84}"/>
+                <a16:creationId xmlns:a16="http://schemas.microsoft.com/office/drawing/2014/main" id="{00F2F7C2-D91C-4BF3-B0C0-149970D65F42}"/>
               </a:ext>
             </a:extLst>
           </p:cNvPr>
@@ -10393,7 +10393,7 @@
     </p:spTree>
     <p:extLst>
       <p:ext uri="{BB962C8B-B14F-4D97-AF65-F5344CB8AC3E}">
-        <p14:creationId xmlns:p14="http://schemas.microsoft.com/office/powerpoint/2010/main" val="860678662"/>
+        <p14:creationId xmlns:p14="http://schemas.microsoft.com/office/powerpoint/2010/main" val="769968963"/>
       </p:ext>
     </p:extLst>
   </p:cSld>
@@ -10424,7 +10424,7 @@
           <p:cNvPr id="8" name="">
             <a:extLst xmlns:a="http://schemas.openxmlformats.org/drawingml/2006/main">
               <a:ext uri="{FF2B5EF4-FFF2-40B4-BE49-F238E27FC236}">
-                <a16:creationId xmlns:a16="http://schemas.microsoft.com/office/drawing/2014/main" id="{EDEC7281-4964-4892-BA6A-CD34FD089625}"/>
+                <a16:creationId xmlns:a16="http://schemas.microsoft.com/office/drawing/2014/main" id="{F9D63954-916E-4378-B008-EA85EC686D61}"/>
               </a:ext>
             </a:extLst>
           </p:cNvPr>
@@ -10580,7 +10580,7 @@
           <p:cNvPr id="2" name="">
             <a:extLst xmlns:a="http://schemas.openxmlformats.org/drawingml/2006/main">
               <a:ext uri="{FF2B5EF4-FFF2-40B4-BE49-F238E27FC236}">
-                <a16:creationId xmlns:a16="http://schemas.microsoft.com/office/drawing/2014/main" id="{A2E90B88-765F-4836-9DA6-4A0104B96B51}"/>
+                <a16:creationId xmlns:a16="http://schemas.microsoft.com/office/drawing/2014/main" id="{26FDADCC-E525-4B1C-AB2A-8EDA8A51038B}"/>
               </a:ext>
             </a:extLst>
           </p:cNvPr>
@@ -10736,7 +10736,7 @@
           <p:cNvPr id="3" name="">
             <a:extLst xmlns:a="http://schemas.openxmlformats.org/drawingml/2006/main">
               <a:ext uri="{FF2B5EF4-FFF2-40B4-BE49-F238E27FC236}">
-                <a16:creationId xmlns:a16="http://schemas.microsoft.com/office/drawing/2014/main" id="{35DFB9FF-0B9C-4502-B6EB-6202E1C0560B}"/>
+                <a16:creationId xmlns:a16="http://schemas.microsoft.com/office/drawing/2014/main" id="{2D9A1C16-AAAF-4B66-9564-877BEA96538E}"/>
               </a:ext>
             </a:extLst>
           </p:cNvPr>
@@ -10892,7 +10892,7 @@
           <p:cNvPr id="4" name="">
             <a:extLst xmlns:a="http://schemas.openxmlformats.org/drawingml/2006/main">
               <a:ext uri="{FF2B5EF4-FFF2-40B4-BE49-F238E27FC236}">
-                <a16:creationId xmlns:a16="http://schemas.microsoft.com/office/drawing/2014/main" id="{43756A56-9499-475C-866A-E82E79A134C4}"/>
+                <a16:creationId xmlns:a16="http://schemas.microsoft.com/office/drawing/2014/main" id="{9EB48A3F-A01E-442B-951A-B1D62384B0EC}"/>
               </a:ext>
             </a:extLst>
           </p:cNvPr>
@@ -11048,7 +11048,7 @@
           <p:cNvPr id="5" name="">
             <a:extLst xmlns:a="http://schemas.openxmlformats.org/drawingml/2006/main">
               <a:ext uri="{FF2B5EF4-FFF2-40B4-BE49-F238E27FC236}">
-                <a16:creationId xmlns:a16="http://schemas.microsoft.com/office/drawing/2014/main" id="{B1988C94-1D48-4F5D-8EFC-BF927F931475}"/>
+                <a16:creationId xmlns:a16="http://schemas.microsoft.com/office/drawing/2014/main" id="{23661F89-BECF-471C-9BAA-67B567FEE823}"/>
               </a:ext>
             </a:extLst>
           </p:cNvPr>
@@ -11204,7 +11204,7 @@
           <p:cNvPr id="6" name="">
             <a:extLst xmlns:a="http://schemas.openxmlformats.org/drawingml/2006/main">
               <a:ext uri="{FF2B5EF4-FFF2-40B4-BE49-F238E27FC236}">
-                <a16:creationId xmlns:a16="http://schemas.microsoft.com/office/drawing/2014/main" id="{F3F996E7-E9E6-4DE7-9E69-A98EBE9E71D6}"/>
+                <a16:creationId xmlns:a16="http://schemas.microsoft.com/office/drawing/2014/main" id="{168CFBA6-12E0-4905-8486-EDDD90E9BE61}"/>
               </a:ext>
             </a:extLst>
           </p:cNvPr>
@@ -11360,7 +11360,7 @@
           <p:cNvPr id="7" name="">
             <a:extLst xmlns:a="http://schemas.openxmlformats.org/drawingml/2006/main">
               <a:ext uri="{FF2B5EF4-FFF2-40B4-BE49-F238E27FC236}">
-                <a16:creationId xmlns:a16="http://schemas.microsoft.com/office/drawing/2014/main" id="{592342EE-FF72-46AA-AD6F-0CEDECF1A751}"/>
+                <a16:creationId xmlns:a16="http://schemas.microsoft.com/office/drawing/2014/main" id="{208C953C-886F-4801-8F88-FED7C8188C74}"/>
               </a:ext>
             </a:extLst>
           </p:cNvPr>
@@ -11514,7 +11514,7 @@
     </p:spTree>
     <p:extLst>
       <p:ext uri="{BB962C8B-B14F-4D97-AF65-F5344CB8AC3E}">
-        <p14:creationId xmlns:p14="http://schemas.microsoft.com/office/powerpoint/2010/main" val="1184788417"/>
+        <p14:creationId xmlns:p14="http://schemas.microsoft.com/office/powerpoint/2010/main" val="1717383023"/>
       </p:ext>
     </p:extLst>
   </p:cSld>
@@ -11545,7 +11545,7 @@
           <p:cNvPr id="8" name="">
             <a:extLst xmlns:a="http://schemas.openxmlformats.org/drawingml/2006/main">
               <a:ext uri="{FF2B5EF4-FFF2-40B4-BE49-F238E27FC236}">
-                <a16:creationId xmlns:a16="http://schemas.microsoft.com/office/drawing/2014/main" id="{5968CA2A-A26A-4137-AD20-D014D551BA54}"/>
+                <a16:creationId xmlns:a16="http://schemas.microsoft.com/office/drawing/2014/main" id="{6DCE57F8-B490-4CC6-8FC3-EB0E1D4F65C3}"/>
               </a:ext>
             </a:extLst>
           </p:cNvPr>
@@ -11701,7 +11701,7 @@
           <p:cNvPr id="2" name="">
             <a:extLst xmlns:a="http://schemas.openxmlformats.org/drawingml/2006/main">
               <a:ext uri="{FF2B5EF4-FFF2-40B4-BE49-F238E27FC236}">
-                <a16:creationId xmlns:a16="http://schemas.microsoft.com/office/drawing/2014/main" id="{4FB22669-8AB7-4B61-A5BC-598E1908B180}"/>
+                <a16:creationId xmlns:a16="http://schemas.microsoft.com/office/drawing/2014/main" id="{83A99E01-1026-4A61-9C02-7200E3263E6A}"/>
               </a:ext>
             </a:extLst>
           </p:cNvPr>
@@ -11857,7 +11857,7 @@
           <p:cNvPr id="3" name="">
             <a:extLst xmlns:a="http://schemas.openxmlformats.org/drawingml/2006/main">
               <a:ext uri="{FF2B5EF4-FFF2-40B4-BE49-F238E27FC236}">
-                <a16:creationId xmlns:a16="http://schemas.microsoft.com/office/drawing/2014/main" id="{6DC36A53-B84B-4502-AD76-57E3C876C385}"/>
+                <a16:creationId xmlns:a16="http://schemas.microsoft.com/office/drawing/2014/main" id="{692A0668-BA9D-429C-92B4-1B7E2690609E}"/>
               </a:ext>
             </a:extLst>
           </p:cNvPr>
@@ -12013,7 +12013,7 @@
           <p:cNvPr id="4" name="">
             <a:extLst xmlns:a="http://schemas.openxmlformats.org/drawingml/2006/main">
               <a:ext uri="{FF2B5EF4-FFF2-40B4-BE49-F238E27FC236}">
-                <a16:creationId xmlns:a16="http://schemas.microsoft.com/office/drawing/2014/main" id="{5F546C4B-198C-4C3E-9C82-C6687BAE0EBD}"/>
+                <a16:creationId xmlns:a16="http://schemas.microsoft.com/office/drawing/2014/main" id="{CF30C5E1-4B47-4492-AC5D-C1812B4C7EB1}"/>
               </a:ext>
             </a:extLst>
           </p:cNvPr>
@@ -12169,7 +12169,7 @@
           <p:cNvPr id="5" name="">
             <a:extLst xmlns:a="http://schemas.openxmlformats.org/drawingml/2006/main">
               <a:ext uri="{FF2B5EF4-FFF2-40B4-BE49-F238E27FC236}">
-                <a16:creationId xmlns:a16="http://schemas.microsoft.com/office/drawing/2014/main" id="{121FBA70-C26B-412A-9F5F-20FEC89E4886}"/>
+                <a16:creationId xmlns:a16="http://schemas.microsoft.com/office/drawing/2014/main" id="{65DD8278-4E95-4C64-A463-628B284B92AA}"/>
               </a:ext>
             </a:extLst>
           </p:cNvPr>
@@ -12325,7 +12325,7 @@
           <p:cNvPr id="6" name="">
             <a:extLst xmlns:a="http://schemas.openxmlformats.org/drawingml/2006/main">
               <a:ext uri="{FF2B5EF4-FFF2-40B4-BE49-F238E27FC236}">
-                <a16:creationId xmlns:a16="http://schemas.microsoft.com/office/drawing/2014/main" id="{CF770B2A-F0C2-429E-95E5-892E40590268}"/>
+                <a16:creationId xmlns:a16="http://schemas.microsoft.com/office/drawing/2014/main" id="{9C42AE22-19F7-4988-81AA-6A9793A6CC26}"/>
               </a:ext>
             </a:extLst>
           </p:cNvPr>
@@ -12481,7 +12481,7 @@
           <p:cNvPr id="7" name="">
             <a:extLst xmlns:a="http://schemas.openxmlformats.org/drawingml/2006/main">
               <a:ext uri="{FF2B5EF4-FFF2-40B4-BE49-F238E27FC236}">
-                <a16:creationId xmlns:a16="http://schemas.microsoft.com/office/drawing/2014/main" id="{2CB74C93-976C-4F54-B8AA-561BC8C19DA8}"/>
+                <a16:creationId xmlns:a16="http://schemas.microsoft.com/office/drawing/2014/main" id="{F687FE4B-7EF5-43AA-9F88-A84CB6264FEA}"/>
               </a:ext>
             </a:extLst>
           </p:cNvPr>
@@ -12635,7 +12635,7 @@
     </p:spTree>
     <p:extLst>
       <p:ext uri="{BB962C8B-B14F-4D97-AF65-F5344CB8AC3E}">
-        <p14:creationId xmlns:p14="http://schemas.microsoft.com/office/powerpoint/2010/main" val="1899728392"/>
+        <p14:creationId xmlns:p14="http://schemas.microsoft.com/office/powerpoint/2010/main" val="907638778"/>
       </p:ext>
     </p:extLst>
   </p:cSld>
@@ -12666,7 +12666,7 @@
           <p:cNvPr id="8" name="">
             <a:extLst xmlns:a="http://schemas.openxmlformats.org/drawingml/2006/main">
               <a:ext uri="{FF2B5EF4-FFF2-40B4-BE49-F238E27FC236}">
-                <a16:creationId xmlns:a16="http://schemas.microsoft.com/office/drawing/2014/main" id="{8850E17E-EA68-49B6-A74D-32F96A06AA58}"/>
+                <a16:creationId xmlns:a16="http://schemas.microsoft.com/office/drawing/2014/main" id="{362BBD77-C2D3-4E10-B5C3-CB8AD9899957}"/>
               </a:ext>
             </a:extLst>
           </p:cNvPr>
@@ -12822,7 +12822,7 @@
           <p:cNvPr id="2" name="">
             <a:extLst xmlns:a="http://schemas.openxmlformats.org/drawingml/2006/main">
               <a:ext uri="{FF2B5EF4-FFF2-40B4-BE49-F238E27FC236}">
-                <a16:creationId xmlns:a16="http://schemas.microsoft.com/office/drawing/2014/main" id="{F2F3C892-C1C5-4F68-BE31-65A1A8FD9BE5}"/>
+                <a16:creationId xmlns:a16="http://schemas.microsoft.com/office/drawing/2014/main" id="{B3A7D374-3D82-4A89-8BF1-CDC0BF1755ED}"/>
               </a:ext>
             </a:extLst>
           </p:cNvPr>
@@ -12978,7 +12978,7 @@
           <p:cNvPr id="3" name="">
             <a:extLst xmlns:a="http://schemas.openxmlformats.org/drawingml/2006/main">
               <a:ext uri="{FF2B5EF4-FFF2-40B4-BE49-F238E27FC236}">
-                <a16:creationId xmlns:a16="http://schemas.microsoft.com/office/drawing/2014/main" id="{B50AD25A-3046-4A45-9EDA-F50D8620A89F}"/>
+                <a16:creationId xmlns:a16="http://schemas.microsoft.com/office/drawing/2014/main" id="{6A468515-70C3-4C72-9E53-A3A6385BE4CE}"/>
               </a:ext>
             </a:extLst>
           </p:cNvPr>
@@ -13134,7 +13134,7 @@
           <p:cNvPr id="4" name="">
             <a:extLst xmlns:a="http://schemas.openxmlformats.org/drawingml/2006/main">
               <a:ext uri="{FF2B5EF4-FFF2-40B4-BE49-F238E27FC236}">
-                <a16:creationId xmlns:a16="http://schemas.microsoft.com/office/drawing/2014/main" id="{34DA19B7-02BD-4B95-9D5B-C3E31BEBE3DA}"/>
+                <a16:creationId xmlns:a16="http://schemas.microsoft.com/office/drawing/2014/main" id="{494ED5F2-A84F-4DD8-9B62-511C7794C3D5}"/>
               </a:ext>
             </a:extLst>
           </p:cNvPr>
@@ -13290,7 +13290,7 @@
           <p:cNvPr id="5" name="">
             <a:extLst xmlns:a="http://schemas.openxmlformats.org/drawingml/2006/main">
               <a:ext uri="{FF2B5EF4-FFF2-40B4-BE49-F238E27FC236}">
-                <a16:creationId xmlns:a16="http://schemas.microsoft.com/office/drawing/2014/main" id="{2F002669-1B2F-44EE-9D61-D6D09219B594}"/>
+                <a16:creationId xmlns:a16="http://schemas.microsoft.com/office/drawing/2014/main" id="{0BA9FBFF-8828-4375-A4EF-23127F8F0C83}"/>
               </a:ext>
             </a:extLst>
           </p:cNvPr>
@@ -13446,7 +13446,7 @@
           <p:cNvPr id="6" name="">
             <a:extLst xmlns:a="http://schemas.openxmlformats.org/drawingml/2006/main">
               <a:ext uri="{FF2B5EF4-FFF2-40B4-BE49-F238E27FC236}">
-                <a16:creationId xmlns:a16="http://schemas.microsoft.com/office/drawing/2014/main" id="{448B335D-CBFA-4332-B5AF-343AA56EBBD2}"/>
+                <a16:creationId xmlns:a16="http://schemas.microsoft.com/office/drawing/2014/main" id="{2E21379D-0612-4284-842B-93D720E50AAE}"/>
               </a:ext>
             </a:extLst>
           </p:cNvPr>
@@ -13602,7 +13602,7 @@
           <p:cNvPr id="7" name="">
             <a:extLst xmlns:a="http://schemas.openxmlformats.org/drawingml/2006/main">
               <a:ext uri="{FF2B5EF4-FFF2-40B4-BE49-F238E27FC236}">
-                <a16:creationId xmlns:a16="http://schemas.microsoft.com/office/drawing/2014/main" id="{D3731343-2368-4FB0-89F7-4ACCB38CFC5B}"/>
+                <a16:creationId xmlns:a16="http://schemas.microsoft.com/office/drawing/2014/main" id="{11FE488D-AE58-4A80-ABBF-73BAE0FD21AC}"/>
               </a:ext>
             </a:extLst>
           </p:cNvPr>
@@ -13756,7 +13756,7 @@
     </p:spTree>
     <p:extLst>
       <p:ext uri="{BB962C8B-B14F-4D97-AF65-F5344CB8AC3E}">
-        <p14:creationId xmlns:p14="http://schemas.microsoft.com/office/powerpoint/2010/main" val="1103312876"/>
+        <p14:creationId xmlns:p14="http://schemas.microsoft.com/office/powerpoint/2010/main" val="26303907"/>
       </p:ext>
     </p:extLst>
   </p:cSld>
@@ -13787,7 +13787,7 @@
           <p:cNvPr id="8" name="">
             <a:extLst xmlns:a="http://schemas.openxmlformats.org/drawingml/2006/main">
               <a:ext uri="{FF2B5EF4-FFF2-40B4-BE49-F238E27FC236}">
-                <a16:creationId xmlns:a16="http://schemas.microsoft.com/office/drawing/2014/main" id="{FE629CF2-2098-4C6E-A9D5-7DF614D8C444}"/>
+                <a16:creationId xmlns:a16="http://schemas.microsoft.com/office/drawing/2014/main" id="{DE68361C-5189-49AF-A15D-8EAAA7BAC9CF}"/>
               </a:ext>
             </a:extLst>
           </p:cNvPr>
@@ -13943,7 +13943,7 @@
           <p:cNvPr id="2" name="">
             <a:extLst xmlns:a="http://schemas.openxmlformats.org/drawingml/2006/main">
               <a:ext uri="{FF2B5EF4-FFF2-40B4-BE49-F238E27FC236}">
-                <a16:creationId xmlns:a16="http://schemas.microsoft.com/office/drawing/2014/main" id="{7A715A0A-F040-4BFB-9416-A77611EBD8E2}"/>
+                <a16:creationId xmlns:a16="http://schemas.microsoft.com/office/drawing/2014/main" id="{0CD49A03-4CFB-4708-999F-BD1E040FF860}"/>
               </a:ext>
             </a:extLst>
           </p:cNvPr>
@@ -14099,7 +14099,7 @@
           <p:cNvPr id="3" name="">
             <a:extLst xmlns:a="http://schemas.openxmlformats.org/drawingml/2006/main">
               <a:ext uri="{FF2B5EF4-FFF2-40B4-BE49-F238E27FC236}">
-                <a16:creationId xmlns:a16="http://schemas.microsoft.com/office/drawing/2014/main" id="{4F61681B-B90C-4726-A45E-EDCDAF808B23}"/>
+                <a16:creationId xmlns:a16="http://schemas.microsoft.com/office/drawing/2014/main" id="{895160C7-E601-40B1-95D7-51DBF9C76E3E}"/>
               </a:ext>
             </a:extLst>
           </p:cNvPr>
@@ -14255,7 +14255,7 @@
           <p:cNvPr id="4" name="">
             <a:extLst xmlns:a="http://schemas.openxmlformats.org/drawingml/2006/main">
               <a:ext uri="{FF2B5EF4-FFF2-40B4-BE49-F238E27FC236}">
-                <a16:creationId xmlns:a16="http://schemas.microsoft.com/office/drawing/2014/main" id="{BDB55BB1-6486-4107-A610-C655B659E340}"/>
+                <a16:creationId xmlns:a16="http://schemas.microsoft.com/office/drawing/2014/main" id="{445DC66E-A9F6-48C7-A179-90D8674A58A2}"/>
               </a:ext>
             </a:extLst>
           </p:cNvPr>
@@ -14411,7 +14411,7 @@
           <p:cNvPr id="5" name="">
             <a:extLst xmlns:a="http://schemas.openxmlformats.org/drawingml/2006/main">
               <a:ext uri="{FF2B5EF4-FFF2-40B4-BE49-F238E27FC236}">
-                <a16:creationId xmlns:a16="http://schemas.microsoft.com/office/drawing/2014/main" id="{48C80783-0C5D-4E8A-A213-31EC950DA811}"/>
+                <a16:creationId xmlns:a16="http://schemas.microsoft.com/office/drawing/2014/main" id="{54160729-2892-4612-86D4-5FE01E2E7DAF}"/>
               </a:ext>
             </a:extLst>
           </p:cNvPr>
@@ -14567,7 +14567,7 @@
           <p:cNvPr id="6" name="">
             <a:extLst xmlns:a="http://schemas.openxmlformats.org/drawingml/2006/main">
               <a:ext uri="{FF2B5EF4-FFF2-40B4-BE49-F238E27FC236}">
-                <a16:creationId xmlns:a16="http://schemas.microsoft.com/office/drawing/2014/main" id="{5768268D-7F86-4A66-8883-289381B4B71A}"/>
+                <a16:creationId xmlns:a16="http://schemas.microsoft.com/office/drawing/2014/main" id="{1243C5FA-9109-4C71-8A92-82D281FC9D32}"/>
               </a:ext>
             </a:extLst>
           </p:cNvPr>
@@ -14723,7 +14723,7 @@
           <p:cNvPr id="7" name="">
             <a:extLst xmlns:a="http://schemas.openxmlformats.org/drawingml/2006/main">
               <a:ext uri="{FF2B5EF4-FFF2-40B4-BE49-F238E27FC236}">
-                <a16:creationId xmlns:a16="http://schemas.microsoft.com/office/drawing/2014/main" id="{E8FFF8FB-E5BD-44D5-BA82-117DCFA6E314}"/>
+                <a16:creationId xmlns:a16="http://schemas.microsoft.com/office/drawing/2014/main" id="{01D3C508-AD85-44C3-A820-7CFC82B79E48}"/>
               </a:ext>
             </a:extLst>
           </p:cNvPr>
@@ -14877,7 +14877,7 @@
     </p:spTree>
     <p:extLst>
       <p:ext uri="{BB962C8B-B14F-4D97-AF65-F5344CB8AC3E}">
-        <p14:creationId xmlns:p14="http://schemas.microsoft.com/office/powerpoint/2010/main" val="1550954698"/>
+        <p14:creationId xmlns:p14="http://schemas.microsoft.com/office/powerpoint/2010/main" val="1539204796"/>
       </p:ext>
     </p:extLst>
   </p:cSld>
@@ -14908,7 +14908,7 @@
           <p:cNvPr id="8" name="">
             <a:extLst xmlns:a="http://schemas.openxmlformats.org/drawingml/2006/main">
               <a:ext uri="{FF2B5EF4-FFF2-40B4-BE49-F238E27FC236}">
-                <a16:creationId xmlns:a16="http://schemas.microsoft.com/office/drawing/2014/main" id="{E3D35B10-189C-4F57-90D0-B62D5C64C4C4}"/>
+                <a16:creationId xmlns:a16="http://schemas.microsoft.com/office/drawing/2014/main" id="{88CADA0A-6AE8-4344-B179-684391FCCB67}"/>
               </a:ext>
             </a:extLst>
           </p:cNvPr>
@@ -15064,7 +15064,7 @@
           <p:cNvPr id="2" name="">
             <a:extLst xmlns:a="http://schemas.openxmlformats.org/drawingml/2006/main">
               <a:ext uri="{FF2B5EF4-FFF2-40B4-BE49-F238E27FC236}">
-                <a16:creationId xmlns:a16="http://schemas.microsoft.com/office/drawing/2014/main" id="{D7F27041-B0D7-4561-A76D-1D7CD0572F0D}"/>
+                <a16:creationId xmlns:a16="http://schemas.microsoft.com/office/drawing/2014/main" id="{822F06CD-25B6-42EB-83C2-88B938169D2C}"/>
               </a:ext>
             </a:extLst>
           </p:cNvPr>
@@ -15220,7 +15220,7 @@
           <p:cNvPr id="3" name="">
             <a:extLst xmlns:a="http://schemas.openxmlformats.org/drawingml/2006/main">
               <a:ext uri="{FF2B5EF4-FFF2-40B4-BE49-F238E27FC236}">
-                <a16:creationId xmlns:a16="http://schemas.microsoft.com/office/drawing/2014/main" id="{04144DB0-9593-4C2E-B839-A32D33EA699D}"/>
+                <a16:creationId xmlns:a16="http://schemas.microsoft.com/office/drawing/2014/main" id="{302821D5-624D-47BA-A612-F9B04424A2CC}"/>
               </a:ext>
             </a:extLst>
           </p:cNvPr>
@@ -15376,7 +15376,7 @@
           <p:cNvPr id="4" name="">
             <a:extLst xmlns:a="http://schemas.openxmlformats.org/drawingml/2006/main">
               <a:ext uri="{FF2B5EF4-FFF2-40B4-BE49-F238E27FC236}">
-                <a16:creationId xmlns:a16="http://schemas.microsoft.com/office/drawing/2014/main" id="{7B317938-9268-4386-8F2B-80199533CDBD}"/>
+                <a16:creationId xmlns:a16="http://schemas.microsoft.com/office/drawing/2014/main" id="{402418B5-6967-4012-9D3B-C25436F9674A}"/>
               </a:ext>
             </a:extLst>
           </p:cNvPr>
@@ -15532,7 +15532,7 @@
           <p:cNvPr id="5" name="">
             <a:extLst xmlns:a="http://schemas.openxmlformats.org/drawingml/2006/main">
               <a:ext uri="{FF2B5EF4-FFF2-40B4-BE49-F238E27FC236}">
-                <a16:creationId xmlns:a16="http://schemas.microsoft.com/office/drawing/2014/main" id="{5CC240F7-7E44-44A1-9AB4-6172A3ABBDFE}"/>
+                <a16:creationId xmlns:a16="http://schemas.microsoft.com/office/drawing/2014/main" id="{F32DAB80-57F4-4934-B5A9-399A1DB42508}"/>
               </a:ext>
             </a:extLst>
           </p:cNvPr>
@@ -15688,7 +15688,7 @@
           <p:cNvPr id="6" name="">
             <a:extLst xmlns:a="http://schemas.openxmlformats.org/drawingml/2006/main">
               <a:ext uri="{FF2B5EF4-FFF2-40B4-BE49-F238E27FC236}">
-                <a16:creationId xmlns:a16="http://schemas.microsoft.com/office/drawing/2014/main" id="{5326F1AC-8B70-413C-94F7-7C41046C97CC}"/>
+                <a16:creationId xmlns:a16="http://schemas.microsoft.com/office/drawing/2014/main" id="{3EA087AA-4E72-44E3-A163-8F1CBE1108BE}"/>
               </a:ext>
             </a:extLst>
           </p:cNvPr>
@@ -15844,7 +15844,7 @@
           <p:cNvPr id="7" name="">
             <a:extLst xmlns:a="http://schemas.openxmlformats.org/drawingml/2006/main">
               <a:ext uri="{FF2B5EF4-FFF2-40B4-BE49-F238E27FC236}">
-                <a16:creationId xmlns:a16="http://schemas.microsoft.com/office/drawing/2014/main" id="{92F75E00-FCFD-4A8D-B5B9-C88CF1033A1A}"/>
+                <a16:creationId xmlns:a16="http://schemas.microsoft.com/office/drawing/2014/main" id="{0983FA87-7E54-4ECE-A92C-A7A2230B9985}"/>
               </a:ext>
             </a:extLst>
           </p:cNvPr>
@@ -15998,7 +15998,7 @@
     </p:spTree>
     <p:extLst>
       <p:ext uri="{BB962C8B-B14F-4D97-AF65-F5344CB8AC3E}">
-        <p14:creationId xmlns:p14="http://schemas.microsoft.com/office/powerpoint/2010/main" val="878639850"/>
+        <p14:creationId xmlns:p14="http://schemas.microsoft.com/office/powerpoint/2010/main" val="459314839"/>
       </p:ext>
     </p:extLst>
   </p:cSld>
@@ -16029,7 +16029,7 @@
           <p:cNvPr id="8" name="">
             <a:extLst xmlns:a="http://schemas.openxmlformats.org/drawingml/2006/main">
               <a:ext uri="{FF2B5EF4-FFF2-40B4-BE49-F238E27FC236}">
-                <a16:creationId xmlns:a16="http://schemas.microsoft.com/office/drawing/2014/main" id="{56B87A91-332B-4961-BDED-C538A7631D80}"/>
+                <a16:creationId xmlns:a16="http://schemas.microsoft.com/office/drawing/2014/main" id="{DB8A1759-3B07-46B1-B422-0D4F840DFDA9}"/>
               </a:ext>
             </a:extLst>
           </p:cNvPr>
@@ -16185,7 +16185,7 @@
           <p:cNvPr id="2" name="">
             <a:extLst xmlns:a="http://schemas.openxmlformats.org/drawingml/2006/main">
               <a:ext uri="{FF2B5EF4-FFF2-40B4-BE49-F238E27FC236}">
-                <a16:creationId xmlns:a16="http://schemas.microsoft.com/office/drawing/2014/main" id="{358AEF2C-6E7A-4420-921E-C4E35385E6A9}"/>
+                <a16:creationId xmlns:a16="http://schemas.microsoft.com/office/drawing/2014/main" id="{2F4FC769-07EC-4578-B7CD-5F2EFCA25551}"/>
               </a:ext>
             </a:extLst>
           </p:cNvPr>
@@ -16341,7 +16341,7 @@
           <p:cNvPr id="3" name="">
             <a:extLst xmlns:a="http://schemas.openxmlformats.org/drawingml/2006/main">
               <a:ext uri="{FF2B5EF4-FFF2-40B4-BE49-F238E27FC236}">
-                <a16:creationId xmlns:a16="http://schemas.microsoft.com/office/drawing/2014/main" id="{2FCA6843-03E0-4D27-BFE7-FEE1E8B301C2}"/>
+                <a16:creationId xmlns:a16="http://schemas.microsoft.com/office/drawing/2014/main" id="{8C7BF60E-C55D-4975-835F-224BEF446013}"/>
               </a:ext>
             </a:extLst>
           </p:cNvPr>
@@ -16487,7 +16487,7 @@
                 <a:ea typeface="Arial"/>
                 <a:cs typeface="Arial"/>
               </a:rPr>
-              <a:t>Cold new-process first prediction: 1193.724 ms</a:t>
+              <a:t>Cold new-process initial prediction: 1193.724 ms</a:t>
             </a:r>
           </a:p>
         </p:txBody>
@@ -16497,7 +16497,7 @@
           <p:cNvPr id="4" name="">
             <a:extLst xmlns:a="http://schemas.openxmlformats.org/drawingml/2006/main">
               <a:ext uri="{FF2B5EF4-FFF2-40B4-BE49-F238E27FC236}">
-                <a16:creationId xmlns:a16="http://schemas.microsoft.com/office/drawing/2014/main" id="{80A4F925-57C8-41D3-B351-0EE44637C75D}"/>
+                <a16:creationId xmlns:a16="http://schemas.microsoft.com/office/drawing/2014/main" id="{E52087EA-53DD-400C-AE4A-7EE92C1FA74A}"/>
               </a:ext>
             </a:extLst>
           </p:cNvPr>
@@ -16653,7 +16653,7 @@
           <p:cNvPr id="5" name="">
             <a:extLst xmlns:a="http://schemas.openxmlformats.org/drawingml/2006/main">
               <a:ext uri="{FF2B5EF4-FFF2-40B4-BE49-F238E27FC236}">
-                <a16:creationId xmlns:a16="http://schemas.microsoft.com/office/drawing/2014/main" id="{D68F8F7B-A7D0-44C8-8083-D22BC5FD4A54}"/>
+                <a16:creationId xmlns:a16="http://schemas.microsoft.com/office/drawing/2014/main" id="{045998C2-78B0-4767-92F1-87E7103BB95F}"/>
               </a:ext>
             </a:extLst>
           </p:cNvPr>
@@ -16809,7 +16809,7 @@
           <p:cNvPr id="6" name="">
             <a:extLst xmlns:a="http://schemas.openxmlformats.org/drawingml/2006/main">
               <a:ext uri="{FF2B5EF4-FFF2-40B4-BE49-F238E27FC236}">
-                <a16:creationId xmlns:a16="http://schemas.microsoft.com/office/drawing/2014/main" id="{D70B2F8E-647A-4379-8B4F-1A0988FC8094}"/>
+                <a16:creationId xmlns:a16="http://schemas.microsoft.com/office/drawing/2014/main" id="{26098D02-AB57-4E79-8DF3-EFF38FD89416}"/>
               </a:ext>
             </a:extLst>
           </p:cNvPr>
@@ -16965,7 +16965,7 @@
           <p:cNvPr id="7" name="">
             <a:extLst xmlns:a="http://schemas.openxmlformats.org/drawingml/2006/main">
               <a:ext uri="{FF2B5EF4-FFF2-40B4-BE49-F238E27FC236}">
-                <a16:creationId xmlns:a16="http://schemas.microsoft.com/office/drawing/2014/main" id="{B5930492-2158-46BA-A5F9-CD8B4904B688}"/>
+                <a16:creationId xmlns:a16="http://schemas.microsoft.com/office/drawing/2014/main" id="{AC9029CF-5D52-4DDF-B45B-4381A9A46F4B}"/>
               </a:ext>
             </a:extLst>
           </p:cNvPr>
@@ -17119,7 +17119,7 @@
     </p:spTree>
     <p:extLst>
       <p:ext uri="{BB962C8B-B14F-4D97-AF65-F5344CB8AC3E}">
-        <p14:creationId xmlns:p14="http://schemas.microsoft.com/office/powerpoint/2010/main" val="1474253695"/>
+        <p14:creationId xmlns:p14="http://schemas.microsoft.com/office/powerpoint/2010/main" val="1936457318"/>
       </p:ext>
     </p:extLst>
   </p:cSld>
@@ -17150,7 +17150,7 @@
           <p:cNvPr id="8" name="">
             <a:extLst xmlns:a="http://schemas.openxmlformats.org/drawingml/2006/main">
               <a:ext uri="{FF2B5EF4-FFF2-40B4-BE49-F238E27FC236}">
-                <a16:creationId xmlns:a16="http://schemas.microsoft.com/office/drawing/2014/main" id="{68C6A2C7-A558-4946-BD75-194BAA42534B}"/>
+                <a16:creationId xmlns:a16="http://schemas.microsoft.com/office/drawing/2014/main" id="{72D2F3D6-6670-434B-904F-9A3708414F0F}"/>
               </a:ext>
             </a:extLst>
           </p:cNvPr>
@@ -17306,7 +17306,7 @@
           <p:cNvPr id="2" name="">
             <a:extLst xmlns:a="http://schemas.openxmlformats.org/drawingml/2006/main">
               <a:ext uri="{FF2B5EF4-FFF2-40B4-BE49-F238E27FC236}">
-                <a16:creationId xmlns:a16="http://schemas.microsoft.com/office/drawing/2014/main" id="{F7BF74BA-2B39-434D-8023-89B169F7EC65}"/>
+                <a16:creationId xmlns:a16="http://schemas.microsoft.com/office/drawing/2014/main" id="{F340629C-6EA4-49B2-9A90-4C82B516F1FF}"/>
               </a:ext>
             </a:extLst>
           </p:cNvPr>
@@ -17462,7 +17462,7 @@
           <p:cNvPr id="3" name="">
             <a:extLst xmlns:a="http://schemas.openxmlformats.org/drawingml/2006/main">
               <a:ext uri="{FF2B5EF4-FFF2-40B4-BE49-F238E27FC236}">
-                <a16:creationId xmlns:a16="http://schemas.microsoft.com/office/drawing/2014/main" id="{9DFF6E84-C8C5-46AE-A846-43CB272B765E}"/>
+                <a16:creationId xmlns:a16="http://schemas.microsoft.com/office/drawing/2014/main" id="{4E28F731-2D3C-404C-B435-3B970292DC29}"/>
               </a:ext>
             </a:extLst>
           </p:cNvPr>
@@ -17618,7 +17618,7 @@
           <p:cNvPr id="4" name="">
             <a:extLst xmlns:a="http://schemas.openxmlformats.org/drawingml/2006/main">
               <a:ext uri="{FF2B5EF4-FFF2-40B4-BE49-F238E27FC236}">
-                <a16:creationId xmlns:a16="http://schemas.microsoft.com/office/drawing/2014/main" id="{F96E21D5-3856-4F61-B00A-4189846B030E}"/>
+                <a16:creationId xmlns:a16="http://schemas.microsoft.com/office/drawing/2014/main" id="{6A24443D-4714-403E-BC4D-032BC4A03950}"/>
               </a:ext>
             </a:extLst>
           </p:cNvPr>
@@ -17774,7 +17774,7 @@
           <p:cNvPr id="5" name="">
             <a:extLst xmlns:a="http://schemas.openxmlformats.org/drawingml/2006/main">
               <a:ext uri="{FF2B5EF4-FFF2-40B4-BE49-F238E27FC236}">
-                <a16:creationId xmlns:a16="http://schemas.microsoft.com/office/drawing/2014/main" id="{ECA2BDE1-2FA3-4C14-90A0-307841342A43}"/>
+                <a16:creationId xmlns:a16="http://schemas.microsoft.com/office/drawing/2014/main" id="{58B87937-15FE-4C22-8B5C-EF5B8F7A9661}"/>
               </a:ext>
             </a:extLst>
           </p:cNvPr>
@@ -17930,7 +17930,7 @@
           <p:cNvPr id="6" name="">
             <a:extLst xmlns:a="http://schemas.openxmlformats.org/drawingml/2006/main">
               <a:ext uri="{FF2B5EF4-FFF2-40B4-BE49-F238E27FC236}">
-                <a16:creationId xmlns:a16="http://schemas.microsoft.com/office/drawing/2014/main" id="{876EBC07-AF78-4FF3-B07B-FD2FA8259EE6}"/>
+                <a16:creationId xmlns:a16="http://schemas.microsoft.com/office/drawing/2014/main" id="{3F584941-EE46-49D8-B9A9-3191518C75D9}"/>
               </a:ext>
             </a:extLst>
           </p:cNvPr>
@@ -18086,7 +18086,7 @@
           <p:cNvPr id="7" name="">
             <a:extLst xmlns:a="http://schemas.openxmlformats.org/drawingml/2006/main">
               <a:ext uri="{FF2B5EF4-FFF2-40B4-BE49-F238E27FC236}">
-                <a16:creationId xmlns:a16="http://schemas.microsoft.com/office/drawing/2014/main" id="{BA3E55CB-A23D-4693-977E-BE456B54BA28}"/>
+                <a16:creationId xmlns:a16="http://schemas.microsoft.com/office/drawing/2014/main" id="{40D09E48-2004-4C6F-9BA8-C073467B9D7D}"/>
               </a:ext>
             </a:extLst>
           </p:cNvPr>
@@ -18240,7 +18240,7 @@
     </p:spTree>
     <p:extLst>
       <p:ext uri="{BB962C8B-B14F-4D97-AF65-F5344CB8AC3E}">
-        <p14:creationId xmlns:p14="http://schemas.microsoft.com/office/powerpoint/2010/main" val="867676320"/>
+        <p14:creationId xmlns:p14="http://schemas.microsoft.com/office/powerpoint/2010/main" val="381402621"/>
       </p:ext>
     </p:extLst>
   </p:cSld>
@@ -18271,7 +18271,7 @@
           <p:cNvPr id="7" name="">
             <a:extLst xmlns:a="http://schemas.openxmlformats.org/drawingml/2006/main">
               <a:ext uri="{FF2B5EF4-FFF2-40B4-BE49-F238E27FC236}">
-                <a16:creationId xmlns:a16="http://schemas.microsoft.com/office/drawing/2014/main" id="{46A2B629-51E2-4820-92C9-6B2B2DD009C3}"/>
+                <a16:creationId xmlns:a16="http://schemas.microsoft.com/office/drawing/2014/main" id="{D0D1E2E1-064A-45BA-87D2-688D8DD2A721}"/>
               </a:ext>
             </a:extLst>
           </p:cNvPr>
@@ -18427,7 +18427,7 @@
           <p:cNvPr id="2" name="">
             <a:extLst xmlns:a="http://schemas.openxmlformats.org/drawingml/2006/main">
               <a:ext uri="{FF2B5EF4-FFF2-40B4-BE49-F238E27FC236}">
-                <a16:creationId xmlns:a16="http://schemas.microsoft.com/office/drawing/2014/main" id="{EAF499AF-1C64-4C55-8AE6-DD52C92A2FB9}"/>
+                <a16:creationId xmlns:a16="http://schemas.microsoft.com/office/drawing/2014/main" id="{6A59271C-BB22-409A-B597-751A6AD22F4B}"/>
               </a:ext>
             </a:extLst>
           </p:cNvPr>
@@ -18583,7 +18583,7 @@
           <p:cNvPr id="3" name="">
             <a:extLst xmlns:a="http://schemas.openxmlformats.org/drawingml/2006/main">
               <a:ext uri="{FF2B5EF4-FFF2-40B4-BE49-F238E27FC236}">
-                <a16:creationId xmlns:a16="http://schemas.microsoft.com/office/drawing/2014/main" id="{DFC2EB87-E04A-493A-BBCE-9808C6A9214B}"/>
+                <a16:creationId xmlns:a16="http://schemas.microsoft.com/office/drawing/2014/main" id="{22253BA2-F4EE-4A39-A2B9-9A72656E2783}"/>
               </a:ext>
             </a:extLst>
           </p:cNvPr>
@@ -18739,7 +18739,7 @@
           <p:cNvPr id="4" name="">
             <a:extLst xmlns:a="http://schemas.openxmlformats.org/drawingml/2006/main">
               <a:ext uri="{FF2B5EF4-FFF2-40B4-BE49-F238E27FC236}">
-                <a16:creationId xmlns:a16="http://schemas.microsoft.com/office/drawing/2014/main" id="{1D22C1B5-1E48-49B7-90BC-A0C5B32A93E8}"/>
+                <a16:creationId xmlns:a16="http://schemas.microsoft.com/office/drawing/2014/main" id="{F848F4B4-0777-48B2-9BCD-E48A90830F6C}"/>
               </a:ext>
             </a:extLst>
           </p:cNvPr>
@@ -18895,7 +18895,7 @@
           <p:cNvPr id="5" name="">
             <a:extLst xmlns:a="http://schemas.openxmlformats.org/drawingml/2006/main">
               <a:ext uri="{FF2B5EF4-FFF2-40B4-BE49-F238E27FC236}">
-                <a16:creationId xmlns:a16="http://schemas.microsoft.com/office/drawing/2014/main" id="{3EA63830-457F-4330-9F15-E5ECCD0A152D}"/>
+                <a16:creationId xmlns:a16="http://schemas.microsoft.com/office/drawing/2014/main" id="{65453711-7AA1-4EF2-9E92-9B900F6F708D}"/>
               </a:ext>
             </a:extLst>
           </p:cNvPr>
@@ -19051,7 +19051,7 @@
           <p:cNvPr id="6" name="">
             <a:extLst xmlns:a="http://schemas.openxmlformats.org/drawingml/2006/main">
               <a:ext uri="{FF2B5EF4-FFF2-40B4-BE49-F238E27FC236}">
-                <a16:creationId xmlns:a16="http://schemas.microsoft.com/office/drawing/2014/main" id="{3122A051-2E04-4E1C-9BB5-2E8E87E18336}"/>
+                <a16:creationId xmlns:a16="http://schemas.microsoft.com/office/drawing/2014/main" id="{94B33C88-A742-4277-B7A4-431E22A31103}"/>
               </a:ext>
             </a:extLst>
           </p:cNvPr>
@@ -19205,7 +19205,7 @@
     </p:spTree>
     <p:extLst>
       <p:ext uri="{BB962C8B-B14F-4D97-AF65-F5344CB8AC3E}">
-        <p14:creationId xmlns:p14="http://schemas.microsoft.com/office/powerpoint/2010/main" val="595232209"/>
+        <p14:creationId xmlns:p14="http://schemas.microsoft.com/office/powerpoint/2010/main" val="506677559"/>
       </p:ext>
     </p:extLst>
   </p:cSld>
@@ -19236,7 +19236,7 @@
           <p:cNvPr id="8" name="">
             <a:extLst xmlns:a="http://schemas.openxmlformats.org/drawingml/2006/main">
               <a:ext uri="{FF2B5EF4-FFF2-40B4-BE49-F238E27FC236}">
-                <a16:creationId xmlns:a16="http://schemas.microsoft.com/office/drawing/2014/main" id="{0F90D83F-B95E-4C7C-863D-05D8A729F6FA}"/>
+                <a16:creationId xmlns:a16="http://schemas.microsoft.com/office/drawing/2014/main" id="{2BB9CF59-05EE-4C45-9D15-08E4CB556079}"/>
               </a:ext>
             </a:extLst>
           </p:cNvPr>
@@ -19392,7 +19392,7 @@
           <p:cNvPr id="2" name="">
             <a:extLst xmlns:a="http://schemas.openxmlformats.org/drawingml/2006/main">
               <a:ext uri="{FF2B5EF4-FFF2-40B4-BE49-F238E27FC236}">
-                <a16:creationId xmlns:a16="http://schemas.microsoft.com/office/drawing/2014/main" id="{6BCCDEAE-9D67-442B-875D-289DEA98E12F}"/>
+                <a16:creationId xmlns:a16="http://schemas.microsoft.com/office/drawing/2014/main" id="{AEE7A2D5-1D5C-4D9E-9076-4F5E6CF7B3F2}"/>
               </a:ext>
             </a:extLst>
           </p:cNvPr>
@@ -19548,7 +19548,7 @@
           <p:cNvPr id="3" name="">
             <a:extLst xmlns:a="http://schemas.openxmlformats.org/drawingml/2006/main">
               <a:ext uri="{FF2B5EF4-FFF2-40B4-BE49-F238E27FC236}">
-                <a16:creationId xmlns:a16="http://schemas.microsoft.com/office/drawing/2014/main" id="{CBA6A5B8-9433-43E9-8386-1BFC4ED0B2A8}"/>
+                <a16:creationId xmlns:a16="http://schemas.microsoft.com/office/drawing/2014/main" id="{E6B4468D-CCE0-488A-901A-D92F4A9B7F8B}"/>
               </a:ext>
             </a:extLst>
           </p:cNvPr>
@@ -19704,7 +19704,7 @@
           <p:cNvPr id="4" name="">
             <a:extLst xmlns:a="http://schemas.openxmlformats.org/drawingml/2006/main">
               <a:ext uri="{FF2B5EF4-FFF2-40B4-BE49-F238E27FC236}">
-                <a16:creationId xmlns:a16="http://schemas.microsoft.com/office/drawing/2014/main" id="{F5751CF2-B531-4CDE-A0E6-13F00B3A06A4}"/>
+                <a16:creationId xmlns:a16="http://schemas.microsoft.com/office/drawing/2014/main" id="{95088BF4-6A37-4AEA-9E85-56129BF5C110}"/>
               </a:ext>
             </a:extLst>
           </p:cNvPr>
@@ -19860,7 +19860,7 @@
           <p:cNvPr id="5" name="">
             <a:extLst xmlns:a="http://schemas.openxmlformats.org/drawingml/2006/main">
               <a:ext uri="{FF2B5EF4-FFF2-40B4-BE49-F238E27FC236}">
-                <a16:creationId xmlns:a16="http://schemas.microsoft.com/office/drawing/2014/main" id="{0E8BA545-874B-438A-BA5E-6F08D982AACB}"/>
+                <a16:creationId xmlns:a16="http://schemas.microsoft.com/office/drawing/2014/main" id="{1A751308-941D-437E-9907-C87D31AA57AF}"/>
               </a:ext>
             </a:extLst>
           </p:cNvPr>
@@ -20016,7 +20016,7 @@
           <p:cNvPr id="6" name="">
             <a:extLst xmlns:a="http://schemas.openxmlformats.org/drawingml/2006/main">
               <a:ext uri="{FF2B5EF4-FFF2-40B4-BE49-F238E27FC236}">
-                <a16:creationId xmlns:a16="http://schemas.microsoft.com/office/drawing/2014/main" id="{0D9A6D9B-ECF7-4DDA-B738-443E90413E50}"/>
+                <a16:creationId xmlns:a16="http://schemas.microsoft.com/office/drawing/2014/main" id="{21096410-D829-4D9B-A283-40278CA9E033}"/>
               </a:ext>
             </a:extLst>
           </p:cNvPr>
@@ -20172,7 +20172,7 @@
           <p:cNvPr id="7" name="">
             <a:extLst xmlns:a="http://schemas.openxmlformats.org/drawingml/2006/main">
               <a:ext uri="{FF2B5EF4-FFF2-40B4-BE49-F238E27FC236}">
-                <a16:creationId xmlns:a16="http://schemas.microsoft.com/office/drawing/2014/main" id="{D2AEB6F3-B17D-49EA-A0DC-700F654802DE}"/>
+                <a16:creationId xmlns:a16="http://schemas.microsoft.com/office/drawing/2014/main" id="{86FF7AE9-B039-4704-8B97-7A0337B3EE10}"/>
               </a:ext>
             </a:extLst>
           </p:cNvPr>
@@ -20326,7 +20326,7 @@
     </p:spTree>
     <p:extLst>
       <p:ext uri="{BB962C8B-B14F-4D97-AF65-F5344CB8AC3E}">
-        <p14:creationId xmlns:p14="http://schemas.microsoft.com/office/powerpoint/2010/main" val="777649044"/>
+        <p14:creationId xmlns:p14="http://schemas.microsoft.com/office/powerpoint/2010/main" val="1780159518"/>
       </p:ext>
     </p:extLst>
   </p:cSld>
@@ -20357,7 +20357,7 @@
           <p:cNvPr id="8" name="">
             <a:extLst xmlns:a="http://schemas.openxmlformats.org/drawingml/2006/main">
               <a:ext uri="{FF2B5EF4-FFF2-40B4-BE49-F238E27FC236}">
-                <a16:creationId xmlns:a16="http://schemas.microsoft.com/office/drawing/2014/main" id="{F99A1E9B-1D61-4B87-BF25-BF56B14036C7}"/>
+                <a16:creationId xmlns:a16="http://schemas.microsoft.com/office/drawing/2014/main" id="{479E21B3-E9B7-4498-B50F-3CD2342FC762}"/>
               </a:ext>
             </a:extLst>
           </p:cNvPr>
@@ -20513,7 +20513,7 @@
           <p:cNvPr id="2" name="">
             <a:extLst xmlns:a="http://schemas.openxmlformats.org/drawingml/2006/main">
               <a:ext uri="{FF2B5EF4-FFF2-40B4-BE49-F238E27FC236}">
-                <a16:creationId xmlns:a16="http://schemas.microsoft.com/office/drawing/2014/main" id="{23546EC8-5684-4969-BCD8-48E22A3CB535}"/>
+                <a16:creationId xmlns:a16="http://schemas.microsoft.com/office/drawing/2014/main" id="{41300207-CB02-4CD3-BA63-DB41019409D0}"/>
               </a:ext>
             </a:extLst>
           </p:cNvPr>
@@ -20669,7 +20669,7 @@
           <p:cNvPr id="3" name="">
             <a:extLst xmlns:a="http://schemas.openxmlformats.org/drawingml/2006/main">
               <a:ext uri="{FF2B5EF4-FFF2-40B4-BE49-F238E27FC236}">
-                <a16:creationId xmlns:a16="http://schemas.microsoft.com/office/drawing/2014/main" id="{64082FBA-3D2E-4F68-A25C-F891111DC305}"/>
+                <a16:creationId xmlns:a16="http://schemas.microsoft.com/office/drawing/2014/main" id="{B4A8AE2C-88FD-4E75-8962-D13DC23D804A}"/>
               </a:ext>
             </a:extLst>
           </p:cNvPr>
@@ -20825,7 +20825,7 @@
           <p:cNvPr id="4" name="">
             <a:extLst xmlns:a="http://schemas.openxmlformats.org/drawingml/2006/main">
               <a:ext uri="{FF2B5EF4-FFF2-40B4-BE49-F238E27FC236}">
-                <a16:creationId xmlns:a16="http://schemas.microsoft.com/office/drawing/2014/main" id="{E37E4D35-84C7-4104-9FC2-3758C8BA9970}"/>
+                <a16:creationId xmlns:a16="http://schemas.microsoft.com/office/drawing/2014/main" id="{EB45967D-B30A-406B-ACFB-BA6FD25A08A7}"/>
               </a:ext>
             </a:extLst>
           </p:cNvPr>
@@ -20981,7 +20981,7 @@
           <p:cNvPr id="5" name="">
             <a:extLst xmlns:a="http://schemas.openxmlformats.org/drawingml/2006/main">
               <a:ext uri="{FF2B5EF4-FFF2-40B4-BE49-F238E27FC236}">
-                <a16:creationId xmlns:a16="http://schemas.microsoft.com/office/drawing/2014/main" id="{0BBA1641-5EFA-4B44-B637-F8F2559AE2E0}"/>
+                <a16:creationId xmlns:a16="http://schemas.microsoft.com/office/drawing/2014/main" id="{56A72CC3-4BE6-4ACE-B9F3-92CE8CC7C4AF}"/>
               </a:ext>
             </a:extLst>
           </p:cNvPr>
@@ -21137,7 +21137,7 @@
           <p:cNvPr id="6" name="">
             <a:extLst xmlns:a="http://schemas.openxmlformats.org/drawingml/2006/main">
               <a:ext uri="{FF2B5EF4-FFF2-40B4-BE49-F238E27FC236}">
-                <a16:creationId xmlns:a16="http://schemas.microsoft.com/office/drawing/2014/main" id="{55D3073D-0DB5-42C3-B17E-C47E54680BBE}"/>
+                <a16:creationId xmlns:a16="http://schemas.microsoft.com/office/drawing/2014/main" id="{DBD0EBFC-2CA7-4478-B6C4-A2CE01FC6582}"/>
               </a:ext>
             </a:extLst>
           </p:cNvPr>
@@ -21293,7 +21293,7 @@
           <p:cNvPr id="7" name="">
             <a:extLst xmlns:a="http://schemas.openxmlformats.org/drawingml/2006/main">
               <a:ext uri="{FF2B5EF4-FFF2-40B4-BE49-F238E27FC236}">
-                <a16:creationId xmlns:a16="http://schemas.microsoft.com/office/drawing/2014/main" id="{BAF6F0E5-E27D-4820-A77F-9A87A7F25667}"/>
+                <a16:creationId xmlns:a16="http://schemas.microsoft.com/office/drawing/2014/main" id="{72A5C78E-E3FD-4771-88E5-244C045ADA1E}"/>
               </a:ext>
             </a:extLst>
           </p:cNvPr>
@@ -21447,7 +21447,7 @@
     </p:spTree>
     <p:extLst>
       <p:ext uri="{BB962C8B-B14F-4D97-AF65-F5344CB8AC3E}">
-        <p14:creationId xmlns:p14="http://schemas.microsoft.com/office/powerpoint/2010/main" val="504867335"/>
+        <p14:creationId xmlns:p14="http://schemas.microsoft.com/office/powerpoint/2010/main" val="1471585109"/>
       </p:ext>
     </p:extLst>
   </p:cSld>
@@ -21478,7 +21478,7 @@
           <p:cNvPr id="8" name="">
             <a:extLst xmlns:a="http://schemas.openxmlformats.org/drawingml/2006/main">
               <a:ext uri="{FF2B5EF4-FFF2-40B4-BE49-F238E27FC236}">
-                <a16:creationId xmlns:a16="http://schemas.microsoft.com/office/drawing/2014/main" id="{90D43BA5-2F48-428C-818F-E7C66CBB34B6}"/>
+                <a16:creationId xmlns:a16="http://schemas.microsoft.com/office/drawing/2014/main" id="{0CAAC785-D3DE-40E3-9715-FC028C822D73}"/>
               </a:ext>
             </a:extLst>
           </p:cNvPr>
@@ -21634,7 +21634,7 @@
           <p:cNvPr id="2" name="">
             <a:extLst xmlns:a="http://schemas.openxmlformats.org/drawingml/2006/main">
               <a:ext uri="{FF2B5EF4-FFF2-40B4-BE49-F238E27FC236}">
-                <a16:creationId xmlns:a16="http://schemas.microsoft.com/office/drawing/2014/main" id="{439635B2-17AA-4842-9AD4-0388D8CA09BF}"/>
+                <a16:creationId xmlns:a16="http://schemas.microsoft.com/office/drawing/2014/main" id="{BBA518C1-C29D-4292-B9CD-8C5FDC6394E6}"/>
               </a:ext>
             </a:extLst>
           </p:cNvPr>
@@ -21790,7 +21790,7 @@
           <p:cNvPr id="3" name="">
             <a:extLst xmlns:a="http://schemas.openxmlformats.org/drawingml/2006/main">
               <a:ext uri="{FF2B5EF4-FFF2-40B4-BE49-F238E27FC236}">
-                <a16:creationId xmlns:a16="http://schemas.microsoft.com/office/drawing/2014/main" id="{43145585-75FE-4F34-BB11-197C3E8D5C60}"/>
+                <a16:creationId xmlns:a16="http://schemas.microsoft.com/office/drawing/2014/main" id="{3E6C169A-A1AA-4C54-9836-28B53CE36294}"/>
               </a:ext>
             </a:extLst>
           </p:cNvPr>
@@ -21946,7 +21946,7 @@
           <p:cNvPr id="4" name="">
             <a:extLst xmlns:a="http://schemas.openxmlformats.org/drawingml/2006/main">
               <a:ext uri="{FF2B5EF4-FFF2-40B4-BE49-F238E27FC236}">
-                <a16:creationId xmlns:a16="http://schemas.microsoft.com/office/drawing/2014/main" id="{C01B894C-2768-427D-83F1-3B08CB74ADF9}"/>
+                <a16:creationId xmlns:a16="http://schemas.microsoft.com/office/drawing/2014/main" id="{F0BECE50-1D2E-40D1-B813-DFA130A1BDA3}"/>
               </a:ext>
             </a:extLst>
           </p:cNvPr>
@@ -22102,7 +22102,7 @@
           <p:cNvPr id="5" name="">
             <a:extLst xmlns:a="http://schemas.openxmlformats.org/drawingml/2006/main">
               <a:ext uri="{FF2B5EF4-FFF2-40B4-BE49-F238E27FC236}">
-                <a16:creationId xmlns:a16="http://schemas.microsoft.com/office/drawing/2014/main" id="{4156F0C3-BB92-4792-A1F1-63949C9FE25F}"/>
+                <a16:creationId xmlns:a16="http://schemas.microsoft.com/office/drawing/2014/main" id="{C837D43D-7EE4-425C-AD85-661B5DA6EA4F}"/>
               </a:ext>
             </a:extLst>
           </p:cNvPr>
@@ -22258,7 +22258,7 @@
           <p:cNvPr id="6" name="">
             <a:extLst xmlns:a="http://schemas.openxmlformats.org/drawingml/2006/main">
               <a:ext uri="{FF2B5EF4-FFF2-40B4-BE49-F238E27FC236}">
-                <a16:creationId xmlns:a16="http://schemas.microsoft.com/office/drawing/2014/main" id="{3E2A3AC3-C354-4265-8130-AAEFDC171B84}"/>
+                <a16:creationId xmlns:a16="http://schemas.microsoft.com/office/drawing/2014/main" id="{1135387B-EF06-4575-A5F2-2F3F3E4D8D29}"/>
               </a:ext>
             </a:extLst>
           </p:cNvPr>
@@ -22414,7 +22414,7 @@
           <p:cNvPr id="7" name="">
             <a:extLst xmlns:a="http://schemas.openxmlformats.org/drawingml/2006/main">
               <a:ext uri="{FF2B5EF4-FFF2-40B4-BE49-F238E27FC236}">
-                <a16:creationId xmlns:a16="http://schemas.microsoft.com/office/drawing/2014/main" id="{C884E51D-D810-4770-8736-BC8655240DB2}"/>
+                <a16:creationId xmlns:a16="http://schemas.microsoft.com/office/drawing/2014/main" id="{766C94B6-CC36-4F27-B66D-B7C1753E8B1A}"/>
               </a:ext>
             </a:extLst>
           </p:cNvPr>
@@ -22568,7 +22568,7 @@
     </p:spTree>
     <p:extLst>
       <p:ext uri="{BB962C8B-B14F-4D97-AF65-F5344CB8AC3E}">
-        <p14:creationId xmlns:p14="http://schemas.microsoft.com/office/powerpoint/2010/main" val="1907307906"/>
+        <p14:creationId xmlns:p14="http://schemas.microsoft.com/office/powerpoint/2010/main" val="1433930193"/>
       </p:ext>
     </p:extLst>
   </p:cSld>
@@ -22599,7 +22599,7 @@
           <p:cNvPr id="8" name="">
             <a:extLst xmlns:a="http://schemas.openxmlformats.org/drawingml/2006/main">
               <a:ext uri="{FF2B5EF4-FFF2-40B4-BE49-F238E27FC236}">
-                <a16:creationId xmlns:a16="http://schemas.microsoft.com/office/drawing/2014/main" id="{31CA82B7-2310-4592-95F0-94646B6C762B}"/>
+                <a16:creationId xmlns:a16="http://schemas.microsoft.com/office/drawing/2014/main" id="{F3E8F2F1-EA07-40F5-8A3C-B010E4C1CCD4}"/>
               </a:ext>
             </a:extLst>
           </p:cNvPr>
@@ -22755,7 +22755,7 @@
           <p:cNvPr id="2" name="">
             <a:extLst xmlns:a="http://schemas.openxmlformats.org/drawingml/2006/main">
               <a:ext uri="{FF2B5EF4-FFF2-40B4-BE49-F238E27FC236}">
-                <a16:creationId xmlns:a16="http://schemas.microsoft.com/office/drawing/2014/main" id="{89BAF06D-F16B-43E9-B734-93889B26D1D2}"/>
+                <a16:creationId xmlns:a16="http://schemas.microsoft.com/office/drawing/2014/main" id="{5DCFE744-C778-4A67-9BA9-8674F649BE91}"/>
               </a:ext>
             </a:extLst>
           </p:cNvPr>
@@ -22911,7 +22911,7 @@
           <p:cNvPr id="3" name="">
             <a:extLst xmlns:a="http://schemas.openxmlformats.org/drawingml/2006/main">
               <a:ext uri="{FF2B5EF4-FFF2-40B4-BE49-F238E27FC236}">
-                <a16:creationId xmlns:a16="http://schemas.microsoft.com/office/drawing/2014/main" id="{A8774AF3-36A1-483F-B949-00E9358E2233}"/>
+                <a16:creationId xmlns:a16="http://schemas.microsoft.com/office/drawing/2014/main" id="{FDE3F791-D256-4A7A-9897-F0B2683F7880}"/>
               </a:ext>
             </a:extLst>
           </p:cNvPr>
@@ -23067,7 +23067,7 @@
           <p:cNvPr id="4" name="">
             <a:extLst xmlns:a="http://schemas.openxmlformats.org/drawingml/2006/main">
               <a:ext uri="{FF2B5EF4-FFF2-40B4-BE49-F238E27FC236}">
-                <a16:creationId xmlns:a16="http://schemas.microsoft.com/office/drawing/2014/main" id="{F9E5AA31-C254-4724-9FB1-63ACD00AD640}"/>
+                <a16:creationId xmlns:a16="http://schemas.microsoft.com/office/drawing/2014/main" id="{29F658D6-8346-4797-AE47-A3223EF882C7}"/>
               </a:ext>
             </a:extLst>
           </p:cNvPr>
@@ -23223,7 +23223,7 @@
           <p:cNvPr id="5" name="">
             <a:extLst xmlns:a="http://schemas.openxmlformats.org/drawingml/2006/main">
               <a:ext uri="{FF2B5EF4-FFF2-40B4-BE49-F238E27FC236}">
-                <a16:creationId xmlns:a16="http://schemas.microsoft.com/office/drawing/2014/main" id="{C0179B1F-9234-4ECF-B6D6-55FD190CEA3F}"/>
+                <a16:creationId xmlns:a16="http://schemas.microsoft.com/office/drawing/2014/main" id="{999CAC97-8A48-4AD1-9A38-7B8323DB1F4A}"/>
               </a:ext>
             </a:extLst>
           </p:cNvPr>
@@ -23379,7 +23379,7 @@
           <p:cNvPr id="6" name="">
             <a:extLst xmlns:a="http://schemas.openxmlformats.org/drawingml/2006/main">
               <a:ext uri="{FF2B5EF4-FFF2-40B4-BE49-F238E27FC236}">
-                <a16:creationId xmlns:a16="http://schemas.microsoft.com/office/drawing/2014/main" id="{4583AA6E-51D6-4EC2-BFAE-2963D3548A40}"/>
+                <a16:creationId xmlns:a16="http://schemas.microsoft.com/office/drawing/2014/main" id="{8F371EB0-8A23-4889-93DC-A1ADEE87CFEC}"/>
               </a:ext>
             </a:extLst>
           </p:cNvPr>
@@ -23535,7 +23535,7 @@
           <p:cNvPr id="7" name="">
             <a:extLst xmlns:a="http://schemas.openxmlformats.org/drawingml/2006/main">
               <a:ext uri="{FF2B5EF4-FFF2-40B4-BE49-F238E27FC236}">
-                <a16:creationId xmlns:a16="http://schemas.microsoft.com/office/drawing/2014/main" id="{330948C4-F876-4F13-950B-B70424DD30B7}"/>
+                <a16:creationId xmlns:a16="http://schemas.microsoft.com/office/drawing/2014/main" id="{B6EB87E2-81ED-46AF-B53B-2EFA366E7963}"/>
               </a:ext>
             </a:extLst>
           </p:cNvPr>
@@ -23689,7 +23689,7 @@
     </p:spTree>
     <p:extLst>
       <p:ext uri="{BB962C8B-B14F-4D97-AF65-F5344CB8AC3E}">
-        <p14:creationId xmlns:p14="http://schemas.microsoft.com/office/powerpoint/2010/main" val="1804037127"/>
+        <p14:creationId xmlns:p14="http://schemas.microsoft.com/office/powerpoint/2010/main" val="93797134"/>
       </p:ext>
     </p:extLst>
   </p:cSld>
@@ -23720,7 +23720,7 @@
           <p:cNvPr id="8" name="">
             <a:extLst xmlns:a="http://schemas.openxmlformats.org/drawingml/2006/main">
               <a:ext uri="{FF2B5EF4-FFF2-40B4-BE49-F238E27FC236}">
-                <a16:creationId xmlns:a16="http://schemas.microsoft.com/office/drawing/2014/main" id="{F7A698AD-5425-4AB2-8B23-EBF26A30EED6}"/>
+                <a16:creationId xmlns:a16="http://schemas.microsoft.com/office/drawing/2014/main" id="{D995FDF6-E57A-456C-B5C9-C08D7F15902A}"/>
               </a:ext>
             </a:extLst>
           </p:cNvPr>
@@ -23876,7 +23876,7 @@
           <p:cNvPr id="2" name="">
             <a:extLst xmlns:a="http://schemas.openxmlformats.org/drawingml/2006/main">
               <a:ext uri="{FF2B5EF4-FFF2-40B4-BE49-F238E27FC236}">
-                <a16:creationId xmlns:a16="http://schemas.microsoft.com/office/drawing/2014/main" id="{1191A237-2F03-4C00-9781-56008F42590D}"/>
+                <a16:creationId xmlns:a16="http://schemas.microsoft.com/office/drawing/2014/main" id="{3E03BE48-CF9C-4060-A989-00C6064020E0}"/>
               </a:ext>
             </a:extLst>
           </p:cNvPr>
@@ -24032,7 +24032,7 @@
           <p:cNvPr id="3" name="">
             <a:extLst xmlns:a="http://schemas.openxmlformats.org/drawingml/2006/main">
               <a:ext uri="{FF2B5EF4-FFF2-40B4-BE49-F238E27FC236}">
-                <a16:creationId xmlns:a16="http://schemas.microsoft.com/office/drawing/2014/main" id="{204ADBB3-7A69-4731-97DF-57BF215EBE02}"/>
+                <a16:creationId xmlns:a16="http://schemas.microsoft.com/office/drawing/2014/main" id="{26F3D015-C49A-45AF-AD1E-4D173F399B39}"/>
               </a:ext>
             </a:extLst>
           </p:cNvPr>
@@ -24188,7 +24188,7 @@
           <p:cNvPr id="4" name="">
             <a:extLst xmlns:a="http://schemas.openxmlformats.org/drawingml/2006/main">
               <a:ext uri="{FF2B5EF4-FFF2-40B4-BE49-F238E27FC236}">
-                <a16:creationId xmlns:a16="http://schemas.microsoft.com/office/drawing/2014/main" id="{64E1F768-E5E3-4C42-890B-6CC4B641CD0B}"/>
+                <a16:creationId xmlns:a16="http://schemas.microsoft.com/office/drawing/2014/main" id="{E8FA496E-0069-4D41-B66C-5F64FF0456BA}"/>
               </a:ext>
             </a:extLst>
           </p:cNvPr>
@@ -24344,7 +24344,7 @@
           <p:cNvPr id="5" name="">
             <a:extLst xmlns:a="http://schemas.openxmlformats.org/drawingml/2006/main">
               <a:ext uri="{FF2B5EF4-FFF2-40B4-BE49-F238E27FC236}">
-                <a16:creationId xmlns:a16="http://schemas.microsoft.com/office/drawing/2014/main" id="{31786115-2CF5-4383-A3DA-29924C4A4C4D}"/>
+                <a16:creationId xmlns:a16="http://schemas.microsoft.com/office/drawing/2014/main" id="{5A2D7B6F-AC6B-4E73-AD55-D3FC0379C5CE}"/>
               </a:ext>
             </a:extLst>
           </p:cNvPr>
@@ -24500,7 +24500,7 @@
           <p:cNvPr id="6" name="">
             <a:extLst xmlns:a="http://schemas.openxmlformats.org/drawingml/2006/main">
               <a:ext uri="{FF2B5EF4-FFF2-40B4-BE49-F238E27FC236}">
-                <a16:creationId xmlns:a16="http://schemas.microsoft.com/office/drawing/2014/main" id="{630C1D4F-4159-4D49-87AD-DEA86A0EFDB7}"/>
+                <a16:creationId xmlns:a16="http://schemas.microsoft.com/office/drawing/2014/main" id="{0A6D6943-C68B-4752-B542-7286E4351673}"/>
               </a:ext>
             </a:extLst>
           </p:cNvPr>
@@ -24656,7 +24656,7 @@
           <p:cNvPr id="7" name="">
             <a:extLst xmlns:a="http://schemas.openxmlformats.org/drawingml/2006/main">
               <a:ext uri="{FF2B5EF4-FFF2-40B4-BE49-F238E27FC236}">
-                <a16:creationId xmlns:a16="http://schemas.microsoft.com/office/drawing/2014/main" id="{6BA568B5-5BE0-41F2-A99F-98E8F6859BA1}"/>
+                <a16:creationId xmlns:a16="http://schemas.microsoft.com/office/drawing/2014/main" id="{99FC65B4-2D07-4735-947C-607C10066BB1}"/>
               </a:ext>
             </a:extLst>
           </p:cNvPr>
@@ -24810,7 +24810,7 @@
     </p:spTree>
     <p:extLst>
       <p:ext uri="{BB962C8B-B14F-4D97-AF65-F5344CB8AC3E}">
-        <p14:creationId xmlns:p14="http://schemas.microsoft.com/office/powerpoint/2010/main" val="143155237"/>
+        <p14:creationId xmlns:p14="http://schemas.microsoft.com/office/powerpoint/2010/main" val="1525196563"/>
       </p:ext>
     </p:extLst>
   </p:cSld>
@@ -24841,7 +24841,7 @@
           <p:cNvPr id="8" name="">
             <a:extLst xmlns:a="http://schemas.openxmlformats.org/drawingml/2006/main">
               <a:ext uri="{FF2B5EF4-FFF2-40B4-BE49-F238E27FC236}">
-                <a16:creationId xmlns:a16="http://schemas.microsoft.com/office/drawing/2014/main" id="{21F4AB8A-6B0E-42C6-9080-8147B2E106F2}"/>
+                <a16:creationId xmlns:a16="http://schemas.microsoft.com/office/drawing/2014/main" id="{2E7D9948-3626-4530-A8DF-E03A59AAE68C}"/>
               </a:ext>
             </a:extLst>
           </p:cNvPr>
@@ -24997,7 +24997,7 @@
           <p:cNvPr id="2" name="">
             <a:extLst xmlns:a="http://schemas.openxmlformats.org/drawingml/2006/main">
               <a:ext uri="{FF2B5EF4-FFF2-40B4-BE49-F238E27FC236}">
-                <a16:creationId xmlns:a16="http://schemas.microsoft.com/office/drawing/2014/main" id="{48C4D24A-6376-440B-A567-D63B7C142CFB}"/>
+                <a16:creationId xmlns:a16="http://schemas.microsoft.com/office/drawing/2014/main" id="{8612B0EE-2AB6-4726-A6E0-077099409836}"/>
               </a:ext>
             </a:extLst>
           </p:cNvPr>
@@ -25153,7 +25153,7 @@
           <p:cNvPr id="3" name="">
             <a:extLst xmlns:a="http://schemas.openxmlformats.org/drawingml/2006/main">
               <a:ext uri="{FF2B5EF4-FFF2-40B4-BE49-F238E27FC236}">
-                <a16:creationId xmlns:a16="http://schemas.microsoft.com/office/drawing/2014/main" id="{B8E5373C-16F0-47E3-956D-E60ED9947C24}"/>
+                <a16:creationId xmlns:a16="http://schemas.microsoft.com/office/drawing/2014/main" id="{B80394FA-FAF5-406D-B90E-E4BA48061ABE}"/>
               </a:ext>
             </a:extLst>
           </p:cNvPr>
@@ -25309,7 +25309,7 @@
           <p:cNvPr id="4" name="">
             <a:extLst xmlns:a="http://schemas.openxmlformats.org/drawingml/2006/main">
               <a:ext uri="{FF2B5EF4-FFF2-40B4-BE49-F238E27FC236}">
-                <a16:creationId xmlns:a16="http://schemas.microsoft.com/office/drawing/2014/main" id="{87DA73D8-7598-4395-8CE1-2F6CC8B9352C}"/>
+                <a16:creationId xmlns:a16="http://schemas.microsoft.com/office/drawing/2014/main" id="{9A5D4288-31DC-41F9-9341-C4A88CDD9C36}"/>
               </a:ext>
             </a:extLst>
           </p:cNvPr>
@@ -25465,7 +25465,7 @@
           <p:cNvPr id="5" name="">
             <a:extLst xmlns:a="http://schemas.openxmlformats.org/drawingml/2006/main">
               <a:ext uri="{FF2B5EF4-FFF2-40B4-BE49-F238E27FC236}">
-                <a16:creationId xmlns:a16="http://schemas.microsoft.com/office/drawing/2014/main" id="{86120630-54E0-4D17-AFB5-4447A597E184}"/>
+                <a16:creationId xmlns:a16="http://schemas.microsoft.com/office/drawing/2014/main" id="{05B39095-0772-4EE4-9EAB-9D63EEE86AF2}"/>
               </a:ext>
             </a:extLst>
           </p:cNvPr>
@@ -25621,7 +25621,7 @@
           <p:cNvPr id="6" name="">
             <a:extLst xmlns:a="http://schemas.openxmlformats.org/drawingml/2006/main">
               <a:ext uri="{FF2B5EF4-FFF2-40B4-BE49-F238E27FC236}">
-                <a16:creationId xmlns:a16="http://schemas.microsoft.com/office/drawing/2014/main" id="{5E79ACD1-38A5-4E3C-B991-78025322AA38}"/>
+                <a16:creationId xmlns:a16="http://schemas.microsoft.com/office/drawing/2014/main" id="{E9C8C777-984B-4724-9ABA-1BA415C751D4}"/>
               </a:ext>
             </a:extLst>
           </p:cNvPr>
@@ -25777,7 +25777,7 @@
           <p:cNvPr id="7" name="">
             <a:extLst xmlns:a="http://schemas.openxmlformats.org/drawingml/2006/main">
               <a:ext uri="{FF2B5EF4-FFF2-40B4-BE49-F238E27FC236}">
-                <a16:creationId xmlns:a16="http://schemas.microsoft.com/office/drawing/2014/main" id="{F608655A-BFE3-4EAE-8670-2BC0DBA4ED12}"/>
+                <a16:creationId xmlns:a16="http://schemas.microsoft.com/office/drawing/2014/main" id="{AB7BADFD-59F5-4516-96BA-A68D5770DFB0}"/>
               </a:ext>
             </a:extLst>
           </p:cNvPr>
@@ -25931,7 +25931,7 @@
     </p:spTree>
     <p:extLst>
       <p:ext uri="{BB962C8B-B14F-4D97-AF65-F5344CB8AC3E}">
-        <p14:creationId xmlns:p14="http://schemas.microsoft.com/office/powerpoint/2010/main" val="1398598496"/>
+        <p14:creationId xmlns:p14="http://schemas.microsoft.com/office/powerpoint/2010/main" val="793116384"/>
       </p:ext>
     </p:extLst>
   </p:cSld>
@@ -25962,7 +25962,7 @@
           <p:cNvPr id="8" name="">
             <a:extLst xmlns:a="http://schemas.openxmlformats.org/drawingml/2006/main">
               <a:ext uri="{FF2B5EF4-FFF2-40B4-BE49-F238E27FC236}">
-                <a16:creationId xmlns:a16="http://schemas.microsoft.com/office/drawing/2014/main" id="{FFA80023-9455-4EAA-9A64-742D3036E9E1}"/>
+                <a16:creationId xmlns:a16="http://schemas.microsoft.com/office/drawing/2014/main" id="{5B07F227-AEA3-4DF0-9AC6-1699B194234C}"/>
               </a:ext>
             </a:extLst>
           </p:cNvPr>
@@ -26118,7 +26118,7 @@
           <p:cNvPr id="2" name="">
             <a:extLst xmlns:a="http://schemas.openxmlformats.org/drawingml/2006/main">
               <a:ext uri="{FF2B5EF4-FFF2-40B4-BE49-F238E27FC236}">
-                <a16:creationId xmlns:a16="http://schemas.microsoft.com/office/drawing/2014/main" id="{0632D1E5-4339-4814-A6ED-51A9ED000CA2}"/>
+                <a16:creationId xmlns:a16="http://schemas.microsoft.com/office/drawing/2014/main" id="{75F9B26B-AE1E-485D-9962-9F71DD6AEDD3}"/>
               </a:ext>
             </a:extLst>
           </p:cNvPr>
@@ -26274,7 +26274,7 @@
           <p:cNvPr id="3" name="">
             <a:extLst xmlns:a="http://schemas.openxmlformats.org/drawingml/2006/main">
               <a:ext uri="{FF2B5EF4-FFF2-40B4-BE49-F238E27FC236}">
-                <a16:creationId xmlns:a16="http://schemas.microsoft.com/office/drawing/2014/main" id="{302C2983-C1F8-4886-A04D-6C3479FB8E6D}"/>
+                <a16:creationId xmlns:a16="http://schemas.microsoft.com/office/drawing/2014/main" id="{E9F9D823-7179-4677-B434-B694496337BA}"/>
               </a:ext>
             </a:extLst>
           </p:cNvPr>
@@ -26430,7 +26430,7 @@
           <p:cNvPr id="4" name="">
             <a:extLst xmlns:a="http://schemas.openxmlformats.org/drawingml/2006/main">
               <a:ext uri="{FF2B5EF4-FFF2-40B4-BE49-F238E27FC236}">
-                <a16:creationId xmlns:a16="http://schemas.microsoft.com/office/drawing/2014/main" id="{C80437FB-C5D5-4C04-ABBF-C478375BE93F}"/>
+                <a16:creationId xmlns:a16="http://schemas.microsoft.com/office/drawing/2014/main" id="{DE6147D6-33F1-49A0-9BF5-5C2D55D314FC}"/>
               </a:ext>
             </a:extLst>
           </p:cNvPr>
@@ -26586,7 +26586,7 @@
           <p:cNvPr id="5" name="">
             <a:extLst xmlns:a="http://schemas.openxmlformats.org/drawingml/2006/main">
               <a:ext uri="{FF2B5EF4-FFF2-40B4-BE49-F238E27FC236}">
-                <a16:creationId xmlns:a16="http://schemas.microsoft.com/office/drawing/2014/main" id="{0EBFD9CF-CCD4-4BAD-B5A0-8DEC1255189F}"/>
+                <a16:creationId xmlns:a16="http://schemas.microsoft.com/office/drawing/2014/main" id="{9E5C5BC1-4EDE-4E45-A635-6AC50ED3EA8B}"/>
               </a:ext>
             </a:extLst>
           </p:cNvPr>
@@ -26742,7 +26742,7 @@
           <p:cNvPr id="6" name="">
             <a:extLst xmlns:a="http://schemas.openxmlformats.org/drawingml/2006/main">
               <a:ext uri="{FF2B5EF4-FFF2-40B4-BE49-F238E27FC236}">
-                <a16:creationId xmlns:a16="http://schemas.microsoft.com/office/drawing/2014/main" id="{663A4650-03A6-4C7D-9BD5-30BA8681221A}"/>
+                <a16:creationId xmlns:a16="http://schemas.microsoft.com/office/drawing/2014/main" id="{007C49A5-825C-4093-9486-677AB0A2FB7B}"/>
               </a:ext>
             </a:extLst>
           </p:cNvPr>
@@ -26898,7 +26898,7 @@
           <p:cNvPr id="7" name="">
             <a:extLst xmlns:a="http://schemas.openxmlformats.org/drawingml/2006/main">
               <a:ext uri="{FF2B5EF4-FFF2-40B4-BE49-F238E27FC236}">
-                <a16:creationId xmlns:a16="http://schemas.microsoft.com/office/drawing/2014/main" id="{BB9C9801-E229-484F-A80A-11825A77AB0D}"/>
+                <a16:creationId xmlns:a16="http://schemas.microsoft.com/office/drawing/2014/main" id="{1BCB97E8-C99F-482E-8216-863740A49076}"/>
               </a:ext>
             </a:extLst>
           </p:cNvPr>
@@ -27052,7 +27052,7 @@
     </p:spTree>
     <p:extLst>
       <p:ext uri="{BB962C8B-B14F-4D97-AF65-F5344CB8AC3E}">
-        <p14:creationId xmlns:p14="http://schemas.microsoft.com/office/powerpoint/2010/main" val="1796960292"/>
+        <p14:creationId xmlns:p14="http://schemas.microsoft.com/office/powerpoint/2010/main" val="1837745739"/>
       </p:ext>
     </p:extLst>
   </p:cSld>
@@ -27083,7 +27083,7 @@
           <p:cNvPr id="7" name="">
             <a:extLst xmlns:a="http://schemas.openxmlformats.org/drawingml/2006/main">
               <a:ext uri="{FF2B5EF4-FFF2-40B4-BE49-F238E27FC236}">
-                <a16:creationId xmlns:a16="http://schemas.microsoft.com/office/drawing/2014/main" id="{E2A5147B-4B58-4D0B-87AF-FC381DB49CC7}"/>
+                <a16:creationId xmlns:a16="http://schemas.microsoft.com/office/drawing/2014/main" id="{D2001B15-54CA-4F82-8855-AEA500CB90D6}"/>
               </a:ext>
             </a:extLst>
           </p:cNvPr>
@@ -27239,7 +27239,7 @@
           <p:cNvPr id="2" name="">
             <a:extLst xmlns:a="http://schemas.openxmlformats.org/drawingml/2006/main">
               <a:ext uri="{FF2B5EF4-FFF2-40B4-BE49-F238E27FC236}">
-                <a16:creationId xmlns:a16="http://schemas.microsoft.com/office/drawing/2014/main" id="{0E4B5C08-C37F-43BD-9246-B91C5A5AA4A9}"/>
+                <a16:creationId xmlns:a16="http://schemas.microsoft.com/office/drawing/2014/main" id="{A9C94C7B-D2B8-450B-B18D-BB81892F2D0C}"/>
               </a:ext>
             </a:extLst>
           </p:cNvPr>
@@ -27395,7 +27395,7 @@
           <p:cNvPr id="3" name="">
             <a:extLst xmlns:a="http://schemas.openxmlformats.org/drawingml/2006/main">
               <a:ext uri="{FF2B5EF4-FFF2-40B4-BE49-F238E27FC236}">
-                <a16:creationId xmlns:a16="http://schemas.microsoft.com/office/drawing/2014/main" id="{55D864A9-62B6-4A13-A5A3-14A2CFEF276F}"/>
+                <a16:creationId xmlns:a16="http://schemas.microsoft.com/office/drawing/2014/main" id="{39E2DC12-DD24-4908-BA78-E1F8074E471A}"/>
               </a:ext>
             </a:extLst>
           </p:cNvPr>
@@ -27551,7 +27551,7 @@
           <p:cNvPr id="4" name="">
             <a:extLst xmlns:a="http://schemas.openxmlformats.org/drawingml/2006/main">
               <a:ext uri="{FF2B5EF4-FFF2-40B4-BE49-F238E27FC236}">
-                <a16:creationId xmlns:a16="http://schemas.microsoft.com/office/drawing/2014/main" id="{44AE1921-E24D-4B51-97F8-058A40274D59}"/>
+                <a16:creationId xmlns:a16="http://schemas.microsoft.com/office/drawing/2014/main" id="{4833E659-DCEF-48D7-A544-54F8D8F16261}"/>
               </a:ext>
             </a:extLst>
           </p:cNvPr>
@@ -27707,7 +27707,7 @@
           <p:cNvPr id="5" name="">
             <a:extLst xmlns:a="http://schemas.openxmlformats.org/drawingml/2006/main">
               <a:ext uri="{FF2B5EF4-FFF2-40B4-BE49-F238E27FC236}">
-                <a16:creationId xmlns:a16="http://schemas.microsoft.com/office/drawing/2014/main" id="{A93B64E6-3ECB-4FA3-86AD-B5349D4A0CDD}"/>
+                <a16:creationId xmlns:a16="http://schemas.microsoft.com/office/drawing/2014/main" id="{029C7EED-699F-4BCF-A2C8-594DE9CC41E3}"/>
               </a:ext>
             </a:extLst>
           </p:cNvPr>
@@ -27863,7 +27863,7 @@
           <p:cNvPr id="6" name="">
             <a:extLst xmlns:a="http://schemas.openxmlformats.org/drawingml/2006/main">
               <a:ext uri="{FF2B5EF4-FFF2-40B4-BE49-F238E27FC236}">
-                <a16:creationId xmlns:a16="http://schemas.microsoft.com/office/drawing/2014/main" id="{ADC5D96F-A676-41F0-A776-E79604BD94FF}"/>
+                <a16:creationId xmlns:a16="http://schemas.microsoft.com/office/drawing/2014/main" id="{8FCF21C3-F649-43F3-8532-A22FC748C184}"/>
               </a:ext>
             </a:extLst>
           </p:cNvPr>
@@ -28017,7 +28017,7 @@
     </p:spTree>
     <p:extLst>
       <p:ext uri="{BB962C8B-B14F-4D97-AF65-F5344CB8AC3E}">
-        <p14:creationId xmlns:p14="http://schemas.microsoft.com/office/powerpoint/2010/main" val="225277833"/>
+        <p14:creationId xmlns:p14="http://schemas.microsoft.com/office/powerpoint/2010/main" val="2069454096"/>
       </p:ext>
     </p:extLst>
   </p:cSld>
@@ -28045,10 +28045,10 @@
       </p:grpSpPr>
       <p:cxnSp>
         <p:nvCxnSpPr>
-          <p:cNvPr id="14" name="">
+          <p:cNvPr id="15" name="">
             <a:extLst xmlns:a="http://schemas.openxmlformats.org/drawingml/2006/main">
               <a:ext uri="{FF2B5EF4-FFF2-40B4-BE49-F238E27FC236}">
-                <a16:creationId xmlns:a16="http://schemas.microsoft.com/office/drawing/2014/main" id="{770D5E9A-6B6B-4868-911B-F00B100C11EE}"/>
+                <a16:creationId xmlns:a16="http://schemas.microsoft.com/office/drawing/2014/main" id="{87E334BB-A23C-4FFA-A3FA-FB7339BE2709}"/>
               </a:ext>
             </a:extLst>
           </p:cNvPr>
@@ -28060,8 +28060,39 @@
         </p:nvCxnSpPr>
         <p:spPr>
           <a:xfrm xmlns:a="http://schemas.openxmlformats.org/drawingml/2006/main" flipH="1">
-            <a:off x="7620000" y="5214938"/>
+            <a:off x="7620000" y="4953000"/>
             <a:ext cx="714375" cy="0"/>
+          </a:xfrm>
+          <a:prstGeom xmlns:a="http://schemas.openxmlformats.org/drawingml/2006/main" prst="straightConnector1">
+            <a:avLst/>
+          </a:prstGeom>
+          <a:ln xmlns:a="http://schemas.openxmlformats.org/drawingml/2006/main" w="19050">
+            <a:solidFill>
+              <a:srgbClr val="0E766E"/>
+            </a:solidFill>
+            <a:tailEnd type="arrow" w="med" len="med"/>
+          </a:ln>
+        </p:spPr>
+      </p:cxnSp>
+      <p:cxnSp>
+        <p:nvCxnSpPr>
+          <p:cNvPr id="14" name="">
+            <a:extLst xmlns:a="http://schemas.openxmlformats.org/drawingml/2006/main">
+              <a:ext uri="{FF2B5EF4-FFF2-40B4-BE49-F238E27FC236}">
+                <a16:creationId xmlns:a16="http://schemas.microsoft.com/office/drawing/2014/main" id="{961384E0-748C-40E1-BEDB-F90E9D8FD861}"/>
+              </a:ext>
+            </a:extLst>
+          </p:cNvPr>
+          <p:cNvCxnSpPr>
+            <a:stCxn xmlns:a="http://schemas.openxmlformats.org/drawingml/2006/main" id="6" idx="2"/>
+            <a:endCxn xmlns:a="http://schemas.openxmlformats.org/drawingml/2006/main" id="7" idx="0"/>
+          </p:cNvCxnSpPr>
+          <p:nvPr/>
+        </p:nvCxnSpPr>
+        <p:spPr>
+          <a:xfrm xmlns:a="http://schemas.openxmlformats.org/drawingml/2006/main">
+            <a:off x="9906000" y="3857625"/>
+            <a:ext cx="0" cy="619125"/>
           </a:xfrm>
           <a:prstGeom xmlns:a="http://schemas.openxmlformats.org/drawingml/2006/main" prst="straightConnector1">
             <a:avLst/>
@@ -28079,20 +28110,20 @@
           <p:cNvPr id="13" name="">
             <a:extLst xmlns:a="http://schemas.openxmlformats.org/drawingml/2006/main">
               <a:ext uri="{FF2B5EF4-FFF2-40B4-BE49-F238E27FC236}">
-                <a16:creationId xmlns:a16="http://schemas.microsoft.com/office/drawing/2014/main" id="{6268264F-074B-48FF-ACC9-27E4E6BEB977}"/>
+                <a16:creationId xmlns:a16="http://schemas.microsoft.com/office/drawing/2014/main" id="{FD61B183-1CD5-49F0-BD9C-42478C8DD23F}"/>
               </a:ext>
             </a:extLst>
           </p:cNvPr>
           <p:cNvCxnSpPr>
-            <a:stCxn xmlns:a="http://schemas.openxmlformats.org/drawingml/2006/main" id="6" idx="2"/>
-            <a:endCxn xmlns:a="http://schemas.openxmlformats.org/drawingml/2006/main" id="7" idx="0"/>
+            <a:stCxn xmlns:a="http://schemas.openxmlformats.org/drawingml/2006/main" id="5" idx="3"/>
+            <a:endCxn xmlns:a="http://schemas.openxmlformats.org/drawingml/2006/main" id="6" idx="1"/>
           </p:cNvCxnSpPr>
           <p:nvPr/>
         </p:nvCxnSpPr>
         <p:spPr>
           <a:xfrm xmlns:a="http://schemas.openxmlformats.org/drawingml/2006/main">
-            <a:off x="9906000" y="4000500"/>
-            <a:ext cx="0" cy="714375"/>
+            <a:off x="7620000" y="3286125"/>
+            <a:ext cx="714375" cy="0"/>
           </a:xfrm>
           <a:prstGeom xmlns:a="http://schemas.openxmlformats.org/drawingml/2006/main" prst="straightConnector1">
             <a:avLst/>
@@ -28110,38 +28141,7 @@
           <p:cNvPr id="12" name="">
             <a:extLst xmlns:a="http://schemas.openxmlformats.org/drawingml/2006/main">
               <a:ext uri="{FF2B5EF4-FFF2-40B4-BE49-F238E27FC236}">
-                <a16:creationId xmlns:a16="http://schemas.microsoft.com/office/drawing/2014/main" id="{988AAEF1-F209-48BD-AC78-B03B0DCC52E4}"/>
-              </a:ext>
-            </a:extLst>
-          </p:cNvPr>
-          <p:cNvCxnSpPr>
-            <a:stCxn xmlns:a="http://schemas.openxmlformats.org/drawingml/2006/main" id="5" idx="3"/>
-            <a:endCxn xmlns:a="http://schemas.openxmlformats.org/drawingml/2006/main" id="6" idx="1"/>
-          </p:cNvCxnSpPr>
-          <p:nvPr/>
-        </p:nvCxnSpPr>
-        <p:spPr>
-          <a:xfrm xmlns:a="http://schemas.openxmlformats.org/drawingml/2006/main">
-            <a:off x="7620000" y="3429000"/>
-            <a:ext cx="714375" cy="0"/>
-          </a:xfrm>
-          <a:prstGeom xmlns:a="http://schemas.openxmlformats.org/drawingml/2006/main" prst="straightConnector1">
-            <a:avLst/>
-          </a:prstGeom>
-          <a:ln xmlns:a="http://schemas.openxmlformats.org/drawingml/2006/main" w="19050">
-            <a:solidFill>
-              <a:srgbClr val="0E766E"/>
-            </a:solidFill>
-            <a:tailEnd type="arrow" w="med" len="med"/>
-          </a:ln>
-        </p:spPr>
-      </p:cxnSp>
-      <p:cxnSp>
-        <p:nvCxnSpPr>
-          <p:cNvPr id="11" name="">
-            <a:extLst xmlns:a="http://schemas.openxmlformats.org/drawingml/2006/main">
-              <a:ext uri="{FF2B5EF4-FFF2-40B4-BE49-F238E27FC236}">
-                <a16:creationId xmlns:a16="http://schemas.microsoft.com/office/drawing/2014/main" id="{26BF8A20-1F1B-41F2-A8B5-8B93B96F41F5}"/>
+                <a16:creationId xmlns:a16="http://schemas.microsoft.com/office/drawing/2014/main" id="{FE43664C-FC8B-46C6-8549-FFE97C5423B4}"/>
               </a:ext>
             </a:extLst>
           </p:cNvPr>
@@ -28153,8 +28153,8 @@
         </p:nvCxnSpPr>
         <p:spPr>
           <a:xfrm xmlns:a="http://schemas.openxmlformats.org/drawingml/2006/main" flipV="1">
-            <a:off x="3762375" y="3429000"/>
-            <a:ext cx="714375" cy="738188"/>
+            <a:off x="3762375" y="3286125"/>
+            <a:ext cx="714375" cy="690563"/>
           </a:xfrm>
           <a:prstGeom xmlns:a="http://schemas.openxmlformats.org/drawingml/2006/main" prst="bentConnector3">
             <a:avLst>
@@ -28171,10 +28171,10 @@
       </p:cxnSp>
       <p:cxnSp>
         <p:nvCxnSpPr>
-          <p:cNvPr id="10" name="">
+          <p:cNvPr id="11" name="">
             <a:extLst xmlns:a="http://schemas.openxmlformats.org/drawingml/2006/main">
               <a:ext uri="{FF2B5EF4-FFF2-40B4-BE49-F238E27FC236}">
-                <a16:creationId xmlns:a16="http://schemas.microsoft.com/office/drawing/2014/main" id="{474FBE73-F4A2-4D79-83C6-743B8913F0C0}"/>
+                <a16:creationId xmlns:a16="http://schemas.microsoft.com/office/drawing/2014/main" id="{A74678C3-C4DC-4FA7-8414-6EBB715D3CDD}"/>
               </a:ext>
             </a:extLst>
           </p:cNvPr>
@@ -28186,8 +28186,8 @@
         </p:nvCxnSpPr>
         <p:spPr>
           <a:xfrm xmlns:a="http://schemas.openxmlformats.org/drawingml/2006/main">
-            <a:off x="3762375" y="2738438"/>
-            <a:ext cx="714375" cy="690563"/>
+            <a:off x="3762375" y="2690813"/>
+            <a:ext cx="714375" cy="595313"/>
           </a:xfrm>
           <a:prstGeom xmlns:a="http://schemas.openxmlformats.org/drawingml/2006/main" prst="bentConnector3">
             <a:avLst>
@@ -28204,10 +28204,10 @@
       </p:cxnSp>
       <p:sp>
         <p:nvSpPr>
-          <p:cNvPr id="16" name="">
+          <p:cNvPr id="17" name="">
             <a:extLst xmlns:a="http://schemas.openxmlformats.org/drawingml/2006/main">
               <a:ext uri="{FF2B5EF4-FFF2-40B4-BE49-F238E27FC236}">
-                <a16:creationId xmlns:a16="http://schemas.microsoft.com/office/drawing/2014/main" id="{2C112FFE-6234-4DD1-AFDF-95F4990EE247}"/>
+                <a16:creationId xmlns:a16="http://schemas.microsoft.com/office/drawing/2014/main" id="{C9CCDAE7-07DB-4072-A31A-7B8427BFFCC8}"/>
               </a:ext>
             </a:extLst>
           </p:cNvPr>
@@ -28363,7 +28363,7 @@
           <p:cNvPr id="2" name="">
             <a:extLst xmlns:a="http://schemas.openxmlformats.org/drawingml/2006/main">
               <a:ext uri="{FF2B5EF4-FFF2-40B4-BE49-F238E27FC236}">
-                <a16:creationId xmlns:a16="http://schemas.microsoft.com/office/drawing/2014/main" id="{E83FAD78-A34B-4DC3-B83B-8F481B05AED5}"/>
+                <a16:creationId xmlns:a16="http://schemas.microsoft.com/office/drawing/2014/main" id="{26F90DB8-0450-4FFA-B65F-69635D59CB50}"/>
               </a:ext>
             </a:extLst>
           </p:cNvPr>
@@ -28519,7 +28519,7 @@
           <p:cNvPr id="3" name="">
             <a:extLst xmlns:a="http://schemas.openxmlformats.org/drawingml/2006/main">
               <a:ext uri="{FF2B5EF4-FFF2-40B4-BE49-F238E27FC236}">
-                <a16:creationId xmlns:a16="http://schemas.microsoft.com/office/drawing/2014/main" id="{002C0752-24EC-4C08-AD1E-B9B2E3A55881}"/>
+                <a16:creationId xmlns:a16="http://schemas.microsoft.com/office/drawing/2014/main" id="{E60AAAED-514D-46C1-A0EF-BA863DEA7BB1}"/>
               </a:ext>
             </a:extLst>
           </p:cNvPr>
@@ -28530,7 +28530,7 @@
         </p:nvSpPr>
         <p:spPr>
           <a:xfrm xmlns:a="http://schemas.openxmlformats.org/drawingml/2006/main">
-            <a:off x="619125" y="2238375"/>
+            <a:off x="619125" y="2190750"/>
             <a:ext cx="3143250" cy="1000125"/>
           </a:xfrm>
           <a:prstGeom xmlns:a="http://schemas.openxmlformats.org/drawingml/2006/main" prst="rect">
@@ -28702,7 +28702,7 @@
           <p:cNvPr id="4" name="">
             <a:extLst xmlns:a="http://schemas.openxmlformats.org/drawingml/2006/main">
               <a:ext uri="{FF2B5EF4-FFF2-40B4-BE49-F238E27FC236}">
-                <a16:creationId xmlns:a16="http://schemas.microsoft.com/office/drawing/2014/main" id="{427D5CFB-DCF9-44E9-9D80-5AA559DD5C6B}"/>
+                <a16:creationId xmlns:a16="http://schemas.microsoft.com/office/drawing/2014/main" id="{22D3BE8B-87EA-4402-9CDE-14ABA139D708}"/>
               </a:ext>
             </a:extLst>
           </p:cNvPr>
@@ -28713,7 +28713,7 @@
         </p:nvSpPr>
         <p:spPr>
           <a:xfrm xmlns:a="http://schemas.openxmlformats.org/drawingml/2006/main">
-            <a:off x="619125" y="3667125"/>
+            <a:off x="619125" y="3476625"/>
             <a:ext cx="3143250" cy="1000125"/>
           </a:xfrm>
           <a:prstGeom xmlns:a="http://schemas.openxmlformats.org/drawingml/2006/main" prst="rect">
@@ -28885,7 +28885,7 @@
           <p:cNvPr id="5" name="">
             <a:extLst xmlns:a="http://schemas.openxmlformats.org/drawingml/2006/main">
               <a:ext uri="{FF2B5EF4-FFF2-40B4-BE49-F238E27FC236}">
-                <a16:creationId xmlns:a16="http://schemas.microsoft.com/office/drawing/2014/main" id="{EC24A4DA-B563-446D-913D-AA403CB31F3D}"/>
+                <a16:creationId xmlns:a16="http://schemas.microsoft.com/office/drawing/2014/main" id="{B77547F9-3753-453F-ADB7-F732F1FDBB9E}"/>
               </a:ext>
             </a:extLst>
           </p:cNvPr>
@@ -28896,7 +28896,7 @@
         </p:nvSpPr>
         <p:spPr>
           <a:xfrm xmlns:a="http://schemas.openxmlformats.org/drawingml/2006/main">
-            <a:off x="4476750" y="2857500"/>
+            <a:off x="4476750" y="2714625"/>
             <a:ext cx="3143250" cy="1143000"/>
           </a:xfrm>
           <a:prstGeom xmlns:a="http://schemas.openxmlformats.org/drawingml/2006/main" prst="rect">
@@ -29068,7 +29068,7 @@
           <p:cNvPr id="6" name="">
             <a:extLst xmlns:a="http://schemas.openxmlformats.org/drawingml/2006/main">
               <a:ext uri="{FF2B5EF4-FFF2-40B4-BE49-F238E27FC236}">
-                <a16:creationId xmlns:a16="http://schemas.microsoft.com/office/drawing/2014/main" id="{180F435E-C602-43CF-8024-9978F343178B}"/>
+                <a16:creationId xmlns:a16="http://schemas.microsoft.com/office/drawing/2014/main" id="{E8403D3B-641D-422D-B93C-1B7374C9519B}"/>
               </a:ext>
             </a:extLst>
           </p:cNvPr>
@@ -29079,7 +29079,7 @@
         </p:nvSpPr>
         <p:spPr>
           <a:xfrm xmlns:a="http://schemas.openxmlformats.org/drawingml/2006/main">
-            <a:off x="8334375" y="2857500"/>
+            <a:off x="8334375" y="2714625"/>
             <a:ext cx="3143250" cy="1143000"/>
           </a:xfrm>
           <a:prstGeom xmlns:a="http://schemas.openxmlformats.org/drawingml/2006/main" prst="rect">
@@ -29251,7 +29251,7 @@
           <p:cNvPr id="7" name="">
             <a:extLst xmlns:a="http://schemas.openxmlformats.org/drawingml/2006/main">
               <a:ext uri="{FF2B5EF4-FFF2-40B4-BE49-F238E27FC236}">
-                <a16:creationId xmlns:a16="http://schemas.microsoft.com/office/drawing/2014/main" id="{2F7A2895-5832-4C4F-85FF-85084988B813}"/>
+                <a16:creationId xmlns:a16="http://schemas.microsoft.com/office/drawing/2014/main" id="{ABF16DA7-159B-4753-A24A-864349BC7A33}"/>
               </a:ext>
             </a:extLst>
           </p:cNvPr>
@@ -29262,8 +29262,8 @@
         </p:nvSpPr>
         <p:spPr>
           <a:xfrm xmlns:a="http://schemas.openxmlformats.org/drawingml/2006/main">
-            <a:off x="8334375" y="4714875"/>
-            <a:ext cx="3143250" cy="1000125"/>
+            <a:off x="8334375" y="4476750"/>
+            <a:ext cx="3143250" cy="952500"/>
           </a:xfrm>
           <a:prstGeom xmlns:a="http://schemas.openxmlformats.org/drawingml/2006/main" prst="rect">
             <a:avLst/>
@@ -29434,7 +29434,7 @@
           <p:cNvPr id="8" name="">
             <a:extLst xmlns:a="http://schemas.openxmlformats.org/drawingml/2006/main">
               <a:ext uri="{FF2B5EF4-FFF2-40B4-BE49-F238E27FC236}">
-                <a16:creationId xmlns:a16="http://schemas.microsoft.com/office/drawing/2014/main" id="{E106CBCA-7437-462B-B5F2-7E23CBF2C9B6}"/>
+                <a16:creationId xmlns:a16="http://schemas.microsoft.com/office/drawing/2014/main" id="{CD692216-ABA8-4C23-A0D4-D7A76F3FE523}"/>
               </a:ext>
             </a:extLst>
           </p:cNvPr>
@@ -29445,8 +29445,8 @@
         </p:nvSpPr>
         <p:spPr>
           <a:xfrm xmlns:a="http://schemas.openxmlformats.org/drawingml/2006/main">
-            <a:off x="4476750" y="4714875"/>
-            <a:ext cx="3143250" cy="1000125"/>
+            <a:off x="4476750" y="4476750"/>
+            <a:ext cx="3143250" cy="952500"/>
           </a:xfrm>
           <a:prstGeom xmlns:a="http://schemas.openxmlformats.org/drawingml/2006/main" prst="rect">
             <a:avLst/>
@@ -29617,7 +29617,7 @@
           <p:cNvPr id="9" name="">
             <a:extLst xmlns:a="http://schemas.openxmlformats.org/drawingml/2006/main">
               <a:ext uri="{FF2B5EF4-FFF2-40B4-BE49-F238E27FC236}">
-                <a16:creationId xmlns:a16="http://schemas.microsoft.com/office/drawing/2014/main" id="{60AF1294-CAA7-48DA-B171-5EC31F6EC06D}"/>
+                <a16:creationId xmlns:a16="http://schemas.microsoft.com/office/drawing/2014/main" id="{AA5F746D-A5CE-4DBE-92B1-E669F8FB875C}"/>
               </a:ext>
             </a:extLst>
           </p:cNvPr>
@@ -29628,8 +29628,8 @@
         </p:nvSpPr>
         <p:spPr>
           <a:xfrm xmlns:a="http://schemas.openxmlformats.org/drawingml/2006/main">
-            <a:off x="619125" y="5191125"/>
-            <a:ext cx="3143250" cy="762000"/>
+            <a:off x="619125" y="5095875"/>
+            <a:ext cx="3143250" cy="666750"/>
           </a:xfrm>
           <a:prstGeom xmlns:a="http://schemas.openxmlformats.org/drawingml/2006/main" prst="rect">
             <a:avLst/>
@@ -29647,7 +29647,7 @@
           <a:bodyPr xmlns:a="http://schemas.openxmlformats.org/drawingml/2006/main"/>
           <a:lstStyle xmlns:a="http://schemas.openxmlformats.org/drawingml/2006/main">
             <a:defPPr>
-              <a:defRPr sz="1650">
+              <a:defRPr sz="1350">
                 <a:solidFill>
                   <a:srgbClr val="17242B"/>
                 </a:solidFill>
@@ -29657,7 +29657,7 @@
               </a:defRPr>
             </a:defPPr>
             <a:lvl1pPr>
-              <a:defRPr sz="1650">
+              <a:defRPr sz="1350">
                 <a:solidFill>
                   <a:srgbClr val="17242B"/>
                 </a:solidFill>
@@ -29667,7 +29667,7 @@
               </a:defRPr>
             </a:lvl1pPr>
             <a:lvl2pPr>
-              <a:defRPr sz="1650">
+              <a:defRPr sz="1350">
                 <a:solidFill>
                   <a:srgbClr val="17242B"/>
                 </a:solidFill>
@@ -29677,7 +29677,7 @@
               </a:defRPr>
             </a:lvl2pPr>
             <a:lvl3pPr>
-              <a:defRPr sz="1650">
+              <a:defRPr sz="1350">
                 <a:solidFill>
                   <a:srgbClr val="17242B"/>
                 </a:solidFill>
@@ -29687,7 +29687,7 @@
               </a:defRPr>
             </a:lvl3pPr>
             <a:lvl4pPr>
-              <a:defRPr sz="1650">
+              <a:defRPr sz="1350">
                 <a:solidFill>
                   <a:srgbClr val="17242B"/>
                 </a:solidFill>
@@ -29697,7 +29697,7 @@
               </a:defRPr>
             </a:lvl4pPr>
             <a:lvl5pPr>
-              <a:defRPr sz="1650">
+              <a:defRPr sz="1350">
                 <a:solidFill>
                   <a:srgbClr val="17242B"/>
                 </a:solidFill>
@@ -29707,7 +29707,7 @@
               </a:defRPr>
             </a:lvl5pPr>
             <a:lvl6pPr>
-              <a:defRPr sz="1650">
+              <a:defRPr sz="1350">
                 <a:solidFill>
                   <a:srgbClr val="17242B"/>
                 </a:solidFill>
@@ -29717,7 +29717,7 @@
               </a:defRPr>
             </a:lvl6pPr>
             <a:lvl7pPr>
-              <a:defRPr sz="1650">
+              <a:defRPr sz="1350">
                 <a:solidFill>
                   <a:srgbClr val="17242B"/>
                 </a:solidFill>
@@ -29727,7 +29727,7 @@
               </a:defRPr>
             </a:lvl7pPr>
             <a:lvl8pPr>
-              <a:defRPr sz="1650">
+              <a:defRPr sz="1350">
                 <a:solidFill>
                   <a:srgbClr val="17242B"/>
                 </a:solidFill>
@@ -29737,7 +29737,7 @@
               </a:defRPr>
             </a:lvl8pPr>
             <a:lvl9pPr>
-              <a:defRPr sz="1650">
+              <a:defRPr sz="1350">
                 <a:solidFill>
                   <a:srgbClr val="17242B"/>
                 </a:solidFill>
@@ -29749,7 +29749,7 @@
           </a:lstStyle>
           <a:p xmlns:a="http://schemas.openxmlformats.org/drawingml/2006/main">
             <a:pPr>
-              <a:defRPr sz="1650">
+              <a:defRPr sz="1350">
                 <a:solidFill>
                   <a:srgbClr val="17242B"/>
                 </a:solidFill>
@@ -29759,7 +29759,7 @@
               </a:defRPr>
             </a:pPr>
             <a:r>
-              <a:rPr sz="1650">
+              <a:rPr sz="1350">
                 <a:solidFill>
                   <a:srgbClr val="17242B"/>
                 </a:solidFill>
@@ -29772,7 +29772,7 @@
           </a:p>
           <a:p xmlns:a="http://schemas.openxmlformats.org/drawingml/2006/main">
             <a:pPr>
-              <a:defRPr sz="1650">
+              <a:defRPr sz="1350">
                 <a:solidFill>
                   <a:srgbClr val="17242B"/>
                 </a:solidFill>
@@ -29782,7 +29782,7 @@
               </a:defRPr>
             </a:pPr>
             <a:r>
-              <a:rPr sz="1650">
+              <a:rPr sz="1350">
                 <a:solidFill>
                   <a:srgbClr val="17242B"/>
                 </a:solidFill>
@@ -29797,10 +29797,216 @@
       </p:sp>
       <p:sp>
         <p:nvSpPr>
-          <p:cNvPr id="15" name="">
+          <p:cNvPr id="10" name="">
             <a:extLst xmlns:a="http://schemas.openxmlformats.org/drawingml/2006/main">
               <a:ext uri="{FF2B5EF4-FFF2-40B4-BE49-F238E27FC236}">
-                <a16:creationId xmlns:a16="http://schemas.microsoft.com/office/drawing/2014/main" id="{BF06A41B-8FF4-49A0-9536-8CFB6B510FF2}"/>
+                <a16:creationId xmlns:a16="http://schemas.microsoft.com/office/drawing/2014/main" id="{AEDD1C0D-7E4B-4D8A-B9E8-7FBC55E0B760}"/>
+              </a:ext>
+            </a:extLst>
+          </p:cNvPr>
+          <p:cNvSpPr>
+            <a:spLocks xmlns:a="http://schemas.openxmlformats.org/drawingml/2006/main" noGrp="1"/>
+          </p:cNvSpPr>
+          <p:nvPr/>
+        </p:nvSpPr>
+        <p:spPr>
+          <a:xfrm xmlns:a="http://schemas.openxmlformats.org/drawingml/2006/main">
+            <a:off x="4476750" y="5524500"/>
+            <a:ext cx="3143250" cy="714375"/>
+          </a:xfrm>
+          <a:prstGeom xmlns:a="http://schemas.openxmlformats.org/drawingml/2006/main" prst="rect">
+            <a:avLst/>
+          </a:prstGeom>
+          <a:solidFill xmlns:a="http://schemas.openxmlformats.org/drawingml/2006/main">
+            <a:srgbClr val="F1F2EF"/>
+          </a:solidFill>
+          <a:ln xmlns:a="http://schemas.openxmlformats.org/drawingml/2006/main" w="9525">
+            <a:solidFill>
+              <a:srgbClr val="C8DCD5"/>
+            </a:solidFill>
+          </a:ln>
+        </p:spPr>
+        <p:txBody>
+          <a:bodyPr xmlns:a="http://schemas.openxmlformats.org/drawingml/2006/main"/>
+          <a:lstStyle xmlns:a="http://schemas.openxmlformats.org/drawingml/2006/main">
+            <a:defPPr>
+              <a:defRPr sz="1050">
+                <a:solidFill>
+                  <a:srgbClr val="17242B"/>
+                </a:solidFill>
+                <a:latin typeface="Arial"/>
+                <a:ea typeface="Arial"/>
+                <a:cs typeface="Arial"/>
+              </a:defRPr>
+            </a:defPPr>
+            <a:lvl1pPr>
+              <a:defRPr sz="1050">
+                <a:solidFill>
+                  <a:srgbClr val="17242B"/>
+                </a:solidFill>
+                <a:latin typeface="Arial"/>
+                <a:ea typeface="Arial"/>
+                <a:cs typeface="Arial"/>
+              </a:defRPr>
+            </a:lvl1pPr>
+            <a:lvl2pPr>
+              <a:defRPr sz="1050">
+                <a:solidFill>
+                  <a:srgbClr val="17242B"/>
+                </a:solidFill>
+                <a:latin typeface="Arial"/>
+                <a:ea typeface="Arial"/>
+                <a:cs typeface="Arial"/>
+              </a:defRPr>
+            </a:lvl2pPr>
+            <a:lvl3pPr>
+              <a:defRPr sz="1050">
+                <a:solidFill>
+                  <a:srgbClr val="17242B"/>
+                </a:solidFill>
+                <a:latin typeface="Arial"/>
+                <a:ea typeface="Arial"/>
+                <a:cs typeface="Arial"/>
+              </a:defRPr>
+            </a:lvl3pPr>
+            <a:lvl4pPr>
+              <a:defRPr sz="1050">
+                <a:solidFill>
+                  <a:srgbClr val="17242B"/>
+                </a:solidFill>
+                <a:latin typeface="Arial"/>
+                <a:ea typeface="Arial"/>
+                <a:cs typeface="Arial"/>
+              </a:defRPr>
+            </a:lvl4pPr>
+            <a:lvl5pPr>
+              <a:defRPr sz="1050">
+                <a:solidFill>
+                  <a:srgbClr val="17242B"/>
+                </a:solidFill>
+                <a:latin typeface="Arial"/>
+                <a:ea typeface="Arial"/>
+                <a:cs typeface="Arial"/>
+              </a:defRPr>
+            </a:lvl5pPr>
+            <a:lvl6pPr>
+              <a:defRPr sz="1050">
+                <a:solidFill>
+                  <a:srgbClr val="17242B"/>
+                </a:solidFill>
+                <a:latin typeface="Arial"/>
+                <a:ea typeface="Arial"/>
+                <a:cs typeface="Arial"/>
+              </a:defRPr>
+            </a:lvl6pPr>
+            <a:lvl7pPr>
+              <a:defRPr sz="1050">
+                <a:solidFill>
+                  <a:srgbClr val="17242B"/>
+                </a:solidFill>
+                <a:latin typeface="Arial"/>
+                <a:ea typeface="Arial"/>
+                <a:cs typeface="Arial"/>
+              </a:defRPr>
+            </a:lvl7pPr>
+            <a:lvl8pPr>
+              <a:defRPr sz="1050">
+                <a:solidFill>
+                  <a:srgbClr val="17242B"/>
+                </a:solidFill>
+                <a:latin typeface="Arial"/>
+                <a:ea typeface="Arial"/>
+                <a:cs typeface="Arial"/>
+              </a:defRPr>
+            </a:lvl8pPr>
+            <a:lvl9pPr>
+              <a:defRPr sz="1050">
+                <a:solidFill>
+                  <a:srgbClr val="17242B"/>
+                </a:solidFill>
+                <a:latin typeface="Arial"/>
+                <a:ea typeface="Arial"/>
+                <a:cs typeface="Arial"/>
+              </a:defRPr>
+            </a:lvl9pPr>
+          </a:lstStyle>
+          <a:p xmlns:a="http://schemas.openxmlformats.org/drawingml/2006/main">
+            <a:pPr>
+              <a:defRPr sz="1050">
+                <a:solidFill>
+                  <a:srgbClr val="17242B"/>
+                </a:solidFill>
+                <a:latin typeface="Arial"/>
+                <a:ea typeface="Arial"/>
+                <a:cs typeface="Arial"/>
+              </a:defRPr>
+            </a:pPr>
+            <a:r>
+              <a:rPr sz="1050">
+                <a:solidFill>
+                  <a:srgbClr val="17242B"/>
+                </a:solidFill>
+                <a:latin typeface="Arial"/>
+                <a:ea typeface="Arial"/>
+                <a:cs typeface="Arial"/>
+              </a:rPr>
+              <a:t>Bayesian timing posterior</a:t>
+            </a:r>
+          </a:p>
+          <a:p xmlns:a="http://schemas.openxmlformats.org/drawingml/2006/main">
+            <a:pPr>
+              <a:defRPr sz="1050">
+                <a:solidFill>
+                  <a:srgbClr val="17242B"/>
+                </a:solidFill>
+                <a:latin typeface="Arial"/>
+                <a:ea typeface="Arial"/>
+                <a:cs typeface="Arial"/>
+              </a:defRPr>
+            </a:pPr>
+            <a:r>
+              <a:rPr sz="1050">
+                <a:solidFill>
+                  <a:srgbClr val="17242B"/>
+                </a:solidFill>
+                <a:latin typeface="Arial"/>
+                <a:ea typeface="Arial"/>
+                <a:cs typeface="Arial"/>
+              </a:rPr>
+              <a:t>Evaluated separately; not used in score or alerts</a:t>
+            </a:r>
+          </a:p>
+          <a:p xmlns:a="http://schemas.openxmlformats.org/drawingml/2006/main">
+            <a:pPr>
+              <a:defRPr sz="1050">
+                <a:solidFill>
+                  <a:srgbClr val="17242B"/>
+                </a:solidFill>
+                <a:latin typeface="Arial"/>
+                <a:ea typeface="Arial"/>
+                <a:cs typeface="Arial"/>
+              </a:defRPr>
+            </a:pPr>
+            <a:r>
+              <a:rPr sz="1050">
+                <a:solidFill>
+                  <a:srgbClr val="17242B"/>
+                </a:solidFill>
+                <a:latin typeface="Arial"/>
+                <a:ea typeface="Arial"/>
+                <a:cs typeface="Arial"/>
+              </a:rPr>
+              <a:t>Brier 0.098 vs logistic 0.117</a:t>
+            </a:r>
+          </a:p>
+        </p:txBody>
+      </p:sp>
+      <p:sp>
+        <p:nvSpPr>
+          <p:cNvPr id="16" name="">
+            <a:extLst xmlns:a="http://schemas.openxmlformats.org/drawingml/2006/main">
+              <a:ext uri="{FF2B5EF4-FFF2-40B4-BE49-F238E27FC236}">
+                <a16:creationId xmlns:a16="http://schemas.microsoft.com/office/drawing/2014/main" id="{D3131833-1F78-4607-9B7F-61A7E343548D}"/>
               </a:ext>
             </a:extLst>
           </p:cNvPr>
@@ -29954,7 +30160,7 @@
     </p:spTree>
     <p:extLst>
       <p:ext uri="{BB962C8B-B14F-4D97-AF65-F5344CB8AC3E}">
-        <p14:creationId xmlns:p14="http://schemas.microsoft.com/office/powerpoint/2010/main" val="312044265"/>
+        <p14:creationId xmlns:p14="http://schemas.microsoft.com/office/powerpoint/2010/main" val="1859919343"/>
       </p:ext>
     </p:extLst>
   </p:cSld>
@@ -29985,7 +30191,7 @@
           <p:cNvPr id="8" name="">
             <a:extLst xmlns:a="http://schemas.openxmlformats.org/drawingml/2006/main">
               <a:ext uri="{FF2B5EF4-FFF2-40B4-BE49-F238E27FC236}">
-                <a16:creationId xmlns:a16="http://schemas.microsoft.com/office/drawing/2014/main" id="{D07938BD-8FE9-41E9-86B5-9E6344986098}"/>
+                <a16:creationId xmlns:a16="http://schemas.microsoft.com/office/drawing/2014/main" id="{BE58C9DB-A3F1-4A01-A1CA-6309D4F57675}"/>
               </a:ext>
             </a:extLst>
           </p:cNvPr>
@@ -30141,7 +30347,7 @@
           <p:cNvPr id="2" name="">
             <a:extLst xmlns:a="http://schemas.openxmlformats.org/drawingml/2006/main">
               <a:ext uri="{FF2B5EF4-FFF2-40B4-BE49-F238E27FC236}">
-                <a16:creationId xmlns:a16="http://schemas.microsoft.com/office/drawing/2014/main" id="{3CC82100-8270-43B6-8273-32F877474DD7}"/>
+                <a16:creationId xmlns:a16="http://schemas.microsoft.com/office/drawing/2014/main" id="{D2905CF1-D9F4-4FDC-97D2-E9AE031F6A61}"/>
               </a:ext>
             </a:extLst>
           </p:cNvPr>
@@ -30297,7 +30503,7 @@
           <p:cNvPr id="3" name="">
             <a:extLst xmlns:a="http://schemas.openxmlformats.org/drawingml/2006/main">
               <a:ext uri="{FF2B5EF4-FFF2-40B4-BE49-F238E27FC236}">
-                <a16:creationId xmlns:a16="http://schemas.microsoft.com/office/drawing/2014/main" id="{DC9000A0-E4DB-46E6-9333-15AA42F542FB}"/>
+                <a16:creationId xmlns:a16="http://schemas.microsoft.com/office/drawing/2014/main" id="{0D1BFB5D-1FB6-4ECC-B0CD-C747C4248817}"/>
               </a:ext>
             </a:extLst>
           </p:cNvPr>
@@ -30453,7 +30659,7 @@
           <p:cNvPr id="4" name="">
             <a:extLst xmlns:a="http://schemas.openxmlformats.org/drawingml/2006/main">
               <a:ext uri="{FF2B5EF4-FFF2-40B4-BE49-F238E27FC236}">
-                <a16:creationId xmlns:a16="http://schemas.microsoft.com/office/drawing/2014/main" id="{C79D0BF1-CA85-4EBB-AEDC-85B18ECD1823}"/>
+                <a16:creationId xmlns:a16="http://schemas.microsoft.com/office/drawing/2014/main" id="{8ADBD830-5D20-4C0B-B90D-09ED8859C70C}"/>
               </a:ext>
             </a:extLst>
           </p:cNvPr>
@@ -30609,7 +30815,7 @@
           <p:cNvPr id="5" name="">
             <a:extLst xmlns:a="http://schemas.openxmlformats.org/drawingml/2006/main">
               <a:ext uri="{FF2B5EF4-FFF2-40B4-BE49-F238E27FC236}">
-                <a16:creationId xmlns:a16="http://schemas.microsoft.com/office/drawing/2014/main" id="{B1C540D1-7E99-4C55-8079-A5B4EE02E7A4}"/>
+                <a16:creationId xmlns:a16="http://schemas.microsoft.com/office/drawing/2014/main" id="{4398F15B-8062-4997-A571-101CBE539702}"/>
               </a:ext>
             </a:extLst>
           </p:cNvPr>
@@ -30765,7 +30971,7 @@
           <p:cNvPr id="6" name="">
             <a:extLst xmlns:a="http://schemas.openxmlformats.org/drawingml/2006/main">
               <a:ext uri="{FF2B5EF4-FFF2-40B4-BE49-F238E27FC236}">
-                <a16:creationId xmlns:a16="http://schemas.microsoft.com/office/drawing/2014/main" id="{17912386-EAC0-4648-8628-B7B29BACD8A9}"/>
+                <a16:creationId xmlns:a16="http://schemas.microsoft.com/office/drawing/2014/main" id="{19F4513A-EB25-4CA7-BCD4-CE796833CEB9}"/>
               </a:ext>
             </a:extLst>
           </p:cNvPr>
@@ -30921,7 +31127,7 @@
           <p:cNvPr id="7" name="">
             <a:extLst xmlns:a="http://schemas.openxmlformats.org/drawingml/2006/main">
               <a:ext uri="{FF2B5EF4-FFF2-40B4-BE49-F238E27FC236}">
-                <a16:creationId xmlns:a16="http://schemas.microsoft.com/office/drawing/2014/main" id="{69EDF335-9C8A-4FA3-857C-5C639CC5A10E}"/>
+                <a16:creationId xmlns:a16="http://schemas.microsoft.com/office/drawing/2014/main" id="{BD6FB4D4-B0BF-4A38-BE98-2CF5A6EC628E}"/>
               </a:ext>
             </a:extLst>
           </p:cNvPr>
@@ -31075,7 +31281,7 @@
     </p:spTree>
     <p:extLst>
       <p:ext uri="{BB962C8B-B14F-4D97-AF65-F5344CB8AC3E}">
-        <p14:creationId xmlns:p14="http://schemas.microsoft.com/office/powerpoint/2010/main" val="1174626483"/>
+        <p14:creationId xmlns:p14="http://schemas.microsoft.com/office/powerpoint/2010/main" val="1933279692"/>
       </p:ext>
     </p:extLst>
   </p:cSld>
@@ -31106,7 +31312,7 @@
           <p:cNvPr id="5" name="">
             <a:extLst xmlns:a="http://schemas.openxmlformats.org/drawingml/2006/main">
               <a:ext uri="{FF2B5EF4-FFF2-40B4-BE49-F238E27FC236}">
-                <a16:creationId xmlns:a16="http://schemas.microsoft.com/office/drawing/2014/main" id="{87CED74E-6897-40C8-86F4-15808AC556BE}"/>
+                <a16:creationId xmlns:a16="http://schemas.microsoft.com/office/drawing/2014/main" id="{17963BE7-2FA7-44E3-9256-5CF3755046E6}"/>
               </a:ext>
             </a:extLst>
           </p:cNvPr>
@@ -31262,7 +31468,7 @@
           <p:cNvPr id="2" name="">
             <a:extLst xmlns:a="http://schemas.openxmlformats.org/drawingml/2006/main">
               <a:ext uri="{FF2B5EF4-FFF2-40B4-BE49-F238E27FC236}">
-                <a16:creationId xmlns:a16="http://schemas.microsoft.com/office/drawing/2014/main" id="{82154E5F-7369-4DB8-9864-9271B5641B90}"/>
+                <a16:creationId xmlns:a16="http://schemas.microsoft.com/office/drawing/2014/main" id="{4616D9DB-B6F7-4474-A493-E0D27F87FE73}"/>
               </a:ext>
             </a:extLst>
           </p:cNvPr>
@@ -31408,7 +31614,7 @@
                 <a:ea typeface="Arial"/>
                 <a:cs typeface="Arial"/>
               </a:rPr>
-              <a:t>Seed means describe the current generator, not clinical forecasting</a:t>
+              <a:t>Validation retained the calendar fallback for every tier; sensors add no validated gain before the temperature shift appears.</a:t>
             </a:r>
           </a:p>
         </p:txBody>
@@ -31418,7 +31624,7 @@
           <p:cNvPr id="3" name="">
             <a:extLst xmlns:a="http://schemas.openxmlformats.org/drawingml/2006/main">
               <a:ext uri="{FF2B5EF4-FFF2-40B4-BE49-F238E27FC236}">
-                <a16:creationId xmlns:a16="http://schemas.microsoft.com/office/drawing/2014/main" id="{5275102F-FB22-45F9-9959-4C1038AA17B8}"/>
+                <a16:creationId xmlns:a16="http://schemas.microsoft.com/office/drawing/2014/main" id="{EEE756C1-0524-4D75-9342-8211550D6AB2}"/>
               </a:ext>
             </a:extLst>
           </p:cNvPr>
@@ -32359,7 +32565,7 @@
           <p:cNvPr id="4" name="">
             <a:extLst xmlns:a="http://schemas.openxmlformats.org/drawingml/2006/main">
               <a:ext uri="{FF2B5EF4-FFF2-40B4-BE49-F238E27FC236}">
-                <a16:creationId xmlns:a16="http://schemas.microsoft.com/office/drawing/2014/main" id="{939765B4-76C7-4785-8801-6AB646DA3DE1}"/>
+                <a16:creationId xmlns:a16="http://schemas.microsoft.com/office/drawing/2014/main" id="{D8580F3A-0B51-41E7-8511-6F4DD92112DD}"/>
               </a:ext>
             </a:extLst>
           </p:cNvPr>
@@ -32513,7 +32719,7 @@
     </p:spTree>
     <p:extLst>
       <p:ext uri="{BB962C8B-B14F-4D97-AF65-F5344CB8AC3E}">
-        <p14:creationId xmlns:p14="http://schemas.microsoft.com/office/powerpoint/2010/main" val="537403880"/>
+        <p14:creationId xmlns:p14="http://schemas.microsoft.com/office/powerpoint/2010/main" val="859902044"/>
       </p:ext>
     </p:extLst>
   </p:cSld>
@@ -32544,7 +32750,7 @@
           <p:cNvPr id="5" name="">
             <a:extLst xmlns:a="http://schemas.openxmlformats.org/drawingml/2006/main">
               <a:ext uri="{FF2B5EF4-FFF2-40B4-BE49-F238E27FC236}">
-                <a16:creationId xmlns:a16="http://schemas.microsoft.com/office/drawing/2014/main" id="{ABC4C162-C6A7-4351-8E86-B48916A6D6FA}"/>
+                <a16:creationId xmlns:a16="http://schemas.microsoft.com/office/drawing/2014/main" id="{0AE2C010-24C0-4717-BBFE-09C08A283C19}"/>
               </a:ext>
             </a:extLst>
           </p:cNvPr>
@@ -32700,7 +32906,7 @@
           <p:cNvPr id="2" name="">
             <a:extLst xmlns:a="http://schemas.openxmlformats.org/drawingml/2006/main">
               <a:ext uri="{FF2B5EF4-FFF2-40B4-BE49-F238E27FC236}">
-                <a16:creationId xmlns:a16="http://schemas.microsoft.com/office/drawing/2014/main" id="{D0E0945B-BC91-4DB8-8E8D-7BB80A87B48C}"/>
+                <a16:creationId xmlns:a16="http://schemas.microsoft.com/office/drawing/2014/main" id="{15FB740C-E017-43D3-B339-47719CB48754}"/>
               </a:ext>
             </a:extLst>
           </p:cNvPr>
@@ -32856,7 +33062,7 @@
           <p:cNvPr id="3" name="">
             <a:extLst xmlns:a="http://schemas.openxmlformats.org/drawingml/2006/main">
               <a:ext uri="{FF2B5EF4-FFF2-40B4-BE49-F238E27FC236}">
-                <a16:creationId xmlns:a16="http://schemas.microsoft.com/office/drawing/2014/main" id="{8DB19091-9616-43D2-BBE5-0171C2A3B4FF}"/>
+                <a16:creationId xmlns:a16="http://schemas.microsoft.com/office/drawing/2014/main" id="{F8B3134E-2CF2-47EC-B21A-61B020F18CBB}"/>
               </a:ext>
             </a:extLst>
           </p:cNvPr>
@@ -33797,7 +34003,7 @@
           <p:cNvPr id="4" name="">
             <a:extLst xmlns:a="http://schemas.openxmlformats.org/drawingml/2006/main">
               <a:ext uri="{FF2B5EF4-FFF2-40B4-BE49-F238E27FC236}">
-                <a16:creationId xmlns:a16="http://schemas.microsoft.com/office/drawing/2014/main" id="{82AD5E46-238D-42D6-9F9A-D5EE16F80116}"/>
+                <a16:creationId xmlns:a16="http://schemas.microsoft.com/office/drawing/2014/main" id="{66B61438-898E-457D-AE7D-5942B895CE4B}"/>
               </a:ext>
             </a:extLst>
           </p:cNvPr>
@@ -33951,7 +34157,7 @@
     </p:spTree>
     <p:extLst>
       <p:ext uri="{BB962C8B-B14F-4D97-AF65-F5344CB8AC3E}">
-        <p14:creationId xmlns:p14="http://schemas.microsoft.com/office/powerpoint/2010/main" val="1570246774"/>
+        <p14:creationId xmlns:p14="http://schemas.microsoft.com/office/powerpoint/2010/main" val="524096190"/>
       </p:ext>
     </p:extLst>
   </p:cSld>
@@ -33982,7 +34188,7 @@
           <p:cNvPr id="5" name="">
             <a:extLst xmlns:a="http://schemas.openxmlformats.org/drawingml/2006/main">
               <a:ext uri="{FF2B5EF4-FFF2-40B4-BE49-F238E27FC236}">
-                <a16:creationId xmlns:a16="http://schemas.microsoft.com/office/drawing/2014/main" id="{48A87C57-153F-44C0-9D7F-038B09A6C2D8}"/>
+                <a16:creationId xmlns:a16="http://schemas.microsoft.com/office/drawing/2014/main" id="{01C3B5CA-0629-4CB1-89A9-5A891F60750F}"/>
               </a:ext>
             </a:extLst>
           </p:cNvPr>
@@ -34138,7 +34344,7 @@
           <p:cNvPr id="2" name="">
             <a:extLst xmlns:a="http://schemas.openxmlformats.org/drawingml/2006/main">
               <a:ext uri="{FF2B5EF4-FFF2-40B4-BE49-F238E27FC236}">
-                <a16:creationId xmlns:a16="http://schemas.microsoft.com/office/drawing/2014/main" id="{8EC552EF-D010-4A81-BA1C-3E4272B15F86}"/>
+                <a16:creationId xmlns:a16="http://schemas.microsoft.com/office/drawing/2014/main" id="{854A2D14-5FAE-4222-B0DA-2DA4EC20536E}"/>
               </a:ext>
             </a:extLst>
           </p:cNvPr>
@@ -34294,7 +34500,7 @@
           <p:cNvPr id="3" name="">
             <a:extLst xmlns:a="http://schemas.openxmlformats.org/drawingml/2006/main">
               <a:ext uri="{FF2B5EF4-FFF2-40B4-BE49-F238E27FC236}">
-                <a16:creationId xmlns:a16="http://schemas.microsoft.com/office/drawing/2014/main" id="{6FDFB464-F805-4C3D-B274-8C1DCAA237F9}"/>
+                <a16:creationId xmlns:a16="http://schemas.microsoft.com/office/drawing/2014/main" id="{8C5F0D66-73BD-4B97-861A-5C8602ACBFC6}"/>
               </a:ext>
             </a:extLst>
           </p:cNvPr>
@@ -35235,7 +35441,7 @@
           <p:cNvPr id="4" name="">
             <a:extLst xmlns:a="http://schemas.openxmlformats.org/drawingml/2006/main">
               <a:ext uri="{FF2B5EF4-FFF2-40B4-BE49-F238E27FC236}">
-                <a16:creationId xmlns:a16="http://schemas.microsoft.com/office/drawing/2014/main" id="{D992C91A-8DB8-43C6-828C-94F719A703DA}"/>
+                <a16:creationId xmlns:a16="http://schemas.microsoft.com/office/drawing/2014/main" id="{F50C2023-60D2-4837-8EBD-18497F6CCD72}"/>
               </a:ext>
             </a:extLst>
           </p:cNvPr>
@@ -35389,7 +35595,7 @@
     </p:spTree>
     <p:extLst>
       <p:ext uri="{BB962C8B-B14F-4D97-AF65-F5344CB8AC3E}">
-        <p14:creationId xmlns:p14="http://schemas.microsoft.com/office/powerpoint/2010/main" val="299269848"/>
+        <p14:creationId xmlns:p14="http://schemas.microsoft.com/office/powerpoint/2010/main" val="1651941787"/>
       </p:ext>
     </p:extLst>
   </p:cSld>
